--- a/Chapter 13 Timeseries forecasting.pptx
+++ b/Chapter 13 Timeseries forecasting.pptx
@@ -5,10 +5,10 @@
     <p:sldMasterId id="2147483660" r:id="rId1"/>
   </p:sldMasterIdLst>
   <p:notesMasterIdLst>
-    <p:notesMasterId r:id="rId33"/>
+    <p:notesMasterId r:id="rId35"/>
   </p:notesMasterIdLst>
   <p:handoutMasterIdLst>
-    <p:handoutMasterId r:id="rId34"/>
+    <p:handoutMasterId r:id="rId36"/>
   </p:handoutMasterIdLst>
   <p:sldIdLst>
     <p:sldId id="256" r:id="rId2"/>
@@ -26,22 +26,24 @@
     <p:sldId id="1150" r:id="rId14"/>
     <p:sldId id="1152" r:id="rId15"/>
     <p:sldId id="1149" r:id="rId16"/>
-    <p:sldId id="1151" r:id="rId17"/>
-    <p:sldId id="1135" r:id="rId18"/>
-    <p:sldId id="1132" r:id="rId19"/>
-    <p:sldId id="1133" r:id="rId20"/>
-    <p:sldId id="1125" r:id="rId21"/>
-    <p:sldId id="1127" r:id="rId22"/>
-    <p:sldId id="1128" r:id="rId23"/>
-    <p:sldId id="1123" r:id="rId24"/>
-    <p:sldId id="1130" r:id="rId25"/>
-    <p:sldId id="1131" r:id="rId26"/>
-    <p:sldId id="1137" r:id="rId27"/>
-    <p:sldId id="1138" r:id="rId28"/>
-    <p:sldId id="1129" r:id="rId29"/>
-    <p:sldId id="1139" r:id="rId30"/>
-    <p:sldId id="978" r:id="rId31"/>
-    <p:sldId id="1121" r:id="rId32"/>
+    <p:sldId id="1153" r:id="rId17"/>
+    <p:sldId id="1151" r:id="rId18"/>
+    <p:sldId id="1154" r:id="rId19"/>
+    <p:sldId id="1135" r:id="rId20"/>
+    <p:sldId id="1132" r:id="rId21"/>
+    <p:sldId id="1133" r:id="rId22"/>
+    <p:sldId id="1125" r:id="rId23"/>
+    <p:sldId id="1127" r:id="rId24"/>
+    <p:sldId id="1128" r:id="rId25"/>
+    <p:sldId id="1123" r:id="rId26"/>
+    <p:sldId id="1130" r:id="rId27"/>
+    <p:sldId id="1131" r:id="rId28"/>
+    <p:sldId id="1137" r:id="rId29"/>
+    <p:sldId id="1138" r:id="rId30"/>
+    <p:sldId id="1129" r:id="rId31"/>
+    <p:sldId id="1139" r:id="rId32"/>
+    <p:sldId id="978" r:id="rId33"/>
+    <p:sldId id="1121" r:id="rId34"/>
   </p:sldIdLst>
   <p:sldSz cx="12192000" cy="6858000"/>
   <p:notesSz cx="6858000" cy="9144000"/>
@@ -164,7 +166,9 @@
             <p14:sldId id="1150"/>
             <p14:sldId id="1152"/>
             <p14:sldId id="1149"/>
+            <p14:sldId id="1153"/>
             <p14:sldId id="1151"/>
+            <p14:sldId id="1154"/>
             <p14:sldId id="1135"/>
             <p14:sldId id="1132"/>
             <p14:sldId id="1133"/>
@@ -1856,7 +1860,7 @@
             <a:fld id="{DF61EA0F-A667-4B49-8422-0062BC55E249}" type="slidenum">
               <a:rPr lang="en-US" altLang="ko-KR" noProof="0" smtClean="0"/>
               <a:pPr/>
-              <a:t>21</a:t>
+              <a:t>23</a:t>
             </a:fld>
             <a:endParaRPr lang="ko-KR" altLang="en-US" noProof="0"/>
           </a:p>
@@ -7066,7 +7070,7 @@
         <p:spPr>
           <a:xfrm>
             <a:off x="559528" y="1196976"/>
-            <a:ext cx="10986284" cy="880819"/>
+            <a:ext cx="10986284" cy="465320"/>
           </a:xfrm>
           <a:prstGeom prst="rect">
             <a:avLst/>
@@ -7125,28 +7129,14 @@
                 <a:latin typeface="D2Coding" panose="020B0609020101020101" pitchFamily="49" charset="-127"/>
                 <a:ea typeface="D2Coding" panose="020B0609020101020101" pitchFamily="49" charset="-127"/>
               </a:rPr>
-              <a:t>를 무작위 </a:t>
+              <a:t>를 </a:t>
             </a:r>
             <a:r>
               <a:rPr lang="en-US" altLang="ko-KR" dirty="0">
                 <a:latin typeface="D2Coding" panose="020B0609020101020101" pitchFamily="49" charset="-127"/>
                 <a:ea typeface="D2Coding" panose="020B0609020101020101" pitchFamily="49" charset="-127"/>
               </a:rPr>
-              <a:t>shuffling </a:t>
-            </a:r>
-            <a:r>
-              <a:rPr lang="ko-KR" altLang="en-US" dirty="0">
-                <a:latin typeface="D2Coding" panose="020B0609020101020101" pitchFamily="49" charset="-127"/>
-                <a:ea typeface="D2Coding" panose="020B0609020101020101" pitchFamily="49" charset="-127"/>
-              </a:rPr>
-              <a:t>할까</a:t>
-            </a:r>
-            <a:r>
-              <a:rPr lang="en-US" altLang="ko-KR" dirty="0">
-                <a:latin typeface="D2Coding" panose="020B0609020101020101" pitchFamily="49" charset="-127"/>
-                <a:ea typeface="D2Coding" panose="020B0609020101020101" pitchFamily="49" charset="-127"/>
-              </a:rPr>
-              <a:t>?</a:t>
+              <a:t>shuffling ?</a:t>
             </a:r>
             <a:endParaRPr lang="ko-KR" altLang="en-US" dirty="0">
               <a:effectLst/>
@@ -7170,8 +7160,8 @@
         </p:nvSpPr>
         <p:spPr>
           <a:xfrm>
-            <a:off x="651901" y="2643714"/>
-            <a:ext cx="4834499" cy="2800767"/>
+            <a:off x="724877" y="4136980"/>
+            <a:ext cx="4834499" cy="2246769"/>
           </a:xfrm>
           <a:prstGeom prst="rect">
             <a:avLst/>
@@ -7185,138 +7175,6 @@
             <a:spAutoFit/>
           </a:bodyPr>
           <a:lstStyle/>
-          <a:p>
-            <a:pPr>
-              <a:buNone/>
-            </a:pPr>
-            <a:r>
-              <a:rPr lang="en-US" altLang="ko-KR" sz="1200" b="0" dirty="0" err="1">
-                <a:solidFill>
-                  <a:schemeClr val="bg1">
-                    <a:lumMod val="50000"/>
-                  </a:schemeClr>
-                </a:solidFill>
-                <a:effectLst/>
-                <a:latin typeface="D2Coding" panose="020B0609020101020101" pitchFamily="49" charset="-127"/>
-                <a:ea typeface="D2Coding" panose="020B0609020101020101" pitchFamily="49" charset="-127"/>
-              </a:rPr>
-              <a:t>sampling_rate</a:t>
-            </a:r>
-            <a:r>
-              <a:rPr lang="en-US" altLang="ko-KR" sz="1200" b="0" dirty="0">
-                <a:solidFill>
-                  <a:schemeClr val="bg1">
-                    <a:lumMod val="50000"/>
-                  </a:schemeClr>
-                </a:solidFill>
-                <a:effectLst/>
-                <a:latin typeface="D2Coding" panose="020B0609020101020101" pitchFamily="49" charset="-127"/>
-                <a:ea typeface="D2Coding" panose="020B0609020101020101" pitchFamily="49" charset="-127"/>
-              </a:rPr>
-              <a:t> = 6</a:t>
-            </a:r>
-          </a:p>
-          <a:p>
-            <a:pPr>
-              <a:buNone/>
-            </a:pPr>
-            <a:r>
-              <a:rPr lang="en-US" altLang="ko-KR" sz="1200" b="0" dirty="0" err="1">
-                <a:solidFill>
-                  <a:schemeClr val="bg1">
-                    <a:lumMod val="50000"/>
-                  </a:schemeClr>
-                </a:solidFill>
-                <a:effectLst/>
-                <a:latin typeface="D2Coding" panose="020B0609020101020101" pitchFamily="49" charset="-127"/>
-                <a:ea typeface="D2Coding" panose="020B0609020101020101" pitchFamily="49" charset="-127"/>
-              </a:rPr>
-              <a:t>sequence_length</a:t>
-            </a:r>
-            <a:r>
-              <a:rPr lang="en-US" altLang="ko-KR" sz="1200" b="0" dirty="0">
-                <a:solidFill>
-                  <a:schemeClr val="bg1">
-                    <a:lumMod val="50000"/>
-                  </a:schemeClr>
-                </a:solidFill>
-                <a:effectLst/>
-                <a:latin typeface="D2Coding" panose="020B0609020101020101" pitchFamily="49" charset="-127"/>
-                <a:ea typeface="D2Coding" panose="020B0609020101020101" pitchFamily="49" charset="-127"/>
-              </a:rPr>
-              <a:t> = 120</a:t>
-            </a:r>
-          </a:p>
-          <a:p>
-            <a:pPr>
-              <a:buNone/>
-            </a:pPr>
-            <a:r>
-              <a:rPr lang="en-US" altLang="ko-KR" sz="1200" b="0" dirty="0">
-                <a:solidFill>
-                  <a:schemeClr val="bg1">
-                    <a:lumMod val="50000"/>
-                  </a:schemeClr>
-                </a:solidFill>
-                <a:effectLst/>
-                <a:latin typeface="D2Coding" panose="020B0609020101020101" pitchFamily="49" charset="-127"/>
-                <a:ea typeface="D2Coding" panose="020B0609020101020101" pitchFamily="49" charset="-127"/>
-              </a:rPr>
-              <a:t>delay = </a:t>
-            </a:r>
-            <a:r>
-              <a:rPr lang="en-US" altLang="ko-KR" sz="1200" b="0" dirty="0" err="1">
-                <a:solidFill>
-                  <a:schemeClr val="bg1">
-                    <a:lumMod val="50000"/>
-                  </a:schemeClr>
-                </a:solidFill>
-                <a:effectLst/>
-                <a:latin typeface="D2Coding" panose="020B0609020101020101" pitchFamily="49" charset="-127"/>
-                <a:ea typeface="D2Coding" panose="020B0609020101020101" pitchFamily="49" charset="-127"/>
-              </a:rPr>
-              <a:t>sampling_rate</a:t>
-            </a:r>
-            <a:r>
-              <a:rPr lang="en-US" altLang="ko-KR" sz="1200" b="0" dirty="0">
-                <a:solidFill>
-                  <a:schemeClr val="bg1">
-                    <a:lumMod val="50000"/>
-                  </a:schemeClr>
-                </a:solidFill>
-                <a:effectLst/>
-                <a:latin typeface="D2Coding" panose="020B0609020101020101" pitchFamily="49" charset="-127"/>
-                <a:ea typeface="D2Coding" panose="020B0609020101020101" pitchFamily="49" charset="-127"/>
-              </a:rPr>
-              <a:t> * (</a:t>
-            </a:r>
-            <a:r>
-              <a:rPr lang="en-US" altLang="ko-KR" sz="1200" b="0" dirty="0" err="1">
-                <a:solidFill>
-                  <a:schemeClr val="bg1">
-                    <a:lumMod val="50000"/>
-                  </a:schemeClr>
-                </a:solidFill>
-                <a:effectLst/>
-                <a:latin typeface="D2Coding" panose="020B0609020101020101" pitchFamily="49" charset="-127"/>
-                <a:ea typeface="D2Coding" panose="020B0609020101020101" pitchFamily="49" charset="-127"/>
-              </a:rPr>
-              <a:t>sequence_length</a:t>
-            </a:r>
-            <a:r>
-              <a:rPr lang="en-US" altLang="ko-KR" sz="1200" b="0" dirty="0">
-                <a:solidFill>
-                  <a:schemeClr val="bg1">
-                    <a:lumMod val="50000"/>
-                  </a:schemeClr>
-                </a:solidFill>
-                <a:effectLst/>
-                <a:latin typeface="D2Coding" panose="020B0609020101020101" pitchFamily="49" charset="-127"/>
-                <a:ea typeface="D2Coding" panose="020B0609020101020101" pitchFamily="49" charset="-127"/>
-              </a:rPr>
-              <a:t> + 24 – 1)</a:t>
-            </a:r>
-          </a:p>
           <a:p>
             <a:pPr>
               <a:buNone/>
@@ -7813,8 +7671,8 @@
         </p:nvSpPr>
         <p:spPr>
           <a:xfrm>
-            <a:off x="5652526" y="2643714"/>
-            <a:ext cx="5987024" cy="2639825"/>
+            <a:off x="5559376" y="4122700"/>
+            <a:ext cx="5489624" cy="2321469"/>
           </a:xfrm>
           <a:prstGeom prst="rect">
             <a:avLst/>
@@ -7840,84 +7698,84 @@
               <a:buChar char="v"/>
             </a:pPr>
             <a:r>
-              <a:rPr lang="ko-KR" altLang="en-US" sz="1600" dirty="0">
+              <a:rPr lang="ko-KR" altLang="en-US" sz="1400" dirty="0">
                 <a:latin typeface="D2Coding" panose="020B0609020101020101" pitchFamily="49" charset="-127"/>
                 <a:ea typeface="D2Coding" panose="020B0609020101020101" pitchFamily="49" charset="-127"/>
               </a:rPr>
               <a:t>만약 순서대로 넣으면</a:t>
             </a:r>
             <a:r>
-              <a:rPr lang="en-US" altLang="ko-KR" sz="1600" dirty="0">
+              <a:rPr lang="en-US" altLang="ko-KR" sz="1400" dirty="0">
                 <a:latin typeface="D2Coding" panose="020B0609020101020101" pitchFamily="49" charset="-127"/>
                 <a:ea typeface="D2Coding" panose="020B0609020101020101" pitchFamily="49" charset="-127"/>
               </a:rPr>
               <a:t>, </a:t>
             </a:r>
             <a:r>
-              <a:rPr lang="ko-KR" altLang="en-US" sz="1600" dirty="0">
+              <a:rPr lang="ko-KR" altLang="en-US" sz="1400" dirty="0">
                 <a:latin typeface="D2Coding" panose="020B0609020101020101" pitchFamily="49" charset="-127"/>
                 <a:ea typeface="D2Coding" panose="020B0609020101020101" pitchFamily="49" charset="-127"/>
               </a:rPr>
               <a:t>모델이 한동안 계속 </a:t>
             </a:r>
             <a:r>
-              <a:rPr lang="en-US" altLang="ko-KR" sz="1600" dirty="0">
+              <a:rPr lang="en-US" altLang="ko-KR" sz="1400" dirty="0">
                 <a:latin typeface="D2Coding" panose="020B0609020101020101" pitchFamily="49" charset="-127"/>
                 <a:ea typeface="D2Coding" panose="020B0609020101020101" pitchFamily="49" charset="-127"/>
               </a:rPr>
               <a:t>"</a:t>
             </a:r>
             <a:r>
-              <a:rPr lang="ko-KR" altLang="en-US" sz="1600" dirty="0">
+              <a:rPr lang="ko-KR" altLang="en-US" sz="1400" dirty="0">
                 <a:latin typeface="D2Coding" panose="020B0609020101020101" pitchFamily="49" charset="-127"/>
                 <a:ea typeface="D2Coding" panose="020B0609020101020101" pitchFamily="49" charset="-127"/>
               </a:rPr>
               <a:t>여름철 데이터</a:t>
             </a:r>
             <a:r>
-              <a:rPr lang="en-US" altLang="ko-KR" sz="1600" dirty="0">
+              <a:rPr lang="en-US" altLang="ko-KR" sz="1400" dirty="0">
                 <a:latin typeface="D2Coding" panose="020B0609020101020101" pitchFamily="49" charset="-127"/>
                 <a:ea typeface="D2Coding" panose="020B0609020101020101" pitchFamily="49" charset="-127"/>
               </a:rPr>
               <a:t>"</a:t>
             </a:r>
             <a:r>
-              <a:rPr lang="ko-KR" altLang="en-US" sz="1600" dirty="0">
+              <a:rPr lang="ko-KR" altLang="en-US" sz="1400" dirty="0">
                 <a:latin typeface="D2Coding" panose="020B0609020101020101" pitchFamily="49" charset="-127"/>
                 <a:ea typeface="D2Coding" panose="020B0609020101020101" pitchFamily="49" charset="-127"/>
               </a:rPr>
               <a:t>만 보다가 그 다음엔 </a:t>
             </a:r>
             <a:r>
-              <a:rPr lang="en-US" altLang="ko-KR" sz="1600" dirty="0">
+              <a:rPr lang="en-US" altLang="ko-KR" sz="1400" dirty="0">
                 <a:latin typeface="D2Coding" panose="020B0609020101020101" pitchFamily="49" charset="-127"/>
                 <a:ea typeface="D2Coding" panose="020B0609020101020101" pitchFamily="49" charset="-127"/>
               </a:rPr>
               <a:t>"</a:t>
             </a:r>
             <a:r>
-              <a:rPr lang="ko-KR" altLang="en-US" sz="1600" dirty="0">
+              <a:rPr lang="ko-KR" altLang="en-US" sz="1400" dirty="0">
                 <a:latin typeface="D2Coding" panose="020B0609020101020101" pitchFamily="49" charset="-127"/>
                 <a:ea typeface="D2Coding" panose="020B0609020101020101" pitchFamily="49" charset="-127"/>
               </a:rPr>
               <a:t>겨울철 데이터</a:t>
             </a:r>
             <a:r>
-              <a:rPr lang="en-US" altLang="ko-KR" sz="1600" dirty="0">
+              <a:rPr lang="en-US" altLang="ko-KR" sz="1400" dirty="0">
                 <a:latin typeface="D2Coding" panose="020B0609020101020101" pitchFamily="49" charset="-127"/>
                 <a:ea typeface="D2Coding" panose="020B0609020101020101" pitchFamily="49" charset="-127"/>
               </a:rPr>
               <a:t>"</a:t>
             </a:r>
             <a:r>
-              <a:rPr lang="ko-KR" altLang="en-US" sz="1600" dirty="0">
+              <a:rPr lang="ko-KR" altLang="en-US" sz="1400" dirty="0">
                 <a:latin typeface="D2Coding" panose="020B0609020101020101" pitchFamily="49" charset="-127"/>
                 <a:ea typeface="D2Coding" panose="020B0609020101020101" pitchFamily="49" charset="-127"/>
               </a:rPr>
               <a:t>만 보는 식으로 편중되게 학습하게 되나</a:t>
             </a:r>
             <a:r>
-              <a:rPr lang="en-US" altLang="ko-KR" sz="1600" dirty="0">
+              <a:rPr lang="en-US" altLang="ko-KR" sz="1400" dirty="0">
                 <a:latin typeface="D2Coding" panose="020B0609020101020101" pitchFamily="49" charset="-127"/>
                 <a:ea typeface="D2Coding" panose="020B0609020101020101" pitchFamily="49" charset="-127"/>
               </a:rPr>
@@ -7932,7 +7790,7 @@
               <a:buFont typeface="Wingdings" panose="05000000000000000000" pitchFamily="2" charset="2"/>
               <a:buChar char="v"/>
             </a:pPr>
-            <a:endParaRPr lang="en-US" altLang="ko-KR" sz="1600" dirty="0">
+            <a:endParaRPr lang="en-US" altLang="ko-KR" sz="1400" dirty="0">
               <a:latin typeface="D2Coding" panose="020B0609020101020101" pitchFamily="49" charset="-127"/>
               <a:ea typeface="D2Coding" panose="020B0609020101020101" pitchFamily="49" charset="-127"/>
             </a:endParaRPr>
@@ -7946,37 +7804,674 @@
               <a:buChar char="v"/>
             </a:pPr>
             <a:r>
-              <a:rPr lang="ko-KR" altLang="en-US" sz="1600" dirty="0">
+              <a:rPr lang="ko-KR" altLang="en-US" sz="1400" dirty="0">
                 <a:latin typeface="D2Coding" panose="020B0609020101020101" pitchFamily="49" charset="-127"/>
                 <a:ea typeface="D2Coding" panose="020B0609020101020101" pitchFamily="49" charset="-127"/>
               </a:rPr>
               <a:t>무작위로 섞으면 각 배치가 다양한 시기의 데이터를 골고루 포함하게 되어 학습이 더 안정적</a:t>
             </a:r>
             <a:r>
-              <a:rPr lang="en-US" altLang="ko-KR" sz="1600" dirty="0">
+              <a:rPr lang="en-US" altLang="ko-KR" sz="1400" dirty="0">
                 <a:latin typeface="D2Coding" panose="020B0609020101020101" pitchFamily="49" charset="-127"/>
                 <a:ea typeface="D2Coding" panose="020B0609020101020101" pitchFamily="49" charset="-127"/>
               </a:rPr>
               <a:t>(gradient descent </a:t>
             </a:r>
             <a:r>
-              <a:rPr lang="ko-KR" altLang="en-US" sz="1600" dirty="0">
+              <a:rPr lang="ko-KR" altLang="en-US" sz="1400" dirty="0">
                 <a:latin typeface="D2Coding" panose="020B0609020101020101" pitchFamily="49" charset="-127"/>
                 <a:ea typeface="D2Coding" panose="020B0609020101020101" pitchFamily="49" charset="-127"/>
               </a:rPr>
               <a:t>학습이 잘 될 수 있는 이유</a:t>
             </a:r>
             <a:r>
-              <a:rPr lang="en-US" altLang="ko-KR" sz="1600" dirty="0">
+              <a:rPr lang="en-US" altLang="ko-KR" sz="1400" dirty="0">
                 <a:latin typeface="D2Coding" panose="020B0609020101020101" pitchFamily="49" charset="-127"/>
                 <a:ea typeface="D2Coding" panose="020B0609020101020101" pitchFamily="49" charset="-127"/>
               </a:rPr>
               <a:t>)</a:t>
             </a:r>
-            <a:endParaRPr lang="ko-KR" altLang="en-US" sz="1600" dirty="0">
+            <a:endParaRPr lang="ko-KR" altLang="en-US" sz="1400" dirty="0">
               <a:latin typeface="D2Coding" panose="020B0609020101020101" pitchFamily="49" charset="-127"/>
               <a:ea typeface="D2Coding" panose="020B0609020101020101" pitchFamily="49" charset="-127"/>
             </a:endParaRPr>
+          </a:p>
+        </p:txBody>
+      </p:sp>
+      <p:sp>
+        <p:nvSpPr>
+          <p:cNvPr id="10" name="정육면체 9">
+            <a:extLst>
+              <a:ext uri="{FF2B5EF4-FFF2-40B4-BE49-F238E27FC236}">
+                <a16:creationId xmlns:a16="http://schemas.microsoft.com/office/drawing/2014/main" id="{13B40AEB-89C5-810C-E2F5-43C751C6D771}"/>
+              </a:ext>
+            </a:extLst>
+          </p:cNvPr>
+          <p:cNvSpPr/>
+          <p:nvPr/>
+        </p:nvSpPr>
+        <p:spPr>
+          <a:xfrm>
+            <a:off x="7219388" y="2170621"/>
+            <a:ext cx="1323975" cy="709339"/>
+          </a:xfrm>
+          <a:prstGeom prst="cube">
+            <a:avLst>
+              <a:gd name="adj" fmla="val 68572"/>
+            </a:avLst>
+          </a:prstGeom>
+          <a:solidFill>
+            <a:schemeClr val="accent6">
+              <a:lumMod val="20000"/>
+              <a:lumOff val="80000"/>
+            </a:schemeClr>
+          </a:solidFill>
+        </p:spPr>
+        <p:style>
+          <a:lnRef idx="2">
+            <a:schemeClr val="accent1">
+              <a:shade val="15000"/>
+            </a:schemeClr>
+          </a:lnRef>
+          <a:fillRef idx="1">
+            <a:schemeClr val="accent1"/>
+          </a:fillRef>
+          <a:effectRef idx="0">
+            <a:schemeClr val="accent1"/>
+          </a:effectRef>
+          <a:fontRef idx="minor">
+            <a:schemeClr val="lt1"/>
+          </a:fontRef>
+        </p:style>
+        <p:txBody>
+          <a:bodyPr rtlCol="0" anchor="ctr"/>
+          <a:lstStyle/>
+          <a:p>
+            <a:pPr algn="ctr"/>
+            <a:endParaRPr lang="ko-KR" altLang="en-US" dirty="0"/>
+          </a:p>
+        </p:txBody>
+      </p:sp>
+      <p:sp>
+        <p:nvSpPr>
+          <p:cNvPr id="12" name="TextBox 11">
+            <a:extLst>
+              <a:ext uri="{FF2B5EF4-FFF2-40B4-BE49-F238E27FC236}">
+                <a16:creationId xmlns:a16="http://schemas.microsoft.com/office/drawing/2014/main" id="{BE1A3FEA-F849-438F-9C10-225F356C5C50}"/>
+              </a:ext>
+            </a:extLst>
+          </p:cNvPr>
+          <p:cNvSpPr txBox="1"/>
+          <p:nvPr/>
+        </p:nvSpPr>
+        <p:spPr>
+          <a:xfrm>
+            <a:off x="7609911" y="3703317"/>
+            <a:ext cx="2143125" cy="276999"/>
+          </a:xfrm>
+          <a:prstGeom prst="rect">
+            <a:avLst/>
+          </a:prstGeom>
+          <a:noFill/>
+        </p:spPr>
+        <p:txBody>
+          <a:bodyPr wrap="square">
+            <a:spAutoFit/>
+          </a:bodyPr>
+          <a:lstStyle/>
+          <a:p>
+            <a:r>
+              <a:rPr lang="en-US" altLang="ko-KR" sz="1200" dirty="0">
+                <a:latin typeface="D2Coding" panose="020B0609020101020101" pitchFamily="49" charset="-127"/>
+                <a:ea typeface="D2Coding" panose="020B0609020101020101" pitchFamily="49" charset="-127"/>
+              </a:rPr>
+              <a:t>120 windows size </a:t>
+            </a:r>
+            <a:endParaRPr lang="ko-KR" altLang="en-US" sz="1200" dirty="0"/>
+          </a:p>
+        </p:txBody>
+      </p:sp>
+      <p:sp>
+        <p:nvSpPr>
+          <p:cNvPr id="16" name="TextBox 15">
+            <a:extLst>
+              <a:ext uri="{FF2B5EF4-FFF2-40B4-BE49-F238E27FC236}">
+                <a16:creationId xmlns:a16="http://schemas.microsoft.com/office/drawing/2014/main" id="{810E1893-1D21-F36B-E2A4-3EF4633D5875}"/>
+              </a:ext>
+            </a:extLst>
+          </p:cNvPr>
+          <p:cNvSpPr txBox="1"/>
+          <p:nvPr/>
+        </p:nvSpPr>
+        <p:spPr>
+          <a:xfrm>
+            <a:off x="6877439" y="3367571"/>
+            <a:ext cx="1519799" cy="276999"/>
+          </a:xfrm>
+          <a:prstGeom prst="rect">
+            <a:avLst/>
+          </a:prstGeom>
+          <a:noFill/>
+        </p:spPr>
+        <p:txBody>
+          <a:bodyPr wrap="square">
+            <a:spAutoFit/>
+          </a:bodyPr>
+          <a:lstStyle/>
+          <a:p>
+            <a:r>
+              <a:rPr lang="en-US" altLang="ko-KR" sz="1200" dirty="0">
+                <a:latin typeface="D2Coding" panose="020B0609020101020101" pitchFamily="49" charset="-127"/>
+                <a:ea typeface="D2Coding" panose="020B0609020101020101" pitchFamily="49" charset="-127"/>
+              </a:rPr>
+              <a:t>14 Features</a:t>
+            </a:r>
+            <a:endParaRPr lang="ko-KR" altLang="en-US" sz="1200" dirty="0"/>
+          </a:p>
+        </p:txBody>
+      </p:sp>
+      <p:sp>
+        <p:nvSpPr>
+          <p:cNvPr id="18" name="TextBox 17">
+            <a:extLst>
+              <a:ext uri="{FF2B5EF4-FFF2-40B4-BE49-F238E27FC236}">
+                <a16:creationId xmlns:a16="http://schemas.microsoft.com/office/drawing/2014/main" id="{083AC67A-6E54-5CA2-AEC2-4DFEFB57101F}"/>
+              </a:ext>
+            </a:extLst>
+          </p:cNvPr>
+          <p:cNvSpPr txBox="1"/>
+          <p:nvPr/>
+        </p:nvSpPr>
+        <p:spPr>
+          <a:xfrm rot="18749717">
+            <a:off x="8917772" y="3002191"/>
+            <a:ext cx="1380581" cy="461665"/>
+          </a:xfrm>
+          <a:prstGeom prst="rect">
+            <a:avLst/>
+          </a:prstGeom>
+          <a:noFill/>
+        </p:spPr>
+        <p:txBody>
+          <a:bodyPr wrap="square">
+            <a:spAutoFit/>
+          </a:bodyPr>
+          <a:lstStyle/>
+          <a:p>
+            <a:r>
+              <a:rPr lang="en-US" altLang="ko-KR" sz="1200" dirty="0">
+                <a:latin typeface="D2Coding" panose="020B0609020101020101" pitchFamily="49" charset="-127"/>
+                <a:ea typeface="D2Coding" panose="020B0609020101020101" pitchFamily="49" charset="-127"/>
+              </a:rPr>
+              <a:t>1 batch</a:t>
+            </a:r>
+          </a:p>
+          <a:p>
+            <a:r>
+              <a:rPr lang="en-US" altLang="ko-KR" sz="1200" dirty="0">
+                <a:latin typeface="D2Coding" panose="020B0609020101020101" pitchFamily="49" charset="-127"/>
+                <a:ea typeface="D2Coding" panose="020B0609020101020101" pitchFamily="49" charset="-127"/>
+              </a:rPr>
+              <a:t>= 256(samples)</a:t>
+            </a:r>
+            <a:endParaRPr lang="ko-KR" altLang="en-US" sz="1200" dirty="0"/>
+          </a:p>
+        </p:txBody>
+      </p:sp>
+      <p:sp>
+        <p:nvSpPr>
+          <p:cNvPr id="19" name="정육면체 18">
+            <a:extLst>
+              <a:ext uri="{FF2B5EF4-FFF2-40B4-BE49-F238E27FC236}">
+                <a16:creationId xmlns:a16="http://schemas.microsoft.com/office/drawing/2014/main" id="{BE1E893D-DDCC-EDAB-8EA8-CF893B95ADEC}"/>
+              </a:ext>
+            </a:extLst>
+          </p:cNvPr>
+          <p:cNvSpPr/>
+          <p:nvPr/>
+        </p:nvSpPr>
+        <p:spPr>
+          <a:xfrm>
+            <a:off x="7371788" y="2323021"/>
+            <a:ext cx="1323975" cy="709339"/>
+          </a:xfrm>
+          <a:prstGeom prst="cube">
+            <a:avLst>
+              <a:gd name="adj" fmla="val 68572"/>
+            </a:avLst>
+          </a:prstGeom>
+          <a:solidFill>
+            <a:schemeClr val="accent6">
+              <a:lumMod val="20000"/>
+              <a:lumOff val="80000"/>
+            </a:schemeClr>
+          </a:solidFill>
+        </p:spPr>
+        <p:style>
+          <a:lnRef idx="2">
+            <a:schemeClr val="accent1">
+              <a:shade val="15000"/>
+            </a:schemeClr>
+          </a:lnRef>
+          <a:fillRef idx="1">
+            <a:schemeClr val="accent1"/>
+          </a:fillRef>
+          <a:effectRef idx="0">
+            <a:schemeClr val="accent1"/>
+          </a:effectRef>
+          <a:fontRef idx="minor">
+            <a:schemeClr val="lt1"/>
+          </a:fontRef>
+        </p:style>
+        <p:txBody>
+          <a:bodyPr rtlCol="0" anchor="ctr"/>
+          <a:lstStyle/>
+          <a:p>
+            <a:pPr algn="ctr"/>
+            <a:endParaRPr lang="ko-KR" altLang="en-US" dirty="0"/>
+          </a:p>
+        </p:txBody>
+      </p:sp>
+      <p:sp>
+        <p:nvSpPr>
+          <p:cNvPr id="20" name="정육면체 19">
+            <a:extLst>
+              <a:ext uri="{FF2B5EF4-FFF2-40B4-BE49-F238E27FC236}">
+                <a16:creationId xmlns:a16="http://schemas.microsoft.com/office/drawing/2014/main" id="{8F54F278-7DB2-35ED-4727-A2B099F78F5D}"/>
+              </a:ext>
+            </a:extLst>
+          </p:cNvPr>
+          <p:cNvSpPr/>
+          <p:nvPr/>
+        </p:nvSpPr>
+        <p:spPr>
+          <a:xfrm>
+            <a:off x="7524188" y="2475421"/>
+            <a:ext cx="1323975" cy="709339"/>
+          </a:xfrm>
+          <a:prstGeom prst="cube">
+            <a:avLst>
+              <a:gd name="adj" fmla="val 68572"/>
+            </a:avLst>
+          </a:prstGeom>
+          <a:solidFill>
+            <a:schemeClr val="accent5">
+              <a:lumMod val="20000"/>
+              <a:lumOff val="80000"/>
+            </a:schemeClr>
+          </a:solidFill>
+        </p:spPr>
+        <p:style>
+          <a:lnRef idx="2">
+            <a:schemeClr val="accent1">
+              <a:shade val="15000"/>
+            </a:schemeClr>
+          </a:lnRef>
+          <a:fillRef idx="1">
+            <a:schemeClr val="accent1"/>
+          </a:fillRef>
+          <a:effectRef idx="0">
+            <a:schemeClr val="accent1"/>
+          </a:effectRef>
+          <a:fontRef idx="minor">
+            <a:schemeClr val="lt1"/>
+          </a:fontRef>
+        </p:style>
+        <p:txBody>
+          <a:bodyPr rtlCol="0" anchor="ctr"/>
+          <a:lstStyle/>
+          <a:p>
+            <a:pPr algn="ctr"/>
+            <a:endParaRPr lang="ko-KR" altLang="en-US" dirty="0"/>
+          </a:p>
+        </p:txBody>
+      </p:sp>
+      <p:sp>
+        <p:nvSpPr>
+          <p:cNvPr id="21" name="정육면체 20">
+            <a:extLst>
+              <a:ext uri="{FF2B5EF4-FFF2-40B4-BE49-F238E27FC236}">
+                <a16:creationId xmlns:a16="http://schemas.microsoft.com/office/drawing/2014/main" id="{B0AE783E-DA64-7C2E-7548-E68283A544BA}"/>
+              </a:ext>
+            </a:extLst>
+          </p:cNvPr>
+          <p:cNvSpPr/>
+          <p:nvPr/>
+        </p:nvSpPr>
+        <p:spPr>
+          <a:xfrm>
+            <a:off x="7676588" y="2627821"/>
+            <a:ext cx="1323975" cy="709339"/>
+          </a:xfrm>
+          <a:prstGeom prst="cube">
+            <a:avLst>
+              <a:gd name="adj" fmla="val 68572"/>
+            </a:avLst>
+          </a:prstGeom>
+          <a:solidFill>
+            <a:schemeClr val="accent5">
+              <a:lumMod val="20000"/>
+              <a:lumOff val="80000"/>
+            </a:schemeClr>
+          </a:solidFill>
+        </p:spPr>
+        <p:style>
+          <a:lnRef idx="2">
+            <a:schemeClr val="accent1">
+              <a:shade val="15000"/>
+            </a:schemeClr>
+          </a:lnRef>
+          <a:fillRef idx="1">
+            <a:schemeClr val="accent1"/>
+          </a:fillRef>
+          <a:effectRef idx="0">
+            <a:schemeClr val="accent1"/>
+          </a:effectRef>
+          <a:fontRef idx="minor">
+            <a:schemeClr val="lt1"/>
+          </a:fontRef>
+        </p:style>
+        <p:txBody>
+          <a:bodyPr rtlCol="0" anchor="ctr"/>
+          <a:lstStyle/>
+          <a:p>
+            <a:pPr algn="ctr"/>
+            <a:endParaRPr lang="ko-KR" altLang="en-US" dirty="0"/>
+          </a:p>
+        </p:txBody>
+      </p:sp>
+      <p:sp>
+        <p:nvSpPr>
+          <p:cNvPr id="22" name="정육면체 21">
+            <a:extLst>
+              <a:ext uri="{FF2B5EF4-FFF2-40B4-BE49-F238E27FC236}">
+                <a16:creationId xmlns:a16="http://schemas.microsoft.com/office/drawing/2014/main" id="{1335B1AF-981C-7937-766B-F3F162ACA4C0}"/>
+              </a:ext>
+            </a:extLst>
+          </p:cNvPr>
+          <p:cNvSpPr/>
+          <p:nvPr/>
+        </p:nvSpPr>
+        <p:spPr>
+          <a:xfrm>
+            <a:off x="7828988" y="2780221"/>
+            <a:ext cx="1323975" cy="709339"/>
+          </a:xfrm>
+          <a:prstGeom prst="cube">
+            <a:avLst>
+              <a:gd name="adj" fmla="val 68572"/>
+            </a:avLst>
+          </a:prstGeom>
+          <a:solidFill>
+            <a:schemeClr val="accent2">
+              <a:lumMod val="20000"/>
+              <a:lumOff val="80000"/>
+            </a:schemeClr>
+          </a:solidFill>
+        </p:spPr>
+        <p:style>
+          <a:lnRef idx="2">
+            <a:schemeClr val="accent1">
+              <a:shade val="15000"/>
+            </a:schemeClr>
+          </a:lnRef>
+          <a:fillRef idx="1">
+            <a:schemeClr val="accent1"/>
+          </a:fillRef>
+          <a:effectRef idx="0">
+            <a:schemeClr val="accent1"/>
+          </a:effectRef>
+          <a:fontRef idx="minor">
+            <a:schemeClr val="lt1"/>
+          </a:fontRef>
+        </p:style>
+        <p:txBody>
+          <a:bodyPr rtlCol="0" anchor="ctr"/>
+          <a:lstStyle/>
+          <a:p>
+            <a:pPr algn="ctr"/>
+            <a:endParaRPr lang="ko-KR" altLang="en-US" dirty="0"/>
+          </a:p>
+        </p:txBody>
+      </p:sp>
+      <p:sp>
+        <p:nvSpPr>
+          <p:cNvPr id="24" name="TextBox 23">
+            <a:extLst>
+              <a:ext uri="{FF2B5EF4-FFF2-40B4-BE49-F238E27FC236}">
+                <a16:creationId xmlns:a16="http://schemas.microsoft.com/office/drawing/2014/main" id="{53662DB1-8E3D-1A15-292A-3570FC001715}"/>
+              </a:ext>
+            </a:extLst>
+          </p:cNvPr>
+          <p:cNvSpPr txBox="1"/>
+          <p:nvPr/>
+        </p:nvSpPr>
+        <p:spPr>
+          <a:xfrm>
+            <a:off x="9307756" y="2175945"/>
+            <a:ext cx="1519799" cy="276999"/>
+          </a:xfrm>
+          <a:prstGeom prst="rect">
+            <a:avLst/>
+          </a:prstGeom>
+          <a:noFill/>
+        </p:spPr>
+        <p:txBody>
+          <a:bodyPr wrap="square">
+            <a:spAutoFit/>
+          </a:bodyPr>
+          <a:lstStyle/>
+          <a:p>
+            <a:r>
+              <a:rPr lang="en-US" altLang="ko-KR" sz="1200" dirty="0">
+                <a:latin typeface="D2Coding" panose="020B0609020101020101" pitchFamily="49" charset="-127"/>
+                <a:ea typeface="D2Coding" panose="020B0609020101020101" pitchFamily="49" charset="-127"/>
+              </a:rPr>
+              <a:t>Batches</a:t>
+            </a:r>
+            <a:endParaRPr lang="ko-KR" altLang="en-US" sz="1200" dirty="0"/>
+          </a:p>
+        </p:txBody>
+      </p:sp>
+      <p:sp>
+        <p:nvSpPr>
+          <p:cNvPr id="25" name="정육면체 24">
+            <a:extLst>
+              <a:ext uri="{FF2B5EF4-FFF2-40B4-BE49-F238E27FC236}">
+                <a16:creationId xmlns:a16="http://schemas.microsoft.com/office/drawing/2014/main" id="{2C9F108A-A321-972C-68E0-3FB0BE2EC4FF}"/>
+              </a:ext>
+            </a:extLst>
+          </p:cNvPr>
+          <p:cNvSpPr/>
+          <p:nvPr/>
+        </p:nvSpPr>
+        <p:spPr>
+          <a:xfrm>
+            <a:off x="7981388" y="2932621"/>
+            <a:ext cx="1323975" cy="709339"/>
+          </a:xfrm>
+          <a:prstGeom prst="cube">
+            <a:avLst>
+              <a:gd name="adj" fmla="val 68572"/>
+            </a:avLst>
+          </a:prstGeom>
+          <a:solidFill>
+            <a:schemeClr val="accent2">
+              <a:lumMod val="20000"/>
+              <a:lumOff val="80000"/>
+            </a:schemeClr>
+          </a:solidFill>
+        </p:spPr>
+        <p:style>
+          <a:lnRef idx="2">
+            <a:schemeClr val="accent1">
+              <a:shade val="15000"/>
+            </a:schemeClr>
+          </a:lnRef>
+          <a:fillRef idx="1">
+            <a:schemeClr val="accent1"/>
+          </a:fillRef>
+          <a:effectRef idx="0">
+            <a:schemeClr val="accent1"/>
+          </a:effectRef>
+          <a:fontRef idx="minor">
+            <a:schemeClr val="lt1"/>
+          </a:fontRef>
+        </p:style>
+        <p:txBody>
+          <a:bodyPr rtlCol="0" anchor="ctr"/>
+          <a:lstStyle/>
+          <a:p>
+            <a:pPr algn="ctr"/>
+            <a:endParaRPr lang="ko-KR" altLang="en-US" dirty="0"/>
+          </a:p>
+        </p:txBody>
+      </p:sp>
+      <p:pic>
+        <p:nvPicPr>
+          <p:cNvPr id="33" name="Picture 6">
+            <a:extLst>
+              <a:ext uri="{FF2B5EF4-FFF2-40B4-BE49-F238E27FC236}">
+                <a16:creationId xmlns:a16="http://schemas.microsoft.com/office/drawing/2014/main" id="{479BF209-678E-E13D-BCE7-A95F069E282A}"/>
+              </a:ext>
+            </a:extLst>
+          </p:cNvPr>
+          <p:cNvPicPr>
+            <a:picLocks noChangeAspect="1" noChangeArrowheads="1"/>
+          </p:cNvPicPr>
+          <p:nvPr/>
+        </p:nvPicPr>
+        <p:blipFill>
+          <a:blip r:embed="rId2">
+            <a:extLst>
+              <a:ext uri="{28A0092B-C50C-407E-A947-70E740481C1C}">
+                <a14:useLocalDpi xmlns:a14="http://schemas.microsoft.com/office/drawing/2010/main" val="0"/>
+              </a:ext>
+            </a:extLst>
+          </a:blip>
+          <a:srcRect/>
+          <a:stretch>
+            <a:fillRect/>
+          </a:stretch>
+        </p:blipFill>
+        <p:spPr bwMode="auto">
+          <a:xfrm>
+            <a:off x="2377416" y="2419821"/>
+            <a:ext cx="2557780" cy="959634"/>
+          </a:xfrm>
+          <a:prstGeom prst="rect">
+            <a:avLst/>
+          </a:prstGeom>
+          <a:noFill/>
+          <a:extLst>
+            <a:ext uri="{909E8E84-426E-40DD-AFC4-6F175D3DCCD1}">
+              <a14:hiddenFill xmlns:a14="http://schemas.microsoft.com/office/drawing/2010/main">
+                <a:solidFill>
+                  <a:srgbClr val="FFFFFF"/>
+                </a:solidFill>
+              </a14:hiddenFill>
+            </a:ext>
+          </a:extLst>
+        </p:spPr>
+      </p:pic>
+      <p:sp>
+        <p:nvSpPr>
+          <p:cNvPr id="34" name="정육면체 33">
+            <a:extLst>
+              <a:ext uri="{FF2B5EF4-FFF2-40B4-BE49-F238E27FC236}">
+                <a16:creationId xmlns:a16="http://schemas.microsoft.com/office/drawing/2014/main" id="{2C2879D0-1E45-2F51-58B6-CA8ADD843FFB}"/>
+              </a:ext>
+            </a:extLst>
+          </p:cNvPr>
+          <p:cNvSpPr/>
+          <p:nvPr/>
+        </p:nvSpPr>
+        <p:spPr>
+          <a:xfrm>
+            <a:off x="825431" y="2461699"/>
+            <a:ext cx="1323975" cy="709339"/>
+          </a:xfrm>
+          <a:prstGeom prst="cube">
+            <a:avLst>
+              <a:gd name="adj" fmla="val 68572"/>
+            </a:avLst>
+          </a:prstGeom>
+          <a:noFill/>
+        </p:spPr>
+        <p:style>
+          <a:lnRef idx="2">
+            <a:schemeClr val="accent1">
+              <a:shade val="15000"/>
+            </a:schemeClr>
+          </a:lnRef>
+          <a:fillRef idx="1">
+            <a:schemeClr val="accent1"/>
+          </a:fillRef>
+          <a:effectRef idx="0">
+            <a:schemeClr val="accent1"/>
+          </a:effectRef>
+          <a:fontRef idx="minor">
+            <a:schemeClr val="lt1"/>
+          </a:fontRef>
+        </p:style>
+        <p:txBody>
+          <a:bodyPr rtlCol="0" anchor="ctr"/>
+          <a:lstStyle/>
+          <a:p>
+            <a:pPr algn="ctr"/>
+            <a:endParaRPr lang="ko-KR" altLang="en-US" dirty="0"/>
+          </a:p>
+        </p:txBody>
+      </p:sp>
+      <p:sp>
+        <p:nvSpPr>
+          <p:cNvPr id="35" name="오른쪽 중괄호 34">
+            <a:extLst>
+              <a:ext uri="{FF2B5EF4-FFF2-40B4-BE49-F238E27FC236}">
+                <a16:creationId xmlns:a16="http://schemas.microsoft.com/office/drawing/2014/main" id="{530626F2-E424-6F0A-8CA8-ECC1B00A31FE}"/>
+              </a:ext>
+            </a:extLst>
+          </p:cNvPr>
+          <p:cNvSpPr/>
+          <p:nvPr/>
+        </p:nvSpPr>
+        <p:spPr>
+          <a:xfrm rot="18984738">
+            <a:off x="9080427" y="1932418"/>
+            <a:ext cx="219849" cy="1094588"/>
+          </a:xfrm>
+          <a:prstGeom prst="rightBrace">
+            <a:avLst>
+              <a:gd name="adj1" fmla="val 63998"/>
+              <a:gd name="adj2" fmla="val 50000"/>
+            </a:avLst>
+          </a:prstGeom>
+          <a:ln>
+            <a:solidFill>
+              <a:schemeClr val="tx1"/>
+            </a:solidFill>
+          </a:ln>
+        </p:spPr>
+        <p:style>
+          <a:lnRef idx="1">
+            <a:schemeClr val="accent1"/>
+          </a:lnRef>
+          <a:fillRef idx="0">
+            <a:schemeClr val="accent1"/>
+          </a:fillRef>
+          <a:effectRef idx="0">
+            <a:schemeClr val="accent1"/>
+          </a:effectRef>
+          <a:fontRef idx="minor">
+            <a:schemeClr val="tx1"/>
+          </a:fontRef>
+        </p:style>
+        <p:txBody>
+          <a:bodyPr rtlCol="0" anchor="ctr"/>
+          <a:lstStyle/>
+          <a:p>
+            <a:pPr algn="ctr"/>
+            <a:endParaRPr lang="ko-KR" altLang="en-US"/>
           </a:p>
         </p:txBody>
       </p:sp>
@@ -8076,18 +8571,21 @@
                 <a:ea typeface="D2Coding" panose="020B0609020101020101" pitchFamily="49" charset="-127"/>
                 <a:cs typeface="Segoe UI Light" panose="020B0502040204020203" pitchFamily="34" charset="0"/>
               </a:rPr>
-              <a:t>Recurrent Neural Network(RNN)</a:t>
-            </a:r>
-            <a:endParaRPr lang="ko-KR" altLang="en-US" sz="2800" cap="none" dirty="0">
-              <a:solidFill>
-                <a:schemeClr val="bg2">
-                  <a:lumMod val="25000"/>
-                </a:schemeClr>
-              </a:solidFill>
-              <a:latin typeface="D2Coding" panose="020B0609020101020101" pitchFamily="49" charset="-127"/>
-              <a:ea typeface="D2Coding" panose="020B0609020101020101" pitchFamily="49" charset="-127"/>
-              <a:cs typeface="Segoe UI Light" panose="020B0502040204020203" pitchFamily="34" charset="0"/>
-            </a:endParaRPr>
+              <a:t>FCCN, Convnet, RNN </a:t>
+            </a:r>
+            <a:r>
+              <a:rPr lang="ko-KR" altLang="en-US" sz="2800" cap="none" dirty="0">
+                <a:solidFill>
+                  <a:schemeClr val="bg2">
+                    <a:lumMod val="25000"/>
+                  </a:schemeClr>
+                </a:solidFill>
+                <a:latin typeface="D2Coding" panose="020B0609020101020101" pitchFamily="49" charset="-127"/>
+                <a:ea typeface="D2Coding" panose="020B0609020101020101" pitchFamily="49" charset="-127"/>
+                <a:cs typeface="Segoe UI Light" panose="020B0502040204020203" pitchFamily="34" charset="0"/>
+              </a:rPr>
+              <a:t>모델 성능지표</a:t>
+            </a:r>
           </a:p>
         </p:txBody>
       </p:sp>
@@ -8163,7 +8661,7 @@
         </p:blipFill>
         <p:spPr bwMode="auto">
           <a:xfrm>
-            <a:off x="703818" y="2931459"/>
+            <a:off x="703818" y="2874309"/>
             <a:ext cx="3158110" cy="2511477"/>
           </a:xfrm>
           <a:prstGeom prst="rect">
@@ -8210,7 +8708,7 @@
         </p:blipFill>
         <p:spPr bwMode="auto">
           <a:xfrm>
-            <a:off x="4476813" y="2938294"/>
+            <a:off x="4476813" y="2881144"/>
             <a:ext cx="3158110" cy="2511477"/>
           </a:xfrm>
           <a:prstGeom prst="rect">
@@ -8465,7 +8963,7 @@
         </p:blipFill>
         <p:spPr bwMode="auto">
           <a:xfrm>
-            <a:off x="8351520" y="2921095"/>
+            <a:off x="8351520" y="2863945"/>
             <a:ext cx="3158112" cy="2511478"/>
           </a:xfrm>
           <a:prstGeom prst="rect">
@@ -8497,7 +8995,7 @@
         </p:nvSpPr>
         <p:spPr>
           <a:xfrm>
-            <a:off x="692957" y="2791146"/>
+            <a:off x="692957" y="2733996"/>
             <a:ext cx="3167843" cy="307777"/>
           </a:xfrm>
           <a:prstGeom prst="rect">
@@ -8552,7 +9050,7 @@
         </p:nvSpPr>
         <p:spPr>
           <a:xfrm>
-            <a:off x="4469695" y="2794565"/>
+            <a:off x="4469695" y="2737415"/>
             <a:ext cx="3167843" cy="307777"/>
           </a:xfrm>
           <a:prstGeom prst="rect">
@@ -8593,7 +9091,7 @@
         </p:nvSpPr>
         <p:spPr>
           <a:xfrm>
-            <a:off x="8351520" y="2785117"/>
+            <a:off x="8351520" y="2727967"/>
             <a:ext cx="3147523" cy="307777"/>
           </a:xfrm>
           <a:prstGeom prst="rect">
@@ -8617,6 +9115,442 @@
               <a:t>RNN(MAE=3.13)</a:t>
             </a:r>
             <a:endParaRPr lang="ko-KR" altLang="en-US" sz="1400" dirty="0"/>
+          </a:p>
+        </p:txBody>
+      </p:sp>
+      <p:sp>
+        <p:nvSpPr>
+          <p:cNvPr id="14" name="TextBox 13">
+            <a:extLst>
+              <a:ext uri="{FF2B5EF4-FFF2-40B4-BE49-F238E27FC236}">
+                <a16:creationId xmlns:a16="http://schemas.microsoft.com/office/drawing/2014/main" id="{ED639774-C111-C8DF-2C70-9618E3F4BA7F}"/>
+              </a:ext>
+            </a:extLst>
+          </p:cNvPr>
+          <p:cNvSpPr txBox="1"/>
+          <p:nvPr/>
+        </p:nvSpPr>
+        <p:spPr>
+          <a:xfrm>
+            <a:off x="703818" y="5526099"/>
+            <a:ext cx="3167843" cy="830997"/>
+          </a:xfrm>
+          <a:prstGeom prst="rect">
+            <a:avLst/>
+          </a:prstGeom>
+          <a:solidFill>
+            <a:schemeClr val="tx1"/>
+          </a:solidFill>
+        </p:spPr>
+        <p:txBody>
+          <a:bodyPr wrap="square">
+            <a:spAutoFit/>
+          </a:bodyPr>
+          <a:lstStyle/>
+          <a:p>
+            <a:r>
+              <a:rPr lang="en-US" altLang="ko-KR" sz="1200" dirty="0">
+                <a:solidFill>
+                  <a:schemeClr val="bg1"/>
+                </a:solidFill>
+                <a:latin typeface="D2Coding" panose="020B0609020101020101" pitchFamily="49" charset="-127"/>
+                <a:ea typeface="D2Coding" panose="020B0609020101020101" pitchFamily="49" charset="-127"/>
+              </a:rPr>
+              <a:t>Dense</a:t>
+            </a:r>
+            <a:r>
+              <a:rPr lang="ko-KR" altLang="en-US" sz="1200" dirty="0">
+                <a:solidFill>
+                  <a:schemeClr val="bg1"/>
+                </a:solidFill>
+                <a:latin typeface="D2Coding" panose="020B0609020101020101" pitchFamily="49" charset="-127"/>
+                <a:ea typeface="D2Coding" panose="020B0609020101020101" pitchFamily="49" charset="-127"/>
+              </a:rPr>
+              <a:t> 모델은 </a:t>
+            </a:r>
+            <a:r>
+              <a:rPr lang="en-US" altLang="ko-KR" sz="1200" dirty="0">
+                <a:solidFill>
+                  <a:schemeClr val="bg1"/>
+                </a:solidFill>
+                <a:latin typeface="D2Coding" panose="020B0609020101020101" pitchFamily="49" charset="-127"/>
+                <a:ea typeface="D2Coding" panose="020B0609020101020101" pitchFamily="49" charset="-127"/>
+              </a:rPr>
+              <a:t>Flatten</a:t>
+            </a:r>
+            <a:r>
+              <a:rPr lang="ko-KR" altLang="en-US" sz="1200" dirty="0">
+                <a:solidFill>
+                  <a:schemeClr val="bg1"/>
+                </a:solidFill>
+                <a:latin typeface="D2Coding" panose="020B0609020101020101" pitchFamily="49" charset="-127"/>
+                <a:ea typeface="D2Coding" panose="020B0609020101020101" pitchFamily="49" charset="-127"/>
+              </a:rPr>
+              <a:t>으로 </a:t>
+            </a:r>
+            <a:r>
+              <a:rPr lang="en-US" altLang="ko-KR" sz="1200" dirty="0">
+                <a:solidFill>
+                  <a:schemeClr val="bg1"/>
+                </a:solidFill>
+                <a:latin typeface="D2Coding" panose="020B0609020101020101" pitchFamily="49" charset="-127"/>
+                <a:ea typeface="D2Coding" panose="020B0609020101020101" pitchFamily="49" charset="-127"/>
+              </a:rPr>
+              <a:t>(120, 14)</a:t>
+            </a:r>
+            <a:r>
+              <a:rPr lang="ko-KR" altLang="en-US" sz="1200" dirty="0">
+                <a:solidFill>
+                  <a:schemeClr val="bg1"/>
+                </a:solidFill>
+                <a:latin typeface="D2Coding" panose="020B0609020101020101" pitchFamily="49" charset="-127"/>
+                <a:ea typeface="D2Coding" panose="020B0609020101020101" pitchFamily="49" charset="-127"/>
+              </a:rPr>
+              <a:t>를 그냥 </a:t>
+            </a:r>
+            <a:r>
+              <a:rPr lang="en-US" altLang="ko-KR" sz="1200" dirty="0">
+                <a:solidFill>
+                  <a:schemeClr val="bg1"/>
+                </a:solidFill>
+                <a:latin typeface="D2Coding" panose="020B0609020101020101" pitchFamily="49" charset="-127"/>
+                <a:ea typeface="D2Coding" panose="020B0609020101020101" pitchFamily="49" charset="-127"/>
+              </a:rPr>
+              <a:t>1680</a:t>
+            </a:r>
+            <a:r>
+              <a:rPr lang="ko-KR" altLang="en-US" sz="1200" dirty="0">
+                <a:solidFill>
+                  <a:schemeClr val="bg1"/>
+                </a:solidFill>
+                <a:latin typeface="D2Coding" panose="020B0609020101020101" pitchFamily="49" charset="-127"/>
+                <a:ea typeface="D2Coding" panose="020B0609020101020101" pitchFamily="49" charset="-127"/>
+              </a:rPr>
+              <a:t>개 숫자 뭉치로 펴버려서 </a:t>
+            </a:r>
+            <a:r>
+              <a:rPr lang="en-US" altLang="ko-KR" sz="1200" dirty="0">
+                <a:solidFill>
+                  <a:schemeClr val="bg1"/>
+                </a:solidFill>
+                <a:latin typeface="D2Coding" panose="020B0609020101020101" pitchFamily="49" charset="-127"/>
+                <a:ea typeface="D2Coding" panose="020B0609020101020101" pitchFamily="49" charset="-127"/>
+              </a:rPr>
+              <a:t>"</a:t>
+            </a:r>
+            <a:r>
+              <a:rPr lang="ko-KR" altLang="en-US" sz="1200" dirty="0">
+                <a:solidFill>
+                  <a:schemeClr val="bg1"/>
+                </a:solidFill>
+                <a:latin typeface="D2Coding" panose="020B0609020101020101" pitchFamily="49" charset="-127"/>
+                <a:ea typeface="D2Coding" panose="020B0609020101020101" pitchFamily="49" charset="-127"/>
+              </a:rPr>
+              <a:t>몇 번째 시점이었는지</a:t>
+            </a:r>
+            <a:r>
+              <a:rPr lang="en-US" altLang="ko-KR" sz="1200" dirty="0">
+                <a:solidFill>
+                  <a:schemeClr val="bg1"/>
+                </a:solidFill>
+                <a:latin typeface="D2Coding" panose="020B0609020101020101" pitchFamily="49" charset="-127"/>
+                <a:ea typeface="D2Coding" panose="020B0609020101020101" pitchFamily="49" charset="-127"/>
+              </a:rPr>
+              <a:t>" </a:t>
+            </a:r>
+            <a:r>
+              <a:rPr lang="ko-KR" altLang="en-US" sz="1200" dirty="0">
+                <a:solidFill>
+                  <a:schemeClr val="bg1"/>
+                </a:solidFill>
+                <a:latin typeface="D2Coding" panose="020B0609020101020101" pitchFamily="49" charset="-127"/>
+                <a:ea typeface="D2Coding" panose="020B0609020101020101" pitchFamily="49" charset="-127"/>
+              </a:rPr>
+              <a:t>정보가 뒤죽박죽 섞이게 됨</a:t>
+            </a:r>
+            <a:endParaRPr lang="ko-KR" altLang="en-US" sz="1200" dirty="0">
+              <a:solidFill>
+                <a:schemeClr val="bg1"/>
+              </a:solidFill>
+            </a:endParaRPr>
+          </a:p>
+        </p:txBody>
+      </p:sp>
+      <p:sp>
+        <p:nvSpPr>
+          <p:cNvPr id="16" name="TextBox 15">
+            <a:extLst>
+              <a:ext uri="{FF2B5EF4-FFF2-40B4-BE49-F238E27FC236}">
+                <a16:creationId xmlns:a16="http://schemas.microsoft.com/office/drawing/2014/main" id="{BC6576A3-9575-8E34-CA39-2C9E3E5526F8}"/>
+              </a:ext>
+            </a:extLst>
+          </p:cNvPr>
+          <p:cNvSpPr txBox="1"/>
+          <p:nvPr/>
+        </p:nvSpPr>
+        <p:spPr>
+          <a:xfrm>
+            <a:off x="4476814" y="5526099"/>
+            <a:ext cx="3158110" cy="1015663"/>
+          </a:xfrm>
+          <a:prstGeom prst="rect">
+            <a:avLst/>
+          </a:prstGeom>
+          <a:solidFill>
+            <a:schemeClr val="tx1"/>
+          </a:solidFill>
+        </p:spPr>
+        <p:txBody>
+          <a:bodyPr wrap="square">
+            <a:spAutoFit/>
+          </a:bodyPr>
+          <a:lstStyle/>
+          <a:p>
+            <a:r>
+              <a:rPr lang="en-US" altLang="ko-KR" sz="1200" dirty="0">
+                <a:solidFill>
+                  <a:schemeClr val="bg1"/>
+                </a:solidFill>
+                <a:latin typeface="D2Coding" panose="020B0609020101020101" pitchFamily="49" charset="-127"/>
+                <a:ea typeface="D2Coding" panose="020B0609020101020101" pitchFamily="49" charset="-127"/>
+              </a:rPr>
+              <a:t>Conv1D</a:t>
+            </a:r>
+            <a:r>
+              <a:rPr lang="ko-KR" altLang="en-US" sz="1200" dirty="0">
+                <a:solidFill>
+                  <a:schemeClr val="bg1"/>
+                </a:solidFill>
+                <a:latin typeface="D2Coding" panose="020B0609020101020101" pitchFamily="49" charset="-127"/>
+                <a:ea typeface="D2Coding" panose="020B0609020101020101" pitchFamily="49" charset="-127"/>
+              </a:rPr>
+              <a:t>는 같은 가중치</a:t>
+            </a:r>
+            <a:r>
+              <a:rPr lang="en-US" altLang="ko-KR" sz="1200" dirty="0">
+                <a:solidFill>
+                  <a:schemeClr val="bg1"/>
+                </a:solidFill>
+                <a:latin typeface="D2Coding" panose="020B0609020101020101" pitchFamily="49" charset="-127"/>
+                <a:ea typeface="D2Coding" panose="020B0609020101020101" pitchFamily="49" charset="-127"/>
+              </a:rPr>
+              <a:t>(</a:t>
+            </a:r>
+            <a:r>
+              <a:rPr lang="ko-KR" altLang="en-US" sz="1200" dirty="0">
+                <a:solidFill>
+                  <a:schemeClr val="bg1"/>
+                </a:solidFill>
+                <a:latin typeface="D2Coding" panose="020B0609020101020101" pitchFamily="49" charset="-127"/>
+                <a:ea typeface="D2Coding" panose="020B0609020101020101" pitchFamily="49" charset="-127"/>
+              </a:rPr>
+              <a:t>필터</a:t>
+            </a:r>
+            <a:r>
+              <a:rPr lang="en-US" altLang="ko-KR" sz="1200" dirty="0">
+                <a:solidFill>
+                  <a:schemeClr val="bg1"/>
+                </a:solidFill>
+                <a:latin typeface="D2Coding" panose="020B0609020101020101" pitchFamily="49" charset="-127"/>
+                <a:ea typeface="D2Coding" panose="020B0609020101020101" pitchFamily="49" charset="-127"/>
+              </a:rPr>
+              <a:t>)</a:t>
+            </a:r>
+            <a:r>
+              <a:rPr lang="ko-KR" altLang="en-US" sz="1200" dirty="0">
+                <a:solidFill>
+                  <a:schemeClr val="bg1"/>
+                </a:solidFill>
+                <a:latin typeface="D2Coding" panose="020B0609020101020101" pitchFamily="49" charset="-127"/>
+                <a:ea typeface="D2Coding" panose="020B0609020101020101" pitchFamily="49" charset="-127"/>
+              </a:rPr>
+              <a:t>를 </a:t>
+            </a:r>
+            <a:r>
+              <a:rPr lang="ko-KR" altLang="en-US" sz="1200" dirty="0" err="1">
+                <a:solidFill>
+                  <a:schemeClr val="bg1"/>
+                </a:solidFill>
+                <a:latin typeface="D2Coding" panose="020B0609020101020101" pitchFamily="49" charset="-127"/>
+                <a:ea typeface="D2Coding" panose="020B0609020101020101" pitchFamily="49" charset="-127"/>
+              </a:rPr>
+              <a:t>시간축</a:t>
+            </a:r>
+            <a:r>
+              <a:rPr lang="ko-KR" altLang="en-US" sz="1200" dirty="0">
+                <a:solidFill>
+                  <a:schemeClr val="bg1"/>
+                </a:solidFill>
+                <a:latin typeface="D2Coding" panose="020B0609020101020101" pitchFamily="49" charset="-127"/>
+                <a:ea typeface="D2Coding" panose="020B0609020101020101" pitchFamily="49" charset="-127"/>
+              </a:rPr>
+              <a:t> 전체에 재사용하면서 </a:t>
+            </a:r>
+            <a:r>
+              <a:rPr lang="ko-KR" altLang="en-US" sz="1200" dirty="0" err="1">
+                <a:solidFill>
+                  <a:schemeClr val="bg1"/>
+                </a:solidFill>
+                <a:latin typeface="D2Coding" panose="020B0609020101020101" pitchFamily="49" charset="-127"/>
+                <a:ea typeface="D2Coding" panose="020B0609020101020101" pitchFamily="49" charset="-127"/>
+              </a:rPr>
+              <a:t>슬라이딩하면서</a:t>
+            </a:r>
+            <a:r>
+              <a:rPr lang="ko-KR" altLang="en-US" sz="1200" dirty="0">
+                <a:solidFill>
+                  <a:schemeClr val="bg1"/>
+                </a:solidFill>
+                <a:latin typeface="D2Coding" panose="020B0609020101020101" pitchFamily="49" charset="-127"/>
+                <a:ea typeface="D2Coding" panose="020B0609020101020101" pitchFamily="49" charset="-127"/>
+              </a:rPr>
+              <a:t> </a:t>
+            </a:r>
+            <a:r>
+              <a:rPr lang="en-US" altLang="ko-KR" sz="1200" dirty="0">
+                <a:solidFill>
+                  <a:schemeClr val="bg1"/>
+                </a:solidFill>
+                <a:latin typeface="D2Coding" panose="020B0609020101020101" pitchFamily="49" charset="-127"/>
+                <a:ea typeface="D2Coding" panose="020B0609020101020101" pitchFamily="49" charset="-127"/>
+              </a:rPr>
+              <a:t>"24</a:t>
+            </a:r>
+            <a:r>
+              <a:rPr lang="ko-KR" altLang="en-US" sz="1200" dirty="0">
+                <a:solidFill>
+                  <a:schemeClr val="bg1"/>
+                </a:solidFill>
+                <a:latin typeface="D2Coding" panose="020B0609020101020101" pitchFamily="49" charset="-127"/>
+                <a:ea typeface="D2Coding" panose="020B0609020101020101" pitchFamily="49" charset="-127"/>
+              </a:rPr>
+              <a:t>시간 구간 안에서 어떤 패턴이 있는가</a:t>
+            </a:r>
+            <a:r>
+              <a:rPr lang="en-US" altLang="ko-KR" sz="1200" dirty="0">
+                <a:solidFill>
+                  <a:schemeClr val="bg1"/>
+                </a:solidFill>
+                <a:latin typeface="D2Coding" panose="020B0609020101020101" pitchFamily="49" charset="-127"/>
+                <a:ea typeface="D2Coding" panose="020B0609020101020101" pitchFamily="49" charset="-127"/>
+              </a:rPr>
+              <a:t>"</a:t>
+            </a:r>
+            <a:r>
+              <a:rPr lang="ko-KR" altLang="en-US" sz="1200" dirty="0">
+                <a:solidFill>
+                  <a:schemeClr val="bg1"/>
+                </a:solidFill>
+                <a:latin typeface="D2Coding" panose="020B0609020101020101" pitchFamily="49" charset="-127"/>
+                <a:ea typeface="D2Coding" panose="020B0609020101020101" pitchFamily="49" charset="-127"/>
+              </a:rPr>
+              <a:t>를 위치에 상관없이 찾기</a:t>
+            </a:r>
+            <a:r>
+              <a:rPr lang="en-US" altLang="ko-KR" sz="1200" dirty="0">
+                <a:solidFill>
+                  <a:schemeClr val="bg1"/>
+                </a:solidFill>
+                <a:latin typeface="D2Coding" panose="020B0609020101020101" pitchFamily="49" charset="-127"/>
+                <a:ea typeface="D2Coding" panose="020B0609020101020101" pitchFamily="49" charset="-127"/>
+              </a:rPr>
+              <a:t>(</a:t>
+            </a:r>
+            <a:r>
+              <a:rPr lang="ko-KR" altLang="en-US" sz="1200" dirty="0">
+                <a:solidFill>
+                  <a:schemeClr val="bg1"/>
+                </a:solidFill>
+                <a:latin typeface="D2Coding" panose="020B0609020101020101" pitchFamily="49" charset="-127"/>
+                <a:ea typeface="D2Coding" panose="020B0609020101020101" pitchFamily="49" charset="-127"/>
+              </a:rPr>
+              <a:t>파라미터 공유</a:t>
+            </a:r>
+            <a:r>
+              <a:rPr lang="en-US" altLang="ko-KR" sz="1200" dirty="0">
+                <a:solidFill>
+                  <a:schemeClr val="bg1"/>
+                </a:solidFill>
+                <a:latin typeface="D2Coding" panose="020B0609020101020101" pitchFamily="49" charset="-127"/>
+                <a:ea typeface="D2Coding" panose="020B0609020101020101" pitchFamily="49" charset="-127"/>
+              </a:rPr>
+              <a:t>)</a:t>
+            </a:r>
+            <a:endParaRPr lang="ko-KR" altLang="en-US" sz="1200" dirty="0">
+              <a:solidFill>
+                <a:schemeClr val="bg1"/>
+              </a:solidFill>
+            </a:endParaRPr>
+          </a:p>
+        </p:txBody>
+      </p:sp>
+      <p:sp>
+        <p:nvSpPr>
+          <p:cNvPr id="17" name="TextBox 16">
+            <a:extLst>
+              <a:ext uri="{FF2B5EF4-FFF2-40B4-BE49-F238E27FC236}">
+                <a16:creationId xmlns:a16="http://schemas.microsoft.com/office/drawing/2014/main" id="{BBF238AA-6874-38C9-6D3D-5A454512FF83}"/>
+              </a:ext>
+            </a:extLst>
+          </p:cNvPr>
+          <p:cNvSpPr txBox="1"/>
+          <p:nvPr/>
+        </p:nvSpPr>
+        <p:spPr>
+          <a:xfrm>
+            <a:off x="692957" y="2181098"/>
+            <a:ext cx="4767824" cy="307777"/>
+          </a:xfrm>
+          <a:prstGeom prst="rect">
+            <a:avLst/>
+          </a:prstGeom>
+          <a:solidFill>
+            <a:schemeClr val="tx1"/>
+          </a:solidFill>
+        </p:spPr>
+        <p:txBody>
+          <a:bodyPr wrap="square">
+            <a:spAutoFit/>
+          </a:bodyPr>
+          <a:lstStyle/>
+          <a:p>
+            <a:r>
+              <a:rPr lang="en-US" altLang="ko-KR" sz="1400" dirty="0">
+                <a:solidFill>
+                  <a:schemeClr val="bg1"/>
+                </a:solidFill>
+                <a:latin typeface="D2Coding" panose="020B0609020101020101" pitchFamily="49" charset="-127"/>
+                <a:ea typeface="D2Coding" panose="020B0609020101020101" pitchFamily="49" charset="-127"/>
+              </a:rPr>
+              <a:t>(</a:t>
+            </a:r>
+            <a:r>
+              <a:rPr lang="en-US" altLang="ko-KR" sz="1400" dirty="0" err="1">
+                <a:solidFill>
+                  <a:schemeClr val="bg1"/>
+                </a:solidFill>
+                <a:latin typeface="D2Coding" panose="020B0609020101020101" pitchFamily="49" charset="-127"/>
+                <a:ea typeface="D2Coding" panose="020B0609020101020101" pitchFamily="49" charset="-127"/>
+              </a:rPr>
+              <a:t>batch_size</a:t>
+            </a:r>
+            <a:r>
+              <a:rPr lang="en-US" altLang="ko-KR" sz="1400" dirty="0">
+                <a:solidFill>
+                  <a:schemeClr val="bg1"/>
+                </a:solidFill>
+                <a:latin typeface="D2Coding" panose="020B0609020101020101" pitchFamily="49" charset="-127"/>
+                <a:ea typeface="D2Coding" panose="020B0609020101020101" pitchFamily="49" charset="-127"/>
+              </a:rPr>
+              <a:t>, timesteps, features) =  (256, 120, 14)</a:t>
+            </a:r>
+            <a:endParaRPr lang="ko-KR" altLang="en-US" sz="1400" dirty="0">
+              <a:solidFill>
+                <a:schemeClr val="bg1"/>
+              </a:solidFill>
+              <a:latin typeface="D2Coding" panose="020B0609020101020101" pitchFamily="49" charset="-127"/>
+              <a:ea typeface="D2Coding" panose="020B0609020101020101" pitchFamily="49" charset="-127"/>
+            </a:endParaRPr>
           </a:p>
         </p:txBody>
       </p:sp>
@@ -8634,6 +9568,419 @@
 </file>
 
 <file path=ppt/slides/slide16.xml><?xml version="1.0" encoding="utf-8"?>
+<p:sld xmlns:a="http://schemas.openxmlformats.org/drawingml/2006/main" xmlns:r="http://schemas.openxmlformats.org/officeDocument/2006/relationships" xmlns:p="http://schemas.openxmlformats.org/presentationml/2006/main">
+  <p:cSld>
+    <p:spTree>
+      <p:nvGrpSpPr>
+        <p:cNvPr id="1" name="">
+          <a:extLst>
+            <a:ext uri="{FF2B5EF4-FFF2-40B4-BE49-F238E27FC236}">
+              <a16:creationId xmlns:a16="http://schemas.microsoft.com/office/drawing/2014/main" id="{4736FB2C-EEEB-DB71-4DC2-C7D4D0A568B6}"/>
+            </a:ext>
+          </a:extLst>
+        </p:cNvPr>
+        <p:cNvGrpSpPr/>
+        <p:nvPr/>
+      </p:nvGrpSpPr>
+      <p:grpSpPr>
+        <a:xfrm>
+          <a:off x="0" y="0"/>
+          <a:ext cx="0" cy="0"/>
+          <a:chOff x="0" y="0"/>
+          <a:chExt cx="0" cy="0"/>
+        </a:xfrm>
+      </p:grpSpPr>
+      <p:sp>
+        <p:nvSpPr>
+          <p:cNvPr id="3" name="제목 1">
+            <a:extLst>
+              <a:ext uri="{FF2B5EF4-FFF2-40B4-BE49-F238E27FC236}">
+                <a16:creationId xmlns:a16="http://schemas.microsoft.com/office/drawing/2014/main" id="{18E24248-559C-3D0B-7953-7FA370536A9B}"/>
+              </a:ext>
+            </a:extLst>
+          </p:cNvPr>
+          <p:cNvSpPr txBox="1">
+            <a:spLocks/>
+          </p:cNvSpPr>
+          <p:nvPr/>
+        </p:nvSpPr>
+        <p:spPr>
+          <a:xfrm>
+            <a:off x="475645" y="481983"/>
+            <a:ext cx="10353762" cy="766439"/>
+          </a:xfrm>
+          <a:prstGeom prst="rect">
+            <a:avLst/>
+          </a:prstGeom>
+        </p:spPr>
+        <p:txBody>
+          <a:bodyPr vert="horz" lIns="91440" tIns="45720" rIns="91440" bIns="45720" rtlCol="0" anchor="ctr">
+            <a:normAutofit/>
+          </a:bodyPr>
+          <a:lstStyle>
+            <a:lvl1pPr algn="ctr" defTabSz="914400" rtl="0" eaLnBrk="1" latinLnBrk="1" hangingPunct="1">
+              <a:lnSpc>
+                <a:spcPct val="90000"/>
+              </a:lnSpc>
+              <a:spcBef>
+                <a:spcPct val="0"/>
+              </a:spcBef>
+              <a:buNone/>
+              <a:defRPr sz="3200" kern="1200" cap="all" baseline="0">
+                <a:solidFill>
+                  <a:schemeClr val="tx1"/>
+                </a:solidFill>
+                <a:effectLst/>
+                <a:latin typeface="Batang" panose="02030600000101010101" pitchFamily="18" charset="-127"/>
+                <a:ea typeface="Batang" panose="02030600000101010101" pitchFamily="18" charset="-127"/>
+                <a:cs typeface="+mj-cs"/>
+              </a:defRPr>
+            </a:lvl1pPr>
+          </a:lstStyle>
+          <a:p>
+            <a:pPr algn="l"/>
+            <a:r>
+              <a:rPr lang="en-US" altLang="ko-KR" sz="2800" cap="none" dirty="0">
+                <a:solidFill>
+                  <a:schemeClr val="bg2">
+                    <a:lumMod val="25000"/>
+                  </a:schemeClr>
+                </a:solidFill>
+                <a:latin typeface="D2Coding" panose="020B0609020101020101" pitchFamily="49" charset="-127"/>
+                <a:ea typeface="D2Coding" panose="020B0609020101020101" pitchFamily="49" charset="-127"/>
+                <a:cs typeface="Segoe UI Light" panose="020B0502040204020203" pitchFamily="34" charset="0"/>
+              </a:rPr>
+              <a:t>1D CNN(1D Convolutional Neural Networks)</a:t>
+            </a:r>
+            <a:endParaRPr lang="ko-KR" altLang="en-US" sz="2800" cap="none" dirty="0">
+              <a:solidFill>
+                <a:schemeClr val="bg2">
+                  <a:lumMod val="25000"/>
+                </a:schemeClr>
+              </a:solidFill>
+              <a:latin typeface="D2Coding" panose="020B0609020101020101" pitchFamily="49" charset="-127"/>
+              <a:ea typeface="D2Coding" panose="020B0609020101020101" pitchFamily="49" charset="-127"/>
+              <a:cs typeface="Segoe UI Light" panose="020B0502040204020203" pitchFamily="34" charset="0"/>
+            </a:endParaRPr>
+          </a:p>
+        </p:txBody>
+      </p:sp>
+      <p:sp>
+        <p:nvSpPr>
+          <p:cNvPr id="4" name="슬라이드 번호 개체 틀 3">
+            <a:extLst>
+              <a:ext uri="{FF2B5EF4-FFF2-40B4-BE49-F238E27FC236}">
+                <a16:creationId xmlns:a16="http://schemas.microsoft.com/office/drawing/2014/main" id="{8D80805A-22BE-081A-D40D-9248E575BFD1}"/>
+              </a:ext>
+            </a:extLst>
+          </p:cNvPr>
+          <p:cNvSpPr>
+            <a:spLocks noGrp="1"/>
+          </p:cNvSpPr>
+          <p:nvPr>
+            <p:ph type="sldNum" sz="quarter" idx="12"/>
+          </p:nvPr>
+        </p:nvSpPr>
+        <p:spPr>
+          <a:xfrm>
+            <a:off x="11162487" y="299420"/>
+            <a:ext cx="753545" cy="365125"/>
+          </a:xfrm>
+        </p:spPr>
+        <p:txBody>
+          <a:bodyPr/>
+          <a:lstStyle/>
+          <a:p>
+            <a:fld id="{D57F1E4F-1CFF-5643-939E-217C01CDF565}" type="slidenum">
+              <a:rPr lang="en-US" sz="1400" b="1" smtClean="0">
+                <a:latin typeface="Times New Roman" panose="02020603050405020304" pitchFamily="18" charset="0"/>
+                <a:ea typeface="Verdana" panose="020B0604030504040204" pitchFamily="34" charset="0"/>
+                <a:cs typeface="Times New Roman" panose="02020603050405020304" pitchFamily="18" charset="0"/>
+              </a:rPr>
+              <a:pPr/>
+              <a:t>16</a:t>
+            </a:fld>
+            <a:endParaRPr lang="en-US" sz="1400" b="1" dirty="0">
+              <a:latin typeface="Times New Roman" panose="02020603050405020304" pitchFamily="18" charset="0"/>
+              <a:ea typeface="Verdana" panose="020B0604030504040204" pitchFamily="34" charset="0"/>
+              <a:cs typeface="Times New Roman" panose="02020603050405020304" pitchFamily="18" charset="0"/>
+            </a:endParaRPr>
+          </a:p>
+        </p:txBody>
+      </p:sp>
+      <p:sp>
+        <p:nvSpPr>
+          <p:cNvPr id="8" name="TextBox 7">
+            <a:extLst>
+              <a:ext uri="{FF2B5EF4-FFF2-40B4-BE49-F238E27FC236}">
+                <a16:creationId xmlns:a16="http://schemas.microsoft.com/office/drawing/2014/main" id="{92FE83F8-36A8-6031-AC00-C082CBCB8445}"/>
+              </a:ext>
+            </a:extLst>
+          </p:cNvPr>
+          <p:cNvSpPr txBox="1"/>
+          <p:nvPr/>
+        </p:nvSpPr>
+        <p:spPr>
+          <a:xfrm>
+            <a:off x="559528" y="1196976"/>
+            <a:ext cx="10986284" cy="423834"/>
+          </a:xfrm>
+          <a:prstGeom prst="rect">
+            <a:avLst/>
+          </a:prstGeom>
+          <a:noFill/>
+        </p:spPr>
+        <p:txBody>
+          <a:bodyPr wrap="square">
+            <a:spAutoFit/>
+          </a:bodyPr>
+          <a:lstStyle/>
+          <a:p>
+            <a:pPr marL="285750" indent="-285750">
+              <a:lnSpc>
+                <a:spcPct val="150000"/>
+              </a:lnSpc>
+              <a:buFont typeface="Wingdings" panose="05000000000000000000" pitchFamily="2" charset="2"/>
+              <a:buChar char="§"/>
+            </a:pPr>
+            <a:r>
+              <a:rPr lang="ko-KR" altLang="en-US" sz="1600" dirty="0">
+                <a:latin typeface="D2Coding" panose="020B0609020101020101" pitchFamily="49" charset="-127"/>
+                <a:ea typeface="D2Coding" panose="020B0609020101020101" pitchFamily="49" charset="-127"/>
+              </a:rPr>
+              <a:t>오디오 파형이나 텍스트처럼 </a:t>
+            </a:r>
+            <a:r>
+              <a:rPr lang="en-US" altLang="ko-KR" sz="1600" dirty="0">
+                <a:latin typeface="D2Coding" panose="020B0609020101020101" pitchFamily="49" charset="-127"/>
+                <a:ea typeface="D2Coding" panose="020B0609020101020101" pitchFamily="49" charset="-127"/>
+              </a:rPr>
+              <a:t>"</a:t>
+            </a:r>
+            <a:r>
+              <a:rPr lang="ko-KR" altLang="en-US" sz="1600" dirty="0">
+                <a:latin typeface="D2Coding" panose="020B0609020101020101" pitchFamily="49" charset="-127"/>
+                <a:ea typeface="D2Coding" panose="020B0609020101020101" pitchFamily="49" charset="-127"/>
+              </a:rPr>
+              <a:t>패턴이 어디서 나타나든 같은 의미를 가지는</a:t>
+            </a:r>
+            <a:r>
+              <a:rPr lang="en-US" altLang="ko-KR" sz="1600" dirty="0">
+                <a:latin typeface="D2Coding" panose="020B0609020101020101" pitchFamily="49" charset="-127"/>
+                <a:ea typeface="D2Coding" panose="020B0609020101020101" pitchFamily="49" charset="-127"/>
+              </a:rPr>
+              <a:t>" </a:t>
+            </a:r>
+            <a:r>
+              <a:rPr lang="ko-KR" altLang="en-US" sz="1600" dirty="0">
+                <a:latin typeface="D2Coding" panose="020B0609020101020101" pitchFamily="49" charset="-127"/>
+                <a:ea typeface="D2Coding" panose="020B0609020101020101" pitchFamily="49" charset="-127"/>
+              </a:rPr>
+              <a:t>데이터에 특히 </a:t>
+            </a:r>
+            <a:endParaRPr lang="en-US" altLang="ko-KR" sz="1600" dirty="0">
+              <a:latin typeface="D2Coding" panose="020B0609020101020101" pitchFamily="49" charset="-127"/>
+              <a:ea typeface="D2Coding" panose="020B0609020101020101" pitchFamily="49" charset="-127"/>
+            </a:endParaRPr>
+          </a:p>
+        </p:txBody>
+      </p:sp>
+      <p:sp>
+        <p:nvSpPr>
+          <p:cNvPr id="2" name="AutoShape 2" descr="1-D convolution">
+            <a:extLst>
+              <a:ext uri="{FF2B5EF4-FFF2-40B4-BE49-F238E27FC236}">
+                <a16:creationId xmlns:a16="http://schemas.microsoft.com/office/drawing/2014/main" id="{6C3B461C-7D12-B35F-31D3-B7CC10AAD4AF}"/>
+              </a:ext>
+            </a:extLst>
+          </p:cNvPr>
+          <p:cNvSpPr>
+            <a:spLocks noChangeAspect="1" noChangeArrowheads="1"/>
+          </p:cNvSpPr>
+          <p:nvPr/>
+        </p:nvSpPr>
+        <p:spPr bwMode="auto">
+          <a:xfrm>
+            <a:off x="5943600" y="3276600"/>
+            <a:ext cx="304800" cy="304800"/>
+          </a:xfrm>
+          <a:prstGeom prst="rect">
+            <a:avLst/>
+          </a:prstGeom>
+          <a:noFill/>
+          <a:extLst>
+            <a:ext uri="{909E8E84-426E-40DD-AFC4-6F175D3DCCD1}">
+              <a14:hiddenFill xmlns:a14="http://schemas.microsoft.com/office/drawing/2010/main">
+                <a:solidFill>
+                  <a:srgbClr val="FFFFFF"/>
+                </a:solidFill>
+              </a14:hiddenFill>
+            </a:ext>
+          </a:extLst>
+        </p:spPr>
+        <p:txBody>
+          <a:bodyPr vert="horz" wrap="square" lIns="91440" tIns="45720" rIns="91440" bIns="45720" numCol="1" anchor="t" anchorCtr="0" compatLnSpc="1">
+            <a:prstTxWarp prst="textNoShape">
+              <a:avLst/>
+            </a:prstTxWarp>
+          </a:bodyPr>
+          <a:lstStyle/>
+          <a:p>
+            <a:endParaRPr lang="ko-KR" altLang="en-US"/>
+          </a:p>
+        </p:txBody>
+      </p:sp>
+      <p:pic>
+        <p:nvPicPr>
+          <p:cNvPr id="7" name="그림 6">
+            <a:extLst>
+              <a:ext uri="{FF2B5EF4-FFF2-40B4-BE49-F238E27FC236}">
+                <a16:creationId xmlns:a16="http://schemas.microsoft.com/office/drawing/2014/main" id="{E412CF84-A41B-783A-9C4F-FA9BC386DFEF}"/>
+              </a:ext>
+            </a:extLst>
+          </p:cNvPr>
+          <p:cNvPicPr>
+            <a:picLocks noChangeAspect="1"/>
+          </p:cNvPicPr>
+          <p:nvPr/>
+        </p:nvPicPr>
+        <p:blipFill>
+          <a:blip r:embed="rId2"/>
+          <a:stretch>
+            <a:fillRect/>
+          </a:stretch>
+        </p:blipFill>
+        <p:spPr>
+          <a:xfrm>
+            <a:off x="2078436" y="2426883"/>
+            <a:ext cx="7148179" cy="2004234"/>
+          </a:xfrm>
+          <a:prstGeom prst="rect">
+            <a:avLst/>
+          </a:prstGeom>
+        </p:spPr>
+      </p:pic>
+      <p:sp>
+        <p:nvSpPr>
+          <p:cNvPr id="9" name="TextBox 8">
+            <a:extLst>
+              <a:ext uri="{FF2B5EF4-FFF2-40B4-BE49-F238E27FC236}">
+                <a16:creationId xmlns:a16="http://schemas.microsoft.com/office/drawing/2014/main" id="{0310F769-F44C-F11A-90D4-104EA576D86E}"/>
+              </a:ext>
+            </a:extLst>
+          </p:cNvPr>
+          <p:cNvSpPr txBox="1"/>
+          <p:nvPr/>
+        </p:nvSpPr>
+        <p:spPr>
+          <a:xfrm>
+            <a:off x="2009775" y="4629150"/>
+            <a:ext cx="5480988" cy="307777"/>
+          </a:xfrm>
+          <a:prstGeom prst="rect">
+            <a:avLst/>
+          </a:prstGeom>
+          <a:noFill/>
+        </p:spPr>
+        <p:txBody>
+          <a:bodyPr wrap="none" rtlCol="0">
+            <a:spAutoFit/>
+          </a:bodyPr>
+          <a:lstStyle/>
+          <a:p>
+            <a:r>
+              <a:rPr lang="ko-KR" altLang="en-US" sz="1400" dirty="0">
+                <a:latin typeface="D2Coding" panose="020B0609020101020101" pitchFamily="49" charset="-127"/>
+                <a:ea typeface="D2Coding" panose="020B0609020101020101" pitchFamily="49" charset="-127"/>
+                <a:hlinkClick r:id="rId3"/>
+              </a:rPr>
+              <a:t>자연어 처리를 위한 </a:t>
+            </a:r>
+            <a:r>
+              <a:rPr lang="en-US" altLang="ko-KR" sz="1400" dirty="0">
+                <a:latin typeface="D2Coding" panose="020B0609020101020101" pitchFamily="49" charset="-127"/>
+                <a:ea typeface="D2Coding" panose="020B0609020101020101" pitchFamily="49" charset="-127"/>
+                <a:hlinkClick r:id="rId3"/>
+              </a:rPr>
+              <a:t>1D CNN(1D Convolutional Neural Networks)</a:t>
+            </a:r>
+            <a:endParaRPr lang="ko-KR" altLang="en-US" sz="1400" dirty="0">
+              <a:latin typeface="D2Coding" panose="020B0609020101020101" pitchFamily="49" charset="-127"/>
+              <a:ea typeface="D2Coding" panose="020B0609020101020101" pitchFamily="49" charset="-127"/>
+            </a:endParaRPr>
+          </a:p>
+        </p:txBody>
+      </p:sp>
+      <p:sp>
+        <p:nvSpPr>
+          <p:cNvPr id="14" name="TextBox 13">
+            <a:extLst>
+              <a:ext uri="{FF2B5EF4-FFF2-40B4-BE49-F238E27FC236}">
+                <a16:creationId xmlns:a16="http://schemas.microsoft.com/office/drawing/2014/main" id="{6C14210D-7D59-9294-DCCB-1A1C423DA97B}"/>
+              </a:ext>
+            </a:extLst>
+          </p:cNvPr>
+          <p:cNvSpPr txBox="1"/>
+          <p:nvPr/>
+        </p:nvSpPr>
+        <p:spPr>
+          <a:xfrm>
+            <a:off x="2078436" y="5134960"/>
+            <a:ext cx="6096000" cy="369332"/>
+          </a:xfrm>
+          <a:prstGeom prst="rect">
+            <a:avLst/>
+          </a:prstGeom>
+          <a:noFill/>
+        </p:spPr>
+        <p:txBody>
+          <a:bodyPr wrap="square">
+            <a:spAutoFit/>
+          </a:bodyPr>
+          <a:lstStyle/>
+          <a:p>
+            <a:r>
+              <a:rPr lang="en-US" altLang="ko-KR" sz="1800" dirty="0">
+                <a:latin typeface="D2Coding" panose="020B0609020101020101" pitchFamily="49" charset="-127"/>
+                <a:ea typeface="D2Coding" panose="020B0609020101020101" pitchFamily="49" charset="-127"/>
+              </a:rPr>
+              <a:t>(</a:t>
+            </a:r>
+            <a:r>
+              <a:rPr lang="en-US" altLang="ko-KR" sz="1800" dirty="0" err="1">
+                <a:latin typeface="D2Coding" panose="020B0609020101020101" pitchFamily="49" charset="-127"/>
+                <a:ea typeface="D2Coding" panose="020B0609020101020101" pitchFamily="49" charset="-127"/>
+              </a:rPr>
+              <a:t>batch_size</a:t>
+            </a:r>
+            <a:r>
+              <a:rPr lang="en-US" altLang="ko-KR" sz="1800" dirty="0">
+                <a:latin typeface="D2Coding" panose="020B0609020101020101" pitchFamily="49" charset="-127"/>
+                <a:ea typeface="D2Coding" panose="020B0609020101020101" pitchFamily="49" charset="-127"/>
+              </a:rPr>
+              <a:t>, timesteps, features) =  (256, 120, 14)</a:t>
+            </a:r>
+            <a:endParaRPr lang="ko-KR" altLang="en-US" sz="1800" dirty="0">
+              <a:latin typeface="D2Coding" panose="020B0609020101020101" pitchFamily="49" charset="-127"/>
+              <a:ea typeface="D2Coding" panose="020B0609020101020101" pitchFamily="49" charset="-127"/>
+            </a:endParaRPr>
+          </a:p>
+        </p:txBody>
+      </p:sp>
+    </p:spTree>
+    <p:extLst>
+      <p:ext uri="{BB962C8B-B14F-4D97-AF65-F5344CB8AC3E}">
+        <p14:creationId xmlns:p14="http://schemas.microsoft.com/office/powerpoint/2010/main" val="2512681007"/>
+      </p:ext>
+    </p:extLst>
+  </p:cSld>
+  <p:clrMapOvr>
+    <a:masterClrMapping/>
+  </p:clrMapOvr>
+</p:sld>
+</file>
+
+<file path=ppt/slides/slide17.xml><?xml version="1.0" encoding="utf-8"?>
 <p:sld xmlns:a="http://schemas.openxmlformats.org/drawingml/2006/main" xmlns:r="http://schemas.openxmlformats.org/officeDocument/2006/relationships" xmlns:p="http://schemas.openxmlformats.org/presentationml/2006/main">
   <p:cSld>
     <p:spTree>
@@ -8716,7 +10063,7 @@
                 <a:ea typeface="D2Coding" panose="020B0609020101020101" pitchFamily="49" charset="-127"/>
                 <a:cs typeface="Segoe UI Light" panose="020B0502040204020203" pitchFamily="34" charset="0"/>
               </a:rPr>
-              <a:t>Recurrent Neural Network(RNN)</a:t>
+              <a:t>1D CNN(1D Convolutional Neural Networks)</a:t>
             </a:r>
             <a:endParaRPr lang="ko-KR" altLang="en-US" sz="2800" cap="none" dirty="0">
               <a:solidFill>
@@ -8764,7 +10111,7 @@
                 <a:cs typeface="Times New Roman" panose="02020603050405020304" pitchFamily="18" charset="0"/>
               </a:rPr>
               <a:pPr/>
-              <a:t>16</a:t>
+              <a:t>17</a:t>
             </a:fld>
             <a:endParaRPr lang="en-US" sz="1400" b="1" dirty="0">
               <a:latin typeface="Times New Roman" panose="02020603050405020304" pitchFamily="18" charset="0"/>
@@ -8789,7 +10136,7 @@
         <p:spPr>
           <a:xfrm>
             <a:off x="559528" y="1196976"/>
-            <a:ext cx="10986284" cy="793166"/>
+            <a:ext cx="10986284" cy="1162498"/>
           </a:xfrm>
           <a:prstGeom prst="rect">
             <a:avLst/>
@@ -8802,145 +10149,174 @@
           </a:bodyPr>
           <a:lstStyle/>
           <a:p>
-            <a:pPr>
+            <a:pPr marL="285750" indent="-285750">
               <a:lnSpc>
                 <a:spcPct val="150000"/>
               </a:lnSpc>
-              <a:buNone/>
+              <a:buFont typeface="Wingdings" panose="05000000000000000000" pitchFamily="2" charset="2"/>
+              <a:buChar char="§"/>
             </a:pPr>
             <a:r>
+              <a:rPr lang="en-US" altLang="ko-KR" sz="1600" dirty="0">
+                <a:latin typeface="D2Coding" panose="020B0609020101020101" pitchFamily="49" charset="-127"/>
+                <a:ea typeface="D2Coding" panose="020B0609020101020101" pitchFamily="49" charset="-127"/>
+              </a:rPr>
+              <a:t>GlobalAveragePooling1D</a:t>
+            </a:r>
+            <a:r>
               <a:rPr lang="ko-KR" altLang="en-US" sz="1600" dirty="0">
-                <a:effectLst/>
-                <a:latin typeface="D2Coding" panose="020B0609020101020101" pitchFamily="49" charset="-127"/>
-                <a:ea typeface="D2Coding" panose="020B0609020101020101" pitchFamily="49" charset="-127"/>
-              </a:rPr>
-              <a:t>모델 없이 그냥 마지막 </a:t>
+                <a:latin typeface="D2Coding" panose="020B0609020101020101" pitchFamily="49" charset="-127"/>
+                <a:ea typeface="D2Coding" panose="020B0609020101020101" pitchFamily="49" charset="-127"/>
+              </a:rPr>
+              <a:t>가 마지막에 시간 축 전체를 평균 내버리기 때문에</a:t>
+            </a:r>
+            <a:r>
+              <a:rPr lang="en-US" altLang="ko-KR" sz="1600" dirty="0">
+                <a:latin typeface="D2Coding" panose="020B0609020101020101" pitchFamily="49" charset="-127"/>
+                <a:ea typeface="D2Coding" panose="020B0609020101020101" pitchFamily="49" charset="-127"/>
+              </a:rPr>
+              <a:t>, </a:t>
+            </a:r>
+            <a:r>
+              <a:rPr lang="ko-KR" altLang="en-US" sz="1600" dirty="0">
+                <a:latin typeface="D2Coding" panose="020B0609020101020101" pitchFamily="49" charset="-127"/>
+                <a:ea typeface="D2Coding" panose="020B0609020101020101" pitchFamily="49" charset="-127"/>
+              </a:rPr>
+              <a:t>강력한 신호</a:t>
+            </a:r>
+            <a:r>
+              <a:rPr lang="en-US" altLang="ko-KR" sz="1600" dirty="0">
+                <a:latin typeface="D2Coding" panose="020B0609020101020101" pitchFamily="49" charset="-127"/>
+                <a:ea typeface="D2Coding" panose="020B0609020101020101" pitchFamily="49" charset="-127"/>
+              </a:rPr>
+              <a:t>(</a:t>
+            </a:r>
+            <a:r>
+              <a:rPr lang="ko-KR" altLang="en-US" sz="1600" dirty="0">
+                <a:latin typeface="D2Coding" panose="020B0609020101020101" pitchFamily="49" charset="-127"/>
+                <a:ea typeface="D2Coding" panose="020B0609020101020101" pitchFamily="49" charset="-127"/>
+              </a:rPr>
+              <a:t>최근성</a:t>
+            </a:r>
+            <a:r>
+              <a:rPr lang="en-US" altLang="ko-KR" sz="1600" dirty="0">
+                <a:latin typeface="D2Coding" panose="020B0609020101020101" pitchFamily="49" charset="-127"/>
+                <a:ea typeface="D2Coding" panose="020B0609020101020101" pitchFamily="49" charset="-127"/>
+              </a:rPr>
+              <a:t>)</a:t>
+            </a:r>
+            <a:r>
+              <a:rPr lang="ko-KR" altLang="en-US" sz="1600" dirty="0">
+                <a:latin typeface="D2Coding" panose="020B0609020101020101" pitchFamily="49" charset="-127"/>
+                <a:ea typeface="D2Coding" panose="020B0609020101020101" pitchFamily="49" charset="-127"/>
+              </a:rPr>
+              <a:t>를 제거</a:t>
+            </a:r>
+            <a:endParaRPr lang="en-US" altLang="ko-KR" sz="1600" dirty="0">
+              <a:latin typeface="D2Coding" panose="020B0609020101020101" pitchFamily="49" charset="-127"/>
+              <a:ea typeface="D2Coding" panose="020B0609020101020101" pitchFamily="49" charset="-127"/>
+            </a:endParaRPr>
+          </a:p>
+          <a:p>
+            <a:pPr marL="285750" indent="-285750">
+              <a:lnSpc>
+                <a:spcPct val="150000"/>
+              </a:lnSpc>
+              <a:buFont typeface="Wingdings" panose="05000000000000000000" pitchFamily="2" charset="2"/>
+              <a:buChar char="§"/>
+            </a:pPr>
+            <a:r>
+              <a:rPr lang="en-US" altLang="ko-KR" sz="1600" dirty="0">
+                <a:latin typeface="D2Coding" panose="020B0609020101020101" pitchFamily="49" charset="-127"/>
+                <a:ea typeface="D2Coding" panose="020B0609020101020101" pitchFamily="49" charset="-127"/>
+              </a:rPr>
+              <a:t>1D </a:t>
             </a:r>
             <a:r>
               <a:rPr lang="ko-KR" altLang="en-US" sz="1600" dirty="0" err="1">
-                <a:effectLst/>
-                <a:latin typeface="D2Coding" panose="020B0609020101020101" pitchFamily="49" charset="-127"/>
-                <a:ea typeface="D2Coding" panose="020B0609020101020101" pitchFamily="49" charset="-127"/>
-              </a:rPr>
-              <a:t>관측값을</a:t>
+                <a:latin typeface="D2Coding" panose="020B0609020101020101" pitchFamily="49" charset="-127"/>
+                <a:ea typeface="D2Coding" panose="020B0609020101020101" pitchFamily="49" charset="-127"/>
+              </a:rPr>
+              <a:t>합성곱은</a:t>
             </a:r>
             <a:r>
               <a:rPr lang="ko-KR" altLang="en-US" sz="1600" dirty="0">
-                <a:effectLst/>
-                <a:latin typeface="D2Coding" panose="020B0609020101020101" pitchFamily="49" charset="-127"/>
-                <a:ea typeface="D2Coding" panose="020B0609020101020101" pitchFamily="49" charset="-127"/>
-              </a:rPr>
-              <a:t> 그대로 미래 예측치로 쓰는 모델</a:t>
+                <a:latin typeface="D2Coding" panose="020B0609020101020101" pitchFamily="49" charset="-127"/>
+                <a:ea typeface="D2Coding" panose="020B0609020101020101" pitchFamily="49" charset="-127"/>
+              </a:rPr>
+              <a:t> </a:t>
             </a:r>
             <a:r>
               <a:rPr lang="en-US" altLang="ko-KR" sz="1600" dirty="0">
-                <a:effectLst/>
-                <a:latin typeface="D2Coding" panose="020B0609020101020101" pitchFamily="49" charset="-127"/>
-                <a:ea typeface="D2Coding" panose="020B0609020101020101" pitchFamily="49" charset="-127"/>
-              </a:rPr>
-              <a:t>(2.61)</a:t>
+                <a:latin typeface="D2Coding" panose="020B0609020101020101" pitchFamily="49" charset="-127"/>
+                <a:ea typeface="D2Coding" panose="020B0609020101020101" pitchFamily="49" charset="-127"/>
+              </a:rPr>
+              <a:t>"</a:t>
             </a:r>
             <a:r>
               <a:rPr lang="ko-KR" altLang="en-US" sz="1600" dirty="0">
-                <a:effectLst/>
-                <a:latin typeface="D2Coding" panose="020B0609020101020101" pitchFamily="49" charset="-127"/>
-                <a:ea typeface="D2Coding" panose="020B0609020101020101" pitchFamily="49" charset="-127"/>
-              </a:rPr>
-              <a:t>이 </a:t>
+                <a:latin typeface="D2Coding" panose="020B0609020101020101" pitchFamily="49" charset="-127"/>
+                <a:ea typeface="D2Coding" panose="020B0609020101020101" pitchFamily="49" charset="-127"/>
+              </a:rPr>
+              <a:t>위치에 상관없이 나타나는 지역 패턴</a:t>
             </a:r>
             <a:r>
               <a:rPr lang="en-US" altLang="ko-KR" sz="1600" dirty="0">
                 <a:latin typeface="D2Coding" panose="020B0609020101020101" pitchFamily="49" charset="-127"/>
                 <a:ea typeface="D2Coding" panose="020B0609020101020101" pitchFamily="49" charset="-127"/>
               </a:rPr>
-              <a:t>Dense</a:t>
+              <a:t>"</a:t>
             </a:r>
             <a:r>
               <a:rPr lang="ko-KR" altLang="en-US" sz="1600" dirty="0">
                 <a:latin typeface="D2Coding" panose="020B0609020101020101" pitchFamily="49" charset="-127"/>
                 <a:ea typeface="D2Coding" panose="020B0609020101020101" pitchFamily="49" charset="-127"/>
               </a:rPr>
-              <a:t> </a:t>
+              <a:t>을 잡는 데는 강하지만</a:t>
             </a:r>
             <a:r>
               <a:rPr lang="en-US" altLang="ko-KR" sz="1600" dirty="0">
                 <a:latin typeface="D2Coding" panose="020B0609020101020101" pitchFamily="49" charset="-127"/>
                 <a:ea typeface="D2Coding" panose="020B0609020101020101" pitchFamily="49" charset="-127"/>
               </a:rPr>
-              <a:t>layer(2.69),</a:t>
+              <a:t>, </a:t>
             </a:r>
             <a:r>
               <a:rPr lang="ko-KR" altLang="en-US" sz="1600" dirty="0">
                 <a:latin typeface="D2Coding" panose="020B0609020101020101" pitchFamily="49" charset="-127"/>
                 <a:ea typeface="D2Coding" panose="020B0609020101020101" pitchFamily="49" charset="-127"/>
               </a:rPr>
-              <a:t> </a:t>
+              <a:t>온도처럼 </a:t>
             </a:r>
             <a:r>
               <a:rPr lang="en-US" altLang="ko-KR" sz="1600" dirty="0">
                 <a:latin typeface="D2Coding" panose="020B0609020101020101" pitchFamily="49" charset="-127"/>
                 <a:ea typeface="D2Coding" panose="020B0609020101020101" pitchFamily="49" charset="-127"/>
               </a:rPr>
-              <a:t>1D Convnet(3.13), RNN(2.61) </a:t>
+              <a:t>"</a:t>
             </a:r>
             <a:r>
               <a:rPr lang="ko-KR" altLang="en-US" sz="1600" dirty="0">
                 <a:latin typeface="D2Coding" panose="020B0609020101020101" pitchFamily="49" charset="-127"/>
                 <a:ea typeface="D2Coding" panose="020B0609020101020101" pitchFamily="49" charset="-127"/>
               </a:rPr>
-              <a:t>등의</a:t>
+              <a:t>가장 최근 흐름</a:t>
             </a:r>
             <a:r>
               <a:rPr lang="en-US" altLang="ko-KR" sz="1600" dirty="0">
                 <a:latin typeface="D2Coding" panose="020B0609020101020101" pitchFamily="49" charset="-127"/>
                 <a:ea typeface="D2Coding" panose="020B0609020101020101" pitchFamily="49" charset="-127"/>
               </a:rPr>
-              <a:t> </a:t>
+              <a:t>"</a:t>
             </a:r>
             <a:r>
               <a:rPr lang="ko-KR" altLang="en-US" sz="1600" dirty="0">
                 <a:latin typeface="D2Coding" panose="020B0609020101020101" pitchFamily="49" charset="-127"/>
                 <a:ea typeface="D2Coding" panose="020B0609020101020101" pitchFamily="49" charset="-127"/>
               </a:rPr>
-              <a:t>딥러닝 모델과 비교하여 성능 차이가 거의 없음</a:t>
-            </a:r>
-            <a:r>
-              <a:rPr lang="en-US" altLang="ko-KR" sz="1600" dirty="0">
-                <a:latin typeface="D2Coding" panose="020B0609020101020101" pitchFamily="49" charset="-127"/>
-                <a:ea typeface="D2Coding" panose="020B0609020101020101" pitchFamily="49" charset="-127"/>
-              </a:rPr>
-              <a:t>(</a:t>
-            </a:r>
-            <a:r>
-              <a:rPr lang="ko-KR" altLang="en-US" sz="1600" dirty="0">
-                <a:latin typeface="D2Coding" panose="020B0609020101020101" pitchFamily="49" charset="-127"/>
-                <a:ea typeface="D2Coding" panose="020B0609020101020101" pitchFamily="49" charset="-127"/>
-              </a:rPr>
-              <a:t>각</a:t>
-            </a:r>
-            <a:r>
-              <a:rPr lang="en-US" altLang="ko-KR" sz="1600" dirty="0">
-                <a:latin typeface="D2Coding" panose="020B0609020101020101" pitchFamily="49" charset="-127"/>
-                <a:ea typeface="D2Coding" panose="020B0609020101020101" pitchFamily="49" charset="-127"/>
-              </a:rPr>
-              <a:t> </a:t>
-            </a:r>
-            <a:r>
-              <a:rPr lang="ko-KR" altLang="en-US" sz="1600" dirty="0">
-                <a:latin typeface="D2Coding" panose="020B0609020101020101" pitchFamily="49" charset="-127"/>
-                <a:ea typeface="D2Coding" panose="020B0609020101020101" pitchFamily="49" charset="-127"/>
-              </a:rPr>
-              <a:t>모델의 </a:t>
-            </a:r>
-            <a:r>
-              <a:rPr lang="en-US" altLang="ko-KR" sz="1600" dirty="0">
-                <a:latin typeface="D2Coding" panose="020B0609020101020101" pitchFamily="49" charset="-127"/>
-                <a:ea typeface="D2Coding" panose="020B0609020101020101" pitchFamily="49" charset="-127"/>
-              </a:rPr>
-              <a:t>MAE)</a:t>
-            </a:r>
-            <a:endParaRPr lang="ko-KR" altLang="en-US" sz="1600" dirty="0">
-              <a:effectLst/>
+              <a:t>이 결정적인 시계열에는 구조적으로 잘 안 맞기 때문</a:t>
+            </a:r>
+            <a:endParaRPr lang="en-US" altLang="ko-KR" sz="1600" dirty="0">
               <a:latin typeface="D2Coding" panose="020B0609020101020101" pitchFamily="49" charset="-127"/>
               <a:ea typeface="D2Coding" panose="020B0609020101020101" pitchFamily="49" charset="-127"/>
             </a:endParaRPr>
@@ -8963,7 +10339,7 @@
         </p:nvSpPr>
         <p:spPr bwMode="auto">
           <a:xfrm>
-            <a:off x="5943600" y="3276600"/>
+            <a:off x="5943600" y="3533775"/>
             <a:ext cx="304800" cy="304800"/>
           </a:xfrm>
           <a:prstGeom prst="rect">
@@ -8992,36 +10368,2023 @@
           </a:p>
         </p:txBody>
       </p:sp>
-      <p:pic>
-        <p:nvPicPr>
-          <p:cNvPr id="7" name="그림 6">
+      <p:sp>
+        <p:nvSpPr>
+          <p:cNvPr id="16" name="TextBox 15">
             <a:extLst>
               <a:ext uri="{FF2B5EF4-FFF2-40B4-BE49-F238E27FC236}">
-                <a16:creationId xmlns:a16="http://schemas.microsoft.com/office/drawing/2014/main" id="{5BBA9A35-3077-C662-F52E-A0EB5B27B029}"/>
+                <a16:creationId xmlns:a16="http://schemas.microsoft.com/office/drawing/2014/main" id="{80102E7F-A8A1-6302-D076-95538DFABF5D}"/>
               </a:ext>
             </a:extLst>
           </p:cNvPr>
-          <p:cNvPicPr>
-            <a:picLocks noChangeAspect="1"/>
-          </p:cNvPicPr>
+          <p:cNvSpPr txBox="1"/>
           <p:nvPr/>
-        </p:nvPicPr>
-        <p:blipFill>
-          <a:blip r:embed="rId2"/>
-          <a:stretch>
-            <a:fillRect/>
-          </a:stretch>
-        </p:blipFill>
+        </p:nvSpPr>
         <p:spPr>
           <a:xfrm>
-            <a:off x="2521910" y="2426883"/>
-            <a:ext cx="7148179" cy="2004234"/>
+            <a:off x="685800" y="2800350"/>
+            <a:ext cx="4143375" cy="1938992"/>
           </a:xfrm>
           <a:prstGeom prst="rect">
             <a:avLst/>
           </a:prstGeom>
+          <a:solidFill>
+            <a:srgbClr val="76E3FF"/>
+          </a:solidFill>
         </p:spPr>
-      </p:pic>
+        <p:txBody>
+          <a:bodyPr wrap="square">
+            <a:spAutoFit/>
+          </a:bodyPr>
+          <a:lstStyle/>
+          <a:p>
+            <a:pPr algn="l">
+              <a:buNone/>
+            </a:pPr>
+            <a:r>
+              <a:rPr lang="en-US" altLang="ko-KR" sz="1200" b="0" i="0" dirty="0">
+                <a:solidFill>
+                  <a:srgbClr val="14181F"/>
+                </a:solidFill>
+                <a:effectLst/>
+                <a:latin typeface="D2Coding" panose="020B0609020101020101" pitchFamily="49" charset="-127"/>
+                <a:ea typeface="D2Coding" panose="020B0609020101020101" pitchFamily="49" charset="-127"/>
+              </a:rPr>
+              <a:t>inputs = </a:t>
+            </a:r>
+            <a:r>
+              <a:rPr lang="en-US" altLang="ko-KR" sz="1200" b="0" i="0" dirty="0" err="1">
+                <a:solidFill>
+                  <a:srgbClr val="14181F"/>
+                </a:solidFill>
+                <a:effectLst/>
+                <a:latin typeface="D2Coding" panose="020B0609020101020101" pitchFamily="49" charset="-127"/>
+                <a:ea typeface="D2Coding" panose="020B0609020101020101" pitchFamily="49" charset="-127"/>
+              </a:rPr>
+              <a:t>keras.Input</a:t>
+            </a:r>
+            <a:r>
+              <a:rPr lang="en-US" altLang="ko-KR" sz="1200" b="0" i="0" dirty="0">
+                <a:solidFill>
+                  <a:srgbClr val="14181F"/>
+                </a:solidFill>
+                <a:effectLst/>
+                <a:latin typeface="D2Coding" panose="020B0609020101020101" pitchFamily="49" charset="-127"/>
+                <a:ea typeface="D2Coding" panose="020B0609020101020101" pitchFamily="49" charset="-127"/>
+              </a:rPr>
+              <a:t>(shape=(</a:t>
+            </a:r>
+            <a:r>
+              <a:rPr lang="en-US" altLang="ko-KR" sz="1200" b="0" i="0" dirty="0" err="1">
+                <a:solidFill>
+                  <a:srgbClr val="14181F"/>
+                </a:solidFill>
+                <a:effectLst/>
+                <a:latin typeface="D2Coding" panose="020B0609020101020101" pitchFamily="49" charset="-127"/>
+                <a:ea typeface="D2Coding" panose="020B0609020101020101" pitchFamily="49" charset="-127"/>
+              </a:rPr>
+              <a:t>sequence_length</a:t>
+            </a:r>
+            <a:r>
+              <a:rPr lang="en-US" altLang="ko-KR" sz="1200" b="0" i="0" dirty="0">
+                <a:solidFill>
+                  <a:srgbClr val="14181F"/>
+                </a:solidFill>
+                <a:effectLst/>
+                <a:latin typeface="D2Coding" panose="020B0609020101020101" pitchFamily="49" charset="-127"/>
+                <a:ea typeface="D2Coding" panose="020B0609020101020101" pitchFamily="49" charset="-127"/>
+              </a:rPr>
+              <a:t>, </a:t>
+            </a:r>
+            <a:r>
+              <a:rPr lang="en-US" altLang="ko-KR" sz="1200" b="0" i="0" dirty="0" err="1">
+                <a:solidFill>
+                  <a:srgbClr val="14181F"/>
+                </a:solidFill>
+                <a:effectLst/>
+                <a:latin typeface="D2Coding" panose="020B0609020101020101" pitchFamily="49" charset="-127"/>
+                <a:ea typeface="D2Coding" panose="020B0609020101020101" pitchFamily="49" charset="-127"/>
+              </a:rPr>
+              <a:t>raw_data.shape</a:t>
+            </a:r>
+            <a:r>
+              <a:rPr lang="en-US" altLang="ko-KR" sz="1200" b="0" i="0" dirty="0">
+                <a:solidFill>
+                  <a:srgbClr val="14181F"/>
+                </a:solidFill>
+                <a:effectLst/>
+                <a:latin typeface="D2Coding" panose="020B0609020101020101" pitchFamily="49" charset="-127"/>
+                <a:ea typeface="D2Coding" panose="020B0609020101020101" pitchFamily="49" charset="-127"/>
+              </a:rPr>
+              <a:t>[-1]))</a:t>
+            </a:r>
+          </a:p>
+          <a:p>
+            <a:pPr algn="l">
+              <a:buNone/>
+            </a:pPr>
+            <a:r>
+              <a:rPr lang="en-US" altLang="ko-KR" sz="1200" b="0" i="0" dirty="0">
+                <a:solidFill>
+                  <a:srgbClr val="14181F"/>
+                </a:solidFill>
+                <a:effectLst/>
+                <a:latin typeface="D2Coding" panose="020B0609020101020101" pitchFamily="49" charset="-127"/>
+                <a:ea typeface="D2Coding" panose="020B0609020101020101" pitchFamily="49" charset="-127"/>
+              </a:rPr>
+              <a:t>x = layers.Conv1D(8, 24, activation="</a:t>
+            </a:r>
+            <a:r>
+              <a:rPr lang="en-US" altLang="ko-KR" sz="1200" b="0" i="0" dirty="0" err="1">
+                <a:solidFill>
+                  <a:srgbClr val="14181F"/>
+                </a:solidFill>
+                <a:effectLst/>
+                <a:latin typeface="D2Coding" panose="020B0609020101020101" pitchFamily="49" charset="-127"/>
+                <a:ea typeface="D2Coding" panose="020B0609020101020101" pitchFamily="49" charset="-127"/>
+              </a:rPr>
+              <a:t>relu</a:t>
+            </a:r>
+            <a:r>
+              <a:rPr lang="en-US" altLang="ko-KR" sz="1200" b="0" i="0" dirty="0">
+                <a:solidFill>
+                  <a:srgbClr val="14181F"/>
+                </a:solidFill>
+                <a:effectLst/>
+                <a:latin typeface="D2Coding" panose="020B0609020101020101" pitchFamily="49" charset="-127"/>
+                <a:ea typeface="D2Coding" panose="020B0609020101020101" pitchFamily="49" charset="-127"/>
+              </a:rPr>
+              <a:t>")(inputs)</a:t>
+            </a:r>
+          </a:p>
+          <a:p>
+            <a:pPr algn="l">
+              <a:buNone/>
+            </a:pPr>
+            <a:r>
+              <a:rPr lang="en-US" altLang="ko-KR" sz="1200" b="0" i="0" dirty="0">
+                <a:solidFill>
+                  <a:srgbClr val="14181F"/>
+                </a:solidFill>
+                <a:effectLst/>
+                <a:latin typeface="D2Coding" panose="020B0609020101020101" pitchFamily="49" charset="-127"/>
+                <a:ea typeface="D2Coding" panose="020B0609020101020101" pitchFamily="49" charset="-127"/>
+              </a:rPr>
+              <a:t>x = layers.MaxPooling1D(2)(x)</a:t>
+            </a:r>
+          </a:p>
+          <a:p>
+            <a:pPr algn="l">
+              <a:buNone/>
+            </a:pPr>
+            <a:r>
+              <a:rPr lang="en-US" altLang="ko-KR" sz="1200" b="0" i="0" dirty="0">
+                <a:solidFill>
+                  <a:srgbClr val="14181F"/>
+                </a:solidFill>
+                <a:effectLst/>
+                <a:latin typeface="D2Coding" panose="020B0609020101020101" pitchFamily="49" charset="-127"/>
+                <a:ea typeface="D2Coding" panose="020B0609020101020101" pitchFamily="49" charset="-127"/>
+              </a:rPr>
+              <a:t>x = layers.Conv1D(8, 12, activation="</a:t>
+            </a:r>
+            <a:r>
+              <a:rPr lang="en-US" altLang="ko-KR" sz="1200" b="0" i="0" dirty="0" err="1">
+                <a:solidFill>
+                  <a:srgbClr val="14181F"/>
+                </a:solidFill>
+                <a:effectLst/>
+                <a:latin typeface="D2Coding" panose="020B0609020101020101" pitchFamily="49" charset="-127"/>
+                <a:ea typeface="D2Coding" panose="020B0609020101020101" pitchFamily="49" charset="-127"/>
+              </a:rPr>
+              <a:t>relu</a:t>
+            </a:r>
+            <a:r>
+              <a:rPr lang="en-US" altLang="ko-KR" sz="1200" b="0" i="0" dirty="0">
+                <a:solidFill>
+                  <a:srgbClr val="14181F"/>
+                </a:solidFill>
+                <a:effectLst/>
+                <a:latin typeface="D2Coding" panose="020B0609020101020101" pitchFamily="49" charset="-127"/>
+                <a:ea typeface="D2Coding" panose="020B0609020101020101" pitchFamily="49" charset="-127"/>
+              </a:rPr>
+              <a:t>")(x)</a:t>
+            </a:r>
+          </a:p>
+          <a:p>
+            <a:pPr algn="l">
+              <a:buNone/>
+            </a:pPr>
+            <a:r>
+              <a:rPr lang="en-US" altLang="ko-KR" sz="1200" b="0" i="0" dirty="0">
+                <a:solidFill>
+                  <a:srgbClr val="14181F"/>
+                </a:solidFill>
+                <a:effectLst/>
+                <a:latin typeface="D2Coding" panose="020B0609020101020101" pitchFamily="49" charset="-127"/>
+                <a:ea typeface="D2Coding" panose="020B0609020101020101" pitchFamily="49" charset="-127"/>
+              </a:rPr>
+              <a:t>x = layers.MaxPooling1D(2)(x)</a:t>
+            </a:r>
+          </a:p>
+          <a:p>
+            <a:pPr algn="l">
+              <a:buNone/>
+            </a:pPr>
+            <a:r>
+              <a:rPr lang="en-US" altLang="ko-KR" sz="1200" b="0" i="0" dirty="0">
+                <a:solidFill>
+                  <a:srgbClr val="14181F"/>
+                </a:solidFill>
+                <a:effectLst/>
+                <a:latin typeface="D2Coding" panose="020B0609020101020101" pitchFamily="49" charset="-127"/>
+                <a:ea typeface="D2Coding" panose="020B0609020101020101" pitchFamily="49" charset="-127"/>
+              </a:rPr>
+              <a:t>x = layers.Conv1D(8, 6, activation="</a:t>
+            </a:r>
+            <a:r>
+              <a:rPr lang="en-US" altLang="ko-KR" sz="1200" b="0" i="0" dirty="0" err="1">
+                <a:solidFill>
+                  <a:srgbClr val="14181F"/>
+                </a:solidFill>
+                <a:effectLst/>
+                <a:latin typeface="D2Coding" panose="020B0609020101020101" pitchFamily="49" charset="-127"/>
+                <a:ea typeface="D2Coding" panose="020B0609020101020101" pitchFamily="49" charset="-127"/>
+              </a:rPr>
+              <a:t>relu</a:t>
+            </a:r>
+            <a:r>
+              <a:rPr lang="en-US" altLang="ko-KR" sz="1200" b="0" i="0" dirty="0">
+                <a:solidFill>
+                  <a:srgbClr val="14181F"/>
+                </a:solidFill>
+                <a:effectLst/>
+                <a:latin typeface="D2Coding" panose="020B0609020101020101" pitchFamily="49" charset="-127"/>
+                <a:ea typeface="D2Coding" panose="020B0609020101020101" pitchFamily="49" charset="-127"/>
+              </a:rPr>
+              <a:t>")(x)</a:t>
+            </a:r>
+          </a:p>
+          <a:p>
+            <a:pPr algn="l">
+              <a:buNone/>
+            </a:pPr>
+            <a:r>
+              <a:rPr lang="en-US" altLang="ko-KR" sz="1200" b="0" i="0" dirty="0">
+                <a:solidFill>
+                  <a:srgbClr val="14181F"/>
+                </a:solidFill>
+                <a:effectLst/>
+                <a:latin typeface="D2Coding" panose="020B0609020101020101" pitchFamily="49" charset="-127"/>
+                <a:ea typeface="D2Coding" panose="020B0609020101020101" pitchFamily="49" charset="-127"/>
+              </a:rPr>
+              <a:t>x = layers.GlobalAveragePooling1D()(x)</a:t>
+            </a:r>
+          </a:p>
+          <a:p>
+            <a:pPr algn="l">
+              <a:buNone/>
+            </a:pPr>
+            <a:r>
+              <a:rPr lang="en-US" altLang="ko-KR" sz="1200" b="0" i="0" dirty="0">
+                <a:solidFill>
+                  <a:srgbClr val="14181F"/>
+                </a:solidFill>
+                <a:effectLst/>
+                <a:latin typeface="D2Coding" panose="020B0609020101020101" pitchFamily="49" charset="-127"/>
+                <a:ea typeface="D2Coding" panose="020B0609020101020101" pitchFamily="49" charset="-127"/>
+              </a:rPr>
+              <a:t>outputs = </a:t>
+            </a:r>
+            <a:r>
+              <a:rPr lang="en-US" altLang="ko-KR" sz="1200" b="0" i="0" dirty="0" err="1">
+                <a:solidFill>
+                  <a:srgbClr val="14181F"/>
+                </a:solidFill>
+                <a:effectLst/>
+                <a:latin typeface="D2Coding" panose="020B0609020101020101" pitchFamily="49" charset="-127"/>
+                <a:ea typeface="D2Coding" panose="020B0609020101020101" pitchFamily="49" charset="-127"/>
+              </a:rPr>
+              <a:t>layers.Dense</a:t>
+            </a:r>
+            <a:r>
+              <a:rPr lang="en-US" altLang="ko-KR" sz="1200" b="0" i="0" dirty="0">
+                <a:solidFill>
+                  <a:srgbClr val="14181F"/>
+                </a:solidFill>
+                <a:effectLst/>
+                <a:latin typeface="D2Coding" panose="020B0609020101020101" pitchFamily="49" charset="-127"/>
+                <a:ea typeface="D2Coding" panose="020B0609020101020101" pitchFamily="49" charset="-127"/>
+              </a:rPr>
+              <a:t>(1)(x)</a:t>
+            </a:r>
+          </a:p>
+          <a:p>
+            <a:pPr algn="l">
+              <a:buNone/>
+            </a:pPr>
+            <a:r>
+              <a:rPr lang="en-US" altLang="ko-KR" sz="1200" b="0" i="0" dirty="0">
+                <a:solidFill>
+                  <a:srgbClr val="14181F"/>
+                </a:solidFill>
+                <a:effectLst/>
+                <a:latin typeface="D2Coding" panose="020B0609020101020101" pitchFamily="49" charset="-127"/>
+                <a:ea typeface="D2Coding" panose="020B0609020101020101" pitchFamily="49" charset="-127"/>
+              </a:rPr>
+              <a:t>model = </a:t>
+            </a:r>
+            <a:r>
+              <a:rPr lang="en-US" altLang="ko-KR" sz="1200" b="0" i="0" dirty="0" err="1">
+                <a:solidFill>
+                  <a:srgbClr val="14181F"/>
+                </a:solidFill>
+                <a:effectLst/>
+                <a:latin typeface="D2Coding" panose="020B0609020101020101" pitchFamily="49" charset="-127"/>
+                <a:ea typeface="D2Coding" panose="020B0609020101020101" pitchFamily="49" charset="-127"/>
+              </a:rPr>
+              <a:t>keras.Model</a:t>
+            </a:r>
+            <a:r>
+              <a:rPr lang="en-US" altLang="ko-KR" sz="1200" b="0" i="0" dirty="0">
+                <a:solidFill>
+                  <a:srgbClr val="14181F"/>
+                </a:solidFill>
+                <a:effectLst/>
+                <a:latin typeface="D2Coding" panose="020B0609020101020101" pitchFamily="49" charset="-127"/>
+                <a:ea typeface="D2Coding" panose="020B0609020101020101" pitchFamily="49" charset="-127"/>
+              </a:rPr>
+              <a:t>(inputs, outputs)</a:t>
+            </a:r>
+          </a:p>
+        </p:txBody>
+      </p:sp>
+      <mc:AlternateContent xmlns:mc="http://schemas.openxmlformats.org/markup-compatibility/2006">
+        <mc:Choice xmlns:a14="http://schemas.microsoft.com/office/drawing/2010/main" Requires="a14">
+          <p:sp>
+            <p:nvSpPr>
+              <p:cNvPr id="18" name="TextBox 17">
+                <a:extLst>
+                  <a:ext uri="{FF2B5EF4-FFF2-40B4-BE49-F238E27FC236}">
+                    <a16:creationId xmlns:a16="http://schemas.microsoft.com/office/drawing/2014/main" id="{48C85ABC-849F-62D3-3CB1-999AD960394D}"/>
+                  </a:ext>
+                </a:extLst>
+              </p:cNvPr>
+              <p:cNvSpPr txBox="1"/>
+              <p:nvPr/>
+            </p:nvSpPr>
+            <p:spPr>
+              <a:xfrm>
+                <a:off x="4829175" y="2800350"/>
+                <a:ext cx="7086857" cy="3600986"/>
+              </a:xfrm>
+              <a:prstGeom prst="rect">
+                <a:avLst/>
+              </a:prstGeom>
+              <a:solidFill>
+                <a:schemeClr val="tx1"/>
+              </a:solidFill>
+              <a:ln>
+                <a:solidFill>
+                  <a:schemeClr val="tx1"/>
+                </a:solidFill>
+              </a:ln>
+            </p:spPr>
+            <p:txBody>
+              <a:bodyPr wrap="square">
+                <a:spAutoFit/>
+              </a:bodyPr>
+              <a:lstStyle/>
+              <a:p>
+                <a:pPr marL="342900" indent="-342900" rtl="0">
+                  <a:buFont typeface="+mj-lt"/>
+                  <a:buAutoNum type="arabicParenR"/>
+                </a:pPr>
+                <a:r>
+                  <a:rPr lang="en-US" altLang="ko-KR" sz="1200" dirty="0" err="1">
+                    <a:solidFill>
+                      <a:schemeClr val="bg1"/>
+                    </a:solidFill>
+                    <a:latin typeface="D2Coding" panose="020B0609020101020101" pitchFamily="49" charset="-127"/>
+                    <a:ea typeface="D2Coding" panose="020B0609020101020101" pitchFamily="49" charset="-127"/>
+                  </a:rPr>
+                  <a:t>keras.Input</a:t>
+                </a:r>
+                <a:r>
+                  <a:rPr lang="en-US" altLang="ko-KR" sz="1200" dirty="0">
+                    <a:solidFill>
+                      <a:schemeClr val="bg1"/>
+                    </a:solidFill>
+                    <a:latin typeface="D2Coding" panose="020B0609020101020101" pitchFamily="49" charset="-127"/>
+                    <a:ea typeface="D2Coding" panose="020B0609020101020101" pitchFamily="49" charset="-127"/>
+                  </a:rPr>
+                  <a:t>(shape=(120, 14))</a:t>
+                </a:r>
+                <a:endParaRPr lang="ko-KR" altLang="en-US" sz="1200" dirty="0">
+                  <a:solidFill>
+                    <a:schemeClr val="bg1"/>
+                  </a:solidFill>
+                  <a:latin typeface="D2Coding" panose="020B0609020101020101" pitchFamily="49" charset="-127"/>
+                  <a:ea typeface="D2Coding" panose="020B0609020101020101" pitchFamily="49" charset="-127"/>
+                </a:endParaRPr>
+              </a:p>
+              <a:p>
+                <a:pPr lvl="1"/>
+                <a:r>
+                  <a:rPr lang="en-US" altLang="ko-KR" sz="1200" dirty="0">
+                    <a:solidFill>
+                      <a:schemeClr val="bg1"/>
+                    </a:solidFill>
+                    <a:latin typeface="D2Coding" panose="020B0609020101020101" pitchFamily="49" charset="-127"/>
+                    <a:ea typeface="D2Coding" panose="020B0609020101020101" pitchFamily="49" charset="-127"/>
+                  </a:rPr>
+                  <a:t>5</a:t>
+                </a:r>
+                <a:r>
+                  <a:rPr lang="ko-KR" altLang="en-US" sz="1200" dirty="0">
+                    <a:solidFill>
+                      <a:schemeClr val="bg1"/>
+                    </a:solidFill>
+                    <a:latin typeface="D2Coding" panose="020B0609020101020101" pitchFamily="49" charset="-127"/>
+                    <a:ea typeface="D2Coding" panose="020B0609020101020101" pitchFamily="49" charset="-127"/>
+                  </a:rPr>
+                  <a:t>일치</a:t>
+                </a:r>
+                <a:r>
+                  <a:rPr lang="en-US" altLang="ko-KR" sz="1200" dirty="0">
+                    <a:solidFill>
+                      <a:schemeClr val="bg1"/>
+                    </a:solidFill>
+                    <a:latin typeface="D2Coding" panose="020B0609020101020101" pitchFamily="49" charset="-127"/>
+                    <a:ea typeface="D2Coding" panose="020B0609020101020101" pitchFamily="49" charset="-127"/>
+                  </a:rPr>
+                  <a:t>(1</a:t>
+                </a:r>
+                <a:r>
+                  <a:rPr lang="ko-KR" altLang="en-US" sz="1200" dirty="0">
+                    <a:solidFill>
+                      <a:schemeClr val="bg1"/>
+                    </a:solidFill>
+                    <a:latin typeface="D2Coding" panose="020B0609020101020101" pitchFamily="49" charset="-127"/>
+                    <a:ea typeface="D2Coding" panose="020B0609020101020101" pitchFamily="49" charset="-127"/>
+                  </a:rPr>
+                  <a:t>시간 간격 </a:t>
+                </a:r>
+                <a:r>
+                  <a:rPr lang="en-US" altLang="ko-KR" sz="1200" dirty="0">
+                    <a:solidFill>
+                      <a:schemeClr val="bg1"/>
+                    </a:solidFill>
+                    <a:latin typeface="D2Coding" panose="020B0609020101020101" pitchFamily="49" charset="-127"/>
+                    <a:ea typeface="D2Coding" panose="020B0609020101020101" pitchFamily="49" charset="-127"/>
+                  </a:rPr>
+                  <a:t>× 120) </a:t>
+                </a:r>
+                <a:r>
+                  <a:rPr lang="ko-KR" altLang="en-US" sz="1200" dirty="0">
+                    <a:solidFill>
+                      <a:schemeClr val="bg1"/>
+                    </a:solidFill>
+                    <a:latin typeface="D2Coding" panose="020B0609020101020101" pitchFamily="49" charset="-127"/>
+                    <a:ea typeface="D2Coding" panose="020B0609020101020101" pitchFamily="49" charset="-127"/>
+                  </a:rPr>
+                  <a:t>관측 데이터</a:t>
+                </a:r>
+                <a:r>
+                  <a:rPr lang="en-US" altLang="ko-KR" sz="1200" dirty="0">
+                    <a:solidFill>
+                      <a:schemeClr val="bg1"/>
+                    </a:solidFill>
+                    <a:latin typeface="D2Coding" panose="020B0609020101020101" pitchFamily="49" charset="-127"/>
+                    <a:ea typeface="D2Coding" panose="020B0609020101020101" pitchFamily="49" charset="-127"/>
+                  </a:rPr>
+                  <a:t>, </a:t>
+                </a:r>
+                <a:r>
+                  <a:rPr lang="ko-KR" altLang="en-US" sz="1200" dirty="0">
+                    <a:solidFill>
+                      <a:schemeClr val="bg1"/>
+                    </a:solidFill>
+                    <a:latin typeface="D2Coding" panose="020B0609020101020101" pitchFamily="49" charset="-127"/>
+                    <a:ea typeface="D2Coding" panose="020B0609020101020101" pitchFamily="49" charset="-127"/>
+                  </a:rPr>
+                  <a:t>시점마다 </a:t>
+                </a:r>
+                <a:r>
+                  <a:rPr lang="en-US" altLang="ko-KR" sz="1200" dirty="0">
+                    <a:solidFill>
+                      <a:schemeClr val="bg1"/>
+                    </a:solidFill>
+                    <a:latin typeface="D2Coding" panose="020B0609020101020101" pitchFamily="49" charset="-127"/>
+                    <a:ea typeface="D2Coding" panose="020B0609020101020101" pitchFamily="49" charset="-127"/>
+                  </a:rPr>
+                  <a:t>14</a:t>
+                </a:r>
+                <a:r>
+                  <a:rPr lang="ko-KR" altLang="en-US" sz="1200" dirty="0">
+                    <a:solidFill>
+                      <a:schemeClr val="bg1"/>
+                    </a:solidFill>
+                    <a:latin typeface="D2Coding" panose="020B0609020101020101" pitchFamily="49" charset="-127"/>
+                    <a:ea typeface="D2Coding" panose="020B0609020101020101" pitchFamily="49" charset="-127"/>
+                  </a:rPr>
+                  <a:t>개 변수를 받겠다고 선언하는 </a:t>
+                </a:r>
+                <a:r>
+                  <a:rPr lang="en-US" altLang="ko-KR" sz="1200" dirty="0">
+                    <a:solidFill>
+                      <a:schemeClr val="bg1"/>
+                    </a:solidFill>
+                    <a:latin typeface="D2Coding" panose="020B0609020101020101" pitchFamily="49" charset="-127"/>
+                    <a:ea typeface="D2Coding" panose="020B0609020101020101" pitchFamily="49" charset="-127"/>
+                  </a:rPr>
+                  <a:t>layer</a:t>
+                </a:r>
+              </a:p>
+              <a:p>
+                <a:pPr marL="342900" indent="-342900" rtl="0">
+                  <a:buFont typeface="+mj-lt"/>
+                  <a:buAutoNum type="arabicParenR"/>
+                </a:pPr>
+                <a:r>
+                  <a:rPr lang="en-US" altLang="ko-KR" sz="1200" dirty="0">
+                    <a:solidFill>
+                      <a:schemeClr val="bg1"/>
+                    </a:solidFill>
+                    <a:latin typeface="D2Coding" panose="020B0609020101020101" pitchFamily="49" charset="-127"/>
+                    <a:ea typeface="D2Coding" panose="020B0609020101020101" pitchFamily="49" charset="-127"/>
+                  </a:rPr>
+                  <a:t>Conv1D(8, 24, activation=＂</a:t>
+                </a:r>
+                <a:r>
+                  <a:rPr lang="en-US" altLang="ko-KR" sz="1200" dirty="0" err="1">
+                    <a:solidFill>
+                      <a:schemeClr val="bg1"/>
+                    </a:solidFill>
+                    <a:latin typeface="D2Coding" panose="020B0609020101020101" pitchFamily="49" charset="-127"/>
+                    <a:ea typeface="D2Coding" panose="020B0609020101020101" pitchFamily="49" charset="-127"/>
+                  </a:rPr>
+                  <a:t>relu</a:t>
+                </a:r>
+                <a:r>
+                  <a:rPr lang="en-US" altLang="ko-KR" sz="1200" dirty="0">
+                    <a:solidFill>
+                      <a:schemeClr val="bg1"/>
+                    </a:solidFill>
+                    <a:latin typeface="D2Coding" panose="020B0609020101020101" pitchFamily="49" charset="-127"/>
+                    <a:ea typeface="D2Coding" panose="020B0609020101020101" pitchFamily="49" charset="-127"/>
+                  </a:rPr>
+                  <a:t>＂)</a:t>
+                </a:r>
+                <a:r>
+                  <a:rPr lang="ko-KR" altLang="en-US" sz="1200" dirty="0">
+                    <a:solidFill>
+                      <a:schemeClr val="bg1"/>
+                    </a:solidFill>
+                    <a:latin typeface="D2Coding" panose="020B0609020101020101" pitchFamily="49" charset="-127"/>
+                    <a:ea typeface="D2Coding" panose="020B0609020101020101" pitchFamily="49" charset="-127"/>
+                  </a:rPr>
+                  <a:t> → </a:t>
+                </a:r>
+                <a:r>
+                  <a:rPr lang="en-US" altLang="ko-KR" sz="1200" dirty="0">
+                    <a:solidFill>
+                      <a:schemeClr val="bg1"/>
+                    </a:solidFill>
+                    <a:latin typeface="D2Coding" panose="020B0609020101020101" pitchFamily="49" charset="-127"/>
+                    <a:ea typeface="D2Coding" panose="020B0609020101020101" pitchFamily="49" charset="-127"/>
+                  </a:rPr>
+                  <a:t>(97, 8)</a:t>
+                </a:r>
+                <a:endParaRPr lang="ko-KR" altLang="en-US" sz="1200" dirty="0">
+                  <a:solidFill>
+                    <a:schemeClr val="bg1"/>
+                  </a:solidFill>
+                  <a:latin typeface="D2Coding" panose="020B0609020101020101" pitchFamily="49" charset="-127"/>
+                  <a:ea typeface="D2Coding" panose="020B0609020101020101" pitchFamily="49" charset="-127"/>
+                </a:endParaRPr>
+              </a:p>
+              <a:p>
+                <a:pPr lvl="1"/>
+                <a:r>
+                  <a:rPr lang="ko-KR" altLang="en-US" sz="1200" dirty="0">
+                    <a:solidFill>
+                      <a:schemeClr val="bg1"/>
+                    </a:solidFill>
+                    <a:latin typeface="D2Coding" panose="020B0609020101020101" pitchFamily="49" charset="-127"/>
+                    <a:ea typeface="D2Coding" panose="020B0609020101020101" pitchFamily="49" charset="-127"/>
+                  </a:rPr>
+                  <a:t>폭 </a:t>
+                </a:r>
+                <a:r>
+                  <a:rPr lang="en-US" altLang="ko-KR" sz="1200" dirty="0">
+                    <a:solidFill>
+                      <a:schemeClr val="bg1"/>
+                    </a:solidFill>
+                    <a:latin typeface="D2Coding" panose="020B0609020101020101" pitchFamily="49" charset="-127"/>
+                    <a:ea typeface="D2Coding" panose="020B0609020101020101" pitchFamily="49" charset="-127"/>
+                  </a:rPr>
+                  <a:t>24(=24</a:t>
+                </a:r>
+                <a:r>
+                  <a:rPr lang="ko-KR" altLang="en-US" sz="1200" dirty="0">
+                    <a:solidFill>
+                      <a:schemeClr val="bg1"/>
+                    </a:solidFill>
+                    <a:latin typeface="D2Coding" panose="020B0609020101020101" pitchFamily="49" charset="-127"/>
+                    <a:ea typeface="D2Coding" panose="020B0609020101020101" pitchFamily="49" charset="-127"/>
+                  </a:rPr>
+                  <a:t>시간</a:t>
+                </a:r>
+                <a:r>
+                  <a:rPr lang="en-US" altLang="ko-KR" sz="1200" dirty="0">
+                    <a:solidFill>
+                      <a:schemeClr val="bg1"/>
+                    </a:solidFill>
+                    <a:latin typeface="D2Coding" panose="020B0609020101020101" pitchFamily="49" charset="-127"/>
+                    <a:ea typeface="D2Coding" panose="020B0609020101020101" pitchFamily="49" charset="-127"/>
+                  </a:rPr>
+                  <a:t>=</a:t>
+                </a:r>
+                <a:r>
+                  <a:rPr lang="ko-KR" altLang="en-US" sz="1200" dirty="0">
+                    <a:solidFill>
+                      <a:schemeClr val="bg1"/>
+                    </a:solidFill>
+                    <a:latin typeface="D2Coding" panose="020B0609020101020101" pitchFamily="49" charset="-127"/>
+                    <a:ea typeface="D2Coding" panose="020B0609020101020101" pitchFamily="49" charset="-127"/>
+                  </a:rPr>
+                  <a:t>하루</a:t>
+                </a:r>
+                <a:r>
+                  <a:rPr lang="en-US" altLang="ko-KR" sz="1200" dirty="0">
+                    <a:solidFill>
+                      <a:schemeClr val="bg1"/>
+                    </a:solidFill>
+                    <a:latin typeface="D2Coding" panose="020B0609020101020101" pitchFamily="49" charset="-127"/>
+                    <a:ea typeface="D2Coding" panose="020B0609020101020101" pitchFamily="49" charset="-127"/>
+                  </a:rPr>
+                  <a:t>)</a:t>
+                </a:r>
+                <a:r>
+                  <a:rPr lang="ko-KR" altLang="en-US" sz="1200" dirty="0" err="1">
+                    <a:solidFill>
+                      <a:schemeClr val="bg1"/>
+                    </a:solidFill>
+                    <a:latin typeface="D2Coding" panose="020B0609020101020101" pitchFamily="49" charset="-127"/>
+                    <a:ea typeface="D2Coding" panose="020B0609020101020101" pitchFamily="49" charset="-127"/>
+                  </a:rPr>
+                  <a:t>짜리</a:t>
+                </a:r>
+                <a:r>
+                  <a:rPr lang="ko-KR" altLang="en-US" sz="1200" dirty="0">
+                    <a:solidFill>
+                      <a:schemeClr val="bg1"/>
+                    </a:solidFill>
+                    <a:latin typeface="D2Coding" panose="020B0609020101020101" pitchFamily="49" charset="-127"/>
+                    <a:ea typeface="D2Coding" panose="020B0609020101020101" pitchFamily="49" charset="-127"/>
+                  </a:rPr>
+                  <a:t> 필터 </a:t>
+                </a:r>
+                <a:r>
+                  <a:rPr lang="en-US" altLang="ko-KR" sz="1200" dirty="0">
+                    <a:solidFill>
+                      <a:schemeClr val="bg1"/>
+                    </a:solidFill>
+                    <a:latin typeface="D2Coding" panose="020B0609020101020101" pitchFamily="49" charset="-127"/>
+                    <a:ea typeface="D2Coding" panose="020B0609020101020101" pitchFamily="49" charset="-127"/>
+                  </a:rPr>
+                  <a:t>8</a:t>
+                </a:r>
+                <a:r>
+                  <a:rPr lang="ko-KR" altLang="en-US" sz="1200" dirty="0">
+                    <a:solidFill>
+                      <a:schemeClr val="bg1"/>
+                    </a:solidFill>
+                    <a:latin typeface="D2Coding" panose="020B0609020101020101" pitchFamily="49" charset="-127"/>
+                    <a:ea typeface="D2Coding" panose="020B0609020101020101" pitchFamily="49" charset="-127"/>
+                  </a:rPr>
+                  <a:t>개가 </a:t>
+                </a:r>
+                <a:r>
+                  <a:rPr lang="ko-KR" altLang="en-US" sz="1200" dirty="0" err="1">
+                    <a:solidFill>
+                      <a:schemeClr val="bg1"/>
+                    </a:solidFill>
+                    <a:latin typeface="D2Coding" panose="020B0609020101020101" pitchFamily="49" charset="-127"/>
+                    <a:ea typeface="D2Coding" panose="020B0609020101020101" pitchFamily="49" charset="-127"/>
+                  </a:rPr>
+                  <a:t>시간축을</a:t>
+                </a:r>
+                <a:r>
+                  <a:rPr lang="ko-KR" altLang="en-US" sz="1200" dirty="0">
+                    <a:solidFill>
+                      <a:schemeClr val="bg1"/>
+                    </a:solidFill>
+                    <a:latin typeface="D2Coding" panose="020B0609020101020101" pitchFamily="49" charset="-127"/>
+                    <a:ea typeface="D2Coding" panose="020B0609020101020101" pitchFamily="49" charset="-127"/>
+                  </a:rPr>
+                  <a:t> 한 칸씩 </a:t>
+                </a:r>
+                <a:r>
+                  <a:rPr lang="ko-KR" altLang="en-US" sz="1200" dirty="0" err="1">
+                    <a:solidFill>
+                      <a:schemeClr val="bg1"/>
+                    </a:solidFill>
+                    <a:latin typeface="D2Coding" panose="020B0609020101020101" pitchFamily="49" charset="-127"/>
+                    <a:ea typeface="D2Coding" panose="020B0609020101020101" pitchFamily="49" charset="-127"/>
+                  </a:rPr>
+                  <a:t>슬라이딩하며</a:t>
+                </a:r>
+                <a:r>
+                  <a:rPr lang="en-US" altLang="ko-KR" sz="1200" dirty="0">
+                    <a:solidFill>
+                      <a:schemeClr val="bg1"/>
+                    </a:solidFill>
+                    <a:latin typeface="D2Coding" panose="020B0609020101020101" pitchFamily="49" charset="-127"/>
+                    <a:ea typeface="D2Coding" panose="020B0609020101020101" pitchFamily="49" charset="-127"/>
+                  </a:rPr>
+                  <a:t>, ＂</a:t>
+                </a:r>
+                <a:r>
+                  <a:rPr lang="ko-KR" altLang="en-US" sz="1200" dirty="0">
+                    <a:solidFill>
+                      <a:schemeClr val="bg1"/>
+                    </a:solidFill>
+                    <a:latin typeface="D2Coding" panose="020B0609020101020101" pitchFamily="49" charset="-127"/>
+                    <a:ea typeface="D2Coding" panose="020B0609020101020101" pitchFamily="49" charset="-127"/>
+                  </a:rPr>
+                  <a:t>하루 단위의 지역적 패턴</a:t>
+                </a:r>
+                <a:r>
+                  <a:rPr lang="en-US" altLang="ko-KR" sz="1200" dirty="0">
+                    <a:solidFill>
+                      <a:schemeClr val="bg1"/>
+                    </a:solidFill>
+                    <a:latin typeface="D2Coding" panose="020B0609020101020101" pitchFamily="49" charset="-127"/>
+                    <a:ea typeface="D2Coding" panose="020B0609020101020101" pitchFamily="49" charset="-127"/>
+                  </a:rPr>
+                  <a:t>＂(</a:t>
+                </a:r>
+                <a:r>
+                  <a:rPr lang="ko-KR" altLang="en-US" sz="1200" dirty="0">
+                    <a:solidFill>
+                      <a:schemeClr val="bg1"/>
+                    </a:solidFill>
+                    <a:latin typeface="D2Coding" panose="020B0609020101020101" pitchFamily="49" charset="-127"/>
+                    <a:ea typeface="D2Coding" panose="020B0609020101020101" pitchFamily="49" charset="-127"/>
+                  </a:rPr>
+                  <a:t>예</a:t>
+                </a:r>
+                <a:r>
+                  <a:rPr lang="en-US" altLang="ko-KR" sz="1200" dirty="0">
+                    <a:solidFill>
+                      <a:schemeClr val="bg1"/>
+                    </a:solidFill>
+                    <a:latin typeface="D2Coding" panose="020B0609020101020101" pitchFamily="49" charset="-127"/>
+                    <a:ea typeface="D2Coding" panose="020B0609020101020101" pitchFamily="49" charset="-127"/>
+                  </a:rPr>
+                  <a:t>: </a:t>
+                </a:r>
+                <a:r>
+                  <a:rPr lang="ko-KR" altLang="en-US" sz="1200" dirty="0">
+                    <a:solidFill>
+                      <a:schemeClr val="bg1"/>
+                    </a:solidFill>
+                    <a:latin typeface="D2Coding" panose="020B0609020101020101" pitchFamily="49" charset="-127"/>
+                    <a:ea typeface="D2Coding" panose="020B0609020101020101" pitchFamily="49" charset="-127"/>
+                  </a:rPr>
+                  <a:t>일교차 모양</a:t>
+                </a:r>
+                <a:r>
+                  <a:rPr lang="en-US" altLang="ko-KR" sz="1200" dirty="0">
+                    <a:solidFill>
+                      <a:schemeClr val="bg1"/>
+                    </a:solidFill>
+                    <a:latin typeface="D2Coding" panose="020B0609020101020101" pitchFamily="49" charset="-127"/>
+                    <a:ea typeface="D2Coding" panose="020B0609020101020101" pitchFamily="49" charset="-127"/>
+                  </a:rPr>
+                  <a:t>)</a:t>
+                </a:r>
+                <a:r>
+                  <a:rPr lang="ko-KR" altLang="en-US" sz="1200" dirty="0">
+                    <a:solidFill>
+                      <a:schemeClr val="bg1"/>
+                    </a:solidFill>
+                    <a:latin typeface="D2Coding" panose="020B0609020101020101" pitchFamily="49" charset="-127"/>
+                    <a:ea typeface="D2Coding" panose="020B0609020101020101" pitchFamily="49" charset="-127"/>
+                  </a:rPr>
+                  <a:t>을 </a:t>
+                </a:r>
+                <a:r>
+                  <a:rPr lang="en-US" altLang="ko-KR" sz="1200" dirty="0">
+                    <a:solidFill>
+                      <a:schemeClr val="bg1"/>
+                    </a:solidFill>
+                    <a:latin typeface="D2Coding" panose="020B0609020101020101" pitchFamily="49" charset="-127"/>
+                    <a:ea typeface="D2Coding" panose="020B0609020101020101" pitchFamily="49" charset="-127"/>
+                  </a:rPr>
+                  <a:t>8</a:t>
+                </a:r>
+                <a:r>
+                  <a:rPr lang="ko-KR" altLang="en-US" sz="1200" dirty="0">
+                    <a:solidFill>
+                      <a:schemeClr val="bg1"/>
+                    </a:solidFill>
+                    <a:latin typeface="D2Coding" panose="020B0609020101020101" pitchFamily="49" charset="-127"/>
+                    <a:ea typeface="D2Coding" panose="020B0609020101020101" pitchFamily="49" charset="-127"/>
+                  </a:rPr>
+                  <a:t>가지 관점으로 추출</a:t>
+                </a:r>
+                <a:r>
+                  <a:rPr lang="en-US" altLang="ko-KR" sz="1200" dirty="0">
+                    <a:solidFill>
+                      <a:schemeClr val="bg1"/>
+                    </a:solidFill>
+                    <a:latin typeface="D2Coding" panose="020B0609020101020101" pitchFamily="49" charset="-127"/>
+                    <a:ea typeface="D2Coding" panose="020B0609020101020101" pitchFamily="49" charset="-127"/>
+                  </a:rPr>
+                  <a:t>, </a:t>
+                </a:r>
+                <a:r>
+                  <a:rPr lang="ko-KR" altLang="en-US" sz="1200" dirty="0">
+                    <a:solidFill>
+                      <a:schemeClr val="bg1"/>
+                    </a:solidFill>
+                    <a:latin typeface="D2Coding" panose="020B0609020101020101" pitchFamily="49" charset="-127"/>
+                    <a:ea typeface="D2Coding" panose="020B0609020101020101" pitchFamily="49" charset="-127"/>
+                  </a:rPr>
+                  <a:t>출력 길이</a:t>
+                </a:r>
+                <a:r>
+                  <a:rPr lang="en-US" altLang="ko-KR" sz="1200" dirty="0">
+                    <a:solidFill>
+                      <a:schemeClr val="bg1"/>
+                    </a:solidFill>
+                    <a:latin typeface="D2Coding" panose="020B0609020101020101" pitchFamily="49" charset="-127"/>
+                    <a:ea typeface="D2Coding" panose="020B0609020101020101" pitchFamily="49" charset="-127"/>
+                  </a:rPr>
+                  <a:t>: </a:t>
+                </a:r>
+                <a14:m>
+                  <m:oMath xmlns:m="http://schemas.openxmlformats.org/officeDocument/2006/math">
+                    <m:r>
+                      <a:rPr lang="en-US" altLang="ko-KR" sz="1200" b="0" i="1" smtClean="0">
+                        <a:solidFill>
+                          <a:schemeClr val="bg1"/>
+                        </a:solidFill>
+                        <a:latin typeface="Cambria Math" panose="02040503050406030204" pitchFamily="18" charset="0"/>
+                      </a:rPr>
+                      <m:t>120</m:t>
+                    </m:r>
+                    <m:r>
+                      <a:rPr lang="ko-KR" altLang="en-US" sz="1200" b="0" i="0" smtClean="0">
+                        <a:solidFill>
+                          <a:schemeClr val="bg1"/>
+                        </a:solidFill>
+                        <a:latin typeface="Cambria Math" panose="02040503050406030204" pitchFamily="18" charset="0"/>
+                      </a:rPr>
+                      <m:t>−</m:t>
+                    </m:r>
+                    <m:r>
+                      <a:rPr lang="en-US" altLang="ko-KR" sz="1200" b="0" i="0" smtClean="0">
+                        <a:solidFill>
+                          <a:schemeClr val="bg1"/>
+                        </a:solidFill>
+                        <a:latin typeface="Cambria Math" panose="02040503050406030204" pitchFamily="18" charset="0"/>
+                      </a:rPr>
+                      <m:t>24+1=97</m:t>
+                    </m:r>
+                  </m:oMath>
+                </a14:m>
+                <a:endParaRPr lang="en-US" altLang="ko-KR" sz="1200" dirty="0">
+                  <a:solidFill>
+                    <a:schemeClr val="bg1"/>
+                  </a:solidFill>
+                  <a:latin typeface="D2Coding" panose="020B0609020101020101" pitchFamily="49" charset="-127"/>
+                  <a:ea typeface="D2Coding" panose="020B0609020101020101" pitchFamily="49" charset="-127"/>
+                </a:endParaRPr>
+              </a:p>
+              <a:p>
+                <a:pPr marL="342900" indent="-342900">
+                  <a:buFont typeface="+mj-lt"/>
+                  <a:buAutoNum type="arabicParenR"/>
+                </a:pPr>
+                <a:r>
+                  <a:rPr lang="en-US" altLang="ko-KR" sz="1200" dirty="0">
+                    <a:solidFill>
+                      <a:schemeClr val="bg1"/>
+                    </a:solidFill>
+                    <a:latin typeface="D2Coding" panose="020B0609020101020101" pitchFamily="49" charset="-127"/>
+                    <a:ea typeface="D2Coding" panose="020B0609020101020101" pitchFamily="49" charset="-127"/>
+                  </a:rPr>
+                  <a:t>MaxPooling1D(2)</a:t>
+                </a:r>
+                <a:r>
+                  <a:rPr lang="ko-KR" altLang="en-US" sz="1200" dirty="0">
+                    <a:solidFill>
+                      <a:schemeClr val="bg1"/>
+                    </a:solidFill>
+                    <a:latin typeface="D2Coding" panose="020B0609020101020101" pitchFamily="49" charset="-127"/>
+                    <a:ea typeface="D2Coding" panose="020B0609020101020101" pitchFamily="49" charset="-127"/>
+                  </a:rPr>
+                  <a:t> → </a:t>
+                </a:r>
+                <a:r>
+                  <a:rPr lang="en-US" altLang="ko-KR" sz="1200" dirty="0">
+                    <a:solidFill>
+                      <a:schemeClr val="bg1"/>
+                    </a:solidFill>
+                    <a:latin typeface="D2Coding" panose="020B0609020101020101" pitchFamily="49" charset="-127"/>
+                    <a:ea typeface="D2Coding" panose="020B0609020101020101" pitchFamily="49" charset="-127"/>
+                  </a:rPr>
+                  <a:t>(48, 8)</a:t>
+                </a:r>
+                <a:r>
+                  <a:rPr lang="ko-KR" altLang="en-US" sz="1200" dirty="0">
+                    <a:solidFill>
+                      <a:schemeClr val="bg1"/>
+                    </a:solidFill>
+                    <a:latin typeface="D2Coding" panose="020B0609020101020101" pitchFamily="49" charset="-127"/>
+                    <a:ea typeface="D2Coding" panose="020B0609020101020101" pitchFamily="49" charset="-127"/>
+                  </a:rPr>
+                  <a:t> 인접한 </a:t>
+                </a:r>
+                <a:r>
+                  <a:rPr lang="en-US" altLang="ko-KR" sz="1200" dirty="0">
+                    <a:solidFill>
+                      <a:schemeClr val="bg1"/>
+                    </a:solidFill>
+                    <a:latin typeface="D2Coding" panose="020B0609020101020101" pitchFamily="49" charset="-127"/>
+                    <a:ea typeface="D2Coding" panose="020B0609020101020101" pitchFamily="49" charset="-127"/>
+                  </a:rPr>
+                  <a:t>2</a:t>
+                </a:r>
+                <a:r>
+                  <a:rPr lang="ko-KR" altLang="en-US" sz="1200" dirty="0">
+                    <a:solidFill>
+                      <a:schemeClr val="bg1"/>
+                    </a:solidFill>
+                    <a:latin typeface="D2Coding" panose="020B0609020101020101" pitchFamily="49" charset="-127"/>
+                    <a:ea typeface="D2Coding" panose="020B0609020101020101" pitchFamily="49" charset="-127"/>
+                  </a:rPr>
+                  <a:t>개 시점 중 최댓값만 남겨 시퀀스 길이를 절반으로 축소</a:t>
+                </a:r>
+                <a:endParaRPr lang="en-US" altLang="ko-KR" sz="1200" dirty="0">
+                  <a:solidFill>
+                    <a:schemeClr val="bg1"/>
+                  </a:solidFill>
+                  <a:latin typeface="D2Coding" panose="020B0609020101020101" pitchFamily="49" charset="-127"/>
+                  <a:ea typeface="D2Coding" panose="020B0609020101020101" pitchFamily="49" charset="-127"/>
+                </a:endParaRPr>
+              </a:p>
+              <a:p>
+                <a:pPr marL="342900" indent="-342900">
+                  <a:buFont typeface="+mj-lt"/>
+                  <a:buAutoNum type="arabicParenR"/>
+                </a:pPr>
+                <a:r>
+                  <a:rPr lang="en-US" altLang="ko-KR" sz="1200" dirty="0">
+                    <a:solidFill>
+                      <a:schemeClr val="bg1"/>
+                    </a:solidFill>
+                    <a:latin typeface="D2Coding" panose="020B0609020101020101" pitchFamily="49" charset="-127"/>
+                    <a:ea typeface="D2Coding" panose="020B0609020101020101" pitchFamily="49" charset="-127"/>
+                  </a:rPr>
+                  <a:t>Conv1D(8, 12, activation="</a:t>
+                </a:r>
+                <a:r>
+                  <a:rPr lang="en-US" altLang="ko-KR" sz="1200" dirty="0" err="1">
+                    <a:solidFill>
+                      <a:schemeClr val="bg1"/>
+                    </a:solidFill>
+                    <a:latin typeface="D2Coding" panose="020B0609020101020101" pitchFamily="49" charset="-127"/>
+                    <a:ea typeface="D2Coding" panose="020B0609020101020101" pitchFamily="49" charset="-127"/>
+                  </a:rPr>
+                  <a:t>relu</a:t>
+                </a:r>
+                <a:r>
+                  <a:rPr lang="en-US" altLang="ko-KR" sz="1200" dirty="0">
+                    <a:solidFill>
+                      <a:schemeClr val="bg1"/>
+                    </a:solidFill>
+                    <a:latin typeface="D2Coding" panose="020B0609020101020101" pitchFamily="49" charset="-127"/>
+                    <a:ea typeface="D2Coding" panose="020B0609020101020101" pitchFamily="49" charset="-127"/>
+                  </a:rPr>
+                  <a:t>")</a:t>
+                </a:r>
+                <a:r>
+                  <a:rPr lang="ko-KR" altLang="en-US" sz="1200" dirty="0">
+                    <a:solidFill>
+                      <a:schemeClr val="bg1"/>
+                    </a:solidFill>
+                    <a:latin typeface="D2Coding" panose="020B0609020101020101" pitchFamily="49" charset="-127"/>
+                    <a:ea typeface="D2Coding" panose="020B0609020101020101" pitchFamily="49" charset="-127"/>
+                  </a:rPr>
+                  <a:t> → </a:t>
+                </a:r>
+                <a:r>
+                  <a:rPr lang="en-US" altLang="ko-KR" sz="1200" dirty="0">
+                    <a:solidFill>
+                      <a:schemeClr val="bg1"/>
+                    </a:solidFill>
+                    <a:latin typeface="D2Coding" panose="020B0609020101020101" pitchFamily="49" charset="-127"/>
+                    <a:ea typeface="D2Coding" panose="020B0609020101020101" pitchFamily="49" charset="-127"/>
+                  </a:rPr>
+                  <a:t>(37, 8)</a:t>
+                </a:r>
+              </a:p>
+              <a:p>
+                <a:pPr lvl="1"/>
+                <a:r>
+                  <a:rPr lang="ko-KR" altLang="en-US" sz="1200" dirty="0">
+                    <a:solidFill>
+                      <a:schemeClr val="bg1"/>
+                    </a:solidFill>
+                    <a:latin typeface="D2Coding" panose="020B0609020101020101" pitchFamily="49" charset="-127"/>
+                    <a:ea typeface="D2Coding" panose="020B0609020101020101" pitchFamily="49" charset="-127"/>
+                  </a:rPr>
+                  <a:t>압축된 시퀀스</a:t>
+                </a:r>
+                <a:r>
+                  <a:rPr lang="en-US" altLang="ko-KR" sz="1200" dirty="0">
+                    <a:solidFill>
+                      <a:schemeClr val="bg1"/>
+                    </a:solidFill>
+                    <a:latin typeface="D2Coding" panose="020B0609020101020101" pitchFamily="49" charset="-127"/>
+                    <a:ea typeface="D2Coding" panose="020B0609020101020101" pitchFamily="49" charset="-127"/>
+                  </a:rPr>
+                  <a:t>(</a:t>
+                </a:r>
+                <a:r>
+                  <a:rPr lang="ko-KR" altLang="en-US" sz="1200" dirty="0">
+                    <a:solidFill>
+                      <a:schemeClr val="bg1"/>
+                    </a:solidFill>
+                    <a:latin typeface="D2Coding" panose="020B0609020101020101" pitchFamily="49" charset="-127"/>
+                    <a:ea typeface="D2Coding" panose="020B0609020101020101" pitchFamily="49" charset="-127"/>
+                  </a:rPr>
+                  <a:t>이미 한 칸에 약 </a:t>
+                </a:r>
+                <a:r>
+                  <a:rPr lang="en-US" altLang="ko-KR" sz="1200" dirty="0">
+                    <a:solidFill>
+                      <a:schemeClr val="bg1"/>
+                    </a:solidFill>
+                    <a:latin typeface="D2Coding" panose="020B0609020101020101" pitchFamily="49" charset="-127"/>
+                    <a:ea typeface="D2Coding" panose="020B0609020101020101" pitchFamily="49" charset="-127"/>
+                  </a:rPr>
+                  <a:t>2</a:t>
+                </a:r>
+                <a:r>
+                  <a:rPr lang="ko-KR" altLang="en-US" sz="1200" dirty="0" err="1">
+                    <a:solidFill>
+                      <a:schemeClr val="bg1"/>
+                    </a:solidFill>
+                    <a:latin typeface="D2Coding" panose="020B0609020101020101" pitchFamily="49" charset="-127"/>
+                    <a:ea typeface="D2Coding" panose="020B0609020101020101" pitchFamily="49" charset="-127"/>
+                  </a:rPr>
+                  <a:t>시간어치</a:t>
+                </a:r>
+                <a:r>
+                  <a:rPr lang="ko-KR" altLang="en-US" sz="1200" dirty="0">
+                    <a:solidFill>
+                      <a:schemeClr val="bg1"/>
+                    </a:solidFill>
+                    <a:latin typeface="D2Coding" panose="020B0609020101020101" pitchFamily="49" charset="-127"/>
+                    <a:ea typeface="D2Coding" panose="020B0609020101020101" pitchFamily="49" charset="-127"/>
+                  </a:rPr>
+                  <a:t> 정보가 </a:t>
+                </a:r>
+                <a:r>
+                  <a:rPr lang="ko-KR" altLang="en-US" sz="1200" dirty="0" err="1">
+                    <a:solidFill>
+                      <a:schemeClr val="bg1"/>
+                    </a:solidFill>
+                    <a:latin typeface="D2Coding" panose="020B0609020101020101" pitchFamily="49" charset="-127"/>
+                    <a:ea typeface="D2Coding" panose="020B0609020101020101" pitchFamily="49" charset="-127"/>
+                  </a:rPr>
+                  <a:t>녹아있음</a:t>
+                </a:r>
+                <a:r>
+                  <a:rPr lang="en-US" altLang="ko-KR" sz="1200" dirty="0">
+                    <a:solidFill>
+                      <a:schemeClr val="bg1"/>
+                    </a:solidFill>
+                    <a:latin typeface="D2Coding" panose="020B0609020101020101" pitchFamily="49" charset="-127"/>
+                    <a:ea typeface="D2Coding" panose="020B0609020101020101" pitchFamily="49" charset="-127"/>
+                  </a:rPr>
+                  <a:t>) </a:t>
+                </a:r>
+                <a:r>
+                  <a:rPr lang="ko-KR" altLang="en-US" sz="1200" dirty="0">
+                    <a:solidFill>
+                      <a:schemeClr val="bg1"/>
+                    </a:solidFill>
+                    <a:latin typeface="D2Coding" panose="020B0609020101020101" pitchFamily="49" charset="-127"/>
+                    <a:ea typeface="D2Coding" panose="020B0609020101020101" pitchFamily="49" charset="-127"/>
+                  </a:rPr>
+                  <a:t>위에서 다시 폭 </a:t>
+                </a:r>
+                <a:r>
+                  <a:rPr lang="en-US" altLang="ko-KR" sz="1200" dirty="0">
+                    <a:solidFill>
+                      <a:schemeClr val="bg1"/>
+                    </a:solidFill>
+                    <a:latin typeface="D2Coding" panose="020B0609020101020101" pitchFamily="49" charset="-127"/>
+                    <a:ea typeface="D2Coding" panose="020B0609020101020101" pitchFamily="49" charset="-127"/>
+                  </a:rPr>
+                  <a:t>12</a:t>
+                </a:r>
+                <a:r>
+                  <a:rPr lang="ko-KR" altLang="en-US" sz="1200" dirty="0" err="1">
+                    <a:solidFill>
+                      <a:schemeClr val="bg1"/>
+                    </a:solidFill>
+                    <a:latin typeface="D2Coding" panose="020B0609020101020101" pitchFamily="49" charset="-127"/>
+                    <a:ea typeface="D2Coding" panose="020B0609020101020101" pitchFamily="49" charset="-127"/>
+                  </a:rPr>
+                  <a:t>짜리</a:t>
+                </a:r>
+                <a:r>
+                  <a:rPr lang="ko-KR" altLang="en-US" sz="1200" dirty="0">
+                    <a:solidFill>
+                      <a:schemeClr val="bg1"/>
+                    </a:solidFill>
+                    <a:latin typeface="D2Coding" panose="020B0609020101020101" pitchFamily="49" charset="-127"/>
+                    <a:ea typeface="D2Coding" panose="020B0609020101020101" pitchFamily="49" charset="-127"/>
+                  </a:rPr>
+                  <a:t> 필터로 지역 패턴을 뽑아 원본 기준으로는 더 넓은 시간대</a:t>
+                </a:r>
+                <a:r>
+                  <a:rPr lang="en-US" altLang="ko-KR" sz="1200" dirty="0">
+                    <a:solidFill>
+                      <a:schemeClr val="bg1"/>
+                    </a:solidFill>
+                    <a:latin typeface="D2Coding" panose="020B0609020101020101" pitchFamily="49" charset="-127"/>
+                    <a:ea typeface="D2Coding" panose="020B0609020101020101" pitchFamily="49" charset="-127"/>
+                  </a:rPr>
+                  <a:t>(</a:t>
+                </a:r>
+                <a:r>
+                  <a:rPr lang="ko-KR" altLang="en-US" sz="1200" dirty="0">
+                    <a:solidFill>
+                      <a:schemeClr val="bg1"/>
+                    </a:solidFill>
+                    <a:latin typeface="D2Coding" panose="020B0609020101020101" pitchFamily="49" charset="-127"/>
+                    <a:ea typeface="D2Coding" panose="020B0609020101020101" pitchFamily="49" charset="-127"/>
+                  </a:rPr>
+                  <a:t>하루 이상</a:t>
+                </a:r>
+                <a:r>
+                  <a:rPr lang="en-US" altLang="ko-KR" sz="1200" dirty="0">
+                    <a:solidFill>
+                      <a:schemeClr val="bg1"/>
+                    </a:solidFill>
+                    <a:latin typeface="D2Coding" panose="020B0609020101020101" pitchFamily="49" charset="-127"/>
+                    <a:ea typeface="D2Coding" panose="020B0609020101020101" pitchFamily="49" charset="-127"/>
+                  </a:rPr>
+                  <a:t>)</a:t>
+                </a:r>
+                <a:r>
+                  <a:rPr lang="ko-KR" altLang="en-US" sz="1200" dirty="0">
+                    <a:solidFill>
+                      <a:schemeClr val="bg1"/>
+                    </a:solidFill>
+                    <a:latin typeface="D2Coding" panose="020B0609020101020101" pitchFamily="49" charset="-127"/>
+                    <a:ea typeface="D2Coding" panose="020B0609020101020101" pitchFamily="49" charset="-127"/>
+                  </a:rPr>
+                  <a:t>를 아우르는 패턴을 인식</a:t>
+                </a:r>
+                <a:r>
+                  <a:rPr lang="en-US" altLang="ko-KR" sz="1200" dirty="0">
+                    <a:solidFill>
+                      <a:schemeClr val="bg1"/>
+                    </a:solidFill>
+                    <a:latin typeface="D2Coding" panose="020B0609020101020101" pitchFamily="49" charset="-127"/>
+                    <a:ea typeface="D2Coding" panose="020B0609020101020101" pitchFamily="49" charset="-127"/>
+                  </a:rPr>
+                  <a:t>, </a:t>
+                </a:r>
+                <a:r>
+                  <a:rPr lang="ko-KR" altLang="en-US" sz="1200" dirty="0">
+                    <a:solidFill>
+                      <a:schemeClr val="bg1"/>
+                    </a:solidFill>
+                    <a:latin typeface="D2Coding" panose="020B0609020101020101" pitchFamily="49" charset="-127"/>
+                    <a:ea typeface="D2Coding" panose="020B0609020101020101" pitchFamily="49" charset="-127"/>
+                  </a:rPr>
+                  <a:t>출력 길이</a:t>
+                </a:r>
+                <a:r>
+                  <a:rPr lang="en-US" altLang="ko-KR" sz="1200" dirty="0">
+                    <a:solidFill>
+                      <a:schemeClr val="bg1"/>
+                    </a:solidFill>
+                    <a:latin typeface="D2Coding" panose="020B0609020101020101" pitchFamily="49" charset="-127"/>
+                    <a:ea typeface="D2Coding" panose="020B0609020101020101" pitchFamily="49" charset="-127"/>
+                  </a:rPr>
+                  <a:t>: </a:t>
+                </a:r>
+                <a14:m>
+                  <m:oMath xmlns:m="http://schemas.openxmlformats.org/officeDocument/2006/math">
+                    <m:r>
+                      <a:rPr lang="en-US" altLang="ko-KR" sz="1200" b="0" i="1" smtClean="0">
+                        <a:solidFill>
+                          <a:schemeClr val="bg1"/>
+                        </a:solidFill>
+                        <a:latin typeface="Cambria Math" panose="02040503050406030204" pitchFamily="18" charset="0"/>
+                      </a:rPr>
+                      <m:t>48</m:t>
+                    </m:r>
+                    <m:r>
+                      <a:rPr lang="ko-KR" altLang="en-US" sz="1200" b="0" i="0" smtClean="0">
+                        <a:solidFill>
+                          <a:schemeClr val="bg1"/>
+                        </a:solidFill>
+                        <a:latin typeface="Cambria Math" panose="02040503050406030204" pitchFamily="18" charset="0"/>
+                      </a:rPr>
+                      <m:t>−</m:t>
+                    </m:r>
+                    <m:r>
+                      <a:rPr lang="en-US" altLang="ko-KR" sz="1200" b="0" i="0" smtClean="0">
+                        <a:solidFill>
+                          <a:schemeClr val="bg1"/>
+                        </a:solidFill>
+                        <a:latin typeface="Cambria Math" panose="02040503050406030204" pitchFamily="18" charset="0"/>
+                      </a:rPr>
+                      <m:t>12+1=37</m:t>
+                    </m:r>
+                  </m:oMath>
+                </a14:m>
+                <a:endParaRPr lang="ko-KR" altLang="en-US" sz="1200" dirty="0">
+                  <a:solidFill>
+                    <a:schemeClr val="bg1"/>
+                  </a:solidFill>
+                  <a:latin typeface="D2Coding" panose="020B0609020101020101" pitchFamily="49" charset="-127"/>
+                  <a:ea typeface="D2Coding" panose="020B0609020101020101" pitchFamily="49" charset="-127"/>
+                </a:endParaRPr>
+              </a:p>
+              <a:p>
+                <a:pPr marL="342900" indent="-342900">
+                  <a:buFont typeface="+mj-lt"/>
+                  <a:buAutoNum type="arabicParenR"/>
+                </a:pPr>
+                <a:r>
+                  <a:rPr lang="en-US" altLang="ko-KR" sz="1200" dirty="0">
+                    <a:solidFill>
+                      <a:schemeClr val="bg1"/>
+                    </a:solidFill>
+                    <a:latin typeface="D2Coding" panose="020B0609020101020101" pitchFamily="49" charset="-127"/>
+                    <a:ea typeface="D2Coding" panose="020B0609020101020101" pitchFamily="49" charset="-127"/>
+                  </a:rPr>
+                  <a:t>MaxPooling1D(2)</a:t>
+                </a:r>
+                <a:r>
+                  <a:rPr lang="ko-KR" altLang="en-US" sz="1200" dirty="0">
+                    <a:solidFill>
+                      <a:schemeClr val="bg1"/>
+                    </a:solidFill>
+                    <a:latin typeface="D2Coding" panose="020B0609020101020101" pitchFamily="49" charset="-127"/>
+                    <a:ea typeface="D2Coding" panose="020B0609020101020101" pitchFamily="49" charset="-127"/>
+                  </a:rPr>
+                  <a:t> → </a:t>
+                </a:r>
+                <a:r>
+                  <a:rPr lang="en-US" altLang="ko-KR" sz="1200" dirty="0">
+                    <a:solidFill>
+                      <a:schemeClr val="bg1"/>
+                    </a:solidFill>
+                    <a:latin typeface="D2Coding" panose="020B0609020101020101" pitchFamily="49" charset="-127"/>
+                    <a:ea typeface="D2Coding" panose="020B0609020101020101" pitchFamily="49" charset="-127"/>
+                  </a:rPr>
+                  <a:t>(18, 8)</a:t>
+                </a:r>
+                <a:r>
+                  <a:rPr lang="ko-KR" altLang="en-US" sz="1200" dirty="0">
+                    <a:solidFill>
+                      <a:schemeClr val="bg1"/>
+                    </a:solidFill>
+                    <a:latin typeface="D2Coding" panose="020B0609020101020101" pitchFamily="49" charset="-127"/>
+                    <a:ea typeface="D2Coding" panose="020B0609020101020101" pitchFamily="49" charset="-127"/>
+                  </a:rPr>
+                  <a:t> →</a:t>
+                </a:r>
+                <a:r>
+                  <a:rPr lang="en-US" altLang="ko-KR" sz="1200" dirty="0">
+                    <a:solidFill>
+                      <a:schemeClr val="bg1"/>
+                    </a:solidFill>
+                    <a:latin typeface="D2Coding" panose="020B0609020101020101" pitchFamily="49" charset="-127"/>
+                    <a:ea typeface="D2Coding" panose="020B0609020101020101" pitchFamily="49" charset="-127"/>
+                    <a:sym typeface="Wingdings" panose="05000000000000000000" pitchFamily="2" charset="2"/>
+                  </a:rPr>
+                  <a:t> </a:t>
+                </a:r>
+                <a:r>
+                  <a:rPr lang="ko-KR" altLang="en-US" sz="1200" dirty="0">
+                    <a:solidFill>
+                      <a:schemeClr val="bg1"/>
+                    </a:solidFill>
+                    <a:latin typeface="D2Coding" panose="020B0609020101020101" pitchFamily="49" charset="-127"/>
+                    <a:ea typeface="D2Coding" panose="020B0609020101020101" pitchFamily="49" charset="-127"/>
+                  </a:rPr>
+                  <a:t>다시 절반으로 압축</a:t>
+                </a:r>
+                <a:r>
+                  <a:rPr lang="en-US" altLang="ko-KR" sz="1200" dirty="0">
+                    <a:solidFill>
+                      <a:schemeClr val="bg1"/>
+                    </a:solidFill>
+                    <a:latin typeface="D2Coding" panose="020B0609020101020101" pitchFamily="49" charset="-127"/>
+                    <a:ea typeface="D2Coding" panose="020B0609020101020101" pitchFamily="49" charset="-127"/>
+                  </a:rPr>
+                  <a:t>.</a:t>
+                </a:r>
+              </a:p>
+              <a:p>
+                <a:pPr marL="342900" indent="-342900" rtl="0">
+                  <a:buFont typeface="+mj-lt"/>
+                  <a:buAutoNum type="arabicParenR"/>
+                </a:pPr>
+                <a:r>
+                  <a:rPr lang="en-US" altLang="ko-KR" sz="1200" dirty="0">
+                    <a:solidFill>
+                      <a:schemeClr val="bg1"/>
+                    </a:solidFill>
+                    <a:latin typeface="D2Coding" panose="020B0609020101020101" pitchFamily="49" charset="-127"/>
+                    <a:ea typeface="D2Coding" panose="020B0609020101020101" pitchFamily="49" charset="-127"/>
+                  </a:rPr>
+                  <a:t>Conv1D(8, 6, activation="</a:t>
+                </a:r>
+                <a:r>
+                  <a:rPr lang="en-US" altLang="ko-KR" sz="1200" dirty="0" err="1">
+                    <a:solidFill>
+                      <a:schemeClr val="bg1"/>
+                    </a:solidFill>
+                    <a:latin typeface="D2Coding" panose="020B0609020101020101" pitchFamily="49" charset="-127"/>
+                    <a:ea typeface="D2Coding" panose="020B0609020101020101" pitchFamily="49" charset="-127"/>
+                  </a:rPr>
+                  <a:t>relu</a:t>
+                </a:r>
+                <a:r>
+                  <a:rPr lang="en-US" altLang="ko-KR" sz="1200" dirty="0">
+                    <a:solidFill>
+                      <a:schemeClr val="bg1"/>
+                    </a:solidFill>
+                    <a:latin typeface="D2Coding" panose="020B0609020101020101" pitchFamily="49" charset="-127"/>
+                    <a:ea typeface="D2Coding" panose="020B0609020101020101" pitchFamily="49" charset="-127"/>
+                  </a:rPr>
+                  <a:t>")</a:t>
+                </a:r>
+                <a:r>
+                  <a:rPr lang="ko-KR" altLang="en-US" sz="1200" dirty="0">
+                    <a:solidFill>
+                      <a:schemeClr val="bg1"/>
+                    </a:solidFill>
+                    <a:latin typeface="D2Coding" panose="020B0609020101020101" pitchFamily="49" charset="-127"/>
+                    <a:ea typeface="D2Coding" panose="020B0609020101020101" pitchFamily="49" charset="-127"/>
+                  </a:rPr>
+                  <a:t> → </a:t>
+                </a:r>
+                <a:r>
+                  <a:rPr lang="en-US" altLang="ko-KR" sz="1200" dirty="0">
+                    <a:solidFill>
+                      <a:schemeClr val="bg1"/>
+                    </a:solidFill>
+                    <a:latin typeface="D2Coding" panose="020B0609020101020101" pitchFamily="49" charset="-127"/>
+                    <a:ea typeface="D2Coding" panose="020B0609020101020101" pitchFamily="49" charset="-127"/>
+                  </a:rPr>
+                  <a:t>(13, 8)</a:t>
+                </a:r>
+                <a:endParaRPr lang="ko-KR" altLang="en-US" sz="1200" dirty="0">
+                  <a:solidFill>
+                    <a:schemeClr val="bg1"/>
+                  </a:solidFill>
+                  <a:latin typeface="D2Coding" panose="020B0609020101020101" pitchFamily="49" charset="-127"/>
+                  <a:ea typeface="D2Coding" panose="020B0609020101020101" pitchFamily="49" charset="-127"/>
+                </a:endParaRPr>
+              </a:p>
+              <a:p>
+                <a:pPr lvl="1"/>
+                <a:r>
+                  <a:rPr lang="ko-KR" altLang="en-US" sz="1200" dirty="0">
+                    <a:solidFill>
+                      <a:schemeClr val="bg1"/>
+                    </a:solidFill>
+                    <a:latin typeface="D2Coding" panose="020B0609020101020101" pitchFamily="49" charset="-127"/>
+                    <a:ea typeface="D2Coding" panose="020B0609020101020101" pitchFamily="49" charset="-127"/>
+                  </a:rPr>
+                  <a:t>세 번째 </a:t>
+                </a:r>
+                <a:r>
+                  <a:rPr lang="ko-KR" altLang="en-US" sz="1200" dirty="0" err="1">
+                    <a:solidFill>
+                      <a:schemeClr val="bg1"/>
+                    </a:solidFill>
+                    <a:latin typeface="D2Coding" panose="020B0609020101020101" pitchFamily="49" charset="-127"/>
+                    <a:ea typeface="D2Coding" panose="020B0609020101020101" pitchFamily="49" charset="-127"/>
+                  </a:rPr>
+                  <a:t>합성곱</a:t>
+                </a:r>
+                <a:r>
+                  <a:rPr lang="en-US" altLang="ko-KR" sz="1200" dirty="0">
+                    <a:solidFill>
+                      <a:schemeClr val="bg1"/>
+                    </a:solidFill>
+                    <a:latin typeface="D2Coding" panose="020B0609020101020101" pitchFamily="49" charset="-127"/>
+                    <a:ea typeface="D2Coding" panose="020B0609020101020101" pitchFamily="49" charset="-127"/>
+                  </a:rPr>
+                  <a:t>. </a:t>
+                </a:r>
+                <a:r>
+                  <a:rPr lang="ko-KR" altLang="en-US" sz="1200" dirty="0">
+                    <a:solidFill>
+                      <a:schemeClr val="bg1"/>
+                    </a:solidFill>
+                    <a:latin typeface="D2Coding" panose="020B0609020101020101" pitchFamily="49" charset="-127"/>
+                    <a:ea typeface="D2Coding" panose="020B0609020101020101" pitchFamily="49" charset="-127"/>
+                  </a:rPr>
+                  <a:t>이 시점에선 한 칸이 원본 기준 훨씬 넓은 시간대를 대표</a:t>
+                </a:r>
+                <a:r>
+                  <a:rPr lang="en-US" altLang="ko-KR" sz="1200" dirty="0">
+                    <a:solidFill>
+                      <a:schemeClr val="bg1"/>
+                    </a:solidFill>
+                    <a:latin typeface="D2Coding" panose="020B0609020101020101" pitchFamily="49" charset="-127"/>
+                    <a:ea typeface="D2Coding" panose="020B0609020101020101" pitchFamily="49" charset="-127"/>
+                  </a:rPr>
+                  <a:t>, </a:t>
+                </a:r>
+                <a:r>
+                  <a:rPr lang="ko-KR" altLang="en-US" sz="1200" dirty="0">
+                    <a:solidFill>
+                      <a:schemeClr val="bg1"/>
+                    </a:solidFill>
+                    <a:latin typeface="D2Coding" panose="020B0609020101020101" pitchFamily="49" charset="-127"/>
+                    <a:ea typeface="D2Coding" panose="020B0609020101020101" pitchFamily="49" charset="-127"/>
+                  </a:rPr>
+                  <a:t>출력 길이</a:t>
+                </a:r>
+                <a:r>
+                  <a:rPr lang="en-US" altLang="ko-KR" sz="1200" dirty="0">
+                    <a:solidFill>
+                      <a:schemeClr val="bg1"/>
+                    </a:solidFill>
+                    <a:latin typeface="D2Coding" panose="020B0609020101020101" pitchFamily="49" charset="-127"/>
+                    <a:ea typeface="D2Coding" panose="020B0609020101020101" pitchFamily="49" charset="-127"/>
+                  </a:rPr>
+                  <a:t>: </a:t>
+                </a:r>
+                <a14:m>
+                  <m:oMath xmlns:m="http://schemas.openxmlformats.org/officeDocument/2006/math">
+                    <m:r>
+                      <a:rPr lang="en-US" altLang="ko-KR" sz="1200" b="0" i="1" smtClean="0">
+                        <a:solidFill>
+                          <a:schemeClr val="bg1"/>
+                        </a:solidFill>
+                        <a:latin typeface="Cambria Math" panose="02040503050406030204" pitchFamily="18" charset="0"/>
+                      </a:rPr>
+                      <m:t>18</m:t>
+                    </m:r>
+                    <m:r>
+                      <a:rPr lang="ko-KR" altLang="en-US" sz="1200" b="0" i="0" smtClean="0">
+                        <a:solidFill>
+                          <a:schemeClr val="bg1"/>
+                        </a:solidFill>
+                        <a:latin typeface="Cambria Math" panose="02040503050406030204" pitchFamily="18" charset="0"/>
+                      </a:rPr>
+                      <m:t>−</m:t>
+                    </m:r>
+                    <m:r>
+                      <a:rPr lang="en-US" altLang="ko-KR" sz="1200" b="0" i="0" smtClean="0">
+                        <a:solidFill>
+                          <a:schemeClr val="bg1"/>
+                        </a:solidFill>
+                        <a:latin typeface="Cambria Math" panose="02040503050406030204" pitchFamily="18" charset="0"/>
+                      </a:rPr>
+                      <m:t>6+1=13</m:t>
+                    </m:r>
+                  </m:oMath>
+                </a14:m>
+                <a:endParaRPr lang="ko-KR" altLang="en-US" sz="1200" dirty="0">
+                  <a:solidFill>
+                    <a:schemeClr val="bg1"/>
+                  </a:solidFill>
+                  <a:latin typeface="D2Coding" panose="020B0609020101020101" pitchFamily="49" charset="-127"/>
+                  <a:ea typeface="D2Coding" panose="020B0609020101020101" pitchFamily="49" charset="-127"/>
+                </a:endParaRPr>
+              </a:p>
+              <a:p>
+                <a:pPr marL="342900" indent="-342900" rtl="0">
+                  <a:buFont typeface="+mj-lt"/>
+                  <a:buAutoNum type="arabicParenR"/>
+                </a:pPr>
+                <a:r>
+                  <a:rPr lang="en-US" altLang="ko-KR" sz="1200" dirty="0">
+                    <a:solidFill>
+                      <a:schemeClr val="bg1"/>
+                    </a:solidFill>
+                    <a:latin typeface="D2Coding" panose="020B0609020101020101" pitchFamily="49" charset="-127"/>
+                    <a:ea typeface="D2Coding" panose="020B0609020101020101" pitchFamily="49" charset="-127"/>
+                  </a:rPr>
+                  <a:t>GlobalAveragePooling1D()</a:t>
+                </a:r>
+                <a:r>
+                  <a:rPr lang="ko-KR" altLang="en-US" sz="1200" dirty="0">
+                    <a:solidFill>
+                      <a:schemeClr val="bg1"/>
+                    </a:solidFill>
+                    <a:latin typeface="D2Coding" panose="020B0609020101020101" pitchFamily="49" charset="-127"/>
+                    <a:ea typeface="D2Coding" panose="020B0609020101020101" pitchFamily="49" charset="-127"/>
+                  </a:rPr>
+                  <a:t> → </a:t>
+                </a:r>
+                <a:r>
+                  <a:rPr lang="en-US" altLang="ko-KR" sz="1200" dirty="0">
+                    <a:solidFill>
+                      <a:schemeClr val="bg1"/>
+                    </a:solidFill>
+                    <a:latin typeface="D2Coding" panose="020B0609020101020101" pitchFamily="49" charset="-127"/>
+                    <a:ea typeface="D2Coding" panose="020B0609020101020101" pitchFamily="49" charset="-127"/>
+                  </a:rPr>
+                  <a:t>(8,)</a:t>
+                </a:r>
+                <a:endParaRPr lang="ko-KR" altLang="en-US" sz="1200" dirty="0">
+                  <a:solidFill>
+                    <a:schemeClr val="bg1"/>
+                  </a:solidFill>
+                  <a:latin typeface="D2Coding" panose="020B0609020101020101" pitchFamily="49" charset="-127"/>
+                  <a:ea typeface="D2Coding" panose="020B0609020101020101" pitchFamily="49" charset="-127"/>
+                </a:endParaRPr>
+              </a:p>
+              <a:p>
+                <a:pPr lvl="1"/>
+                <a:r>
+                  <a:rPr lang="ko-KR" altLang="en-US" sz="1200" dirty="0">
+                    <a:solidFill>
+                      <a:schemeClr val="bg1"/>
+                    </a:solidFill>
+                    <a:latin typeface="D2Coding" panose="020B0609020101020101" pitchFamily="49" charset="-127"/>
+                    <a:ea typeface="D2Coding" panose="020B0609020101020101" pitchFamily="49" charset="-127"/>
+                  </a:rPr>
+                  <a:t>남은 </a:t>
+                </a:r>
+                <a:r>
+                  <a:rPr lang="en-US" altLang="ko-KR" sz="1200" dirty="0">
+                    <a:solidFill>
+                      <a:schemeClr val="bg1"/>
+                    </a:solidFill>
+                    <a:latin typeface="D2Coding" panose="020B0609020101020101" pitchFamily="49" charset="-127"/>
+                    <a:ea typeface="D2Coding" panose="020B0609020101020101" pitchFamily="49" charset="-127"/>
+                  </a:rPr>
+                  <a:t>13</a:t>
+                </a:r>
+                <a:r>
+                  <a:rPr lang="ko-KR" altLang="en-US" sz="1200" dirty="0">
+                    <a:solidFill>
+                      <a:schemeClr val="bg1"/>
+                    </a:solidFill>
+                    <a:latin typeface="D2Coding" panose="020B0609020101020101" pitchFamily="49" charset="-127"/>
+                    <a:ea typeface="D2Coding" panose="020B0609020101020101" pitchFamily="49" charset="-127"/>
+                  </a:rPr>
+                  <a:t>개 시점을</a:t>
+                </a:r>
+                <a:r>
+                  <a:rPr lang="en-US" altLang="ko-KR" sz="1200" dirty="0">
+                    <a:solidFill>
+                      <a:schemeClr val="bg1"/>
+                    </a:solidFill>
+                    <a:latin typeface="D2Coding" panose="020B0609020101020101" pitchFamily="49" charset="-127"/>
+                    <a:ea typeface="D2Coding" panose="020B0609020101020101" pitchFamily="49" charset="-127"/>
+                  </a:rPr>
+                  <a:t>, </a:t>
+                </a:r>
+                <a:r>
+                  <a:rPr lang="ko-KR" altLang="en-US" sz="1200" dirty="0">
+                    <a:solidFill>
+                      <a:schemeClr val="bg1"/>
+                    </a:solidFill>
+                    <a:latin typeface="D2Coding" panose="020B0609020101020101" pitchFamily="49" charset="-127"/>
+                    <a:ea typeface="D2Coding" panose="020B0609020101020101" pitchFamily="49" charset="-127"/>
+                  </a:rPr>
+                  <a:t>채널</a:t>
+                </a:r>
+                <a:r>
+                  <a:rPr lang="en-US" altLang="ko-KR" sz="1200" dirty="0">
+                    <a:solidFill>
+                      <a:schemeClr val="bg1"/>
+                    </a:solidFill>
+                    <a:latin typeface="D2Coding" panose="020B0609020101020101" pitchFamily="49" charset="-127"/>
+                    <a:ea typeface="D2Coding" panose="020B0609020101020101" pitchFamily="49" charset="-127"/>
+                  </a:rPr>
+                  <a:t>(</a:t>
+                </a:r>
+                <a:r>
+                  <a:rPr lang="ko-KR" altLang="en-US" sz="1200" dirty="0">
+                    <a:solidFill>
+                      <a:schemeClr val="bg1"/>
+                    </a:solidFill>
+                    <a:latin typeface="D2Coding" panose="020B0609020101020101" pitchFamily="49" charset="-127"/>
+                    <a:ea typeface="D2Coding" panose="020B0609020101020101" pitchFamily="49" charset="-127"/>
+                  </a:rPr>
+                  <a:t>필터</a:t>
+                </a:r>
+                <a:r>
+                  <a:rPr lang="en-US" altLang="ko-KR" sz="1200" dirty="0">
+                    <a:solidFill>
+                      <a:schemeClr val="bg1"/>
+                    </a:solidFill>
+                    <a:latin typeface="D2Coding" panose="020B0609020101020101" pitchFamily="49" charset="-127"/>
+                    <a:ea typeface="D2Coding" panose="020B0609020101020101" pitchFamily="49" charset="-127"/>
+                  </a:rPr>
+                  <a:t>)</a:t>
+                </a:r>
+                <a:r>
+                  <a:rPr lang="ko-KR" altLang="en-US" sz="1200" dirty="0">
+                    <a:solidFill>
+                      <a:schemeClr val="bg1"/>
+                    </a:solidFill>
+                    <a:latin typeface="D2Coding" panose="020B0609020101020101" pitchFamily="49" charset="-127"/>
+                    <a:ea typeface="D2Coding" panose="020B0609020101020101" pitchFamily="49" charset="-127"/>
+                  </a:rPr>
+                  <a:t>별로 단순 평균을 내서 </a:t>
+                </a:r>
+                <a:r>
+                  <a:rPr lang="ko-KR" altLang="en-US" sz="1200" dirty="0" err="1">
+                    <a:solidFill>
+                      <a:schemeClr val="bg1"/>
+                    </a:solidFill>
+                    <a:latin typeface="D2Coding" panose="020B0609020101020101" pitchFamily="49" charset="-127"/>
+                    <a:ea typeface="D2Coding" panose="020B0609020101020101" pitchFamily="49" charset="-127"/>
+                  </a:rPr>
+                  <a:t>시간축을</a:t>
+                </a:r>
+                <a:r>
+                  <a:rPr lang="ko-KR" altLang="en-US" sz="1200" dirty="0">
+                    <a:solidFill>
+                      <a:schemeClr val="bg1"/>
+                    </a:solidFill>
+                    <a:latin typeface="D2Coding" panose="020B0609020101020101" pitchFamily="49" charset="-127"/>
+                    <a:ea typeface="D2Coding" panose="020B0609020101020101" pitchFamily="49" charset="-127"/>
+                  </a:rPr>
+                  <a:t> 완전히 제거</a:t>
+                </a:r>
+                <a:r>
+                  <a:rPr lang="en-US" altLang="ko-KR" sz="1200" dirty="0">
+                    <a:solidFill>
+                      <a:schemeClr val="bg1"/>
+                    </a:solidFill>
+                    <a:latin typeface="D2Coding" panose="020B0609020101020101" pitchFamily="49" charset="-127"/>
+                    <a:ea typeface="D2Coding" panose="020B0609020101020101" pitchFamily="49" charset="-127"/>
+                  </a:rPr>
+                  <a:t>(13</a:t>
+                </a:r>
+                <a:r>
+                  <a:rPr lang="ko-KR" altLang="en-US" sz="1200" dirty="0">
+                    <a:solidFill>
+                      <a:schemeClr val="bg1"/>
+                    </a:solidFill>
+                    <a:latin typeface="D2Coding" panose="020B0609020101020101" pitchFamily="49" charset="-127"/>
+                    <a:ea typeface="D2Coding" panose="020B0609020101020101" pitchFamily="49" charset="-127"/>
+                  </a:rPr>
+                  <a:t>개 시점의 </a:t>
+                </a:r>
+                <a:r>
+                  <a:rPr lang="en-US" altLang="ko-KR" sz="1200" dirty="0">
+                    <a:solidFill>
+                      <a:schemeClr val="bg1"/>
+                    </a:solidFill>
+                    <a:latin typeface="D2Coding" panose="020B0609020101020101" pitchFamily="49" charset="-127"/>
+                    <a:ea typeface="D2Coding" panose="020B0609020101020101" pitchFamily="49" charset="-127"/>
+                  </a:rPr>
+                  <a:t>8</a:t>
+                </a:r>
+                <a:r>
+                  <a:rPr lang="ko-KR" altLang="en-US" sz="1200" dirty="0">
+                    <a:solidFill>
+                      <a:schemeClr val="bg1"/>
+                    </a:solidFill>
+                    <a:latin typeface="D2Coding" panose="020B0609020101020101" pitchFamily="49" charset="-127"/>
+                    <a:ea typeface="D2Coding" panose="020B0609020101020101" pitchFamily="49" charset="-127"/>
+                  </a:rPr>
+                  <a:t>개 </a:t>
+                </a:r>
+                <a:r>
+                  <a:rPr lang="ko-KR" altLang="en-US" sz="1200" dirty="0" err="1">
+                    <a:solidFill>
+                      <a:schemeClr val="bg1"/>
+                    </a:solidFill>
+                    <a:latin typeface="D2Coding" panose="020B0609020101020101" pitchFamily="49" charset="-127"/>
+                    <a:ea typeface="D2Coding" panose="020B0609020101020101" pitchFamily="49" charset="-127"/>
+                  </a:rPr>
+                  <a:t>채널값</a:t>
+                </a:r>
+                <a:r>
+                  <a:rPr lang="ko-KR" altLang="en-US" sz="1200" dirty="0">
+                    <a:solidFill>
+                      <a:schemeClr val="bg1"/>
+                    </a:solidFill>
+                    <a:latin typeface="D2Coding" panose="020B0609020101020101" pitchFamily="49" charset="-127"/>
+                    <a:ea typeface="D2Coding" panose="020B0609020101020101" pitchFamily="49" charset="-127"/>
+                  </a:rPr>
+                  <a:t> 각각을 평균 내 </a:t>
+                </a:r>
+                <a:r>
+                  <a:rPr lang="en-US" altLang="ko-KR" sz="1200" dirty="0">
+                    <a:solidFill>
+                      <a:schemeClr val="bg1"/>
+                    </a:solidFill>
+                    <a:latin typeface="D2Coding" panose="020B0609020101020101" pitchFamily="49" charset="-127"/>
+                    <a:ea typeface="D2Coding" panose="020B0609020101020101" pitchFamily="49" charset="-127"/>
+                  </a:rPr>
+                  <a:t>8</a:t>
+                </a:r>
+                <a:r>
+                  <a:rPr lang="ko-KR" altLang="en-US" sz="1200" dirty="0">
+                    <a:solidFill>
+                      <a:schemeClr val="bg1"/>
+                    </a:solidFill>
+                    <a:latin typeface="D2Coding" panose="020B0609020101020101" pitchFamily="49" charset="-127"/>
+                    <a:ea typeface="D2Coding" panose="020B0609020101020101" pitchFamily="49" charset="-127"/>
+                  </a:rPr>
+                  <a:t>차원 벡터 하나로 압축</a:t>
+                </a:r>
+                <a:r>
+                  <a:rPr lang="en-US" altLang="ko-KR" sz="1200" dirty="0">
+                    <a:solidFill>
+                      <a:schemeClr val="bg1"/>
+                    </a:solidFill>
+                    <a:latin typeface="D2Coding" panose="020B0609020101020101" pitchFamily="49" charset="-127"/>
+                    <a:ea typeface="D2Coding" panose="020B0609020101020101" pitchFamily="49" charset="-127"/>
+                  </a:rPr>
+                  <a:t>)</a:t>
+                </a:r>
+              </a:p>
+              <a:p>
+                <a:pPr marL="342900" indent="-342900" rtl="0">
+                  <a:buFont typeface="+mj-lt"/>
+                  <a:buAutoNum type="arabicParenR"/>
+                </a:pPr>
+                <a:r>
+                  <a:rPr lang="en-US" altLang="ko-KR" sz="1200" dirty="0">
+                    <a:solidFill>
+                      <a:schemeClr val="bg1"/>
+                    </a:solidFill>
+                    <a:latin typeface="D2Coding" panose="020B0609020101020101" pitchFamily="49" charset="-127"/>
+                    <a:ea typeface="D2Coding" panose="020B0609020101020101" pitchFamily="49" charset="-127"/>
+                  </a:rPr>
+                  <a:t>Dense(1)</a:t>
+                </a:r>
+                <a:r>
+                  <a:rPr lang="ko-KR" altLang="en-US" sz="1200" dirty="0">
+                    <a:solidFill>
+                      <a:schemeClr val="bg1"/>
+                    </a:solidFill>
+                    <a:latin typeface="D2Coding" panose="020B0609020101020101" pitchFamily="49" charset="-127"/>
+                    <a:ea typeface="D2Coding" panose="020B0609020101020101" pitchFamily="49" charset="-127"/>
+                  </a:rPr>
+                  <a:t> → </a:t>
+                </a:r>
+                <a:r>
+                  <a:rPr lang="en-US" altLang="ko-KR" sz="1200" dirty="0">
+                    <a:solidFill>
+                      <a:schemeClr val="bg1"/>
+                    </a:solidFill>
+                    <a:latin typeface="D2Coding" panose="020B0609020101020101" pitchFamily="49" charset="-127"/>
+                    <a:ea typeface="D2Coding" panose="020B0609020101020101" pitchFamily="49" charset="-127"/>
+                  </a:rPr>
+                  <a:t>(1,)</a:t>
+                </a:r>
+                <a:endParaRPr lang="ko-KR" altLang="en-US" sz="1200" dirty="0">
+                  <a:solidFill>
+                    <a:schemeClr val="bg1"/>
+                  </a:solidFill>
+                  <a:latin typeface="D2Coding" panose="020B0609020101020101" pitchFamily="49" charset="-127"/>
+                  <a:ea typeface="D2Coding" panose="020B0609020101020101" pitchFamily="49" charset="-127"/>
+                </a:endParaRPr>
+              </a:p>
+              <a:p>
+                <a:pPr lvl="1"/>
+                <a:r>
+                  <a:rPr lang="ko-KR" altLang="en-US" sz="1200" dirty="0">
+                    <a:solidFill>
+                      <a:schemeClr val="bg1"/>
+                    </a:solidFill>
+                    <a:latin typeface="D2Coding" panose="020B0609020101020101" pitchFamily="49" charset="-127"/>
+                    <a:ea typeface="D2Coding" panose="020B0609020101020101" pitchFamily="49" charset="-127"/>
+                  </a:rPr>
+                  <a:t>압축된 </a:t>
+                </a:r>
+                <a:r>
+                  <a:rPr lang="en-US" altLang="ko-KR" sz="1200" dirty="0">
+                    <a:solidFill>
+                      <a:schemeClr val="bg1"/>
+                    </a:solidFill>
+                    <a:latin typeface="D2Coding" panose="020B0609020101020101" pitchFamily="49" charset="-127"/>
+                    <a:ea typeface="D2Coding" panose="020B0609020101020101" pitchFamily="49" charset="-127"/>
+                  </a:rPr>
+                  <a:t>8</a:t>
+                </a:r>
+                <a:r>
+                  <a:rPr lang="ko-KR" altLang="en-US" sz="1200" dirty="0">
+                    <a:solidFill>
+                      <a:schemeClr val="bg1"/>
+                    </a:solidFill>
+                    <a:latin typeface="D2Coding" panose="020B0609020101020101" pitchFamily="49" charset="-127"/>
+                    <a:ea typeface="D2Coding" panose="020B0609020101020101" pitchFamily="49" charset="-127"/>
+                  </a:rPr>
+                  <a:t>차원 벡터를 받아 최종 온도 </a:t>
+                </a:r>
+                <a:r>
+                  <a:rPr lang="ko-KR" altLang="en-US" sz="1200" dirty="0" err="1">
+                    <a:solidFill>
+                      <a:schemeClr val="bg1"/>
+                    </a:solidFill>
+                    <a:latin typeface="D2Coding" panose="020B0609020101020101" pitchFamily="49" charset="-127"/>
+                    <a:ea typeface="D2Coding" panose="020B0609020101020101" pitchFamily="49" charset="-127"/>
+                  </a:rPr>
+                  <a:t>예측값</a:t>
+                </a:r>
+                <a:r>
+                  <a:rPr lang="ko-KR" altLang="en-US" sz="1200" dirty="0">
+                    <a:solidFill>
+                      <a:schemeClr val="bg1"/>
+                    </a:solidFill>
+                    <a:latin typeface="D2Coding" panose="020B0609020101020101" pitchFamily="49" charset="-127"/>
+                    <a:ea typeface="D2Coding" panose="020B0609020101020101" pitchFamily="49" charset="-127"/>
+                  </a:rPr>
+                  <a:t> 하나를 출력</a:t>
+                </a:r>
+                <a:r>
+                  <a:rPr lang="en-US" altLang="ko-KR" sz="1200" dirty="0">
+                    <a:solidFill>
+                      <a:schemeClr val="bg1"/>
+                    </a:solidFill>
+                    <a:latin typeface="D2Coding" panose="020B0609020101020101" pitchFamily="49" charset="-127"/>
+                    <a:ea typeface="D2Coding" panose="020B0609020101020101" pitchFamily="49" charset="-127"/>
+                  </a:rPr>
+                  <a:t>.</a:t>
+                </a:r>
+              </a:p>
+            </p:txBody>
+          </p:sp>
+        </mc:Choice>
+        <mc:Fallback>
+          <p:sp>
+            <p:nvSpPr>
+              <p:cNvPr id="18" name="TextBox 17">
+                <a:extLst>
+                  <a:ext uri="{FF2B5EF4-FFF2-40B4-BE49-F238E27FC236}">
+                    <a16:creationId xmlns:a16="http://schemas.microsoft.com/office/drawing/2014/main" id="{48C85ABC-849F-62D3-3CB1-999AD960394D}"/>
+                  </a:ext>
+                </a:extLst>
+              </p:cNvPr>
+              <p:cNvSpPr txBox="1">
+                <a:spLocks noRot="1" noChangeAspect="1" noMove="1" noResize="1" noEditPoints="1" noAdjustHandles="1" noChangeArrowheads="1" noChangeShapeType="1" noTextEdit="1"/>
+              </p:cNvSpPr>
+              <p:nvPr/>
+            </p:nvSpPr>
+            <p:spPr>
+              <a:xfrm>
+                <a:off x="4829175" y="2800350"/>
+                <a:ext cx="7086857" cy="3600986"/>
+              </a:xfrm>
+              <a:prstGeom prst="rect">
+                <a:avLst/>
+              </a:prstGeom>
+              <a:blipFill>
+                <a:blip r:embed="rId2"/>
+                <a:stretch>
+                  <a:fillRect/>
+                </a:stretch>
+              </a:blipFill>
+              <a:ln>
+                <a:solidFill>
+                  <a:schemeClr val="tx1"/>
+                </a:solidFill>
+              </a:ln>
+            </p:spPr>
+            <p:txBody>
+              <a:bodyPr/>
+              <a:lstStyle/>
+              <a:p>
+                <a:r>
+                  <a:rPr lang="ko-KR" altLang="en-US">
+                    <a:noFill/>
+                  </a:rPr>
+                  <a:t> </a:t>
+                </a:r>
+              </a:p>
+            </p:txBody>
+          </p:sp>
+        </mc:Fallback>
+      </mc:AlternateContent>
+      <p:sp>
+        <p:nvSpPr>
+          <p:cNvPr id="19" name="직사각형 18">
+            <a:extLst>
+              <a:ext uri="{FF2B5EF4-FFF2-40B4-BE49-F238E27FC236}">
+                <a16:creationId xmlns:a16="http://schemas.microsoft.com/office/drawing/2014/main" id="{8DECA06A-6461-F081-79D9-19CE003600E6}"/>
+              </a:ext>
+            </a:extLst>
+          </p:cNvPr>
+          <p:cNvSpPr/>
+          <p:nvPr/>
+        </p:nvSpPr>
+        <p:spPr>
+          <a:xfrm>
+            <a:off x="4705350" y="5400675"/>
+            <a:ext cx="7315200" cy="573705"/>
+          </a:xfrm>
+          <a:prstGeom prst="rect">
+            <a:avLst/>
+          </a:prstGeom>
+          <a:noFill/>
+          <a:ln w="28575">
+            <a:solidFill>
+              <a:srgbClr val="FF0000"/>
+            </a:solidFill>
+          </a:ln>
+        </p:spPr>
+        <p:style>
+          <a:lnRef idx="2">
+            <a:schemeClr val="accent1">
+              <a:shade val="15000"/>
+            </a:schemeClr>
+          </a:lnRef>
+          <a:fillRef idx="1">
+            <a:schemeClr val="accent1"/>
+          </a:fillRef>
+          <a:effectRef idx="0">
+            <a:schemeClr val="accent1"/>
+          </a:effectRef>
+          <a:fontRef idx="minor">
+            <a:schemeClr val="lt1"/>
+          </a:fontRef>
+        </p:style>
+        <p:txBody>
+          <a:bodyPr rtlCol="0" anchor="ctr"/>
+          <a:lstStyle/>
+          <a:p>
+            <a:pPr algn="ctr"/>
+            <a:endParaRPr lang="ko-KR" altLang="en-US" dirty="0"/>
+          </a:p>
+        </p:txBody>
+      </p:sp>
+      <p:sp>
+        <p:nvSpPr>
+          <p:cNvPr id="20" name="직사각형 19">
+            <a:extLst>
+              <a:ext uri="{FF2B5EF4-FFF2-40B4-BE49-F238E27FC236}">
+                <a16:creationId xmlns:a16="http://schemas.microsoft.com/office/drawing/2014/main" id="{3D0B2576-DC79-202C-7B91-DEE05AC42A8D}"/>
+              </a:ext>
+            </a:extLst>
+          </p:cNvPr>
+          <p:cNvSpPr/>
+          <p:nvPr/>
+        </p:nvSpPr>
+        <p:spPr>
+          <a:xfrm>
+            <a:off x="275968" y="4108487"/>
+            <a:ext cx="4429382" cy="196813"/>
+          </a:xfrm>
+          <a:prstGeom prst="rect">
+            <a:avLst/>
+          </a:prstGeom>
+          <a:noFill/>
+          <a:ln w="28575">
+            <a:solidFill>
+              <a:srgbClr val="FF0000"/>
+            </a:solidFill>
+          </a:ln>
+        </p:spPr>
+        <p:style>
+          <a:lnRef idx="2">
+            <a:schemeClr val="accent1">
+              <a:shade val="15000"/>
+            </a:schemeClr>
+          </a:lnRef>
+          <a:fillRef idx="1">
+            <a:schemeClr val="accent1"/>
+          </a:fillRef>
+          <a:effectRef idx="0">
+            <a:schemeClr val="accent1"/>
+          </a:effectRef>
+          <a:fontRef idx="minor">
+            <a:schemeClr val="lt1"/>
+          </a:fontRef>
+        </p:style>
+        <p:txBody>
+          <a:bodyPr rtlCol="0" anchor="ctr"/>
+          <a:lstStyle/>
+          <a:p>
+            <a:pPr algn="ctr"/>
+            <a:endParaRPr lang="ko-KR" altLang="en-US" dirty="0"/>
+          </a:p>
+        </p:txBody>
+      </p:sp>
     </p:spTree>
     <p:extLst>
       <p:ext uri="{BB962C8B-B14F-4D97-AF65-F5344CB8AC3E}">
@@ -9035,7 +12398,685 @@
 </p:sld>
 </file>
 
-<file path=ppt/slides/slide17.xml><?xml version="1.0" encoding="utf-8"?>
+<file path=ppt/slides/slide18.xml><?xml version="1.0" encoding="utf-8"?>
+<p:sld xmlns:a="http://schemas.openxmlformats.org/drawingml/2006/main" xmlns:r="http://schemas.openxmlformats.org/officeDocument/2006/relationships" xmlns:p="http://schemas.openxmlformats.org/presentationml/2006/main">
+  <p:cSld>
+    <p:spTree>
+      <p:nvGrpSpPr>
+        <p:cNvPr id="1" name="">
+          <a:extLst>
+            <a:ext uri="{FF2B5EF4-FFF2-40B4-BE49-F238E27FC236}">
+              <a16:creationId xmlns:a16="http://schemas.microsoft.com/office/drawing/2014/main" id="{FB04CE35-0F48-4AA2-0646-52FB0C9646B0}"/>
+            </a:ext>
+          </a:extLst>
+        </p:cNvPr>
+        <p:cNvGrpSpPr/>
+        <p:nvPr/>
+      </p:nvGrpSpPr>
+      <p:grpSpPr>
+        <a:xfrm>
+          <a:off x="0" y="0"/>
+          <a:ext cx="0" cy="0"/>
+          <a:chOff x="0" y="0"/>
+          <a:chExt cx="0" cy="0"/>
+        </a:xfrm>
+      </p:grpSpPr>
+      <p:sp>
+        <p:nvSpPr>
+          <p:cNvPr id="7" name="화살표: 줄무늬가 있는 오른쪽 6">
+            <a:extLst>
+              <a:ext uri="{FF2B5EF4-FFF2-40B4-BE49-F238E27FC236}">
+                <a16:creationId xmlns:a16="http://schemas.microsoft.com/office/drawing/2014/main" id="{06449C1D-B282-8DFC-C649-75B35FA221CA}"/>
+              </a:ext>
+            </a:extLst>
+          </p:cNvPr>
+          <p:cNvSpPr/>
+          <p:nvPr/>
+        </p:nvSpPr>
+        <p:spPr>
+          <a:xfrm>
+            <a:off x="4019550" y="5048250"/>
+            <a:ext cx="3733800" cy="1327767"/>
+          </a:xfrm>
+          <a:prstGeom prst="stripedRightArrow">
+            <a:avLst>
+              <a:gd name="adj1" fmla="val 64347"/>
+              <a:gd name="adj2" fmla="val 50000"/>
+            </a:avLst>
+          </a:prstGeom>
+          <a:solidFill>
+            <a:schemeClr val="accent6">
+              <a:lumMod val="20000"/>
+              <a:lumOff val="80000"/>
+            </a:schemeClr>
+          </a:solidFill>
+          <a:ln>
+            <a:solidFill>
+              <a:srgbClr val="92D050"/>
+            </a:solidFill>
+          </a:ln>
+        </p:spPr>
+        <p:style>
+          <a:lnRef idx="2">
+            <a:schemeClr val="accent1">
+              <a:shade val="15000"/>
+            </a:schemeClr>
+          </a:lnRef>
+          <a:fillRef idx="1">
+            <a:schemeClr val="accent1"/>
+          </a:fillRef>
+          <a:effectRef idx="0">
+            <a:schemeClr val="accent1"/>
+          </a:effectRef>
+          <a:fontRef idx="minor">
+            <a:schemeClr val="lt1"/>
+          </a:fontRef>
+        </p:style>
+        <p:txBody>
+          <a:bodyPr rtlCol="0" anchor="ctr"/>
+          <a:lstStyle/>
+          <a:p>
+            <a:pPr algn="ctr"/>
+            <a:endParaRPr lang="ko-KR" altLang="en-US" dirty="0"/>
+          </a:p>
+        </p:txBody>
+      </p:sp>
+      <p:sp>
+        <p:nvSpPr>
+          <p:cNvPr id="3" name="제목 1">
+            <a:extLst>
+              <a:ext uri="{FF2B5EF4-FFF2-40B4-BE49-F238E27FC236}">
+                <a16:creationId xmlns:a16="http://schemas.microsoft.com/office/drawing/2014/main" id="{2A5F371D-8BBD-7B7E-455B-BF9347AF5B09}"/>
+              </a:ext>
+            </a:extLst>
+          </p:cNvPr>
+          <p:cNvSpPr txBox="1">
+            <a:spLocks/>
+          </p:cNvSpPr>
+          <p:nvPr/>
+        </p:nvSpPr>
+        <p:spPr>
+          <a:xfrm>
+            <a:off x="475645" y="481983"/>
+            <a:ext cx="10353762" cy="766439"/>
+          </a:xfrm>
+          <a:prstGeom prst="rect">
+            <a:avLst/>
+          </a:prstGeom>
+        </p:spPr>
+        <p:txBody>
+          <a:bodyPr vert="horz" lIns="91440" tIns="45720" rIns="91440" bIns="45720" rtlCol="0" anchor="ctr">
+            <a:normAutofit/>
+          </a:bodyPr>
+          <a:lstStyle>
+            <a:lvl1pPr algn="ctr" defTabSz="914400" rtl="0" eaLnBrk="1" latinLnBrk="1" hangingPunct="1">
+              <a:lnSpc>
+                <a:spcPct val="90000"/>
+              </a:lnSpc>
+              <a:spcBef>
+                <a:spcPct val="0"/>
+              </a:spcBef>
+              <a:buNone/>
+              <a:defRPr sz="3200" kern="1200" cap="all" baseline="0">
+                <a:solidFill>
+                  <a:schemeClr val="tx1"/>
+                </a:solidFill>
+                <a:effectLst/>
+                <a:latin typeface="Batang" panose="02030600000101010101" pitchFamily="18" charset="-127"/>
+                <a:ea typeface="Batang" panose="02030600000101010101" pitchFamily="18" charset="-127"/>
+                <a:cs typeface="+mj-cs"/>
+              </a:defRPr>
+            </a:lvl1pPr>
+          </a:lstStyle>
+          <a:p>
+            <a:pPr algn="l"/>
+            <a:r>
+              <a:rPr lang="en-US" altLang="ko-KR" sz="2800" cap="none" dirty="0">
+                <a:solidFill>
+                  <a:schemeClr val="bg2">
+                    <a:lumMod val="25000"/>
+                  </a:schemeClr>
+                </a:solidFill>
+                <a:latin typeface="D2Coding" panose="020B0609020101020101" pitchFamily="49" charset="-127"/>
+                <a:ea typeface="D2Coding" panose="020B0609020101020101" pitchFamily="49" charset="-127"/>
+                <a:cs typeface="Segoe UI Light" panose="020B0502040204020203" pitchFamily="34" charset="0"/>
+              </a:rPr>
+              <a:t>Recurrent Neural Network(RNN)</a:t>
+            </a:r>
+            <a:endParaRPr lang="ko-KR" altLang="en-US" sz="2800" cap="none" dirty="0">
+              <a:solidFill>
+                <a:schemeClr val="bg2">
+                  <a:lumMod val="25000"/>
+                </a:schemeClr>
+              </a:solidFill>
+              <a:latin typeface="D2Coding" panose="020B0609020101020101" pitchFamily="49" charset="-127"/>
+              <a:ea typeface="D2Coding" panose="020B0609020101020101" pitchFamily="49" charset="-127"/>
+              <a:cs typeface="Segoe UI Light" panose="020B0502040204020203" pitchFamily="34" charset="0"/>
+            </a:endParaRPr>
+          </a:p>
+        </p:txBody>
+      </p:sp>
+      <p:sp>
+        <p:nvSpPr>
+          <p:cNvPr id="4" name="슬라이드 번호 개체 틀 3">
+            <a:extLst>
+              <a:ext uri="{FF2B5EF4-FFF2-40B4-BE49-F238E27FC236}">
+                <a16:creationId xmlns:a16="http://schemas.microsoft.com/office/drawing/2014/main" id="{6A16A2E3-62FE-9107-C7A0-E3D74C71D4C5}"/>
+              </a:ext>
+            </a:extLst>
+          </p:cNvPr>
+          <p:cNvSpPr>
+            <a:spLocks noGrp="1"/>
+          </p:cNvSpPr>
+          <p:nvPr>
+            <p:ph type="sldNum" sz="quarter" idx="12"/>
+          </p:nvPr>
+        </p:nvSpPr>
+        <p:spPr>
+          <a:xfrm>
+            <a:off x="11162487" y="299420"/>
+            <a:ext cx="753545" cy="365125"/>
+          </a:xfrm>
+        </p:spPr>
+        <p:txBody>
+          <a:bodyPr/>
+          <a:lstStyle/>
+          <a:p>
+            <a:fld id="{D57F1E4F-1CFF-5643-939E-217C01CDF565}" type="slidenum">
+              <a:rPr lang="en-US" sz="1400" b="1" smtClean="0">
+                <a:latin typeface="Times New Roman" panose="02020603050405020304" pitchFamily="18" charset="0"/>
+                <a:ea typeface="Verdana" panose="020B0604030504040204" pitchFamily="34" charset="0"/>
+                <a:cs typeface="Times New Roman" panose="02020603050405020304" pitchFamily="18" charset="0"/>
+              </a:rPr>
+              <a:pPr/>
+              <a:t>18</a:t>
+            </a:fld>
+            <a:endParaRPr lang="en-US" sz="1400" b="1" dirty="0">
+              <a:latin typeface="Times New Roman" panose="02020603050405020304" pitchFamily="18" charset="0"/>
+              <a:ea typeface="Verdana" panose="020B0604030504040204" pitchFamily="34" charset="0"/>
+              <a:cs typeface="Times New Roman" panose="02020603050405020304" pitchFamily="18" charset="0"/>
+            </a:endParaRPr>
+          </a:p>
+        </p:txBody>
+      </p:sp>
+      <p:sp>
+        <p:nvSpPr>
+          <p:cNvPr id="8" name="TextBox 7">
+            <a:extLst>
+              <a:ext uri="{FF2B5EF4-FFF2-40B4-BE49-F238E27FC236}">
+                <a16:creationId xmlns:a16="http://schemas.microsoft.com/office/drawing/2014/main" id="{0789AC89-F840-74F5-1705-6C02A780E611}"/>
+              </a:ext>
+            </a:extLst>
+          </p:cNvPr>
+          <p:cNvSpPr txBox="1"/>
+          <p:nvPr/>
+        </p:nvSpPr>
+        <p:spPr>
+          <a:xfrm>
+            <a:off x="559528" y="1196976"/>
+            <a:ext cx="10986284" cy="1531830"/>
+          </a:xfrm>
+          <a:prstGeom prst="rect">
+            <a:avLst/>
+          </a:prstGeom>
+          <a:noFill/>
+        </p:spPr>
+        <p:txBody>
+          <a:bodyPr wrap="square">
+            <a:spAutoFit/>
+          </a:bodyPr>
+          <a:lstStyle/>
+          <a:p>
+            <a:pPr marL="285750" indent="-285750">
+              <a:lnSpc>
+                <a:spcPct val="150000"/>
+              </a:lnSpc>
+              <a:buFont typeface="Wingdings" panose="05000000000000000000" pitchFamily="2" charset="2"/>
+              <a:buChar char="§"/>
+            </a:pPr>
+            <a:r>
+              <a:rPr lang="en-US" altLang="ko-KR" sz="1600" dirty="0">
+                <a:latin typeface="D2Coding" panose="020B0609020101020101" pitchFamily="49" charset="-127"/>
+                <a:ea typeface="D2Coding" panose="020B0609020101020101" pitchFamily="49" charset="-127"/>
+              </a:rPr>
+              <a:t>LSTM</a:t>
+            </a:r>
+            <a:r>
+              <a:rPr lang="ko-KR" altLang="en-US" sz="1600" dirty="0">
+                <a:latin typeface="D2Coding" panose="020B0609020101020101" pitchFamily="49" charset="-127"/>
+                <a:ea typeface="D2Coding" panose="020B0609020101020101" pitchFamily="49" charset="-127"/>
+              </a:rPr>
+              <a:t>은 시간을 순서대로 하나씩 읽으며 은닉 상태를 계속 갱신하고</a:t>
+            </a:r>
+            <a:r>
+              <a:rPr lang="en-US" altLang="ko-KR" sz="1600" dirty="0">
+                <a:latin typeface="D2Coding" panose="020B0609020101020101" pitchFamily="49" charset="-127"/>
+                <a:ea typeface="D2Coding" panose="020B0609020101020101" pitchFamily="49" charset="-127"/>
+              </a:rPr>
+              <a:t>, forget/input </a:t>
+            </a:r>
+            <a:r>
+              <a:rPr lang="ko-KR" altLang="en-US" sz="1600" dirty="0">
+                <a:latin typeface="D2Coding" panose="020B0609020101020101" pitchFamily="49" charset="-127"/>
+                <a:ea typeface="D2Coding" panose="020B0609020101020101" pitchFamily="49" charset="-127"/>
+              </a:rPr>
+              <a:t>게이트가 </a:t>
+            </a:r>
+            <a:r>
+              <a:rPr lang="en-US" altLang="ko-KR" sz="1600" dirty="0">
+                <a:latin typeface="D2Coding" panose="020B0609020101020101" pitchFamily="49" charset="-127"/>
+                <a:ea typeface="D2Coding" panose="020B0609020101020101" pitchFamily="49" charset="-127"/>
+              </a:rPr>
+              <a:t>"</a:t>
+            </a:r>
+            <a:r>
+              <a:rPr lang="ko-KR" altLang="en-US" sz="1600" dirty="0">
+                <a:latin typeface="D2Coding" panose="020B0609020101020101" pitchFamily="49" charset="-127"/>
+                <a:ea typeface="D2Coding" panose="020B0609020101020101" pitchFamily="49" charset="-127"/>
+              </a:rPr>
+              <a:t>이전 정보를 얼마나 유지할지 </a:t>
+            </a:r>
+            <a:r>
+              <a:rPr lang="en-US" altLang="ko-KR" sz="1600" dirty="0">
+                <a:latin typeface="D2Coding" panose="020B0609020101020101" pitchFamily="49" charset="-127"/>
+                <a:ea typeface="D2Coding" panose="020B0609020101020101" pitchFamily="49" charset="-127"/>
+              </a:rPr>
+              <a:t>vs </a:t>
+            </a:r>
+            <a:r>
+              <a:rPr lang="ko-KR" altLang="en-US" sz="1600" dirty="0">
+                <a:latin typeface="D2Coding" panose="020B0609020101020101" pitchFamily="49" charset="-127"/>
+                <a:ea typeface="D2Coding" panose="020B0609020101020101" pitchFamily="49" charset="-127"/>
+              </a:rPr>
+              <a:t>최근 정보를 얼마나 반영할지</a:t>
+            </a:r>
+            <a:r>
+              <a:rPr lang="en-US" altLang="ko-KR" sz="1600" dirty="0">
+                <a:latin typeface="D2Coding" panose="020B0609020101020101" pitchFamily="49" charset="-127"/>
+                <a:ea typeface="D2Coding" panose="020B0609020101020101" pitchFamily="49" charset="-127"/>
+              </a:rPr>
+              <a:t>"</a:t>
+            </a:r>
+            <a:r>
+              <a:rPr lang="ko-KR" altLang="en-US" sz="1600" dirty="0">
+                <a:latin typeface="D2Coding" panose="020B0609020101020101" pitchFamily="49" charset="-127"/>
+                <a:ea typeface="D2Coding" panose="020B0609020101020101" pitchFamily="49" charset="-127"/>
+              </a:rPr>
+              <a:t>를 학습을 통해 조절</a:t>
+            </a:r>
+            <a:endParaRPr lang="en-US" altLang="ko-KR" sz="1600" dirty="0">
+              <a:latin typeface="D2Coding" panose="020B0609020101020101" pitchFamily="49" charset="-127"/>
+              <a:ea typeface="D2Coding" panose="020B0609020101020101" pitchFamily="49" charset="-127"/>
+            </a:endParaRPr>
+          </a:p>
+          <a:p>
+            <a:pPr marL="285750" indent="-285750">
+              <a:lnSpc>
+                <a:spcPct val="150000"/>
+              </a:lnSpc>
+              <a:buFont typeface="Wingdings" panose="05000000000000000000" pitchFamily="2" charset="2"/>
+              <a:buChar char="§"/>
+            </a:pPr>
+            <a:r>
+              <a:rPr lang="en-US" altLang="ko-KR" sz="1600" dirty="0">
+                <a:latin typeface="D2Coding" panose="020B0609020101020101" pitchFamily="49" charset="-127"/>
+                <a:ea typeface="D2Coding" panose="020B0609020101020101" pitchFamily="49" charset="-127"/>
+              </a:rPr>
+              <a:t>"</a:t>
+            </a:r>
+            <a:r>
+              <a:rPr lang="ko-KR" altLang="en-US" sz="1600" dirty="0">
+                <a:latin typeface="D2Coding" panose="020B0609020101020101" pitchFamily="49" charset="-127"/>
+                <a:ea typeface="D2Coding" panose="020B0609020101020101" pitchFamily="49" charset="-127"/>
+              </a:rPr>
+              <a:t>최근 값에 더 가중치를 줄지 말지</a:t>
+            </a:r>
+            <a:r>
+              <a:rPr lang="en-US" altLang="ko-KR" sz="1600" dirty="0">
+                <a:latin typeface="D2Coding" panose="020B0609020101020101" pitchFamily="49" charset="-127"/>
+                <a:ea typeface="D2Coding" panose="020B0609020101020101" pitchFamily="49" charset="-127"/>
+              </a:rPr>
+              <a:t>"</a:t>
+            </a:r>
+            <a:r>
+              <a:rPr lang="ko-KR" altLang="en-US" sz="1600" dirty="0">
+                <a:latin typeface="D2Coding" panose="020B0609020101020101" pitchFamily="49" charset="-127"/>
+                <a:ea typeface="D2Coding" panose="020B0609020101020101" pitchFamily="49" charset="-127"/>
+              </a:rPr>
+              <a:t>를 데이터로부터 배울 수 있는 지</a:t>
+            </a:r>
+            <a:r>
+              <a:rPr lang="en-US" altLang="ko-KR" sz="1600" dirty="0">
+                <a:latin typeface="D2Coding" panose="020B0609020101020101" pitchFamily="49" charset="-127"/>
+                <a:ea typeface="D2Coding" panose="020B0609020101020101" pitchFamily="49" charset="-127"/>
+              </a:rPr>
+              <a:t> </a:t>
+            </a:r>
+            <a:r>
+              <a:rPr lang="ko-KR" altLang="en-US" sz="1600" dirty="0">
+                <a:latin typeface="D2Coding" panose="020B0609020101020101" pitchFamily="49" charset="-127"/>
+                <a:ea typeface="D2Coding" panose="020B0609020101020101" pitchFamily="49" charset="-127"/>
+              </a:rPr>
+              <a:t>확인하는 반면</a:t>
+            </a:r>
+            <a:r>
+              <a:rPr lang="en-US" altLang="ko-KR" sz="1600" dirty="0">
+                <a:latin typeface="D2Coding" panose="020B0609020101020101" pitchFamily="49" charset="-127"/>
+                <a:ea typeface="D2Coding" panose="020B0609020101020101" pitchFamily="49" charset="-127"/>
+              </a:rPr>
+              <a:t> GlobalAveragePooling1D</a:t>
+            </a:r>
+            <a:r>
+              <a:rPr lang="ko-KR" altLang="en-US" sz="1600" dirty="0">
+                <a:latin typeface="D2Coding" panose="020B0609020101020101" pitchFamily="49" charset="-127"/>
+                <a:ea typeface="D2Coding" panose="020B0609020101020101" pitchFamily="49" charset="-127"/>
+              </a:rPr>
+              <a:t>는 그 여지 자체를 원천적으로 차단하고 균등 평균을 강제하는 구조라는 점이 차이</a:t>
+            </a:r>
+            <a:endParaRPr lang="en-US" altLang="ko-KR" sz="1600" dirty="0">
+              <a:latin typeface="D2Coding" panose="020B0609020101020101" pitchFamily="49" charset="-127"/>
+              <a:ea typeface="D2Coding" panose="020B0609020101020101" pitchFamily="49" charset="-127"/>
+            </a:endParaRPr>
+          </a:p>
+        </p:txBody>
+      </p:sp>
+      <p:sp>
+        <p:nvSpPr>
+          <p:cNvPr id="16" name="TextBox 15">
+            <a:extLst>
+              <a:ext uri="{FF2B5EF4-FFF2-40B4-BE49-F238E27FC236}">
+                <a16:creationId xmlns:a16="http://schemas.microsoft.com/office/drawing/2014/main" id="{7A856138-4D46-2800-2BF9-E473040B755E}"/>
+              </a:ext>
+            </a:extLst>
+          </p:cNvPr>
+          <p:cNvSpPr txBox="1"/>
+          <p:nvPr/>
+        </p:nvSpPr>
+        <p:spPr>
+          <a:xfrm>
+            <a:off x="895349" y="2933700"/>
+            <a:ext cx="8029575" cy="1711815"/>
+          </a:xfrm>
+          <a:prstGeom prst="rect">
+            <a:avLst/>
+          </a:prstGeom>
+          <a:solidFill>
+            <a:srgbClr val="76E3FF"/>
+          </a:solidFill>
+        </p:spPr>
+        <p:txBody>
+          <a:bodyPr wrap="square">
+            <a:spAutoFit/>
+          </a:bodyPr>
+          <a:lstStyle/>
+          <a:p>
+            <a:pPr>
+              <a:lnSpc>
+                <a:spcPct val="150000"/>
+              </a:lnSpc>
+            </a:pPr>
+            <a:r>
+              <a:rPr lang="en-US" altLang="ko-KR" dirty="0">
+                <a:latin typeface="D2Coding" panose="020B0609020101020101" pitchFamily="49" charset="-127"/>
+                <a:ea typeface="D2Coding" panose="020B0609020101020101" pitchFamily="49" charset="-127"/>
+              </a:rPr>
+              <a:t>inputs = </a:t>
+            </a:r>
+            <a:r>
+              <a:rPr lang="en-US" altLang="ko-KR" dirty="0" err="1">
+                <a:latin typeface="D2Coding" panose="020B0609020101020101" pitchFamily="49" charset="-127"/>
+                <a:ea typeface="D2Coding" panose="020B0609020101020101" pitchFamily="49" charset="-127"/>
+              </a:rPr>
+              <a:t>keras.Input</a:t>
+            </a:r>
+            <a:r>
+              <a:rPr lang="en-US" altLang="ko-KR" dirty="0">
+                <a:latin typeface="D2Coding" panose="020B0609020101020101" pitchFamily="49" charset="-127"/>
+                <a:ea typeface="D2Coding" panose="020B0609020101020101" pitchFamily="49" charset="-127"/>
+              </a:rPr>
+              <a:t>(shape=(</a:t>
+            </a:r>
+            <a:r>
+              <a:rPr lang="en-US" altLang="ko-KR" dirty="0" err="1">
+                <a:latin typeface="D2Coding" panose="020B0609020101020101" pitchFamily="49" charset="-127"/>
+                <a:ea typeface="D2Coding" panose="020B0609020101020101" pitchFamily="49" charset="-127"/>
+              </a:rPr>
+              <a:t>sequence_length</a:t>
+            </a:r>
+            <a:r>
+              <a:rPr lang="en-US" altLang="ko-KR" dirty="0">
+                <a:latin typeface="D2Coding" panose="020B0609020101020101" pitchFamily="49" charset="-127"/>
+                <a:ea typeface="D2Coding" panose="020B0609020101020101" pitchFamily="49" charset="-127"/>
+              </a:rPr>
+              <a:t>, </a:t>
+            </a:r>
+            <a:r>
+              <a:rPr lang="en-US" altLang="ko-KR" dirty="0" err="1">
+                <a:latin typeface="D2Coding" panose="020B0609020101020101" pitchFamily="49" charset="-127"/>
+                <a:ea typeface="D2Coding" panose="020B0609020101020101" pitchFamily="49" charset="-127"/>
+              </a:rPr>
+              <a:t>raw_data.shape</a:t>
+            </a:r>
+            <a:r>
+              <a:rPr lang="en-US" altLang="ko-KR" dirty="0">
+                <a:latin typeface="D2Coding" panose="020B0609020101020101" pitchFamily="49" charset="-127"/>
+                <a:ea typeface="D2Coding" panose="020B0609020101020101" pitchFamily="49" charset="-127"/>
+              </a:rPr>
+              <a:t>[-1]))</a:t>
+            </a:r>
+          </a:p>
+          <a:p>
+            <a:pPr>
+              <a:lnSpc>
+                <a:spcPct val="150000"/>
+              </a:lnSpc>
+            </a:pPr>
+            <a:r>
+              <a:rPr lang="en-US" altLang="ko-KR" dirty="0">
+                <a:latin typeface="D2Coding" panose="020B0609020101020101" pitchFamily="49" charset="-127"/>
+                <a:ea typeface="D2Coding" panose="020B0609020101020101" pitchFamily="49" charset="-127"/>
+              </a:rPr>
+              <a:t>x = </a:t>
+            </a:r>
+            <a:r>
+              <a:rPr lang="en-US" altLang="ko-KR" dirty="0" err="1">
+                <a:latin typeface="D2Coding" panose="020B0609020101020101" pitchFamily="49" charset="-127"/>
+                <a:ea typeface="D2Coding" panose="020B0609020101020101" pitchFamily="49" charset="-127"/>
+              </a:rPr>
+              <a:t>layers.LSTM</a:t>
+            </a:r>
+            <a:r>
+              <a:rPr lang="en-US" altLang="ko-KR" dirty="0">
+                <a:latin typeface="D2Coding" panose="020B0609020101020101" pitchFamily="49" charset="-127"/>
+                <a:ea typeface="D2Coding" panose="020B0609020101020101" pitchFamily="49" charset="-127"/>
+              </a:rPr>
+              <a:t>(16)(inputs)</a:t>
+            </a:r>
+          </a:p>
+          <a:p>
+            <a:pPr>
+              <a:lnSpc>
+                <a:spcPct val="150000"/>
+              </a:lnSpc>
+            </a:pPr>
+            <a:r>
+              <a:rPr lang="en-US" altLang="ko-KR" dirty="0">
+                <a:latin typeface="D2Coding" panose="020B0609020101020101" pitchFamily="49" charset="-127"/>
+                <a:ea typeface="D2Coding" panose="020B0609020101020101" pitchFamily="49" charset="-127"/>
+              </a:rPr>
+              <a:t>outputs = </a:t>
+            </a:r>
+            <a:r>
+              <a:rPr lang="en-US" altLang="ko-KR" dirty="0" err="1">
+                <a:latin typeface="D2Coding" panose="020B0609020101020101" pitchFamily="49" charset="-127"/>
+                <a:ea typeface="D2Coding" panose="020B0609020101020101" pitchFamily="49" charset="-127"/>
+              </a:rPr>
+              <a:t>layers.Dense</a:t>
+            </a:r>
+            <a:r>
+              <a:rPr lang="en-US" altLang="ko-KR" dirty="0">
+                <a:latin typeface="D2Coding" panose="020B0609020101020101" pitchFamily="49" charset="-127"/>
+                <a:ea typeface="D2Coding" panose="020B0609020101020101" pitchFamily="49" charset="-127"/>
+              </a:rPr>
+              <a:t>(1)(x)</a:t>
+            </a:r>
+          </a:p>
+          <a:p>
+            <a:pPr>
+              <a:lnSpc>
+                <a:spcPct val="150000"/>
+              </a:lnSpc>
+            </a:pPr>
+            <a:r>
+              <a:rPr lang="en-US" altLang="ko-KR" dirty="0">
+                <a:latin typeface="D2Coding" panose="020B0609020101020101" pitchFamily="49" charset="-127"/>
+                <a:ea typeface="D2Coding" panose="020B0609020101020101" pitchFamily="49" charset="-127"/>
+              </a:rPr>
+              <a:t>model = </a:t>
+            </a:r>
+            <a:r>
+              <a:rPr lang="en-US" altLang="ko-KR" dirty="0" err="1">
+                <a:latin typeface="D2Coding" panose="020B0609020101020101" pitchFamily="49" charset="-127"/>
+                <a:ea typeface="D2Coding" panose="020B0609020101020101" pitchFamily="49" charset="-127"/>
+              </a:rPr>
+              <a:t>keras.Model</a:t>
+            </a:r>
+            <a:r>
+              <a:rPr lang="en-US" altLang="ko-KR" dirty="0">
+                <a:latin typeface="D2Coding" panose="020B0609020101020101" pitchFamily="49" charset="-127"/>
+                <a:ea typeface="D2Coding" panose="020B0609020101020101" pitchFamily="49" charset="-127"/>
+              </a:rPr>
+              <a:t>(inputs, outputs)</a:t>
+            </a:r>
+          </a:p>
+        </p:txBody>
+      </p:sp>
+      <p:sp>
+        <p:nvSpPr>
+          <p:cNvPr id="20" name="직사각형 19">
+            <a:extLst>
+              <a:ext uri="{FF2B5EF4-FFF2-40B4-BE49-F238E27FC236}">
+                <a16:creationId xmlns:a16="http://schemas.microsoft.com/office/drawing/2014/main" id="{65B51809-29A6-42C2-650D-A873A5AD5B9D}"/>
+              </a:ext>
+            </a:extLst>
+          </p:cNvPr>
+          <p:cNvSpPr/>
+          <p:nvPr/>
+        </p:nvSpPr>
+        <p:spPr>
+          <a:xfrm>
+            <a:off x="733168" y="3429000"/>
+            <a:ext cx="8372732" cy="419100"/>
+          </a:xfrm>
+          <a:prstGeom prst="rect">
+            <a:avLst/>
+          </a:prstGeom>
+          <a:noFill/>
+          <a:ln w="28575">
+            <a:solidFill>
+              <a:srgbClr val="FF0000"/>
+            </a:solidFill>
+          </a:ln>
+        </p:spPr>
+        <p:style>
+          <a:lnRef idx="2">
+            <a:schemeClr val="accent1">
+              <a:shade val="15000"/>
+            </a:schemeClr>
+          </a:lnRef>
+          <a:fillRef idx="1">
+            <a:schemeClr val="accent1"/>
+          </a:fillRef>
+          <a:effectRef idx="0">
+            <a:schemeClr val="accent1"/>
+          </a:effectRef>
+          <a:fontRef idx="minor">
+            <a:schemeClr val="lt1"/>
+          </a:fontRef>
+        </p:style>
+        <p:txBody>
+          <a:bodyPr rtlCol="0" anchor="ctr"/>
+          <a:lstStyle/>
+          <a:p>
+            <a:pPr algn="ctr"/>
+            <a:endParaRPr lang="ko-KR" altLang="en-US" dirty="0"/>
+          </a:p>
+        </p:txBody>
+      </p:sp>
+      <p:sp>
+        <p:nvSpPr>
+          <p:cNvPr id="6" name="TextBox 5">
+            <a:extLst>
+              <a:ext uri="{FF2B5EF4-FFF2-40B4-BE49-F238E27FC236}">
+                <a16:creationId xmlns:a16="http://schemas.microsoft.com/office/drawing/2014/main" id="{3D87C2D3-0F9F-EC85-D179-2EE298157DA8}"/>
+              </a:ext>
+            </a:extLst>
+          </p:cNvPr>
+          <p:cNvSpPr txBox="1"/>
+          <p:nvPr/>
+        </p:nvSpPr>
+        <p:spPr>
+          <a:xfrm>
+            <a:off x="4310062" y="5512078"/>
+            <a:ext cx="3571875" cy="400110"/>
+          </a:xfrm>
+          <a:prstGeom prst="rect">
+            <a:avLst/>
+          </a:prstGeom>
+          <a:noFill/>
+        </p:spPr>
+        <p:txBody>
+          <a:bodyPr wrap="square">
+            <a:spAutoFit/>
+          </a:bodyPr>
+          <a:lstStyle/>
+          <a:p>
+            <a:r>
+              <a:rPr lang="ko-KR" altLang="en-US" sz="2000" dirty="0">
+                <a:latin typeface="D2Coding" panose="020B0609020101020101" pitchFamily="49" charset="-127"/>
+                <a:ea typeface="D2Coding" panose="020B0609020101020101" pitchFamily="49" charset="-127"/>
+              </a:rPr>
+              <a:t>자 이제 </a:t>
+            </a:r>
+            <a:r>
+              <a:rPr lang="en-US" altLang="ko-KR" sz="2000" dirty="0">
+                <a:latin typeface="D2Coding" panose="020B0609020101020101" pitchFamily="49" charset="-127"/>
+                <a:ea typeface="D2Coding" panose="020B0609020101020101" pitchFamily="49" charset="-127"/>
+              </a:rPr>
+              <a:t>RNN</a:t>
+            </a:r>
+            <a:r>
+              <a:rPr lang="ko-KR" altLang="en-US" sz="2000" dirty="0">
+                <a:latin typeface="D2Coding" panose="020B0609020101020101" pitchFamily="49" charset="-127"/>
+                <a:ea typeface="D2Coding" panose="020B0609020101020101" pitchFamily="49" charset="-127"/>
+              </a:rPr>
+              <a:t>을 배우자 </a:t>
+            </a:r>
+            <a:r>
+              <a:rPr lang="en-US" altLang="ko-KR" sz="2000" dirty="0">
+                <a:latin typeface="D2Coding" panose="020B0609020101020101" pitchFamily="49" charset="-127"/>
+                <a:ea typeface="D2Coding" panose="020B0609020101020101" pitchFamily="49" charset="-127"/>
+              </a:rPr>
+              <a:t>!</a:t>
+            </a:r>
+            <a:endParaRPr lang="ko-KR" altLang="en-US" sz="2000" dirty="0"/>
+          </a:p>
+        </p:txBody>
+      </p:sp>
+    </p:spTree>
+    <p:extLst>
+      <p:ext uri="{BB962C8B-B14F-4D97-AF65-F5344CB8AC3E}">
+        <p14:creationId xmlns:p14="http://schemas.microsoft.com/office/powerpoint/2010/main" val="3330126225"/>
+      </p:ext>
+    </p:extLst>
+  </p:cSld>
+  <p:clrMapOvr>
+    <a:masterClrMapping/>
+  </p:clrMapOvr>
+</p:sld>
+</file>
+
+<file path=ppt/slides/slide19.xml><?xml version="1.0" encoding="utf-8"?>
 <p:sld xmlns:a="http://schemas.openxmlformats.org/drawingml/2006/main" xmlns:r="http://schemas.openxmlformats.org/officeDocument/2006/relationships" xmlns:p="http://schemas.openxmlformats.org/presentationml/2006/main">
   <p:cSld>
     <p:spTree>
@@ -9087,7 +13128,7 @@
             <a:fld id="{D57F1E4F-1CFF-5643-939E-217C01CDF565}" type="slidenum">
               <a:rPr lang="en-US" smtClean="0"/>
               <a:pPr/>
-              <a:t>17</a:t>
+              <a:t>19</a:t>
             </a:fld>
             <a:endParaRPr lang="en-US" dirty="0"/>
           </a:p>
@@ -11219,7 +15260,375 @@
 </p:sld>
 </file>
 
-<file path=ppt/slides/slide18.xml><?xml version="1.0" encoding="utf-8"?>
+<file path=ppt/slides/slide2.xml><?xml version="1.0" encoding="utf-8"?>
+<p:sld xmlns:a="http://schemas.openxmlformats.org/drawingml/2006/main" xmlns:r="http://schemas.openxmlformats.org/officeDocument/2006/relationships" xmlns:p="http://schemas.openxmlformats.org/presentationml/2006/main">
+  <p:cSld>
+    <p:spTree>
+      <p:nvGrpSpPr>
+        <p:cNvPr id="1" name="">
+          <a:extLst>
+            <a:ext uri="{FF2B5EF4-FFF2-40B4-BE49-F238E27FC236}">
+              <a16:creationId xmlns:a16="http://schemas.microsoft.com/office/drawing/2014/main" id="{7103ECCC-4735-F731-4379-48451D093E8D}"/>
+            </a:ext>
+          </a:extLst>
+        </p:cNvPr>
+        <p:cNvGrpSpPr/>
+        <p:nvPr/>
+      </p:nvGrpSpPr>
+      <p:grpSpPr>
+        <a:xfrm>
+          <a:off x="0" y="0"/>
+          <a:ext cx="0" cy="0"/>
+          <a:chOff x="0" y="0"/>
+          <a:chExt cx="0" cy="0"/>
+        </a:xfrm>
+      </p:grpSpPr>
+      <p:sp>
+        <p:nvSpPr>
+          <p:cNvPr id="3" name="제목 1">
+            <a:extLst>
+              <a:ext uri="{FF2B5EF4-FFF2-40B4-BE49-F238E27FC236}">
+                <a16:creationId xmlns:a16="http://schemas.microsoft.com/office/drawing/2014/main" id="{30850BA0-0F12-F065-F39D-E210B0964FC7}"/>
+              </a:ext>
+            </a:extLst>
+          </p:cNvPr>
+          <p:cNvSpPr txBox="1">
+            <a:spLocks/>
+          </p:cNvSpPr>
+          <p:nvPr/>
+        </p:nvSpPr>
+        <p:spPr>
+          <a:xfrm>
+            <a:off x="475645" y="481983"/>
+            <a:ext cx="10353762" cy="766439"/>
+          </a:xfrm>
+          <a:prstGeom prst="rect">
+            <a:avLst/>
+          </a:prstGeom>
+        </p:spPr>
+        <p:txBody>
+          <a:bodyPr vert="horz" lIns="91440" tIns="45720" rIns="91440" bIns="45720" rtlCol="0" anchor="ctr">
+            <a:normAutofit/>
+          </a:bodyPr>
+          <a:lstStyle>
+            <a:lvl1pPr algn="ctr" defTabSz="914400" rtl="0" eaLnBrk="1" latinLnBrk="1" hangingPunct="1">
+              <a:lnSpc>
+                <a:spcPct val="90000"/>
+              </a:lnSpc>
+              <a:spcBef>
+                <a:spcPct val="0"/>
+              </a:spcBef>
+              <a:buNone/>
+              <a:defRPr sz="3200" kern="1200" cap="all" baseline="0">
+                <a:solidFill>
+                  <a:schemeClr val="tx1"/>
+                </a:solidFill>
+                <a:effectLst/>
+                <a:latin typeface="Batang" panose="02030600000101010101" pitchFamily="18" charset="-127"/>
+                <a:ea typeface="Batang" panose="02030600000101010101" pitchFamily="18" charset="-127"/>
+                <a:cs typeface="+mj-cs"/>
+              </a:defRPr>
+            </a:lvl1pPr>
+          </a:lstStyle>
+          <a:p>
+            <a:pPr algn="l"/>
+            <a:r>
+              <a:rPr lang="en-US" altLang="ko-KR" sz="2800" cap="none" dirty="0">
+                <a:solidFill>
+                  <a:schemeClr val="bg2">
+                    <a:lumMod val="25000"/>
+                  </a:schemeClr>
+                </a:solidFill>
+                <a:latin typeface="D2Coding" panose="020B0609020101020101" pitchFamily="49" charset="-127"/>
+                <a:ea typeface="D2Coding" panose="020B0609020101020101" pitchFamily="49" charset="-127"/>
+                <a:cs typeface="Segoe UI Light" panose="020B0502040204020203" pitchFamily="34" charset="0"/>
+              </a:rPr>
+              <a:t>Telephone Game(</a:t>
+            </a:r>
+            <a:r>
+              <a:rPr lang="ko-KR" altLang="en-US" sz="2800" cap="none" dirty="0">
+                <a:solidFill>
+                  <a:schemeClr val="bg2">
+                    <a:lumMod val="25000"/>
+                  </a:schemeClr>
+                </a:solidFill>
+                <a:latin typeface="D2Coding" panose="020B0609020101020101" pitchFamily="49" charset="-127"/>
+                <a:ea typeface="D2Coding" panose="020B0609020101020101" pitchFamily="49" charset="-127"/>
+                <a:cs typeface="Segoe UI Light" panose="020B0502040204020203" pitchFamily="34" charset="0"/>
+              </a:rPr>
+              <a:t>말 전달하기 게임</a:t>
+            </a:r>
+            <a:r>
+              <a:rPr lang="en-US" altLang="ko-KR" sz="2800" cap="none" dirty="0">
+                <a:solidFill>
+                  <a:schemeClr val="bg2">
+                    <a:lumMod val="25000"/>
+                  </a:schemeClr>
+                </a:solidFill>
+                <a:latin typeface="D2Coding" panose="020B0609020101020101" pitchFamily="49" charset="-127"/>
+                <a:ea typeface="D2Coding" panose="020B0609020101020101" pitchFamily="49" charset="-127"/>
+                <a:cs typeface="Segoe UI Light" panose="020B0502040204020203" pitchFamily="34" charset="0"/>
+              </a:rPr>
+              <a:t>)</a:t>
+            </a:r>
+            <a:endParaRPr lang="ko-KR" altLang="en-US" sz="2800" cap="none" dirty="0">
+              <a:solidFill>
+                <a:schemeClr val="bg2">
+                  <a:lumMod val="25000"/>
+                </a:schemeClr>
+              </a:solidFill>
+              <a:latin typeface="D2Coding" panose="020B0609020101020101" pitchFamily="49" charset="-127"/>
+              <a:ea typeface="D2Coding" panose="020B0609020101020101" pitchFamily="49" charset="-127"/>
+              <a:cs typeface="Segoe UI Light" panose="020B0502040204020203" pitchFamily="34" charset="0"/>
+            </a:endParaRPr>
+          </a:p>
+        </p:txBody>
+      </p:sp>
+      <p:sp>
+        <p:nvSpPr>
+          <p:cNvPr id="11" name="TextBox 10">
+            <a:extLst>
+              <a:ext uri="{FF2B5EF4-FFF2-40B4-BE49-F238E27FC236}">
+                <a16:creationId xmlns:a16="http://schemas.microsoft.com/office/drawing/2014/main" id="{DF65489D-6F2A-9B19-C55E-FAB775A3AAFD}"/>
+              </a:ext>
+            </a:extLst>
+          </p:cNvPr>
+          <p:cNvSpPr txBox="1"/>
+          <p:nvPr/>
+        </p:nvSpPr>
+        <p:spPr>
+          <a:xfrm>
+            <a:off x="1370616" y="5666929"/>
+            <a:ext cx="7407624" cy="369332"/>
+          </a:xfrm>
+          <a:prstGeom prst="rect">
+            <a:avLst/>
+          </a:prstGeom>
+          <a:noFill/>
+        </p:spPr>
+        <p:txBody>
+          <a:bodyPr wrap="square" rtlCol="0">
+            <a:spAutoFit/>
+          </a:bodyPr>
+          <a:lstStyle/>
+          <a:p>
+            <a:r>
+              <a:rPr lang="en-US" altLang="ko-KR" dirty="0">
+                <a:latin typeface="Cascadia Code" panose="020B0609020000020004" pitchFamily="49" charset="0"/>
+                <a:ea typeface="Cascadia Code" panose="020B0609020000020004" pitchFamily="49" charset="0"/>
+                <a:cs typeface="Cascadia Code" panose="020B0609020000020004" pitchFamily="49" charset="0"/>
+              </a:rPr>
+              <a:t>I	am	  your	      father</a:t>
+            </a:r>
+            <a:endParaRPr lang="ko-KR" altLang="en-US" dirty="0">
+              <a:latin typeface="Cascadia Code" panose="020B0609020000020004" pitchFamily="49" charset="0"/>
+              <a:cs typeface="Cascadia Code" panose="020B0609020000020004" pitchFamily="49" charset="0"/>
+            </a:endParaRPr>
+          </a:p>
+        </p:txBody>
+      </p:sp>
+      <p:pic>
+        <p:nvPicPr>
+          <p:cNvPr id="4104" name="Picture 8" descr="Parlour Games During the Holidays: Hapny FolvdaKs">
+            <a:extLst>
+              <a:ext uri="{FF2B5EF4-FFF2-40B4-BE49-F238E27FC236}">
+                <a16:creationId xmlns:a16="http://schemas.microsoft.com/office/drawing/2014/main" id="{2F58ED32-CC7E-7F05-8BEF-5EB9936AE4C7}"/>
+              </a:ext>
+            </a:extLst>
+          </p:cNvPr>
+          <p:cNvPicPr>
+            <a:picLocks noChangeAspect="1" noChangeArrowheads="1"/>
+          </p:cNvPicPr>
+          <p:nvPr/>
+        </p:nvPicPr>
+        <p:blipFill>
+          <a:blip r:embed="rId2">
+            <a:extLst>
+              <a:ext uri="{28A0092B-C50C-407E-A947-70E740481C1C}">
+                <a14:useLocalDpi xmlns:a14="http://schemas.microsoft.com/office/drawing/2010/main" val="0"/>
+              </a:ext>
+            </a:extLst>
+          </a:blip>
+          <a:srcRect/>
+          <a:stretch>
+            <a:fillRect/>
+          </a:stretch>
+        </p:blipFill>
+        <p:spPr bwMode="auto">
+          <a:xfrm>
+            <a:off x="3296041" y="1841058"/>
+            <a:ext cx="5403850" cy="3602567"/>
+          </a:xfrm>
+          <a:prstGeom prst="rect">
+            <a:avLst/>
+          </a:prstGeom>
+          <a:noFill/>
+          <a:extLst>
+            <a:ext uri="{909E8E84-426E-40DD-AFC4-6F175D3DCCD1}">
+              <a14:hiddenFill xmlns:a14="http://schemas.microsoft.com/office/drawing/2010/main">
+                <a:solidFill>
+                  <a:srgbClr val="FFFFFF"/>
+                </a:solidFill>
+              </a14:hiddenFill>
+            </a:ext>
+          </a:extLst>
+        </p:spPr>
+      </p:pic>
+      <p:sp>
+        <p:nvSpPr>
+          <p:cNvPr id="2" name="슬라이드 번호 개체 틀 3">
+            <a:extLst>
+              <a:ext uri="{FF2B5EF4-FFF2-40B4-BE49-F238E27FC236}">
+                <a16:creationId xmlns:a16="http://schemas.microsoft.com/office/drawing/2014/main" id="{3DD0566A-E880-8D26-CCF0-91CC50E3A5C9}"/>
+              </a:ext>
+            </a:extLst>
+          </p:cNvPr>
+          <p:cNvSpPr txBox="1">
+            <a:spLocks/>
+          </p:cNvSpPr>
+          <p:nvPr/>
+        </p:nvSpPr>
+        <p:spPr>
+          <a:xfrm>
+            <a:off x="11162487" y="299420"/>
+            <a:ext cx="753545" cy="365125"/>
+          </a:xfrm>
+          <a:prstGeom prst="rect">
+            <a:avLst/>
+          </a:prstGeom>
+        </p:spPr>
+        <p:txBody>
+          <a:bodyPr vert="horz" lIns="91440" tIns="45720" rIns="91440" bIns="45720" rtlCol="0" anchor="ctr"/>
+          <a:lstStyle>
+            <a:defPPr rtl="0">
+              <a:defRPr lang="ko-KR"/>
+            </a:defPPr>
+            <a:lvl1pPr marL="0" algn="r" defTabSz="914400" rtl="0" eaLnBrk="1" latinLnBrk="0" hangingPunct="1">
+              <a:defRPr sz="1200" kern="1200" baseline="0">
+                <a:solidFill>
+                  <a:schemeClr val="tx1">
+                    <a:lumMod val="65000"/>
+                    <a:lumOff val="35000"/>
+                  </a:schemeClr>
+                </a:solidFill>
+                <a:latin typeface="맑은 고딕" panose="020B0503020000020004" pitchFamily="50" charset="-127"/>
+                <a:ea typeface="맑은 고딕" panose="020B0503020000020004" pitchFamily="50" charset="-127"/>
+                <a:cs typeface="+mn-cs"/>
+              </a:defRPr>
+            </a:lvl1pPr>
+            <a:lvl2pPr marL="457200" algn="l" defTabSz="914400" rtl="0" eaLnBrk="1" latinLnBrk="0" hangingPunct="1">
+              <a:defRPr sz="1800" kern="1200">
+                <a:solidFill>
+                  <a:schemeClr val="tx1"/>
+                </a:solidFill>
+                <a:latin typeface="+mn-lt"/>
+                <a:ea typeface="+mn-ea"/>
+                <a:cs typeface="+mn-cs"/>
+              </a:defRPr>
+            </a:lvl2pPr>
+            <a:lvl3pPr marL="914400" algn="l" defTabSz="914400" rtl="0" eaLnBrk="1" latinLnBrk="0" hangingPunct="1">
+              <a:defRPr sz="1800" kern="1200">
+                <a:solidFill>
+                  <a:schemeClr val="tx1"/>
+                </a:solidFill>
+                <a:latin typeface="+mn-lt"/>
+                <a:ea typeface="+mn-ea"/>
+                <a:cs typeface="+mn-cs"/>
+              </a:defRPr>
+            </a:lvl3pPr>
+            <a:lvl4pPr marL="1371600" algn="l" defTabSz="914400" rtl="0" eaLnBrk="1" latinLnBrk="0" hangingPunct="1">
+              <a:defRPr sz="1800" kern="1200">
+                <a:solidFill>
+                  <a:schemeClr val="tx1"/>
+                </a:solidFill>
+                <a:latin typeface="+mn-lt"/>
+                <a:ea typeface="+mn-ea"/>
+                <a:cs typeface="+mn-cs"/>
+              </a:defRPr>
+            </a:lvl4pPr>
+            <a:lvl5pPr marL="1828800" algn="l" defTabSz="914400" rtl="0" eaLnBrk="1" latinLnBrk="0" hangingPunct="1">
+              <a:defRPr sz="1800" kern="1200">
+                <a:solidFill>
+                  <a:schemeClr val="tx1"/>
+                </a:solidFill>
+                <a:latin typeface="+mn-lt"/>
+                <a:ea typeface="+mn-ea"/>
+                <a:cs typeface="+mn-cs"/>
+              </a:defRPr>
+            </a:lvl5pPr>
+            <a:lvl6pPr marL="2286000" algn="l" defTabSz="914400" rtl="0" eaLnBrk="1" latinLnBrk="0" hangingPunct="1">
+              <a:defRPr sz="1800" kern="1200">
+                <a:solidFill>
+                  <a:schemeClr val="tx1"/>
+                </a:solidFill>
+                <a:latin typeface="+mn-lt"/>
+                <a:ea typeface="+mn-ea"/>
+                <a:cs typeface="+mn-cs"/>
+              </a:defRPr>
+            </a:lvl6pPr>
+            <a:lvl7pPr marL="2743200" algn="l" defTabSz="914400" rtl="0" eaLnBrk="1" latinLnBrk="0" hangingPunct="1">
+              <a:defRPr sz="1800" kern="1200">
+                <a:solidFill>
+                  <a:schemeClr val="tx1"/>
+                </a:solidFill>
+                <a:latin typeface="+mn-lt"/>
+                <a:ea typeface="+mn-ea"/>
+                <a:cs typeface="+mn-cs"/>
+              </a:defRPr>
+            </a:lvl7pPr>
+            <a:lvl8pPr marL="3200400" algn="l" defTabSz="914400" rtl="0" eaLnBrk="1" latinLnBrk="0" hangingPunct="1">
+              <a:defRPr sz="1800" kern="1200">
+                <a:solidFill>
+                  <a:schemeClr val="tx1"/>
+                </a:solidFill>
+                <a:latin typeface="+mn-lt"/>
+                <a:ea typeface="+mn-ea"/>
+                <a:cs typeface="+mn-cs"/>
+              </a:defRPr>
+            </a:lvl8pPr>
+            <a:lvl9pPr marL="3657600" algn="l" defTabSz="914400" rtl="0" eaLnBrk="1" latinLnBrk="0" hangingPunct="1">
+              <a:defRPr sz="1800" kern="1200">
+                <a:solidFill>
+                  <a:schemeClr val="tx1"/>
+                </a:solidFill>
+                <a:latin typeface="+mn-lt"/>
+                <a:ea typeface="+mn-ea"/>
+                <a:cs typeface="+mn-cs"/>
+              </a:defRPr>
+            </a:lvl9pPr>
+          </a:lstStyle>
+          <a:p>
+            <a:fld id="{D57F1E4F-1CFF-5643-939E-217C01CDF565}" type="slidenum">
+              <a:rPr lang="en-US" sz="1400" b="1" smtClean="0">
+                <a:latin typeface="Times New Roman" panose="02020603050405020304" pitchFamily="18" charset="0"/>
+                <a:ea typeface="Verdana" panose="020B0604030504040204" pitchFamily="34" charset="0"/>
+                <a:cs typeface="Times New Roman" panose="02020603050405020304" pitchFamily="18" charset="0"/>
+              </a:rPr>
+              <a:pPr/>
+              <a:t>2</a:t>
+            </a:fld>
+            <a:endParaRPr lang="en-US" sz="1400" b="1" dirty="0">
+              <a:latin typeface="Times New Roman" panose="02020603050405020304" pitchFamily="18" charset="0"/>
+              <a:ea typeface="Verdana" panose="020B0604030504040204" pitchFamily="34" charset="0"/>
+              <a:cs typeface="Times New Roman" panose="02020603050405020304" pitchFamily="18" charset="0"/>
+            </a:endParaRPr>
+          </a:p>
+        </p:txBody>
+      </p:sp>
+    </p:spTree>
+    <p:extLst>
+      <p:ext uri="{BB962C8B-B14F-4D97-AF65-F5344CB8AC3E}">
+        <p14:creationId xmlns:p14="http://schemas.microsoft.com/office/powerpoint/2010/main" val="3037908167"/>
+      </p:ext>
+    </p:extLst>
+  </p:cSld>
+  <p:clrMapOvr>
+    <a:masterClrMapping/>
+  </p:clrMapOvr>
+</p:sld>
+</file>
+
+<file path=ppt/slides/slide20.xml><?xml version="1.0" encoding="utf-8"?>
 <p:sld xmlns:a="http://schemas.openxmlformats.org/drawingml/2006/main" xmlns:r="http://schemas.openxmlformats.org/officeDocument/2006/relationships" xmlns:p="http://schemas.openxmlformats.org/presentationml/2006/main">
   <p:cSld>
     <p:spTree>
@@ -11271,7 +15680,7 @@
             <a:fld id="{D57F1E4F-1CFF-5643-939E-217C01CDF565}" type="slidenum">
               <a:rPr lang="en-US" smtClean="0"/>
               <a:pPr/>
-              <a:t>18</a:t>
+              <a:t>20</a:t>
             </a:fld>
             <a:endParaRPr lang="en-US" dirty="0"/>
           </a:p>
@@ -11717,7 +16126,7 @@
 </p:sld>
 </file>
 
-<file path=ppt/slides/slide19.xml><?xml version="1.0" encoding="utf-8"?>
+<file path=ppt/slides/slide21.xml><?xml version="1.0" encoding="utf-8"?>
 <p:sld xmlns:a="http://schemas.openxmlformats.org/drawingml/2006/main" xmlns:r="http://schemas.openxmlformats.org/officeDocument/2006/relationships" xmlns:p="http://schemas.openxmlformats.org/presentationml/2006/main">
   <p:cSld>
     <p:spTree>
@@ -11769,7 +16178,7 @@
             <a:fld id="{D57F1E4F-1CFF-5643-939E-217C01CDF565}" type="slidenum">
               <a:rPr lang="en-US" smtClean="0"/>
               <a:pPr/>
-              <a:t>19</a:t>
+              <a:t>21</a:t>
             </a:fld>
             <a:endParaRPr lang="en-US" dirty="0"/>
           </a:p>
@@ -12200,375 +16609,7 @@
 </p:sld>
 </file>
 
-<file path=ppt/slides/slide2.xml><?xml version="1.0" encoding="utf-8"?>
-<p:sld xmlns:a="http://schemas.openxmlformats.org/drawingml/2006/main" xmlns:r="http://schemas.openxmlformats.org/officeDocument/2006/relationships" xmlns:p="http://schemas.openxmlformats.org/presentationml/2006/main">
-  <p:cSld>
-    <p:spTree>
-      <p:nvGrpSpPr>
-        <p:cNvPr id="1" name="">
-          <a:extLst>
-            <a:ext uri="{FF2B5EF4-FFF2-40B4-BE49-F238E27FC236}">
-              <a16:creationId xmlns:a16="http://schemas.microsoft.com/office/drawing/2014/main" id="{7103ECCC-4735-F731-4379-48451D093E8D}"/>
-            </a:ext>
-          </a:extLst>
-        </p:cNvPr>
-        <p:cNvGrpSpPr/>
-        <p:nvPr/>
-      </p:nvGrpSpPr>
-      <p:grpSpPr>
-        <a:xfrm>
-          <a:off x="0" y="0"/>
-          <a:ext cx="0" cy="0"/>
-          <a:chOff x="0" y="0"/>
-          <a:chExt cx="0" cy="0"/>
-        </a:xfrm>
-      </p:grpSpPr>
-      <p:sp>
-        <p:nvSpPr>
-          <p:cNvPr id="3" name="제목 1">
-            <a:extLst>
-              <a:ext uri="{FF2B5EF4-FFF2-40B4-BE49-F238E27FC236}">
-                <a16:creationId xmlns:a16="http://schemas.microsoft.com/office/drawing/2014/main" id="{30850BA0-0F12-F065-F39D-E210B0964FC7}"/>
-              </a:ext>
-            </a:extLst>
-          </p:cNvPr>
-          <p:cNvSpPr txBox="1">
-            <a:spLocks/>
-          </p:cNvSpPr>
-          <p:nvPr/>
-        </p:nvSpPr>
-        <p:spPr>
-          <a:xfrm>
-            <a:off x="475645" y="481983"/>
-            <a:ext cx="10353762" cy="766439"/>
-          </a:xfrm>
-          <a:prstGeom prst="rect">
-            <a:avLst/>
-          </a:prstGeom>
-        </p:spPr>
-        <p:txBody>
-          <a:bodyPr vert="horz" lIns="91440" tIns="45720" rIns="91440" bIns="45720" rtlCol="0" anchor="ctr">
-            <a:normAutofit/>
-          </a:bodyPr>
-          <a:lstStyle>
-            <a:lvl1pPr algn="ctr" defTabSz="914400" rtl="0" eaLnBrk="1" latinLnBrk="1" hangingPunct="1">
-              <a:lnSpc>
-                <a:spcPct val="90000"/>
-              </a:lnSpc>
-              <a:spcBef>
-                <a:spcPct val="0"/>
-              </a:spcBef>
-              <a:buNone/>
-              <a:defRPr sz="3200" kern="1200" cap="all" baseline="0">
-                <a:solidFill>
-                  <a:schemeClr val="tx1"/>
-                </a:solidFill>
-                <a:effectLst/>
-                <a:latin typeface="Batang" panose="02030600000101010101" pitchFamily="18" charset="-127"/>
-                <a:ea typeface="Batang" panose="02030600000101010101" pitchFamily="18" charset="-127"/>
-                <a:cs typeface="+mj-cs"/>
-              </a:defRPr>
-            </a:lvl1pPr>
-          </a:lstStyle>
-          <a:p>
-            <a:pPr algn="l"/>
-            <a:r>
-              <a:rPr lang="en-US" altLang="ko-KR" sz="2800" cap="none" dirty="0">
-                <a:solidFill>
-                  <a:schemeClr val="bg2">
-                    <a:lumMod val="25000"/>
-                  </a:schemeClr>
-                </a:solidFill>
-                <a:latin typeface="D2Coding" panose="020B0609020101020101" pitchFamily="49" charset="-127"/>
-                <a:ea typeface="D2Coding" panose="020B0609020101020101" pitchFamily="49" charset="-127"/>
-                <a:cs typeface="Segoe UI Light" panose="020B0502040204020203" pitchFamily="34" charset="0"/>
-              </a:rPr>
-              <a:t>Telephone Game(</a:t>
-            </a:r>
-            <a:r>
-              <a:rPr lang="ko-KR" altLang="en-US" sz="2800" cap="none" dirty="0">
-                <a:solidFill>
-                  <a:schemeClr val="bg2">
-                    <a:lumMod val="25000"/>
-                  </a:schemeClr>
-                </a:solidFill>
-                <a:latin typeface="D2Coding" panose="020B0609020101020101" pitchFamily="49" charset="-127"/>
-                <a:ea typeface="D2Coding" panose="020B0609020101020101" pitchFamily="49" charset="-127"/>
-                <a:cs typeface="Segoe UI Light" panose="020B0502040204020203" pitchFamily="34" charset="0"/>
-              </a:rPr>
-              <a:t>말 전달하기 게임</a:t>
-            </a:r>
-            <a:r>
-              <a:rPr lang="en-US" altLang="ko-KR" sz="2800" cap="none" dirty="0">
-                <a:solidFill>
-                  <a:schemeClr val="bg2">
-                    <a:lumMod val="25000"/>
-                  </a:schemeClr>
-                </a:solidFill>
-                <a:latin typeface="D2Coding" panose="020B0609020101020101" pitchFamily="49" charset="-127"/>
-                <a:ea typeface="D2Coding" panose="020B0609020101020101" pitchFamily="49" charset="-127"/>
-                <a:cs typeface="Segoe UI Light" panose="020B0502040204020203" pitchFamily="34" charset="0"/>
-              </a:rPr>
-              <a:t>)</a:t>
-            </a:r>
-            <a:endParaRPr lang="ko-KR" altLang="en-US" sz="2800" cap="none" dirty="0">
-              <a:solidFill>
-                <a:schemeClr val="bg2">
-                  <a:lumMod val="25000"/>
-                </a:schemeClr>
-              </a:solidFill>
-              <a:latin typeface="D2Coding" panose="020B0609020101020101" pitchFamily="49" charset="-127"/>
-              <a:ea typeface="D2Coding" panose="020B0609020101020101" pitchFamily="49" charset="-127"/>
-              <a:cs typeface="Segoe UI Light" panose="020B0502040204020203" pitchFamily="34" charset="0"/>
-            </a:endParaRPr>
-          </a:p>
-        </p:txBody>
-      </p:sp>
-      <p:sp>
-        <p:nvSpPr>
-          <p:cNvPr id="11" name="TextBox 10">
-            <a:extLst>
-              <a:ext uri="{FF2B5EF4-FFF2-40B4-BE49-F238E27FC236}">
-                <a16:creationId xmlns:a16="http://schemas.microsoft.com/office/drawing/2014/main" id="{DF65489D-6F2A-9B19-C55E-FAB775A3AAFD}"/>
-              </a:ext>
-            </a:extLst>
-          </p:cNvPr>
-          <p:cNvSpPr txBox="1"/>
-          <p:nvPr/>
-        </p:nvSpPr>
-        <p:spPr>
-          <a:xfrm>
-            <a:off x="1370616" y="5666929"/>
-            <a:ext cx="7407624" cy="369332"/>
-          </a:xfrm>
-          <a:prstGeom prst="rect">
-            <a:avLst/>
-          </a:prstGeom>
-          <a:noFill/>
-        </p:spPr>
-        <p:txBody>
-          <a:bodyPr wrap="square" rtlCol="0">
-            <a:spAutoFit/>
-          </a:bodyPr>
-          <a:lstStyle/>
-          <a:p>
-            <a:r>
-              <a:rPr lang="en-US" altLang="ko-KR" dirty="0">
-                <a:latin typeface="Cascadia Code" panose="020B0609020000020004" pitchFamily="49" charset="0"/>
-                <a:ea typeface="Cascadia Code" panose="020B0609020000020004" pitchFamily="49" charset="0"/>
-                <a:cs typeface="Cascadia Code" panose="020B0609020000020004" pitchFamily="49" charset="0"/>
-              </a:rPr>
-              <a:t>I	am	  your	      father</a:t>
-            </a:r>
-            <a:endParaRPr lang="ko-KR" altLang="en-US" dirty="0">
-              <a:latin typeface="Cascadia Code" panose="020B0609020000020004" pitchFamily="49" charset="0"/>
-              <a:cs typeface="Cascadia Code" panose="020B0609020000020004" pitchFamily="49" charset="0"/>
-            </a:endParaRPr>
-          </a:p>
-        </p:txBody>
-      </p:sp>
-      <p:pic>
-        <p:nvPicPr>
-          <p:cNvPr id="4104" name="Picture 8" descr="Parlour Games During the Holidays: Hapny FolvdaKs">
-            <a:extLst>
-              <a:ext uri="{FF2B5EF4-FFF2-40B4-BE49-F238E27FC236}">
-                <a16:creationId xmlns:a16="http://schemas.microsoft.com/office/drawing/2014/main" id="{2F58ED32-CC7E-7F05-8BEF-5EB9936AE4C7}"/>
-              </a:ext>
-            </a:extLst>
-          </p:cNvPr>
-          <p:cNvPicPr>
-            <a:picLocks noChangeAspect="1" noChangeArrowheads="1"/>
-          </p:cNvPicPr>
-          <p:nvPr/>
-        </p:nvPicPr>
-        <p:blipFill>
-          <a:blip r:embed="rId2">
-            <a:extLst>
-              <a:ext uri="{28A0092B-C50C-407E-A947-70E740481C1C}">
-                <a14:useLocalDpi xmlns:a14="http://schemas.microsoft.com/office/drawing/2010/main" val="0"/>
-              </a:ext>
-            </a:extLst>
-          </a:blip>
-          <a:srcRect/>
-          <a:stretch>
-            <a:fillRect/>
-          </a:stretch>
-        </p:blipFill>
-        <p:spPr bwMode="auto">
-          <a:xfrm>
-            <a:off x="3296041" y="1841058"/>
-            <a:ext cx="5403850" cy="3602567"/>
-          </a:xfrm>
-          <a:prstGeom prst="rect">
-            <a:avLst/>
-          </a:prstGeom>
-          <a:noFill/>
-          <a:extLst>
-            <a:ext uri="{909E8E84-426E-40DD-AFC4-6F175D3DCCD1}">
-              <a14:hiddenFill xmlns:a14="http://schemas.microsoft.com/office/drawing/2010/main">
-                <a:solidFill>
-                  <a:srgbClr val="FFFFFF"/>
-                </a:solidFill>
-              </a14:hiddenFill>
-            </a:ext>
-          </a:extLst>
-        </p:spPr>
-      </p:pic>
-      <p:sp>
-        <p:nvSpPr>
-          <p:cNvPr id="2" name="슬라이드 번호 개체 틀 3">
-            <a:extLst>
-              <a:ext uri="{FF2B5EF4-FFF2-40B4-BE49-F238E27FC236}">
-                <a16:creationId xmlns:a16="http://schemas.microsoft.com/office/drawing/2014/main" id="{3DD0566A-E880-8D26-CCF0-91CC50E3A5C9}"/>
-              </a:ext>
-            </a:extLst>
-          </p:cNvPr>
-          <p:cNvSpPr txBox="1">
-            <a:spLocks/>
-          </p:cNvSpPr>
-          <p:nvPr/>
-        </p:nvSpPr>
-        <p:spPr>
-          <a:xfrm>
-            <a:off x="11162487" y="299420"/>
-            <a:ext cx="753545" cy="365125"/>
-          </a:xfrm>
-          <a:prstGeom prst="rect">
-            <a:avLst/>
-          </a:prstGeom>
-        </p:spPr>
-        <p:txBody>
-          <a:bodyPr vert="horz" lIns="91440" tIns="45720" rIns="91440" bIns="45720" rtlCol="0" anchor="ctr"/>
-          <a:lstStyle>
-            <a:defPPr rtl="0">
-              <a:defRPr lang="ko-KR"/>
-            </a:defPPr>
-            <a:lvl1pPr marL="0" algn="r" defTabSz="914400" rtl="0" eaLnBrk="1" latinLnBrk="0" hangingPunct="1">
-              <a:defRPr sz="1200" kern="1200" baseline="0">
-                <a:solidFill>
-                  <a:schemeClr val="tx1">
-                    <a:lumMod val="65000"/>
-                    <a:lumOff val="35000"/>
-                  </a:schemeClr>
-                </a:solidFill>
-                <a:latin typeface="맑은 고딕" panose="020B0503020000020004" pitchFamily="50" charset="-127"/>
-                <a:ea typeface="맑은 고딕" panose="020B0503020000020004" pitchFamily="50" charset="-127"/>
-                <a:cs typeface="+mn-cs"/>
-              </a:defRPr>
-            </a:lvl1pPr>
-            <a:lvl2pPr marL="457200" algn="l" defTabSz="914400" rtl="0" eaLnBrk="1" latinLnBrk="0" hangingPunct="1">
-              <a:defRPr sz="1800" kern="1200">
-                <a:solidFill>
-                  <a:schemeClr val="tx1"/>
-                </a:solidFill>
-                <a:latin typeface="+mn-lt"/>
-                <a:ea typeface="+mn-ea"/>
-                <a:cs typeface="+mn-cs"/>
-              </a:defRPr>
-            </a:lvl2pPr>
-            <a:lvl3pPr marL="914400" algn="l" defTabSz="914400" rtl="0" eaLnBrk="1" latinLnBrk="0" hangingPunct="1">
-              <a:defRPr sz="1800" kern="1200">
-                <a:solidFill>
-                  <a:schemeClr val="tx1"/>
-                </a:solidFill>
-                <a:latin typeface="+mn-lt"/>
-                <a:ea typeface="+mn-ea"/>
-                <a:cs typeface="+mn-cs"/>
-              </a:defRPr>
-            </a:lvl3pPr>
-            <a:lvl4pPr marL="1371600" algn="l" defTabSz="914400" rtl="0" eaLnBrk="1" latinLnBrk="0" hangingPunct="1">
-              <a:defRPr sz="1800" kern="1200">
-                <a:solidFill>
-                  <a:schemeClr val="tx1"/>
-                </a:solidFill>
-                <a:latin typeface="+mn-lt"/>
-                <a:ea typeface="+mn-ea"/>
-                <a:cs typeface="+mn-cs"/>
-              </a:defRPr>
-            </a:lvl4pPr>
-            <a:lvl5pPr marL="1828800" algn="l" defTabSz="914400" rtl="0" eaLnBrk="1" latinLnBrk="0" hangingPunct="1">
-              <a:defRPr sz="1800" kern="1200">
-                <a:solidFill>
-                  <a:schemeClr val="tx1"/>
-                </a:solidFill>
-                <a:latin typeface="+mn-lt"/>
-                <a:ea typeface="+mn-ea"/>
-                <a:cs typeface="+mn-cs"/>
-              </a:defRPr>
-            </a:lvl5pPr>
-            <a:lvl6pPr marL="2286000" algn="l" defTabSz="914400" rtl="0" eaLnBrk="1" latinLnBrk="0" hangingPunct="1">
-              <a:defRPr sz="1800" kern="1200">
-                <a:solidFill>
-                  <a:schemeClr val="tx1"/>
-                </a:solidFill>
-                <a:latin typeface="+mn-lt"/>
-                <a:ea typeface="+mn-ea"/>
-                <a:cs typeface="+mn-cs"/>
-              </a:defRPr>
-            </a:lvl6pPr>
-            <a:lvl7pPr marL="2743200" algn="l" defTabSz="914400" rtl="0" eaLnBrk="1" latinLnBrk="0" hangingPunct="1">
-              <a:defRPr sz="1800" kern="1200">
-                <a:solidFill>
-                  <a:schemeClr val="tx1"/>
-                </a:solidFill>
-                <a:latin typeface="+mn-lt"/>
-                <a:ea typeface="+mn-ea"/>
-                <a:cs typeface="+mn-cs"/>
-              </a:defRPr>
-            </a:lvl7pPr>
-            <a:lvl8pPr marL="3200400" algn="l" defTabSz="914400" rtl="0" eaLnBrk="1" latinLnBrk="0" hangingPunct="1">
-              <a:defRPr sz="1800" kern="1200">
-                <a:solidFill>
-                  <a:schemeClr val="tx1"/>
-                </a:solidFill>
-                <a:latin typeface="+mn-lt"/>
-                <a:ea typeface="+mn-ea"/>
-                <a:cs typeface="+mn-cs"/>
-              </a:defRPr>
-            </a:lvl8pPr>
-            <a:lvl9pPr marL="3657600" algn="l" defTabSz="914400" rtl="0" eaLnBrk="1" latinLnBrk="0" hangingPunct="1">
-              <a:defRPr sz="1800" kern="1200">
-                <a:solidFill>
-                  <a:schemeClr val="tx1"/>
-                </a:solidFill>
-                <a:latin typeface="+mn-lt"/>
-                <a:ea typeface="+mn-ea"/>
-                <a:cs typeface="+mn-cs"/>
-              </a:defRPr>
-            </a:lvl9pPr>
-          </a:lstStyle>
-          <a:p>
-            <a:fld id="{D57F1E4F-1CFF-5643-939E-217C01CDF565}" type="slidenum">
-              <a:rPr lang="en-US" sz="1400" b="1" smtClean="0">
-                <a:latin typeface="Times New Roman" panose="02020603050405020304" pitchFamily="18" charset="0"/>
-                <a:ea typeface="Verdana" panose="020B0604030504040204" pitchFamily="34" charset="0"/>
-                <a:cs typeface="Times New Roman" panose="02020603050405020304" pitchFamily="18" charset="0"/>
-              </a:rPr>
-              <a:pPr/>
-              <a:t>2</a:t>
-            </a:fld>
-            <a:endParaRPr lang="en-US" sz="1400" b="1" dirty="0">
-              <a:latin typeface="Times New Roman" panose="02020603050405020304" pitchFamily="18" charset="0"/>
-              <a:ea typeface="Verdana" panose="020B0604030504040204" pitchFamily="34" charset="0"/>
-              <a:cs typeface="Times New Roman" panose="02020603050405020304" pitchFamily="18" charset="0"/>
-            </a:endParaRPr>
-          </a:p>
-        </p:txBody>
-      </p:sp>
-    </p:spTree>
-    <p:extLst>
-      <p:ext uri="{BB962C8B-B14F-4D97-AF65-F5344CB8AC3E}">
-        <p14:creationId xmlns:p14="http://schemas.microsoft.com/office/powerpoint/2010/main" val="3037908167"/>
-      </p:ext>
-    </p:extLst>
-  </p:cSld>
-  <p:clrMapOvr>
-    <a:masterClrMapping/>
-  </p:clrMapOvr>
-</p:sld>
-</file>
-
-<file path=ppt/slides/slide20.xml><?xml version="1.0" encoding="utf-8"?>
+<file path=ppt/slides/slide22.xml><?xml version="1.0" encoding="utf-8"?>
 <p:sld xmlns:a="http://schemas.openxmlformats.org/drawingml/2006/main" xmlns:r="http://schemas.openxmlformats.org/officeDocument/2006/relationships" xmlns:p="http://schemas.openxmlformats.org/presentationml/2006/main">
   <p:cSld>
     <p:spTree>
@@ -12620,7 +16661,7 @@
             <a:fld id="{D57F1E4F-1CFF-5643-939E-217C01CDF565}" type="slidenum">
               <a:rPr lang="en-US" smtClean="0"/>
               <a:pPr/>
-              <a:t>20</a:t>
+              <a:t>22</a:t>
             </a:fld>
             <a:endParaRPr lang="en-US" dirty="0"/>
           </a:p>
@@ -13422,7 +17463,7 @@
 </p:sld>
 </file>
 
-<file path=ppt/slides/slide21.xml><?xml version="1.0" encoding="utf-8"?>
+<file path=ppt/slides/slide23.xml><?xml version="1.0" encoding="utf-8"?>
 <p:sld xmlns:a="http://schemas.openxmlformats.org/drawingml/2006/main" xmlns:r="http://schemas.openxmlformats.org/officeDocument/2006/relationships" xmlns:p="http://schemas.openxmlformats.org/presentationml/2006/main">
   <p:cSld>
     <p:spTree>
@@ -13474,7 +17515,7 @@
             <a:fld id="{D57F1E4F-1CFF-5643-939E-217C01CDF565}" type="slidenum">
               <a:rPr lang="en-US" smtClean="0"/>
               <a:pPr/>
-              <a:t>21</a:t>
+              <a:t>23</a:t>
             </a:fld>
             <a:endParaRPr lang="en-US" dirty="0"/>
           </a:p>
@@ -16228,7 +20269,7 @@
 </p:sld>
 </file>
 
-<file path=ppt/slides/slide22.xml><?xml version="1.0" encoding="utf-8"?>
+<file path=ppt/slides/slide24.xml><?xml version="1.0" encoding="utf-8"?>
 <p:sld xmlns:a="http://schemas.openxmlformats.org/drawingml/2006/main" xmlns:r="http://schemas.openxmlformats.org/officeDocument/2006/relationships" xmlns:p="http://schemas.openxmlformats.org/presentationml/2006/main">
   <p:cSld>
     <p:spTree>
@@ -16280,7 +20321,7 @@
             <a:fld id="{D57F1E4F-1CFF-5643-939E-217C01CDF565}" type="slidenum">
               <a:rPr lang="en-US" smtClean="0"/>
               <a:pPr/>
-              <a:t>22</a:t>
+              <a:t>24</a:t>
             </a:fld>
             <a:endParaRPr lang="en-US" dirty="0"/>
           </a:p>
@@ -21875,7 +25916,7 @@
 </p:sld>
 </file>
 
-<file path=ppt/slides/slide23.xml><?xml version="1.0" encoding="utf-8"?>
+<file path=ppt/slides/slide25.xml><?xml version="1.0" encoding="utf-8"?>
 <p:sld xmlns:a="http://schemas.openxmlformats.org/drawingml/2006/main" xmlns:r="http://schemas.openxmlformats.org/officeDocument/2006/relationships" xmlns:p="http://schemas.openxmlformats.org/presentationml/2006/main">
   <p:cSld>
     <p:spTree>
@@ -21927,7 +25968,7 @@
             <a:fld id="{D57F1E4F-1CFF-5643-939E-217C01CDF565}" type="slidenum">
               <a:rPr lang="en-US" smtClean="0"/>
               <a:pPr/>
-              <a:t>23</a:t>
+              <a:t>25</a:t>
             </a:fld>
             <a:endParaRPr lang="en-US" dirty="0"/>
           </a:p>
@@ -22317,7 +26358,7 @@
 </p:sld>
 </file>
 
-<file path=ppt/slides/slide24.xml><?xml version="1.0" encoding="utf-8"?>
+<file path=ppt/slides/slide26.xml><?xml version="1.0" encoding="utf-8"?>
 <p:sld xmlns:a="http://schemas.openxmlformats.org/drawingml/2006/main" xmlns:r="http://schemas.openxmlformats.org/officeDocument/2006/relationships" xmlns:p="http://schemas.openxmlformats.org/presentationml/2006/main">
   <p:cSld>
     <p:spTree>
@@ -22369,7 +26410,7 @@
             <a:fld id="{D57F1E4F-1CFF-5643-939E-217C01CDF565}" type="slidenum">
               <a:rPr lang="en-US" smtClean="0"/>
               <a:pPr/>
-              <a:t>24</a:t>
+              <a:t>26</a:t>
             </a:fld>
             <a:endParaRPr lang="en-US" dirty="0"/>
           </a:p>
@@ -23604,7 +27645,7 @@
 </p:sld>
 </file>
 
-<file path=ppt/slides/slide25.xml><?xml version="1.0" encoding="utf-8"?>
+<file path=ppt/slides/slide27.xml><?xml version="1.0" encoding="utf-8"?>
 <p:sld xmlns:a="http://schemas.openxmlformats.org/drawingml/2006/main" xmlns:r="http://schemas.openxmlformats.org/officeDocument/2006/relationships" xmlns:p="http://schemas.openxmlformats.org/presentationml/2006/main">
   <p:cSld>
     <p:spTree>
@@ -23656,7 +27697,7 @@
             <a:fld id="{D57F1E4F-1CFF-5643-939E-217C01CDF565}" type="slidenum">
               <a:rPr lang="en-US" smtClean="0"/>
               <a:pPr/>
-              <a:t>25</a:t>
+              <a:t>27</a:t>
             </a:fld>
             <a:endParaRPr lang="en-US" dirty="0"/>
           </a:p>
@@ -25148,7 +29189,7 @@
 </p:sld>
 </file>
 
-<file path=ppt/slides/slide26.xml><?xml version="1.0" encoding="utf-8"?>
+<file path=ppt/slides/slide28.xml><?xml version="1.0" encoding="utf-8"?>
 <p:sld xmlns:a="http://schemas.openxmlformats.org/drawingml/2006/main" xmlns:r="http://schemas.openxmlformats.org/officeDocument/2006/relationships" xmlns:p="http://schemas.openxmlformats.org/presentationml/2006/main">
   <p:cSld>
     <p:spTree>
@@ -25200,7 +29241,7 @@
             <a:fld id="{D57F1E4F-1CFF-5643-939E-217C01CDF565}" type="slidenum">
               <a:rPr lang="en-US" smtClean="0"/>
               <a:pPr/>
-              <a:t>26</a:t>
+              <a:t>28</a:t>
             </a:fld>
             <a:endParaRPr lang="en-US" dirty="0"/>
           </a:p>
@@ -26367,7 +30408,7 @@
 </p:sld>
 </file>
 
-<file path=ppt/slides/slide27.xml><?xml version="1.0" encoding="utf-8"?>
+<file path=ppt/slides/slide29.xml><?xml version="1.0" encoding="utf-8"?>
 <p:sld xmlns:a="http://schemas.openxmlformats.org/drawingml/2006/main" xmlns:r="http://schemas.openxmlformats.org/officeDocument/2006/relationships" xmlns:p="http://schemas.openxmlformats.org/presentationml/2006/main">
   <p:cSld>
     <p:spTree>
@@ -26419,7 +30460,7 @@
             <a:fld id="{D57F1E4F-1CFF-5643-939E-217C01CDF565}" type="slidenum">
               <a:rPr lang="en-US" smtClean="0"/>
               <a:pPr/>
-              <a:t>27</a:t>
+              <a:t>29</a:t>
             </a:fld>
             <a:endParaRPr lang="en-US" dirty="0"/>
           </a:p>
@@ -27085,649 +31126,6 @@
     <p:extLst>
       <p:ext uri="{BB962C8B-B14F-4D97-AF65-F5344CB8AC3E}">
         <p14:creationId xmlns:p14="http://schemas.microsoft.com/office/powerpoint/2010/main" val="2623032117"/>
-      </p:ext>
-    </p:extLst>
-  </p:cSld>
-  <p:clrMapOvr>
-    <a:masterClrMapping/>
-  </p:clrMapOvr>
-</p:sld>
-</file>
-
-<file path=ppt/slides/slide28.xml><?xml version="1.0" encoding="utf-8"?>
-<p:sld xmlns:a="http://schemas.openxmlformats.org/drawingml/2006/main" xmlns:r="http://schemas.openxmlformats.org/officeDocument/2006/relationships" xmlns:p="http://schemas.openxmlformats.org/presentationml/2006/main">
-  <p:cSld>
-    <p:spTree>
-      <p:nvGrpSpPr>
-        <p:cNvPr id="1" name="">
-          <a:extLst>
-            <a:ext uri="{FF2B5EF4-FFF2-40B4-BE49-F238E27FC236}">
-              <a16:creationId xmlns:a16="http://schemas.microsoft.com/office/drawing/2014/main" id="{3E9EBB6F-5205-2B6B-B72B-D2729860EAA7}"/>
-            </a:ext>
-          </a:extLst>
-        </p:cNvPr>
-        <p:cNvGrpSpPr/>
-        <p:nvPr/>
-      </p:nvGrpSpPr>
-      <p:grpSpPr>
-        <a:xfrm>
-          <a:off x="0" y="0"/>
-          <a:ext cx="0" cy="0"/>
-          <a:chOff x="0" y="0"/>
-          <a:chExt cx="0" cy="0"/>
-        </a:xfrm>
-      </p:grpSpPr>
-      <p:sp>
-        <p:nvSpPr>
-          <p:cNvPr id="4" name="슬라이드 번호 개체 틀 3">
-            <a:extLst>
-              <a:ext uri="{FF2B5EF4-FFF2-40B4-BE49-F238E27FC236}">
-                <a16:creationId xmlns:a16="http://schemas.microsoft.com/office/drawing/2014/main" id="{2E9DA771-6870-123A-1128-9F853C7FC970}"/>
-              </a:ext>
-            </a:extLst>
-          </p:cNvPr>
-          <p:cNvSpPr>
-            <a:spLocks noGrp="1"/>
-          </p:cNvSpPr>
-          <p:nvPr>
-            <p:ph type="sldNum" sz="quarter" idx="12"/>
-          </p:nvPr>
-        </p:nvSpPr>
-        <p:spPr>
-          <a:xfrm>
-            <a:off x="10514011" y="6036261"/>
-            <a:ext cx="753545" cy="365125"/>
-          </a:xfrm>
-        </p:spPr>
-        <p:txBody>
-          <a:bodyPr/>
-          <a:lstStyle/>
-          <a:p>
-            <a:fld id="{D57F1E4F-1CFF-5643-939E-217C01CDF565}" type="slidenum">
-              <a:rPr lang="en-US" smtClean="0"/>
-              <a:pPr/>
-              <a:t>28</a:t>
-            </a:fld>
-            <a:endParaRPr lang="en-US" dirty="0"/>
-          </a:p>
-        </p:txBody>
-      </p:sp>
-      <p:sp>
-        <p:nvSpPr>
-          <p:cNvPr id="3" name="제목 1">
-            <a:extLst>
-              <a:ext uri="{FF2B5EF4-FFF2-40B4-BE49-F238E27FC236}">
-                <a16:creationId xmlns:a16="http://schemas.microsoft.com/office/drawing/2014/main" id="{28B72CFF-95F2-13FD-1562-1F1A7BC98859}"/>
-              </a:ext>
-            </a:extLst>
-          </p:cNvPr>
-          <p:cNvSpPr txBox="1">
-            <a:spLocks/>
-          </p:cNvSpPr>
-          <p:nvPr/>
-        </p:nvSpPr>
-        <p:spPr>
-          <a:xfrm>
-            <a:off x="475645" y="481983"/>
-            <a:ext cx="10353762" cy="766439"/>
-          </a:xfrm>
-          <a:prstGeom prst="rect">
-            <a:avLst/>
-          </a:prstGeom>
-        </p:spPr>
-        <p:txBody>
-          <a:bodyPr vert="horz" lIns="91440" tIns="45720" rIns="91440" bIns="45720" rtlCol="0" anchor="ctr">
-            <a:normAutofit/>
-          </a:bodyPr>
-          <a:lstStyle>
-            <a:lvl1pPr algn="ctr" defTabSz="914400" rtl="0" eaLnBrk="1" latinLnBrk="1" hangingPunct="1">
-              <a:lnSpc>
-                <a:spcPct val="90000"/>
-              </a:lnSpc>
-              <a:spcBef>
-                <a:spcPct val="0"/>
-              </a:spcBef>
-              <a:buNone/>
-              <a:defRPr sz="3200" kern="1200" cap="all" baseline="0">
-                <a:solidFill>
-                  <a:schemeClr val="tx1"/>
-                </a:solidFill>
-                <a:effectLst/>
-                <a:latin typeface="Batang" panose="02030600000101010101" pitchFamily="18" charset="-127"/>
-                <a:ea typeface="Batang" panose="02030600000101010101" pitchFamily="18" charset="-127"/>
-                <a:cs typeface="+mj-cs"/>
-              </a:defRPr>
-            </a:lvl1pPr>
-          </a:lstStyle>
-          <a:p>
-            <a:pPr algn="l"/>
-            <a:r>
-              <a:rPr lang="en-US" altLang="ko-KR" sz="2800" cap="none" dirty="0">
-                <a:solidFill>
-                  <a:schemeClr val="bg2">
-                    <a:lumMod val="25000"/>
-                  </a:schemeClr>
-                </a:solidFill>
-                <a:latin typeface="D2Coding" panose="020B0609020101020101" pitchFamily="49" charset="-127"/>
-                <a:ea typeface="D2Coding" panose="020B0609020101020101" pitchFamily="49" charset="-127"/>
-                <a:cs typeface="Segoe UI Light" panose="020B0502040204020203" pitchFamily="34" charset="0"/>
-              </a:rPr>
-              <a:t>Deep</a:t>
-            </a:r>
-            <a:r>
-              <a:rPr lang="ko-KR" altLang="en-US" sz="2800" cap="none" dirty="0">
-                <a:solidFill>
-                  <a:schemeClr val="bg2">
-                    <a:lumMod val="25000"/>
-                  </a:schemeClr>
-                </a:solidFill>
-                <a:latin typeface="D2Coding" panose="020B0609020101020101" pitchFamily="49" charset="-127"/>
-                <a:ea typeface="D2Coding" panose="020B0609020101020101" pitchFamily="49" charset="-127"/>
-                <a:cs typeface="Segoe UI Light" panose="020B0502040204020203" pitchFamily="34" charset="0"/>
-              </a:rPr>
-              <a:t> </a:t>
-            </a:r>
-            <a:r>
-              <a:rPr lang="en-US" altLang="ko-KR" sz="2800" cap="none" dirty="0">
-                <a:solidFill>
-                  <a:schemeClr val="bg2">
-                    <a:lumMod val="25000"/>
-                  </a:schemeClr>
-                </a:solidFill>
-                <a:latin typeface="D2Coding" panose="020B0609020101020101" pitchFamily="49" charset="-127"/>
-                <a:ea typeface="D2Coding" panose="020B0609020101020101" pitchFamily="49" charset="-127"/>
-                <a:cs typeface="Segoe UI Light" panose="020B0502040204020203" pitchFamily="34" charset="0"/>
-              </a:rPr>
-              <a:t>Recurrent Neural Network (RNN)</a:t>
-            </a:r>
-            <a:endParaRPr lang="ko-KR" altLang="en-US" sz="2800" cap="none" dirty="0">
-              <a:solidFill>
-                <a:schemeClr val="bg2">
-                  <a:lumMod val="25000"/>
-                </a:schemeClr>
-              </a:solidFill>
-              <a:latin typeface="D2Coding" panose="020B0609020101020101" pitchFamily="49" charset="-127"/>
-              <a:ea typeface="D2Coding" panose="020B0609020101020101" pitchFamily="49" charset="-127"/>
-              <a:cs typeface="Segoe UI Light" panose="020B0502040204020203" pitchFamily="34" charset="0"/>
-            </a:endParaRPr>
-          </a:p>
-        </p:txBody>
-      </p:sp>
-      <p:pic>
-        <p:nvPicPr>
-          <p:cNvPr id="5" name="그림 4">
-            <a:extLst>
-              <a:ext uri="{FF2B5EF4-FFF2-40B4-BE49-F238E27FC236}">
-                <a16:creationId xmlns:a16="http://schemas.microsoft.com/office/drawing/2014/main" id="{FB46B54B-58F6-E08B-924D-D269DB922BB6}"/>
-              </a:ext>
-            </a:extLst>
-          </p:cNvPr>
-          <p:cNvPicPr>
-            <a:picLocks noChangeAspect="1"/>
-          </p:cNvPicPr>
-          <p:nvPr/>
-        </p:nvPicPr>
-        <p:blipFill>
-          <a:blip r:embed="rId2"/>
-          <a:stretch>
-            <a:fillRect/>
-          </a:stretch>
-        </p:blipFill>
-        <p:spPr>
-          <a:xfrm>
-            <a:off x="658459" y="1446542"/>
-            <a:ext cx="4922947" cy="2834886"/>
-          </a:xfrm>
-          <a:prstGeom prst="rect">
-            <a:avLst/>
-          </a:prstGeom>
-        </p:spPr>
-      </p:pic>
-      <p:sp>
-        <p:nvSpPr>
-          <p:cNvPr id="7" name="TextBox 6">
-            <a:extLst>
-              <a:ext uri="{FF2B5EF4-FFF2-40B4-BE49-F238E27FC236}">
-                <a16:creationId xmlns:a16="http://schemas.microsoft.com/office/drawing/2014/main" id="{22D46B0D-9D00-4C42-8ED7-31125215AF15}"/>
-              </a:ext>
-            </a:extLst>
-          </p:cNvPr>
-          <p:cNvSpPr txBox="1"/>
-          <p:nvPr/>
-        </p:nvSpPr>
-        <p:spPr>
-          <a:xfrm>
-            <a:off x="658459" y="4419262"/>
-            <a:ext cx="7711440" cy="1901161"/>
-          </a:xfrm>
-          <a:prstGeom prst="rect">
-            <a:avLst/>
-          </a:prstGeom>
-          <a:solidFill>
-            <a:srgbClr val="76E3FF"/>
-          </a:solidFill>
-        </p:spPr>
-        <p:txBody>
-          <a:bodyPr wrap="square">
-            <a:spAutoFit/>
-          </a:bodyPr>
-          <a:lstStyle/>
-          <a:p>
-            <a:pPr>
-              <a:lnSpc>
-                <a:spcPct val="150000"/>
-              </a:lnSpc>
-            </a:pPr>
-            <a:r>
-              <a:rPr lang="en-US" altLang="ko-KR" sz="1600" dirty="0">
-                <a:latin typeface="D2Coding" panose="020B0609020101020101" pitchFamily="49" charset="-127"/>
-                <a:ea typeface="D2Coding" panose="020B0609020101020101" pitchFamily="49" charset="-127"/>
-              </a:rPr>
-              <a:t>model = </a:t>
-            </a:r>
-            <a:r>
-              <a:rPr lang="en-US" altLang="ko-KR" sz="1600" dirty="0" err="1">
-                <a:latin typeface="D2Coding" panose="020B0609020101020101" pitchFamily="49" charset="-127"/>
-                <a:ea typeface="D2Coding" panose="020B0609020101020101" pitchFamily="49" charset="-127"/>
-              </a:rPr>
-              <a:t>keras.models.Sequential</a:t>
-            </a:r>
-            <a:r>
-              <a:rPr lang="en-US" altLang="ko-KR" sz="1600" dirty="0">
-                <a:latin typeface="D2Coding" panose="020B0609020101020101" pitchFamily="49" charset="-127"/>
-                <a:ea typeface="D2Coding" panose="020B0609020101020101" pitchFamily="49" charset="-127"/>
-              </a:rPr>
-              <a:t>([</a:t>
-            </a:r>
-          </a:p>
-          <a:p>
-            <a:pPr>
-              <a:lnSpc>
-                <a:spcPct val="150000"/>
-              </a:lnSpc>
-            </a:pPr>
-            <a:r>
-              <a:rPr lang="en-US" altLang="ko-KR" sz="1600" dirty="0" err="1">
-                <a:latin typeface="D2Coding" panose="020B0609020101020101" pitchFamily="49" charset="-127"/>
-                <a:ea typeface="D2Coding" panose="020B0609020101020101" pitchFamily="49" charset="-127"/>
-              </a:rPr>
-              <a:t>keras.layers.SimpleRNN</a:t>
-            </a:r>
-            <a:r>
-              <a:rPr lang="en-US" altLang="ko-KR" sz="1600" dirty="0">
-                <a:latin typeface="D2Coding" panose="020B0609020101020101" pitchFamily="49" charset="-127"/>
-                <a:ea typeface="D2Coding" panose="020B0609020101020101" pitchFamily="49" charset="-127"/>
-              </a:rPr>
-              <a:t>(20, </a:t>
-            </a:r>
-            <a:r>
-              <a:rPr lang="en-US" altLang="ko-KR" sz="1600" dirty="0" err="1">
-                <a:latin typeface="D2Coding" panose="020B0609020101020101" pitchFamily="49" charset="-127"/>
-                <a:ea typeface="D2Coding" panose="020B0609020101020101" pitchFamily="49" charset="-127"/>
-              </a:rPr>
-              <a:t>return_sequences</a:t>
-            </a:r>
-            <a:r>
-              <a:rPr lang="en-US" altLang="ko-KR" sz="1600" dirty="0">
-                <a:latin typeface="D2Coding" panose="020B0609020101020101" pitchFamily="49" charset="-127"/>
-                <a:ea typeface="D2Coding" panose="020B0609020101020101" pitchFamily="49" charset="-127"/>
-              </a:rPr>
-              <a:t>=True, </a:t>
-            </a:r>
-            <a:r>
-              <a:rPr lang="en-US" altLang="ko-KR" sz="1600" dirty="0" err="1">
-                <a:latin typeface="D2Coding" panose="020B0609020101020101" pitchFamily="49" charset="-127"/>
-                <a:ea typeface="D2Coding" panose="020B0609020101020101" pitchFamily="49" charset="-127"/>
-              </a:rPr>
-              <a:t>input_shape</a:t>
-            </a:r>
-            <a:r>
-              <a:rPr lang="en-US" altLang="ko-KR" sz="1600" dirty="0">
-                <a:latin typeface="D2Coding" panose="020B0609020101020101" pitchFamily="49" charset="-127"/>
-                <a:ea typeface="D2Coding" panose="020B0609020101020101" pitchFamily="49" charset="-127"/>
-              </a:rPr>
-              <a:t>=[None, 1]),</a:t>
-            </a:r>
-          </a:p>
-          <a:p>
-            <a:pPr>
-              <a:lnSpc>
-                <a:spcPct val="150000"/>
-              </a:lnSpc>
-            </a:pPr>
-            <a:r>
-              <a:rPr lang="en-US" altLang="ko-KR" sz="1600" dirty="0" err="1">
-                <a:latin typeface="D2Coding" panose="020B0609020101020101" pitchFamily="49" charset="-127"/>
-                <a:ea typeface="D2Coding" panose="020B0609020101020101" pitchFamily="49" charset="-127"/>
-              </a:rPr>
-              <a:t>keras.layers.SimpleRNN</a:t>
-            </a:r>
-            <a:r>
-              <a:rPr lang="en-US" altLang="ko-KR" sz="1600" dirty="0">
-                <a:latin typeface="D2Coding" panose="020B0609020101020101" pitchFamily="49" charset="-127"/>
-                <a:ea typeface="D2Coding" panose="020B0609020101020101" pitchFamily="49" charset="-127"/>
-              </a:rPr>
-              <a:t>(20, </a:t>
-            </a:r>
-            <a:r>
-              <a:rPr lang="en-US" altLang="ko-KR" sz="1600" dirty="0" err="1">
-                <a:latin typeface="D2Coding" panose="020B0609020101020101" pitchFamily="49" charset="-127"/>
-                <a:ea typeface="D2Coding" panose="020B0609020101020101" pitchFamily="49" charset="-127"/>
-              </a:rPr>
-              <a:t>return_sequences</a:t>
-            </a:r>
-            <a:r>
-              <a:rPr lang="en-US" altLang="ko-KR" sz="1600" dirty="0">
-                <a:latin typeface="D2Coding" panose="020B0609020101020101" pitchFamily="49" charset="-127"/>
-                <a:ea typeface="D2Coding" panose="020B0609020101020101" pitchFamily="49" charset="-127"/>
-              </a:rPr>
-              <a:t>=True),</a:t>
-            </a:r>
-          </a:p>
-          <a:p>
-            <a:pPr>
-              <a:lnSpc>
-                <a:spcPct val="150000"/>
-              </a:lnSpc>
-            </a:pPr>
-            <a:r>
-              <a:rPr lang="en-US" altLang="ko-KR" sz="1600" dirty="0" err="1">
-                <a:latin typeface="D2Coding" panose="020B0609020101020101" pitchFamily="49" charset="-127"/>
-                <a:ea typeface="D2Coding" panose="020B0609020101020101" pitchFamily="49" charset="-127"/>
-              </a:rPr>
-              <a:t>keras.layers.SimpleRNN</a:t>
-            </a:r>
-            <a:r>
-              <a:rPr lang="en-US" altLang="ko-KR" sz="1600" dirty="0">
-                <a:latin typeface="D2Coding" panose="020B0609020101020101" pitchFamily="49" charset="-127"/>
-                <a:ea typeface="D2Coding" panose="020B0609020101020101" pitchFamily="49" charset="-127"/>
-              </a:rPr>
-              <a:t>(1)</a:t>
-            </a:r>
-          </a:p>
-          <a:p>
-            <a:pPr>
-              <a:lnSpc>
-                <a:spcPct val="150000"/>
-              </a:lnSpc>
-            </a:pPr>
-            <a:r>
-              <a:rPr lang="en-US" altLang="ko-KR" sz="1600" dirty="0">
-                <a:latin typeface="D2Coding" panose="020B0609020101020101" pitchFamily="49" charset="-127"/>
-                <a:ea typeface="D2Coding" panose="020B0609020101020101" pitchFamily="49" charset="-127"/>
-              </a:rPr>
-              <a:t>])</a:t>
-            </a:r>
-            <a:endParaRPr lang="ko-KR" altLang="en-US" sz="1600" dirty="0">
-              <a:latin typeface="D2Coding" panose="020B0609020101020101" pitchFamily="49" charset="-127"/>
-              <a:ea typeface="D2Coding" panose="020B0609020101020101" pitchFamily="49" charset="-127"/>
-            </a:endParaRPr>
-          </a:p>
-        </p:txBody>
-      </p:sp>
-      <p:sp>
-        <p:nvSpPr>
-          <p:cNvPr id="8" name="TextBox 7">
-            <a:extLst>
-              <a:ext uri="{FF2B5EF4-FFF2-40B4-BE49-F238E27FC236}">
-                <a16:creationId xmlns:a16="http://schemas.microsoft.com/office/drawing/2014/main" id="{C6F2EA05-A1C1-C3D6-A27F-B8B458C99403}"/>
-              </a:ext>
-            </a:extLst>
-          </p:cNvPr>
-          <p:cNvSpPr txBox="1"/>
-          <p:nvPr/>
-        </p:nvSpPr>
-        <p:spPr>
-          <a:xfrm>
-            <a:off x="7112116" y="2291584"/>
-            <a:ext cx="4155440" cy="506742"/>
-          </a:xfrm>
-          <a:prstGeom prst="rect">
-            <a:avLst/>
-          </a:prstGeom>
-          <a:noFill/>
-        </p:spPr>
-        <p:txBody>
-          <a:bodyPr wrap="square" rtlCol="0">
-            <a:spAutoFit/>
-          </a:bodyPr>
-          <a:lstStyle/>
-          <a:p>
-            <a:pPr>
-              <a:lnSpc>
-                <a:spcPct val="150000"/>
-              </a:lnSpc>
-            </a:pPr>
-            <a:r>
-              <a:rPr lang="ko-KR" altLang="en-US" sz="2000" dirty="0">
-                <a:latin typeface="D2Coding" panose="020B0609020101020101" pitchFamily="49" charset="-127"/>
-                <a:ea typeface="D2Coding" panose="020B0609020101020101" pitchFamily="49" charset="-127"/>
-              </a:rPr>
-              <a:t>은닉층은 </a:t>
-            </a:r>
-            <a:r>
-              <a:rPr lang="en-US" altLang="ko-KR" sz="2000" dirty="0">
-                <a:latin typeface="D2Coding" panose="020B0609020101020101" pitchFamily="49" charset="-127"/>
-                <a:ea typeface="D2Coding" panose="020B0609020101020101" pitchFamily="49" charset="-127"/>
-              </a:rPr>
-              <a:t>3</a:t>
-            </a:r>
-            <a:r>
-              <a:rPr lang="ko-KR" altLang="en-US" sz="2000" dirty="0">
-                <a:latin typeface="D2Coding" panose="020B0609020101020101" pitchFamily="49" charset="-127"/>
-                <a:ea typeface="D2Coding" panose="020B0609020101020101" pitchFamily="49" charset="-127"/>
-              </a:rPr>
-              <a:t>개</a:t>
-            </a:r>
-          </a:p>
-        </p:txBody>
-      </p:sp>
-    </p:spTree>
-    <p:extLst>
-      <p:ext uri="{BB962C8B-B14F-4D97-AF65-F5344CB8AC3E}">
-        <p14:creationId xmlns:p14="http://schemas.microsoft.com/office/powerpoint/2010/main" val="652204200"/>
-      </p:ext>
-    </p:extLst>
-  </p:cSld>
-  <p:clrMapOvr>
-    <a:masterClrMapping/>
-  </p:clrMapOvr>
-</p:sld>
-</file>
-
-<file path=ppt/slides/slide29.xml><?xml version="1.0" encoding="utf-8"?>
-<p:sld xmlns:a="http://schemas.openxmlformats.org/drawingml/2006/main" xmlns:r="http://schemas.openxmlformats.org/officeDocument/2006/relationships" xmlns:p="http://schemas.openxmlformats.org/presentationml/2006/main">
-  <p:cSld>
-    <p:spTree>
-      <p:nvGrpSpPr>
-        <p:cNvPr id="1" name="">
-          <a:extLst>
-            <a:ext uri="{FF2B5EF4-FFF2-40B4-BE49-F238E27FC236}">
-              <a16:creationId xmlns:a16="http://schemas.microsoft.com/office/drawing/2014/main" id="{FE9E28F8-30D6-EE0C-AD4D-3720D804185A}"/>
-            </a:ext>
-          </a:extLst>
-        </p:cNvPr>
-        <p:cNvGrpSpPr/>
-        <p:nvPr/>
-      </p:nvGrpSpPr>
-      <p:grpSpPr>
-        <a:xfrm>
-          <a:off x="0" y="0"/>
-          <a:ext cx="0" cy="0"/>
-          <a:chOff x="0" y="0"/>
-          <a:chExt cx="0" cy="0"/>
-        </a:xfrm>
-      </p:grpSpPr>
-      <p:sp>
-        <p:nvSpPr>
-          <p:cNvPr id="4" name="슬라이드 번호 개체 틀 3">
-            <a:extLst>
-              <a:ext uri="{FF2B5EF4-FFF2-40B4-BE49-F238E27FC236}">
-                <a16:creationId xmlns:a16="http://schemas.microsoft.com/office/drawing/2014/main" id="{ADB3AF37-E42F-565B-46B9-6B7245CE7DE5}"/>
-              </a:ext>
-            </a:extLst>
-          </p:cNvPr>
-          <p:cNvSpPr>
-            <a:spLocks noGrp="1"/>
-          </p:cNvSpPr>
-          <p:nvPr>
-            <p:ph type="sldNum" sz="quarter" idx="12"/>
-          </p:nvPr>
-        </p:nvSpPr>
-        <p:spPr>
-          <a:xfrm>
-            <a:off x="10514011" y="6036261"/>
-            <a:ext cx="753545" cy="365125"/>
-          </a:xfrm>
-        </p:spPr>
-        <p:txBody>
-          <a:bodyPr/>
-          <a:lstStyle/>
-          <a:p>
-            <a:fld id="{D57F1E4F-1CFF-5643-939E-217C01CDF565}" type="slidenum">
-              <a:rPr lang="en-US" smtClean="0"/>
-              <a:pPr/>
-              <a:t>29</a:t>
-            </a:fld>
-            <a:endParaRPr lang="en-US" dirty="0"/>
-          </a:p>
-        </p:txBody>
-      </p:sp>
-      <p:sp>
-        <p:nvSpPr>
-          <p:cNvPr id="3" name="제목 1">
-            <a:extLst>
-              <a:ext uri="{FF2B5EF4-FFF2-40B4-BE49-F238E27FC236}">
-                <a16:creationId xmlns:a16="http://schemas.microsoft.com/office/drawing/2014/main" id="{B028BB7D-FB7D-3D9C-7C18-B5CA95794DFE}"/>
-              </a:ext>
-            </a:extLst>
-          </p:cNvPr>
-          <p:cNvSpPr txBox="1">
-            <a:spLocks/>
-          </p:cNvSpPr>
-          <p:nvPr/>
-        </p:nvSpPr>
-        <p:spPr>
-          <a:xfrm>
-            <a:off x="475645" y="481983"/>
-            <a:ext cx="10353762" cy="766439"/>
-          </a:xfrm>
-          <a:prstGeom prst="rect">
-            <a:avLst/>
-          </a:prstGeom>
-        </p:spPr>
-        <p:txBody>
-          <a:bodyPr vert="horz" lIns="91440" tIns="45720" rIns="91440" bIns="45720" rtlCol="0" anchor="ctr">
-            <a:normAutofit/>
-          </a:bodyPr>
-          <a:lstStyle>
-            <a:lvl1pPr algn="ctr" defTabSz="914400" rtl="0" eaLnBrk="1" latinLnBrk="1" hangingPunct="1">
-              <a:lnSpc>
-                <a:spcPct val="90000"/>
-              </a:lnSpc>
-              <a:spcBef>
-                <a:spcPct val="0"/>
-              </a:spcBef>
-              <a:buNone/>
-              <a:defRPr sz="3200" kern="1200" cap="all" baseline="0">
-                <a:solidFill>
-                  <a:schemeClr val="tx1"/>
-                </a:solidFill>
-                <a:effectLst/>
-                <a:latin typeface="Batang" panose="02030600000101010101" pitchFamily="18" charset="-127"/>
-                <a:ea typeface="Batang" panose="02030600000101010101" pitchFamily="18" charset="-127"/>
-                <a:cs typeface="+mj-cs"/>
-              </a:defRPr>
-            </a:lvl1pPr>
-          </a:lstStyle>
-          <a:p>
-            <a:pPr algn="l"/>
-            <a:r>
-              <a:rPr lang="en-US" altLang="ko-KR" sz="2800" cap="none" dirty="0">
-                <a:solidFill>
-                  <a:schemeClr val="bg2">
-                    <a:lumMod val="25000"/>
-                  </a:schemeClr>
-                </a:solidFill>
-                <a:latin typeface="D2Coding" panose="020B0609020101020101" pitchFamily="49" charset="-127"/>
-                <a:ea typeface="D2Coding" panose="020B0609020101020101" pitchFamily="49" charset="-127"/>
-                <a:cs typeface="Segoe UI Light" panose="020B0502040204020203" pitchFamily="34" charset="0"/>
-              </a:rPr>
-              <a:t>Recurrent Neural Network (RNN)</a:t>
-            </a:r>
-            <a:endParaRPr lang="ko-KR" altLang="en-US" sz="2800" cap="none" dirty="0">
-              <a:solidFill>
-                <a:schemeClr val="bg2">
-                  <a:lumMod val="25000"/>
-                </a:schemeClr>
-              </a:solidFill>
-              <a:latin typeface="D2Coding" panose="020B0609020101020101" pitchFamily="49" charset="-127"/>
-              <a:ea typeface="D2Coding" panose="020B0609020101020101" pitchFamily="49" charset="-127"/>
-              <a:cs typeface="Segoe UI Light" panose="020B0502040204020203" pitchFamily="34" charset="0"/>
-            </a:endParaRPr>
-          </a:p>
-        </p:txBody>
-      </p:sp>
-      <p:pic>
-        <p:nvPicPr>
-          <p:cNvPr id="1026" name="Picture 2">
-            <a:extLst>
-              <a:ext uri="{FF2B5EF4-FFF2-40B4-BE49-F238E27FC236}">
-                <a16:creationId xmlns:a16="http://schemas.microsoft.com/office/drawing/2014/main" id="{339970A5-A681-2B27-3205-D7A4C775AA70}"/>
-              </a:ext>
-            </a:extLst>
-          </p:cNvPr>
-          <p:cNvPicPr>
-            <a:picLocks noChangeAspect="1" noChangeArrowheads="1"/>
-          </p:cNvPicPr>
-          <p:nvPr/>
-        </p:nvPicPr>
-        <p:blipFill>
-          <a:blip r:embed="rId2">
-            <a:extLst>
-              <a:ext uri="{BEBA8EAE-BF5A-486C-A8C5-ECC9F3942E4B}">
-                <a14:imgProps xmlns:a14="http://schemas.microsoft.com/office/drawing/2010/main">
-                  <a14:imgLayer r:embed="rId3">
-                    <a14:imgEffect>
-                      <a14:colorTemperature colorTemp="7200"/>
-                    </a14:imgEffect>
-                  </a14:imgLayer>
-                </a14:imgProps>
-              </a:ext>
-              <a:ext uri="{28A0092B-C50C-407E-A947-70E740481C1C}">
-                <a14:useLocalDpi xmlns:a14="http://schemas.microsoft.com/office/drawing/2010/main" val="0"/>
-              </a:ext>
-            </a:extLst>
-          </a:blip>
-          <a:srcRect/>
-          <a:stretch>
-            <a:fillRect/>
-          </a:stretch>
-        </p:blipFill>
-        <p:spPr bwMode="auto">
-          <a:xfrm>
-            <a:off x="3814201" y="2412283"/>
-            <a:ext cx="3676650" cy="3143250"/>
-          </a:xfrm>
-          <a:prstGeom prst="rect">
-            <a:avLst/>
-          </a:prstGeom>
-          <a:noFill/>
-          <a:extLst>
-            <a:ext uri="{909E8E84-426E-40DD-AFC4-6F175D3DCCD1}">
-              <a14:hiddenFill xmlns:a14="http://schemas.microsoft.com/office/drawing/2010/main">
-                <a:solidFill>
-                  <a:srgbClr val="FFFFFF"/>
-                </a:solidFill>
-              </a14:hiddenFill>
-            </a:ext>
-          </a:extLst>
-        </p:spPr>
-      </p:pic>
-    </p:spTree>
-    <p:extLst>
-      <p:ext uri="{BB962C8B-B14F-4D97-AF65-F5344CB8AC3E}">
-        <p14:creationId xmlns:p14="http://schemas.microsoft.com/office/powerpoint/2010/main" val="2857055801"/>
       </p:ext>
     </p:extLst>
   </p:cSld>
@@ -28103,6 +31501,649 @@
         <p:cNvPr id="1" name="">
           <a:extLst>
             <a:ext uri="{FF2B5EF4-FFF2-40B4-BE49-F238E27FC236}">
+              <a16:creationId xmlns:a16="http://schemas.microsoft.com/office/drawing/2014/main" id="{3E9EBB6F-5205-2B6B-B72B-D2729860EAA7}"/>
+            </a:ext>
+          </a:extLst>
+        </p:cNvPr>
+        <p:cNvGrpSpPr/>
+        <p:nvPr/>
+      </p:nvGrpSpPr>
+      <p:grpSpPr>
+        <a:xfrm>
+          <a:off x="0" y="0"/>
+          <a:ext cx="0" cy="0"/>
+          <a:chOff x="0" y="0"/>
+          <a:chExt cx="0" cy="0"/>
+        </a:xfrm>
+      </p:grpSpPr>
+      <p:sp>
+        <p:nvSpPr>
+          <p:cNvPr id="4" name="슬라이드 번호 개체 틀 3">
+            <a:extLst>
+              <a:ext uri="{FF2B5EF4-FFF2-40B4-BE49-F238E27FC236}">
+                <a16:creationId xmlns:a16="http://schemas.microsoft.com/office/drawing/2014/main" id="{2E9DA771-6870-123A-1128-9F853C7FC970}"/>
+              </a:ext>
+            </a:extLst>
+          </p:cNvPr>
+          <p:cNvSpPr>
+            <a:spLocks noGrp="1"/>
+          </p:cNvSpPr>
+          <p:nvPr>
+            <p:ph type="sldNum" sz="quarter" idx="12"/>
+          </p:nvPr>
+        </p:nvSpPr>
+        <p:spPr>
+          <a:xfrm>
+            <a:off x="10514011" y="6036261"/>
+            <a:ext cx="753545" cy="365125"/>
+          </a:xfrm>
+        </p:spPr>
+        <p:txBody>
+          <a:bodyPr/>
+          <a:lstStyle/>
+          <a:p>
+            <a:fld id="{D57F1E4F-1CFF-5643-939E-217C01CDF565}" type="slidenum">
+              <a:rPr lang="en-US" smtClean="0"/>
+              <a:pPr/>
+              <a:t>30</a:t>
+            </a:fld>
+            <a:endParaRPr lang="en-US" dirty="0"/>
+          </a:p>
+        </p:txBody>
+      </p:sp>
+      <p:sp>
+        <p:nvSpPr>
+          <p:cNvPr id="3" name="제목 1">
+            <a:extLst>
+              <a:ext uri="{FF2B5EF4-FFF2-40B4-BE49-F238E27FC236}">
+                <a16:creationId xmlns:a16="http://schemas.microsoft.com/office/drawing/2014/main" id="{28B72CFF-95F2-13FD-1562-1F1A7BC98859}"/>
+              </a:ext>
+            </a:extLst>
+          </p:cNvPr>
+          <p:cNvSpPr txBox="1">
+            <a:spLocks/>
+          </p:cNvSpPr>
+          <p:nvPr/>
+        </p:nvSpPr>
+        <p:spPr>
+          <a:xfrm>
+            <a:off x="475645" y="481983"/>
+            <a:ext cx="10353762" cy="766439"/>
+          </a:xfrm>
+          <a:prstGeom prst="rect">
+            <a:avLst/>
+          </a:prstGeom>
+        </p:spPr>
+        <p:txBody>
+          <a:bodyPr vert="horz" lIns="91440" tIns="45720" rIns="91440" bIns="45720" rtlCol="0" anchor="ctr">
+            <a:normAutofit/>
+          </a:bodyPr>
+          <a:lstStyle>
+            <a:lvl1pPr algn="ctr" defTabSz="914400" rtl="0" eaLnBrk="1" latinLnBrk="1" hangingPunct="1">
+              <a:lnSpc>
+                <a:spcPct val="90000"/>
+              </a:lnSpc>
+              <a:spcBef>
+                <a:spcPct val="0"/>
+              </a:spcBef>
+              <a:buNone/>
+              <a:defRPr sz="3200" kern="1200" cap="all" baseline="0">
+                <a:solidFill>
+                  <a:schemeClr val="tx1"/>
+                </a:solidFill>
+                <a:effectLst/>
+                <a:latin typeface="Batang" panose="02030600000101010101" pitchFamily="18" charset="-127"/>
+                <a:ea typeface="Batang" panose="02030600000101010101" pitchFamily="18" charset="-127"/>
+                <a:cs typeface="+mj-cs"/>
+              </a:defRPr>
+            </a:lvl1pPr>
+          </a:lstStyle>
+          <a:p>
+            <a:pPr algn="l"/>
+            <a:r>
+              <a:rPr lang="en-US" altLang="ko-KR" sz="2800" cap="none" dirty="0">
+                <a:solidFill>
+                  <a:schemeClr val="bg2">
+                    <a:lumMod val="25000"/>
+                  </a:schemeClr>
+                </a:solidFill>
+                <a:latin typeface="D2Coding" panose="020B0609020101020101" pitchFamily="49" charset="-127"/>
+                <a:ea typeface="D2Coding" panose="020B0609020101020101" pitchFamily="49" charset="-127"/>
+                <a:cs typeface="Segoe UI Light" panose="020B0502040204020203" pitchFamily="34" charset="0"/>
+              </a:rPr>
+              <a:t>Deep</a:t>
+            </a:r>
+            <a:r>
+              <a:rPr lang="ko-KR" altLang="en-US" sz="2800" cap="none" dirty="0">
+                <a:solidFill>
+                  <a:schemeClr val="bg2">
+                    <a:lumMod val="25000"/>
+                  </a:schemeClr>
+                </a:solidFill>
+                <a:latin typeface="D2Coding" panose="020B0609020101020101" pitchFamily="49" charset="-127"/>
+                <a:ea typeface="D2Coding" panose="020B0609020101020101" pitchFamily="49" charset="-127"/>
+                <a:cs typeface="Segoe UI Light" panose="020B0502040204020203" pitchFamily="34" charset="0"/>
+              </a:rPr>
+              <a:t> </a:t>
+            </a:r>
+            <a:r>
+              <a:rPr lang="en-US" altLang="ko-KR" sz="2800" cap="none" dirty="0">
+                <a:solidFill>
+                  <a:schemeClr val="bg2">
+                    <a:lumMod val="25000"/>
+                  </a:schemeClr>
+                </a:solidFill>
+                <a:latin typeface="D2Coding" panose="020B0609020101020101" pitchFamily="49" charset="-127"/>
+                <a:ea typeface="D2Coding" panose="020B0609020101020101" pitchFamily="49" charset="-127"/>
+                <a:cs typeface="Segoe UI Light" panose="020B0502040204020203" pitchFamily="34" charset="0"/>
+              </a:rPr>
+              <a:t>Recurrent Neural Network (RNN)</a:t>
+            </a:r>
+            <a:endParaRPr lang="ko-KR" altLang="en-US" sz="2800" cap="none" dirty="0">
+              <a:solidFill>
+                <a:schemeClr val="bg2">
+                  <a:lumMod val="25000"/>
+                </a:schemeClr>
+              </a:solidFill>
+              <a:latin typeface="D2Coding" panose="020B0609020101020101" pitchFamily="49" charset="-127"/>
+              <a:ea typeface="D2Coding" panose="020B0609020101020101" pitchFamily="49" charset="-127"/>
+              <a:cs typeface="Segoe UI Light" panose="020B0502040204020203" pitchFamily="34" charset="0"/>
+            </a:endParaRPr>
+          </a:p>
+        </p:txBody>
+      </p:sp>
+      <p:pic>
+        <p:nvPicPr>
+          <p:cNvPr id="5" name="그림 4">
+            <a:extLst>
+              <a:ext uri="{FF2B5EF4-FFF2-40B4-BE49-F238E27FC236}">
+                <a16:creationId xmlns:a16="http://schemas.microsoft.com/office/drawing/2014/main" id="{FB46B54B-58F6-E08B-924D-D269DB922BB6}"/>
+              </a:ext>
+            </a:extLst>
+          </p:cNvPr>
+          <p:cNvPicPr>
+            <a:picLocks noChangeAspect="1"/>
+          </p:cNvPicPr>
+          <p:nvPr/>
+        </p:nvPicPr>
+        <p:blipFill>
+          <a:blip r:embed="rId2"/>
+          <a:stretch>
+            <a:fillRect/>
+          </a:stretch>
+        </p:blipFill>
+        <p:spPr>
+          <a:xfrm>
+            <a:off x="658459" y="1446542"/>
+            <a:ext cx="4922947" cy="2834886"/>
+          </a:xfrm>
+          <a:prstGeom prst="rect">
+            <a:avLst/>
+          </a:prstGeom>
+        </p:spPr>
+      </p:pic>
+      <p:sp>
+        <p:nvSpPr>
+          <p:cNvPr id="7" name="TextBox 6">
+            <a:extLst>
+              <a:ext uri="{FF2B5EF4-FFF2-40B4-BE49-F238E27FC236}">
+                <a16:creationId xmlns:a16="http://schemas.microsoft.com/office/drawing/2014/main" id="{22D46B0D-9D00-4C42-8ED7-31125215AF15}"/>
+              </a:ext>
+            </a:extLst>
+          </p:cNvPr>
+          <p:cNvSpPr txBox="1"/>
+          <p:nvPr/>
+        </p:nvSpPr>
+        <p:spPr>
+          <a:xfrm>
+            <a:off x="658459" y="4419262"/>
+            <a:ext cx="7711440" cy="1901161"/>
+          </a:xfrm>
+          <a:prstGeom prst="rect">
+            <a:avLst/>
+          </a:prstGeom>
+          <a:solidFill>
+            <a:srgbClr val="76E3FF"/>
+          </a:solidFill>
+        </p:spPr>
+        <p:txBody>
+          <a:bodyPr wrap="square">
+            <a:spAutoFit/>
+          </a:bodyPr>
+          <a:lstStyle/>
+          <a:p>
+            <a:pPr>
+              <a:lnSpc>
+                <a:spcPct val="150000"/>
+              </a:lnSpc>
+            </a:pPr>
+            <a:r>
+              <a:rPr lang="en-US" altLang="ko-KR" sz="1600" dirty="0">
+                <a:latin typeface="D2Coding" panose="020B0609020101020101" pitchFamily="49" charset="-127"/>
+                <a:ea typeface="D2Coding" panose="020B0609020101020101" pitchFamily="49" charset="-127"/>
+              </a:rPr>
+              <a:t>model = </a:t>
+            </a:r>
+            <a:r>
+              <a:rPr lang="en-US" altLang="ko-KR" sz="1600" dirty="0" err="1">
+                <a:latin typeface="D2Coding" panose="020B0609020101020101" pitchFamily="49" charset="-127"/>
+                <a:ea typeface="D2Coding" panose="020B0609020101020101" pitchFamily="49" charset="-127"/>
+              </a:rPr>
+              <a:t>keras.models.Sequential</a:t>
+            </a:r>
+            <a:r>
+              <a:rPr lang="en-US" altLang="ko-KR" sz="1600" dirty="0">
+                <a:latin typeface="D2Coding" panose="020B0609020101020101" pitchFamily="49" charset="-127"/>
+                <a:ea typeface="D2Coding" panose="020B0609020101020101" pitchFamily="49" charset="-127"/>
+              </a:rPr>
+              <a:t>([</a:t>
+            </a:r>
+          </a:p>
+          <a:p>
+            <a:pPr>
+              <a:lnSpc>
+                <a:spcPct val="150000"/>
+              </a:lnSpc>
+            </a:pPr>
+            <a:r>
+              <a:rPr lang="en-US" altLang="ko-KR" sz="1600" dirty="0" err="1">
+                <a:latin typeface="D2Coding" panose="020B0609020101020101" pitchFamily="49" charset="-127"/>
+                <a:ea typeface="D2Coding" panose="020B0609020101020101" pitchFamily="49" charset="-127"/>
+              </a:rPr>
+              <a:t>keras.layers.SimpleRNN</a:t>
+            </a:r>
+            <a:r>
+              <a:rPr lang="en-US" altLang="ko-KR" sz="1600" dirty="0">
+                <a:latin typeface="D2Coding" panose="020B0609020101020101" pitchFamily="49" charset="-127"/>
+                <a:ea typeface="D2Coding" panose="020B0609020101020101" pitchFamily="49" charset="-127"/>
+              </a:rPr>
+              <a:t>(20, </a:t>
+            </a:r>
+            <a:r>
+              <a:rPr lang="en-US" altLang="ko-KR" sz="1600" dirty="0" err="1">
+                <a:latin typeface="D2Coding" panose="020B0609020101020101" pitchFamily="49" charset="-127"/>
+                <a:ea typeface="D2Coding" panose="020B0609020101020101" pitchFamily="49" charset="-127"/>
+              </a:rPr>
+              <a:t>return_sequences</a:t>
+            </a:r>
+            <a:r>
+              <a:rPr lang="en-US" altLang="ko-KR" sz="1600" dirty="0">
+                <a:latin typeface="D2Coding" panose="020B0609020101020101" pitchFamily="49" charset="-127"/>
+                <a:ea typeface="D2Coding" panose="020B0609020101020101" pitchFamily="49" charset="-127"/>
+              </a:rPr>
+              <a:t>=True, </a:t>
+            </a:r>
+            <a:r>
+              <a:rPr lang="en-US" altLang="ko-KR" sz="1600" dirty="0" err="1">
+                <a:latin typeface="D2Coding" panose="020B0609020101020101" pitchFamily="49" charset="-127"/>
+                <a:ea typeface="D2Coding" panose="020B0609020101020101" pitchFamily="49" charset="-127"/>
+              </a:rPr>
+              <a:t>input_shape</a:t>
+            </a:r>
+            <a:r>
+              <a:rPr lang="en-US" altLang="ko-KR" sz="1600" dirty="0">
+                <a:latin typeface="D2Coding" panose="020B0609020101020101" pitchFamily="49" charset="-127"/>
+                <a:ea typeface="D2Coding" panose="020B0609020101020101" pitchFamily="49" charset="-127"/>
+              </a:rPr>
+              <a:t>=[None, 1]),</a:t>
+            </a:r>
+          </a:p>
+          <a:p>
+            <a:pPr>
+              <a:lnSpc>
+                <a:spcPct val="150000"/>
+              </a:lnSpc>
+            </a:pPr>
+            <a:r>
+              <a:rPr lang="en-US" altLang="ko-KR" sz="1600" dirty="0" err="1">
+                <a:latin typeface="D2Coding" panose="020B0609020101020101" pitchFamily="49" charset="-127"/>
+                <a:ea typeface="D2Coding" panose="020B0609020101020101" pitchFamily="49" charset="-127"/>
+              </a:rPr>
+              <a:t>keras.layers.SimpleRNN</a:t>
+            </a:r>
+            <a:r>
+              <a:rPr lang="en-US" altLang="ko-KR" sz="1600" dirty="0">
+                <a:latin typeface="D2Coding" panose="020B0609020101020101" pitchFamily="49" charset="-127"/>
+                <a:ea typeface="D2Coding" panose="020B0609020101020101" pitchFamily="49" charset="-127"/>
+              </a:rPr>
+              <a:t>(20, </a:t>
+            </a:r>
+            <a:r>
+              <a:rPr lang="en-US" altLang="ko-KR" sz="1600" dirty="0" err="1">
+                <a:latin typeface="D2Coding" panose="020B0609020101020101" pitchFamily="49" charset="-127"/>
+                <a:ea typeface="D2Coding" panose="020B0609020101020101" pitchFamily="49" charset="-127"/>
+              </a:rPr>
+              <a:t>return_sequences</a:t>
+            </a:r>
+            <a:r>
+              <a:rPr lang="en-US" altLang="ko-KR" sz="1600" dirty="0">
+                <a:latin typeface="D2Coding" panose="020B0609020101020101" pitchFamily="49" charset="-127"/>
+                <a:ea typeface="D2Coding" panose="020B0609020101020101" pitchFamily="49" charset="-127"/>
+              </a:rPr>
+              <a:t>=True),</a:t>
+            </a:r>
+          </a:p>
+          <a:p>
+            <a:pPr>
+              <a:lnSpc>
+                <a:spcPct val="150000"/>
+              </a:lnSpc>
+            </a:pPr>
+            <a:r>
+              <a:rPr lang="en-US" altLang="ko-KR" sz="1600" dirty="0" err="1">
+                <a:latin typeface="D2Coding" panose="020B0609020101020101" pitchFamily="49" charset="-127"/>
+                <a:ea typeface="D2Coding" panose="020B0609020101020101" pitchFamily="49" charset="-127"/>
+              </a:rPr>
+              <a:t>keras.layers.SimpleRNN</a:t>
+            </a:r>
+            <a:r>
+              <a:rPr lang="en-US" altLang="ko-KR" sz="1600" dirty="0">
+                <a:latin typeface="D2Coding" panose="020B0609020101020101" pitchFamily="49" charset="-127"/>
+                <a:ea typeface="D2Coding" panose="020B0609020101020101" pitchFamily="49" charset="-127"/>
+              </a:rPr>
+              <a:t>(1)</a:t>
+            </a:r>
+          </a:p>
+          <a:p>
+            <a:pPr>
+              <a:lnSpc>
+                <a:spcPct val="150000"/>
+              </a:lnSpc>
+            </a:pPr>
+            <a:r>
+              <a:rPr lang="en-US" altLang="ko-KR" sz="1600" dirty="0">
+                <a:latin typeface="D2Coding" panose="020B0609020101020101" pitchFamily="49" charset="-127"/>
+                <a:ea typeface="D2Coding" panose="020B0609020101020101" pitchFamily="49" charset="-127"/>
+              </a:rPr>
+              <a:t>])</a:t>
+            </a:r>
+            <a:endParaRPr lang="ko-KR" altLang="en-US" sz="1600" dirty="0">
+              <a:latin typeface="D2Coding" panose="020B0609020101020101" pitchFamily="49" charset="-127"/>
+              <a:ea typeface="D2Coding" panose="020B0609020101020101" pitchFamily="49" charset="-127"/>
+            </a:endParaRPr>
+          </a:p>
+        </p:txBody>
+      </p:sp>
+      <p:sp>
+        <p:nvSpPr>
+          <p:cNvPr id="8" name="TextBox 7">
+            <a:extLst>
+              <a:ext uri="{FF2B5EF4-FFF2-40B4-BE49-F238E27FC236}">
+                <a16:creationId xmlns:a16="http://schemas.microsoft.com/office/drawing/2014/main" id="{C6F2EA05-A1C1-C3D6-A27F-B8B458C99403}"/>
+              </a:ext>
+            </a:extLst>
+          </p:cNvPr>
+          <p:cNvSpPr txBox="1"/>
+          <p:nvPr/>
+        </p:nvSpPr>
+        <p:spPr>
+          <a:xfrm>
+            <a:off x="7112116" y="2291584"/>
+            <a:ext cx="4155440" cy="506742"/>
+          </a:xfrm>
+          <a:prstGeom prst="rect">
+            <a:avLst/>
+          </a:prstGeom>
+          <a:noFill/>
+        </p:spPr>
+        <p:txBody>
+          <a:bodyPr wrap="square" rtlCol="0">
+            <a:spAutoFit/>
+          </a:bodyPr>
+          <a:lstStyle/>
+          <a:p>
+            <a:pPr>
+              <a:lnSpc>
+                <a:spcPct val="150000"/>
+              </a:lnSpc>
+            </a:pPr>
+            <a:r>
+              <a:rPr lang="ko-KR" altLang="en-US" sz="2000" dirty="0">
+                <a:latin typeface="D2Coding" panose="020B0609020101020101" pitchFamily="49" charset="-127"/>
+                <a:ea typeface="D2Coding" panose="020B0609020101020101" pitchFamily="49" charset="-127"/>
+              </a:rPr>
+              <a:t>은닉층은 </a:t>
+            </a:r>
+            <a:r>
+              <a:rPr lang="en-US" altLang="ko-KR" sz="2000" dirty="0">
+                <a:latin typeface="D2Coding" panose="020B0609020101020101" pitchFamily="49" charset="-127"/>
+                <a:ea typeface="D2Coding" panose="020B0609020101020101" pitchFamily="49" charset="-127"/>
+              </a:rPr>
+              <a:t>3</a:t>
+            </a:r>
+            <a:r>
+              <a:rPr lang="ko-KR" altLang="en-US" sz="2000" dirty="0">
+                <a:latin typeface="D2Coding" panose="020B0609020101020101" pitchFamily="49" charset="-127"/>
+                <a:ea typeface="D2Coding" panose="020B0609020101020101" pitchFamily="49" charset="-127"/>
+              </a:rPr>
+              <a:t>개</a:t>
+            </a:r>
+          </a:p>
+        </p:txBody>
+      </p:sp>
+    </p:spTree>
+    <p:extLst>
+      <p:ext uri="{BB962C8B-B14F-4D97-AF65-F5344CB8AC3E}">
+        <p14:creationId xmlns:p14="http://schemas.microsoft.com/office/powerpoint/2010/main" val="652204200"/>
+      </p:ext>
+    </p:extLst>
+  </p:cSld>
+  <p:clrMapOvr>
+    <a:masterClrMapping/>
+  </p:clrMapOvr>
+</p:sld>
+</file>
+
+<file path=ppt/slides/slide31.xml><?xml version="1.0" encoding="utf-8"?>
+<p:sld xmlns:a="http://schemas.openxmlformats.org/drawingml/2006/main" xmlns:r="http://schemas.openxmlformats.org/officeDocument/2006/relationships" xmlns:p="http://schemas.openxmlformats.org/presentationml/2006/main">
+  <p:cSld>
+    <p:spTree>
+      <p:nvGrpSpPr>
+        <p:cNvPr id="1" name="">
+          <a:extLst>
+            <a:ext uri="{FF2B5EF4-FFF2-40B4-BE49-F238E27FC236}">
+              <a16:creationId xmlns:a16="http://schemas.microsoft.com/office/drawing/2014/main" id="{FE9E28F8-30D6-EE0C-AD4D-3720D804185A}"/>
+            </a:ext>
+          </a:extLst>
+        </p:cNvPr>
+        <p:cNvGrpSpPr/>
+        <p:nvPr/>
+      </p:nvGrpSpPr>
+      <p:grpSpPr>
+        <a:xfrm>
+          <a:off x="0" y="0"/>
+          <a:ext cx="0" cy="0"/>
+          <a:chOff x="0" y="0"/>
+          <a:chExt cx="0" cy="0"/>
+        </a:xfrm>
+      </p:grpSpPr>
+      <p:sp>
+        <p:nvSpPr>
+          <p:cNvPr id="4" name="슬라이드 번호 개체 틀 3">
+            <a:extLst>
+              <a:ext uri="{FF2B5EF4-FFF2-40B4-BE49-F238E27FC236}">
+                <a16:creationId xmlns:a16="http://schemas.microsoft.com/office/drawing/2014/main" id="{ADB3AF37-E42F-565B-46B9-6B7245CE7DE5}"/>
+              </a:ext>
+            </a:extLst>
+          </p:cNvPr>
+          <p:cNvSpPr>
+            <a:spLocks noGrp="1"/>
+          </p:cNvSpPr>
+          <p:nvPr>
+            <p:ph type="sldNum" sz="quarter" idx="12"/>
+          </p:nvPr>
+        </p:nvSpPr>
+        <p:spPr>
+          <a:xfrm>
+            <a:off x="10514011" y="6036261"/>
+            <a:ext cx="753545" cy="365125"/>
+          </a:xfrm>
+        </p:spPr>
+        <p:txBody>
+          <a:bodyPr/>
+          <a:lstStyle/>
+          <a:p>
+            <a:fld id="{D57F1E4F-1CFF-5643-939E-217C01CDF565}" type="slidenum">
+              <a:rPr lang="en-US" smtClean="0"/>
+              <a:pPr/>
+              <a:t>31</a:t>
+            </a:fld>
+            <a:endParaRPr lang="en-US" dirty="0"/>
+          </a:p>
+        </p:txBody>
+      </p:sp>
+      <p:sp>
+        <p:nvSpPr>
+          <p:cNvPr id="3" name="제목 1">
+            <a:extLst>
+              <a:ext uri="{FF2B5EF4-FFF2-40B4-BE49-F238E27FC236}">
+                <a16:creationId xmlns:a16="http://schemas.microsoft.com/office/drawing/2014/main" id="{B028BB7D-FB7D-3D9C-7C18-B5CA95794DFE}"/>
+              </a:ext>
+            </a:extLst>
+          </p:cNvPr>
+          <p:cNvSpPr txBox="1">
+            <a:spLocks/>
+          </p:cNvSpPr>
+          <p:nvPr/>
+        </p:nvSpPr>
+        <p:spPr>
+          <a:xfrm>
+            <a:off x="475645" y="481983"/>
+            <a:ext cx="10353762" cy="766439"/>
+          </a:xfrm>
+          <a:prstGeom prst="rect">
+            <a:avLst/>
+          </a:prstGeom>
+        </p:spPr>
+        <p:txBody>
+          <a:bodyPr vert="horz" lIns="91440" tIns="45720" rIns="91440" bIns="45720" rtlCol="0" anchor="ctr">
+            <a:normAutofit/>
+          </a:bodyPr>
+          <a:lstStyle>
+            <a:lvl1pPr algn="ctr" defTabSz="914400" rtl="0" eaLnBrk="1" latinLnBrk="1" hangingPunct="1">
+              <a:lnSpc>
+                <a:spcPct val="90000"/>
+              </a:lnSpc>
+              <a:spcBef>
+                <a:spcPct val="0"/>
+              </a:spcBef>
+              <a:buNone/>
+              <a:defRPr sz="3200" kern="1200" cap="all" baseline="0">
+                <a:solidFill>
+                  <a:schemeClr val="tx1"/>
+                </a:solidFill>
+                <a:effectLst/>
+                <a:latin typeface="Batang" panose="02030600000101010101" pitchFamily="18" charset="-127"/>
+                <a:ea typeface="Batang" panose="02030600000101010101" pitchFamily="18" charset="-127"/>
+                <a:cs typeface="+mj-cs"/>
+              </a:defRPr>
+            </a:lvl1pPr>
+          </a:lstStyle>
+          <a:p>
+            <a:pPr algn="l"/>
+            <a:r>
+              <a:rPr lang="en-US" altLang="ko-KR" sz="2800" cap="none" dirty="0">
+                <a:solidFill>
+                  <a:schemeClr val="bg2">
+                    <a:lumMod val="25000"/>
+                  </a:schemeClr>
+                </a:solidFill>
+                <a:latin typeface="D2Coding" panose="020B0609020101020101" pitchFamily="49" charset="-127"/>
+                <a:ea typeface="D2Coding" panose="020B0609020101020101" pitchFamily="49" charset="-127"/>
+                <a:cs typeface="Segoe UI Light" panose="020B0502040204020203" pitchFamily="34" charset="0"/>
+              </a:rPr>
+              <a:t>Recurrent Neural Network (RNN)</a:t>
+            </a:r>
+            <a:endParaRPr lang="ko-KR" altLang="en-US" sz="2800" cap="none" dirty="0">
+              <a:solidFill>
+                <a:schemeClr val="bg2">
+                  <a:lumMod val="25000"/>
+                </a:schemeClr>
+              </a:solidFill>
+              <a:latin typeface="D2Coding" panose="020B0609020101020101" pitchFamily="49" charset="-127"/>
+              <a:ea typeface="D2Coding" panose="020B0609020101020101" pitchFamily="49" charset="-127"/>
+              <a:cs typeface="Segoe UI Light" panose="020B0502040204020203" pitchFamily="34" charset="0"/>
+            </a:endParaRPr>
+          </a:p>
+        </p:txBody>
+      </p:sp>
+      <p:pic>
+        <p:nvPicPr>
+          <p:cNvPr id="1026" name="Picture 2">
+            <a:extLst>
+              <a:ext uri="{FF2B5EF4-FFF2-40B4-BE49-F238E27FC236}">
+                <a16:creationId xmlns:a16="http://schemas.microsoft.com/office/drawing/2014/main" id="{339970A5-A681-2B27-3205-D7A4C775AA70}"/>
+              </a:ext>
+            </a:extLst>
+          </p:cNvPr>
+          <p:cNvPicPr>
+            <a:picLocks noChangeAspect="1" noChangeArrowheads="1"/>
+          </p:cNvPicPr>
+          <p:nvPr/>
+        </p:nvPicPr>
+        <p:blipFill>
+          <a:blip r:embed="rId2">
+            <a:extLst>
+              <a:ext uri="{BEBA8EAE-BF5A-486C-A8C5-ECC9F3942E4B}">
+                <a14:imgProps xmlns:a14="http://schemas.microsoft.com/office/drawing/2010/main">
+                  <a14:imgLayer r:embed="rId3">
+                    <a14:imgEffect>
+                      <a14:colorTemperature colorTemp="7200"/>
+                    </a14:imgEffect>
+                  </a14:imgLayer>
+                </a14:imgProps>
+              </a:ext>
+              <a:ext uri="{28A0092B-C50C-407E-A947-70E740481C1C}">
+                <a14:useLocalDpi xmlns:a14="http://schemas.microsoft.com/office/drawing/2010/main" val="0"/>
+              </a:ext>
+            </a:extLst>
+          </a:blip>
+          <a:srcRect/>
+          <a:stretch>
+            <a:fillRect/>
+          </a:stretch>
+        </p:blipFill>
+        <p:spPr bwMode="auto">
+          <a:xfrm>
+            <a:off x="3814201" y="2412283"/>
+            <a:ext cx="3676650" cy="3143250"/>
+          </a:xfrm>
+          <a:prstGeom prst="rect">
+            <a:avLst/>
+          </a:prstGeom>
+          <a:noFill/>
+          <a:extLst>
+            <a:ext uri="{909E8E84-426E-40DD-AFC4-6F175D3DCCD1}">
+              <a14:hiddenFill xmlns:a14="http://schemas.microsoft.com/office/drawing/2010/main">
+                <a:solidFill>
+                  <a:srgbClr val="FFFFFF"/>
+                </a:solidFill>
+              </a14:hiddenFill>
+            </a:ext>
+          </a:extLst>
+        </p:spPr>
+      </p:pic>
+    </p:spTree>
+    <p:extLst>
+      <p:ext uri="{BB962C8B-B14F-4D97-AF65-F5344CB8AC3E}">
+        <p14:creationId xmlns:p14="http://schemas.microsoft.com/office/powerpoint/2010/main" val="2857055801"/>
+      </p:ext>
+    </p:extLst>
+  </p:cSld>
+  <p:clrMapOvr>
+    <a:masterClrMapping/>
+  </p:clrMapOvr>
+</p:sld>
+</file>
+
+<file path=ppt/slides/slide32.xml><?xml version="1.0" encoding="utf-8"?>
+<p:sld xmlns:a="http://schemas.openxmlformats.org/drawingml/2006/main" xmlns:r="http://schemas.openxmlformats.org/officeDocument/2006/relationships" xmlns:p="http://schemas.openxmlformats.org/presentationml/2006/main">
+  <p:cSld>
+    <p:spTree>
+      <p:nvGrpSpPr>
+        <p:cNvPr id="1" name="">
+          <a:extLst>
+            <a:ext uri="{FF2B5EF4-FFF2-40B4-BE49-F238E27FC236}">
               <a16:creationId xmlns:a16="http://schemas.microsoft.com/office/drawing/2014/main" id="{88FFB53F-5797-0BB2-9323-F166DE5B6771}"/>
             </a:ext>
           </a:extLst>
@@ -28147,7 +32188,7 @@
             <a:fld id="{D57F1E4F-1CFF-5643-939E-217C01CDF565}" type="slidenum">
               <a:rPr lang="en-US" smtClean="0"/>
               <a:pPr/>
-              <a:t>30</a:t>
+              <a:t>32</a:t>
             </a:fld>
             <a:endParaRPr lang="en-US" dirty="0"/>
           </a:p>
@@ -28297,7 +32338,7 @@
 </p:sld>
 </file>
 
-<file path=ppt/slides/slide31.xml><?xml version="1.0" encoding="utf-8"?>
+<file path=ppt/slides/slide33.xml><?xml version="1.0" encoding="utf-8"?>
 <p:sld xmlns:a="http://schemas.openxmlformats.org/drawingml/2006/main" xmlns:r="http://schemas.openxmlformats.org/officeDocument/2006/relationships" xmlns:p="http://schemas.openxmlformats.org/presentationml/2006/main">
   <p:cSld>
     <p:spTree>
@@ -28349,7 +32390,7 @@
             <a:fld id="{D57F1E4F-1CFF-5643-939E-217C01CDF565}" type="slidenum">
               <a:rPr lang="en-US" smtClean="0"/>
               <a:pPr/>
-              <a:t>31</a:t>
+              <a:t>33</a:t>
             </a:fld>
             <a:endParaRPr lang="en-US" dirty="0"/>
           </a:p>

--- a/Chapter 13 Timeseries forecasting.pptx
+++ b/Chapter 13 Timeseries forecasting.pptx
@@ -5,45 +5,50 @@
     <p:sldMasterId id="2147483660" r:id="rId1"/>
   </p:sldMasterIdLst>
   <p:notesMasterIdLst>
-    <p:notesMasterId r:id="rId35"/>
+    <p:notesMasterId r:id="rId40"/>
   </p:notesMasterIdLst>
   <p:handoutMasterIdLst>
-    <p:handoutMasterId r:id="rId36"/>
+    <p:handoutMasterId r:id="rId41"/>
   </p:handoutMasterIdLst>
   <p:sldIdLst>
     <p:sldId id="256" r:id="rId2"/>
-    <p:sldId id="1122" r:id="rId3"/>
-    <p:sldId id="1134" r:id="rId4"/>
-    <p:sldId id="1140" r:id="rId5"/>
-    <p:sldId id="1141" r:id="rId6"/>
-    <p:sldId id="1144" r:id="rId7"/>
-    <p:sldId id="1142" r:id="rId8"/>
-    <p:sldId id="1143" r:id="rId9"/>
-    <p:sldId id="1146" r:id="rId10"/>
-    <p:sldId id="1148" r:id="rId11"/>
-    <p:sldId id="1136" r:id="rId12"/>
-    <p:sldId id="1145" r:id="rId13"/>
-    <p:sldId id="1150" r:id="rId14"/>
-    <p:sldId id="1152" r:id="rId15"/>
-    <p:sldId id="1149" r:id="rId16"/>
-    <p:sldId id="1153" r:id="rId17"/>
-    <p:sldId id="1151" r:id="rId18"/>
-    <p:sldId id="1154" r:id="rId19"/>
-    <p:sldId id="1135" r:id="rId20"/>
-    <p:sldId id="1132" r:id="rId21"/>
-    <p:sldId id="1133" r:id="rId22"/>
-    <p:sldId id="1125" r:id="rId23"/>
-    <p:sldId id="1127" r:id="rId24"/>
-    <p:sldId id="1128" r:id="rId25"/>
-    <p:sldId id="1123" r:id="rId26"/>
-    <p:sldId id="1130" r:id="rId27"/>
-    <p:sldId id="1131" r:id="rId28"/>
-    <p:sldId id="1137" r:id="rId29"/>
-    <p:sldId id="1138" r:id="rId30"/>
-    <p:sldId id="1129" r:id="rId31"/>
-    <p:sldId id="1139" r:id="rId32"/>
-    <p:sldId id="978" r:id="rId33"/>
-    <p:sldId id="1121" r:id="rId34"/>
+    <p:sldId id="1155" r:id="rId3"/>
+    <p:sldId id="1122" r:id="rId4"/>
+    <p:sldId id="1134" r:id="rId5"/>
+    <p:sldId id="1140" r:id="rId6"/>
+    <p:sldId id="1141" r:id="rId7"/>
+    <p:sldId id="1144" r:id="rId8"/>
+    <p:sldId id="1142" r:id="rId9"/>
+    <p:sldId id="1143" r:id="rId10"/>
+    <p:sldId id="1157" r:id="rId11"/>
+    <p:sldId id="1146" r:id="rId12"/>
+    <p:sldId id="1148" r:id="rId13"/>
+    <p:sldId id="1136" r:id="rId14"/>
+    <p:sldId id="1145" r:id="rId15"/>
+    <p:sldId id="1158" r:id="rId16"/>
+    <p:sldId id="1150" r:id="rId17"/>
+    <p:sldId id="1152" r:id="rId18"/>
+    <p:sldId id="1149" r:id="rId19"/>
+    <p:sldId id="1153" r:id="rId20"/>
+    <p:sldId id="1151" r:id="rId21"/>
+    <p:sldId id="1154" r:id="rId22"/>
+    <p:sldId id="1159" r:id="rId23"/>
+    <p:sldId id="1135" r:id="rId24"/>
+    <p:sldId id="1160" r:id="rId25"/>
+    <p:sldId id="1132" r:id="rId26"/>
+    <p:sldId id="1133" r:id="rId27"/>
+    <p:sldId id="1125" r:id="rId28"/>
+    <p:sldId id="1127" r:id="rId29"/>
+    <p:sldId id="1128" r:id="rId30"/>
+    <p:sldId id="1123" r:id="rId31"/>
+    <p:sldId id="1130" r:id="rId32"/>
+    <p:sldId id="1131" r:id="rId33"/>
+    <p:sldId id="1137" r:id="rId34"/>
+    <p:sldId id="1138" r:id="rId35"/>
+    <p:sldId id="1129" r:id="rId36"/>
+    <p:sldId id="1139" r:id="rId37"/>
+    <p:sldId id="978" r:id="rId38"/>
+    <p:sldId id="1121" r:id="rId39"/>
   </p:sldIdLst>
   <p:sldSz cx="12192000" cy="6858000"/>
   <p:notesSz cx="6858000" cy="9144000"/>
@@ -152,6 +157,7 @@
         </p14:section>
         <p14:section name="디자인, 모핑, 주석 달기, 공동 작업, 입력하세요" id="{B9B51309-D148-4332-87C2-07BE32FBCA3B}">
           <p14:sldIdLst>
+            <p14:sldId id="1155"/>
             <p14:sldId id="1122"/>
             <p14:sldId id="1134"/>
             <p14:sldId id="1140"/>
@@ -159,17 +165,21 @@
             <p14:sldId id="1144"/>
             <p14:sldId id="1142"/>
             <p14:sldId id="1143"/>
+            <p14:sldId id="1157"/>
             <p14:sldId id="1146"/>
             <p14:sldId id="1148"/>
             <p14:sldId id="1136"/>
             <p14:sldId id="1145"/>
+            <p14:sldId id="1158"/>
             <p14:sldId id="1150"/>
             <p14:sldId id="1152"/>
             <p14:sldId id="1149"/>
             <p14:sldId id="1153"/>
             <p14:sldId id="1151"/>
             <p14:sldId id="1154"/>
+            <p14:sldId id="1159"/>
             <p14:sldId id="1135"/>
+            <p14:sldId id="1160"/>
             <p14:sldId id="1132"/>
             <p14:sldId id="1133"/>
             <p14:sldId id="1125"/>
@@ -1860,7 +1870,7 @@
             <a:fld id="{DF61EA0F-A667-4B49-8422-0062BC55E249}" type="slidenum">
               <a:rPr lang="en-US" altLang="ko-KR" noProof="0" smtClean="0"/>
               <a:pPr/>
-              <a:t>23</a:t>
+              <a:t>28</a:t>
             </a:fld>
             <a:endParaRPr lang="ko-KR" altLang="en-US" noProof="0"/>
           </a:p>
@@ -4107,6 +4117,766 @@
         <p:cNvPr id="1" name="">
           <a:extLst>
             <a:ext uri="{FF2B5EF4-FFF2-40B4-BE49-F238E27FC236}">
+              <a16:creationId xmlns:a16="http://schemas.microsoft.com/office/drawing/2014/main" id="{0CEC885E-842A-7400-1415-2F309E775F28}"/>
+            </a:ext>
+          </a:extLst>
+        </p:cNvPr>
+        <p:cNvGrpSpPr/>
+        <p:nvPr/>
+      </p:nvGrpSpPr>
+      <p:grpSpPr>
+        <a:xfrm>
+          <a:off x="0" y="0"/>
+          <a:ext cx="0" cy="0"/>
+          <a:chOff x="0" y="0"/>
+          <a:chExt cx="0" cy="0"/>
+        </a:xfrm>
+      </p:grpSpPr>
+      <p:sp>
+        <p:nvSpPr>
+          <p:cNvPr id="2" name="직사각형 1">
+            <a:extLst>
+              <a:ext uri="{FF2B5EF4-FFF2-40B4-BE49-F238E27FC236}">
+                <a16:creationId xmlns:a16="http://schemas.microsoft.com/office/drawing/2014/main" id="{4B7F86CC-3A72-31B3-4CFB-67DFB6C8810D}"/>
+              </a:ext>
+            </a:extLst>
+          </p:cNvPr>
+          <p:cNvSpPr/>
+          <p:nvPr/>
+        </p:nvSpPr>
+        <p:spPr>
+          <a:xfrm>
+            <a:off x="475645" y="2324100"/>
+            <a:ext cx="7963505" cy="530474"/>
+          </a:xfrm>
+          <a:prstGeom prst="rect">
+            <a:avLst/>
+          </a:prstGeom>
+          <a:solidFill>
+            <a:schemeClr val="bg1">
+              <a:lumMod val="85000"/>
+            </a:schemeClr>
+          </a:solidFill>
+          <a:ln>
+            <a:noFill/>
+          </a:ln>
+        </p:spPr>
+        <p:style>
+          <a:lnRef idx="2">
+            <a:schemeClr val="accent1">
+              <a:shade val="15000"/>
+            </a:schemeClr>
+          </a:lnRef>
+          <a:fillRef idx="1">
+            <a:schemeClr val="accent1"/>
+          </a:fillRef>
+          <a:effectRef idx="0">
+            <a:schemeClr val="accent1"/>
+          </a:effectRef>
+          <a:fontRef idx="minor">
+            <a:schemeClr val="lt1"/>
+          </a:fontRef>
+        </p:style>
+        <p:txBody>
+          <a:bodyPr rtlCol="0" anchor="ctr"/>
+          <a:lstStyle/>
+          <a:p>
+            <a:pPr algn="ctr"/>
+            <a:endParaRPr lang="ko-KR" altLang="en-US"/>
+          </a:p>
+        </p:txBody>
+      </p:sp>
+      <p:sp>
+        <p:nvSpPr>
+          <p:cNvPr id="4" name="슬라이드 번호 개체 틀 3">
+            <a:extLst>
+              <a:ext uri="{FF2B5EF4-FFF2-40B4-BE49-F238E27FC236}">
+                <a16:creationId xmlns:a16="http://schemas.microsoft.com/office/drawing/2014/main" id="{E69BDE96-05E2-9007-79F3-A80767F2FDA3}"/>
+              </a:ext>
+            </a:extLst>
+          </p:cNvPr>
+          <p:cNvSpPr>
+            <a:spLocks noGrp="1"/>
+          </p:cNvSpPr>
+          <p:nvPr>
+            <p:ph type="sldNum" sz="quarter" idx="12"/>
+          </p:nvPr>
+        </p:nvSpPr>
+        <p:spPr>
+          <a:xfrm>
+            <a:off x="10514011" y="6036261"/>
+            <a:ext cx="753545" cy="365125"/>
+          </a:xfrm>
+        </p:spPr>
+        <p:txBody>
+          <a:bodyPr/>
+          <a:lstStyle/>
+          <a:p>
+            <a:fld id="{D57F1E4F-1CFF-5643-939E-217C01CDF565}" type="slidenum">
+              <a:rPr lang="en-US" smtClean="0"/>
+              <a:pPr/>
+              <a:t>10</a:t>
+            </a:fld>
+            <a:endParaRPr lang="en-US" dirty="0"/>
+          </a:p>
+        </p:txBody>
+      </p:sp>
+      <p:sp>
+        <p:nvSpPr>
+          <p:cNvPr id="3" name="제목 1">
+            <a:extLst>
+              <a:ext uri="{FF2B5EF4-FFF2-40B4-BE49-F238E27FC236}">
+                <a16:creationId xmlns:a16="http://schemas.microsoft.com/office/drawing/2014/main" id="{FA804884-F704-3991-331C-007A44C6B2F2}"/>
+              </a:ext>
+            </a:extLst>
+          </p:cNvPr>
+          <p:cNvSpPr txBox="1">
+            <a:spLocks/>
+          </p:cNvSpPr>
+          <p:nvPr/>
+        </p:nvSpPr>
+        <p:spPr>
+          <a:xfrm>
+            <a:off x="475645" y="481983"/>
+            <a:ext cx="10353762" cy="766439"/>
+          </a:xfrm>
+          <a:prstGeom prst="rect">
+            <a:avLst/>
+          </a:prstGeom>
+        </p:spPr>
+        <p:txBody>
+          <a:bodyPr vert="horz" lIns="91440" tIns="45720" rIns="91440" bIns="45720" rtlCol="0" anchor="ctr">
+            <a:normAutofit/>
+          </a:bodyPr>
+          <a:lstStyle>
+            <a:lvl1pPr algn="ctr" defTabSz="914400" rtl="0" eaLnBrk="1" latinLnBrk="1" hangingPunct="1">
+              <a:lnSpc>
+                <a:spcPct val="90000"/>
+              </a:lnSpc>
+              <a:spcBef>
+                <a:spcPct val="0"/>
+              </a:spcBef>
+              <a:buNone/>
+              <a:defRPr sz="3200" kern="1200" cap="all" baseline="0">
+                <a:solidFill>
+                  <a:schemeClr val="tx1"/>
+                </a:solidFill>
+                <a:effectLst/>
+                <a:latin typeface="Batang" panose="02030600000101010101" pitchFamily="18" charset="-127"/>
+                <a:ea typeface="Batang" panose="02030600000101010101" pitchFamily="18" charset="-127"/>
+                <a:cs typeface="+mj-cs"/>
+              </a:defRPr>
+            </a:lvl1pPr>
+          </a:lstStyle>
+          <a:p>
+            <a:pPr algn="l"/>
+            <a:r>
+              <a:rPr lang="en-US" altLang="ko-KR" sz="2800" cap="none" dirty="0">
+                <a:solidFill>
+                  <a:schemeClr val="bg2">
+                    <a:lumMod val="25000"/>
+                  </a:schemeClr>
+                </a:solidFill>
+                <a:latin typeface="D2Coding" panose="020B0609020101020101" pitchFamily="49" charset="-127"/>
+                <a:ea typeface="D2Coding" panose="020B0609020101020101" pitchFamily="49" charset="-127"/>
+                <a:cs typeface="Segoe UI Light" panose="020B0502040204020203" pitchFamily="34" charset="0"/>
+              </a:rPr>
+              <a:t>Goals</a:t>
+            </a:r>
+            <a:endParaRPr lang="ko-KR" altLang="en-US" sz="2800" cap="none" dirty="0">
+              <a:solidFill>
+                <a:schemeClr val="bg2">
+                  <a:lumMod val="25000"/>
+                </a:schemeClr>
+              </a:solidFill>
+              <a:latin typeface="D2Coding" panose="020B0609020101020101" pitchFamily="49" charset="-127"/>
+              <a:ea typeface="D2Coding" panose="020B0609020101020101" pitchFamily="49" charset="-127"/>
+              <a:cs typeface="Segoe UI Light" panose="020B0502040204020203" pitchFamily="34" charset="0"/>
+            </a:endParaRPr>
+          </a:p>
+        </p:txBody>
+      </p:sp>
+      <p:sp>
+        <p:nvSpPr>
+          <p:cNvPr id="5" name="TextBox 4">
+            <a:extLst>
+              <a:ext uri="{FF2B5EF4-FFF2-40B4-BE49-F238E27FC236}">
+                <a16:creationId xmlns:a16="http://schemas.microsoft.com/office/drawing/2014/main" id="{D7A42FEE-0FEC-87FF-BF8B-2960A6890E33}"/>
+              </a:ext>
+            </a:extLst>
+          </p:cNvPr>
+          <p:cNvSpPr txBox="1"/>
+          <p:nvPr/>
+        </p:nvSpPr>
+        <p:spPr>
+          <a:xfrm>
+            <a:off x="587055" y="1846268"/>
+            <a:ext cx="7394895" cy="4189993"/>
+          </a:xfrm>
+          <a:prstGeom prst="rect">
+            <a:avLst/>
+          </a:prstGeom>
+          <a:noFill/>
+        </p:spPr>
+        <p:txBody>
+          <a:bodyPr wrap="square">
+            <a:spAutoFit/>
+          </a:bodyPr>
+          <a:lstStyle/>
+          <a:p>
+            <a:pPr marL="800100" lvl="1" indent="-342900">
+              <a:lnSpc>
+                <a:spcPct val="150000"/>
+              </a:lnSpc>
+              <a:buFont typeface="Wingdings" panose="05000000000000000000" pitchFamily="2" charset="2"/>
+              <a:buChar char="v"/>
+            </a:pPr>
+            <a:r>
+              <a:rPr lang="en-US" altLang="ko-KR" sz="2000" dirty="0"/>
+              <a:t>Different kinds of timeseries tasks</a:t>
+            </a:r>
+          </a:p>
+          <a:p>
+            <a:pPr marL="800100" lvl="1" indent="-342900">
+              <a:lnSpc>
+                <a:spcPct val="150000"/>
+              </a:lnSpc>
+              <a:buFont typeface="Wingdings" panose="05000000000000000000" pitchFamily="2" charset="2"/>
+              <a:buChar char="v"/>
+            </a:pPr>
+            <a:r>
+              <a:rPr lang="en-US" altLang="ko-KR" sz="2000" dirty="0"/>
+              <a:t>Timeseries 3D tensor</a:t>
+            </a:r>
+          </a:p>
+          <a:p>
+            <a:pPr marL="800100" lvl="1" indent="-342900">
+              <a:lnSpc>
+                <a:spcPct val="150000"/>
+              </a:lnSpc>
+              <a:buFont typeface="Wingdings" panose="05000000000000000000" pitchFamily="2" charset="2"/>
+              <a:buChar char="v"/>
+            </a:pPr>
+            <a:r>
+              <a:rPr lang="en-US" altLang="ko-KR" sz="2000" dirty="0"/>
+              <a:t>A temperature forecasting example</a:t>
+            </a:r>
+          </a:p>
+          <a:p>
+            <a:pPr marL="1257300" lvl="2" indent="-342900">
+              <a:lnSpc>
+                <a:spcPct val="150000"/>
+              </a:lnSpc>
+              <a:buFont typeface="Wingdings" panose="05000000000000000000" pitchFamily="2" charset="2"/>
+              <a:buChar char="v"/>
+            </a:pPr>
+            <a:r>
+              <a:rPr lang="en-US" altLang="ko-KR" sz="2000" dirty="0"/>
+              <a:t>naïve approach</a:t>
+            </a:r>
+          </a:p>
+          <a:p>
+            <a:pPr marL="1257300" lvl="2" indent="-342900">
+              <a:lnSpc>
+                <a:spcPct val="150000"/>
+              </a:lnSpc>
+              <a:buFont typeface="Wingdings" panose="05000000000000000000" pitchFamily="2" charset="2"/>
+              <a:buChar char="v"/>
+            </a:pPr>
+            <a:r>
+              <a:rPr lang="en-US" altLang="ko-KR" sz="2000" dirty="0"/>
+              <a:t>Fully connected neural network</a:t>
+            </a:r>
+          </a:p>
+          <a:p>
+            <a:pPr marL="1257300" lvl="2" indent="-342900">
+              <a:lnSpc>
+                <a:spcPct val="150000"/>
+              </a:lnSpc>
+              <a:buFont typeface="Wingdings" panose="05000000000000000000" pitchFamily="2" charset="2"/>
+              <a:buChar char="v"/>
+            </a:pPr>
+            <a:r>
+              <a:rPr lang="en-US" altLang="ko-KR" sz="2000" dirty="0"/>
+              <a:t>1D Convnet</a:t>
+            </a:r>
+          </a:p>
+          <a:p>
+            <a:pPr marL="800100" lvl="1" indent="-342900">
+              <a:lnSpc>
+                <a:spcPct val="150000"/>
+              </a:lnSpc>
+              <a:buFont typeface="Wingdings" panose="05000000000000000000" pitchFamily="2" charset="2"/>
+              <a:buChar char="v"/>
+            </a:pPr>
+            <a:r>
+              <a:rPr lang="en-US" altLang="ko-KR" sz="2000" dirty="0"/>
+              <a:t>Understanding recurrent neural networks (RNNs)</a:t>
+            </a:r>
+          </a:p>
+          <a:p>
+            <a:pPr marL="800100" lvl="1" indent="-342900">
+              <a:lnSpc>
+                <a:spcPct val="150000"/>
+              </a:lnSpc>
+              <a:buFont typeface="Wingdings" panose="05000000000000000000" pitchFamily="2" charset="2"/>
+              <a:buChar char="v"/>
+            </a:pPr>
+            <a:r>
+              <a:rPr lang="en-US" altLang="ko-KR" sz="2000" dirty="0"/>
+              <a:t>Applying RNNs to a temperature forecasting example</a:t>
+            </a:r>
+          </a:p>
+          <a:p>
+            <a:pPr marL="800100" lvl="1" indent="-342900">
+              <a:lnSpc>
+                <a:spcPct val="150000"/>
+              </a:lnSpc>
+              <a:buFont typeface="Wingdings" panose="05000000000000000000" pitchFamily="2" charset="2"/>
+              <a:buChar char="v"/>
+            </a:pPr>
+            <a:endParaRPr lang="en-US" altLang="ko-KR" sz="2000" dirty="0"/>
+          </a:p>
+        </p:txBody>
+      </p:sp>
+    </p:spTree>
+    <p:extLst>
+      <p:ext uri="{BB962C8B-B14F-4D97-AF65-F5344CB8AC3E}">
+        <p14:creationId xmlns:p14="http://schemas.microsoft.com/office/powerpoint/2010/main" val="2994009011"/>
+      </p:ext>
+    </p:extLst>
+  </p:cSld>
+  <p:clrMapOvr>
+    <a:masterClrMapping/>
+  </p:clrMapOvr>
+</p:sld>
+</file>
+
+<file path=ppt/slides/slide11.xml><?xml version="1.0" encoding="utf-8"?>
+<p:sld xmlns:a="http://schemas.openxmlformats.org/drawingml/2006/main" xmlns:r="http://schemas.openxmlformats.org/officeDocument/2006/relationships" xmlns:p="http://schemas.openxmlformats.org/presentationml/2006/main">
+  <p:cSld>
+    <p:spTree>
+      <p:nvGrpSpPr>
+        <p:cNvPr id="1" name="">
+          <a:extLst>
+            <a:ext uri="{FF2B5EF4-FFF2-40B4-BE49-F238E27FC236}">
+              <a16:creationId xmlns:a16="http://schemas.microsoft.com/office/drawing/2014/main" id="{B96F697D-6FA4-C9F7-B1CF-012E1896C92B}"/>
+            </a:ext>
+          </a:extLst>
+        </p:cNvPr>
+        <p:cNvGrpSpPr/>
+        <p:nvPr/>
+      </p:nvGrpSpPr>
+      <p:grpSpPr>
+        <a:xfrm>
+          <a:off x="0" y="0"/>
+          <a:ext cx="0" cy="0"/>
+          <a:chOff x="0" y="0"/>
+          <a:chExt cx="0" cy="0"/>
+        </a:xfrm>
+      </p:grpSpPr>
+      <p:sp>
+        <p:nvSpPr>
+          <p:cNvPr id="3" name="제목 1">
+            <a:extLst>
+              <a:ext uri="{FF2B5EF4-FFF2-40B4-BE49-F238E27FC236}">
+                <a16:creationId xmlns:a16="http://schemas.microsoft.com/office/drawing/2014/main" id="{AE117BD9-978E-2100-D439-E41B165E4F8D}"/>
+              </a:ext>
+            </a:extLst>
+          </p:cNvPr>
+          <p:cNvSpPr txBox="1">
+            <a:spLocks/>
+          </p:cNvSpPr>
+          <p:nvPr/>
+        </p:nvSpPr>
+        <p:spPr>
+          <a:xfrm>
+            <a:off x="475645" y="481983"/>
+            <a:ext cx="10353762" cy="766439"/>
+          </a:xfrm>
+          <a:prstGeom prst="rect">
+            <a:avLst/>
+          </a:prstGeom>
+        </p:spPr>
+        <p:txBody>
+          <a:bodyPr vert="horz" lIns="91440" tIns="45720" rIns="91440" bIns="45720" rtlCol="0" anchor="ctr">
+            <a:normAutofit/>
+          </a:bodyPr>
+          <a:lstStyle>
+            <a:lvl1pPr algn="ctr" defTabSz="914400" rtl="0" eaLnBrk="1" latinLnBrk="1" hangingPunct="1">
+              <a:lnSpc>
+                <a:spcPct val="90000"/>
+              </a:lnSpc>
+              <a:spcBef>
+                <a:spcPct val="0"/>
+              </a:spcBef>
+              <a:buNone/>
+              <a:defRPr sz="3200" kern="1200" cap="all" baseline="0">
+                <a:solidFill>
+                  <a:schemeClr val="tx1"/>
+                </a:solidFill>
+                <a:effectLst/>
+                <a:latin typeface="Batang" panose="02030600000101010101" pitchFamily="18" charset="-127"/>
+                <a:ea typeface="Batang" panose="02030600000101010101" pitchFamily="18" charset="-127"/>
+                <a:cs typeface="+mj-cs"/>
+              </a:defRPr>
+            </a:lvl1pPr>
+          </a:lstStyle>
+          <a:p>
+            <a:pPr algn="l"/>
+            <a:r>
+              <a:rPr lang="en-US" altLang="ko-KR" sz="2800" cap="none" dirty="0">
+                <a:solidFill>
+                  <a:schemeClr val="bg2">
+                    <a:lumMod val="25000"/>
+                  </a:schemeClr>
+                </a:solidFill>
+                <a:latin typeface="D2Coding" panose="020B0609020101020101" pitchFamily="49" charset="-127"/>
+                <a:ea typeface="D2Coding" panose="020B0609020101020101" pitchFamily="49" charset="-127"/>
+                <a:cs typeface="Segoe UI Light" panose="020B0502040204020203" pitchFamily="34" charset="0"/>
+              </a:rPr>
+              <a:t>Timeseries 3D tensor sequence data for RNN</a:t>
+            </a:r>
+            <a:endParaRPr lang="ko-KR" altLang="en-US" sz="2800" cap="none" dirty="0">
+              <a:solidFill>
+                <a:schemeClr val="bg2">
+                  <a:lumMod val="25000"/>
+                </a:schemeClr>
+              </a:solidFill>
+              <a:latin typeface="D2Coding" panose="020B0609020101020101" pitchFamily="49" charset="-127"/>
+              <a:ea typeface="D2Coding" panose="020B0609020101020101" pitchFamily="49" charset="-127"/>
+              <a:cs typeface="Segoe UI Light" panose="020B0502040204020203" pitchFamily="34" charset="0"/>
+            </a:endParaRPr>
+          </a:p>
+        </p:txBody>
+      </p:sp>
+      <p:pic>
+        <p:nvPicPr>
+          <p:cNvPr id="2054" name="Picture 6">
+            <a:extLst>
+              <a:ext uri="{FF2B5EF4-FFF2-40B4-BE49-F238E27FC236}">
+                <a16:creationId xmlns:a16="http://schemas.microsoft.com/office/drawing/2014/main" id="{D9A48F1E-7C27-0D20-E424-5AF452ABA294}"/>
+              </a:ext>
+            </a:extLst>
+          </p:cNvPr>
+          <p:cNvPicPr>
+            <a:picLocks noChangeAspect="1" noChangeArrowheads="1"/>
+          </p:cNvPicPr>
+          <p:nvPr/>
+        </p:nvPicPr>
+        <p:blipFill>
+          <a:blip r:embed="rId2">
+            <a:extLst>
+              <a:ext uri="{28A0092B-C50C-407E-A947-70E740481C1C}">
+                <a14:useLocalDpi xmlns:a14="http://schemas.microsoft.com/office/drawing/2010/main" val="0"/>
+              </a:ext>
+            </a:extLst>
+          </a:blip>
+          <a:srcRect/>
+          <a:stretch>
+            <a:fillRect/>
+          </a:stretch>
+        </p:blipFill>
+        <p:spPr bwMode="auto">
+          <a:xfrm>
+            <a:off x="2755973" y="2153920"/>
+            <a:ext cx="6524625" cy="2447925"/>
+          </a:xfrm>
+          <a:prstGeom prst="rect">
+            <a:avLst/>
+          </a:prstGeom>
+          <a:noFill/>
+          <a:extLst>
+            <a:ext uri="{909E8E84-426E-40DD-AFC4-6F175D3DCCD1}">
+              <a14:hiddenFill xmlns:a14="http://schemas.microsoft.com/office/drawing/2010/main">
+                <a:solidFill>
+                  <a:srgbClr val="FFFFFF"/>
+                </a:solidFill>
+              </a14:hiddenFill>
+            </a:ext>
+          </a:extLst>
+        </p:spPr>
+      </p:pic>
+      <p:sp>
+        <p:nvSpPr>
+          <p:cNvPr id="4" name="TextBox 3">
+            <a:extLst>
+              <a:ext uri="{FF2B5EF4-FFF2-40B4-BE49-F238E27FC236}">
+                <a16:creationId xmlns:a16="http://schemas.microsoft.com/office/drawing/2014/main" id="{505ABABD-C9CE-3915-ED95-7D93441E3520}"/>
+              </a:ext>
+            </a:extLst>
+          </p:cNvPr>
+          <p:cNvSpPr txBox="1"/>
+          <p:nvPr/>
+        </p:nvSpPr>
+        <p:spPr>
+          <a:xfrm>
+            <a:off x="9434874" y="3505496"/>
+            <a:ext cx="2233204" cy="830997"/>
+          </a:xfrm>
+          <a:prstGeom prst="rect">
+            <a:avLst/>
+          </a:prstGeom>
+          <a:noFill/>
+        </p:spPr>
+        <p:txBody>
+          <a:bodyPr wrap="square">
+            <a:spAutoFit/>
+          </a:bodyPr>
+          <a:lstStyle/>
+          <a:p>
+            <a:r>
+              <a:rPr lang="en-US" altLang="ko-KR" sz="1600" dirty="0">
+                <a:solidFill>
+                  <a:schemeClr val="accent5"/>
+                </a:solidFill>
+                <a:latin typeface="D2Coding" panose="020B0609020101020101" pitchFamily="49" charset="-127"/>
+                <a:ea typeface="D2Coding" panose="020B0609020101020101" pitchFamily="49" charset="-127"/>
+              </a:rPr>
+              <a:t>Samples/Batch size </a:t>
+            </a:r>
+            <a:r>
+              <a:rPr lang="ko-KR" altLang="en-US" sz="1600" dirty="0">
+                <a:solidFill>
+                  <a:schemeClr val="accent5"/>
+                </a:solidFill>
+                <a:latin typeface="D2Coding" panose="020B0609020101020101" pitchFamily="49" charset="-127"/>
+                <a:ea typeface="D2Coding" panose="020B0609020101020101" pitchFamily="49" charset="-127"/>
+              </a:rPr>
+              <a:t>만큼 딥러닝 모델로 입력데이터 투입</a:t>
+            </a:r>
+            <a:endParaRPr lang="en-US" altLang="ko-KR" sz="1600" dirty="0">
+              <a:solidFill>
+                <a:schemeClr val="accent5"/>
+              </a:solidFill>
+              <a:latin typeface="D2Coding" panose="020B0609020101020101" pitchFamily="49" charset="-127"/>
+              <a:ea typeface="D2Coding" panose="020B0609020101020101" pitchFamily="49" charset="-127"/>
+            </a:endParaRPr>
+          </a:p>
+        </p:txBody>
+      </p:sp>
+      <p:sp>
+        <p:nvSpPr>
+          <p:cNvPr id="5" name="TextBox 4">
+            <a:extLst>
+              <a:ext uri="{FF2B5EF4-FFF2-40B4-BE49-F238E27FC236}">
+                <a16:creationId xmlns:a16="http://schemas.microsoft.com/office/drawing/2014/main" id="{A3F439E8-6C21-7DE4-B0A6-4577DACBE42D}"/>
+              </a:ext>
+            </a:extLst>
+          </p:cNvPr>
+          <p:cNvSpPr txBox="1"/>
+          <p:nvPr/>
+        </p:nvSpPr>
+        <p:spPr>
+          <a:xfrm>
+            <a:off x="4670410" y="4688522"/>
+            <a:ext cx="3914790" cy="461665"/>
+          </a:xfrm>
+          <a:prstGeom prst="rect">
+            <a:avLst/>
+          </a:prstGeom>
+          <a:noFill/>
+        </p:spPr>
+        <p:txBody>
+          <a:bodyPr wrap="square">
+            <a:spAutoFit/>
+          </a:bodyPr>
+          <a:lstStyle/>
+          <a:p>
+            <a:r>
+              <a:rPr lang="en-US" altLang="ko-KR" sz="2400" dirty="0">
+                <a:solidFill>
+                  <a:schemeClr val="accent5"/>
+                </a:solidFill>
+                <a:latin typeface="D2Coding" panose="020B0609020101020101" pitchFamily="49" charset="-127"/>
+                <a:ea typeface="D2Coding" panose="020B0609020101020101" pitchFamily="49" charset="-127"/>
+              </a:rPr>
+              <a:t>Sliding window length</a:t>
+            </a:r>
+            <a:endParaRPr lang="ko-KR" altLang="en-US" sz="2400" dirty="0">
+              <a:solidFill>
+                <a:schemeClr val="accent5"/>
+              </a:solidFill>
+              <a:latin typeface="D2Coding" panose="020B0609020101020101" pitchFamily="49" charset="-127"/>
+              <a:ea typeface="D2Coding" panose="020B0609020101020101" pitchFamily="49" charset="-127"/>
+            </a:endParaRPr>
+          </a:p>
+        </p:txBody>
+      </p:sp>
+      <p:sp>
+        <p:nvSpPr>
+          <p:cNvPr id="6" name="TextBox 5">
+            <a:extLst>
+              <a:ext uri="{FF2B5EF4-FFF2-40B4-BE49-F238E27FC236}">
+                <a16:creationId xmlns:a16="http://schemas.microsoft.com/office/drawing/2014/main" id="{40C5270D-8C55-359A-1F8C-42140504639B}"/>
+              </a:ext>
+            </a:extLst>
+          </p:cNvPr>
+          <p:cNvSpPr txBox="1"/>
+          <p:nvPr/>
+        </p:nvSpPr>
+        <p:spPr>
+          <a:xfrm>
+            <a:off x="367340" y="2845097"/>
+            <a:ext cx="2533902" cy="461665"/>
+          </a:xfrm>
+          <a:prstGeom prst="rect">
+            <a:avLst/>
+          </a:prstGeom>
+          <a:noFill/>
+        </p:spPr>
+        <p:txBody>
+          <a:bodyPr wrap="square">
+            <a:spAutoFit/>
+          </a:bodyPr>
+          <a:lstStyle/>
+          <a:p>
+            <a:r>
+              <a:rPr lang="en-US" altLang="ko-KR" sz="2400" dirty="0">
+                <a:solidFill>
+                  <a:schemeClr val="accent5"/>
+                </a:solidFill>
+                <a:latin typeface="D2Coding" panose="020B0609020101020101" pitchFamily="49" charset="-127"/>
+                <a:ea typeface="D2Coding" panose="020B0609020101020101" pitchFamily="49" charset="-127"/>
+              </a:rPr>
+              <a:t>temps, winds,…</a:t>
+            </a:r>
+            <a:endParaRPr lang="ko-KR" altLang="en-US" sz="2400" dirty="0">
+              <a:solidFill>
+                <a:schemeClr val="accent5"/>
+              </a:solidFill>
+              <a:latin typeface="D2Coding" panose="020B0609020101020101" pitchFamily="49" charset="-127"/>
+              <a:ea typeface="D2Coding" panose="020B0609020101020101" pitchFamily="49" charset="-127"/>
+            </a:endParaRPr>
+          </a:p>
+        </p:txBody>
+      </p:sp>
+      <p:sp>
+        <p:nvSpPr>
+          <p:cNvPr id="9" name="TextBox 8">
+            <a:extLst>
+              <a:ext uri="{FF2B5EF4-FFF2-40B4-BE49-F238E27FC236}">
+                <a16:creationId xmlns:a16="http://schemas.microsoft.com/office/drawing/2014/main" id="{65059060-BC1A-DCA4-C465-6D4315B5193C}"/>
+              </a:ext>
+            </a:extLst>
+          </p:cNvPr>
+          <p:cNvSpPr txBox="1"/>
+          <p:nvPr/>
+        </p:nvSpPr>
+        <p:spPr>
+          <a:xfrm>
+            <a:off x="2739138" y="5293022"/>
+            <a:ext cx="6096000" cy="500137"/>
+          </a:xfrm>
+          <a:prstGeom prst="rect">
+            <a:avLst/>
+          </a:prstGeom>
+          <a:noFill/>
+        </p:spPr>
+        <p:txBody>
+          <a:bodyPr wrap="square">
+            <a:spAutoFit/>
+          </a:bodyPr>
+          <a:lstStyle/>
+          <a:p>
+            <a:pPr algn="l">
+              <a:spcAft>
+                <a:spcPts val="300"/>
+              </a:spcAft>
+              <a:buNone/>
+            </a:pPr>
+            <a:r>
+              <a:rPr lang="en-US" altLang="ko-KR" sz="1200" b="0" i="0" dirty="0">
+                <a:solidFill>
+                  <a:srgbClr val="C99323"/>
+                </a:solidFill>
+                <a:effectLst/>
+                <a:latin typeface="Lora" pitchFamily="2" charset="0"/>
+              </a:rPr>
+              <a:t>Chapter 2</a:t>
+            </a:r>
+          </a:p>
+          <a:p>
+            <a:pPr algn="l">
+              <a:buNone/>
+            </a:pPr>
+            <a:r>
+              <a:rPr lang="en-US" altLang="ko-KR" sz="1200" b="1" i="0" dirty="0">
+                <a:solidFill>
+                  <a:srgbClr val="000000"/>
+                </a:solidFill>
+                <a:effectLst/>
+                <a:latin typeface="Lora" pitchFamily="2" charset="0"/>
+              </a:rPr>
+              <a:t>The mathematical building blocks of neural networks</a:t>
+            </a:r>
+          </a:p>
+        </p:txBody>
+      </p:sp>
+      <p:sp>
+        <p:nvSpPr>
+          <p:cNvPr id="10" name="슬라이드 번호 개체 틀 3">
+            <a:extLst>
+              <a:ext uri="{FF2B5EF4-FFF2-40B4-BE49-F238E27FC236}">
+                <a16:creationId xmlns:a16="http://schemas.microsoft.com/office/drawing/2014/main" id="{873E10A1-07D2-6ED6-E0CE-F3ACA235E904}"/>
+              </a:ext>
+            </a:extLst>
+          </p:cNvPr>
+          <p:cNvSpPr>
+            <a:spLocks noGrp="1"/>
+          </p:cNvSpPr>
+          <p:nvPr>
+            <p:ph type="sldNum" sz="quarter" idx="12"/>
+          </p:nvPr>
+        </p:nvSpPr>
+        <p:spPr>
+          <a:xfrm>
+            <a:off x="11162487" y="299420"/>
+            <a:ext cx="753545" cy="365125"/>
+          </a:xfrm>
+        </p:spPr>
+        <p:txBody>
+          <a:bodyPr/>
+          <a:lstStyle/>
+          <a:p>
+            <a:fld id="{D57F1E4F-1CFF-5643-939E-217C01CDF565}" type="slidenum">
+              <a:rPr lang="en-US" sz="1400" b="1" smtClean="0">
+                <a:latin typeface="Times New Roman" panose="02020603050405020304" pitchFamily="18" charset="0"/>
+                <a:ea typeface="Verdana" panose="020B0604030504040204" pitchFamily="34" charset="0"/>
+                <a:cs typeface="Times New Roman" panose="02020603050405020304" pitchFamily="18" charset="0"/>
+              </a:rPr>
+              <a:pPr/>
+              <a:t>11</a:t>
+            </a:fld>
+            <a:endParaRPr lang="en-US" sz="1400" b="1" dirty="0">
+              <a:latin typeface="Times New Roman" panose="02020603050405020304" pitchFamily="18" charset="0"/>
+              <a:ea typeface="Verdana" panose="020B0604030504040204" pitchFamily="34" charset="0"/>
+              <a:cs typeface="Times New Roman" panose="02020603050405020304" pitchFamily="18" charset="0"/>
+            </a:endParaRPr>
+          </a:p>
+        </p:txBody>
+      </p:sp>
+    </p:spTree>
+    <p:extLst>
+      <p:ext uri="{BB962C8B-B14F-4D97-AF65-F5344CB8AC3E}">
+        <p14:creationId xmlns:p14="http://schemas.microsoft.com/office/powerpoint/2010/main" val="3134099583"/>
+      </p:ext>
+    </p:extLst>
+  </p:cSld>
+  <p:clrMapOvr>
+    <a:masterClrMapping/>
+  </p:clrMapOvr>
+</p:sld>
+</file>
+
+<file path=ppt/slides/slide12.xml><?xml version="1.0" encoding="utf-8"?>
+<p:sld xmlns:a="http://schemas.openxmlformats.org/drawingml/2006/main" xmlns:r="http://schemas.openxmlformats.org/officeDocument/2006/relationships" xmlns:p="http://schemas.openxmlformats.org/presentationml/2006/main">
+  <p:cSld>
+    <p:spTree>
+      <p:nvGrpSpPr>
+        <p:cNvPr id="1" name="">
+          <a:extLst>
+            <a:ext uri="{FF2B5EF4-FFF2-40B4-BE49-F238E27FC236}">
               <a16:creationId xmlns:a16="http://schemas.microsoft.com/office/drawing/2014/main" id="{80AD3B4A-47E1-228F-6AE1-E9A017BB380F}"/>
             </a:ext>
           </a:extLst>
@@ -4812,7 +5582,7 @@
                 <a:cs typeface="Times New Roman" panose="02020603050405020304" pitchFamily="18" charset="0"/>
               </a:rPr>
               <a:pPr/>
-              <a:t>10</a:t>
+              <a:t>12</a:t>
             </a:fld>
             <a:endParaRPr lang="en-US" sz="1400" b="1" dirty="0">
               <a:latin typeface="Times New Roman" panose="02020603050405020304" pitchFamily="18" charset="0"/>
@@ -4835,7 +5605,7 @@
 </p:sld>
 </file>
 
-<file path=ppt/slides/slide11.xml><?xml version="1.0" encoding="utf-8"?>
+<file path=ppt/slides/slide13.xml><?xml version="1.0" encoding="utf-8"?>
 <p:sld xmlns:a="http://schemas.openxmlformats.org/drawingml/2006/main" xmlns:r="http://schemas.openxmlformats.org/officeDocument/2006/relationships" xmlns:p="http://schemas.openxmlformats.org/presentationml/2006/main">
   <p:cSld>
     <p:spTree>
@@ -4887,7 +5657,7 @@
             <a:fld id="{D57F1E4F-1CFF-5643-939E-217C01CDF565}" type="slidenum">
               <a:rPr lang="en-US" smtClean="0"/>
               <a:pPr/>
-              <a:t>11</a:t>
+              <a:t>13</a:t>
             </a:fld>
             <a:endParaRPr lang="en-US" dirty="0"/>
           </a:p>
@@ -5280,7 +6050,7 @@
                 <a:cs typeface="Times New Roman" panose="02020603050405020304" pitchFamily="18" charset="0"/>
               </a:rPr>
               <a:pPr/>
-              <a:t>11</a:t>
+              <a:t>13</a:t>
             </a:fld>
             <a:endParaRPr lang="en-US" sz="1400" b="1" dirty="0">
               <a:latin typeface="Times New Roman" panose="02020603050405020304" pitchFamily="18" charset="0"/>
@@ -5303,7 +6073,7 @@
 </p:sld>
 </file>
 
-<file path=ppt/slides/slide12.xml><?xml version="1.0" encoding="utf-8"?>
+<file path=ppt/slides/slide14.xml><?xml version="1.0" encoding="utf-8"?>
 <p:sld xmlns:a="http://schemas.openxmlformats.org/drawingml/2006/main" xmlns:r="http://schemas.openxmlformats.org/officeDocument/2006/relationships" xmlns:p="http://schemas.openxmlformats.org/presentationml/2006/main">
   <p:cSld>
     <p:spTree>
@@ -5556,7 +6326,7 @@
                 <a:cs typeface="Times New Roman" panose="02020603050405020304" pitchFamily="18" charset="0"/>
               </a:rPr>
               <a:pPr/>
-              <a:t>12</a:t>
+              <a:t>14</a:t>
             </a:fld>
             <a:endParaRPr lang="en-US" sz="1400" b="1" dirty="0">
               <a:latin typeface="Times New Roman" panose="02020603050405020304" pitchFamily="18" charset="0"/>
@@ -5579,7 +6349,350 @@
 </p:sld>
 </file>
 
-<file path=ppt/slides/slide13.xml><?xml version="1.0" encoding="utf-8"?>
+<file path=ppt/slides/slide15.xml><?xml version="1.0" encoding="utf-8"?>
+<p:sld xmlns:a="http://schemas.openxmlformats.org/drawingml/2006/main" xmlns:r="http://schemas.openxmlformats.org/officeDocument/2006/relationships" xmlns:p="http://schemas.openxmlformats.org/presentationml/2006/main">
+  <p:cSld>
+    <p:spTree>
+      <p:nvGrpSpPr>
+        <p:cNvPr id="1" name="">
+          <a:extLst>
+            <a:ext uri="{FF2B5EF4-FFF2-40B4-BE49-F238E27FC236}">
+              <a16:creationId xmlns:a16="http://schemas.microsoft.com/office/drawing/2014/main" id="{0F794395-C5FE-2F19-B112-31D07CC7291D}"/>
+            </a:ext>
+          </a:extLst>
+        </p:cNvPr>
+        <p:cNvGrpSpPr/>
+        <p:nvPr/>
+      </p:nvGrpSpPr>
+      <p:grpSpPr>
+        <a:xfrm>
+          <a:off x="0" y="0"/>
+          <a:ext cx="0" cy="0"/>
+          <a:chOff x="0" y="0"/>
+          <a:chExt cx="0" cy="0"/>
+        </a:xfrm>
+      </p:grpSpPr>
+      <p:sp>
+        <p:nvSpPr>
+          <p:cNvPr id="2" name="직사각형 1">
+            <a:extLst>
+              <a:ext uri="{FF2B5EF4-FFF2-40B4-BE49-F238E27FC236}">
+                <a16:creationId xmlns:a16="http://schemas.microsoft.com/office/drawing/2014/main" id="{FD1D56BB-5CD2-24D8-D885-CCFFE2430A2B}"/>
+              </a:ext>
+            </a:extLst>
+          </p:cNvPr>
+          <p:cNvSpPr/>
+          <p:nvPr/>
+        </p:nvSpPr>
+        <p:spPr>
+          <a:xfrm>
+            <a:off x="475645" y="2800350"/>
+            <a:ext cx="7963505" cy="530474"/>
+          </a:xfrm>
+          <a:prstGeom prst="rect">
+            <a:avLst/>
+          </a:prstGeom>
+          <a:solidFill>
+            <a:schemeClr val="bg1">
+              <a:lumMod val="85000"/>
+            </a:schemeClr>
+          </a:solidFill>
+          <a:ln>
+            <a:noFill/>
+          </a:ln>
+        </p:spPr>
+        <p:style>
+          <a:lnRef idx="2">
+            <a:schemeClr val="accent1">
+              <a:shade val="15000"/>
+            </a:schemeClr>
+          </a:lnRef>
+          <a:fillRef idx="1">
+            <a:schemeClr val="accent1"/>
+          </a:fillRef>
+          <a:effectRef idx="0">
+            <a:schemeClr val="accent1"/>
+          </a:effectRef>
+          <a:fontRef idx="minor">
+            <a:schemeClr val="lt1"/>
+          </a:fontRef>
+        </p:style>
+        <p:txBody>
+          <a:bodyPr rtlCol="0" anchor="ctr"/>
+          <a:lstStyle/>
+          <a:p>
+            <a:pPr algn="ctr"/>
+            <a:endParaRPr lang="ko-KR" altLang="en-US"/>
+          </a:p>
+        </p:txBody>
+      </p:sp>
+      <p:sp>
+        <p:nvSpPr>
+          <p:cNvPr id="4" name="슬라이드 번호 개체 틀 3">
+            <a:extLst>
+              <a:ext uri="{FF2B5EF4-FFF2-40B4-BE49-F238E27FC236}">
+                <a16:creationId xmlns:a16="http://schemas.microsoft.com/office/drawing/2014/main" id="{3991A8CB-1DD6-E3AA-ABC5-31B03176ADF3}"/>
+              </a:ext>
+            </a:extLst>
+          </p:cNvPr>
+          <p:cNvSpPr>
+            <a:spLocks noGrp="1"/>
+          </p:cNvSpPr>
+          <p:nvPr>
+            <p:ph type="sldNum" sz="quarter" idx="12"/>
+          </p:nvPr>
+        </p:nvSpPr>
+        <p:spPr>
+          <a:xfrm>
+            <a:off x="10514011" y="6036261"/>
+            <a:ext cx="753545" cy="365125"/>
+          </a:xfrm>
+        </p:spPr>
+        <p:txBody>
+          <a:bodyPr/>
+          <a:lstStyle/>
+          <a:p>
+            <a:fld id="{D57F1E4F-1CFF-5643-939E-217C01CDF565}" type="slidenum">
+              <a:rPr lang="en-US" smtClean="0"/>
+              <a:pPr/>
+              <a:t>15</a:t>
+            </a:fld>
+            <a:endParaRPr lang="en-US" dirty="0"/>
+          </a:p>
+        </p:txBody>
+      </p:sp>
+      <p:sp>
+        <p:nvSpPr>
+          <p:cNvPr id="3" name="제목 1">
+            <a:extLst>
+              <a:ext uri="{FF2B5EF4-FFF2-40B4-BE49-F238E27FC236}">
+                <a16:creationId xmlns:a16="http://schemas.microsoft.com/office/drawing/2014/main" id="{18D7F24D-0888-3A4F-080B-13731C1A3C08}"/>
+              </a:ext>
+            </a:extLst>
+          </p:cNvPr>
+          <p:cNvSpPr txBox="1">
+            <a:spLocks/>
+          </p:cNvSpPr>
+          <p:nvPr/>
+        </p:nvSpPr>
+        <p:spPr>
+          <a:xfrm>
+            <a:off x="475645" y="481983"/>
+            <a:ext cx="10353762" cy="766439"/>
+          </a:xfrm>
+          <a:prstGeom prst="rect">
+            <a:avLst/>
+          </a:prstGeom>
+        </p:spPr>
+        <p:txBody>
+          <a:bodyPr vert="horz" lIns="91440" tIns="45720" rIns="91440" bIns="45720" rtlCol="0" anchor="ctr">
+            <a:normAutofit/>
+          </a:bodyPr>
+          <a:lstStyle>
+            <a:lvl1pPr algn="ctr" defTabSz="914400" rtl="0" eaLnBrk="1" latinLnBrk="1" hangingPunct="1">
+              <a:lnSpc>
+                <a:spcPct val="90000"/>
+              </a:lnSpc>
+              <a:spcBef>
+                <a:spcPct val="0"/>
+              </a:spcBef>
+              <a:buNone/>
+              <a:defRPr sz="3200" kern="1200" cap="all" baseline="0">
+                <a:solidFill>
+                  <a:schemeClr val="tx1"/>
+                </a:solidFill>
+                <a:effectLst/>
+                <a:latin typeface="Batang" panose="02030600000101010101" pitchFamily="18" charset="-127"/>
+                <a:ea typeface="Batang" panose="02030600000101010101" pitchFamily="18" charset="-127"/>
+                <a:cs typeface="+mj-cs"/>
+              </a:defRPr>
+            </a:lvl1pPr>
+          </a:lstStyle>
+          <a:p>
+            <a:pPr algn="l"/>
+            <a:r>
+              <a:rPr lang="en-US" altLang="ko-KR" sz="2800" cap="none" dirty="0">
+                <a:solidFill>
+                  <a:schemeClr val="bg2">
+                    <a:lumMod val="25000"/>
+                  </a:schemeClr>
+                </a:solidFill>
+                <a:latin typeface="D2Coding" panose="020B0609020101020101" pitchFamily="49" charset="-127"/>
+                <a:ea typeface="D2Coding" panose="020B0609020101020101" pitchFamily="49" charset="-127"/>
+                <a:cs typeface="Segoe UI Light" panose="020B0502040204020203" pitchFamily="34" charset="0"/>
+              </a:rPr>
+              <a:t>Goals</a:t>
+            </a:r>
+            <a:endParaRPr lang="ko-KR" altLang="en-US" sz="2800" cap="none" dirty="0">
+              <a:solidFill>
+                <a:schemeClr val="bg2">
+                  <a:lumMod val="25000"/>
+                </a:schemeClr>
+              </a:solidFill>
+              <a:latin typeface="D2Coding" panose="020B0609020101020101" pitchFamily="49" charset="-127"/>
+              <a:ea typeface="D2Coding" panose="020B0609020101020101" pitchFamily="49" charset="-127"/>
+              <a:cs typeface="Segoe UI Light" panose="020B0502040204020203" pitchFamily="34" charset="0"/>
+            </a:endParaRPr>
+          </a:p>
+        </p:txBody>
+      </p:sp>
+      <p:sp>
+        <p:nvSpPr>
+          <p:cNvPr id="5" name="TextBox 4">
+            <a:extLst>
+              <a:ext uri="{FF2B5EF4-FFF2-40B4-BE49-F238E27FC236}">
+                <a16:creationId xmlns:a16="http://schemas.microsoft.com/office/drawing/2014/main" id="{67F584A7-236A-AEFC-F955-9CE7B839CE0C}"/>
+              </a:ext>
+            </a:extLst>
+          </p:cNvPr>
+          <p:cNvSpPr txBox="1"/>
+          <p:nvPr/>
+        </p:nvSpPr>
+        <p:spPr>
+          <a:xfrm>
+            <a:off x="587055" y="1846268"/>
+            <a:ext cx="7394895" cy="4189993"/>
+          </a:xfrm>
+          <a:prstGeom prst="rect">
+            <a:avLst/>
+          </a:prstGeom>
+          <a:noFill/>
+        </p:spPr>
+        <p:txBody>
+          <a:bodyPr wrap="square">
+            <a:spAutoFit/>
+          </a:bodyPr>
+          <a:lstStyle/>
+          <a:p>
+            <a:pPr marL="800100" lvl="1" indent="-342900">
+              <a:lnSpc>
+                <a:spcPct val="150000"/>
+              </a:lnSpc>
+              <a:buFont typeface="Wingdings" panose="05000000000000000000" pitchFamily="2" charset="2"/>
+              <a:buChar char="v"/>
+            </a:pPr>
+            <a:r>
+              <a:rPr lang="en-US" altLang="ko-KR" sz="2000" dirty="0"/>
+              <a:t>Different kinds of timeseries tasks</a:t>
+            </a:r>
+          </a:p>
+          <a:p>
+            <a:pPr marL="800100" lvl="1" indent="-342900">
+              <a:lnSpc>
+                <a:spcPct val="150000"/>
+              </a:lnSpc>
+              <a:buFont typeface="Wingdings" panose="05000000000000000000" pitchFamily="2" charset="2"/>
+              <a:buChar char="v"/>
+            </a:pPr>
+            <a:r>
+              <a:rPr lang="en-US" altLang="ko-KR" sz="2000" dirty="0"/>
+              <a:t>Timeseries 3D tensor</a:t>
+            </a:r>
+          </a:p>
+          <a:p>
+            <a:pPr marL="800100" lvl="1" indent="-342900">
+              <a:lnSpc>
+                <a:spcPct val="150000"/>
+              </a:lnSpc>
+              <a:buFont typeface="Wingdings" panose="05000000000000000000" pitchFamily="2" charset="2"/>
+              <a:buChar char="v"/>
+            </a:pPr>
+            <a:r>
+              <a:rPr lang="en-US" altLang="ko-KR" sz="2000" dirty="0"/>
+              <a:t>A temperature forecasting example</a:t>
+            </a:r>
+          </a:p>
+          <a:p>
+            <a:pPr marL="1257300" lvl="2" indent="-342900">
+              <a:lnSpc>
+                <a:spcPct val="150000"/>
+              </a:lnSpc>
+              <a:buFont typeface="Wingdings" panose="05000000000000000000" pitchFamily="2" charset="2"/>
+              <a:buChar char="v"/>
+            </a:pPr>
+            <a:r>
+              <a:rPr lang="en-US" altLang="ko-KR" sz="2000" dirty="0"/>
+              <a:t>naïve approach</a:t>
+            </a:r>
+          </a:p>
+          <a:p>
+            <a:pPr marL="1257300" lvl="2" indent="-342900">
+              <a:lnSpc>
+                <a:spcPct val="150000"/>
+              </a:lnSpc>
+              <a:buFont typeface="Wingdings" panose="05000000000000000000" pitchFamily="2" charset="2"/>
+              <a:buChar char="v"/>
+            </a:pPr>
+            <a:r>
+              <a:rPr lang="en-US" altLang="ko-KR" sz="2000" dirty="0"/>
+              <a:t>Fully connected neural network</a:t>
+            </a:r>
+          </a:p>
+          <a:p>
+            <a:pPr marL="1257300" lvl="2" indent="-342900">
+              <a:lnSpc>
+                <a:spcPct val="150000"/>
+              </a:lnSpc>
+              <a:buFont typeface="Wingdings" panose="05000000000000000000" pitchFamily="2" charset="2"/>
+              <a:buChar char="v"/>
+            </a:pPr>
+            <a:r>
+              <a:rPr lang="en-US" altLang="ko-KR" sz="2000" dirty="0"/>
+              <a:t>1D Convnet</a:t>
+            </a:r>
+          </a:p>
+          <a:p>
+            <a:pPr marL="800100" lvl="1" indent="-342900">
+              <a:lnSpc>
+                <a:spcPct val="150000"/>
+              </a:lnSpc>
+              <a:buFont typeface="Wingdings" panose="05000000000000000000" pitchFamily="2" charset="2"/>
+              <a:buChar char="v"/>
+            </a:pPr>
+            <a:r>
+              <a:rPr lang="en-US" altLang="ko-KR" sz="2000" dirty="0"/>
+              <a:t>Understanding recurrent neural networks (RNNs)</a:t>
+            </a:r>
+          </a:p>
+          <a:p>
+            <a:pPr marL="800100" lvl="1" indent="-342900">
+              <a:lnSpc>
+                <a:spcPct val="150000"/>
+              </a:lnSpc>
+              <a:buFont typeface="Wingdings" panose="05000000000000000000" pitchFamily="2" charset="2"/>
+              <a:buChar char="v"/>
+            </a:pPr>
+            <a:r>
+              <a:rPr lang="en-US" altLang="ko-KR" sz="2000" dirty="0"/>
+              <a:t>Applying RNNs to a temperature forecasting example</a:t>
+            </a:r>
+          </a:p>
+          <a:p>
+            <a:pPr marL="800100" lvl="1" indent="-342900">
+              <a:lnSpc>
+                <a:spcPct val="150000"/>
+              </a:lnSpc>
+              <a:buFont typeface="Wingdings" panose="05000000000000000000" pitchFamily="2" charset="2"/>
+              <a:buChar char="v"/>
+            </a:pPr>
+            <a:endParaRPr lang="en-US" altLang="ko-KR" sz="2000" dirty="0"/>
+          </a:p>
+        </p:txBody>
+      </p:sp>
+    </p:spTree>
+    <p:extLst>
+      <p:ext uri="{BB962C8B-B14F-4D97-AF65-F5344CB8AC3E}">
+        <p14:creationId xmlns:p14="http://schemas.microsoft.com/office/powerpoint/2010/main" val="279962538"/>
+      </p:ext>
+    </p:extLst>
+  </p:cSld>
+  <p:clrMapOvr>
+    <a:masterClrMapping/>
+  </p:clrMapOvr>
+</p:sld>
+</file>
+
+<file path=ppt/slides/slide16.xml><?xml version="1.0" encoding="utf-8"?>
 <p:sld xmlns:a="http://schemas.openxmlformats.org/drawingml/2006/main" xmlns:r="http://schemas.openxmlformats.org/officeDocument/2006/relationships" xmlns:p="http://schemas.openxmlformats.org/presentationml/2006/main">
   <p:cSld>
     <p:spTree>
@@ -5736,7 +6849,7 @@
                 <a:cs typeface="Times New Roman" panose="02020603050405020304" pitchFamily="18" charset="0"/>
               </a:rPr>
               <a:pPr/>
-              <a:t>13</a:t>
+              <a:t>16</a:t>
             </a:fld>
             <a:endParaRPr lang="en-US" sz="1400" b="1" dirty="0">
               <a:latin typeface="Times New Roman" panose="02020603050405020304" pitchFamily="18" charset="0"/>
@@ -6888,7 +8001,7 @@
 </p:sld>
 </file>
 
-<file path=ppt/slides/slide14.xml><?xml version="1.0" encoding="utf-8"?>
+<file path=ppt/slides/slide17.xml><?xml version="1.0" encoding="utf-8"?>
 <p:sld xmlns:a="http://schemas.openxmlformats.org/drawingml/2006/main" xmlns:r="http://schemas.openxmlformats.org/officeDocument/2006/relationships" xmlns:p="http://schemas.openxmlformats.org/presentationml/2006/main">
   <p:cSld>
     <p:spTree>
@@ -7045,7 +8158,7 @@
                 <a:cs typeface="Times New Roman" panose="02020603050405020304" pitchFamily="18" charset="0"/>
               </a:rPr>
               <a:pPr/>
-              <a:t>14</a:t>
+              <a:t>17</a:t>
             </a:fld>
             <a:endParaRPr lang="en-US" sz="1400" b="1" dirty="0">
               <a:latin typeface="Times New Roman" panose="02020603050405020304" pitchFamily="18" charset="0"/>
@@ -8488,7 +9601,7 @@
 </p:sld>
 </file>
 
-<file path=ppt/slides/slide15.xml><?xml version="1.0" encoding="utf-8"?>
+<file path=ppt/slides/slide18.xml><?xml version="1.0" encoding="utf-8"?>
 <p:sld xmlns:a="http://schemas.openxmlformats.org/drawingml/2006/main" xmlns:r="http://schemas.openxmlformats.org/officeDocument/2006/relationships" xmlns:p="http://schemas.openxmlformats.org/presentationml/2006/main">
   <p:cSld>
     <p:spTree>
@@ -8622,7 +9735,7 @@
                 <a:cs typeface="Times New Roman" panose="02020603050405020304" pitchFamily="18" charset="0"/>
               </a:rPr>
               <a:pPr/>
-              <a:t>15</a:t>
+              <a:t>18</a:t>
             </a:fld>
             <a:endParaRPr lang="en-US" sz="1400" b="1" dirty="0">
               <a:latin typeface="Times New Roman" panose="02020603050405020304" pitchFamily="18" charset="0"/>
@@ -9567,7 +10680,7 @@
 </p:sld>
 </file>
 
-<file path=ppt/slides/slide16.xml><?xml version="1.0" encoding="utf-8"?>
+<file path=ppt/slides/slide19.xml><?xml version="1.0" encoding="utf-8"?>
 <p:sld xmlns:a="http://schemas.openxmlformats.org/drawingml/2006/main" xmlns:r="http://schemas.openxmlformats.org/officeDocument/2006/relationships" xmlns:p="http://schemas.openxmlformats.org/presentationml/2006/main">
   <p:cSld>
     <p:spTree>
@@ -9698,7 +10811,7 @@
                 <a:cs typeface="Times New Roman" panose="02020603050405020304" pitchFamily="18" charset="0"/>
               </a:rPr>
               <a:pPr/>
-              <a:t>16</a:t>
+              <a:t>19</a:t>
             </a:fld>
             <a:endParaRPr lang="en-US" sz="1400" b="1" dirty="0">
               <a:latin typeface="Times New Roman" panose="02020603050405020304" pitchFamily="18" charset="0"/>
@@ -9723,7 +10836,7 @@
         <p:spPr>
           <a:xfrm>
             <a:off x="559528" y="1196976"/>
-            <a:ext cx="10986284" cy="423834"/>
+            <a:ext cx="11356504" cy="2090637"/>
           </a:xfrm>
           <a:prstGeom prst="rect">
             <a:avLst/>
@@ -9776,9 +10889,285 @@
                 <a:latin typeface="D2Coding" panose="020B0609020101020101" pitchFamily="49" charset="-127"/>
                 <a:ea typeface="D2Coding" panose="020B0609020101020101" pitchFamily="49" charset="-127"/>
               </a:rPr>
-              <a:t>데이터에 특히 </a:t>
+              <a:t>데이터에 적합</a:t>
             </a:r>
             <a:endParaRPr lang="en-US" altLang="ko-KR" sz="1600" dirty="0">
+              <a:latin typeface="D2Coding" panose="020B0609020101020101" pitchFamily="49" charset="-127"/>
+              <a:ea typeface="D2Coding" panose="020B0609020101020101" pitchFamily="49" charset="-127"/>
+            </a:endParaRPr>
+          </a:p>
+          <a:p>
+            <a:pPr marL="285750" indent="-285750">
+              <a:lnSpc>
+                <a:spcPct val="150000"/>
+              </a:lnSpc>
+              <a:buFont typeface="Wingdings" panose="05000000000000000000" pitchFamily="2" charset="2"/>
+              <a:buChar char="§"/>
+            </a:pPr>
+            <a:r>
+              <a:rPr lang="ko-KR" altLang="en-US" sz="1600" dirty="0">
+                <a:latin typeface="D2Coding" panose="020B0609020101020101" pitchFamily="49" charset="-127"/>
+                <a:ea typeface="D2Coding" panose="020B0609020101020101" pitchFamily="49" charset="-127"/>
+              </a:rPr>
+              <a:t>날씨데이터는 평행이동 불변성</a:t>
+            </a:r>
+            <a:r>
+              <a:rPr lang="en-US" altLang="ko-KR" sz="1600" dirty="0">
+                <a:latin typeface="D2Coding" panose="020B0609020101020101" pitchFamily="49" charset="-127"/>
+                <a:ea typeface="D2Coding" panose="020B0609020101020101" pitchFamily="49" charset="-127"/>
+              </a:rPr>
+              <a:t>(Translation Invariance)</a:t>
+            </a:r>
+            <a:r>
+              <a:rPr lang="ko-KR" altLang="en-US" sz="1600" dirty="0">
+                <a:latin typeface="D2Coding" panose="020B0609020101020101" pitchFamily="49" charset="-127"/>
+                <a:ea typeface="D2Coding" panose="020B0609020101020101" pitchFamily="49" charset="-127"/>
+              </a:rPr>
+              <a:t>에 적합하지 않음</a:t>
+            </a:r>
+            <a:endParaRPr lang="en-US" altLang="ko-KR" sz="1600" dirty="0">
+              <a:latin typeface="D2Coding" panose="020B0609020101020101" pitchFamily="49" charset="-127"/>
+              <a:ea typeface="D2Coding" panose="020B0609020101020101" pitchFamily="49" charset="-127"/>
+            </a:endParaRPr>
+          </a:p>
+          <a:p>
+            <a:pPr marL="742950" lvl="1" indent="-285750">
+              <a:lnSpc>
+                <a:spcPct val="150000"/>
+              </a:lnSpc>
+              <a:buFont typeface="Wingdings" panose="05000000000000000000" pitchFamily="2" charset="2"/>
+              <a:buChar char="§"/>
+            </a:pPr>
+            <a:r>
+              <a:rPr lang="ko-KR" altLang="en-US" sz="1400" dirty="0">
+                <a:latin typeface="D2Coding" panose="020B0609020101020101" pitchFamily="49" charset="-127"/>
+                <a:ea typeface="D2Coding" panose="020B0609020101020101" pitchFamily="49" charset="-127"/>
+              </a:rPr>
+              <a:t>어느 위치</a:t>
+            </a:r>
+            <a:r>
+              <a:rPr lang="en-US" altLang="ko-KR" sz="1400" dirty="0">
+                <a:latin typeface="D2Coding" panose="020B0609020101020101" pitchFamily="49" charset="-127"/>
+                <a:ea typeface="D2Coding" panose="020B0609020101020101" pitchFamily="49" charset="-127"/>
+              </a:rPr>
+              <a:t>(</a:t>
+            </a:r>
+            <a:r>
+              <a:rPr lang="ko-KR" altLang="en-US" sz="1400" dirty="0">
+                <a:latin typeface="D2Coding" panose="020B0609020101020101" pitchFamily="49" charset="-127"/>
+                <a:ea typeface="D2Coding" panose="020B0609020101020101" pitchFamily="49" charset="-127"/>
+              </a:rPr>
+              <a:t>공간</a:t>
+            </a:r>
+            <a:r>
+              <a:rPr lang="en-US" altLang="ko-KR" sz="1400" dirty="0">
+                <a:latin typeface="D2Coding" panose="020B0609020101020101" pitchFamily="49" charset="-127"/>
+                <a:ea typeface="D2Coding" panose="020B0609020101020101" pitchFamily="49" charset="-127"/>
+              </a:rPr>
+              <a:t>)</a:t>
+            </a:r>
+            <a:r>
+              <a:rPr lang="ko-KR" altLang="en-US" sz="1400" dirty="0">
+                <a:latin typeface="D2Coding" panose="020B0609020101020101" pitchFamily="49" charset="-127"/>
+                <a:ea typeface="D2Coding" panose="020B0609020101020101" pitchFamily="49" charset="-127"/>
+              </a:rPr>
+              <a:t>나 어느 시점</a:t>
+            </a:r>
+            <a:r>
+              <a:rPr lang="en-US" altLang="ko-KR" sz="1400" dirty="0">
+                <a:latin typeface="D2Coding" panose="020B0609020101020101" pitchFamily="49" charset="-127"/>
+                <a:ea typeface="D2Coding" panose="020B0609020101020101" pitchFamily="49" charset="-127"/>
+              </a:rPr>
+              <a:t>(</a:t>
+            </a:r>
+            <a:r>
+              <a:rPr lang="ko-KR" altLang="en-US" sz="1400" dirty="0">
+                <a:latin typeface="D2Coding" panose="020B0609020101020101" pitchFamily="49" charset="-127"/>
+                <a:ea typeface="D2Coding" panose="020B0609020101020101" pitchFamily="49" charset="-127"/>
+              </a:rPr>
+              <a:t>시간</a:t>
+            </a:r>
+            <a:r>
+              <a:rPr lang="en-US" altLang="ko-KR" sz="1400" dirty="0">
+                <a:latin typeface="D2Coding" panose="020B0609020101020101" pitchFamily="49" charset="-127"/>
+                <a:ea typeface="D2Coding" panose="020B0609020101020101" pitchFamily="49" charset="-127"/>
+              </a:rPr>
+              <a:t>)</a:t>
+            </a:r>
+            <a:r>
+              <a:rPr lang="ko-KR" altLang="en-US" sz="1400" dirty="0">
+                <a:latin typeface="D2Coding" panose="020B0609020101020101" pitchFamily="49" charset="-127"/>
+                <a:ea typeface="D2Coding" panose="020B0609020101020101" pitchFamily="49" charset="-127"/>
+              </a:rPr>
+              <a:t>에서 발생하더라도 그 본질적인 의미나 성질이 변하지 않고 일정하게 유지되는 성질</a:t>
+            </a:r>
+            <a:r>
+              <a:rPr lang="en-US" altLang="ko-KR" sz="1400" dirty="0">
+                <a:latin typeface="D2Coding" panose="020B0609020101020101" pitchFamily="49" charset="-127"/>
+                <a:ea typeface="D2Coding" panose="020B0609020101020101" pitchFamily="49" charset="-127"/>
+              </a:rPr>
+              <a:t>(</a:t>
+            </a:r>
+            <a:r>
+              <a:rPr lang="ko-KR" altLang="en-US" sz="1400" dirty="0">
+                <a:latin typeface="D2Coding" panose="020B0609020101020101" pitchFamily="49" charset="-127"/>
+                <a:ea typeface="D2Coding" panose="020B0609020101020101" pitchFamily="49" charset="-127"/>
+              </a:rPr>
+              <a:t>이미지에는 위치에 따라 불변하지만 기후 데이터에는 적합하지 않음</a:t>
+            </a:r>
+            <a:r>
+              <a:rPr lang="en-US" altLang="ko-KR" sz="1400" dirty="0">
+                <a:latin typeface="D2Coding" panose="020B0609020101020101" pitchFamily="49" charset="-127"/>
+                <a:ea typeface="D2Coding" panose="020B0609020101020101" pitchFamily="49" charset="-127"/>
+              </a:rPr>
+              <a:t>)</a:t>
+            </a:r>
+            <a:endParaRPr lang="ko-KR" altLang="en-US" sz="1400" dirty="0">
+              <a:latin typeface="D2Coding" panose="020B0609020101020101" pitchFamily="49" charset="-127"/>
+              <a:ea typeface="D2Coding" panose="020B0609020101020101" pitchFamily="49" charset="-127"/>
+            </a:endParaRPr>
+          </a:p>
+          <a:p>
+            <a:pPr marL="742950" lvl="1" indent="-285750">
+              <a:lnSpc>
+                <a:spcPct val="150000"/>
+              </a:lnSpc>
+              <a:buFont typeface="Wingdings" panose="05000000000000000000" pitchFamily="2" charset="2"/>
+              <a:buChar char="§"/>
+            </a:pPr>
+            <a:r>
+              <a:rPr lang="ko-KR" altLang="en-US" sz="1400" dirty="0">
+                <a:latin typeface="D2Coding" panose="020B0609020101020101" pitchFamily="49" charset="-127"/>
+                <a:ea typeface="D2Coding" panose="020B0609020101020101" pitchFamily="49" charset="-127"/>
+              </a:rPr>
+              <a:t>강아지 이미지가 왼쪽</a:t>
+            </a:r>
+            <a:r>
+              <a:rPr lang="en-US" altLang="ko-KR" sz="1400" dirty="0">
+                <a:latin typeface="D2Coding" panose="020B0609020101020101" pitchFamily="49" charset="-127"/>
+                <a:ea typeface="D2Coding" panose="020B0609020101020101" pitchFamily="49" charset="-127"/>
+              </a:rPr>
+              <a:t>, </a:t>
+            </a:r>
+            <a:r>
+              <a:rPr lang="ko-KR" altLang="en-US" sz="1400" dirty="0">
+                <a:latin typeface="D2Coding" panose="020B0609020101020101" pitchFamily="49" charset="-127"/>
+                <a:ea typeface="D2Coding" panose="020B0609020101020101" pitchFamily="49" charset="-127"/>
+              </a:rPr>
+              <a:t>오른쪽</a:t>
+            </a:r>
+            <a:r>
+              <a:rPr lang="en-US" altLang="ko-KR" sz="1400" dirty="0">
+                <a:latin typeface="D2Coding" panose="020B0609020101020101" pitchFamily="49" charset="-127"/>
+                <a:ea typeface="D2Coding" panose="020B0609020101020101" pitchFamily="49" charset="-127"/>
+              </a:rPr>
+              <a:t>,</a:t>
+            </a:r>
+            <a:r>
+              <a:rPr lang="ko-KR" altLang="en-US" sz="1400" dirty="0">
+                <a:latin typeface="D2Coding" panose="020B0609020101020101" pitchFamily="49" charset="-127"/>
+                <a:ea typeface="D2Coding" panose="020B0609020101020101" pitchFamily="49" charset="-127"/>
+              </a:rPr>
+              <a:t> 아래에 있든 똑같이 </a:t>
+            </a:r>
+            <a:r>
+              <a:rPr lang="en-US" altLang="ko-KR" sz="1400" dirty="0">
+                <a:latin typeface="D2Coding" panose="020B0609020101020101" pitchFamily="49" charset="-127"/>
+                <a:ea typeface="D2Coding" panose="020B0609020101020101" pitchFamily="49" charset="-127"/>
+              </a:rPr>
+              <a:t>'</a:t>
+            </a:r>
+            <a:r>
+              <a:rPr lang="ko-KR" altLang="en-US" sz="1400" dirty="0">
+                <a:latin typeface="D2Coding" panose="020B0609020101020101" pitchFamily="49" charset="-127"/>
+                <a:ea typeface="D2Coding" panose="020B0609020101020101" pitchFamily="49" charset="-127"/>
+              </a:rPr>
+              <a:t>강아지</a:t>
+            </a:r>
+            <a:r>
+              <a:rPr lang="en-US" altLang="ko-KR" sz="1400" dirty="0">
+                <a:latin typeface="D2Coding" panose="020B0609020101020101" pitchFamily="49" charset="-127"/>
+                <a:ea typeface="D2Coding" panose="020B0609020101020101" pitchFamily="49" charset="-127"/>
+              </a:rPr>
+              <a:t>'</a:t>
+            </a:r>
+            <a:r>
+              <a:rPr lang="ko-KR" altLang="en-US" sz="1400" dirty="0">
+                <a:latin typeface="D2Coding" panose="020B0609020101020101" pitchFamily="49" charset="-127"/>
+                <a:ea typeface="D2Coding" panose="020B0609020101020101" pitchFamily="49" charset="-127"/>
+              </a:rPr>
+              <a:t>로 인식하여 데이터의 본질은 변하지 않음</a:t>
+            </a:r>
+            <a:endParaRPr lang="en-US" altLang="ko-KR" sz="1400" dirty="0">
+              <a:latin typeface="D2Coding" panose="020B0609020101020101" pitchFamily="49" charset="-127"/>
+              <a:ea typeface="D2Coding" panose="020B0609020101020101" pitchFamily="49" charset="-127"/>
+            </a:endParaRPr>
+          </a:p>
+          <a:p>
+            <a:pPr marL="742950" lvl="1" indent="-285750">
+              <a:lnSpc>
+                <a:spcPct val="150000"/>
+              </a:lnSpc>
+              <a:buFont typeface="Wingdings" panose="05000000000000000000" pitchFamily="2" charset="2"/>
+              <a:buChar char="§"/>
+            </a:pPr>
+            <a:r>
+              <a:rPr lang="en-US" altLang="ko-KR" sz="1400" dirty="0">
+                <a:latin typeface="D2Coding" panose="020B0609020101020101" pitchFamily="49" charset="-127"/>
+                <a:ea typeface="D2Coding" panose="020B0609020101020101" pitchFamily="49" charset="-127"/>
+              </a:rPr>
+              <a:t>"</a:t>
+            </a:r>
+            <a:r>
+              <a:rPr lang="ko-KR" altLang="en-US" sz="1400" dirty="0">
+                <a:latin typeface="D2Coding" panose="020B0609020101020101" pitchFamily="49" charset="-127"/>
+                <a:ea typeface="D2Coding" panose="020B0609020101020101" pitchFamily="49" charset="-127"/>
+              </a:rPr>
+              <a:t>사과가 맛있다</a:t>
+            </a:r>
+            <a:r>
+              <a:rPr lang="en-US" altLang="ko-KR" sz="1400" dirty="0">
+                <a:latin typeface="D2Coding" panose="020B0609020101020101" pitchFamily="49" charset="-127"/>
+                <a:ea typeface="D2Coding" panose="020B0609020101020101" pitchFamily="49" charset="-127"/>
+              </a:rPr>
+              <a:t>"</a:t>
+            </a:r>
+            <a:r>
+              <a:rPr lang="ko-KR" altLang="en-US" sz="1400" dirty="0">
+                <a:latin typeface="D2Coding" panose="020B0609020101020101" pitchFamily="49" charset="-127"/>
+                <a:ea typeface="D2Coding" panose="020B0609020101020101" pitchFamily="49" charset="-127"/>
+              </a:rPr>
+              <a:t>라는 표현이 글의 맨 앞에 나오든 맨 뒤에 나오든 </a:t>
+            </a:r>
+            <a:r>
+              <a:rPr lang="en-US" altLang="ko-KR" sz="1400" dirty="0">
+                <a:latin typeface="D2Coding" panose="020B0609020101020101" pitchFamily="49" charset="-127"/>
+                <a:ea typeface="D2Coding" panose="020B0609020101020101" pitchFamily="49" charset="-127"/>
+              </a:rPr>
+              <a:t>"</a:t>
+            </a:r>
+            <a:r>
+              <a:rPr lang="ko-KR" altLang="en-US" sz="1400" dirty="0">
+                <a:latin typeface="D2Coding" panose="020B0609020101020101" pitchFamily="49" charset="-127"/>
+                <a:ea typeface="D2Coding" panose="020B0609020101020101" pitchFamily="49" charset="-127"/>
+              </a:rPr>
+              <a:t>사과가 맛있다</a:t>
+            </a:r>
+            <a:r>
+              <a:rPr lang="en-US" altLang="ko-KR" sz="1400" dirty="0">
+                <a:latin typeface="D2Coding" panose="020B0609020101020101" pitchFamily="49" charset="-127"/>
+                <a:ea typeface="D2Coding" panose="020B0609020101020101" pitchFamily="49" charset="-127"/>
+              </a:rPr>
+              <a:t>"</a:t>
+            </a:r>
+            <a:r>
+              <a:rPr lang="ko-KR" altLang="en-US" sz="1400" dirty="0">
+                <a:latin typeface="D2Coding" panose="020B0609020101020101" pitchFamily="49" charset="-127"/>
+                <a:ea typeface="D2Coding" panose="020B0609020101020101" pitchFamily="49" charset="-127"/>
+              </a:rPr>
+              <a:t>라는 긍정적인 의미 자체는 변하지 않음</a:t>
+            </a:r>
+            <a:endParaRPr lang="en-US" altLang="ko-KR" sz="1400" dirty="0">
               <a:latin typeface="D2Coding" panose="020B0609020101020101" pitchFamily="49" charset="-127"/>
               <a:ea typeface="D2Coding" panose="020B0609020101020101" pitchFamily="49" charset="-127"/>
             </a:endParaRPr>
@@ -9801,7 +11190,7 @@
         </p:nvSpPr>
         <p:spPr bwMode="auto">
           <a:xfrm>
-            <a:off x="5943600" y="3276600"/>
+            <a:off x="6591300" y="4870037"/>
             <a:ext cx="304800" cy="304800"/>
           </a:xfrm>
           <a:prstGeom prst="rect">
@@ -9852,8 +11241,8 @@
         </p:blipFill>
         <p:spPr>
           <a:xfrm>
-            <a:off x="2078436" y="2426883"/>
-            <a:ext cx="7148179" cy="2004234"/>
+            <a:off x="668736" y="3935931"/>
+            <a:ext cx="5246289" cy="1470975"/>
           </a:xfrm>
           <a:prstGeom prst="rect">
             <a:avLst/>
@@ -9874,7 +11263,7 @@
         </p:nvSpPr>
         <p:spPr>
           <a:xfrm>
-            <a:off x="2009775" y="4629150"/>
+            <a:off x="588103" y="5686209"/>
             <a:ext cx="5480988" cy="307777"/>
           </a:xfrm>
           <a:prstGeom prst="rect">
@@ -9913,10 +11302,10 @@
       </p:sp>
       <p:sp>
         <p:nvSpPr>
-          <p:cNvPr id="14" name="TextBox 13">
+          <p:cNvPr id="10" name="TextBox 9">
             <a:extLst>
               <a:ext uri="{FF2B5EF4-FFF2-40B4-BE49-F238E27FC236}">
-                <a16:creationId xmlns:a16="http://schemas.microsoft.com/office/drawing/2014/main" id="{6C14210D-7D59-9294-DCCB-1A1C423DA97B}"/>
+                <a16:creationId xmlns:a16="http://schemas.microsoft.com/office/drawing/2014/main" id="{7C9C16B3-9B9B-5ECD-140B-47C71021C5B6}"/>
               </a:ext>
             </a:extLst>
           </p:cNvPr>
@@ -9925,13 +11314,15 @@
         </p:nvSpPr>
         <p:spPr>
           <a:xfrm>
-            <a:off x="2078436" y="5134960"/>
-            <a:ext cx="6096000" cy="369332"/>
+            <a:off x="6266355" y="3925476"/>
+            <a:ext cx="5480988" cy="2123658"/>
           </a:xfrm>
           <a:prstGeom prst="rect">
             <a:avLst/>
           </a:prstGeom>
-          <a:noFill/>
+          <a:solidFill>
+            <a:schemeClr val="tx1"/>
+          </a:solidFill>
         </p:spPr>
         <p:txBody>
           <a:bodyPr wrap="square">
@@ -9939,31 +11330,512 @@
           </a:bodyPr>
           <a:lstStyle/>
           <a:p>
-            <a:r>
-              <a:rPr lang="en-US" altLang="ko-KR" sz="1800" dirty="0">
+            <a:pPr marL="171450" indent="-171450">
+              <a:buFont typeface="Wingdings" panose="05000000000000000000" pitchFamily="2" charset="2"/>
+              <a:buChar char="§"/>
+            </a:pPr>
+            <a:r>
+              <a:rPr lang="ko-KR" altLang="en-US" sz="1200" dirty="0">
+                <a:solidFill>
+                  <a:schemeClr val="bg1"/>
+                </a:solidFill>
+                <a:latin typeface="D2Coding" panose="020B0609020101020101" pitchFamily="49" charset="-127"/>
+                <a:ea typeface="D2Coding" panose="020B0609020101020101" pitchFamily="49" charset="-127"/>
+              </a:rPr>
+              <a:t>똑같은 </a:t>
+            </a:r>
+            <a:r>
+              <a:rPr lang="en-US" altLang="ko-KR" sz="1200" dirty="0">
+                <a:solidFill>
+                  <a:schemeClr val="bg1"/>
+                </a:solidFill>
+                <a:latin typeface="D2Coding" panose="020B0609020101020101" pitchFamily="49" charset="-127"/>
+                <a:ea typeface="D2Coding" panose="020B0609020101020101" pitchFamily="49" charset="-127"/>
+              </a:rPr>
+              <a:t>'1</a:t>
+            </a:r>
+            <a:r>
+              <a:rPr lang="ko-KR" altLang="en-US" sz="1200" dirty="0">
+                <a:solidFill>
+                  <a:schemeClr val="bg1"/>
+                </a:solidFill>
+                <a:latin typeface="D2Coding" panose="020B0609020101020101" pitchFamily="49" charset="-127"/>
+                <a:ea typeface="D2Coding" panose="020B0609020101020101" pitchFamily="49" charset="-127"/>
+              </a:rPr>
+              <a:t>시간 동안 </a:t>
+            </a:r>
+            <a:r>
+              <a:rPr lang="en-US" altLang="ko-KR" sz="1200" dirty="0">
+                <a:solidFill>
+                  <a:schemeClr val="bg1"/>
+                </a:solidFill>
+                <a:latin typeface="D2Coding" panose="020B0609020101020101" pitchFamily="49" charset="-127"/>
+                <a:ea typeface="D2Coding" panose="020B0609020101020101" pitchFamily="49" charset="-127"/>
+              </a:rPr>
+              <a:t>5</a:t>
+            </a:r>
+            <a:r>
+              <a:rPr lang="ko-KR" altLang="en-US" sz="1200" dirty="0">
+                <a:solidFill>
+                  <a:schemeClr val="bg1"/>
+                </a:solidFill>
+                <a:latin typeface="D2Coding" panose="020B0609020101020101" pitchFamily="49" charset="-127"/>
+                <a:ea typeface="D2Coding" panose="020B0609020101020101" pitchFamily="49" charset="-127"/>
+              </a:rPr>
+              <a:t>도 상승</a:t>
+            </a:r>
+            <a:r>
+              <a:rPr lang="en-US" altLang="ko-KR" sz="1200" dirty="0">
+                <a:solidFill>
+                  <a:schemeClr val="bg1"/>
+                </a:solidFill>
+                <a:latin typeface="D2Coding" panose="020B0609020101020101" pitchFamily="49" charset="-127"/>
+                <a:ea typeface="D2Coding" panose="020B0609020101020101" pitchFamily="49" charset="-127"/>
+              </a:rPr>
+              <a:t>'</a:t>
+            </a:r>
+            <a:r>
+              <a:rPr lang="ko-KR" altLang="en-US" sz="1200" dirty="0">
+                <a:solidFill>
+                  <a:schemeClr val="bg1"/>
+                </a:solidFill>
+                <a:latin typeface="D2Coding" panose="020B0609020101020101" pitchFamily="49" charset="-127"/>
+                <a:ea typeface="D2Coding" panose="020B0609020101020101" pitchFamily="49" charset="-127"/>
+              </a:rPr>
+              <a:t>이라는 데이터 패턴이지만</a:t>
+            </a:r>
+            <a:r>
+              <a:rPr lang="en-US" altLang="ko-KR" sz="1200" dirty="0">
+                <a:solidFill>
+                  <a:schemeClr val="bg1"/>
+                </a:solidFill>
+                <a:latin typeface="D2Coding" panose="020B0609020101020101" pitchFamily="49" charset="-127"/>
+                <a:ea typeface="D2Coding" panose="020B0609020101020101" pitchFamily="49" charset="-127"/>
+              </a:rPr>
+              <a:t>, </a:t>
+            </a:r>
+            <a:r>
+              <a:rPr lang="en-US" altLang="ko-KR" sz="1200" b="1" dirty="0">
+                <a:solidFill>
+                  <a:schemeClr val="bg1"/>
+                </a:solidFill>
+                <a:latin typeface="D2Coding" panose="020B0609020101020101" pitchFamily="49" charset="-127"/>
+                <a:ea typeface="D2Coding" panose="020B0609020101020101" pitchFamily="49" charset="-127"/>
+              </a:rPr>
+              <a:t>'</a:t>
+            </a:r>
+            <a:r>
+              <a:rPr lang="ko-KR" altLang="en-US" sz="1200" b="1" dirty="0">
+                <a:solidFill>
+                  <a:schemeClr val="bg1"/>
+                </a:solidFill>
+                <a:latin typeface="D2Coding" panose="020B0609020101020101" pitchFamily="49" charset="-127"/>
+                <a:ea typeface="D2Coding" panose="020B0609020101020101" pitchFamily="49" charset="-127"/>
+              </a:rPr>
+              <a:t>언제</a:t>
+            </a:r>
+            <a:r>
+              <a:rPr lang="en-US" altLang="ko-KR" sz="1200" b="1" dirty="0">
+                <a:solidFill>
+                  <a:schemeClr val="bg1"/>
+                </a:solidFill>
                 <a:latin typeface="D2Coding" panose="020B0609020101020101" pitchFamily="49" charset="-127"/>
                 <a:ea typeface="D2Coding" panose="020B0609020101020101" pitchFamily="49" charset="-127"/>
               </a:rPr>
               <a:t>(</a:t>
             </a:r>
             <a:r>
-              <a:rPr lang="en-US" altLang="ko-KR" sz="1800" dirty="0" err="1">
-                <a:latin typeface="D2Coding" panose="020B0609020101020101" pitchFamily="49" charset="-127"/>
-                <a:ea typeface="D2Coding" panose="020B0609020101020101" pitchFamily="49" charset="-127"/>
-              </a:rPr>
-              <a:t>batch_size</a:t>
-            </a:r>
-            <a:r>
-              <a:rPr lang="en-US" altLang="ko-KR" sz="1800" dirty="0">
-                <a:latin typeface="D2Coding" panose="020B0609020101020101" pitchFamily="49" charset="-127"/>
-                <a:ea typeface="D2Coding" panose="020B0609020101020101" pitchFamily="49" charset="-127"/>
-              </a:rPr>
-              <a:t>, timesteps, features) =  (256, 120, 14)</a:t>
-            </a:r>
-            <a:endParaRPr lang="ko-KR" altLang="en-US" sz="1800" dirty="0">
+              <a:rPr lang="ko-KR" altLang="en-US" sz="1200" b="1" dirty="0">
+                <a:solidFill>
+                  <a:schemeClr val="bg1"/>
+                </a:solidFill>
+                <a:latin typeface="D2Coding" panose="020B0609020101020101" pitchFamily="49" charset="-127"/>
+                <a:ea typeface="D2Coding" panose="020B0609020101020101" pitchFamily="49" charset="-127"/>
+              </a:rPr>
+              <a:t>어느 시간대</a:t>
+            </a:r>
+            <a:r>
+              <a:rPr lang="en-US" altLang="ko-KR" sz="1200" b="1" dirty="0">
+                <a:solidFill>
+                  <a:schemeClr val="bg1"/>
+                </a:solidFill>
+                <a:latin typeface="D2Coding" panose="020B0609020101020101" pitchFamily="49" charset="-127"/>
+                <a:ea typeface="D2Coding" panose="020B0609020101020101" pitchFamily="49" charset="-127"/>
+              </a:rPr>
+              <a:t>, </a:t>
+            </a:r>
+            <a:r>
+              <a:rPr lang="ko-KR" altLang="en-US" sz="1200" b="1" dirty="0">
+                <a:solidFill>
+                  <a:schemeClr val="bg1"/>
+                </a:solidFill>
+                <a:latin typeface="D2Coding" panose="020B0609020101020101" pitchFamily="49" charset="-127"/>
+                <a:ea typeface="D2Coding" panose="020B0609020101020101" pitchFamily="49" charset="-127"/>
+              </a:rPr>
+              <a:t>아침 </a:t>
+            </a:r>
+            <a:r>
+              <a:rPr lang="en-US" altLang="ko-KR" sz="1200" b="1" dirty="0">
+                <a:solidFill>
+                  <a:schemeClr val="bg1"/>
+                </a:solidFill>
+                <a:latin typeface="D2Coding" panose="020B0609020101020101" pitchFamily="49" charset="-127"/>
+                <a:ea typeface="D2Coding" panose="020B0609020101020101" pitchFamily="49" charset="-127"/>
+              </a:rPr>
+              <a:t>or</a:t>
+            </a:r>
+            <a:r>
+              <a:rPr lang="ko-KR" altLang="en-US" sz="1200" b="1" dirty="0">
+                <a:solidFill>
+                  <a:schemeClr val="bg1"/>
+                </a:solidFill>
+                <a:latin typeface="D2Coding" panose="020B0609020101020101" pitchFamily="49" charset="-127"/>
+                <a:ea typeface="D2Coding" panose="020B0609020101020101" pitchFamily="49" charset="-127"/>
+              </a:rPr>
+              <a:t> 새벽</a:t>
+            </a:r>
+            <a:r>
+              <a:rPr lang="en-US" altLang="ko-KR" sz="1200" b="1" dirty="0">
+                <a:solidFill>
+                  <a:schemeClr val="bg1"/>
+                </a:solidFill>
+                <a:latin typeface="D2Coding" panose="020B0609020101020101" pitchFamily="49" charset="-127"/>
+                <a:ea typeface="D2Coding" panose="020B0609020101020101" pitchFamily="49" charset="-127"/>
+              </a:rPr>
+              <a:t>, </a:t>
+            </a:r>
+            <a:r>
+              <a:rPr lang="ko-KR" altLang="en-US" sz="1200" b="1" dirty="0">
+                <a:solidFill>
+                  <a:schemeClr val="bg1"/>
+                </a:solidFill>
+                <a:latin typeface="D2Coding" panose="020B0609020101020101" pitchFamily="49" charset="-127"/>
+                <a:ea typeface="D2Coding" panose="020B0609020101020101" pitchFamily="49" charset="-127"/>
+              </a:rPr>
+              <a:t>여름 </a:t>
+            </a:r>
+            <a:r>
+              <a:rPr lang="en-US" altLang="ko-KR" sz="1200" b="1" dirty="0">
+                <a:solidFill>
+                  <a:schemeClr val="bg1"/>
+                </a:solidFill>
+                <a:latin typeface="D2Coding" panose="020B0609020101020101" pitchFamily="49" charset="-127"/>
+                <a:ea typeface="D2Coding" panose="020B0609020101020101" pitchFamily="49" charset="-127"/>
+              </a:rPr>
+              <a:t>or </a:t>
+            </a:r>
+            <a:r>
+              <a:rPr lang="ko-KR" altLang="en-US" sz="1200" b="1" dirty="0">
+                <a:solidFill>
+                  <a:schemeClr val="bg1"/>
+                </a:solidFill>
+                <a:latin typeface="D2Coding" panose="020B0609020101020101" pitchFamily="49" charset="-127"/>
+                <a:ea typeface="D2Coding" panose="020B0609020101020101" pitchFamily="49" charset="-127"/>
+              </a:rPr>
+              <a:t>겨울</a:t>
+            </a:r>
+            <a:r>
+              <a:rPr lang="en-US" altLang="ko-KR" sz="1200" b="1" dirty="0">
+                <a:solidFill>
+                  <a:schemeClr val="bg1"/>
+                </a:solidFill>
+                <a:latin typeface="D2Coding" panose="020B0609020101020101" pitchFamily="49" charset="-127"/>
+                <a:ea typeface="D2Coding" panose="020B0609020101020101" pitchFamily="49" charset="-127"/>
+              </a:rPr>
+              <a:t>)'</a:t>
+            </a:r>
+            <a:r>
+              <a:rPr lang="ko-KR" altLang="en-US" sz="1200" dirty="0">
+                <a:solidFill>
+                  <a:schemeClr val="bg1"/>
+                </a:solidFill>
+                <a:latin typeface="D2Coding" panose="020B0609020101020101" pitchFamily="49" charset="-127"/>
+                <a:ea typeface="D2Coding" panose="020B0609020101020101" pitchFamily="49" charset="-127"/>
+              </a:rPr>
+              <a:t> 에 따라 원인과 의미가 완전히 달라지게 되어 </a:t>
+            </a:r>
+            <a:r>
+              <a:rPr lang="ko-KR" altLang="en-US" sz="1200" dirty="0" err="1">
+                <a:solidFill>
+                  <a:schemeClr val="bg1"/>
+                </a:solidFill>
+                <a:latin typeface="D2Coding" panose="020B0609020101020101" pitchFamily="49" charset="-127"/>
+                <a:ea typeface="D2Coding" panose="020B0609020101020101" pitchFamily="49" charset="-127"/>
+              </a:rPr>
+              <a:t>시간축을</a:t>
+            </a:r>
+            <a:r>
+              <a:rPr lang="ko-KR" altLang="en-US" sz="1200" dirty="0">
+                <a:solidFill>
+                  <a:schemeClr val="bg1"/>
+                </a:solidFill>
+                <a:latin typeface="D2Coding" panose="020B0609020101020101" pitchFamily="49" charset="-127"/>
+                <a:ea typeface="D2Coding" panose="020B0609020101020101" pitchFamily="49" charset="-127"/>
+              </a:rPr>
+              <a:t> 따라 패턴을 그대로 이동시켜 재사용할 수 없음</a:t>
+            </a:r>
+            <a:endParaRPr lang="en-US" altLang="ko-KR" sz="1200" dirty="0">
+              <a:solidFill>
+                <a:schemeClr val="bg1"/>
+              </a:solidFill>
               <a:latin typeface="D2Coding" panose="020B0609020101020101" pitchFamily="49" charset="-127"/>
               <a:ea typeface="D2Coding" panose="020B0609020101020101" pitchFamily="49" charset="-127"/>
             </a:endParaRPr>
+          </a:p>
+          <a:p>
+            <a:pPr marL="171450" indent="-171450">
+              <a:buFont typeface="Wingdings" panose="05000000000000000000" pitchFamily="2" charset="2"/>
+              <a:buChar char="§"/>
+            </a:pPr>
+            <a:endParaRPr lang="en-US" altLang="ko-KR" sz="1200" dirty="0">
+              <a:solidFill>
+                <a:schemeClr val="bg1"/>
+              </a:solidFill>
+              <a:latin typeface="D2Coding" panose="020B0609020101020101" pitchFamily="49" charset="-127"/>
+              <a:ea typeface="D2Coding" panose="020B0609020101020101" pitchFamily="49" charset="-127"/>
+            </a:endParaRPr>
+          </a:p>
+          <a:p>
+            <a:pPr marL="171450" indent="-171450">
+              <a:buFont typeface="Wingdings" panose="05000000000000000000" pitchFamily="2" charset="2"/>
+              <a:buChar char="§"/>
+            </a:pPr>
+            <a:r>
+              <a:rPr lang="en-US" altLang="ko-KR" sz="1200" dirty="0">
+                <a:solidFill>
+                  <a:schemeClr val="bg1"/>
+                </a:solidFill>
+                <a:latin typeface="D2Coding" panose="020B0609020101020101" pitchFamily="49" charset="-127"/>
+                <a:ea typeface="D2Coding" panose="020B0609020101020101" pitchFamily="49" charset="-127"/>
+              </a:rPr>
+              <a:t>Conv1D</a:t>
+            </a:r>
+            <a:r>
+              <a:rPr lang="ko-KR" altLang="en-US" sz="1200" dirty="0">
+                <a:solidFill>
+                  <a:schemeClr val="bg1"/>
+                </a:solidFill>
+                <a:latin typeface="D2Coding" panose="020B0609020101020101" pitchFamily="49" charset="-127"/>
+                <a:ea typeface="D2Coding" panose="020B0609020101020101" pitchFamily="49" charset="-127"/>
+              </a:rPr>
+              <a:t>는 슬라이딩 윈도우를 굴리며 </a:t>
+            </a:r>
+            <a:r>
+              <a:rPr lang="en-US" altLang="ko-KR" sz="1200" i="1" dirty="0">
+                <a:solidFill>
+                  <a:schemeClr val="bg1"/>
+                </a:solidFill>
+                <a:latin typeface="D2Coding" panose="020B0609020101020101" pitchFamily="49" charset="-127"/>
+                <a:ea typeface="D2Coding" panose="020B0609020101020101" pitchFamily="49" charset="-127"/>
+              </a:rPr>
+              <a:t>"</a:t>
+            </a:r>
+            <a:r>
+              <a:rPr lang="ko-KR" altLang="en-US" sz="1200" i="1" dirty="0">
+                <a:solidFill>
+                  <a:schemeClr val="bg1"/>
+                </a:solidFill>
+                <a:latin typeface="D2Coding" panose="020B0609020101020101" pitchFamily="49" charset="-127"/>
+                <a:ea typeface="D2Coding" panose="020B0609020101020101" pitchFamily="49" charset="-127"/>
+              </a:rPr>
+              <a:t>아침이든 밤이든 패턴 모양만 비슷하면 다 똑같은 특성이겠지</a:t>
+            </a:r>
+            <a:r>
+              <a:rPr lang="en-US" altLang="ko-KR" sz="1200" i="1" dirty="0">
+                <a:solidFill>
+                  <a:schemeClr val="bg1"/>
+                </a:solidFill>
+                <a:latin typeface="D2Coding" panose="020B0609020101020101" pitchFamily="49" charset="-127"/>
+                <a:ea typeface="D2Coding" panose="020B0609020101020101" pitchFamily="49" charset="-127"/>
+              </a:rPr>
+              <a:t>?"</a:t>
+            </a:r>
+            <a:r>
+              <a:rPr lang="ko-KR" altLang="en-US" sz="1200" dirty="0">
+                <a:solidFill>
+                  <a:schemeClr val="bg1"/>
+                </a:solidFill>
+                <a:latin typeface="D2Coding" panose="020B0609020101020101" pitchFamily="49" charset="-127"/>
+                <a:ea typeface="D2Coding" panose="020B0609020101020101" pitchFamily="49" charset="-127"/>
+              </a:rPr>
+              <a:t> 하고 연산하지만 날씨에서는 </a:t>
+            </a:r>
+            <a:r>
+              <a:rPr lang="ko-KR" altLang="en-US" sz="1200" b="1" dirty="0">
+                <a:solidFill>
+                  <a:schemeClr val="bg1"/>
+                </a:solidFill>
+                <a:latin typeface="D2Coding" panose="020B0609020101020101" pitchFamily="49" charset="-127"/>
+                <a:ea typeface="D2Coding" panose="020B0609020101020101" pitchFamily="49" charset="-127"/>
+              </a:rPr>
+              <a:t>발생 시점을 무시하는 순간 잘못된 예측</a:t>
+            </a:r>
+            <a:r>
+              <a:rPr lang="ko-KR" altLang="en-US" sz="1200" dirty="0">
+                <a:solidFill>
+                  <a:schemeClr val="bg1"/>
+                </a:solidFill>
+                <a:latin typeface="D2Coding" panose="020B0609020101020101" pitchFamily="49" charset="-127"/>
+                <a:ea typeface="D2Coding" panose="020B0609020101020101" pitchFamily="49" charset="-127"/>
+              </a:rPr>
+              <a:t>으로 이어지게 됨</a:t>
+            </a:r>
+            <a:endParaRPr lang="en-US" altLang="ko-KR" sz="1200" dirty="0">
+              <a:solidFill>
+                <a:schemeClr val="bg1"/>
+              </a:solidFill>
+              <a:latin typeface="D2Coding" panose="020B0609020101020101" pitchFamily="49" charset="-127"/>
+              <a:ea typeface="D2Coding" panose="020B0609020101020101" pitchFamily="49" charset="-127"/>
+            </a:endParaRPr>
+          </a:p>
+          <a:p>
+            <a:pPr marL="171450" indent="-171450">
+              <a:buFont typeface="Wingdings" panose="05000000000000000000" pitchFamily="2" charset="2"/>
+              <a:buChar char="§"/>
+            </a:pPr>
+            <a:endParaRPr lang="en-US" altLang="ko-KR" sz="1200" dirty="0">
+              <a:solidFill>
+                <a:schemeClr val="bg1"/>
+              </a:solidFill>
+              <a:latin typeface="D2Coding" panose="020B0609020101020101" pitchFamily="49" charset="-127"/>
+              <a:ea typeface="D2Coding" panose="020B0609020101020101" pitchFamily="49" charset="-127"/>
+            </a:endParaRPr>
+          </a:p>
+          <a:p>
+            <a:pPr marL="171450" indent="-171450">
+              <a:buFont typeface="Wingdings" panose="05000000000000000000" pitchFamily="2" charset="2"/>
+              <a:buChar char="§"/>
+            </a:pPr>
+            <a:r>
+              <a:rPr lang="ko-KR" altLang="en-US" sz="1200" dirty="0">
+                <a:solidFill>
+                  <a:schemeClr val="bg1"/>
+                </a:solidFill>
+                <a:latin typeface="D2Coding" panose="020B0609020101020101" pitchFamily="49" charset="-127"/>
+                <a:ea typeface="D2Coding" panose="020B0609020101020101" pitchFamily="49" charset="-127"/>
+              </a:rPr>
+              <a:t>극복하기 위해</a:t>
+            </a:r>
+            <a:r>
+              <a:rPr lang="en-US" altLang="ko-KR" sz="1200" dirty="0">
+                <a:solidFill>
+                  <a:schemeClr val="bg1"/>
+                </a:solidFill>
+                <a:latin typeface="D2Coding" panose="020B0609020101020101" pitchFamily="49" charset="-127"/>
+                <a:ea typeface="D2Coding" panose="020B0609020101020101" pitchFamily="49" charset="-127"/>
+              </a:rPr>
+              <a:t>, </a:t>
+            </a:r>
+            <a:r>
+              <a:rPr lang="en-US" altLang="ko-KR" sz="1200" b="1" dirty="0">
+                <a:solidFill>
+                  <a:schemeClr val="bg1"/>
+                </a:solidFill>
+                <a:latin typeface="D2Coding" panose="020B0609020101020101" pitchFamily="49" charset="-127"/>
+                <a:ea typeface="D2Coding" panose="020B0609020101020101" pitchFamily="49" charset="-127"/>
+              </a:rPr>
+              <a:t>'</a:t>
+            </a:r>
+            <a:r>
+              <a:rPr lang="ko-KR" altLang="en-US" sz="1200" b="1" dirty="0">
+                <a:solidFill>
+                  <a:schemeClr val="bg1"/>
+                </a:solidFill>
+                <a:latin typeface="D2Coding" panose="020B0609020101020101" pitchFamily="49" charset="-127"/>
+                <a:ea typeface="D2Coding" panose="020B0609020101020101" pitchFamily="49" charset="-127"/>
+              </a:rPr>
+              <a:t>절대적인 시점과 순서</a:t>
+            </a:r>
+            <a:r>
+              <a:rPr lang="en-US" altLang="ko-KR" sz="1200" b="1" dirty="0">
+                <a:solidFill>
+                  <a:schemeClr val="bg1"/>
+                </a:solidFill>
+                <a:latin typeface="D2Coding" panose="020B0609020101020101" pitchFamily="49" charset="-127"/>
+                <a:ea typeface="D2Coding" panose="020B0609020101020101" pitchFamily="49" charset="-127"/>
+              </a:rPr>
+              <a:t>'</a:t>
+            </a:r>
+            <a:r>
+              <a:rPr lang="ko-KR" altLang="en-US" sz="1200" b="1" dirty="0">
+                <a:solidFill>
+                  <a:schemeClr val="bg1"/>
+                </a:solidFill>
+                <a:latin typeface="D2Coding" panose="020B0609020101020101" pitchFamily="49" charset="-127"/>
+                <a:ea typeface="D2Coding" panose="020B0609020101020101" pitchFamily="49" charset="-127"/>
+              </a:rPr>
+              <a:t>를 기억하는 </a:t>
+            </a:r>
+            <a:r>
+              <a:rPr lang="en-US" altLang="ko-KR" sz="1200" b="1" dirty="0">
+                <a:solidFill>
+                  <a:schemeClr val="bg1"/>
+                </a:solidFill>
+                <a:latin typeface="D2Coding" panose="020B0609020101020101" pitchFamily="49" charset="-127"/>
+                <a:ea typeface="D2Coding" panose="020B0609020101020101" pitchFamily="49" charset="-127"/>
+              </a:rPr>
+              <a:t>RNN(LSTM/GRU)</a:t>
+            </a:r>
+            <a:r>
+              <a:rPr lang="ko-KR" altLang="en-US" sz="1200" b="1" dirty="0">
+                <a:solidFill>
+                  <a:schemeClr val="bg1"/>
+                </a:solidFill>
+                <a:latin typeface="D2Coding" panose="020B0609020101020101" pitchFamily="49" charset="-127"/>
+                <a:ea typeface="D2Coding" panose="020B0609020101020101" pitchFamily="49" charset="-127"/>
+              </a:rPr>
+              <a:t>이나 </a:t>
+            </a:r>
+            <a:r>
+              <a:rPr lang="en-US" altLang="ko-KR" sz="1200" b="1" dirty="0">
+                <a:solidFill>
+                  <a:schemeClr val="bg1"/>
+                </a:solidFill>
+                <a:latin typeface="D2Coding" panose="020B0609020101020101" pitchFamily="49" charset="-127"/>
+                <a:ea typeface="D2Coding" panose="020B0609020101020101" pitchFamily="49" charset="-127"/>
+              </a:rPr>
+              <a:t>Positional Encoding</a:t>
+            </a:r>
+            <a:r>
+              <a:rPr lang="ko-KR" altLang="en-US" sz="1200" b="1" dirty="0">
+                <a:solidFill>
+                  <a:schemeClr val="bg1"/>
+                </a:solidFill>
+                <a:latin typeface="D2Coding" panose="020B0609020101020101" pitchFamily="49" charset="-127"/>
+                <a:ea typeface="D2Coding" panose="020B0609020101020101" pitchFamily="49" charset="-127"/>
+              </a:rPr>
+              <a:t>을 사용하는 </a:t>
+            </a:r>
+            <a:r>
+              <a:rPr lang="en-US" altLang="ko-KR" sz="1200" b="1" dirty="0">
+                <a:solidFill>
+                  <a:schemeClr val="bg1"/>
+                </a:solidFill>
+                <a:latin typeface="D2Coding" panose="020B0609020101020101" pitchFamily="49" charset="-127"/>
+                <a:ea typeface="D2Coding" panose="020B0609020101020101" pitchFamily="49" charset="-127"/>
+              </a:rPr>
+              <a:t>Transformer </a:t>
+            </a:r>
+            <a:r>
+              <a:rPr lang="ko-KR" altLang="en-US" sz="1200" b="1" dirty="0">
+                <a:solidFill>
+                  <a:schemeClr val="bg1"/>
+                </a:solidFill>
+                <a:latin typeface="D2Coding" panose="020B0609020101020101" pitchFamily="49" charset="-127"/>
+                <a:ea typeface="D2Coding" panose="020B0609020101020101" pitchFamily="49" charset="-127"/>
+              </a:rPr>
+              <a:t>모델</a:t>
+            </a:r>
+            <a:r>
+              <a:rPr lang="ko-KR" altLang="en-US" sz="1200" dirty="0">
+                <a:solidFill>
+                  <a:schemeClr val="bg1"/>
+                </a:solidFill>
+                <a:latin typeface="D2Coding" panose="020B0609020101020101" pitchFamily="49" charset="-127"/>
+                <a:ea typeface="D2Coding" panose="020B0609020101020101" pitchFamily="49" charset="-127"/>
+              </a:rPr>
+              <a:t>이 시계열 예측에서 주로 활용</a:t>
+            </a:r>
           </a:p>
         </p:txBody>
       </p:sp>
@@ -9980,7 +11852,350 @@
 </p:sld>
 </file>
 
-<file path=ppt/slides/slide17.xml><?xml version="1.0" encoding="utf-8"?>
+<file path=ppt/slides/slide2.xml><?xml version="1.0" encoding="utf-8"?>
+<p:sld xmlns:a="http://schemas.openxmlformats.org/drawingml/2006/main" xmlns:r="http://schemas.openxmlformats.org/officeDocument/2006/relationships" xmlns:p="http://schemas.openxmlformats.org/presentationml/2006/main">
+  <p:cSld>
+    <p:spTree>
+      <p:nvGrpSpPr>
+        <p:cNvPr id="1" name="">
+          <a:extLst>
+            <a:ext uri="{FF2B5EF4-FFF2-40B4-BE49-F238E27FC236}">
+              <a16:creationId xmlns:a16="http://schemas.microsoft.com/office/drawing/2014/main" id="{BCFEDBDF-4942-26B7-ECF8-D411863DF1CC}"/>
+            </a:ext>
+          </a:extLst>
+        </p:cNvPr>
+        <p:cNvGrpSpPr/>
+        <p:nvPr/>
+      </p:nvGrpSpPr>
+      <p:grpSpPr>
+        <a:xfrm>
+          <a:off x="0" y="0"/>
+          <a:ext cx="0" cy="0"/>
+          <a:chOff x="0" y="0"/>
+          <a:chExt cx="0" cy="0"/>
+        </a:xfrm>
+      </p:grpSpPr>
+      <p:sp>
+        <p:nvSpPr>
+          <p:cNvPr id="2" name="직사각형 1">
+            <a:extLst>
+              <a:ext uri="{FF2B5EF4-FFF2-40B4-BE49-F238E27FC236}">
+                <a16:creationId xmlns:a16="http://schemas.microsoft.com/office/drawing/2014/main" id="{2435B2F8-E85B-6FAB-4AFA-6E1F580B27D7}"/>
+              </a:ext>
+            </a:extLst>
+          </p:cNvPr>
+          <p:cNvSpPr/>
+          <p:nvPr/>
+        </p:nvSpPr>
+        <p:spPr>
+          <a:xfrm>
+            <a:off x="475645" y="1847850"/>
+            <a:ext cx="7963505" cy="530474"/>
+          </a:xfrm>
+          <a:prstGeom prst="rect">
+            <a:avLst/>
+          </a:prstGeom>
+          <a:solidFill>
+            <a:schemeClr val="bg1">
+              <a:lumMod val="85000"/>
+            </a:schemeClr>
+          </a:solidFill>
+          <a:ln>
+            <a:noFill/>
+          </a:ln>
+        </p:spPr>
+        <p:style>
+          <a:lnRef idx="2">
+            <a:schemeClr val="accent1">
+              <a:shade val="15000"/>
+            </a:schemeClr>
+          </a:lnRef>
+          <a:fillRef idx="1">
+            <a:schemeClr val="accent1"/>
+          </a:fillRef>
+          <a:effectRef idx="0">
+            <a:schemeClr val="accent1"/>
+          </a:effectRef>
+          <a:fontRef idx="minor">
+            <a:schemeClr val="lt1"/>
+          </a:fontRef>
+        </p:style>
+        <p:txBody>
+          <a:bodyPr rtlCol="0" anchor="ctr"/>
+          <a:lstStyle/>
+          <a:p>
+            <a:pPr algn="ctr"/>
+            <a:endParaRPr lang="ko-KR" altLang="en-US"/>
+          </a:p>
+        </p:txBody>
+      </p:sp>
+      <p:sp>
+        <p:nvSpPr>
+          <p:cNvPr id="4" name="슬라이드 번호 개체 틀 3">
+            <a:extLst>
+              <a:ext uri="{FF2B5EF4-FFF2-40B4-BE49-F238E27FC236}">
+                <a16:creationId xmlns:a16="http://schemas.microsoft.com/office/drawing/2014/main" id="{B32F42C0-07C8-1960-872A-C341FE529FB2}"/>
+              </a:ext>
+            </a:extLst>
+          </p:cNvPr>
+          <p:cNvSpPr>
+            <a:spLocks noGrp="1"/>
+          </p:cNvSpPr>
+          <p:nvPr>
+            <p:ph type="sldNum" sz="quarter" idx="12"/>
+          </p:nvPr>
+        </p:nvSpPr>
+        <p:spPr>
+          <a:xfrm>
+            <a:off x="10514011" y="6036261"/>
+            <a:ext cx="753545" cy="365125"/>
+          </a:xfrm>
+        </p:spPr>
+        <p:txBody>
+          <a:bodyPr/>
+          <a:lstStyle/>
+          <a:p>
+            <a:fld id="{D57F1E4F-1CFF-5643-939E-217C01CDF565}" type="slidenum">
+              <a:rPr lang="en-US" smtClean="0"/>
+              <a:pPr/>
+              <a:t>2</a:t>
+            </a:fld>
+            <a:endParaRPr lang="en-US" dirty="0"/>
+          </a:p>
+        </p:txBody>
+      </p:sp>
+      <p:sp>
+        <p:nvSpPr>
+          <p:cNvPr id="3" name="제목 1">
+            <a:extLst>
+              <a:ext uri="{FF2B5EF4-FFF2-40B4-BE49-F238E27FC236}">
+                <a16:creationId xmlns:a16="http://schemas.microsoft.com/office/drawing/2014/main" id="{C83E9E23-F77D-44D2-EB8C-9981740FAE83}"/>
+              </a:ext>
+            </a:extLst>
+          </p:cNvPr>
+          <p:cNvSpPr txBox="1">
+            <a:spLocks/>
+          </p:cNvSpPr>
+          <p:nvPr/>
+        </p:nvSpPr>
+        <p:spPr>
+          <a:xfrm>
+            <a:off x="475645" y="481983"/>
+            <a:ext cx="10353762" cy="766439"/>
+          </a:xfrm>
+          <a:prstGeom prst="rect">
+            <a:avLst/>
+          </a:prstGeom>
+        </p:spPr>
+        <p:txBody>
+          <a:bodyPr vert="horz" lIns="91440" tIns="45720" rIns="91440" bIns="45720" rtlCol="0" anchor="ctr">
+            <a:normAutofit/>
+          </a:bodyPr>
+          <a:lstStyle>
+            <a:lvl1pPr algn="ctr" defTabSz="914400" rtl="0" eaLnBrk="1" latinLnBrk="1" hangingPunct="1">
+              <a:lnSpc>
+                <a:spcPct val="90000"/>
+              </a:lnSpc>
+              <a:spcBef>
+                <a:spcPct val="0"/>
+              </a:spcBef>
+              <a:buNone/>
+              <a:defRPr sz="3200" kern="1200" cap="all" baseline="0">
+                <a:solidFill>
+                  <a:schemeClr val="tx1"/>
+                </a:solidFill>
+                <a:effectLst/>
+                <a:latin typeface="Batang" panose="02030600000101010101" pitchFamily="18" charset="-127"/>
+                <a:ea typeface="Batang" panose="02030600000101010101" pitchFamily="18" charset="-127"/>
+                <a:cs typeface="+mj-cs"/>
+              </a:defRPr>
+            </a:lvl1pPr>
+          </a:lstStyle>
+          <a:p>
+            <a:pPr algn="l"/>
+            <a:r>
+              <a:rPr lang="en-US" altLang="ko-KR" sz="2800" cap="none" dirty="0">
+                <a:solidFill>
+                  <a:schemeClr val="bg2">
+                    <a:lumMod val="25000"/>
+                  </a:schemeClr>
+                </a:solidFill>
+                <a:latin typeface="D2Coding" panose="020B0609020101020101" pitchFamily="49" charset="-127"/>
+                <a:ea typeface="D2Coding" panose="020B0609020101020101" pitchFamily="49" charset="-127"/>
+                <a:cs typeface="Segoe UI Light" panose="020B0502040204020203" pitchFamily="34" charset="0"/>
+              </a:rPr>
+              <a:t>Goals</a:t>
+            </a:r>
+            <a:endParaRPr lang="ko-KR" altLang="en-US" sz="2800" cap="none" dirty="0">
+              <a:solidFill>
+                <a:schemeClr val="bg2">
+                  <a:lumMod val="25000"/>
+                </a:schemeClr>
+              </a:solidFill>
+              <a:latin typeface="D2Coding" panose="020B0609020101020101" pitchFamily="49" charset="-127"/>
+              <a:ea typeface="D2Coding" panose="020B0609020101020101" pitchFamily="49" charset="-127"/>
+              <a:cs typeface="Segoe UI Light" panose="020B0502040204020203" pitchFamily="34" charset="0"/>
+            </a:endParaRPr>
+          </a:p>
+        </p:txBody>
+      </p:sp>
+      <p:sp>
+        <p:nvSpPr>
+          <p:cNvPr id="5" name="TextBox 4">
+            <a:extLst>
+              <a:ext uri="{FF2B5EF4-FFF2-40B4-BE49-F238E27FC236}">
+                <a16:creationId xmlns:a16="http://schemas.microsoft.com/office/drawing/2014/main" id="{A0CB7729-09DC-4690-5139-CD2649D9221F}"/>
+              </a:ext>
+            </a:extLst>
+          </p:cNvPr>
+          <p:cNvSpPr txBox="1"/>
+          <p:nvPr/>
+        </p:nvSpPr>
+        <p:spPr>
+          <a:xfrm>
+            <a:off x="587055" y="1846268"/>
+            <a:ext cx="7394895" cy="4189993"/>
+          </a:xfrm>
+          <a:prstGeom prst="rect">
+            <a:avLst/>
+          </a:prstGeom>
+          <a:noFill/>
+        </p:spPr>
+        <p:txBody>
+          <a:bodyPr wrap="square">
+            <a:spAutoFit/>
+          </a:bodyPr>
+          <a:lstStyle/>
+          <a:p>
+            <a:pPr marL="800100" lvl="1" indent="-342900">
+              <a:lnSpc>
+                <a:spcPct val="150000"/>
+              </a:lnSpc>
+              <a:buFont typeface="Wingdings" panose="05000000000000000000" pitchFamily="2" charset="2"/>
+              <a:buChar char="v"/>
+            </a:pPr>
+            <a:r>
+              <a:rPr lang="en-US" altLang="ko-KR" sz="2000" dirty="0"/>
+              <a:t>Different kinds of timeseries tasks</a:t>
+            </a:r>
+          </a:p>
+          <a:p>
+            <a:pPr marL="800100" lvl="1" indent="-342900">
+              <a:lnSpc>
+                <a:spcPct val="150000"/>
+              </a:lnSpc>
+              <a:buFont typeface="Wingdings" panose="05000000000000000000" pitchFamily="2" charset="2"/>
+              <a:buChar char="v"/>
+            </a:pPr>
+            <a:r>
+              <a:rPr lang="en-US" altLang="ko-KR" sz="2000" dirty="0"/>
+              <a:t>Timeseries 3D tensor</a:t>
+            </a:r>
+          </a:p>
+          <a:p>
+            <a:pPr marL="800100" lvl="1" indent="-342900">
+              <a:lnSpc>
+                <a:spcPct val="150000"/>
+              </a:lnSpc>
+              <a:buFont typeface="Wingdings" panose="05000000000000000000" pitchFamily="2" charset="2"/>
+              <a:buChar char="v"/>
+            </a:pPr>
+            <a:r>
+              <a:rPr lang="en-US" altLang="ko-KR" sz="2000" dirty="0"/>
+              <a:t>A temperature forecasting example</a:t>
+            </a:r>
+          </a:p>
+          <a:p>
+            <a:pPr marL="1257300" lvl="2" indent="-342900">
+              <a:lnSpc>
+                <a:spcPct val="150000"/>
+              </a:lnSpc>
+              <a:buFont typeface="Wingdings" panose="05000000000000000000" pitchFamily="2" charset="2"/>
+              <a:buChar char="v"/>
+            </a:pPr>
+            <a:r>
+              <a:rPr lang="en-US" altLang="ko-KR" sz="2000" dirty="0"/>
+              <a:t>naïve approach</a:t>
+            </a:r>
+          </a:p>
+          <a:p>
+            <a:pPr marL="1257300" lvl="2" indent="-342900">
+              <a:lnSpc>
+                <a:spcPct val="150000"/>
+              </a:lnSpc>
+              <a:buFont typeface="Wingdings" panose="05000000000000000000" pitchFamily="2" charset="2"/>
+              <a:buChar char="v"/>
+            </a:pPr>
+            <a:r>
+              <a:rPr lang="en-US" altLang="ko-KR" sz="2000" dirty="0"/>
+              <a:t>Fully connected neural network</a:t>
+            </a:r>
+          </a:p>
+          <a:p>
+            <a:pPr marL="1257300" lvl="2" indent="-342900">
+              <a:lnSpc>
+                <a:spcPct val="150000"/>
+              </a:lnSpc>
+              <a:buFont typeface="Wingdings" panose="05000000000000000000" pitchFamily="2" charset="2"/>
+              <a:buChar char="v"/>
+            </a:pPr>
+            <a:r>
+              <a:rPr lang="en-US" altLang="ko-KR" sz="2000" dirty="0"/>
+              <a:t>1D Convnet</a:t>
+            </a:r>
+          </a:p>
+          <a:p>
+            <a:pPr marL="800100" lvl="1" indent="-342900">
+              <a:lnSpc>
+                <a:spcPct val="150000"/>
+              </a:lnSpc>
+              <a:buFont typeface="Wingdings" panose="05000000000000000000" pitchFamily="2" charset="2"/>
+              <a:buChar char="v"/>
+            </a:pPr>
+            <a:r>
+              <a:rPr lang="en-US" altLang="ko-KR" sz="2000" dirty="0"/>
+              <a:t>Understanding recurrent neural networks (RNNs)</a:t>
+            </a:r>
+          </a:p>
+          <a:p>
+            <a:pPr marL="800100" lvl="1" indent="-342900">
+              <a:lnSpc>
+                <a:spcPct val="150000"/>
+              </a:lnSpc>
+              <a:buFont typeface="Wingdings" panose="05000000000000000000" pitchFamily="2" charset="2"/>
+              <a:buChar char="v"/>
+            </a:pPr>
+            <a:r>
+              <a:rPr lang="en-US" altLang="ko-KR" sz="2000" dirty="0"/>
+              <a:t>Applying RNNs to a temperature forecasting example</a:t>
+            </a:r>
+          </a:p>
+          <a:p>
+            <a:pPr marL="800100" lvl="1" indent="-342900">
+              <a:lnSpc>
+                <a:spcPct val="150000"/>
+              </a:lnSpc>
+              <a:buFont typeface="Wingdings" panose="05000000000000000000" pitchFamily="2" charset="2"/>
+              <a:buChar char="v"/>
+            </a:pPr>
+            <a:endParaRPr lang="en-US" altLang="ko-KR" sz="2000" dirty="0"/>
+          </a:p>
+        </p:txBody>
+      </p:sp>
+    </p:spTree>
+    <p:extLst>
+      <p:ext uri="{BB962C8B-B14F-4D97-AF65-F5344CB8AC3E}">
+        <p14:creationId xmlns:p14="http://schemas.microsoft.com/office/powerpoint/2010/main" val="2827070286"/>
+      </p:ext>
+    </p:extLst>
+  </p:cSld>
+  <p:clrMapOvr>
+    <a:masterClrMapping/>
+  </p:clrMapOvr>
+</p:sld>
+</file>
+
+<file path=ppt/slides/slide20.xml><?xml version="1.0" encoding="utf-8"?>
 <p:sld xmlns:a="http://schemas.openxmlformats.org/drawingml/2006/main" xmlns:r="http://schemas.openxmlformats.org/officeDocument/2006/relationships" xmlns:p="http://schemas.openxmlformats.org/presentationml/2006/main">
   <p:cSld>
     <p:spTree>
@@ -10111,7 +12326,7 @@
                 <a:cs typeface="Times New Roman" panose="02020603050405020304" pitchFamily="18" charset="0"/>
               </a:rPr>
               <a:pPr/>
-              <a:t>17</a:t>
+              <a:t>20</a:t>
             </a:fld>
             <a:endParaRPr lang="en-US" sz="1400" b="1" dirty="0">
               <a:latin typeface="Times New Roman" panose="02020603050405020304" pitchFamily="18" charset="0"/>
@@ -12398,7 +14613,7 @@
 </p:sld>
 </file>
 
-<file path=ppt/slides/slide18.xml><?xml version="1.0" encoding="utf-8"?>
+<file path=ppt/slides/slide21.xml><?xml version="1.0" encoding="utf-8"?>
 <p:sld xmlns:a="http://schemas.openxmlformats.org/drawingml/2006/main" xmlns:r="http://schemas.openxmlformats.org/officeDocument/2006/relationships" xmlns:p="http://schemas.openxmlformats.org/presentationml/2006/main">
   <p:cSld>
     <p:spTree>
@@ -12589,7 +14804,7 @@
                 <a:cs typeface="Times New Roman" panose="02020603050405020304" pitchFamily="18" charset="0"/>
               </a:rPr>
               <a:pPr/>
-              <a:t>18</a:t>
+              <a:t>21</a:t>
             </a:fld>
             <a:endParaRPr lang="en-US" sz="1400" b="1" dirty="0">
               <a:latin typeface="Times New Roman" panose="02020603050405020304" pitchFamily="18" charset="0"/>
@@ -13076,7 +15291,350 @@
 </p:sld>
 </file>
 
-<file path=ppt/slides/slide19.xml><?xml version="1.0" encoding="utf-8"?>
+<file path=ppt/slides/slide22.xml><?xml version="1.0" encoding="utf-8"?>
+<p:sld xmlns:a="http://schemas.openxmlformats.org/drawingml/2006/main" xmlns:r="http://schemas.openxmlformats.org/officeDocument/2006/relationships" xmlns:p="http://schemas.openxmlformats.org/presentationml/2006/main">
+  <p:cSld>
+    <p:spTree>
+      <p:nvGrpSpPr>
+        <p:cNvPr id="1" name="">
+          <a:extLst>
+            <a:ext uri="{FF2B5EF4-FFF2-40B4-BE49-F238E27FC236}">
+              <a16:creationId xmlns:a16="http://schemas.microsoft.com/office/drawing/2014/main" id="{764CDE6A-5257-EAEB-FF34-BD17D7CADF0C}"/>
+            </a:ext>
+          </a:extLst>
+        </p:cNvPr>
+        <p:cNvGrpSpPr/>
+        <p:nvPr/>
+      </p:nvGrpSpPr>
+      <p:grpSpPr>
+        <a:xfrm>
+          <a:off x="0" y="0"/>
+          <a:ext cx="0" cy="0"/>
+          <a:chOff x="0" y="0"/>
+          <a:chExt cx="0" cy="0"/>
+        </a:xfrm>
+      </p:grpSpPr>
+      <p:sp>
+        <p:nvSpPr>
+          <p:cNvPr id="2" name="직사각형 1">
+            <a:extLst>
+              <a:ext uri="{FF2B5EF4-FFF2-40B4-BE49-F238E27FC236}">
+                <a16:creationId xmlns:a16="http://schemas.microsoft.com/office/drawing/2014/main" id="{EE2DA41C-D736-0411-898F-88790435056A}"/>
+              </a:ext>
+            </a:extLst>
+          </p:cNvPr>
+          <p:cNvSpPr/>
+          <p:nvPr/>
+        </p:nvSpPr>
+        <p:spPr>
+          <a:xfrm>
+            <a:off x="475645" y="4619625"/>
+            <a:ext cx="7963505" cy="530474"/>
+          </a:xfrm>
+          <a:prstGeom prst="rect">
+            <a:avLst/>
+          </a:prstGeom>
+          <a:solidFill>
+            <a:schemeClr val="bg1">
+              <a:lumMod val="85000"/>
+            </a:schemeClr>
+          </a:solidFill>
+          <a:ln>
+            <a:noFill/>
+          </a:ln>
+        </p:spPr>
+        <p:style>
+          <a:lnRef idx="2">
+            <a:schemeClr val="accent1">
+              <a:shade val="15000"/>
+            </a:schemeClr>
+          </a:lnRef>
+          <a:fillRef idx="1">
+            <a:schemeClr val="accent1"/>
+          </a:fillRef>
+          <a:effectRef idx="0">
+            <a:schemeClr val="accent1"/>
+          </a:effectRef>
+          <a:fontRef idx="minor">
+            <a:schemeClr val="lt1"/>
+          </a:fontRef>
+        </p:style>
+        <p:txBody>
+          <a:bodyPr rtlCol="0" anchor="ctr"/>
+          <a:lstStyle/>
+          <a:p>
+            <a:pPr algn="ctr"/>
+            <a:endParaRPr lang="ko-KR" altLang="en-US"/>
+          </a:p>
+        </p:txBody>
+      </p:sp>
+      <p:sp>
+        <p:nvSpPr>
+          <p:cNvPr id="4" name="슬라이드 번호 개체 틀 3">
+            <a:extLst>
+              <a:ext uri="{FF2B5EF4-FFF2-40B4-BE49-F238E27FC236}">
+                <a16:creationId xmlns:a16="http://schemas.microsoft.com/office/drawing/2014/main" id="{C6E86111-5D6D-B619-F1C6-12BE473400B8}"/>
+              </a:ext>
+            </a:extLst>
+          </p:cNvPr>
+          <p:cNvSpPr>
+            <a:spLocks noGrp="1"/>
+          </p:cNvSpPr>
+          <p:nvPr>
+            <p:ph type="sldNum" sz="quarter" idx="12"/>
+          </p:nvPr>
+        </p:nvSpPr>
+        <p:spPr>
+          <a:xfrm>
+            <a:off x="10514011" y="6036261"/>
+            <a:ext cx="753545" cy="365125"/>
+          </a:xfrm>
+        </p:spPr>
+        <p:txBody>
+          <a:bodyPr/>
+          <a:lstStyle/>
+          <a:p>
+            <a:fld id="{D57F1E4F-1CFF-5643-939E-217C01CDF565}" type="slidenum">
+              <a:rPr lang="en-US" smtClean="0"/>
+              <a:pPr/>
+              <a:t>22</a:t>
+            </a:fld>
+            <a:endParaRPr lang="en-US" dirty="0"/>
+          </a:p>
+        </p:txBody>
+      </p:sp>
+      <p:sp>
+        <p:nvSpPr>
+          <p:cNvPr id="3" name="제목 1">
+            <a:extLst>
+              <a:ext uri="{FF2B5EF4-FFF2-40B4-BE49-F238E27FC236}">
+                <a16:creationId xmlns:a16="http://schemas.microsoft.com/office/drawing/2014/main" id="{1B37309E-BFFB-0775-4852-3ECE938FCB7A}"/>
+              </a:ext>
+            </a:extLst>
+          </p:cNvPr>
+          <p:cNvSpPr txBox="1">
+            <a:spLocks/>
+          </p:cNvSpPr>
+          <p:nvPr/>
+        </p:nvSpPr>
+        <p:spPr>
+          <a:xfrm>
+            <a:off x="475645" y="481983"/>
+            <a:ext cx="10353762" cy="766439"/>
+          </a:xfrm>
+          <a:prstGeom prst="rect">
+            <a:avLst/>
+          </a:prstGeom>
+        </p:spPr>
+        <p:txBody>
+          <a:bodyPr vert="horz" lIns="91440" tIns="45720" rIns="91440" bIns="45720" rtlCol="0" anchor="ctr">
+            <a:normAutofit/>
+          </a:bodyPr>
+          <a:lstStyle>
+            <a:lvl1pPr algn="ctr" defTabSz="914400" rtl="0" eaLnBrk="1" latinLnBrk="1" hangingPunct="1">
+              <a:lnSpc>
+                <a:spcPct val="90000"/>
+              </a:lnSpc>
+              <a:spcBef>
+                <a:spcPct val="0"/>
+              </a:spcBef>
+              <a:buNone/>
+              <a:defRPr sz="3200" kern="1200" cap="all" baseline="0">
+                <a:solidFill>
+                  <a:schemeClr val="tx1"/>
+                </a:solidFill>
+                <a:effectLst/>
+                <a:latin typeface="Batang" panose="02030600000101010101" pitchFamily="18" charset="-127"/>
+                <a:ea typeface="Batang" panose="02030600000101010101" pitchFamily="18" charset="-127"/>
+                <a:cs typeface="+mj-cs"/>
+              </a:defRPr>
+            </a:lvl1pPr>
+          </a:lstStyle>
+          <a:p>
+            <a:pPr algn="l"/>
+            <a:r>
+              <a:rPr lang="en-US" altLang="ko-KR" sz="2800" cap="none" dirty="0">
+                <a:solidFill>
+                  <a:schemeClr val="bg2">
+                    <a:lumMod val="25000"/>
+                  </a:schemeClr>
+                </a:solidFill>
+                <a:latin typeface="D2Coding" panose="020B0609020101020101" pitchFamily="49" charset="-127"/>
+                <a:ea typeface="D2Coding" panose="020B0609020101020101" pitchFamily="49" charset="-127"/>
+                <a:cs typeface="Segoe UI Light" panose="020B0502040204020203" pitchFamily="34" charset="0"/>
+              </a:rPr>
+              <a:t>Goals</a:t>
+            </a:r>
+            <a:endParaRPr lang="ko-KR" altLang="en-US" sz="2800" cap="none" dirty="0">
+              <a:solidFill>
+                <a:schemeClr val="bg2">
+                  <a:lumMod val="25000"/>
+                </a:schemeClr>
+              </a:solidFill>
+              <a:latin typeface="D2Coding" panose="020B0609020101020101" pitchFamily="49" charset="-127"/>
+              <a:ea typeface="D2Coding" panose="020B0609020101020101" pitchFamily="49" charset="-127"/>
+              <a:cs typeface="Segoe UI Light" panose="020B0502040204020203" pitchFamily="34" charset="0"/>
+            </a:endParaRPr>
+          </a:p>
+        </p:txBody>
+      </p:sp>
+      <p:sp>
+        <p:nvSpPr>
+          <p:cNvPr id="5" name="TextBox 4">
+            <a:extLst>
+              <a:ext uri="{FF2B5EF4-FFF2-40B4-BE49-F238E27FC236}">
+                <a16:creationId xmlns:a16="http://schemas.microsoft.com/office/drawing/2014/main" id="{19E01A90-2E38-A6BA-C948-ECAB52655B13}"/>
+              </a:ext>
+            </a:extLst>
+          </p:cNvPr>
+          <p:cNvSpPr txBox="1"/>
+          <p:nvPr/>
+        </p:nvSpPr>
+        <p:spPr>
+          <a:xfrm>
+            <a:off x="587055" y="1846268"/>
+            <a:ext cx="7394895" cy="4189993"/>
+          </a:xfrm>
+          <a:prstGeom prst="rect">
+            <a:avLst/>
+          </a:prstGeom>
+          <a:noFill/>
+        </p:spPr>
+        <p:txBody>
+          <a:bodyPr wrap="square">
+            <a:spAutoFit/>
+          </a:bodyPr>
+          <a:lstStyle/>
+          <a:p>
+            <a:pPr marL="800100" lvl="1" indent="-342900">
+              <a:lnSpc>
+                <a:spcPct val="150000"/>
+              </a:lnSpc>
+              <a:buFont typeface="Wingdings" panose="05000000000000000000" pitchFamily="2" charset="2"/>
+              <a:buChar char="v"/>
+            </a:pPr>
+            <a:r>
+              <a:rPr lang="en-US" altLang="ko-KR" sz="2000" dirty="0"/>
+              <a:t>Different kinds of timeseries tasks</a:t>
+            </a:r>
+          </a:p>
+          <a:p>
+            <a:pPr marL="800100" lvl="1" indent="-342900">
+              <a:lnSpc>
+                <a:spcPct val="150000"/>
+              </a:lnSpc>
+              <a:buFont typeface="Wingdings" panose="05000000000000000000" pitchFamily="2" charset="2"/>
+              <a:buChar char="v"/>
+            </a:pPr>
+            <a:r>
+              <a:rPr lang="en-US" altLang="ko-KR" sz="2000" dirty="0"/>
+              <a:t>Timeseries 3D tensor</a:t>
+            </a:r>
+          </a:p>
+          <a:p>
+            <a:pPr marL="800100" lvl="1" indent="-342900">
+              <a:lnSpc>
+                <a:spcPct val="150000"/>
+              </a:lnSpc>
+              <a:buFont typeface="Wingdings" panose="05000000000000000000" pitchFamily="2" charset="2"/>
+              <a:buChar char="v"/>
+            </a:pPr>
+            <a:r>
+              <a:rPr lang="en-US" altLang="ko-KR" sz="2000" dirty="0"/>
+              <a:t>A temperature forecasting example</a:t>
+            </a:r>
+          </a:p>
+          <a:p>
+            <a:pPr marL="1257300" lvl="2" indent="-342900">
+              <a:lnSpc>
+                <a:spcPct val="150000"/>
+              </a:lnSpc>
+              <a:buFont typeface="Wingdings" panose="05000000000000000000" pitchFamily="2" charset="2"/>
+              <a:buChar char="v"/>
+            </a:pPr>
+            <a:r>
+              <a:rPr lang="en-US" altLang="ko-KR" sz="2000" dirty="0"/>
+              <a:t>naïve approach</a:t>
+            </a:r>
+          </a:p>
+          <a:p>
+            <a:pPr marL="1257300" lvl="2" indent="-342900">
+              <a:lnSpc>
+                <a:spcPct val="150000"/>
+              </a:lnSpc>
+              <a:buFont typeface="Wingdings" panose="05000000000000000000" pitchFamily="2" charset="2"/>
+              <a:buChar char="v"/>
+            </a:pPr>
+            <a:r>
+              <a:rPr lang="en-US" altLang="ko-KR" sz="2000" dirty="0"/>
+              <a:t>Fully connected neural network</a:t>
+            </a:r>
+          </a:p>
+          <a:p>
+            <a:pPr marL="1257300" lvl="2" indent="-342900">
+              <a:lnSpc>
+                <a:spcPct val="150000"/>
+              </a:lnSpc>
+              <a:buFont typeface="Wingdings" panose="05000000000000000000" pitchFamily="2" charset="2"/>
+              <a:buChar char="v"/>
+            </a:pPr>
+            <a:r>
+              <a:rPr lang="en-US" altLang="ko-KR" sz="2000" dirty="0"/>
+              <a:t>1D Convnet</a:t>
+            </a:r>
+          </a:p>
+          <a:p>
+            <a:pPr marL="800100" lvl="1" indent="-342900">
+              <a:lnSpc>
+                <a:spcPct val="150000"/>
+              </a:lnSpc>
+              <a:buFont typeface="Wingdings" panose="05000000000000000000" pitchFamily="2" charset="2"/>
+              <a:buChar char="v"/>
+            </a:pPr>
+            <a:r>
+              <a:rPr lang="en-US" altLang="ko-KR" sz="2000" dirty="0"/>
+              <a:t>Understanding recurrent neural networks (RNNs)</a:t>
+            </a:r>
+          </a:p>
+          <a:p>
+            <a:pPr marL="800100" lvl="1" indent="-342900">
+              <a:lnSpc>
+                <a:spcPct val="150000"/>
+              </a:lnSpc>
+              <a:buFont typeface="Wingdings" panose="05000000000000000000" pitchFamily="2" charset="2"/>
+              <a:buChar char="v"/>
+            </a:pPr>
+            <a:r>
+              <a:rPr lang="en-US" altLang="ko-KR" sz="2000" dirty="0"/>
+              <a:t>Applying RNNs to a temperature forecasting example</a:t>
+            </a:r>
+          </a:p>
+          <a:p>
+            <a:pPr marL="800100" lvl="1" indent="-342900">
+              <a:lnSpc>
+                <a:spcPct val="150000"/>
+              </a:lnSpc>
+              <a:buFont typeface="Wingdings" panose="05000000000000000000" pitchFamily="2" charset="2"/>
+              <a:buChar char="v"/>
+            </a:pPr>
+            <a:endParaRPr lang="en-US" altLang="ko-KR" sz="2000" dirty="0"/>
+          </a:p>
+        </p:txBody>
+      </p:sp>
+    </p:spTree>
+    <p:extLst>
+      <p:ext uri="{BB962C8B-B14F-4D97-AF65-F5344CB8AC3E}">
+        <p14:creationId xmlns:p14="http://schemas.microsoft.com/office/powerpoint/2010/main" val="4229425103"/>
+      </p:ext>
+    </p:extLst>
+  </p:cSld>
+  <p:clrMapOvr>
+    <a:masterClrMapping/>
+  </p:clrMapOvr>
+</p:sld>
+</file>
+
+<file path=ppt/slides/slide23.xml><?xml version="1.0" encoding="utf-8"?>
 <p:sld xmlns:a="http://schemas.openxmlformats.org/drawingml/2006/main" xmlns:r="http://schemas.openxmlformats.org/officeDocument/2006/relationships" xmlns:p="http://schemas.openxmlformats.org/presentationml/2006/main">
   <p:cSld>
     <p:spTree>
@@ -13099,41 +15657,6 @@
           <a:chExt cx="0" cy="0"/>
         </a:xfrm>
       </p:grpSpPr>
-      <p:sp>
-        <p:nvSpPr>
-          <p:cNvPr id="4" name="슬라이드 번호 개체 틀 3">
-            <a:extLst>
-              <a:ext uri="{FF2B5EF4-FFF2-40B4-BE49-F238E27FC236}">
-                <a16:creationId xmlns:a16="http://schemas.microsoft.com/office/drawing/2014/main" id="{67D8800B-CA56-2E83-5A7A-80A20196A54A}"/>
-              </a:ext>
-            </a:extLst>
-          </p:cNvPr>
-          <p:cNvSpPr>
-            <a:spLocks noGrp="1"/>
-          </p:cNvSpPr>
-          <p:nvPr>
-            <p:ph type="sldNum" sz="quarter" idx="12"/>
-          </p:nvPr>
-        </p:nvSpPr>
-        <p:spPr>
-          <a:xfrm>
-            <a:off x="10514011" y="6036261"/>
-            <a:ext cx="753545" cy="365125"/>
-          </a:xfrm>
-        </p:spPr>
-        <p:txBody>
-          <a:bodyPr/>
-          <a:lstStyle/>
-          <a:p>
-            <a:fld id="{D57F1E4F-1CFF-5643-939E-217C01CDF565}" type="slidenum">
-              <a:rPr lang="en-US" smtClean="0"/>
-              <a:pPr/>
-              <a:t>19</a:t>
-            </a:fld>
-            <a:endParaRPr lang="en-US" dirty="0"/>
-          </a:p>
-        </p:txBody>
-      </p:sp>
       <p:sp>
         <p:nvSpPr>
           <p:cNvPr id="3" name="제목 1">
@@ -13184,6 +15707,985 @@
           <a:p>
             <a:pPr algn="l"/>
             <a:r>
+              <a:rPr lang="en-US" altLang="ko-KR" sz="2800" cap="none" dirty="0">
+                <a:solidFill>
+                  <a:schemeClr val="bg2">
+                    <a:lumMod val="25000"/>
+                  </a:schemeClr>
+                </a:solidFill>
+                <a:latin typeface="D2Coding" panose="020B0609020101020101" pitchFamily="49" charset="-127"/>
+                <a:ea typeface="D2Coding" panose="020B0609020101020101" pitchFamily="49" charset="-127"/>
+                <a:cs typeface="Segoe UI Light" panose="020B0502040204020203" pitchFamily="34" charset="0"/>
+              </a:rPr>
+              <a:t>recurrent neural networks</a:t>
+            </a:r>
+          </a:p>
+        </p:txBody>
+      </p:sp>
+      <p:sp>
+        <p:nvSpPr>
+          <p:cNvPr id="7" name="TextBox 6">
+            <a:extLst>
+              <a:ext uri="{FF2B5EF4-FFF2-40B4-BE49-F238E27FC236}">
+                <a16:creationId xmlns:a16="http://schemas.microsoft.com/office/drawing/2014/main" id="{59D1CDC5-14BE-9A40-EAF0-2CFF2F401B6A}"/>
+              </a:ext>
+            </a:extLst>
+          </p:cNvPr>
+          <p:cNvSpPr txBox="1"/>
+          <p:nvPr/>
+        </p:nvSpPr>
+        <p:spPr>
+          <a:xfrm>
+            <a:off x="809625" y="1341261"/>
+            <a:ext cx="7515226" cy="1121461"/>
+          </a:xfrm>
+          <a:prstGeom prst="rect">
+            <a:avLst/>
+          </a:prstGeom>
+          <a:solidFill>
+            <a:srgbClr val="76E3FF"/>
+          </a:solidFill>
+        </p:spPr>
+        <p:txBody>
+          <a:bodyPr wrap="square">
+            <a:spAutoFit/>
+          </a:bodyPr>
+          <a:lstStyle/>
+          <a:p>
+            <a:pPr>
+              <a:lnSpc>
+                <a:spcPts val="1575"/>
+              </a:lnSpc>
+              <a:buNone/>
+            </a:pPr>
+            <a:r>
+              <a:rPr lang="en-US" altLang="ko-KR" sz="1600" b="0" dirty="0">
+                <a:effectLst/>
+                <a:latin typeface="D2Coding" panose="020B0609020101020101" pitchFamily="49" charset="-127"/>
+                <a:ea typeface="D2Coding" panose="020B0609020101020101" pitchFamily="49" charset="-127"/>
+              </a:rPr>
+              <a:t>inputs = </a:t>
+            </a:r>
+            <a:r>
+              <a:rPr lang="en-US" altLang="ko-KR" sz="1600" b="0" dirty="0" err="1">
+                <a:effectLst/>
+                <a:latin typeface="D2Coding" panose="020B0609020101020101" pitchFamily="49" charset="-127"/>
+                <a:ea typeface="D2Coding" panose="020B0609020101020101" pitchFamily="49" charset="-127"/>
+              </a:rPr>
+              <a:t>keras.Input</a:t>
+            </a:r>
+            <a:r>
+              <a:rPr lang="en-US" altLang="ko-KR" sz="1600" b="0" dirty="0">
+                <a:effectLst/>
+                <a:latin typeface="D2Coding" panose="020B0609020101020101" pitchFamily="49" charset="-127"/>
+                <a:ea typeface="D2Coding" panose="020B0609020101020101" pitchFamily="49" charset="-127"/>
+              </a:rPr>
+              <a:t>(shape=(</a:t>
+            </a:r>
+            <a:r>
+              <a:rPr lang="en-US" altLang="ko-KR" sz="1600" b="0" dirty="0" err="1">
+                <a:effectLst/>
+                <a:latin typeface="D2Coding" panose="020B0609020101020101" pitchFamily="49" charset="-127"/>
+                <a:ea typeface="D2Coding" panose="020B0609020101020101" pitchFamily="49" charset="-127"/>
+              </a:rPr>
+              <a:t>sequence_length</a:t>
+            </a:r>
+            <a:r>
+              <a:rPr lang="en-US" altLang="ko-KR" sz="1600" b="0" dirty="0">
+                <a:effectLst/>
+                <a:latin typeface="D2Coding" panose="020B0609020101020101" pitchFamily="49" charset="-127"/>
+                <a:ea typeface="D2Coding" panose="020B0609020101020101" pitchFamily="49" charset="-127"/>
+              </a:rPr>
+              <a:t>, </a:t>
+            </a:r>
+            <a:r>
+              <a:rPr lang="en-US" altLang="ko-KR" sz="1600" b="0" dirty="0" err="1">
+                <a:effectLst/>
+                <a:latin typeface="D2Coding" panose="020B0609020101020101" pitchFamily="49" charset="-127"/>
+                <a:ea typeface="D2Coding" panose="020B0609020101020101" pitchFamily="49" charset="-127"/>
+              </a:rPr>
+              <a:t>raw_data.shape</a:t>
+            </a:r>
+            <a:r>
+              <a:rPr lang="en-US" altLang="ko-KR" sz="1600" b="0" dirty="0">
+                <a:effectLst/>
+                <a:latin typeface="D2Coding" panose="020B0609020101020101" pitchFamily="49" charset="-127"/>
+                <a:ea typeface="D2Coding" panose="020B0609020101020101" pitchFamily="49" charset="-127"/>
+              </a:rPr>
+              <a:t>[-1]))</a:t>
+            </a:r>
+          </a:p>
+          <a:p>
+            <a:pPr>
+              <a:lnSpc>
+                <a:spcPts val="1575"/>
+              </a:lnSpc>
+              <a:buNone/>
+            </a:pPr>
+            <a:r>
+              <a:rPr lang="en-US" altLang="ko-KR" sz="1600" b="0" dirty="0">
+                <a:effectLst/>
+                <a:latin typeface="D2Coding" panose="020B0609020101020101" pitchFamily="49" charset="-127"/>
+                <a:ea typeface="D2Coding" panose="020B0609020101020101" pitchFamily="49" charset="-127"/>
+              </a:rPr>
+              <a:t>x = </a:t>
+            </a:r>
+            <a:r>
+              <a:rPr lang="en-US" altLang="ko-KR" sz="1600" b="0" dirty="0" err="1">
+                <a:effectLst/>
+                <a:latin typeface="D2Coding" panose="020B0609020101020101" pitchFamily="49" charset="-127"/>
+                <a:ea typeface="D2Coding" panose="020B0609020101020101" pitchFamily="49" charset="-127"/>
+              </a:rPr>
+              <a:t>layers.LSTM</a:t>
+            </a:r>
+            <a:r>
+              <a:rPr lang="en-US" altLang="ko-KR" sz="1600" b="0" dirty="0">
+                <a:effectLst/>
+                <a:latin typeface="D2Coding" panose="020B0609020101020101" pitchFamily="49" charset="-127"/>
+                <a:ea typeface="D2Coding" panose="020B0609020101020101" pitchFamily="49" charset="-127"/>
+              </a:rPr>
+              <a:t>(32, </a:t>
+            </a:r>
+            <a:r>
+              <a:rPr lang="en-US" altLang="ko-KR" sz="1600" b="0" dirty="0" err="1">
+                <a:effectLst/>
+                <a:latin typeface="D2Coding" panose="020B0609020101020101" pitchFamily="49" charset="-127"/>
+                <a:ea typeface="D2Coding" panose="020B0609020101020101" pitchFamily="49" charset="-127"/>
+              </a:rPr>
+              <a:t>recurrent_dropout</a:t>
+            </a:r>
+            <a:r>
+              <a:rPr lang="en-US" altLang="ko-KR" sz="1600" b="0" dirty="0">
+                <a:effectLst/>
+                <a:latin typeface="D2Coding" panose="020B0609020101020101" pitchFamily="49" charset="-127"/>
+                <a:ea typeface="D2Coding" panose="020B0609020101020101" pitchFamily="49" charset="-127"/>
+              </a:rPr>
+              <a:t>=0.25)(inputs)</a:t>
+            </a:r>
+          </a:p>
+          <a:p>
+            <a:pPr>
+              <a:lnSpc>
+                <a:spcPts val="1575"/>
+              </a:lnSpc>
+              <a:buNone/>
+            </a:pPr>
+            <a:r>
+              <a:rPr lang="en-US" altLang="ko-KR" sz="1600" b="0" dirty="0">
+                <a:effectLst/>
+                <a:latin typeface="D2Coding" panose="020B0609020101020101" pitchFamily="49" charset="-127"/>
+                <a:ea typeface="D2Coding" panose="020B0609020101020101" pitchFamily="49" charset="-127"/>
+              </a:rPr>
+              <a:t>x = </a:t>
+            </a:r>
+            <a:r>
+              <a:rPr lang="en-US" altLang="ko-KR" sz="1600" b="0" dirty="0" err="1">
+                <a:effectLst/>
+                <a:latin typeface="D2Coding" panose="020B0609020101020101" pitchFamily="49" charset="-127"/>
+                <a:ea typeface="D2Coding" panose="020B0609020101020101" pitchFamily="49" charset="-127"/>
+              </a:rPr>
+              <a:t>layers.Dropout</a:t>
+            </a:r>
+            <a:r>
+              <a:rPr lang="en-US" altLang="ko-KR" sz="1600" b="0" dirty="0">
+                <a:effectLst/>
+                <a:latin typeface="D2Coding" panose="020B0609020101020101" pitchFamily="49" charset="-127"/>
+                <a:ea typeface="D2Coding" panose="020B0609020101020101" pitchFamily="49" charset="-127"/>
+              </a:rPr>
+              <a:t>(0.5)(x)</a:t>
+            </a:r>
+          </a:p>
+          <a:p>
+            <a:pPr>
+              <a:lnSpc>
+                <a:spcPts val="1575"/>
+              </a:lnSpc>
+              <a:buNone/>
+            </a:pPr>
+            <a:r>
+              <a:rPr lang="en-US" altLang="ko-KR" sz="1600" b="0" dirty="0">
+                <a:effectLst/>
+                <a:latin typeface="D2Coding" panose="020B0609020101020101" pitchFamily="49" charset="-127"/>
+                <a:ea typeface="D2Coding" panose="020B0609020101020101" pitchFamily="49" charset="-127"/>
+              </a:rPr>
+              <a:t>outputs = </a:t>
+            </a:r>
+            <a:r>
+              <a:rPr lang="en-US" altLang="ko-KR" sz="1600" b="0" dirty="0" err="1">
+                <a:effectLst/>
+                <a:latin typeface="D2Coding" panose="020B0609020101020101" pitchFamily="49" charset="-127"/>
+                <a:ea typeface="D2Coding" panose="020B0609020101020101" pitchFamily="49" charset="-127"/>
+              </a:rPr>
+              <a:t>layers.Dense</a:t>
+            </a:r>
+            <a:r>
+              <a:rPr lang="en-US" altLang="ko-KR" sz="1600" b="0" dirty="0">
+                <a:effectLst/>
+                <a:latin typeface="D2Coding" panose="020B0609020101020101" pitchFamily="49" charset="-127"/>
+                <a:ea typeface="D2Coding" panose="020B0609020101020101" pitchFamily="49" charset="-127"/>
+              </a:rPr>
+              <a:t>(1)(x)</a:t>
+            </a:r>
+          </a:p>
+          <a:p>
+            <a:pPr>
+              <a:lnSpc>
+                <a:spcPts val="1575"/>
+              </a:lnSpc>
+              <a:buNone/>
+            </a:pPr>
+            <a:r>
+              <a:rPr lang="en-US" altLang="ko-KR" sz="1600" b="0" dirty="0">
+                <a:effectLst/>
+                <a:latin typeface="D2Coding" panose="020B0609020101020101" pitchFamily="49" charset="-127"/>
+                <a:ea typeface="D2Coding" panose="020B0609020101020101" pitchFamily="49" charset="-127"/>
+              </a:rPr>
+              <a:t>model = </a:t>
+            </a:r>
+            <a:r>
+              <a:rPr lang="en-US" altLang="ko-KR" sz="1600" b="0" dirty="0" err="1">
+                <a:effectLst/>
+                <a:latin typeface="D2Coding" panose="020B0609020101020101" pitchFamily="49" charset="-127"/>
+                <a:ea typeface="D2Coding" panose="020B0609020101020101" pitchFamily="49" charset="-127"/>
+              </a:rPr>
+              <a:t>keras.Model</a:t>
+            </a:r>
+            <a:r>
+              <a:rPr lang="en-US" altLang="ko-KR" sz="1600" b="0" dirty="0">
+                <a:effectLst/>
+                <a:latin typeface="D2Coding" panose="020B0609020101020101" pitchFamily="49" charset="-127"/>
+                <a:ea typeface="D2Coding" panose="020B0609020101020101" pitchFamily="49" charset="-127"/>
+              </a:rPr>
+              <a:t>(inputs, outputs)</a:t>
+            </a:r>
+          </a:p>
+        </p:txBody>
+      </p:sp>
+      <p:sp>
+        <p:nvSpPr>
+          <p:cNvPr id="10" name="TextBox 9">
+            <a:extLst>
+              <a:ext uri="{FF2B5EF4-FFF2-40B4-BE49-F238E27FC236}">
+                <a16:creationId xmlns:a16="http://schemas.microsoft.com/office/drawing/2014/main" id="{010EE558-E2BC-B80C-4BF2-E931A511D8A4}"/>
+              </a:ext>
+            </a:extLst>
+          </p:cNvPr>
+          <p:cNvSpPr txBox="1"/>
+          <p:nvPr/>
+        </p:nvSpPr>
+        <p:spPr>
+          <a:xfrm>
+            <a:off x="8824913" y="1775944"/>
+            <a:ext cx="2004494" cy="369332"/>
+          </a:xfrm>
+          <a:prstGeom prst="rect">
+            <a:avLst/>
+          </a:prstGeom>
+          <a:noFill/>
+        </p:spPr>
+        <p:txBody>
+          <a:bodyPr wrap="square">
+            <a:spAutoFit/>
+          </a:bodyPr>
+          <a:lstStyle/>
+          <a:p>
+            <a:r>
+              <a:rPr lang="en-US" altLang="ko-KR" b="0" i="0" dirty="0">
+                <a:effectLst/>
+                <a:latin typeface="D2Coding" panose="020B0609020101020101" pitchFamily="49" charset="-127"/>
+                <a:ea typeface="D2Coding" panose="020B0609020101020101" pitchFamily="49" charset="-127"/>
+              </a:rPr>
+              <a:t>Test MAE: 2.52</a:t>
+            </a:r>
+            <a:endParaRPr lang="ko-KR" altLang="en-US" dirty="0">
+              <a:latin typeface="D2Coding" panose="020B0609020101020101" pitchFamily="49" charset="-127"/>
+              <a:ea typeface="D2Coding" panose="020B0609020101020101" pitchFamily="49" charset="-127"/>
+            </a:endParaRPr>
+          </a:p>
+        </p:txBody>
+      </p:sp>
+      <p:sp>
+        <p:nvSpPr>
+          <p:cNvPr id="15" name="TextBox 14">
+            <a:extLst>
+              <a:ext uri="{FF2B5EF4-FFF2-40B4-BE49-F238E27FC236}">
+                <a16:creationId xmlns:a16="http://schemas.microsoft.com/office/drawing/2014/main" id="{DAF0AA87-447C-35A9-3A70-2528D351D0E2}"/>
+              </a:ext>
+            </a:extLst>
+          </p:cNvPr>
+          <p:cNvSpPr txBox="1"/>
+          <p:nvPr/>
+        </p:nvSpPr>
+        <p:spPr>
+          <a:xfrm>
+            <a:off x="809625" y="3042130"/>
+            <a:ext cx="7515227" cy="1326645"/>
+          </a:xfrm>
+          <a:prstGeom prst="rect">
+            <a:avLst/>
+          </a:prstGeom>
+          <a:solidFill>
+            <a:srgbClr val="76E3FF"/>
+          </a:solidFill>
+        </p:spPr>
+        <p:txBody>
+          <a:bodyPr wrap="square">
+            <a:spAutoFit/>
+          </a:bodyPr>
+          <a:lstStyle/>
+          <a:p>
+            <a:pPr>
+              <a:lnSpc>
+                <a:spcPts val="1575"/>
+              </a:lnSpc>
+              <a:buNone/>
+            </a:pPr>
+            <a:r>
+              <a:rPr lang="en-US" altLang="ko-KR" sz="1600" b="0" dirty="0">
+                <a:effectLst/>
+                <a:latin typeface="D2Coding" panose="020B0609020101020101" pitchFamily="49" charset="-127"/>
+                <a:ea typeface="D2Coding" panose="020B0609020101020101" pitchFamily="49" charset="-127"/>
+              </a:rPr>
+              <a:t>inputs = </a:t>
+            </a:r>
+            <a:r>
+              <a:rPr lang="en-US" altLang="ko-KR" sz="1600" b="0" dirty="0" err="1">
+                <a:effectLst/>
+                <a:latin typeface="D2Coding" panose="020B0609020101020101" pitchFamily="49" charset="-127"/>
+                <a:ea typeface="D2Coding" panose="020B0609020101020101" pitchFamily="49" charset="-127"/>
+              </a:rPr>
+              <a:t>keras.Input</a:t>
+            </a:r>
+            <a:r>
+              <a:rPr lang="en-US" altLang="ko-KR" sz="1600" b="0" dirty="0">
+                <a:effectLst/>
+                <a:latin typeface="D2Coding" panose="020B0609020101020101" pitchFamily="49" charset="-127"/>
+                <a:ea typeface="D2Coding" panose="020B0609020101020101" pitchFamily="49" charset="-127"/>
+              </a:rPr>
+              <a:t>(shape=(</a:t>
+            </a:r>
+            <a:r>
+              <a:rPr lang="en-US" altLang="ko-KR" sz="1600" b="0" dirty="0" err="1">
+                <a:effectLst/>
+                <a:latin typeface="D2Coding" panose="020B0609020101020101" pitchFamily="49" charset="-127"/>
+                <a:ea typeface="D2Coding" panose="020B0609020101020101" pitchFamily="49" charset="-127"/>
+              </a:rPr>
+              <a:t>sequence_length</a:t>
+            </a:r>
+            <a:r>
+              <a:rPr lang="en-US" altLang="ko-KR" sz="1600" b="0" dirty="0">
+                <a:effectLst/>
+                <a:latin typeface="D2Coding" panose="020B0609020101020101" pitchFamily="49" charset="-127"/>
+                <a:ea typeface="D2Coding" panose="020B0609020101020101" pitchFamily="49" charset="-127"/>
+              </a:rPr>
+              <a:t>, </a:t>
+            </a:r>
+            <a:r>
+              <a:rPr lang="en-US" altLang="ko-KR" sz="1600" b="0" dirty="0" err="1">
+                <a:effectLst/>
+                <a:latin typeface="D2Coding" panose="020B0609020101020101" pitchFamily="49" charset="-127"/>
+                <a:ea typeface="D2Coding" panose="020B0609020101020101" pitchFamily="49" charset="-127"/>
+              </a:rPr>
+              <a:t>raw_data.shape</a:t>
+            </a:r>
+            <a:r>
+              <a:rPr lang="en-US" altLang="ko-KR" sz="1600" b="0" dirty="0">
+                <a:effectLst/>
+                <a:latin typeface="D2Coding" panose="020B0609020101020101" pitchFamily="49" charset="-127"/>
+                <a:ea typeface="D2Coding" panose="020B0609020101020101" pitchFamily="49" charset="-127"/>
+              </a:rPr>
+              <a:t>[-1]))</a:t>
+            </a:r>
+          </a:p>
+          <a:p>
+            <a:pPr>
+              <a:lnSpc>
+                <a:spcPts val="1575"/>
+              </a:lnSpc>
+              <a:buNone/>
+            </a:pPr>
+            <a:r>
+              <a:rPr lang="en-US" altLang="ko-KR" sz="1600" b="0" dirty="0">
+                <a:effectLst/>
+                <a:latin typeface="D2Coding" panose="020B0609020101020101" pitchFamily="49" charset="-127"/>
+                <a:ea typeface="D2Coding" panose="020B0609020101020101" pitchFamily="49" charset="-127"/>
+              </a:rPr>
+              <a:t>x = </a:t>
+            </a:r>
+            <a:r>
+              <a:rPr lang="en-US" altLang="ko-KR" sz="1600" b="0" dirty="0" err="1">
+                <a:effectLst/>
+                <a:latin typeface="D2Coding" panose="020B0609020101020101" pitchFamily="49" charset="-127"/>
+                <a:ea typeface="D2Coding" panose="020B0609020101020101" pitchFamily="49" charset="-127"/>
+              </a:rPr>
+              <a:t>layers.GRU</a:t>
+            </a:r>
+            <a:r>
+              <a:rPr lang="en-US" altLang="ko-KR" sz="1600" b="0" dirty="0">
+                <a:effectLst/>
+                <a:latin typeface="D2Coding" panose="020B0609020101020101" pitchFamily="49" charset="-127"/>
+                <a:ea typeface="D2Coding" panose="020B0609020101020101" pitchFamily="49" charset="-127"/>
+              </a:rPr>
+              <a:t>(32, </a:t>
+            </a:r>
+            <a:r>
+              <a:rPr lang="en-US" altLang="ko-KR" sz="1600" b="0" dirty="0" err="1">
+                <a:effectLst/>
+                <a:latin typeface="D2Coding" panose="020B0609020101020101" pitchFamily="49" charset="-127"/>
+                <a:ea typeface="D2Coding" panose="020B0609020101020101" pitchFamily="49" charset="-127"/>
+              </a:rPr>
+              <a:t>recurrent_dropout</a:t>
+            </a:r>
+            <a:r>
+              <a:rPr lang="en-US" altLang="ko-KR" sz="1600" b="0" dirty="0">
+                <a:effectLst/>
+                <a:latin typeface="D2Coding" panose="020B0609020101020101" pitchFamily="49" charset="-127"/>
+                <a:ea typeface="D2Coding" panose="020B0609020101020101" pitchFamily="49" charset="-127"/>
+              </a:rPr>
+              <a:t>=0.5, </a:t>
+            </a:r>
+            <a:r>
+              <a:rPr lang="en-US" altLang="ko-KR" sz="1600" b="0" dirty="0" err="1">
+                <a:effectLst/>
+                <a:latin typeface="D2Coding" panose="020B0609020101020101" pitchFamily="49" charset="-127"/>
+                <a:ea typeface="D2Coding" panose="020B0609020101020101" pitchFamily="49" charset="-127"/>
+              </a:rPr>
+              <a:t>return_sequences</a:t>
+            </a:r>
+            <a:r>
+              <a:rPr lang="en-US" altLang="ko-KR" sz="1600" b="0" dirty="0">
+                <a:effectLst/>
+                <a:latin typeface="D2Coding" panose="020B0609020101020101" pitchFamily="49" charset="-127"/>
+                <a:ea typeface="D2Coding" panose="020B0609020101020101" pitchFamily="49" charset="-127"/>
+              </a:rPr>
+              <a:t>=True)(inputs)</a:t>
+            </a:r>
+          </a:p>
+          <a:p>
+            <a:pPr>
+              <a:lnSpc>
+                <a:spcPts val="1575"/>
+              </a:lnSpc>
+              <a:buNone/>
+            </a:pPr>
+            <a:r>
+              <a:rPr lang="en-US" altLang="ko-KR" sz="1600" b="0" dirty="0">
+                <a:effectLst/>
+                <a:latin typeface="D2Coding" panose="020B0609020101020101" pitchFamily="49" charset="-127"/>
+                <a:ea typeface="D2Coding" panose="020B0609020101020101" pitchFamily="49" charset="-127"/>
+              </a:rPr>
+              <a:t>x = </a:t>
+            </a:r>
+            <a:r>
+              <a:rPr lang="en-US" altLang="ko-KR" sz="1600" b="0" dirty="0" err="1">
+                <a:effectLst/>
+                <a:latin typeface="D2Coding" panose="020B0609020101020101" pitchFamily="49" charset="-127"/>
+                <a:ea typeface="D2Coding" panose="020B0609020101020101" pitchFamily="49" charset="-127"/>
+              </a:rPr>
+              <a:t>layers.GRU</a:t>
+            </a:r>
+            <a:r>
+              <a:rPr lang="en-US" altLang="ko-KR" sz="1600" b="0" dirty="0">
+                <a:effectLst/>
+                <a:latin typeface="D2Coding" panose="020B0609020101020101" pitchFamily="49" charset="-127"/>
+                <a:ea typeface="D2Coding" panose="020B0609020101020101" pitchFamily="49" charset="-127"/>
+              </a:rPr>
+              <a:t>(32, </a:t>
+            </a:r>
+            <a:r>
+              <a:rPr lang="en-US" altLang="ko-KR" sz="1600" b="0" dirty="0" err="1">
+                <a:effectLst/>
+                <a:latin typeface="D2Coding" panose="020B0609020101020101" pitchFamily="49" charset="-127"/>
+                <a:ea typeface="D2Coding" panose="020B0609020101020101" pitchFamily="49" charset="-127"/>
+              </a:rPr>
+              <a:t>recurrent_dropout</a:t>
+            </a:r>
+            <a:r>
+              <a:rPr lang="en-US" altLang="ko-KR" sz="1600" b="0" dirty="0">
+                <a:effectLst/>
+                <a:latin typeface="D2Coding" panose="020B0609020101020101" pitchFamily="49" charset="-127"/>
+                <a:ea typeface="D2Coding" panose="020B0609020101020101" pitchFamily="49" charset="-127"/>
+              </a:rPr>
+              <a:t>=0.5)(x)</a:t>
+            </a:r>
+          </a:p>
+          <a:p>
+            <a:pPr>
+              <a:lnSpc>
+                <a:spcPts val="1575"/>
+              </a:lnSpc>
+              <a:buNone/>
+            </a:pPr>
+            <a:r>
+              <a:rPr lang="en-US" altLang="ko-KR" sz="1600" b="0" dirty="0">
+                <a:effectLst/>
+                <a:latin typeface="D2Coding" panose="020B0609020101020101" pitchFamily="49" charset="-127"/>
+                <a:ea typeface="D2Coding" panose="020B0609020101020101" pitchFamily="49" charset="-127"/>
+              </a:rPr>
+              <a:t>x = </a:t>
+            </a:r>
+            <a:r>
+              <a:rPr lang="en-US" altLang="ko-KR" sz="1600" b="0" dirty="0" err="1">
+                <a:effectLst/>
+                <a:latin typeface="D2Coding" panose="020B0609020101020101" pitchFamily="49" charset="-127"/>
+                <a:ea typeface="D2Coding" panose="020B0609020101020101" pitchFamily="49" charset="-127"/>
+              </a:rPr>
+              <a:t>layers.Dropout</a:t>
+            </a:r>
+            <a:r>
+              <a:rPr lang="en-US" altLang="ko-KR" sz="1600" b="0" dirty="0">
+                <a:effectLst/>
+                <a:latin typeface="D2Coding" panose="020B0609020101020101" pitchFamily="49" charset="-127"/>
+                <a:ea typeface="D2Coding" panose="020B0609020101020101" pitchFamily="49" charset="-127"/>
+              </a:rPr>
+              <a:t>(0.5)(x)</a:t>
+            </a:r>
+          </a:p>
+          <a:p>
+            <a:pPr>
+              <a:lnSpc>
+                <a:spcPts val="1575"/>
+              </a:lnSpc>
+              <a:buNone/>
+            </a:pPr>
+            <a:r>
+              <a:rPr lang="en-US" altLang="ko-KR" sz="1600" b="0" dirty="0">
+                <a:effectLst/>
+                <a:latin typeface="D2Coding" panose="020B0609020101020101" pitchFamily="49" charset="-127"/>
+                <a:ea typeface="D2Coding" panose="020B0609020101020101" pitchFamily="49" charset="-127"/>
+              </a:rPr>
+              <a:t>outputs = </a:t>
+            </a:r>
+            <a:r>
+              <a:rPr lang="en-US" altLang="ko-KR" sz="1600" b="0" dirty="0" err="1">
+                <a:effectLst/>
+                <a:latin typeface="D2Coding" panose="020B0609020101020101" pitchFamily="49" charset="-127"/>
+                <a:ea typeface="D2Coding" panose="020B0609020101020101" pitchFamily="49" charset="-127"/>
+              </a:rPr>
+              <a:t>layers.Dense</a:t>
+            </a:r>
+            <a:r>
+              <a:rPr lang="en-US" altLang="ko-KR" sz="1600" b="0" dirty="0">
+                <a:effectLst/>
+                <a:latin typeface="D2Coding" panose="020B0609020101020101" pitchFamily="49" charset="-127"/>
+                <a:ea typeface="D2Coding" panose="020B0609020101020101" pitchFamily="49" charset="-127"/>
+              </a:rPr>
+              <a:t>(1)(x)</a:t>
+            </a:r>
+          </a:p>
+          <a:p>
+            <a:pPr>
+              <a:lnSpc>
+                <a:spcPts val="1575"/>
+              </a:lnSpc>
+              <a:buNone/>
+            </a:pPr>
+            <a:r>
+              <a:rPr lang="en-US" altLang="ko-KR" sz="1600" b="0" dirty="0">
+                <a:effectLst/>
+                <a:latin typeface="D2Coding" panose="020B0609020101020101" pitchFamily="49" charset="-127"/>
+                <a:ea typeface="D2Coding" panose="020B0609020101020101" pitchFamily="49" charset="-127"/>
+              </a:rPr>
+              <a:t>model = </a:t>
+            </a:r>
+            <a:r>
+              <a:rPr lang="en-US" altLang="ko-KR" sz="1600" b="0" dirty="0" err="1">
+                <a:effectLst/>
+                <a:latin typeface="D2Coding" panose="020B0609020101020101" pitchFamily="49" charset="-127"/>
+                <a:ea typeface="D2Coding" panose="020B0609020101020101" pitchFamily="49" charset="-127"/>
+              </a:rPr>
+              <a:t>keras.Model</a:t>
+            </a:r>
+            <a:r>
+              <a:rPr lang="en-US" altLang="ko-KR" sz="1600" b="0" dirty="0">
+                <a:effectLst/>
+                <a:latin typeface="D2Coding" panose="020B0609020101020101" pitchFamily="49" charset="-127"/>
+                <a:ea typeface="D2Coding" panose="020B0609020101020101" pitchFamily="49" charset="-127"/>
+              </a:rPr>
+              <a:t>(inputs, outputs)</a:t>
+            </a:r>
+          </a:p>
+        </p:txBody>
+      </p:sp>
+      <p:sp>
+        <p:nvSpPr>
+          <p:cNvPr id="17" name="TextBox 16">
+            <a:extLst>
+              <a:ext uri="{FF2B5EF4-FFF2-40B4-BE49-F238E27FC236}">
+                <a16:creationId xmlns:a16="http://schemas.microsoft.com/office/drawing/2014/main" id="{309AEA91-546B-4BC2-4B10-9117134C5CF3}"/>
+              </a:ext>
+            </a:extLst>
+          </p:cNvPr>
+          <p:cNvSpPr txBox="1"/>
+          <p:nvPr/>
+        </p:nvSpPr>
+        <p:spPr>
+          <a:xfrm>
+            <a:off x="8824913" y="3520786"/>
+            <a:ext cx="2224088" cy="369332"/>
+          </a:xfrm>
+          <a:prstGeom prst="rect">
+            <a:avLst/>
+          </a:prstGeom>
+          <a:noFill/>
+        </p:spPr>
+        <p:txBody>
+          <a:bodyPr wrap="square">
+            <a:spAutoFit/>
+          </a:bodyPr>
+          <a:lstStyle/>
+          <a:p>
+            <a:r>
+              <a:rPr lang="en-US" altLang="ko-KR" b="0" i="0" dirty="0">
+                <a:effectLst/>
+                <a:latin typeface="D2Coding" panose="020B0609020101020101" pitchFamily="49" charset="-127"/>
+                <a:ea typeface="D2Coding" panose="020B0609020101020101" pitchFamily="49" charset="-127"/>
+              </a:rPr>
+              <a:t>Test MAE: 2.45</a:t>
+            </a:r>
+            <a:endParaRPr lang="ko-KR" altLang="en-US" dirty="0">
+              <a:latin typeface="D2Coding" panose="020B0609020101020101" pitchFamily="49" charset="-127"/>
+              <a:ea typeface="D2Coding" panose="020B0609020101020101" pitchFamily="49" charset="-127"/>
+            </a:endParaRPr>
+          </a:p>
+        </p:txBody>
+      </p:sp>
+      <p:sp>
+        <p:nvSpPr>
+          <p:cNvPr id="19" name="TextBox 18">
+            <a:extLst>
+              <a:ext uri="{FF2B5EF4-FFF2-40B4-BE49-F238E27FC236}">
+                <a16:creationId xmlns:a16="http://schemas.microsoft.com/office/drawing/2014/main" id="{655BFAF5-BDF8-7605-243F-F12F89303CD6}"/>
+              </a:ext>
+            </a:extLst>
+          </p:cNvPr>
+          <p:cNvSpPr txBox="1"/>
+          <p:nvPr/>
+        </p:nvSpPr>
+        <p:spPr>
+          <a:xfrm>
+            <a:off x="809625" y="5161254"/>
+            <a:ext cx="7515225" cy="916276"/>
+          </a:xfrm>
+          <a:prstGeom prst="rect">
+            <a:avLst/>
+          </a:prstGeom>
+          <a:solidFill>
+            <a:srgbClr val="76E3FF"/>
+          </a:solidFill>
+        </p:spPr>
+        <p:txBody>
+          <a:bodyPr wrap="square">
+            <a:spAutoFit/>
+          </a:bodyPr>
+          <a:lstStyle/>
+          <a:p>
+            <a:pPr>
+              <a:lnSpc>
+                <a:spcPts val="1575"/>
+              </a:lnSpc>
+              <a:buNone/>
+            </a:pPr>
+            <a:r>
+              <a:rPr lang="en-US" altLang="ko-KR" sz="1600" b="0" dirty="0">
+                <a:effectLst/>
+                <a:latin typeface="D2Coding" panose="020B0609020101020101" pitchFamily="49" charset="-127"/>
+                <a:ea typeface="D2Coding" panose="020B0609020101020101" pitchFamily="49" charset="-127"/>
+              </a:rPr>
+              <a:t>inputs = </a:t>
+            </a:r>
+            <a:r>
+              <a:rPr lang="en-US" altLang="ko-KR" sz="1600" b="0" dirty="0" err="1">
+                <a:effectLst/>
+                <a:latin typeface="D2Coding" panose="020B0609020101020101" pitchFamily="49" charset="-127"/>
+                <a:ea typeface="D2Coding" panose="020B0609020101020101" pitchFamily="49" charset="-127"/>
+              </a:rPr>
+              <a:t>keras.Input</a:t>
+            </a:r>
+            <a:r>
+              <a:rPr lang="en-US" altLang="ko-KR" sz="1600" b="0" dirty="0">
+                <a:effectLst/>
+                <a:latin typeface="D2Coding" panose="020B0609020101020101" pitchFamily="49" charset="-127"/>
+                <a:ea typeface="D2Coding" panose="020B0609020101020101" pitchFamily="49" charset="-127"/>
+              </a:rPr>
+              <a:t>(shape=(</a:t>
+            </a:r>
+            <a:r>
+              <a:rPr lang="en-US" altLang="ko-KR" sz="1600" b="0" dirty="0" err="1">
+                <a:effectLst/>
+                <a:latin typeface="D2Coding" panose="020B0609020101020101" pitchFamily="49" charset="-127"/>
+                <a:ea typeface="D2Coding" panose="020B0609020101020101" pitchFamily="49" charset="-127"/>
+              </a:rPr>
+              <a:t>sequence_length</a:t>
+            </a:r>
+            <a:r>
+              <a:rPr lang="en-US" altLang="ko-KR" sz="1600" b="0" dirty="0">
+                <a:effectLst/>
+                <a:latin typeface="D2Coding" panose="020B0609020101020101" pitchFamily="49" charset="-127"/>
+                <a:ea typeface="D2Coding" panose="020B0609020101020101" pitchFamily="49" charset="-127"/>
+              </a:rPr>
+              <a:t>, </a:t>
+            </a:r>
+            <a:r>
+              <a:rPr lang="en-US" altLang="ko-KR" sz="1600" b="0" dirty="0" err="1">
+                <a:effectLst/>
+                <a:latin typeface="D2Coding" panose="020B0609020101020101" pitchFamily="49" charset="-127"/>
+                <a:ea typeface="D2Coding" panose="020B0609020101020101" pitchFamily="49" charset="-127"/>
+              </a:rPr>
+              <a:t>raw_data.shape</a:t>
+            </a:r>
+            <a:r>
+              <a:rPr lang="en-US" altLang="ko-KR" sz="1600" b="0" dirty="0">
+                <a:effectLst/>
+                <a:latin typeface="D2Coding" panose="020B0609020101020101" pitchFamily="49" charset="-127"/>
+                <a:ea typeface="D2Coding" panose="020B0609020101020101" pitchFamily="49" charset="-127"/>
+              </a:rPr>
+              <a:t>[-1]))</a:t>
+            </a:r>
+          </a:p>
+          <a:p>
+            <a:pPr>
+              <a:lnSpc>
+                <a:spcPts val="1575"/>
+              </a:lnSpc>
+              <a:buNone/>
+            </a:pPr>
+            <a:r>
+              <a:rPr lang="en-US" altLang="ko-KR" sz="1600" b="0" dirty="0">
+                <a:effectLst/>
+                <a:latin typeface="D2Coding" panose="020B0609020101020101" pitchFamily="49" charset="-127"/>
+                <a:ea typeface="D2Coding" panose="020B0609020101020101" pitchFamily="49" charset="-127"/>
+              </a:rPr>
+              <a:t>x = </a:t>
+            </a:r>
+            <a:r>
+              <a:rPr lang="en-US" altLang="ko-KR" sz="1600" b="0" dirty="0" err="1">
+                <a:effectLst/>
+                <a:latin typeface="D2Coding" panose="020B0609020101020101" pitchFamily="49" charset="-127"/>
+                <a:ea typeface="D2Coding" panose="020B0609020101020101" pitchFamily="49" charset="-127"/>
+              </a:rPr>
+              <a:t>layers.Bidirectional</a:t>
+            </a:r>
+            <a:r>
+              <a:rPr lang="en-US" altLang="ko-KR" sz="1600" b="0" dirty="0">
+                <a:effectLst/>
+                <a:latin typeface="D2Coding" panose="020B0609020101020101" pitchFamily="49" charset="-127"/>
+                <a:ea typeface="D2Coding" panose="020B0609020101020101" pitchFamily="49" charset="-127"/>
+              </a:rPr>
+              <a:t>(</a:t>
+            </a:r>
+            <a:r>
+              <a:rPr lang="en-US" altLang="ko-KR" sz="1600" b="0" dirty="0" err="1">
+                <a:effectLst/>
+                <a:latin typeface="D2Coding" panose="020B0609020101020101" pitchFamily="49" charset="-127"/>
+                <a:ea typeface="D2Coding" panose="020B0609020101020101" pitchFamily="49" charset="-127"/>
+              </a:rPr>
+              <a:t>layers.LSTM</a:t>
+            </a:r>
+            <a:r>
+              <a:rPr lang="en-US" altLang="ko-KR" sz="1600" b="0" dirty="0">
+                <a:effectLst/>
+                <a:latin typeface="D2Coding" panose="020B0609020101020101" pitchFamily="49" charset="-127"/>
+                <a:ea typeface="D2Coding" panose="020B0609020101020101" pitchFamily="49" charset="-127"/>
+              </a:rPr>
+              <a:t>(16))(inputs)</a:t>
+            </a:r>
+          </a:p>
+          <a:p>
+            <a:pPr>
+              <a:lnSpc>
+                <a:spcPts val="1575"/>
+              </a:lnSpc>
+              <a:buNone/>
+            </a:pPr>
+            <a:r>
+              <a:rPr lang="en-US" altLang="ko-KR" sz="1600" b="0" dirty="0">
+                <a:effectLst/>
+                <a:latin typeface="D2Coding" panose="020B0609020101020101" pitchFamily="49" charset="-127"/>
+                <a:ea typeface="D2Coding" panose="020B0609020101020101" pitchFamily="49" charset="-127"/>
+              </a:rPr>
+              <a:t>outputs = </a:t>
+            </a:r>
+            <a:r>
+              <a:rPr lang="en-US" altLang="ko-KR" sz="1600" b="0" dirty="0" err="1">
+                <a:effectLst/>
+                <a:latin typeface="D2Coding" panose="020B0609020101020101" pitchFamily="49" charset="-127"/>
+                <a:ea typeface="D2Coding" panose="020B0609020101020101" pitchFamily="49" charset="-127"/>
+              </a:rPr>
+              <a:t>layers.Dense</a:t>
+            </a:r>
+            <a:r>
+              <a:rPr lang="en-US" altLang="ko-KR" sz="1600" b="0" dirty="0">
+                <a:effectLst/>
+                <a:latin typeface="D2Coding" panose="020B0609020101020101" pitchFamily="49" charset="-127"/>
+                <a:ea typeface="D2Coding" panose="020B0609020101020101" pitchFamily="49" charset="-127"/>
+              </a:rPr>
+              <a:t>(1)(x)</a:t>
+            </a:r>
+          </a:p>
+          <a:p>
+            <a:pPr>
+              <a:lnSpc>
+                <a:spcPts val="1575"/>
+              </a:lnSpc>
+              <a:buNone/>
+            </a:pPr>
+            <a:r>
+              <a:rPr lang="en-US" altLang="ko-KR" sz="1600" b="0" dirty="0">
+                <a:effectLst/>
+                <a:latin typeface="D2Coding" panose="020B0609020101020101" pitchFamily="49" charset="-127"/>
+                <a:ea typeface="D2Coding" panose="020B0609020101020101" pitchFamily="49" charset="-127"/>
+              </a:rPr>
+              <a:t>model = </a:t>
+            </a:r>
+            <a:r>
+              <a:rPr lang="en-US" altLang="ko-KR" sz="1600" b="0" dirty="0" err="1">
+                <a:effectLst/>
+                <a:latin typeface="D2Coding" panose="020B0609020101020101" pitchFamily="49" charset="-127"/>
+                <a:ea typeface="D2Coding" panose="020B0609020101020101" pitchFamily="49" charset="-127"/>
+              </a:rPr>
+              <a:t>keras.Model</a:t>
+            </a:r>
+            <a:r>
+              <a:rPr lang="en-US" altLang="ko-KR" sz="1600" b="0" dirty="0">
+                <a:effectLst/>
+                <a:latin typeface="D2Coding" panose="020B0609020101020101" pitchFamily="49" charset="-127"/>
+                <a:ea typeface="D2Coding" panose="020B0609020101020101" pitchFamily="49" charset="-127"/>
+              </a:rPr>
+              <a:t>(inputs, outputs)</a:t>
+            </a:r>
+          </a:p>
+        </p:txBody>
+      </p:sp>
+      <p:sp>
+        <p:nvSpPr>
+          <p:cNvPr id="20" name="TextBox 19">
+            <a:extLst>
+              <a:ext uri="{FF2B5EF4-FFF2-40B4-BE49-F238E27FC236}">
+                <a16:creationId xmlns:a16="http://schemas.microsoft.com/office/drawing/2014/main" id="{D64E2157-689B-9596-B78E-BEC145BB98A6}"/>
+              </a:ext>
+            </a:extLst>
+          </p:cNvPr>
+          <p:cNvSpPr txBox="1"/>
+          <p:nvPr/>
+        </p:nvSpPr>
+        <p:spPr>
+          <a:xfrm>
+            <a:off x="8824913" y="5434726"/>
+            <a:ext cx="2224088" cy="369332"/>
+          </a:xfrm>
+          <a:prstGeom prst="rect">
+            <a:avLst/>
+          </a:prstGeom>
+          <a:noFill/>
+        </p:spPr>
+        <p:txBody>
+          <a:bodyPr wrap="square">
+            <a:spAutoFit/>
+          </a:bodyPr>
+          <a:lstStyle/>
+          <a:p>
+            <a:r>
+              <a:rPr lang="en-US" altLang="ko-KR" b="0" i="0" dirty="0">
+                <a:effectLst/>
+                <a:latin typeface="D2Coding" panose="020B0609020101020101" pitchFamily="49" charset="-127"/>
+                <a:ea typeface="D2Coding" panose="020B0609020101020101" pitchFamily="49" charset="-127"/>
+              </a:rPr>
+              <a:t>Test MAE: 3.67</a:t>
+            </a:r>
+            <a:endParaRPr lang="ko-KR" altLang="en-US" dirty="0">
+              <a:latin typeface="D2Coding" panose="020B0609020101020101" pitchFamily="49" charset="-127"/>
+              <a:ea typeface="D2Coding" panose="020B0609020101020101" pitchFamily="49" charset="-127"/>
+            </a:endParaRPr>
+          </a:p>
+        </p:txBody>
+      </p:sp>
+    </p:spTree>
+    <p:extLst>
+      <p:ext uri="{BB962C8B-B14F-4D97-AF65-F5344CB8AC3E}">
+        <p14:creationId xmlns:p14="http://schemas.microsoft.com/office/powerpoint/2010/main" val="1679317289"/>
+      </p:ext>
+    </p:extLst>
+  </p:cSld>
+  <p:clrMapOvr>
+    <a:masterClrMapping/>
+  </p:clrMapOvr>
+</p:sld>
+</file>
+
+<file path=ppt/slides/slide24.xml><?xml version="1.0" encoding="utf-8"?>
+<p:sld xmlns:a="http://schemas.openxmlformats.org/drawingml/2006/main" xmlns:r="http://schemas.openxmlformats.org/officeDocument/2006/relationships" xmlns:p="http://schemas.openxmlformats.org/presentationml/2006/main">
+  <p:cSld>
+    <p:spTree>
+      <p:nvGrpSpPr>
+        <p:cNvPr id="1" name="">
+          <a:extLst>
+            <a:ext uri="{FF2B5EF4-FFF2-40B4-BE49-F238E27FC236}">
+              <a16:creationId xmlns:a16="http://schemas.microsoft.com/office/drawing/2014/main" id="{9BB5FAEB-84AF-C57A-F867-E8A868CCFD59}"/>
+            </a:ext>
+          </a:extLst>
+        </p:cNvPr>
+        <p:cNvGrpSpPr/>
+        <p:nvPr/>
+      </p:nvGrpSpPr>
+      <p:grpSpPr>
+        <a:xfrm>
+          <a:off x="0" y="0"/>
+          <a:ext cx="0" cy="0"/>
+          <a:chOff x="0" y="0"/>
+          <a:chExt cx="0" cy="0"/>
+        </a:xfrm>
+      </p:grpSpPr>
+      <p:sp>
+        <p:nvSpPr>
+          <p:cNvPr id="3" name="제목 1">
+            <a:extLst>
+              <a:ext uri="{FF2B5EF4-FFF2-40B4-BE49-F238E27FC236}">
+                <a16:creationId xmlns:a16="http://schemas.microsoft.com/office/drawing/2014/main" id="{61A8C28A-36EB-9A59-A8FD-56BA176E5443}"/>
+              </a:ext>
+            </a:extLst>
+          </p:cNvPr>
+          <p:cNvSpPr txBox="1">
+            <a:spLocks/>
+          </p:cNvSpPr>
+          <p:nvPr/>
+        </p:nvSpPr>
+        <p:spPr>
+          <a:xfrm>
+            <a:off x="475645" y="481983"/>
+            <a:ext cx="10353762" cy="766439"/>
+          </a:xfrm>
+          <a:prstGeom prst="rect">
+            <a:avLst/>
+          </a:prstGeom>
+        </p:spPr>
+        <p:txBody>
+          <a:bodyPr vert="horz" lIns="91440" tIns="45720" rIns="91440" bIns="45720" rtlCol="0" anchor="ctr">
+            <a:normAutofit/>
+          </a:bodyPr>
+          <a:lstStyle>
+            <a:lvl1pPr algn="ctr" defTabSz="914400" rtl="0" eaLnBrk="1" latinLnBrk="1" hangingPunct="1">
+              <a:lnSpc>
+                <a:spcPct val="90000"/>
+              </a:lnSpc>
+              <a:spcBef>
+                <a:spcPct val="0"/>
+              </a:spcBef>
+              <a:buNone/>
+              <a:defRPr sz="3200" kern="1200" cap="all" baseline="0">
+                <a:solidFill>
+                  <a:schemeClr val="tx1"/>
+                </a:solidFill>
+                <a:effectLst/>
+                <a:latin typeface="Batang" panose="02030600000101010101" pitchFamily="18" charset="-127"/>
+                <a:ea typeface="Batang" panose="02030600000101010101" pitchFamily="18" charset="-127"/>
+                <a:cs typeface="+mj-cs"/>
+              </a:defRPr>
+            </a:lvl1pPr>
+          </a:lstStyle>
+          <a:p>
+            <a:pPr algn="l"/>
+            <a:r>
               <a:rPr lang="ko-KR" altLang="en-US" sz="2800" cap="none" dirty="0">
                 <a:solidFill>
                   <a:schemeClr val="bg2">
@@ -13204,20 +16706,14 @@
           <p:cNvPr id="2" name="표 1">
             <a:extLst>
               <a:ext uri="{FF2B5EF4-FFF2-40B4-BE49-F238E27FC236}">
-                <a16:creationId xmlns:a16="http://schemas.microsoft.com/office/drawing/2014/main" id="{52C74E2C-5185-4FDF-D522-52BB3849DFCA}"/>
+                <a16:creationId xmlns:a16="http://schemas.microsoft.com/office/drawing/2014/main" id="{210E60AA-30A7-76F5-61E4-FAD00013C47F}"/>
               </a:ext>
             </a:extLst>
           </p:cNvPr>
           <p:cNvGraphicFramePr>
             <a:graphicFrameLocks noGrp="1"/>
           </p:cNvGraphicFramePr>
-          <p:nvPr>
-            <p:extLst>
-              <p:ext uri="{D42A27DB-BD31-4B8C-83A1-F6EECF244321}">
-                <p14:modId xmlns:p14="http://schemas.microsoft.com/office/powerpoint/2010/main" val="2323456157"/>
-              </p:ext>
-            </p:extLst>
-          </p:nvPr>
+          <p:nvPr/>
         </p:nvGraphicFramePr>
         <p:xfrm>
           <a:off x="655955" y="2405063"/>
@@ -14944,7 +18440,7 @@
           <p:cNvPr id="6" name="TextBox 5">
             <a:extLst>
               <a:ext uri="{FF2B5EF4-FFF2-40B4-BE49-F238E27FC236}">
-                <a16:creationId xmlns:a16="http://schemas.microsoft.com/office/drawing/2014/main" id="{E1682B08-CD59-3A1E-9AE1-1640A4F3ECFB}"/>
+                <a16:creationId xmlns:a16="http://schemas.microsoft.com/office/drawing/2014/main" id="{FF07DFC3-7512-279D-EFDE-BC0E7E45F5D7}"/>
               </a:ext>
             </a:extLst>
           </p:cNvPr>
@@ -14953,7 +18449,7 @@
         </p:nvSpPr>
         <p:spPr>
           <a:xfrm>
-            <a:off x="609600" y="1238250"/>
+            <a:off x="609600" y="1219200"/>
             <a:ext cx="10972800" cy="880819"/>
           </a:xfrm>
           <a:prstGeom prst="rect">
@@ -15099,7 +18595,7 @@
           <p:cNvPr id="9" name="그림 8">
             <a:extLst>
               <a:ext uri="{FF2B5EF4-FFF2-40B4-BE49-F238E27FC236}">
-                <a16:creationId xmlns:a16="http://schemas.microsoft.com/office/drawing/2014/main" id="{F71D6366-ECCB-4037-D8F7-9766B35574CC}"/>
+                <a16:creationId xmlns:a16="http://schemas.microsoft.com/office/drawing/2014/main" id="{10936203-F21C-63FD-4023-3DE2C74533F8}"/>
               </a:ext>
             </a:extLst>
           </p:cNvPr>
@@ -15129,7 +18625,7 @@
           <p:cNvPr id="11" name="그래픽 10" descr="물음표">
             <a:extLst>
               <a:ext uri="{FF2B5EF4-FFF2-40B4-BE49-F238E27FC236}">
-                <a16:creationId xmlns:a16="http://schemas.microsoft.com/office/drawing/2014/main" id="{A37A5489-EAC6-4176-D325-AC523BE36B77}"/>
+                <a16:creationId xmlns:a16="http://schemas.microsoft.com/office/drawing/2014/main" id="{16083831-1CF6-41E5-E6A3-9D03E05C98ED}"/>
               </a:ext>
             </a:extLst>
           </p:cNvPr>
@@ -15165,7 +18661,7 @@
           <p:cNvPr id="12" name="화살표: 줄무늬가 있는 오른쪽 11">
             <a:extLst>
               <a:ext uri="{FF2B5EF4-FFF2-40B4-BE49-F238E27FC236}">
-                <a16:creationId xmlns:a16="http://schemas.microsoft.com/office/drawing/2014/main" id="{B150B105-D9C4-E76C-1B99-300BC744F8DC}"/>
+                <a16:creationId xmlns:a16="http://schemas.microsoft.com/office/drawing/2014/main" id="{3AC58EF4-5A82-F18D-16D4-DBC48C4C1D58}"/>
               </a:ext>
             </a:extLst>
           </p:cNvPr>
@@ -15214,7 +18710,7 @@
           <p:cNvPr id="14" name="TextBox 13">
             <a:extLst>
               <a:ext uri="{FF2B5EF4-FFF2-40B4-BE49-F238E27FC236}">
-                <a16:creationId xmlns:a16="http://schemas.microsoft.com/office/drawing/2014/main" id="{409F955C-5EBE-00F4-6BD3-25B7D293FF8A}"/>
+                <a16:creationId xmlns:a16="http://schemas.microsoft.com/office/drawing/2014/main" id="{1D713D28-6E6C-EDB6-A024-2E2ABC1E0AAF}"/>
               </a:ext>
             </a:extLst>
           </p:cNvPr>
@@ -15250,7 +18746,7 @@
     </p:spTree>
     <p:extLst>
       <p:ext uri="{BB962C8B-B14F-4D97-AF65-F5344CB8AC3E}">
-        <p14:creationId xmlns:p14="http://schemas.microsoft.com/office/powerpoint/2010/main" val="1679317289"/>
+        <p14:creationId xmlns:p14="http://schemas.microsoft.com/office/powerpoint/2010/main" val="439599311"/>
       </p:ext>
     </p:extLst>
   </p:cSld>
@@ -15260,375 +18756,7 @@
 </p:sld>
 </file>
 
-<file path=ppt/slides/slide2.xml><?xml version="1.0" encoding="utf-8"?>
-<p:sld xmlns:a="http://schemas.openxmlformats.org/drawingml/2006/main" xmlns:r="http://schemas.openxmlformats.org/officeDocument/2006/relationships" xmlns:p="http://schemas.openxmlformats.org/presentationml/2006/main">
-  <p:cSld>
-    <p:spTree>
-      <p:nvGrpSpPr>
-        <p:cNvPr id="1" name="">
-          <a:extLst>
-            <a:ext uri="{FF2B5EF4-FFF2-40B4-BE49-F238E27FC236}">
-              <a16:creationId xmlns:a16="http://schemas.microsoft.com/office/drawing/2014/main" id="{7103ECCC-4735-F731-4379-48451D093E8D}"/>
-            </a:ext>
-          </a:extLst>
-        </p:cNvPr>
-        <p:cNvGrpSpPr/>
-        <p:nvPr/>
-      </p:nvGrpSpPr>
-      <p:grpSpPr>
-        <a:xfrm>
-          <a:off x="0" y="0"/>
-          <a:ext cx="0" cy="0"/>
-          <a:chOff x="0" y="0"/>
-          <a:chExt cx="0" cy="0"/>
-        </a:xfrm>
-      </p:grpSpPr>
-      <p:sp>
-        <p:nvSpPr>
-          <p:cNvPr id="3" name="제목 1">
-            <a:extLst>
-              <a:ext uri="{FF2B5EF4-FFF2-40B4-BE49-F238E27FC236}">
-                <a16:creationId xmlns:a16="http://schemas.microsoft.com/office/drawing/2014/main" id="{30850BA0-0F12-F065-F39D-E210B0964FC7}"/>
-              </a:ext>
-            </a:extLst>
-          </p:cNvPr>
-          <p:cNvSpPr txBox="1">
-            <a:spLocks/>
-          </p:cNvSpPr>
-          <p:nvPr/>
-        </p:nvSpPr>
-        <p:spPr>
-          <a:xfrm>
-            <a:off x="475645" y="481983"/>
-            <a:ext cx="10353762" cy="766439"/>
-          </a:xfrm>
-          <a:prstGeom prst="rect">
-            <a:avLst/>
-          </a:prstGeom>
-        </p:spPr>
-        <p:txBody>
-          <a:bodyPr vert="horz" lIns="91440" tIns="45720" rIns="91440" bIns="45720" rtlCol="0" anchor="ctr">
-            <a:normAutofit/>
-          </a:bodyPr>
-          <a:lstStyle>
-            <a:lvl1pPr algn="ctr" defTabSz="914400" rtl="0" eaLnBrk="1" latinLnBrk="1" hangingPunct="1">
-              <a:lnSpc>
-                <a:spcPct val="90000"/>
-              </a:lnSpc>
-              <a:spcBef>
-                <a:spcPct val="0"/>
-              </a:spcBef>
-              <a:buNone/>
-              <a:defRPr sz="3200" kern="1200" cap="all" baseline="0">
-                <a:solidFill>
-                  <a:schemeClr val="tx1"/>
-                </a:solidFill>
-                <a:effectLst/>
-                <a:latin typeface="Batang" panose="02030600000101010101" pitchFamily="18" charset="-127"/>
-                <a:ea typeface="Batang" panose="02030600000101010101" pitchFamily="18" charset="-127"/>
-                <a:cs typeface="+mj-cs"/>
-              </a:defRPr>
-            </a:lvl1pPr>
-          </a:lstStyle>
-          <a:p>
-            <a:pPr algn="l"/>
-            <a:r>
-              <a:rPr lang="en-US" altLang="ko-KR" sz="2800" cap="none" dirty="0">
-                <a:solidFill>
-                  <a:schemeClr val="bg2">
-                    <a:lumMod val="25000"/>
-                  </a:schemeClr>
-                </a:solidFill>
-                <a:latin typeface="D2Coding" panose="020B0609020101020101" pitchFamily="49" charset="-127"/>
-                <a:ea typeface="D2Coding" panose="020B0609020101020101" pitchFamily="49" charset="-127"/>
-                <a:cs typeface="Segoe UI Light" panose="020B0502040204020203" pitchFamily="34" charset="0"/>
-              </a:rPr>
-              <a:t>Telephone Game(</a:t>
-            </a:r>
-            <a:r>
-              <a:rPr lang="ko-KR" altLang="en-US" sz="2800" cap="none" dirty="0">
-                <a:solidFill>
-                  <a:schemeClr val="bg2">
-                    <a:lumMod val="25000"/>
-                  </a:schemeClr>
-                </a:solidFill>
-                <a:latin typeface="D2Coding" panose="020B0609020101020101" pitchFamily="49" charset="-127"/>
-                <a:ea typeface="D2Coding" panose="020B0609020101020101" pitchFamily="49" charset="-127"/>
-                <a:cs typeface="Segoe UI Light" panose="020B0502040204020203" pitchFamily="34" charset="0"/>
-              </a:rPr>
-              <a:t>말 전달하기 게임</a:t>
-            </a:r>
-            <a:r>
-              <a:rPr lang="en-US" altLang="ko-KR" sz="2800" cap="none" dirty="0">
-                <a:solidFill>
-                  <a:schemeClr val="bg2">
-                    <a:lumMod val="25000"/>
-                  </a:schemeClr>
-                </a:solidFill>
-                <a:latin typeface="D2Coding" panose="020B0609020101020101" pitchFamily="49" charset="-127"/>
-                <a:ea typeface="D2Coding" panose="020B0609020101020101" pitchFamily="49" charset="-127"/>
-                <a:cs typeface="Segoe UI Light" panose="020B0502040204020203" pitchFamily="34" charset="0"/>
-              </a:rPr>
-              <a:t>)</a:t>
-            </a:r>
-            <a:endParaRPr lang="ko-KR" altLang="en-US" sz="2800" cap="none" dirty="0">
-              <a:solidFill>
-                <a:schemeClr val="bg2">
-                  <a:lumMod val="25000"/>
-                </a:schemeClr>
-              </a:solidFill>
-              <a:latin typeface="D2Coding" panose="020B0609020101020101" pitchFamily="49" charset="-127"/>
-              <a:ea typeface="D2Coding" panose="020B0609020101020101" pitchFamily="49" charset="-127"/>
-              <a:cs typeface="Segoe UI Light" panose="020B0502040204020203" pitchFamily="34" charset="0"/>
-            </a:endParaRPr>
-          </a:p>
-        </p:txBody>
-      </p:sp>
-      <p:sp>
-        <p:nvSpPr>
-          <p:cNvPr id="11" name="TextBox 10">
-            <a:extLst>
-              <a:ext uri="{FF2B5EF4-FFF2-40B4-BE49-F238E27FC236}">
-                <a16:creationId xmlns:a16="http://schemas.microsoft.com/office/drawing/2014/main" id="{DF65489D-6F2A-9B19-C55E-FAB775A3AAFD}"/>
-              </a:ext>
-            </a:extLst>
-          </p:cNvPr>
-          <p:cNvSpPr txBox="1"/>
-          <p:nvPr/>
-        </p:nvSpPr>
-        <p:spPr>
-          <a:xfrm>
-            <a:off x="1370616" y="5666929"/>
-            <a:ext cx="7407624" cy="369332"/>
-          </a:xfrm>
-          <a:prstGeom prst="rect">
-            <a:avLst/>
-          </a:prstGeom>
-          <a:noFill/>
-        </p:spPr>
-        <p:txBody>
-          <a:bodyPr wrap="square" rtlCol="0">
-            <a:spAutoFit/>
-          </a:bodyPr>
-          <a:lstStyle/>
-          <a:p>
-            <a:r>
-              <a:rPr lang="en-US" altLang="ko-KR" dirty="0">
-                <a:latin typeface="Cascadia Code" panose="020B0609020000020004" pitchFamily="49" charset="0"/>
-                <a:ea typeface="Cascadia Code" panose="020B0609020000020004" pitchFamily="49" charset="0"/>
-                <a:cs typeface="Cascadia Code" panose="020B0609020000020004" pitchFamily="49" charset="0"/>
-              </a:rPr>
-              <a:t>I	am	  your	      father</a:t>
-            </a:r>
-            <a:endParaRPr lang="ko-KR" altLang="en-US" dirty="0">
-              <a:latin typeface="Cascadia Code" panose="020B0609020000020004" pitchFamily="49" charset="0"/>
-              <a:cs typeface="Cascadia Code" panose="020B0609020000020004" pitchFamily="49" charset="0"/>
-            </a:endParaRPr>
-          </a:p>
-        </p:txBody>
-      </p:sp>
-      <p:pic>
-        <p:nvPicPr>
-          <p:cNvPr id="4104" name="Picture 8" descr="Parlour Games During the Holidays: Hapny FolvdaKs">
-            <a:extLst>
-              <a:ext uri="{FF2B5EF4-FFF2-40B4-BE49-F238E27FC236}">
-                <a16:creationId xmlns:a16="http://schemas.microsoft.com/office/drawing/2014/main" id="{2F58ED32-CC7E-7F05-8BEF-5EB9936AE4C7}"/>
-              </a:ext>
-            </a:extLst>
-          </p:cNvPr>
-          <p:cNvPicPr>
-            <a:picLocks noChangeAspect="1" noChangeArrowheads="1"/>
-          </p:cNvPicPr>
-          <p:nvPr/>
-        </p:nvPicPr>
-        <p:blipFill>
-          <a:blip r:embed="rId2">
-            <a:extLst>
-              <a:ext uri="{28A0092B-C50C-407E-A947-70E740481C1C}">
-                <a14:useLocalDpi xmlns:a14="http://schemas.microsoft.com/office/drawing/2010/main" val="0"/>
-              </a:ext>
-            </a:extLst>
-          </a:blip>
-          <a:srcRect/>
-          <a:stretch>
-            <a:fillRect/>
-          </a:stretch>
-        </p:blipFill>
-        <p:spPr bwMode="auto">
-          <a:xfrm>
-            <a:off x="3296041" y="1841058"/>
-            <a:ext cx="5403850" cy="3602567"/>
-          </a:xfrm>
-          <a:prstGeom prst="rect">
-            <a:avLst/>
-          </a:prstGeom>
-          <a:noFill/>
-          <a:extLst>
-            <a:ext uri="{909E8E84-426E-40DD-AFC4-6F175D3DCCD1}">
-              <a14:hiddenFill xmlns:a14="http://schemas.microsoft.com/office/drawing/2010/main">
-                <a:solidFill>
-                  <a:srgbClr val="FFFFFF"/>
-                </a:solidFill>
-              </a14:hiddenFill>
-            </a:ext>
-          </a:extLst>
-        </p:spPr>
-      </p:pic>
-      <p:sp>
-        <p:nvSpPr>
-          <p:cNvPr id="2" name="슬라이드 번호 개체 틀 3">
-            <a:extLst>
-              <a:ext uri="{FF2B5EF4-FFF2-40B4-BE49-F238E27FC236}">
-                <a16:creationId xmlns:a16="http://schemas.microsoft.com/office/drawing/2014/main" id="{3DD0566A-E880-8D26-CCF0-91CC50E3A5C9}"/>
-              </a:ext>
-            </a:extLst>
-          </p:cNvPr>
-          <p:cNvSpPr txBox="1">
-            <a:spLocks/>
-          </p:cNvSpPr>
-          <p:nvPr/>
-        </p:nvSpPr>
-        <p:spPr>
-          <a:xfrm>
-            <a:off x="11162487" y="299420"/>
-            <a:ext cx="753545" cy="365125"/>
-          </a:xfrm>
-          <a:prstGeom prst="rect">
-            <a:avLst/>
-          </a:prstGeom>
-        </p:spPr>
-        <p:txBody>
-          <a:bodyPr vert="horz" lIns="91440" tIns="45720" rIns="91440" bIns="45720" rtlCol="0" anchor="ctr"/>
-          <a:lstStyle>
-            <a:defPPr rtl="0">
-              <a:defRPr lang="ko-KR"/>
-            </a:defPPr>
-            <a:lvl1pPr marL="0" algn="r" defTabSz="914400" rtl="0" eaLnBrk="1" latinLnBrk="0" hangingPunct="1">
-              <a:defRPr sz="1200" kern="1200" baseline="0">
-                <a:solidFill>
-                  <a:schemeClr val="tx1">
-                    <a:lumMod val="65000"/>
-                    <a:lumOff val="35000"/>
-                  </a:schemeClr>
-                </a:solidFill>
-                <a:latin typeface="맑은 고딕" panose="020B0503020000020004" pitchFamily="50" charset="-127"/>
-                <a:ea typeface="맑은 고딕" panose="020B0503020000020004" pitchFamily="50" charset="-127"/>
-                <a:cs typeface="+mn-cs"/>
-              </a:defRPr>
-            </a:lvl1pPr>
-            <a:lvl2pPr marL="457200" algn="l" defTabSz="914400" rtl="0" eaLnBrk="1" latinLnBrk="0" hangingPunct="1">
-              <a:defRPr sz="1800" kern="1200">
-                <a:solidFill>
-                  <a:schemeClr val="tx1"/>
-                </a:solidFill>
-                <a:latin typeface="+mn-lt"/>
-                <a:ea typeface="+mn-ea"/>
-                <a:cs typeface="+mn-cs"/>
-              </a:defRPr>
-            </a:lvl2pPr>
-            <a:lvl3pPr marL="914400" algn="l" defTabSz="914400" rtl="0" eaLnBrk="1" latinLnBrk="0" hangingPunct="1">
-              <a:defRPr sz="1800" kern="1200">
-                <a:solidFill>
-                  <a:schemeClr val="tx1"/>
-                </a:solidFill>
-                <a:latin typeface="+mn-lt"/>
-                <a:ea typeface="+mn-ea"/>
-                <a:cs typeface="+mn-cs"/>
-              </a:defRPr>
-            </a:lvl3pPr>
-            <a:lvl4pPr marL="1371600" algn="l" defTabSz="914400" rtl="0" eaLnBrk="1" latinLnBrk="0" hangingPunct="1">
-              <a:defRPr sz="1800" kern="1200">
-                <a:solidFill>
-                  <a:schemeClr val="tx1"/>
-                </a:solidFill>
-                <a:latin typeface="+mn-lt"/>
-                <a:ea typeface="+mn-ea"/>
-                <a:cs typeface="+mn-cs"/>
-              </a:defRPr>
-            </a:lvl4pPr>
-            <a:lvl5pPr marL="1828800" algn="l" defTabSz="914400" rtl="0" eaLnBrk="1" latinLnBrk="0" hangingPunct="1">
-              <a:defRPr sz="1800" kern="1200">
-                <a:solidFill>
-                  <a:schemeClr val="tx1"/>
-                </a:solidFill>
-                <a:latin typeface="+mn-lt"/>
-                <a:ea typeface="+mn-ea"/>
-                <a:cs typeface="+mn-cs"/>
-              </a:defRPr>
-            </a:lvl5pPr>
-            <a:lvl6pPr marL="2286000" algn="l" defTabSz="914400" rtl="0" eaLnBrk="1" latinLnBrk="0" hangingPunct="1">
-              <a:defRPr sz="1800" kern="1200">
-                <a:solidFill>
-                  <a:schemeClr val="tx1"/>
-                </a:solidFill>
-                <a:latin typeface="+mn-lt"/>
-                <a:ea typeface="+mn-ea"/>
-                <a:cs typeface="+mn-cs"/>
-              </a:defRPr>
-            </a:lvl6pPr>
-            <a:lvl7pPr marL="2743200" algn="l" defTabSz="914400" rtl="0" eaLnBrk="1" latinLnBrk="0" hangingPunct="1">
-              <a:defRPr sz="1800" kern="1200">
-                <a:solidFill>
-                  <a:schemeClr val="tx1"/>
-                </a:solidFill>
-                <a:latin typeface="+mn-lt"/>
-                <a:ea typeface="+mn-ea"/>
-                <a:cs typeface="+mn-cs"/>
-              </a:defRPr>
-            </a:lvl7pPr>
-            <a:lvl8pPr marL="3200400" algn="l" defTabSz="914400" rtl="0" eaLnBrk="1" latinLnBrk="0" hangingPunct="1">
-              <a:defRPr sz="1800" kern="1200">
-                <a:solidFill>
-                  <a:schemeClr val="tx1"/>
-                </a:solidFill>
-                <a:latin typeface="+mn-lt"/>
-                <a:ea typeface="+mn-ea"/>
-                <a:cs typeface="+mn-cs"/>
-              </a:defRPr>
-            </a:lvl8pPr>
-            <a:lvl9pPr marL="3657600" algn="l" defTabSz="914400" rtl="0" eaLnBrk="1" latinLnBrk="0" hangingPunct="1">
-              <a:defRPr sz="1800" kern="1200">
-                <a:solidFill>
-                  <a:schemeClr val="tx1"/>
-                </a:solidFill>
-                <a:latin typeface="+mn-lt"/>
-                <a:ea typeface="+mn-ea"/>
-                <a:cs typeface="+mn-cs"/>
-              </a:defRPr>
-            </a:lvl9pPr>
-          </a:lstStyle>
-          <a:p>
-            <a:fld id="{D57F1E4F-1CFF-5643-939E-217C01CDF565}" type="slidenum">
-              <a:rPr lang="en-US" sz="1400" b="1" smtClean="0">
-                <a:latin typeface="Times New Roman" panose="02020603050405020304" pitchFamily="18" charset="0"/>
-                <a:ea typeface="Verdana" panose="020B0604030504040204" pitchFamily="34" charset="0"/>
-                <a:cs typeface="Times New Roman" panose="02020603050405020304" pitchFamily="18" charset="0"/>
-              </a:rPr>
-              <a:pPr/>
-              <a:t>2</a:t>
-            </a:fld>
-            <a:endParaRPr lang="en-US" sz="1400" b="1" dirty="0">
-              <a:latin typeface="Times New Roman" panose="02020603050405020304" pitchFamily="18" charset="0"/>
-              <a:ea typeface="Verdana" panose="020B0604030504040204" pitchFamily="34" charset="0"/>
-              <a:cs typeface="Times New Roman" panose="02020603050405020304" pitchFamily="18" charset="0"/>
-            </a:endParaRPr>
-          </a:p>
-        </p:txBody>
-      </p:sp>
-    </p:spTree>
-    <p:extLst>
-      <p:ext uri="{BB962C8B-B14F-4D97-AF65-F5344CB8AC3E}">
-        <p14:creationId xmlns:p14="http://schemas.microsoft.com/office/powerpoint/2010/main" val="3037908167"/>
-      </p:ext>
-    </p:extLst>
-  </p:cSld>
-  <p:clrMapOvr>
-    <a:masterClrMapping/>
-  </p:clrMapOvr>
-</p:sld>
-</file>
-
-<file path=ppt/slides/slide20.xml><?xml version="1.0" encoding="utf-8"?>
+<file path=ppt/slides/slide25.xml><?xml version="1.0" encoding="utf-8"?>
 <p:sld xmlns:a="http://schemas.openxmlformats.org/drawingml/2006/main" xmlns:r="http://schemas.openxmlformats.org/officeDocument/2006/relationships" xmlns:p="http://schemas.openxmlformats.org/presentationml/2006/main">
   <p:cSld>
     <p:spTree>
@@ -15651,41 +18779,6 @@
           <a:chExt cx="0" cy="0"/>
         </a:xfrm>
       </p:grpSpPr>
-      <p:sp>
-        <p:nvSpPr>
-          <p:cNvPr id="4" name="슬라이드 번호 개체 틀 3">
-            <a:extLst>
-              <a:ext uri="{FF2B5EF4-FFF2-40B4-BE49-F238E27FC236}">
-                <a16:creationId xmlns:a16="http://schemas.microsoft.com/office/drawing/2014/main" id="{38B379BC-6767-AD77-457E-EB53B375D37C}"/>
-              </a:ext>
-            </a:extLst>
-          </p:cNvPr>
-          <p:cNvSpPr>
-            <a:spLocks noGrp="1"/>
-          </p:cNvSpPr>
-          <p:nvPr>
-            <p:ph type="sldNum" sz="quarter" idx="12"/>
-          </p:nvPr>
-        </p:nvSpPr>
-        <p:spPr>
-          <a:xfrm>
-            <a:off x="10514011" y="6036261"/>
-            <a:ext cx="753545" cy="365125"/>
-          </a:xfrm>
-        </p:spPr>
-        <p:txBody>
-          <a:bodyPr/>
-          <a:lstStyle/>
-          <a:p>
-            <a:fld id="{D57F1E4F-1CFF-5643-939E-217C01CDF565}" type="slidenum">
-              <a:rPr lang="en-US" smtClean="0"/>
-              <a:pPr/>
-              <a:t>20</a:t>
-            </a:fld>
-            <a:endParaRPr lang="en-US" dirty="0"/>
-          </a:p>
-        </p:txBody>
-      </p:sp>
       <p:sp>
         <p:nvSpPr>
           <p:cNvPr id="3" name="제목 1">
@@ -15761,63 +18854,6 @@
           </a:p>
         </p:txBody>
       </p:sp>
-      <p:sp>
-        <p:nvSpPr>
-          <p:cNvPr id="5" name="TextBox 4">
-            <a:extLst>
-              <a:ext uri="{FF2B5EF4-FFF2-40B4-BE49-F238E27FC236}">
-                <a16:creationId xmlns:a16="http://schemas.microsoft.com/office/drawing/2014/main" id="{2E670359-5BC0-FB3E-8DE8-B2B54F51B77E}"/>
-              </a:ext>
-            </a:extLst>
-          </p:cNvPr>
-          <p:cNvSpPr txBox="1"/>
-          <p:nvPr/>
-        </p:nvSpPr>
-        <p:spPr>
-          <a:xfrm>
-            <a:off x="609600" y="1238250"/>
-            <a:ext cx="10972800" cy="465320"/>
-          </a:xfrm>
-          <a:prstGeom prst="rect">
-            <a:avLst/>
-          </a:prstGeom>
-          <a:noFill/>
-        </p:spPr>
-        <p:txBody>
-          <a:bodyPr wrap="square" rtlCol="0">
-            <a:spAutoFit/>
-          </a:bodyPr>
-          <a:lstStyle/>
-          <a:p>
-            <a:pPr>
-              <a:lnSpc>
-                <a:spcPct val="150000"/>
-              </a:lnSpc>
-            </a:pPr>
-            <a:r>
-              <a:rPr lang="en-US" altLang="ko-KR" dirty="0" err="1">
-                <a:latin typeface="D2Coding" panose="020B0609020101020101" pitchFamily="49" charset="-127"/>
-                <a:ea typeface="D2Coding" panose="020B0609020101020101" pitchFamily="49" charset="-127"/>
-              </a:rPr>
-              <a:t>Pytorch</a:t>
-            </a:r>
-            <a:r>
-              <a:rPr lang="en-US" altLang="ko-KR" dirty="0">
-                <a:latin typeface="D2Coding" panose="020B0609020101020101" pitchFamily="49" charset="-127"/>
-                <a:ea typeface="D2Coding" panose="020B0609020101020101" pitchFamily="49" charset="-127"/>
-              </a:rPr>
-              <a:t> </a:t>
-            </a:r>
-            <a:r>
-              <a:rPr lang="ko-KR" altLang="en-US" dirty="0">
-                <a:latin typeface="D2Coding" panose="020B0609020101020101" pitchFamily="49" charset="-127"/>
-                <a:ea typeface="D2Coding" panose="020B0609020101020101" pitchFamily="49" charset="-127"/>
-              </a:rPr>
-              <a:t>로 실습하기</a:t>
-            </a:r>
-          </a:p>
-        </p:txBody>
-      </p:sp>
       <p:pic>
         <p:nvPicPr>
           <p:cNvPr id="12290" name="Picture 2">
@@ -15847,7 +18883,7 @@
         </p:blipFill>
         <p:spPr bwMode="auto">
           <a:xfrm>
-            <a:off x="3345890" y="2123073"/>
+            <a:off x="3279215" y="1970673"/>
             <a:ext cx="3878897" cy="3342586"/>
           </a:xfrm>
           <a:prstGeom prst="rect">
@@ -15894,7 +18930,7 @@
         </p:blipFill>
         <p:spPr bwMode="auto">
           <a:xfrm>
-            <a:off x="7467600" y="2141922"/>
+            <a:off x="7400925" y="1989522"/>
             <a:ext cx="4114800" cy="1828800"/>
           </a:xfrm>
           <a:prstGeom prst="rect">
@@ -15941,7 +18977,7 @@
         </p:blipFill>
         <p:spPr bwMode="auto">
           <a:xfrm>
-            <a:off x="475645" y="2193228"/>
+            <a:off x="599470" y="2040828"/>
             <a:ext cx="2057400" cy="2057400"/>
           </a:xfrm>
           <a:prstGeom prst="rect">
@@ -15988,7 +19024,7 @@
         </p:blipFill>
         <p:spPr bwMode="auto">
           <a:xfrm>
-            <a:off x="475645" y="4446484"/>
+            <a:off x="599470" y="4294084"/>
             <a:ext cx="2143125" cy="2038350"/>
           </a:xfrm>
           <a:prstGeom prst="rect">
@@ -16020,7 +19056,7 @@
         </p:nvSpPr>
         <p:spPr>
           <a:xfrm>
-            <a:off x="3271520" y="1719231"/>
+            <a:off x="3204845" y="1566831"/>
             <a:ext cx="3708400" cy="369332"/>
           </a:xfrm>
           <a:prstGeom prst="rect">
@@ -16035,10 +19071,16 @@
           <a:lstStyle/>
           <a:p>
             <a:r>
-              <a:rPr lang="en-US" altLang="ko-KR" dirty="0"/>
+              <a:rPr lang="en-US" altLang="ko-KR" dirty="0">
+                <a:latin typeface="D2Coding" panose="020B0609020101020101" pitchFamily="49" charset="-127"/>
+                <a:ea typeface="D2Coding" panose="020B0609020101020101" pitchFamily="49" charset="-127"/>
+              </a:rPr>
               <a:t>Multi-layer RNN, Deep RNN</a:t>
             </a:r>
-            <a:endParaRPr lang="ko-KR" altLang="en-US" dirty="0"/>
+            <a:endParaRPr lang="ko-KR" altLang="en-US" dirty="0">
+              <a:latin typeface="D2Coding" panose="020B0609020101020101" pitchFamily="49" charset="-127"/>
+              <a:ea typeface="D2Coding" panose="020B0609020101020101" pitchFamily="49" charset="-127"/>
+            </a:endParaRPr>
           </a:p>
         </p:txBody>
       </p:sp>
@@ -16056,8 +19098,8 @@
         </p:nvSpPr>
         <p:spPr>
           <a:xfrm>
-            <a:off x="7376160" y="1738080"/>
-            <a:ext cx="4114800" cy="369332"/>
+            <a:off x="7309484" y="1566831"/>
+            <a:ext cx="4692015" cy="369332"/>
           </a:xfrm>
           <a:prstGeom prst="rect">
             <a:avLst/>
@@ -16071,7 +19113,10 @@
           <a:lstStyle/>
           <a:p>
             <a:r>
-              <a:rPr lang="en-US" altLang="ko-KR" dirty="0"/>
+              <a:rPr lang="en-US" altLang="ko-KR" dirty="0">
+                <a:latin typeface="D2Coding" panose="020B0609020101020101" pitchFamily="49" charset="-127"/>
+                <a:ea typeface="D2Coding" panose="020B0609020101020101" pitchFamily="49" charset="-127"/>
+              </a:rPr>
               <a:t>Bidirectional Recurrent Neural Network</a:t>
             </a:r>
           </a:p>
@@ -16091,7 +19136,7 @@
         </p:nvSpPr>
         <p:spPr>
           <a:xfrm>
-            <a:off x="475645" y="1738080"/>
+            <a:off x="599470" y="1566831"/>
             <a:ext cx="2319942" cy="369332"/>
           </a:xfrm>
           <a:prstGeom prst="rect">
@@ -16106,10 +19151,16 @@
           <a:lstStyle/>
           <a:p>
             <a:r>
-              <a:rPr lang="en-US" altLang="ko-KR" dirty="0"/>
+              <a:rPr lang="en-US" altLang="ko-KR" dirty="0">
+                <a:latin typeface="D2Coding" panose="020B0609020101020101" pitchFamily="49" charset="-127"/>
+                <a:ea typeface="D2Coding" panose="020B0609020101020101" pitchFamily="49" charset="-127"/>
+              </a:rPr>
               <a:t>Shallow RNN</a:t>
             </a:r>
-            <a:endParaRPr lang="ko-KR" altLang="en-US" dirty="0"/>
+            <a:endParaRPr lang="ko-KR" altLang="en-US" dirty="0">
+              <a:latin typeface="D2Coding" panose="020B0609020101020101" pitchFamily="49" charset="-127"/>
+              <a:ea typeface="D2Coding" panose="020B0609020101020101" pitchFamily="49" charset="-127"/>
+            </a:endParaRPr>
           </a:p>
         </p:txBody>
       </p:sp>
@@ -16126,7 +19177,7 @@
 </p:sld>
 </file>
 
-<file path=ppt/slides/slide21.xml><?xml version="1.0" encoding="utf-8"?>
+<file path=ppt/slides/slide26.xml><?xml version="1.0" encoding="utf-8"?>
 <p:sld xmlns:a="http://schemas.openxmlformats.org/drawingml/2006/main" xmlns:r="http://schemas.openxmlformats.org/officeDocument/2006/relationships" xmlns:p="http://schemas.openxmlformats.org/presentationml/2006/main">
   <p:cSld>
     <p:spTree>
@@ -16149,41 +19200,6 @@
           <a:chExt cx="0" cy="0"/>
         </a:xfrm>
       </p:grpSpPr>
-      <p:sp>
-        <p:nvSpPr>
-          <p:cNvPr id="4" name="슬라이드 번호 개체 틀 3">
-            <a:extLst>
-              <a:ext uri="{FF2B5EF4-FFF2-40B4-BE49-F238E27FC236}">
-                <a16:creationId xmlns:a16="http://schemas.microsoft.com/office/drawing/2014/main" id="{E344706C-F3C3-2E7B-38B5-A4331501DE6C}"/>
-              </a:ext>
-            </a:extLst>
-          </p:cNvPr>
-          <p:cNvSpPr>
-            <a:spLocks noGrp="1"/>
-          </p:cNvSpPr>
-          <p:nvPr>
-            <p:ph type="sldNum" sz="quarter" idx="12"/>
-          </p:nvPr>
-        </p:nvSpPr>
-        <p:spPr>
-          <a:xfrm>
-            <a:off x="10514011" y="6036261"/>
-            <a:ext cx="753545" cy="365125"/>
-          </a:xfrm>
-        </p:spPr>
-        <p:txBody>
-          <a:bodyPr/>
-          <a:lstStyle/>
-          <a:p>
-            <a:fld id="{D57F1E4F-1CFF-5643-939E-217C01CDF565}" type="slidenum">
-              <a:rPr lang="en-US" smtClean="0"/>
-              <a:pPr/>
-              <a:t>21</a:t>
-            </a:fld>
-            <a:endParaRPr lang="en-US" dirty="0"/>
-          </a:p>
-        </p:txBody>
-      </p:sp>
       <p:sp>
         <p:nvSpPr>
           <p:cNvPr id="3" name="제목 1">
@@ -16609,7 +19625,7 @@
 </p:sld>
 </file>
 
-<file path=ppt/slides/slide22.xml><?xml version="1.0" encoding="utf-8"?>
+<file path=ppt/slides/slide27.xml><?xml version="1.0" encoding="utf-8"?>
 <p:sld xmlns:a="http://schemas.openxmlformats.org/drawingml/2006/main" xmlns:r="http://schemas.openxmlformats.org/officeDocument/2006/relationships" xmlns:p="http://schemas.openxmlformats.org/presentationml/2006/main">
   <p:cSld>
     <p:spTree>
@@ -16632,41 +19648,6 @@
           <a:chExt cx="0" cy="0"/>
         </a:xfrm>
       </p:grpSpPr>
-      <p:sp>
-        <p:nvSpPr>
-          <p:cNvPr id="4" name="슬라이드 번호 개체 틀 3">
-            <a:extLst>
-              <a:ext uri="{FF2B5EF4-FFF2-40B4-BE49-F238E27FC236}">
-                <a16:creationId xmlns:a16="http://schemas.microsoft.com/office/drawing/2014/main" id="{2CDDC161-4693-0F50-FD2C-C6BEDB68B1A1}"/>
-              </a:ext>
-            </a:extLst>
-          </p:cNvPr>
-          <p:cNvSpPr>
-            <a:spLocks noGrp="1"/>
-          </p:cNvSpPr>
-          <p:nvPr>
-            <p:ph type="sldNum" sz="quarter" idx="12"/>
-          </p:nvPr>
-        </p:nvSpPr>
-        <p:spPr>
-          <a:xfrm>
-            <a:off x="10514011" y="6036261"/>
-            <a:ext cx="753545" cy="365125"/>
-          </a:xfrm>
-        </p:spPr>
-        <p:txBody>
-          <a:bodyPr/>
-          <a:lstStyle/>
-          <a:p>
-            <a:fld id="{D57F1E4F-1CFF-5643-939E-217C01CDF565}" type="slidenum">
-              <a:rPr lang="en-US" smtClean="0"/>
-              <a:pPr/>
-              <a:t>22</a:t>
-            </a:fld>
-            <a:endParaRPr lang="en-US" dirty="0"/>
-          </a:p>
-        </p:txBody>
-      </p:sp>
       <p:sp>
         <p:nvSpPr>
           <p:cNvPr id="3" name="제목 1">
@@ -17463,7 +20444,7 @@
 </p:sld>
 </file>
 
-<file path=ppt/slides/slide23.xml><?xml version="1.0" encoding="utf-8"?>
+<file path=ppt/slides/slide28.xml><?xml version="1.0" encoding="utf-8"?>
 <p:sld xmlns:a="http://schemas.openxmlformats.org/drawingml/2006/main" xmlns:r="http://schemas.openxmlformats.org/officeDocument/2006/relationships" xmlns:p="http://schemas.openxmlformats.org/presentationml/2006/main">
   <p:cSld>
     <p:spTree>
@@ -17486,41 +20467,6 @@
           <a:chExt cx="0" cy="0"/>
         </a:xfrm>
       </p:grpSpPr>
-      <p:sp>
-        <p:nvSpPr>
-          <p:cNvPr id="4" name="슬라이드 번호 개체 틀 3">
-            <a:extLst>
-              <a:ext uri="{FF2B5EF4-FFF2-40B4-BE49-F238E27FC236}">
-                <a16:creationId xmlns:a16="http://schemas.microsoft.com/office/drawing/2014/main" id="{46080FFC-FC8C-595E-7C4B-2788C99CE8D9}"/>
-              </a:ext>
-            </a:extLst>
-          </p:cNvPr>
-          <p:cNvSpPr>
-            <a:spLocks noGrp="1"/>
-          </p:cNvSpPr>
-          <p:nvPr>
-            <p:ph type="sldNum" sz="quarter" idx="12"/>
-          </p:nvPr>
-        </p:nvSpPr>
-        <p:spPr>
-          <a:xfrm>
-            <a:off x="10514011" y="6036261"/>
-            <a:ext cx="753545" cy="365125"/>
-          </a:xfrm>
-        </p:spPr>
-        <p:txBody>
-          <a:bodyPr/>
-          <a:lstStyle/>
-          <a:p>
-            <a:fld id="{D57F1E4F-1CFF-5643-939E-217C01CDF565}" type="slidenum">
-              <a:rPr lang="en-US" smtClean="0"/>
-              <a:pPr/>
-              <a:t>23</a:t>
-            </a:fld>
-            <a:endParaRPr lang="en-US" dirty="0"/>
-          </a:p>
-        </p:txBody>
-      </p:sp>
       <p:sp>
         <p:nvSpPr>
           <p:cNvPr id="3" name="제목 1">
@@ -20269,7 +23215,7 @@
 </p:sld>
 </file>
 
-<file path=ppt/slides/slide24.xml><?xml version="1.0" encoding="utf-8"?>
+<file path=ppt/slides/slide29.xml><?xml version="1.0" encoding="utf-8"?>
 <p:sld xmlns:a="http://schemas.openxmlformats.org/drawingml/2006/main" xmlns:r="http://schemas.openxmlformats.org/officeDocument/2006/relationships" xmlns:p="http://schemas.openxmlformats.org/presentationml/2006/main">
   <p:cSld>
     <p:spTree>
@@ -20292,41 +23238,6 @@
           <a:chExt cx="0" cy="0"/>
         </a:xfrm>
       </p:grpSpPr>
-      <p:sp>
-        <p:nvSpPr>
-          <p:cNvPr id="4" name="슬라이드 번호 개체 틀 3">
-            <a:extLst>
-              <a:ext uri="{FF2B5EF4-FFF2-40B4-BE49-F238E27FC236}">
-                <a16:creationId xmlns:a16="http://schemas.microsoft.com/office/drawing/2014/main" id="{B0BB9591-FBE7-E7AA-BC75-BCB04A807B74}"/>
-              </a:ext>
-            </a:extLst>
-          </p:cNvPr>
-          <p:cNvSpPr>
-            <a:spLocks noGrp="1"/>
-          </p:cNvSpPr>
-          <p:nvPr>
-            <p:ph type="sldNum" sz="quarter" idx="12"/>
-          </p:nvPr>
-        </p:nvSpPr>
-        <p:spPr>
-          <a:xfrm>
-            <a:off x="10514011" y="6036261"/>
-            <a:ext cx="753545" cy="365125"/>
-          </a:xfrm>
-        </p:spPr>
-        <p:txBody>
-          <a:bodyPr/>
-          <a:lstStyle/>
-          <a:p>
-            <a:fld id="{D57F1E4F-1CFF-5643-939E-217C01CDF565}" type="slidenum">
-              <a:rPr lang="en-US" smtClean="0"/>
-              <a:pPr/>
-              <a:t>24</a:t>
-            </a:fld>
-            <a:endParaRPr lang="en-US" dirty="0"/>
-          </a:p>
-        </p:txBody>
-      </p:sp>
       <p:sp>
         <p:nvSpPr>
           <p:cNvPr id="3" name="제목 1">
@@ -25916,7 +28827,375 @@
 </p:sld>
 </file>
 
-<file path=ppt/slides/slide25.xml><?xml version="1.0" encoding="utf-8"?>
+<file path=ppt/slides/slide3.xml><?xml version="1.0" encoding="utf-8"?>
+<p:sld xmlns:a="http://schemas.openxmlformats.org/drawingml/2006/main" xmlns:r="http://schemas.openxmlformats.org/officeDocument/2006/relationships" xmlns:p="http://schemas.openxmlformats.org/presentationml/2006/main">
+  <p:cSld>
+    <p:spTree>
+      <p:nvGrpSpPr>
+        <p:cNvPr id="1" name="">
+          <a:extLst>
+            <a:ext uri="{FF2B5EF4-FFF2-40B4-BE49-F238E27FC236}">
+              <a16:creationId xmlns:a16="http://schemas.microsoft.com/office/drawing/2014/main" id="{7103ECCC-4735-F731-4379-48451D093E8D}"/>
+            </a:ext>
+          </a:extLst>
+        </p:cNvPr>
+        <p:cNvGrpSpPr/>
+        <p:nvPr/>
+      </p:nvGrpSpPr>
+      <p:grpSpPr>
+        <a:xfrm>
+          <a:off x="0" y="0"/>
+          <a:ext cx="0" cy="0"/>
+          <a:chOff x="0" y="0"/>
+          <a:chExt cx="0" cy="0"/>
+        </a:xfrm>
+      </p:grpSpPr>
+      <p:sp>
+        <p:nvSpPr>
+          <p:cNvPr id="3" name="제목 1">
+            <a:extLst>
+              <a:ext uri="{FF2B5EF4-FFF2-40B4-BE49-F238E27FC236}">
+                <a16:creationId xmlns:a16="http://schemas.microsoft.com/office/drawing/2014/main" id="{30850BA0-0F12-F065-F39D-E210B0964FC7}"/>
+              </a:ext>
+            </a:extLst>
+          </p:cNvPr>
+          <p:cNvSpPr txBox="1">
+            <a:spLocks/>
+          </p:cNvSpPr>
+          <p:nvPr/>
+        </p:nvSpPr>
+        <p:spPr>
+          <a:xfrm>
+            <a:off x="475645" y="481983"/>
+            <a:ext cx="10353762" cy="766439"/>
+          </a:xfrm>
+          <a:prstGeom prst="rect">
+            <a:avLst/>
+          </a:prstGeom>
+        </p:spPr>
+        <p:txBody>
+          <a:bodyPr vert="horz" lIns="91440" tIns="45720" rIns="91440" bIns="45720" rtlCol="0" anchor="ctr">
+            <a:normAutofit/>
+          </a:bodyPr>
+          <a:lstStyle>
+            <a:lvl1pPr algn="ctr" defTabSz="914400" rtl="0" eaLnBrk="1" latinLnBrk="1" hangingPunct="1">
+              <a:lnSpc>
+                <a:spcPct val="90000"/>
+              </a:lnSpc>
+              <a:spcBef>
+                <a:spcPct val="0"/>
+              </a:spcBef>
+              <a:buNone/>
+              <a:defRPr sz="3200" kern="1200" cap="all" baseline="0">
+                <a:solidFill>
+                  <a:schemeClr val="tx1"/>
+                </a:solidFill>
+                <a:effectLst/>
+                <a:latin typeface="Batang" panose="02030600000101010101" pitchFamily="18" charset="-127"/>
+                <a:ea typeface="Batang" panose="02030600000101010101" pitchFamily="18" charset="-127"/>
+                <a:cs typeface="+mj-cs"/>
+              </a:defRPr>
+            </a:lvl1pPr>
+          </a:lstStyle>
+          <a:p>
+            <a:pPr algn="l"/>
+            <a:r>
+              <a:rPr lang="en-US" altLang="ko-KR" sz="2800" cap="none" dirty="0">
+                <a:solidFill>
+                  <a:schemeClr val="bg2">
+                    <a:lumMod val="25000"/>
+                  </a:schemeClr>
+                </a:solidFill>
+                <a:latin typeface="D2Coding" panose="020B0609020101020101" pitchFamily="49" charset="-127"/>
+                <a:ea typeface="D2Coding" panose="020B0609020101020101" pitchFamily="49" charset="-127"/>
+                <a:cs typeface="Segoe UI Light" panose="020B0502040204020203" pitchFamily="34" charset="0"/>
+              </a:rPr>
+              <a:t>Telephone Game(</a:t>
+            </a:r>
+            <a:r>
+              <a:rPr lang="ko-KR" altLang="en-US" sz="2800" cap="none" dirty="0">
+                <a:solidFill>
+                  <a:schemeClr val="bg2">
+                    <a:lumMod val="25000"/>
+                  </a:schemeClr>
+                </a:solidFill>
+                <a:latin typeface="D2Coding" panose="020B0609020101020101" pitchFamily="49" charset="-127"/>
+                <a:ea typeface="D2Coding" panose="020B0609020101020101" pitchFamily="49" charset="-127"/>
+                <a:cs typeface="Segoe UI Light" panose="020B0502040204020203" pitchFamily="34" charset="0"/>
+              </a:rPr>
+              <a:t>말 전달하기 게임</a:t>
+            </a:r>
+            <a:r>
+              <a:rPr lang="en-US" altLang="ko-KR" sz="2800" cap="none" dirty="0">
+                <a:solidFill>
+                  <a:schemeClr val="bg2">
+                    <a:lumMod val="25000"/>
+                  </a:schemeClr>
+                </a:solidFill>
+                <a:latin typeface="D2Coding" panose="020B0609020101020101" pitchFamily="49" charset="-127"/>
+                <a:ea typeface="D2Coding" panose="020B0609020101020101" pitchFamily="49" charset="-127"/>
+                <a:cs typeface="Segoe UI Light" panose="020B0502040204020203" pitchFamily="34" charset="0"/>
+              </a:rPr>
+              <a:t>)</a:t>
+            </a:r>
+            <a:endParaRPr lang="ko-KR" altLang="en-US" sz="2800" cap="none" dirty="0">
+              <a:solidFill>
+                <a:schemeClr val="bg2">
+                  <a:lumMod val="25000"/>
+                </a:schemeClr>
+              </a:solidFill>
+              <a:latin typeface="D2Coding" panose="020B0609020101020101" pitchFamily="49" charset="-127"/>
+              <a:ea typeface="D2Coding" panose="020B0609020101020101" pitchFamily="49" charset="-127"/>
+              <a:cs typeface="Segoe UI Light" panose="020B0502040204020203" pitchFamily="34" charset="0"/>
+            </a:endParaRPr>
+          </a:p>
+        </p:txBody>
+      </p:sp>
+      <p:sp>
+        <p:nvSpPr>
+          <p:cNvPr id="11" name="TextBox 10">
+            <a:extLst>
+              <a:ext uri="{FF2B5EF4-FFF2-40B4-BE49-F238E27FC236}">
+                <a16:creationId xmlns:a16="http://schemas.microsoft.com/office/drawing/2014/main" id="{DF65489D-6F2A-9B19-C55E-FAB775A3AAFD}"/>
+              </a:ext>
+            </a:extLst>
+          </p:cNvPr>
+          <p:cNvSpPr txBox="1"/>
+          <p:nvPr/>
+        </p:nvSpPr>
+        <p:spPr>
+          <a:xfrm>
+            <a:off x="1370616" y="5666929"/>
+            <a:ext cx="7407624" cy="369332"/>
+          </a:xfrm>
+          <a:prstGeom prst="rect">
+            <a:avLst/>
+          </a:prstGeom>
+          <a:noFill/>
+        </p:spPr>
+        <p:txBody>
+          <a:bodyPr wrap="square" rtlCol="0">
+            <a:spAutoFit/>
+          </a:bodyPr>
+          <a:lstStyle/>
+          <a:p>
+            <a:r>
+              <a:rPr lang="en-US" altLang="ko-KR" dirty="0">
+                <a:latin typeface="Cascadia Code" panose="020B0609020000020004" pitchFamily="49" charset="0"/>
+                <a:ea typeface="Cascadia Code" panose="020B0609020000020004" pitchFamily="49" charset="0"/>
+                <a:cs typeface="Cascadia Code" panose="020B0609020000020004" pitchFamily="49" charset="0"/>
+              </a:rPr>
+              <a:t>I	am	  your	      father</a:t>
+            </a:r>
+            <a:endParaRPr lang="ko-KR" altLang="en-US" dirty="0">
+              <a:latin typeface="Cascadia Code" panose="020B0609020000020004" pitchFamily="49" charset="0"/>
+              <a:cs typeface="Cascadia Code" panose="020B0609020000020004" pitchFamily="49" charset="0"/>
+            </a:endParaRPr>
+          </a:p>
+        </p:txBody>
+      </p:sp>
+      <p:pic>
+        <p:nvPicPr>
+          <p:cNvPr id="4104" name="Picture 8" descr="Parlour Games During the Holidays: Hapny FolvdaKs">
+            <a:extLst>
+              <a:ext uri="{FF2B5EF4-FFF2-40B4-BE49-F238E27FC236}">
+                <a16:creationId xmlns:a16="http://schemas.microsoft.com/office/drawing/2014/main" id="{2F58ED32-CC7E-7F05-8BEF-5EB9936AE4C7}"/>
+              </a:ext>
+            </a:extLst>
+          </p:cNvPr>
+          <p:cNvPicPr>
+            <a:picLocks noChangeAspect="1" noChangeArrowheads="1"/>
+          </p:cNvPicPr>
+          <p:nvPr/>
+        </p:nvPicPr>
+        <p:blipFill>
+          <a:blip r:embed="rId2">
+            <a:extLst>
+              <a:ext uri="{28A0092B-C50C-407E-A947-70E740481C1C}">
+                <a14:useLocalDpi xmlns:a14="http://schemas.microsoft.com/office/drawing/2010/main" val="0"/>
+              </a:ext>
+            </a:extLst>
+          </a:blip>
+          <a:srcRect/>
+          <a:stretch>
+            <a:fillRect/>
+          </a:stretch>
+        </p:blipFill>
+        <p:spPr bwMode="auto">
+          <a:xfrm>
+            <a:off x="3296041" y="1841058"/>
+            <a:ext cx="5403850" cy="3602567"/>
+          </a:xfrm>
+          <a:prstGeom prst="rect">
+            <a:avLst/>
+          </a:prstGeom>
+          <a:noFill/>
+          <a:extLst>
+            <a:ext uri="{909E8E84-426E-40DD-AFC4-6F175D3DCCD1}">
+              <a14:hiddenFill xmlns:a14="http://schemas.microsoft.com/office/drawing/2010/main">
+                <a:solidFill>
+                  <a:srgbClr val="FFFFFF"/>
+                </a:solidFill>
+              </a14:hiddenFill>
+            </a:ext>
+          </a:extLst>
+        </p:spPr>
+      </p:pic>
+      <p:sp>
+        <p:nvSpPr>
+          <p:cNvPr id="2" name="슬라이드 번호 개체 틀 3">
+            <a:extLst>
+              <a:ext uri="{FF2B5EF4-FFF2-40B4-BE49-F238E27FC236}">
+                <a16:creationId xmlns:a16="http://schemas.microsoft.com/office/drawing/2014/main" id="{3DD0566A-E880-8D26-CCF0-91CC50E3A5C9}"/>
+              </a:ext>
+            </a:extLst>
+          </p:cNvPr>
+          <p:cNvSpPr txBox="1">
+            <a:spLocks/>
+          </p:cNvSpPr>
+          <p:nvPr/>
+        </p:nvSpPr>
+        <p:spPr>
+          <a:xfrm>
+            <a:off x="11162487" y="299420"/>
+            <a:ext cx="753545" cy="365125"/>
+          </a:xfrm>
+          <a:prstGeom prst="rect">
+            <a:avLst/>
+          </a:prstGeom>
+        </p:spPr>
+        <p:txBody>
+          <a:bodyPr vert="horz" lIns="91440" tIns="45720" rIns="91440" bIns="45720" rtlCol="0" anchor="ctr"/>
+          <a:lstStyle>
+            <a:defPPr rtl="0">
+              <a:defRPr lang="ko-KR"/>
+            </a:defPPr>
+            <a:lvl1pPr marL="0" algn="r" defTabSz="914400" rtl="0" eaLnBrk="1" latinLnBrk="0" hangingPunct="1">
+              <a:defRPr sz="1200" kern="1200" baseline="0">
+                <a:solidFill>
+                  <a:schemeClr val="tx1">
+                    <a:lumMod val="65000"/>
+                    <a:lumOff val="35000"/>
+                  </a:schemeClr>
+                </a:solidFill>
+                <a:latin typeface="맑은 고딕" panose="020B0503020000020004" pitchFamily="50" charset="-127"/>
+                <a:ea typeface="맑은 고딕" panose="020B0503020000020004" pitchFamily="50" charset="-127"/>
+                <a:cs typeface="+mn-cs"/>
+              </a:defRPr>
+            </a:lvl1pPr>
+            <a:lvl2pPr marL="457200" algn="l" defTabSz="914400" rtl="0" eaLnBrk="1" latinLnBrk="0" hangingPunct="1">
+              <a:defRPr sz="1800" kern="1200">
+                <a:solidFill>
+                  <a:schemeClr val="tx1"/>
+                </a:solidFill>
+                <a:latin typeface="+mn-lt"/>
+                <a:ea typeface="+mn-ea"/>
+                <a:cs typeface="+mn-cs"/>
+              </a:defRPr>
+            </a:lvl2pPr>
+            <a:lvl3pPr marL="914400" algn="l" defTabSz="914400" rtl="0" eaLnBrk="1" latinLnBrk="0" hangingPunct="1">
+              <a:defRPr sz="1800" kern="1200">
+                <a:solidFill>
+                  <a:schemeClr val="tx1"/>
+                </a:solidFill>
+                <a:latin typeface="+mn-lt"/>
+                <a:ea typeface="+mn-ea"/>
+                <a:cs typeface="+mn-cs"/>
+              </a:defRPr>
+            </a:lvl3pPr>
+            <a:lvl4pPr marL="1371600" algn="l" defTabSz="914400" rtl="0" eaLnBrk="1" latinLnBrk="0" hangingPunct="1">
+              <a:defRPr sz="1800" kern="1200">
+                <a:solidFill>
+                  <a:schemeClr val="tx1"/>
+                </a:solidFill>
+                <a:latin typeface="+mn-lt"/>
+                <a:ea typeface="+mn-ea"/>
+                <a:cs typeface="+mn-cs"/>
+              </a:defRPr>
+            </a:lvl4pPr>
+            <a:lvl5pPr marL="1828800" algn="l" defTabSz="914400" rtl="0" eaLnBrk="1" latinLnBrk="0" hangingPunct="1">
+              <a:defRPr sz="1800" kern="1200">
+                <a:solidFill>
+                  <a:schemeClr val="tx1"/>
+                </a:solidFill>
+                <a:latin typeface="+mn-lt"/>
+                <a:ea typeface="+mn-ea"/>
+                <a:cs typeface="+mn-cs"/>
+              </a:defRPr>
+            </a:lvl5pPr>
+            <a:lvl6pPr marL="2286000" algn="l" defTabSz="914400" rtl="0" eaLnBrk="1" latinLnBrk="0" hangingPunct="1">
+              <a:defRPr sz="1800" kern="1200">
+                <a:solidFill>
+                  <a:schemeClr val="tx1"/>
+                </a:solidFill>
+                <a:latin typeface="+mn-lt"/>
+                <a:ea typeface="+mn-ea"/>
+                <a:cs typeface="+mn-cs"/>
+              </a:defRPr>
+            </a:lvl6pPr>
+            <a:lvl7pPr marL="2743200" algn="l" defTabSz="914400" rtl="0" eaLnBrk="1" latinLnBrk="0" hangingPunct="1">
+              <a:defRPr sz="1800" kern="1200">
+                <a:solidFill>
+                  <a:schemeClr val="tx1"/>
+                </a:solidFill>
+                <a:latin typeface="+mn-lt"/>
+                <a:ea typeface="+mn-ea"/>
+                <a:cs typeface="+mn-cs"/>
+              </a:defRPr>
+            </a:lvl7pPr>
+            <a:lvl8pPr marL="3200400" algn="l" defTabSz="914400" rtl="0" eaLnBrk="1" latinLnBrk="0" hangingPunct="1">
+              <a:defRPr sz="1800" kern="1200">
+                <a:solidFill>
+                  <a:schemeClr val="tx1"/>
+                </a:solidFill>
+                <a:latin typeface="+mn-lt"/>
+                <a:ea typeface="+mn-ea"/>
+                <a:cs typeface="+mn-cs"/>
+              </a:defRPr>
+            </a:lvl8pPr>
+            <a:lvl9pPr marL="3657600" algn="l" defTabSz="914400" rtl="0" eaLnBrk="1" latinLnBrk="0" hangingPunct="1">
+              <a:defRPr sz="1800" kern="1200">
+                <a:solidFill>
+                  <a:schemeClr val="tx1"/>
+                </a:solidFill>
+                <a:latin typeface="+mn-lt"/>
+                <a:ea typeface="+mn-ea"/>
+                <a:cs typeface="+mn-cs"/>
+              </a:defRPr>
+            </a:lvl9pPr>
+          </a:lstStyle>
+          <a:p>
+            <a:fld id="{D57F1E4F-1CFF-5643-939E-217C01CDF565}" type="slidenum">
+              <a:rPr lang="en-US" sz="1400" b="1" smtClean="0">
+                <a:latin typeface="Times New Roman" panose="02020603050405020304" pitchFamily="18" charset="0"/>
+                <a:ea typeface="Verdana" panose="020B0604030504040204" pitchFamily="34" charset="0"/>
+                <a:cs typeface="Times New Roman" panose="02020603050405020304" pitchFamily="18" charset="0"/>
+              </a:rPr>
+              <a:pPr/>
+              <a:t>3</a:t>
+            </a:fld>
+            <a:endParaRPr lang="en-US" sz="1400" b="1" dirty="0">
+              <a:latin typeface="Times New Roman" panose="02020603050405020304" pitchFamily="18" charset="0"/>
+              <a:ea typeface="Verdana" panose="020B0604030504040204" pitchFamily="34" charset="0"/>
+              <a:cs typeface="Times New Roman" panose="02020603050405020304" pitchFamily="18" charset="0"/>
+            </a:endParaRPr>
+          </a:p>
+        </p:txBody>
+      </p:sp>
+    </p:spTree>
+    <p:extLst>
+      <p:ext uri="{BB962C8B-B14F-4D97-AF65-F5344CB8AC3E}">
+        <p14:creationId xmlns:p14="http://schemas.microsoft.com/office/powerpoint/2010/main" val="3037908167"/>
+      </p:ext>
+    </p:extLst>
+  </p:cSld>
+  <p:clrMapOvr>
+    <a:masterClrMapping/>
+  </p:clrMapOvr>
+</p:sld>
+</file>
+
+<file path=ppt/slides/slide30.xml><?xml version="1.0" encoding="utf-8"?>
 <p:sld xmlns:a="http://schemas.openxmlformats.org/drawingml/2006/main" xmlns:r="http://schemas.openxmlformats.org/officeDocument/2006/relationships" xmlns:p="http://schemas.openxmlformats.org/presentationml/2006/main">
   <p:cSld>
     <p:spTree>
@@ -25939,41 +29218,6 @@
           <a:chExt cx="0" cy="0"/>
         </a:xfrm>
       </p:grpSpPr>
-      <p:sp>
-        <p:nvSpPr>
-          <p:cNvPr id="4" name="슬라이드 번호 개체 틀 3">
-            <a:extLst>
-              <a:ext uri="{FF2B5EF4-FFF2-40B4-BE49-F238E27FC236}">
-                <a16:creationId xmlns:a16="http://schemas.microsoft.com/office/drawing/2014/main" id="{1F96B781-302F-27AB-E192-CDB2AB5F3283}"/>
-              </a:ext>
-            </a:extLst>
-          </p:cNvPr>
-          <p:cNvSpPr>
-            <a:spLocks noGrp="1"/>
-          </p:cNvSpPr>
-          <p:nvPr>
-            <p:ph type="sldNum" sz="quarter" idx="12"/>
-          </p:nvPr>
-        </p:nvSpPr>
-        <p:spPr>
-          <a:xfrm>
-            <a:off x="10514011" y="6036261"/>
-            <a:ext cx="753545" cy="365125"/>
-          </a:xfrm>
-        </p:spPr>
-        <p:txBody>
-          <a:bodyPr/>
-          <a:lstStyle/>
-          <a:p>
-            <a:fld id="{D57F1E4F-1CFF-5643-939E-217C01CDF565}" type="slidenum">
-              <a:rPr lang="en-US" smtClean="0"/>
-              <a:pPr/>
-              <a:t>25</a:t>
-            </a:fld>
-            <a:endParaRPr lang="en-US" dirty="0"/>
-          </a:p>
-        </p:txBody>
-      </p:sp>
       <p:sp>
         <p:nvSpPr>
           <p:cNvPr id="3" name="제목 1">
@@ -26358,7 +29602,7 @@
 </p:sld>
 </file>
 
-<file path=ppt/slides/slide26.xml><?xml version="1.0" encoding="utf-8"?>
+<file path=ppt/slides/slide31.xml><?xml version="1.0" encoding="utf-8"?>
 <p:sld xmlns:a="http://schemas.openxmlformats.org/drawingml/2006/main" xmlns:r="http://schemas.openxmlformats.org/officeDocument/2006/relationships" xmlns:p="http://schemas.openxmlformats.org/presentationml/2006/main">
   <p:cSld>
     <p:spTree>
@@ -26381,41 +29625,6 @@
           <a:chExt cx="0" cy="0"/>
         </a:xfrm>
       </p:grpSpPr>
-      <p:sp>
-        <p:nvSpPr>
-          <p:cNvPr id="4" name="슬라이드 번호 개체 틀 3">
-            <a:extLst>
-              <a:ext uri="{FF2B5EF4-FFF2-40B4-BE49-F238E27FC236}">
-                <a16:creationId xmlns:a16="http://schemas.microsoft.com/office/drawing/2014/main" id="{0CBC867F-634A-CA6A-7E8F-C93BE0151EF8}"/>
-              </a:ext>
-            </a:extLst>
-          </p:cNvPr>
-          <p:cNvSpPr>
-            <a:spLocks noGrp="1"/>
-          </p:cNvSpPr>
-          <p:nvPr>
-            <p:ph type="sldNum" sz="quarter" idx="12"/>
-          </p:nvPr>
-        </p:nvSpPr>
-        <p:spPr>
-          <a:xfrm>
-            <a:off x="10514011" y="6036261"/>
-            <a:ext cx="753545" cy="365125"/>
-          </a:xfrm>
-        </p:spPr>
-        <p:txBody>
-          <a:bodyPr/>
-          <a:lstStyle/>
-          <a:p>
-            <a:fld id="{D57F1E4F-1CFF-5643-939E-217C01CDF565}" type="slidenum">
-              <a:rPr lang="en-US" smtClean="0"/>
-              <a:pPr/>
-              <a:t>26</a:t>
-            </a:fld>
-            <a:endParaRPr lang="en-US" dirty="0"/>
-          </a:p>
-        </p:txBody>
-      </p:sp>
       <p:sp>
         <p:nvSpPr>
           <p:cNvPr id="3" name="제목 1">
@@ -27645,7 +30854,7 @@
 </p:sld>
 </file>
 
-<file path=ppt/slides/slide27.xml><?xml version="1.0" encoding="utf-8"?>
+<file path=ppt/slides/slide32.xml><?xml version="1.0" encoding="utf-8"?>
 <p:sld xmlns:a="http://schemas.openxmlformats.org/drawingml/2006/main" xmlns:r="http://schemas.openxmlformats.org/officeDocument/2006/relationships" xmlns:p="http://schemas.openxmlformats.org/presentationml/2006/main">
   <p:cSld>
     <p:spTree>
@@ -27668,41 +30877,6 @@
           <a:chExt cx="0" cy="0"/>
         </a:xfrm>
       </p:grpSpPr>
-      <p:sp>
-        <p:nvSpPr>
-          <p:cNvPr id="4" name="슬라이드 번호 개체 틀 3">
-            <a:extLst>
-              <a:ext uri="{FF2B5EF4-FFF2-40B4-BE49-F238E27FC236}">
-                <a16:creationId xmlns:a16="http://schemas.microsoft.com/office/drawing/2014/main" id="{0BE85354-CB4E-EC03-450B-ACACADCF6519}"/>
-              </a:ext>
-            </a:extLst>
-          </p:cNvPr>
-          <p:cNvSpPr>
-            <a:spLocks noGrp="1"/>
-          </p:cNvSpPr>
-          <p:nvPr>
-            <p:ph type="sldNum" sz="quarter" idx="12"/>
-          </p:nvPr>
-        </p:nvSpPr>
-        <p:spPr>
-          <a:xfrm>
-            <a:off x="10514011" y="6036261"/>
-            <a:ext cx="753545" cy="365125"/>
-          </a:xfrm>
-        </p:spPr>
-        <p:txBody>
-          <a:bodyPr/>
-          <a:lstStyle/>
-          <a:p>
-            <a:fld id="{D57F1E4F-1CFF-5643-939E-217C01CDF565}" type="slidenum">
-              <a:rPr lang="en-US" smtClean="0"/>
-              <a:pPr/>
-              <a:t>27</a:t>
-            </a:fld>
-            <a:endParaRPr lang="en-US" dirty="0"/>
-          </a:p>
-        </p:txBody>
-      </p:sp>
       <p:sp>
         <p:nvSpPr>
           <p:cNvPr id="3" name="제목 1">
@@ -29189,7 +32363,7 @@
 </p:sld>
 </file>
 
-<file path=ppt/slides/slide28.xml><?xml version="1.0" encoding="utf-8"?>
+<file path=ppt/slides/slide33.xml><?xml version="1.0" encoding="utf-8"?>
 <p:sld xmlns:a="http://schemas.openxmlformats.org/drawingml/2006/main" xmlns:r="http://schemas.openxmlformats.org/officeDocument/2006/relationships" xmlns:p="http://schemas.openxmlformats.org/presentationml/2006/main">
   <p:cSld>
     <p:spTree>
@@ -29212,41 +32386,6 @@
           <a:chExt cx="0" cy="0"/>
         </a:xfrm>
       </p:grpSpPr>
-      <p:sp>
-        <p:nvSpPr>
-          <p:cNvPr id="4" name="슬라이드 번호 개체 틀 3">
-            <a:extLst>
-              <a:ext uri="{FF2B5EF4-FFF2-40B4-BE49-F238E27FC236}">
-                <a16:creationId xmlns:a16="http://schemas.microsoft.com/office/drawing/2014/main" id="{DC2A6246-2F11-7E99-42F8-C724EAE1BC13}"/>
-              </a:ext>
-            </a:extLst>
-          </p:cNvPr>
-          <p:cNvSpPr>
-            <a:spLocks noGrp="1"/>
-          </p:cNvSpPr>
-          <p:nvPr>
-            <p:ph type="sldNum" sz="quarter" idx="12"/>
-          </p:nvPr>
-        </p:nvSpPr>
-        <p:spPr>
-          <a:xfrm>
-            <a:off x="10514011" y="6036261"/>
-            <a:ext cx="753545" cy="365125"/>
-          </a:xfrm>
-        </p:spPr>
-        <p:txBody>
-          <a:bodyPr/>
-          <a:lstStyle/>
-          <a:p>
-            <a:fld id="{D57F1E4F-1CFF-5643-939E-217C01CDF565}" type="slidenum">
-              <a:rPr lang="en-US" smtClean="0"/>
-              <a:pPr/>
-              <a:t>28</a:t>
-            </a:fld>
-            <a:endParaRPr lang="en-US" dirty="0"/>
-          </a:p>
-        </p:txBody>
-      </p:sp>
       <p:sp>
         <p:nvSpPr>
           <p:cNvPr id="3" name="제목 1">
@@ -29353,13 +32492,13 @@
         <p:spPr>
           <a:xfrm>
             <a:off x="660400" y="1335673"/>
-            <a:ext cx="11125200" cy="5262979"/>
+            <a:ext cx="11125200" cy="4616648"/>
           </a:xfrm>
           <a:prstGeom prst="rect">
             <a:avLst/>
           </a:prstGeom>
           <a:solidFill>
-            <a:schemeClr val="accent6">
+            <a:schemeClr val="accent4">
               <a:lumMod val="40000"/>
               <a:lumOff val="60000"/>
             </a:schemeClr>
@@ -29372,345 +32511,345 @@
           <a:lstStyle/>
           <a:p>
             <a:r>
-              <a:rPr lang="en-US" altLang="ko-KR" sz="1600" dirty="0">
+              <a:rPr lang="en-US" altLang="ko-KR" sz="1400" dirty="0">
                 <a:latin typeface="D2Coding" panose="020B0609020101020101" pitchFamily="49" charset="-127"/>
                 <a:ea typeface="D2Coding" panose="020B0609020101020101" pitchFamily="49" charset="-127"/>
               </a:rPr>
               <a:t>import </a:t>
             </a:r>
             <a:r>
-              <a:rPr lang="en-US" altLang="ko-KR" sz="1600" dirty="0" err="1">
+              <a:rPr lang="en-US" altLang="ko-KR" sz="1400" dirty="0" err="1">
                 <a:latin typeface="D2Coding" panose="020B0609020101020101" pitchFamily="49" charset="-127"/>
                 <a:ea typeface="D2Coding" panose="020B0609020101020101" pitchFamily="49" charset="-127"/>
               </a:rPr>
               <a:t>tensorflow</a:t>
             </a:r>
             <a:r>
-              <a:rPr lang="en-US" altLang="ko-KR" sz="1600" dirty="0">
+              <a:rPr lang="en-US" altLang="ko-KR" sz="1400" dirty="0">
                 <a:latin typeface="D2Coding" panose="020B0609020101020101" pitchFamily="49" charset="-127"/>
                 <a:ea typeface="D2Coding" panose="020B0609020101020101" pitchFamily="49" charset="-127"/>
               </a:rPr>
               <a:t> as </a:t>
             </a:r>
             <a:r>
-              <a:rPr lang="en-US" altLang="ko-KR" sz="1600" dirty="0" err="1">
+              <a:rPr lang="en-US" altLang="ko-KR" sz="1400" dirty="0" err="1">
                 <a:latin typeface="D2Coding" panose="020B0609020101020101" pitchFamily="49" charset="-127"/>
                 <a:ea typeface="D2Coding" panose="020B0609020101020101" pitchFamily="49" charset="-127"/>
               </a:rPr>
               <a:t>tfimport</a:t>
             </a:r>
             <a:r>
-              <a:rPr lang="ko-KR" altLang="en-US" sz="1600" dirty="0">
+              <a:rPr lang="ko-KR" altLang="en-US" sz="1400" dirty="0">
                 <a:latin typeface="D2Coding" panose="020B0609020101020101" pitchFamily="49" charset="-127"/>
                 <a:ea typeface="D2Coding" panose="020B0609020101020101" pitchFamily="49" charset="-127"/>
               </a:rPr>
               <a:t> </a:t>
             </a:r>
             <a:r>
-              <a:rPr lang="en-US" altLang="ko-KR" sz="1600" dirty="0" err="1">
+              <a:rPr lang="en-US" altLang="ko-KR" sz="1400" dirty="0" err="1">
                 <a:latin typeface="D2Coding" panose="020B0609020101020101" pitchFamily="49" charset="-127"/>
                 <a:ea typeface="D2Coding" panose="020B0609020101020101" pitchFamily="49" charset="-127"/>
               </a:rPr>
               <a:t>tensorflow</a:t>
             </a:r>
             <a:r>
-              <a:rPr lang="en-US" altLang="ko-KR" sz="1600" dirty="0">
+              <a:rPr lang="en-US" altLang="ko-KR" sz="1400" dirty="0">
                 <a:latin typeface="D2Coding" panose="020B0609020101020101" pitchFamily="49" charset="-127"/>
                 <a:ea typeface="D2Coding" panose="020B0609020101020101" pitchFamily="49" charset="-127"/>
               </a:rPr>
               <a:t> as</a:t>
             </a:r>
             <a:r>
-              <a:rPr lang="ko-KR" altLang="en-US" sz="1600" dirty="0">
+              <a:rPr lang="ko-KR" altLang="en-US" sz="1400" dirty="0">
                 <a:latin typeface="D2Coding" panose="020B0609020101020101" pitchFamily="49" charset="-127"/>
                 <a:ea typeface="D2Coding" panose="020B0609020101020101" pitchFamily="49" charset="-127"/>
               </a:rPr>
               <a:t> </a:t>
             </a:r>
             <a:r>
-              <a:rPr lang="en-US" altLang="ko-KR" sz="1600" dirty="0" err="1">
+              <a:rPr lang="en-US" altLang="ko-KR" sz="1400" dirty="0" err="1">
                 <a:latin typeface="D2Coding" panose="020B0609020101020101" pitchFamily="49" charset="-127"/>
                 <a:ea typeface="D2Coding" panose="020B0609020101020101" pitchFamily="49" charset="-127"/>
               </a:rPr>
               <a:t>tf</a:t>
             </a:r>
-            <a:endParaRPr lang="en-US" altLang="ko-KR" sz="1600" dirty="0">
+            <a:endParaRPr lang="en-US" altLang="ko-KR" sz="1400" dirty="0">
               <a:latin typeface="D2Coding" panose="020B0609020101020101" pitchFamily="49" charset="-127"/>
               <a:ea typeface="D2Coding" panose="020B0609020101020101" pitchFamily="49" charset="-127"/>
             </a:endParaRPr>
           </a:p>
           <a:p>
             <a:r>
-              <a:rPr lang="en-US" altLang="ko-KR" sz="1600" dirty="0">
+              <a:rPr lang="en-US" altLang="ko-KR" sz="1400" dirty="0">
                 <a:latin typeface="D2Coding" panose="020B0609020101020101" pitchFamily="49" charset="-127"/>
                 <a:ea typeface="D2Coding" panose="020B0609020101020101" pitchFamily="49" charset="-127"/>
               </a:rPr>
               <a:t>from</a:t>
             </a:r>
             <a:r>
-              <a:rPr lang="ko-KR" altLang="en-US" sz="1600" dirty="0">
+              <a:rPr lang="ko-KR" altLang="en-US" sz="1400" dirty="0">
                 <a:latin typeface="D2Coding" panose="020B0609020101020101" pitchFamily="49" charset="-127"/>
                 <a:ea typeface="D2Coding" panose="020B0609020101020101" pitchFamily="49" charset="-127"/>
               </a:rPr>
               <a:t> </a:t>
             </a:r>
             <a:r>
-              <a:rPr lang="en-US" altLang="ko-KR" sz="1600" dirty="0" err="1">
+              <a:rPr lang="en-US" altLang="ko-KR" sz="1400" dirty="0" err="1">
                 <a:latin typeface="D2Coding" panose="020B0609020101020101" pitchFamily="49" charset="-127"/>
                 <a:ea typeface="D2Coding" panose="020B0609020101020101" pitchFamily="49" charset="-127"/>
               </a:rPr>
               <a:t>tensorflow</a:t>
             </a:r>
             <a:r>
-              <a:rPr lang="en-US" altLang="ko-KR" sz="1600" dirty="0">
+              <a:rPr lang="en-US" altLang="ko-KR" sz="1400" dirty="0">
                 <a:latin typeface="D2Coding" panose="020B0609020101020101" pitchFamily="49" charset="-127"/>
                 <a:ea typeface="D2Coding" panose="020B0609020101020101" pitchFamily="49" charset="-127"/>
               </a:rPr>
               <a:t> import</a:t>
             </a:r>
             <a:r>
-              <a:rPr lang="ko-KR" altLang="en-US" sz="1600" dirty="0">
+              <a:rPr lang="ko-KR" altLang="en-US" sz="1400" dirty="0">
                 <a:latin typeface="D2Coding" panose="020B0609020101020101" pitchFamily="49" charset="-127"/>
                 <a:ea typeface="D2Coding" panose="020B0609020101020101" pitchFamily="49" charset="-127"/>
               </a:rPr>
               <a:t> </a:t>
             </a:r>
             <a:r>
-              <a:rPr lang="en-US" altLang="ko-KR" sz="1600" dirty="0" err="1">
+              <a:rPr lang="en-US" altLang="ko-KR" sz="1400" dirty="0" err="1">
                 <a:latin typeface="D2Coding" panose="020B0609020101020101" pitchFamily="49" charset="-127"/>
                 <a:ea typeface="D2Coding" panose="020B0609020101020101" pitchFamily="49" charset="-127"/>
               </a:rPr>
               <a:t>keras</a:t>
             </a:r>
-            <a:endParaRPr lang="en-US" altLang="ko-KR" sz="1600" dirty="0">
+            <a:endParaRPr lang="en-US" altLang="ko-KR" sz="1400" dirty="0">
               <a:latin typeface="D2Coding" panose="020B0609020101020101" pitchFamily="49" charset="-127"/>
               <a:ea typeface="D2Coding" panose="020B0609020101020101" pitchFamily="49" charset="-127"/>
             </a:endParaRPr>
           </a:p>
           <a:p>
-            <a:endParaRPr lang="en-US" altLang="ko-KR" sz="1600" dirty="0">
+            <a:endParaRPr lang="en-US" altLang="ko-KR" sz="1400" dirty="0">
               <a:latin typeface="D2Coding" panose="020B0609020101020101" pitchFamily="49" charset="-127"/>
               <a:ea typeface="D2Coding" panose="020B0609020101020101" pitchFamily="49" charset="-127"/>
             </a:endParaRPr>
           </a:p>
           <a:p>
             <a:r>
-              <a:rPr lang="en-US" altLang="ko-KR" sz="1600" dirty="0">
+              <a:rPr lang="en-US" altLang="ko-KR" sz="1400" dirty="0">
                 <a:latin typeface="D2Coding" panose="020B0609020101020101" pitchFamily="49" charset="-127"/>
                 <a:ea typeface="D2Coding" panose="020B0609020101020101" pitchFamily="49" charset="-127"/>
               </a:rPr>
               <a:t># 1. </a:t>
             </a:r>
             <a:r>
-              <a:rPr lang="ko-KR" altLang="en-US" sz="1600" dirty="0">
+              <a:rPr lang="ko-KR" altLang="en-US" sz="1400" dirty="0">
                 <a:latin typeface="D2Coding" panose="020B0609020101020101" pitchFamily="49" charset="-127"/>
                 <a:ea typeface="D2Coding" panose="020B0609020101020101" pitchFamily="49" charset="-127"/>
               </a:rPr>
               <a:t>가상 데이터 생성 </a:t>
             </a:r>
             <a:r>
-              <a:rPr lang="en-US" altLang="ko-KR" sz="1600" dirty="0">
+              <a:rPr lang="en-US" altLang="ko-KR" sz="1400" dirty="0">
                 <a:latin typeface="D2Coding" panose="020B0609020101020101" pitchFamily="49" charset="-127"/>
                 <a:ea typeface="D2Coding" panose="020B0609020101020101" pitchFamily="49" charset="-127"/>
               </a:rPr>
               <a:t>(Matrix) </a:t>
             </a:r>
             <a:r>
-              <a:rPr lang="ko-KR" altLang="en-US" sz="1600" dirty="0">
+              <a:rPr lang="ko-KR" altLang="en-US" sz="1400" dirty="0">
                 <a:latin typeface="D2Coding" panose="020B0609020101020101" pitchFamily="49" charset="-127"/>
                 <a:ea typeface="D2Coding" panose="020B0609020101020101" pitchFamily="49" charset="-127"/>
               </a:rPr>
               <a:t>단어 </a:t>
             </a:r>
             <a:r>
-              <a:rPr lang="en-US" altLang="ko-KR" sz="1600" dirty="0">
+              <a:rPr lang="en-US" altLang="ko-KR" sz="1400" dirty="0">
                 <a:latin typeface="D2Coding" panose="020B0609020101020101" pitchFamily="49" charset="-127"/>
                 <a:ea typeface="D2Coding" panose="020B0609020101020101" pitchFamily="49" charset="-127"/>
               </a:rPr>
               <a:t>1</a:t>
             </a:r>
             <a:r>
-              <a:rPr lang="ko-KR" altLang="en-US" sz="1600" dirty="0">
+              <a:rPr lang="ko-KR" altLang="en-US" sz="1400" dirty="0">
                 <a:latin typeface="D2Coding" panose="020B0609020101020101" pitchFamily="49" charset="-127"/>
                 <a:ea typeface="D2Coding" panose="020B0609020101020101" pitchFamily="49" charset="-127"/>
               </a:rPr>
               <a:t>개씩 </a:t>
             </a:r>
             <a:r>
-              <a:rPr lang="en-US" altLang="ko-KR" sz="1600" dirty="0">
+              <a:rPr lang="en-US" altLang="ko-KR" sz="1400" dirty="0">
                 <a:latin typeface="D2Coding" panose="020B0609020101020101" pitchFamily="49" charset="-127"/>
                 <a:ea typeface="D2Coding" panose="020B0609020101020101" pitchFamily="49" charset="-127"/>
               </a:rPr>
               <a:t>4</a:t>
             </a:r>
             <a:r>
-              <a:rPr lang="ko-KR" altLang="en-US" sz="1600" dirty="0">
+              <a:rPr lang="ko-KR" altLang="en-US" sz="1400" dirty="0">
                 <a:latin typeface="D2Coding" panose="020B0609020101020101" pitchFamily="49" charset="-127"/>
                 <a:ea typeface="D2Coding" panose="020B0609020101020101" pitchFamily="49" charset="-127"/>
               </a:rPr>
               <a:t>번 </a:t>
             </a:r>
             <a:r>
-              <a:rPr lang="en-US" altLang="ko-KR" sz="1600" dirty="0">
+              <a:rPr lang="en-US" altLang="ko-KR" sz="1400" dirty="0">
                 <a:latin typeface="D2Coding" panose="020B0609020101020101" pitchFamily="49" charset="-127"/>
                 <a:ea typeface="D2Coding" panose="020B0609020101020101" pitchFamily="49" charset="-127"/>
               </a:rPr>
               <a:t>(timesteps=4), </a:t>
             </a:r>
             <a:r>
-              <a:rPr lang="ko-KR" altLang="en-US" sz="1600" dirty="0">
+              <a:rPr lang="ko-KR" altLang="en-US" sz="1400" dirty="0">
                 <a:latin typeface="D2Coding" panose="020B0609020101020101" pitchFamily="49" charset="-127"/>
                 <a:ea typeface="D2Coding" panose="020B0609020101020101" pitchFamily="49" charset="-127"/>
               </a:rPr>
               <a:t>각 단어는 </a:t>
             </a:r>
             <a:r>
-              <a:rPr lang="en-US" altLang="ko-KR" sz="1600" dirty="0">
+              <a:rPr lang="en-US" altLang="ko-KR" sz="1400" dirty="0">
                 <a:latin typeface="D2Coding" panose="020B0609020101020101" pitchFamily="49" charset="-127"/>
                 <a:ea typeface="D2Coding" panose="020B0609020101020101" pitchFamily="49" charset="-127"/>
               </a:rPr>
               <a:t>4</a:t>
             </a:r>
             <a:r>
-              <a:rPr lang="ko-KR" altLang="en-US" sz="1600" dirty="0">
+              <a:rPr lang="ko-KR" altLang="en-US" sz="1400" dirty="0">
                 <a:latin typeface="D2Coding" panose="020B0609020101020101" pitchFamily="49" charset="-127"/>
                 <a:ea typeface="D2Coding" panose="020B0609020101020101" pitchFamily="49" charset="-127"/>
               </a:rPr>
               <a:t>차원 벡터 </a:t>
             </a:r>
             <a:r>
-              <a:rPr lang="en-US" altLang="ko-KR" sz="1600" dirty="0">
+              <a:rPr lang="en-US" altLang="ko-KR" sz="1400" dirty="0">
                 <a:latin typeface="D2Coding" panose="020B0609020101020101" pitchFamily="49" charset="-127"/>
                 <a:ea typeface="D2Coding" panose="020B0609020101020101" pitchFamily="49" charset="-127"/>
               </a:rPr>
               <a:t>(</a:t>
             </a:r>
             <a:r>
-              <a:rPr lang="en-US" altLang="ko-KR" sz="1600" dirty="0" err="1">
+              <a:rPr lang="en-US" altLang="ko-KR" sz="1400" dirty="0" err="1">
                 <a:latin typeface="D2Coding" panose="020B0609020101020101" pitchFamily="49" charset="-127"/>
                 <a:ea typeface="D2Coding" panose="020B0609020101020101" pitchFamily="49" charset="-127"/>
               </a:rPr>
               <a:t>input_size</a:t>
             </a:r>
             <a:r>
-              <a:rPr lang="en-US" altLang="ko-KR" sz="1600" dirty="0">
+              <a:rPr lang="en-US" altLang="ko-KR" sz="1400" dirty="0">
                 <a:latin typeface="D2Coding" panose="020B0609020101020101" pitchFamily="49" charset="-127"/>
                 <a:ea typeface="D2Coding" panose="020B0609020101020101" pitchFamily="49" charset="-127"/>
               </a:rPr>
               <a:t>=4)</a:t>
             </a:r>
-            <a:endParaRPr lang="ko-KR" altLang="en-US" sz="1600" dirty="0">
+            <a:endParaRPr lang="ko-KR" altLang="en-US" sz="1400" dirty="0">
               <a:latin typeface="D2Coding" panose="020B0609020101020101" pitchFamily="49" charset="-127"/>
               <a:ea typeface="D2Coding" panose="020B0609020101020101" pitchFamily="49" charset="-127"/>
             </a:endParaRPr>
           </a:p>
           <a:p>
             <a:r>
-              <a:rPr lang="en-US" altLang="ko-KR" sz="1600" dirty="0">
+              <a:rPr lang="en-US" altLang="ko-KR" sz="1400" dirty="0">
                 <a:latin typeface="D2Coding" panose="020B0609020101020101" pitchFamily="49" charset="-127"/>
                 <a:ea typeface="D2Coding" panose="020B0609020101020101" pitchFamily="49" charset="-127"/>
               </a:rPr>
               <a:t>timesteps = 4; </a:t>
             </a:r>
             <a:r>
-              <a:rPr lang="en-US" altLang="ko-KR" sz="1600" dirty="0" err="1">
+              <a:rPr lang="en-US" altLang="ko-KR" sz="1400" dirty="0" err="1">
                 <a:latin typeface="D2Coding" panose="020B0609020101020101" pitchFamily="49" charset="-127"/>
                 <a:ea typeface="D2Coding" panose="020B0609020101020101" pitchFamily="49" charset="-127"/>
               </a:rPr>
               <a:t>input_size</a:t>
             </a:r>
             <a:r>
-              <a:rPr lang="en-US" altLang="ko-KR" sz="1600" dirty="0">
+              <a:rPr lang="en-US" altLang="ko-KR" sz="1400" dirty="0">
                 <a:latin typeface="D2Coding" panose="020B0609020101020101" pitchFamily="49" charset="-127"/>
                 <a:ea typeface="D2Coding" panose="020B0609020101020101" pitchFamily="49" charset="-127"/>
               </a:rPr>
               <a:t> = 4</a:t>
             </a:r>
-            <a:endParaRPr lang="ko-KR" altLang="en-US" sz="1600" dirty="0">
+            <a:endParaRPr lang="ko-KR" altLang="en-US" sz="1400" dirty="0">
               <a:latin typeface="D2Coding" panose="020B0609020101020101" pitchFamily="49" charset="-127"/>
               <a:ea typeface="D2Coding" panose="020B0609020101020101" pitchFamily="49" charset="-127"/>
             </a:endParaRPr>
           </a:p>
           <a:p>
             <a:r>
-              <a:rPr lang="en-US" altLang="ko-KR" sz="1600" dirty="0">
+              <a:rPr lang="en-US" altLang="ko-KR" sz="1400" dirty="0">
                 <a:latin typeface="D2Coding" panose="020B0609020101020101" pitchFamily="49" charset="-127"/>
                 <a:ea typeface="D2Coding" panose="020B0609020101020101" pitchFamily="49" charset="-127"/>
               </a:rPr>
               <a:t># </a:t>
             </a:r>
             <a:r>
-              <a:rPr lang="en-US" altLang="ko-KR" sz="1600" dirty="0" err="1">
+              <a:rPr lang="en-US" altLang="ko-KR" sz="1400" dirty="0" err="1">
                 <a:latin typeface="D2Coding" panose="020B0609020101020101" pitchFamily="49" charset="-127"/>
                 <a:ea typeface="D2Coding" panose="020B0609020101020101" pitchFamily="49" charset="-127"/>
               </a:rPr>
               <a:t>Keras</a:t>
             </a:r>
             <a:r>
-              <a:rPr lang="en-US" altLang="ko-KR" sz="1600" dirty="0">
+              <a:rPr lang="en-US" altLang="ko-KR" sz="1400" dirty="0">
                 <a:latin typeface="D2Coding" panose="020B0609020101020101" pitchFamily="49" charset="-127"/>
                 <a:ea typeface="D2Coding" panose="020B0609020101020101" pitchFamily="49" charset="-127"/>
               </a:rPr>
               <a:t> RNN </a:t>
             </a:r>
             <a:r>
-              <a:rPr lang="ko-KR" altLang="en-US" sz="1600" dirty="0">
+              <a:rPr lang="ko-KR" altLang="en-US" sz="1400" dirty="0">
                 <a:latin typeface="D2Coding" panose="020B0609020101020101" pitchFamily="49" charset="-127"/>
                 <a:ea typeface="D2Coding" panose="020B0609020101020101" pitchFamily="49" charset="-127"/>
               </a:rPr>
               <a:t>연산을 위해 </a:t>
             </a:r>
             <a:r>
-              <a:rPr lang="en-US" altLang="ko-KR" sz="1600" dirty="0">
+              <a:rPr lang="en-US" altLang="ko-KR" sz="1400" dirty="0">
                 <a:latin typeface="D2Coding" panose="020B0609020101020101" pitchFamily="49" charset="-127"/>
                 <a:ea typeface="D2Coding" panose="020B0609020101020101" pitchFamily="49" charset="-127"/>
               </a:rPr>
               <a:t>[</a:t>
             </a:r>
             <a:r>
-              <a:rPr lang="ko-KR" altLang="en-US" sz="1600" dirty="0">
+              <a:rPr lang="ko-KR" altLang="en-US" sz="1400" dirty="0">
                 <a:latin typeface="D2Coding" panose="020B0609020101020101" pitchFamily="49" charset="-127"/>
                 <a:ea typeface="D2Coding" panose="020B0609020101020101" pitchFamily="49" charset="-127"/>
               </a:rPr>
               <a:t>배치 크기</a:t>
             </a:r>
             <a:r>
-              <a:rPr lang="en-US" altLang="ko-KR" sz="1600" dirty="0">
+              <a:rPr lang="en-US" altLang="ko-KR" sz="1400" dirty="0">
                 <a:latin typeface="D2Coding" panose="020B0609020101020101" pitchFamily="49" charset="-127"/>
                 <a:ea typeface="D2Coding" panose="020B0609020101020101" pitchFamily="49" charset="-127"/>
               </a:rPr>
               <a:t>, </a:t>
             </a:r>
             <a:r>
-              <a:rPr lang="ko-KR" altLang="en-US" sz="1600" dirty="0">
+              <a:rPr lang="ko-KR" altLang="en-US" sz="1400" dirty="0">
                 <a:latin typeface="D2Coding" panose="020B0609020101020101" pitchFamily="49" charset="-127"/>
                 <a:ea typeface="D2Coding" panose="020B0609020101020101" pitchFamily="49" charset="-127"/>
               </a:rPr>
               <a:t>타임스텝</a:t>
             </a:r>
             <a:r>
-              <a:rPr lang="en-US" altLang="ko-KR" sz="1600" dirty="0">
+              <a:rPr lang="en-US" altLang="ko-KR" sz="1400" dirty="0">
                 <a:latin typeface="D2Coding" panose="020B0609020101020101" pitchFamily="49" charset="-127"/>
                 <a:ea typeface="D2Coding" panose="020B0609020101020101" pitchFamily="49" charset="-127"/>
               </a:rPr>
               <a:t>, </a:t>
             </a:r>
             <a:r>
-              <a:rPr lang="ko-KR" altLang="en-US" sz="1600" dirty="0">
+              <a:rPr lang="ko-KR" altLang="en-US" sz="1400" dirty="0">
                 <a:latin typeface="D2Coding" panose="020B0609020101020101" pitchFamily="49" charset="-127"/>
                 <a:ea typeface="D2Coding" panose="020B0609020101020101" pitchFamily="49" charset="-127"/>
               </a:rPr>
               <a:t>특징 차원</a:t>
             </a:r>
             <a:r>
-              <a:rPr lang="en-US" altLang="ko-KR" sz="1600" dirty="0">
+              <a:rPr lang="en-US" altLang="ko-KR" sz="1400" dirty="0">
                 <a:latin typeface="D2Coding" panose="020B0609020101020101" pitchFamily="49" charset="-127"/>
                 <a:ea typeface="D2Coding" panose="020B0609020101020101" pitchFamily="49" charset="-127"/>
               </a:rPr>
               <a:t>] -&gt; [1, 4, 4] </a:t>
             </a:r>
             <a:r>
-              <a:rPr lang="ko-KR" altLang="en-US" sz="1600" dirty="0">
+              <a:rPr lang="ko-KR" altLang="en-US" sz="1400" dirty="0">
                 <a:latin typeface="D2Coding" panose="020B0609020101020101" pitchFamily="49" charset="-127"/>
                 <a:ea typeface="D2Coding" panose="020B0609020101020101" pitchFamily="49" charset="-127"/>
               </a:rPr>
@@ -29719,172 +32858,172 @@
           </a:p>
           <a:p>
             <a:r>
-              <a:rPr lang="en-US" altLang="ko-KR" sz="1600" dirty="0">
+              <a:rPr lang="en-US" altLang="ko-KR" sz="1400" dirty="0">
                 <a:latin typeface="D2Coding" panose="020B0609020101020101" pitchFamily="49" charset="-127"/>
                 <a:ea typeface="D2Coding" panose="020B0609020101020101" pitchFamily="49" charset="-127"/>
               </a:rPr>
               <a:t># (</a:t>
             </a:r>
             <a:r>
-              <a:rPr lang="ko-KR" altLang="en-US" sz="1600" dirty="0">
+              <a:rPr lang="ko-KR" altLang="en-US" sz="1400" dirty="0">
                 <a:latin typeface="D2Coding" panose="020B0609020101020101" pitchFamily="49" charset="-127"/>
                 <a:ea typeface="D2Coding" panose="020B0609020101020101" pitchFamily="49" charset="-127"/>
               </a:rPr>
               <a:t>실제 환경에서는 </a:t>
             </a:r>
             <a:r>
-              <a:rPr lang="en-US" altLang="ko-KR" sz="1600" dirty="0" err="1">
+              <a:rPr lang="en-US" altLang="ko-KR" sz="1400" dirty="0" err="1">
                 <a:latin typeface="D2Coding" panose="020B0609020101020101" pitchFamily="49" charset="-127"/>
                 <a:ea typeface="D2Coding" panose="020B0609020101020101" pitchFamily="49" charset="-127"/>
               </a:rPr>
               <a:t>Gensim</a:t>
             </a:r>
             <a:r>
-              <a:rPr lang="en-US" altLang="ko-KR" sz="1600" dirty="0">
+              <a:rPr lang="en-US" altLang="ko-KR" sz="1400" dirty="0">
                 <a:latin typeface="D2Coding" panose="020B0609020101020101" pitchFamily="49" charset="-127"/>
                 <a:ea typeface="D2Coding" panose="020B0609020101020101" pitchFamily="49" charset="-127"/>
               </a:rPr>
               <a:t> Word2Vec </a:t>
             </a:r>
             <a:r>
-              <a:rPr lang="ko-KR" altLang="en-US" sz="1600" dirty="0">
+              <a:rPr lang="ko-KR" altLang="en-US" sz="1400" dirty="0">
                 <a:latin typeface="D2Coding" panose="020B0609020101020101" pitchFamily="49" charset="-127"/>
                 <a:ea typeface="D2Coding" panose="020B0609020101020101" pitchFamily="49" charset="-127"/>
               </a:rPr>
               <a:t>결과값이 들어가는 자리</a:t>
             </a:r>
             <a:r>
-              <a:rPr lang="en-US" altLang="ko-KR" sz="1600" dirty="0">
+              <a:rPr lang="en-US" altLang="ko-KR" sz="1400" dirty="0">
                 <a:latin typeface="D2Coding" panose="020B0609020101020101" pitchFamily="49" charset="-127"/>
                 <a:ea typeface="D2Coding" panose="020B0609020101020101" pitchFamily="49" charset="-127"/>
               </a:rPr>
               <a:t>)</a:t>
             </a:r>
-            <a:endParaRPr lang="ko-KR" altLang="en-US" sz="1600" dirty="0">
+            <a:endParaRPr lang="ko-KR" altLang="en-US" sz="1400" dirty="0">
               <a:latin typeface="D2Coding" panose="020B0609020101020101" pitchFamily="49" charset="-127"/>
               <a:ea typeface="D2Coding" panose="020B0609020101020101" pitchFamily="49" charset="-127"/>
             </a:endParaRPr>
           </a:p>
           <a:p>
             <a:r>
-              <a:rPr lang="en-US" altLang="ko-KR" sz="1600" dirty="0" err="1">
+              <a:rPr lang="en-US" altLang="ko-KR" sz="1400" dirty="0" err="1">
                 <a:latin typeface="D2Coding" panose="020B0609020101020101" pitchFamily="49" charset="-127"/>
                 <a:ea typeface="D2Coding" panose="020B0609020101020101" pitchFamily="49" charset="-127"/>
               </a:rPr>
               <a:t>X_dummy</a:t>
             </a:r>
             <a:r>
-              <a:rPr lang="en-US" altLang="ko-KR" sz="1600" dirty="0">
+              <a:rPr lang="en-US" altLang="ko-KR" sz="1400" dirty="0">
                 <a:latin typeface="D2Coding" panose="020B0609020101020101" pitchFamily="49" charset="-127"/>
                 <a:ea typeface="D2Coding" panose="020B0609020101020101" pitchFamily="49" charset="-127"/>
               </a:rPr>
               <a:t> = </a:t>
             </a:r>
             <a:r>
-              <a:rPr lang="en-US" altLang="ko-KR" sz="1600" dirty="0" err="1">
+              <a:rPr lang="en-US" altLang="ko-KR" sz="1400" dirty="0" err="1">
                 <a:latin typeface="D2Coding" panose="020B0609020101020101" pitchFamily="49" charset="-127"/>
                 <a:ea typeface="D2Coding" panose="020B0609020101020101" pitchFamily="49" charset="-127"/>
               </a:rPr>
               <a:t>np.random.rand</a:t>
             </a:r>
             <a:r>
-              <a:rPr lang="en-US" altLang="ko-KR" sz="1600" dirty="0">
+              <a:rPr lang="en-US" altLang="ko-KR" sz="1400" dirty="0">
                 <a:latin typeface="D2Coding" panose="020B0609020101020101" pitchFamily="49" charset="-127"/>
                 <a:ea typeface="D2Coding" panose="020B0609020101020101" pitchFamily="49" charset="-127"/>
               </a:rPr>
               <a:t>(1,</a:t>
             </a:r>
             <a:r>
-              <a:rPr lang="ko-KR" altLang="en-US" sz="1600" dirty="0">
+              <a:rPr lang="ko-KR" altLang="en-US" sz="1400" dirty="0">
                 <a:latin typeface="D2Coding" panose="020B0609020101020101" pitchFamily="49" charset="-127"/>
                 <a:ea typeface="D2Coding" panose="020B0609020101020101" pitchFamily="49" charset="-127"/>
               </a:rPr>
               <a:t> </a:t>
             </a:r>
             <a:r>
-              <a:rPr lang="en-US" altLang="ko-KR" sz="1600" dirty="0">
+              <a:rPr lang="en-US" altLang="ko-KR" sz="1400" dirty="0">
                 <a:latin typeface="D2Coding" panose="020B0609020101020101" pitchFamily="49" charset="-127"/>
                 <a:ea typeface="D2Coding" panose="020B0609020101020101" pitchFamily="49" charset="-127"/>
               </a:rPr>
               <a:t>timesteps,</a:t>
             </a:r>
             <a:r>
-              <a:rPr lang="ko-KR" altLang="en-US" sz="1600" dirty="0">
+              <a:rPr lang="ko-KR" altLang="en-US" sz="1400" dirty="0">
                 <a:latin typeface="D2Coding" panose="020B0609020101020101" pitchFamily="49" charset="-127"/>
                 <a:ea typeface="D2Coding" panose="020B0609020101020101" pitchFamily="49" charset="-127"/>
               </a:rPr>
               <a:t> </a:t>
             </a:r>
             <a:r>
-              <a:rPr lang="en-US" altLang="ko-KR" sz="1600" dirty="0" err="1">
+              <a:rPr lang="en-US" altLang="ko-KR" sz="1400" dirty="0" err="1">
                 <a:latin typeface="D2Coding" panose="020B0609020101020101" pitchFamily="49" charset="-127"/>
                 <a:ea typeface="D2Coding" panose="020B0609020101020101" pitchFamily="49" charset="-127"/>
               </a:rPr>
               <a:t>input_size</a:t>
             </a:r>
             <a:r>
-              <a:rPr lang="en-US" altLang="ko-KR" sz="1600" dirty="0">
+              <a:rPr lang="en-US" altLang="ko-KR" sz="1400" dirty="0">
                 <a:latin typeface="D2Coding" panose="020B0609020101020101" pitchFamily="49" charset="-127"/>
                 <a:ea typeface="D2Coding" panose="020B0609020101020101" pitchFamily="49" charset="-127"/>
               </a:rPr>
               <a:t>).</a:t>
             </a:r>
             <a:r>
-              <a:rPr lang="en-US" altLang="ko-KR" sz="1600" dirty="0" err="1">
+              <a:rPr lang="en-US" altLang="ko-KR" sz="1400" dirty="0" err="1">
                 <a:latin typeface="D2Coding" panose="020B0609020101020101" pitchFamily="49" charset="-127"/>
                 <a:ea typeface="D2Coding" panose="020B0609020101020101" pitchFamily="49" charset="-127"/>
               </a:rPr>
               <a:t>astype</a:t>
             </a:r>
             <a:r>
-              <a:rPr lang="en-US" altLang="ko-KR" sz="1600" dirty="0">
+              <a:rPr lang="en-US" altLang="ko-KR" sz="1400" dirty="0">
                 <a:latin typeface="D2Coding" panose="020B0609020101020101" pitchFamily="49" charset="-127"/>
                 <a:ea typeface="D2Coding" panose="020B0609020101020101" pitchFamily="49" charset="-127"/>
               </a:rPr>
               <a:t>(np.float32)</a:t>
             </a:r>
-            <a:endParaRPr lang="ko-KR" altLang="en-US" sz="1600" dirty="0">
+            <a:endParaRPr lang="ko-KR" altLang="en-US" sz="1400" dirty="0">
               <a:latin typeface="D2Coding" panose="020B0609020101020101" pitchFamily="49" charset="-127"/>
               <a:ea typeface="D2Coding" panose="020B0609020101020101" pitchFamily="49" charset="-127"/>
             </a:endParaRPr>
           </a:p>
           <a:p>
-            <a:endParaRPr lang="ko-KR" altLang="en-US" sz="1600" dirty="0">
+            <a:endParaRPr lang="ko-KR" altLang="en-US" sz="1400" dirty="0">
               <a:latin typeface="D2Coding" panose="020B0609020101020101" pitchFamily="49" charset="-127"/>
               <a:ea typeface="D2Coding" panose="020B0609020101020101" pitchFamily="49" charset="-127"/>
             </a:endParaRPr>
           </a:p>
           <a:p>
             <a:r>
-              <a:rPr lang="en-US" altLang="ko-KR" sz="1600" dirty="0">
+              <a:rPr lang="en-US" altLang="ko-KR" sz="1400" dirty="0">
                 <a:latin typeface="D2Coding" panose="020B0609020101020101" pitchFamily="49" charset="-127"/>
                 <a:ea typeface="D2Coding" panose="020B0609020101020101" pitchFamily="49" charset="-127"/>
               </a:rPr>
               <a:t># 2. </a:t>
             </a:r>
             <a:r>
-              <a:rPr lang="ko-KR" altLang="en-US" sz="1600" dirty="0">
+              <a:rPr lang="ko-KR" altLang="en-US" sz="1400" dirty="0">
                 <a:latin typeface="D2Coding" panose="020B0609020101020101" pitchFamily="49" charset="-127"/>
                 <a:ea typeface="D2Coding" panose="020B0609020101020101" pitchFamily="49" charset="-127"/>
               </a:rPr>
               <a:t>그림 구조를 반영한 </a:t>
             </a:r>
             <a:r>
-              <a:rPr lang="en-US" altLang="ko-KR" sz="1600" dirty="0" err="1">
+              <a:rPr lang="en-US" altLang="ko-KR" sz="1400" dirty="0" err="1">
                 <a:latin typeface="D2Coding" panose="020B0609020101020101" pitchFamily="49" charset="-127"/>
                 <a:ea typeface="D2Coding" panose="020B0609020101020101" pitchFamily="49" charset="-127"/>
               </a:rPr>
               <a:t>Keras</a:t>
             </a:r>
             <a:r>
-              <a:rPr lang="en-US" altLang="ko-KR" sz="1600" dirty="0">
+              <a:rPr lang="en-US" altLang="ko-KR" sz="1400" dirty="0">
                 <a:latin typeface="D2Coding" panose="020B0609020101020101" pitchFamily="49" charset="-127"/>
                 <a:ea typeface="D2Coding" panose="020B0609020101020101" pitchFamily="49" charset="-127"/>
               </a:rPr>
               <a:t> </a:t>
             </a:r>
             <a:r>
-              <a:rPr lang="ko-KR" altLang="en-US" sz="1600" dirty="0">
+              <a:rPr lang="ko-KR" altLang="en-US" sz="1400" dirty="0">
                 <a:latin typeface="D2Coding" panose="020B0609020101020101" pitchFamily="49" charset="-127"/>
                 <a:ea typeface="D2Coding" panose="020B0609020101020101" pitchFamily="49" charset="-127"/>
               </a:rPr>
@@ -29893,179 +33032,179 @@
           </a:p>
           <a:p>
             <a:r>
-              <a:rPr lang="en-US" altLang="ko-KR" sz="1600" dirty="0">
+              <a:rPr lang="en-US" altLang="ko-KR" sz="1400" dirty="0">
                 <a:latin typeface="D2Coding" panose="020B0609020101020101" pitchFamily="49" charset="-127"/>
                 <a:ea typeface="D2Coding" panose="020B0609020101020101" pitchFamily="49" charset="-127"/>
               </a:rPr>
               <a:t>model = </a:t>
             </a:r>
             <a:r>
-              <a:rPr lang="en-US" altLang="ko-KR" sz="1600" dirty="0" err="1">
+              <a:rPr lang="en-US" altLang="ko-KR" sz="1400" dirty="0" err="1">
                 <a:latin typeface="D2Coding" panose="020B0609020101020101" pitchFamily="49" charset="-127"/>
                 <a:ea typeface="D2Coding" panose="020B0609020101020101" pitchFamily="49" charset="-127"/>
               </a:rPr>
               <a:t>keras.models.Sequential</a:t>
             </a:r>
             <a:r>
-              <a:rPr lang="en-US" altLang="ko-KR" sz="1600" dirty="0">
+              <a:rPr lang="en-US" altLang="ko-KR" sz="1400" dirty="0">
                 <a:latin typeface="D2Coding" panose="020B0609020101020101" pitchFamily="49" charset="-127"/>
                 <a:ea typeface="D2Coding" panose="020B0609020101020101" pitchFamily="49" charset="-127"/>
               </a:rPr>
               <a:t>([</a:t>
             </a:r>
-            <a:endParaRPr lang="ko-KR" altLang="en-US" sz="1600" dirty="0">
+            <a:endParaRPr lang="ko-KR" altLang="en-US" sz="1400" dirty="0">
               <a:latin typeface="D2Coding" panose="020B0609020101020101" pitchFamily="49" charset="-127"/>
               <a:ea typeface="D2Coding" panose="020B0609020101020101" pitchFamily="49" charset="-127"/>
             </a:endParaRPr>
           </a:p>
           <a:p>
             <a:r>
-              <a:rPr lang="ko-KR" altLang="en-US" sz="1600" dirty="0">
+              <a:rPr lang="ko-KR" altLang="en-US" sz="1400" dirty="0">
                 <a:latin typeface="D2Coding" panose="020B0609020101020101" pitchFamily="49" charset="-127"/>
                 <a:ea typeface="D2Coding" panose="020B0609020101020101" pitchFamily="49" charset="-127"/>
               </a:rPr>
               <a:t>    </a:t>
             </a:r>
             <a:r>
-              <a:rPr lang="en-US" altLang="ko-KR" sz="1600" dirty="0" err="1">
+              <a:rPr lang="en-US" altLang="ko-KR" sz="1400" dirty="0" err="1">
                 <a:latin typeface="D2Coding" panose="020B0609020101020101" pitchFamily="49" charset="-127"/>
                 <a:ea typeface="D2Coding" panose="020B0609020101020101" pitchFamily="49" charset="-127"/>
               </a:rPr>
               <a:t>keras.layers.SimpleRNN</a:t>
             </a:r>
             <a:r>
-              <a:rPr lang="en-US" altLang="ko-KR" sz="1600" dirty="0">
+              <a:rPr lang="en-US" altLang="ko-KR" sz="1400" dirty="0">
                 <a:latin typeface="D2Coding" panose="020B0609020101020101" pitchFamily="49" charset="-127"/>
                 <a:ea typeface="D2Coding" panose="020B0609020101020101" pitchFamily="49" charset="-127"/>
               </a:rPr>
               <a:t>(</a:t>
             </a:r>
-            <a:endParaRPr lang="ko-KR" altLang="en-US" sz="1600" dirty="0">
+            <a:endParaRPr lang="ko-KR" altLang="en-US" sz="1400" dirty="0">
               <a:latin typeface="D2Coding" panose="020B0609020101020101" pitchFamily="49" charset="-127"/>
               <a:ea typeface="D2Coding" panose="020B0609020101020101" pitchFamily="49" charset="-127"/>
             </a:endParaRPr>
           </a:p>
           <a:p>
             <a:r>
-              <a:rPr lang="ko-KR" altLang="en-US" sz="1600" dirty="0">
+              <a:rPr lang="ko-KR" altLang="en-US" sz="1400" dirty="0">
                 <a:latin typeface="D2Coding" panose="020B0609020101020101" pitchFamily="49" charset="-127"/>
                 <a:ea typeface="D2Coding" panose="020B0609020101020101" pitchFamily="49" charset="-127"/>
               </a:rPr>
               <a:t>        </a:t>
             </a:r>
             <a:r>
-              <a:rPr lang="en-US" altLang="ko-KR" sz="1600" dirty="0">
+              <a:rPr lang="en-US" altLang="ko-KR" sz="1400" dirty="0">
                 <a:latin typeface="D2Coding" panose="020B0609020101020101" pitchFamily="49" charset="-127"/>
                 <a:ea typeface="D2Coding" panose="020B0609020101020101" pitchFamily="49" charset="-127"/>
               </a:rPr>
               <a:t>units=2,</a:t>
             </a:r>
             <a:r>
-              <a:rPr lang="ko-KR" altLang="en-US" sz="1600" dirty="0">
+              <a:rPr lang="ko-KR" altLang="en-US" sz="1400" dirty="0">
                 <a:latin typeface="D2Coding" panose="020B0609020101020101" pitchFamily="49" charset="-127"/>
                 <a:ea typeface="D2Coding" panose="020B0609020101020101" pitchFamily="49" charset="-127"/>
               </a:rPr>
               <a:t>              </a:t>
             </a:r>
             <a:r>
-              <a:rPr lang="en-US" altLang="ko-KR" sz="1600" dirty="0">
+              <a:rPr lang="en-US" altLang="ko-KR" sz="1400" dirty="0">
                 <a:latin typeface="D2Coding" panose="020B0609020101020101" pitchFamily="49" charset="-127"/>
                 <a:ea typeface="D2Coding" panose="020B0609020101020101" pitchFamily="49" charset="-127"/>
               </a:rPr>
               <a:t># [</a:t>
             </a:r>
             <a:r>
-              <a:rPr lang="ko-KR" altLang="en-US" sz="1600" dirty="0" err="1">
+              <a:rPr lang="ko-KR" altLang="en-US" sz="1400" dirty="0" err="1">
                 <a:latin typeface="D2Coding" panose="020B0609020101020101" pitchFamily="49" charset="-127"/>
                 <a:ea typeface="D2Coding" panose="020B0609020101020101" pitchFamily="49" charset="-127"/>
               </a:rPr>
               <a:t>은닉층</a:t>
             </a:r>
             <a:r>
-              <a:rPr lang="en-US" altLang="ko-KR" sz="1600" dirty="0">
+              <a:rPr lang="en-US" altLang="ko-KR" sz="1400" dirty="0">
                 <a:latin typeface="D2Coding" panose="020B0609020101020101" pitchFamily="49" charset="-127"/>
                 <a:ea typeface="D2Coding" panose="020B0609020101020101" pitchFamily="49" charset="-127"/>
               </a:rPr>
               <a:t>] </a:t>
             </a:r>
             <a:r>
-              <a:rPr lang="ko-KR" altLang="en-US" sz="1600" dirty="0">
+              <a:rPr lang="ko-KR" altLang="en-US" sz="1400" dirty="0">
                 <a:latin typeface="D2Coding" panose="020B0609020101020101" pitchFamily="49" charset="-127"/>
                 <a:ea typeface="D2Coding" panose="020B0609020101020101" pitchFamily="49" charset="-127"/>
               </a:rPr>
               <a:t>노드가 </a:t>
             </a:r>
             <a:r>
-              <a:rPr lang="en-US" altLang="ko-KR" sz="1600" dirty="0">
+              <a:rPr lang="en-US" altLang="ko-KR" sz="1400" dirty="0">
                 <a:latin typeface="D2Coding" panose="020B0609020101020101" pitchFamily="49" charset="-127"/>
                 <a:ea typeface="D2Coding" panose="020B0609020101020101" pitchFamily="49" charset="-127"/>
               </a:rPr>
               <a:t>2</a:t>
             </a:r>
             <a:r>
-              <a:rPr lang="ko-KR" altLang="en-US" sz="1600" dirty="0">
+              <a:rPr lang="ko-KR" altLang="en-US" sz="1400" dirty="0">
                 <a:latin typeface="D2Coding" panose="020B0609020101020101" pitchFamily="49" charset="-127"/>
                 <a:ea typeface="D2Coding" panose="020B0609020101020101" pitchFamily="49" charset="-127"/>
               </a:rPr>
               <a:t>개 은닉 상태 크기 </a:t>
             </a:r>
             <a:r>
-              <a:rPr lang="en-US" altLang="ko-KR" sz="1600" dirty="0">
+              <a:rPr lang="en-US" altLang="ko-KR" sz="1400" dirty="0">
                 <a:latin typeface="D2Coding" panose="020B0609020101020101" pitchFamily="49" charset="-127"/>
                 <a:ea typeface="D2Coding" panose="020B0609020101020101" pitchFamily="49" charset="-127"/>
               </a:rPr>
               <a:t>2 (</a:t>
             </a:r>
             <a:r>
-              <a:rPr lang="en-US" altLang="ko-KR" sz="1600" dirty="0" err="1">
+              <a:rPr lang="en-US" altLang="ko-KR" sz="1400" dirty="0" err="1">
                 <a:latin typeface="D2Coding" panose="020B0609020101020101" pitchFamily="49" charset="-127"/>
                 <a:ea typeface="D2Coding" panose="020B0609020101020101" pitchFamily="49" charset="-127"/>
               </a:rPr>
               <a:t>hidden_size</a:t>
             </a:r>
             <a:r>
-              <a:rPr lang="en-US" altLang="ko-KR" sz="1600" dirty="0">
+              <a:rPr lang="en-US" altLang="ko-KR" sz="1400" dirty="0">
                 <a:latin typeface="D2Coding" panose="020B0609020101020101" pitchFamily="49" charset="-127"/>
                 <a:ea typeface="D2Coding" panose="020B0609020101020101" pitchFamily="49" charset="-127"/>
               </a:rPr>
               <a:t>=2)</a:t>
             </a:r>
             <a:r>
-              <a:rPr lang="ko-KR" altLang="en-US" sz="1600" dirty="0">
+              <a:rPr lang="ko-KR" altLang="en-US" sz="1400" dirty="0">
                 <a:latin typeface="D2Coding" panose="020B0609020101020101" pitchFamily="49" charset="-127"/>
                 <a:ea typeface="D2Coding" panose="020B0609020101020101" pitchFamily="49" charset="-127"/>
               </a:rPr>
               <a:t>인 </a:t>
             </a:r>
             <a:r>
-              <a:rPr lang="en-US" altLang="ko-KR" sz="1600" dirty="0" err="1">
+              <a:rPr lang="en-US" altLang="ko-KR" sz="1400" dirty="0" err="1">
                 <a:latin typeface="D2Coding" panose="020B0609020101020101" pitchFamily="49" charset="-127"/>
                 <a:ea typeface="D2Coding" panose="020B0609020101020101" pitchFamily="49" charset="-127"/>
               </a:rPr>
               <a:t>SimpleRNN</a:t>
             </a:r>
-            <a:endParaRPr lang="ko-KR" altLang="en-US" sz="1600" dirty="0">
+            <a:endParaRPr lang="ko-KR" altLang="en-US" sz="1400" dirty="0">
               <a:latin typeface="D2Coding" panose="020B0609020101020101" pitchFamily="49" charset="-127"/>
               <a:ea typeface="D2Coding" panose="020B0609020101020101" pitchFamily="49" charset="-127"/>
             </a:endParaRPr>
           </a:p>
           <a:p>
             <a:r>
-              <a:rPr lang="ko-KR" altLang="en-US" sz="1600" dirty="0">
+              <a:rPr lang="ko-KR" altLang="en-US" sz="1400" dirty="0">
                 <a:latin typeface="D2Coding" panose="020B0609020101020101" pitchFamily="49" charset="-127"/>
                 <a:ea typeface="D2Coding" panose="020B0609020101020101" pitchFamily="49" charset="-127"/>
               </a:rPr>
               <a:t>        </a:t>
             </a:r>
             <a:r>
-              <a:rPr lang="en-US" altLang="ko-KR" sz="1600" dirty="0">
+              <a:rPr lang="en-US" altLang="ko-KR" sz="1400" dirty="0">
                 <a:latin typeface="D2Coding" panose="020B0609020101020101" pitchFamily="49" charset="-127"/>
                 <a:ea typeface="D2Coding" panose="020B0609020101020101" pitchFamily="49" charset="-127"/>
               </a:rPr>
               <a:t>activation='tanh',</a:t>
             </a:r>
             <a:r>
-              <a:rPr lang="ko-KR" altLang="en-US" sz="1600" dirty="0">
+              <a:rPr lang="ko-KR" altLang="en-US" sz="1400" dirty="0">
                 <a:latin typeface="D2Coding" panose="020B0609020101020101" pitchFamily="49" charset="-127"/>
                 <a:ea typeface="D2Coding" panose="020B0609020101020101" pitchFamily="49" charset="-127"/>
               </a:rPr>
@@ -30074,77 +33213,77 @@
           </a:p>
           <a:p>
             <a:r>
-              <a:rPr lang="ko-KR" altLang="en-US" sz="1600" dirty="0">
+              <a:rPr lang="ko-KR" altLang="en-US" sz="1400" dirty="0">
                 <a:latin typeface="D2Coding" panose="020B0609020101020101" pitchFamily="49" charset="-127"/>
                 <a:ea typeface="D2Coding" panose="020B0609020101020101" pitchFamily="49" charset="-127"/>
               </a:rPr>
               <a:t>        </a:t>
             </a:r>
             <a:r>
-              <a:rPr lang="en-US" altLang="ko-KR" sz="1600" dirty="0" err="1">
+              <a:rPr lang="en-US" altLang="ko-KR" sz="1400" dirty="0" err="1">
                 <a:latin typeface="D2Coding" panose="020B0609020101020101" pitchFamily="49" charset="-127"/>
                 <a:ea typeface="D2Coding" panose="020B0609020101020101" pitchFamily="49" charset="-127"/>
               </a:rPr>
               <a:t>return_sequences</a:t>
             </a:r>
             <a:r>
-              <a:rPr lang="en-US" altLang="ko-KR" sz="1600" dirty="0">
+              <a:rPr lang="en-US" altLang="ko-KR" sz="1400" dirty="0">
                 <a:latin typeface="D2Coding" panose="020B0609020101020101" pitchFamily="49" charset="-127"/>
                 <a:ea typeface="D2Coding" panose="020B0609020101020101" pitchFamily="49" charset="-127"/>
               </a:rPr>
               <a:t>=True,</a:t>
             </a:r>
             <a:r>
-              <a:rPr lang="ko-KR" altLang="en-US" sz="1600" dirty="0">
+              <a:rPr lang="ko-KR" altLang="en-US" sz="1400" dirty="0">
                 <a:latin typeface="D2Coding" panose="020B0609020101020101" pitchFamily="49" charset="-127"/>
                 <a:ea typeface="D2Coding" panose="020B0609020101020101" pitchFamily="49" charset="-127"/>
               </a:rPr>
               <a:t> </a:t>
             </a:r>
             <a:r>
-              <a:rPr lang="en-US" altLang="ko-KR" sz="1600" dirty="0">
+              <a:rPr lang="en-US" altLang="ko-KR" sz="1400" dirty="0">
                 <a:latin typeface="D2Coding" panose="020B0609020101020101" pitchFamily="49" charset="-127"/>
                 <a:ea typeface="D2Coding" panose="020B0609020101020101" pitchFamily="49" charset="-127"/>
               </a:rPr>
               <a:t># time step</a:t>
             </a:r>
             <a:r>
-              <a:rPr lang="ko-KR" altLang="en-US" sz="1600" dirty="0">
+              <a:rPr lang="ko-KR" altLang="en-US" sz="1400" dirty="0">
                 <a:latin typeface="D2Coding" panose="020B0609020101020101" pitchFamily="49" charset="-127"/>
                 <a:ea typeface="D2Coding" panose="020B0609020101020101" pitchFamily="49" charset="-127"/>
               </a:rPr>
               <a:t>마다 출력이 위로 </a:t>
             </a:r>
             <a:r>
-              <a:rPr lang="ko-KR" altLang="en-US" sz="1600" dirty="0" err="1">
+              <a:rPr lang="ko-KR" altLang="en-US" sz="1400" dirty="0" err="1">
                 <a:latin typeface="D2Coding" panose="020B0609020101020101" pitchFamily="49" charset="-127"/>
                 <a:ea typeface="D2Coding" panose="020B0609020101020101" pitchFamily="49" charset="-127"/>
               </a:rPr>
               <a:t>뻗어나가므로</a:t>
             </a:r>
             <a:r>
-              <a:rPr lang="ko-KR" altLang="en-US" sz="1600" dirty="0">
+              <a:rPr lang="ko-KR" altLang="en-US" sz="1400" dirty="0">
                 <a:latin typeface="D2Coding" panose="020B0609020101020101" pitchFamily="49" charset="-127"/>
                 <a:ea typeface="D2Coding" panose="020B0609020101020101" pitchFamily="49" charset="-127"/>
               </a:rPr>
               <a:t> </a:t>
             </a:r>
             <a:r>
-              <a:rPr lang="en-US" altLang="ko-KR" sz="1600" dirty="0" err="1">
+              <a:rPr lang="en-US" altLang="ko-KR" sz="1400" dirty="0" err="1">
                 <a:latin typeface="D2Coding" panose="020B0609020101020101" pitchFamily="49" charset="-127"/>
                 <a:ea typeface="D2Coding" panose="020B0609020101020101" pitchFamily="49" charset="-127"/>
               </a:rPr>
               <a:t>return_sequences</a:t>
             </a:r>
             <a:r>
-              <a:rPr lang="en-US" altLang="ko-KR" sz="1600" dirty="0">
+              <a:rPr lang="en-US" altLang="ko-KR" sz="1400" dirty="0">
                 <a:latin typeface="D2Coding" panose="020B0609020101020101" pitchFamily="49" charset="-127"/>
                 <a:ea typeface="D2Coding" panose="020B0609020101020101" pitchFamily="49" charset="-127"/>
               </a:rPr>
               <a:t>=True </a:t>
             </a:r>
             <a:r>
-              <a:rPr lang="ko-KR" altLang="en-US" sz="1600" dirty="0">
+              <a:rPr lang="ko-KR" altLang="en-US" sz="1400" dirty="0">
                 <a:latin typeface="D2Coding" panose="020B0609020101020101" pitchFamily="49" charset="-127"/>
                 <a:ea typeface="D2Coding" panose="020B0609020101020101" pitchFamily="49" charset="-127"/>
               </a:rPr>
@@ -30153,207 +33292,207 @@
           </a:p>
           <a:p>
             <a:r>
-              <a:rPr lang="ko-KR" altLang="en-US" sz="1600" dirty="0">
+              <a:rPr lang="ko-KR" altLang="en-US" sz="1400" dirty="0">
                 <a:latin typeface="D2Coding" panose="020B0609020101020101" pitchFamily="49" charset="-127"/>
                 <a:ea typeface="D2Coding" panose="020B0609020101020101" pitchFamily="49" charset="-127"/>
               </a:rPr>
               <a:t>        </a:t>
             </a:r>
             <a:r>
-              <a:rPr lang="en-US" altLang="ko-KR" sz="1600" dirty="0" err="1">
+              <a:rPr lang="en-US" altLang="ko-KR" sz="1400" dirty="0" err="1">
                 <a:latin typeface="D2Coding" panose="020B0609020101020101" pitchFamily="49" charset="-127"/>
                 <a:ea typeface="D2Coding" panose="020B0609020101020101" pitchFamily="49" charset="-127"/>
               </a:rPr>
               <a:t>input_shape</a:t>
             </a:r>
             <a:r>
-              <a:rPr lang="en-US" altLang="ko-KR" sz="1600" dirty="0">
+              <a:rPr lang="en-US" altLang="ko-KR" sz="1400" dirty="0">
                 <a:latin typeface="D2Coding" panose="020B0609020101020101" pitchFamily="49" charset="-127"/>
                 <a:ea typeface="D2Coding" panose="020B0609020101020101" pitchFamily="49" charset="-127"/>
               </a:rPr>
               <a:t>=[timesteps,</a:t>
             </a:r>
             <a:r>
-              <a:rPr lang="ko-KR" altLang="en-US" sz="1600" dirty="0">
+              <a:rPr lang="ko-KR" altLang="en-US" sz="1400" dirty="0">
                 <a:latin typeface="D2Coding" panose="020B0609020101020101" pitchFamily="49" charset="-127"/>
                 <a:ea typeface="D2Coding" panose="020B0609020101020101" pitchFamily="49" charset="-127"/>
               </a:rPr>
               <a:t> </a:t>
             </a:r>
             <a:r>
-              <a:rPr lang="en-US" altLang="ko-KR" sz="1600" dirty="0" err="1">
+              <a:rPr lang="en-US" altLang="ko-KR" sz="1400" dirty="0" err="1">
                 <a:latin typeface="D2Coding" panose="020B0609020101020101" pitchFamily="49" charset="-127"/>
                 <a:ea typeface="D2Coding" panose="020B0609020101020101" pitchFamily="49" charset="-127"/>
               </a:rPr>
               <a:t>input_size</a:t>
             </a:r>
             <a:r>
-              <a:rPr lang="en-US" altLang="ko-KR" sz="1600" dirty="0">
+              <a:rPr lang="en-US" altLang="ko-KR" sz="1400" dirty="0">
                 <a:latin typeface="D2Coding" panose="020B0609020101020101" pitchFamily="49" charset="-127"/>
                 <a:ea typeface="D2Coding" panose="020B0609020101020101" pitchFamily="49" charset="-127"/>
               </a:rPr>
               <a:t>], name="</a:t>
             </a:r>
             <a:r>
-              <a:rPr lang="en-US" altLang="ko-KR" sz="1600" dirty="0" err="1">
+              <a:rPr lang="en-US" altLang="ko-KR" sz="1400" dirty="0" err="1">
                 <a:latin typeface="D2Coding" panose="020B0609020101020101" pitchFamily="49" charset="-127"/>
                 <a:ea typeface="D2Coding" panose="020B0609020101020101" pitchFamily="49" charset="-127"/>
               </a:rPr>
               <a:t>Hidden_Layer</a:t>
             </a:r>
             <a:r>
-              <a:rPr lang="en-US" altLang="ko-KR" sz="1600" dirty="0">
+              <a:rPr lang="en-US" altLang="ko-KR" sz="1400" dirty="0">
                 <a:latin typeface="D2Coding" panose="020B0609020101020101" pitchFamily="49" charset="-127"/>
                 <a:ea typeface="D2Coding" panose="020B0609020101020101" pitchFamily="49" charset="-127"/>
               </a:rPr>
               <a:t>"</a:t>
             </a:r>
-            <a:endParaRPr lang="ko-KR" altLang="en-US" sz="1600" dirty="0">
+            <a:endParaRPr lang="ko-KR" altLang="en-US" sz="1400" dirty="0">
               <a:latin typeface="D2Coding" panose="020B0609020101020101" pitchFamily="49" charset="-127"/>
               <a:ea typeface="D2Coding" panose="020B0609020101020101" pitchFamily="49" charset="-127"/>
             </a:endParaRPr>
           </a:p>
           <a:p>
             <a:r>
-              <a:rPr lang="ko-KR" altLang="en-US" sz="1600" dirty="0">
+              <a:rPr lang="ko-KR" altLang="en-US" sz="1400" dirty="0">
                 <a:latin typeface="D2Coding" panose="020B0609020101020101" pitchFamily="49" charset="-127"/>
                 <a:ea typeface="D2Coding" panose="020B0609020101020101" pitchFamily="49" charset="-127"/>
               </a:rPr>
               <a:t>    </a:t>
             </a:r>
             <a:r>
-              <a:rPr lang="en-US" altLang="ko-KR" sz="1600" dirty="0">
+              <a:rPr lang="en-US" altLang="ko-KR" sz="1400" dirty="0">
                 <a:latin typeface="D2Coding" panose="020B0609020101020101" pitchFamily="49" charset="-127"/>
                 <a:ea typeface="D2Coding" panose="020B0609020101020101" pitchFamily="49" charset="-127"/>
               </a:rPr>
               <a:t>),</a:t>
             </a:r>
-            <a:endParaRPr lang="ko-KR" altLang="en-US" sz="1600" dirty="0">
+            <a:endParaRPr lang="ko-KR" altLang="en-US" sz="1400" dirty="0">
               <a:latin typeface="D2Coding" panose="020B0609020101020101" pitchFamily="49" charset="-127"/>
               <a:ea typeface="D2Coding" panose="020B0609020101020101" pitchFamily="49" charset="-127"/>
             </a:endParaRPr>
           </a:p>
           <a:p>
             <a:r>
-              <a:rPr lang="ko-KR" altLang="en-US" sz="1600" dirty="0">
+              <a:rPr lang="ko-KR" altLang="en-US" sz="1400" dirty="0">
                 <a:latin typeface="D2Coding" panose="020B0609020101020101" pitchFamily="49" charset="-127"/>
                 <a:ea typeface="D2Coding" panose="020B0609020101020101" pitchFamily="49" charset="-127"/>
               </a:rPr>
               <a:t>    </a:t>
             </a:r>
             <a:r>
-              <a:rPr lang="en-US" altLang="ko-KR" sz="1600" dirty="0" err="1">
+              <a:rPr lang="en-US" altLang="ko-KR" sz="1400" dirty="0" err="1">
                 <a:latin typeface="D2Coding" panose="020B0609020101020101" pitchFamily="49" charset="-127"/>
                 <a:ea typeface="D2Coding" panose="020B0609020101020101" pitchFamily="49" charset="-127"/>
               </a:rPr>
               <a:t>keras.layers.Dense</a:t>
             </a:r>
             <a:r>
-              <a:rPr lang="en-US" altLang="ko-KR" sz="1600" dirty="0">
+              <a:rPr lang="en-US" altLang="ko-KR" sz="1400" dirty="0">
                 <a:latin typeface="D2Coding" panose="020B0609020101020101" pitchFamily="49" charset="-127"/>
                 <a:ea typeface="D2Coding" panose="020B0609020101020101" pitchFamily="49" charset="-127"/>
               </a:rPr>
               <a:t>( </a:t>
             </a:r>
-            <a:endParaRPr lang="ko-KR" altLang="en-US" sz="1600" dirty="0">
+            <a:endParaRPr lang="ko-KR" altLang="en-US" sz="1400" dirty="0">
               <a:latin typeface="D2Coding" panose="020B0609020101020101" pitchFamily="49" charset="-127"/>
               <a:ea typeface="D2Coding" panose="020B0609020101020101" pitchFamily="49" charset="-127"/>
             </a:endParaRPr>
           </a:p>
           <a:p>
             <a:r>
-              <a:rPr lang="ko-KR" altLang="en-US" sz="1600" dirty="0">
+              <a:rPr lang="ko-KR" altLang="en-US" sz="1400" dirty="0">
                 <a:latin typeface="D2Coding" panose="020B0609020101020101" pitchFamily="49" charset="-127"/>
                 <a:ea typeface="D2Coding" panose="020B0609020101020101" pitchFamily="49" charset="-127"/>
               </a:rPr>
               <a:t>        </a:t>
             </a:r>
             <a:r>
-              <a:rPr lang="en-US" altLang="ko-KR" sz="1600" dirty="0">
+              <a:rPr lang="en-US" altLang="ko-KR" sz="1400" dirty="0">
                 <a:latin typeface="D2Coding" panose="020B0609020101020101" pitchFamily="49" charset="-127"/>
                 <a:ea typeface="D2Coding" panose="020B0609020101020101" pitchFamily="49" charset="-127"/>
               </a:rPr>
               <a:t>units=2,</a:t>
             </a:r>
             <a:r>
-              <a:rPr lang="ko-KR" altLang="en-US" sz="1600" dirty="0">
+              <a:rPr lang="ko-KR" altLang="en-US" sz="1400" dirty="0">
                 <a:latin typeface="D2Coding" panose="020B0609020101020101" pitchFamily="49" charset="-127"/>
                 <a:ea typeface="D2Coding" panose="020B0609020101020101" pitchFamily="49" charset="-127"/>
               </a:rPr>
               <a:t> </a:t>
             </a:r>
             <a:r>
-              <a:rPr lang="en-US" altLang="ko-KR" sz="1600" dirty="0">
+              <a:rPr lang="en-US" altLang="ko-KR" sz="1400" dirty="0">
                 <a:latin typeface="D2Coding" panose="020B0609020101020101" pitchFamily="49" charset="-127"/>
                 <a:ea typeface="D2Coding" panose="020B0609020101020101" pitchFamily="49" charset="-127"/>
               </a:rPr>
               <a:t>name="</a:t>
             </a:r>
             <a:r>
-              <a:rPr lang="en-US" altLang="ko-KR" sz="1600" dirty="0" err="1">
+              <a:rPr lang="en-US" altLang="ko-KR" sz="1400" dirty="0" err="1">
                 <a:latin typeface="D2Coding" panose="020B0609020101020101" pitchFamily="49" charset="-127"/>
                 <a:ea typeface="D2Coding" panose="020B0609020101020101" pitchFamily="49" charset="-127"/>
               </a:rPr>
               <a:t>Output_Layer</a:t>
             </a:r>
             <a:r>
-              <a:rPr lang="en-US" altLang="ko-KR" sz="1600" dirty="0">
+              <a:rPr lang="en-US" altLang="ko-KR" sz="1400" dirty="0">
                 <a:latin typeface="D2Coding" panose="020B0609020101020101" pitchFamily="49" charset="-127"/>
                 <a:ea typeface="D2Coding" panose="020B0609020101020101" pitchFamily="49" charset="-127"/>
               </a:rPr>
               <a:t>“ # [</a:t>
             </a:r>
             <a:r>
-              <a:rPr lang="ko-KR" altLang="en-US" sz="1600" dirty="0" err="1">
+              <a:rPr lang="ko-KR" altLang="en-US" sz="1400" dirty="0" err="1">
                 <a:latin typeface="D2Coding" panose="020B0609020101020101" pitchFamily="49" charset="-127"/>
                 <a:ea typeface="D2Coding" panose="020B0609020101020101" pitchFamily="49" charset="-127"/>
               </a:rPr>
               <a:t>출력층</a:t>
             </a:r>
             <a:r>
-              <a:rPr lang="en-US" altLang="ko-KR" sz="1600" dirty="0">
+              <a:rPr lang="en-US" altLang="ko-KR" sz="1400" dirty="0">
                 <a:latin typeface="D2Coding" panose="020B0609020101020101" pitchFamily="49" charset="-127"/>
                 <a:ea typeface="D2Coding" panose="020B0609020101020101" pitchFamily="49" charset="-127"/>
               </a:rPr>
               <a:t>] </a:t>
             </a:r>
             <a:r>
-              <a:rPr lang="ko-KR" altLang="en-US" sz="1600" dirty="0">
+              <a:rPr lang="ko-KR" altLang="en-US" sz="1400" dirty="0">
                 <a:latin typeface="D2Coding" panose="020B0609020101020101" pitchFamily="49" charset="-127"/>
                 <a:ea typeface="D2Coding" panose="020B0609020101020101" pitchFamily="49" charset="-127"/>
               </a:rPr>
               <a:t>각 타임스텝마다 </a:t>
             </a:r>
             <a:r>
-              <a:rPr lang="en-US" altLang="ko-KR" sz="1600" dirty="0">
+              <a:rPr lang="en-US" altLang="ko-KR" sz="1400" dirty="0">
                 <a:latin typeface="D2Coding" panose="020B0609020101020101" pitchFamily="49" charset="-127"/>
                 <a:ea typeface="D2Coding" panose="020B0609020101020101" pitchFamily="49" charset="-127"/>
               </a:rPr>
               <a:t>2</a:t>
             </a:r>
             <a:r>
-              <a:rPr lang="ko-KR" altLang="en-US" sz="1600" dirty="0">
+              <a:rPr lang="ko-KR" altLang="en-US" sz="1400" dirty="0">
                 <a:latin typeface="D2Coding" panose="020B0609020101020101" pitchFamily="49" charset="-127"/>
                 <a:ea typeface="D2Coding" panose="020B0609020101020101" pitchFamily="49" charset="-127"/>
               </a:rPr>
               <a:t>차원 </a:t>
             </a:r>
             <a:r>
-              <a:rPr lang="ko-KR" altLang="en-US" sz="1600" dirty="0" err="1">
+              <a:rPr lang="ko-KR" altLang="en-US" sz="1400" dirty="0" err="1">
                 <a:latin typeface="D2Coding" panose="020B0609020101020101" pitchFamily="49" charset="-127"/>
                 <a:ea typeface="D2Coding" panose="020B0609020101020101" pitchFamily="49" charset="-127"/>
               </a:rPr>
               <a:t>출력층</a:t>
             </a:r>
             <a:r>
-              <a:rPr lang="en-US" altLang="ko-KR" sz="1600" dirty="0">
+              <a:rPr lang="en-US" altLang="ko-KR" sz="1400" dirty="0">
                 <a:latin typeface="D2Coding" panose="020B0609020101020101" pitchFamily="49" charset="-127"/>
                 <a:ea typeface="D2Coding" panose="020B0609020101020101" pitchFamily="49" charset="-127"/>
               </a:rPr>
               <a:t>(units=2)</a:t>
             </a:r>
             <a:r>
-              <a:rPr lang="ko-KR" altLang="en-US" sz="1600" dirty="0">
+              <a:rPr lang="ko-KR" altLang="en-US" sz="1400" dirty="0">
                 <a:latin typeface="D2Coding" panose="020B0609020101020101" pitchFamily="49" charset="-127"/>
                 <a:ea typeface="D2Coding" panose="020B0609020101020101" pitchFamily="49" charset="-127"/>
               </a:rPr>
@@ -30362,33 +33501,33 @@
           </a:p>
           <a:p>
             <a:r>
-              <a:rPr lang="ko-KR" altLang="en-US" sz="1600" dirty="0">
+              <a:rPr lang="ko-KR" altLang="en-US" sz="1400" dirty="0">
                 <a:latin typeface="D2Coding" panose="020B0609020101020101" pitchFamily="49" charset="-127"/>
                 <a:ea typeface="D2Coding" panose="020B0609020101020101" pitchFamily="49" charset="-127"/>
               </a:rPr>
               <a:t>    </a:t>
             </a:r>
             <a:r>
-              <a:rPr lang="en-US" altLang="ko-KR" sz="1600" dirty="0">
+              <a:rPr lang="en-US" altLang="ko-KR" sz="1400" dirty="0">
                 <a:latin typeface="D2Coding" panose="020B0609020101020101" pitchFamily="49" charset="-127"/>
                 <a:ea typeface="D2Coding" panose="020B0609020101020101" pitchFamily="49" charset="-127"/>
               </a:rPr>
               <a:t>) </a:t>
             </a:r>
-            <a:endParaRPr lang="ko-KR" altLang="en-US" sz="1600" dirty="0">
+            <a:endParaRPr lang="ko-KR" altLang="en-US" sz="1400" dirty="0">
               <a:latin typeface="D2Coding" panose="020B0609020101020101" pitchFamily="49" charset="-127"/>
               <a:ea typeface="D2Coding" panose="020B0609020101020101" pitchFamily="49" charset="-127"/>
             </a:endParaRPr>
           </a:p>
           <a:p>
             <a:r>
-              <a:rPr lang="en-US" altLang="ko-KR" sz="1600" dirty="0">
+              <a:rPr lang="en-US" altLang="ko-KR" sz="1400" dirty="0">
                 <a:latin typeface="D2Coding" panose="020B0609020101020101" pitchFamily="49" charset="-127"/>
                 <a:ea typeface="D2Coding" panose="020B0609020101020101" pitchFamily="49" charset="-127"/>
               </a:rPr>
               <a:t>])</a:t>
             </a:r>
-            <a:endParaRPr lang="ko-KR" altLang="en-US" sz="1600" dirty="0">
+            <a:endParaRPr lang="ko-KR" altLang="en-US" sz="1400" dirty="0">
               <a:latin typeface="D2Coding" panose="020B0609020101020101" pitchFamily="49" charset="-127"/>
               <a:ea typeface="D2Coding" panose="020B0609020101020101" pitchFamily="49" charset="-127"/>
             </a:endParaRPr>
@@ -30408,7 +33547,7 @@
 </p:sld>
 </file>
 
-<file path=ppt/slides/slide29.xml><?xml version="1.0" encoding="utf-8"?>
+<file path=ppt/slides/slide34.xml><?xml version="1.0" encoding="utf-8"?>
 <p:sld xmlns:a="http://schemas.openxmlformats.org/drawingml/2006/main" xmlns:r="http://schemas.openxmlformats.org/officeDocument/2006/relationships" xmlns:p="http://schemas.openxmlformats.org/presentationml/2006/main">
   <p:cSld>
     <p:spTree>
@@ -30431,41 +33570,6 @@
           <a:chExt cx="0" cy="0"/>
         </a:xfrm>
       </p:grpSpPr>
-      <p:sp>
-        <p:nvSpPr>
-          <p:cNvPr id="4" name="슬라이드 번호 개체 틀 3">
-            <a:extLst>
-              <a:ext uri="{FF2B5EF4-FFF2-40B4-BE49-F238E27FC236}">
-                <a16:creationId xmlns:a16="http://schemas.microsoft.com/office/drawing/2014/main" id="{1254C28B-4B8A-88A3-DB1F-C0B434866D62}"/>
-              </a:ext>
-            </a:extLst>
-          </p:cNvPr>
-          <p:cNvSpPr>
-            <a:spLocks noGrp="1"/>
-          </p:cNvSpPr>
-          <p:nvPr>
-            <p:ph type="sldNum" sz="quarter" idx="12"/>
-          </p:nvPr>
-        </p:nvSpPr>
-        <p:spPr>
-          <a:xfrm>
-            <a:off x="10514011" y="6036261"/>
-            <a:ext cx="753545" cy="365125"/>
-          </a:xfrm>
-        </p:spPr>
-        <p:txBody>
-          <a:bodyPr/>
-          <a:lstStyle/>
-          <a:p>
-            <a:fld id="{D57F1E4F-1CFF-5643-939E-217C01CDF565}" type="slidenum">
-              <a:rPr lang="en-US" smtClean="0"/>
-              <a:pPr/>
-              <a:t>29</a:t>
-            </a:fld>
-            <a:endParaRPr lang="en-US" dirty="0"/>
-          </a:p>
-        </p:txBody>
-      </p:sp>
       <p:sp>
         <p:nvSpPr>
           <p:cNvPr id="3" name="제목 1">
@@ -30572,13 +33676,13 @@
         <p:spPr>
           <a:xfrm>
             <a:off x="660400" y="1335673"/>
-            <a:ext cx="11125200" cy="3539430"/>
+            <a:ext cx="11125200" cy="3108543"/>
           </a:xfrm>
           <a:prstGeom prst="rect">
             <a:avLst/>
           </a:prstGeom>
           <a:solidFill>
-            <a:schemeClr val="accent6">
+            <a:schemeClr val="accent4">
               <a:lumMod val="40000"/>
               <a:lumOff val="60000"/>
             </a:schemeClr>
@@ -30591,14 +33695,14 @@
           <a:lstStyle/>
           <a:p>
             <a:r>
-              <a:rPr lang="en-US" altLang="ko-KR" sz="1600" dirty="0">
+              <a:rPr lang="en-US" altLang="ko-KR" sz="1400" dirty="0">
                 <a:latin typeface="D2Coding" panose="020B0609020101020101" pitchFamily="49" charset="-127"/>
                 <a:ea typeface="D2Coding" panose="020B0609020101020101" pitchFamily="49" charset="-127"/>
               </a:rPr>
               <a:t># 3. </a:t>
             </a:r>
             <a:r>
-              <a:rPr lang="ko-KR" altLang="en-US" sz="1600" dirty="0">
+              <a:rPr lang="ko-KR" altLang="en-US" sz="1400" dirty="0">
                 <a:latin typeface="D2Coding" panose="020B0609020101020101" pitchFamily="49" charset="-127"/>
                 <a:ea typeface="D2Coding" panose="020B0609020101020101" pitchFamily="49" charset="-127"/>
               </a:rPr>
@@ -30607,137 +33711,137 @@
           </a:p>
           <a:p>
             <a:r>
-              <a:rPr lang="en-US" altLang="ko-KR" sz="1600" dirty="0">
+              <a:rPr lang="en-US" altLang="ko-KR" sz="1400" dirty="0">
                 <a:latin typeface="D2Coding" panose="020B0609020101020101" pitchFamily="49" charset="-127"/>
                 <a:ea typeface="D2Coding" panose="020B0609020101020101" pitchFamily="49" charset="-127"/>
               </a:rPr>
               <a:t># </a:t>
             </a:r>
             <a:r>
-              <a:rPr lang="ko-KR" altLang="en-US" sz="1600" dirty="0">
+              <a:rPr lang="ko-KR" altLang="en-US" sz="1400" dirty="0">
                 <a:latin typeface="D2Coding" panose="020B0609020101020101" pitchFamily="49" charset="-127"/>
                 <a:ea typeface="D2Coding" panose="020B0609020101020101" pitchFamily="49" charset="-127"/>
               </a:rPr>
               <a:t>모델 컴파일 </a:t>
             </a:r>
             <a:r>
-              <a:rPr lang="en-US" altLang="ko-KR" sz="1600" dirty="0">
+              <a:rPr lang="en-US" altLang="ko-KR" sz="1400" dirty="0">
                 <a:latin typeface="D2Coding" panose="020B0609020101020101" pitchFamily="49" charset="-127"/>
                 <a:ea typeface="D2Coding" panose="020B0609020101020101" pitchFamily="49" charset="-127"/>
               </a:rPr>
               <a:t>(</a:t>
             </a:r>
             <a:r>
-              <a:rPr lang="ko-KR" altLang="en-US" sz="1600" dirty="0">
+              <a:rPr lang="ko-KR" altLang="en-US" sz="1400" dirty="0">
                 <a:latin typeface="D2Coding" panose="020B0609020101020101" pitchFamily="49" charset="-127"/>
                 <a:ea typeface="D2Coding" panose="020B0609020101020101" pitchFamily="49" charset="-127"/>
               </a:rPr>
               <a:t>학습용 설정을 부여하지만 여기서는 구조 확인 및 순방향 연산만 진행</a:t>
             </a:r>
             <a:r>
-              <a:rPr lang="en-US" altLang="ko-KR" sz="1600" dirty="0">
+              <a:rPr lang="en-US" altLang="ko-KR" sz="1400" dirty="0">
                 <a:latin typeface="D2Coding" panose="020B0609020101020101" pitchFamily="49" charset="-127"/>
                 <a:ea typeface="D2Coding" panose="020B0609020101020101" pitchFamily="49" charset="-127"/>
               </a:rPr>
               <a:t>)</a:t>
             </a:r>
-            <a:endParaRPr lang="ko-KR" altLang="en-US" sz="1600" dirty="0">
+            <a:endParaRPr lang="ko-KR" altLang="en-US" sz="1400" dirty="0">
               <a:latin typeface="D2Coding" panose="020B0609020101020101" pitchFamily="49" charset="-127"/>
               <a:ea typeface="D2Coding" panose="020B0609020101020101" pitchFamily="49" charset="-127"/>
             </a:endParaRPr>
           </a:p>
           <a:p>
             <a:r>
-              <a:rPr lang="en-US" altLang="ko-KR" sz="1600" dirty="0" err="1">
+              <a:rPr lang="en-US" altLang="ko-KR" sz="1400" dirty="0" err="1">
                 <a:latin typeface="D2Coding" panose="020B0609020101020101" pitchFamily="49" charset="-127"/>
                 <a:ea typeface="D2Coding" panose="020B0609020101020101" pitchFamily="49" charset="-127"/>
               </a:rPr>
               <a:t>model.compile</a:t>
             </a:r>
             <a:r>
-              <a:rPr lang="en-US" altLang="ko-KR" sz="1600" dirty="0">
+              <a:rPr lang="en-US" altLang="ko-KR" sz="1400" dirty="0">
                 <a:latin typeface="D2Coding" panose="020B0609020101020101" pitchFamily="49" charset="-127"/>
                 <a:ea typeface="D2Coding" panose="020B0609020101020101" pitchFamily="49" charset="-127"/>
               </a:rPr>
               <a:t>(loss="</a:t>
             </a:r>
             <a:r>
-              <a:rPr lang="en-US" altLang="ko-KR" sz="1600" dirty="0" err="1">
+              <a:rPr lang="en-US" altLang="ko-KR" sz="1400" dirty="0" err="1">
                 <a:latin typeface="D2Coding" panose="020B0609020101020101" pitchFamily="49" charset="-127"/>
                 <a:ea typeface="D2Coding" panose="020B0609020101020101" pitchFamily="49" charset="-127"/>
               </a:rPr>
               <a:t>mse</a:t>
             </a:r>
             <a:r>
-              <a:rPr lang="en-US" altLang="ko-KR" sz="1600" dirty="0">
+              <a:rPr lang="en-US" altLang="ko-KR" sz="1400" dirty="0">
                 <a:latin typeface="D2Coding" panose="020B0609020101020101" pitchFamily="49" charset="-127"/>
                 <a:ea typeface="D2Coding" panose="020B0609020101020101" pitchFamily="49" charset="-127"/>
               </a:rPr>
               <a:t>",</a:t>
             </a:r>
             <a:r>
-              <a:rPr lang="ko-KR" altLang="en-US" sz="1600" dirty="0">
+              <a:rPr lang="ko-KR" altLang="en-US" sz="1400" dirty="0">
                 <a:latin typeface="D2Coding" panose="020B0609020101020101" pitchFamily="49" charset="-127"/>
                 <a:ea typeface="D2Coding" panose="020B0609020101020101" pitchFamily="49" charset="-127"/>
               </a:rPr>
               <a:t> </a:t>
             </a:r>
             <a:r>
-              <a:rPr lang="en-US" altLang="ko-KR" sz="1600" dirty="0">
+              <a:rPr lang="en-US" altLang="ko-KR" sz="1400" dirty="0">
                 <a:latin typeface="D2Coding" panose="020B0609020101020101" pitchFamily="49" charset="-127"/>
                 <a:ea typeface="D2Coding" panose="020B0609020101020101" pitchFamily="49" charset="-127"/>
               </a:rPr>
               <a:t>optimizer="</a:t>
             </a:r>
             <a:r>
-              <a:rPr lang="en-US" altLang="ko-KR" sz="1600" dirty="0" err="1">
+              <a:rPr lang="en-US" altLang="ko-KR" sz="1400" dirty="0" err="1">
                 <a:latin typeface="D2Coding" panose="020B0609020101020101" pitchFamily="49" charset="-127"/>
                 <a:ea typeface="D2Coding" panose="020B0609020101020101" pitchFamily="49" charset="-127"/>
               </a:rPr>
               <a:t>adam</a:t>
             </a:r>
             <a:r>
-              <a:rPr lang="en-US" altLang="ko-KR" sz="1600" dirty="0">
+              <a:rPr lang="en-US" altLang="ko-KR" sz="1400" dirty="0">
                 <a:latin typeface="D2Coding" panose="020B0609020101020101" pitchFamily="49" charset="-127"/>
                 <a:ea typeface="D2Coding" panose="020B0609020101020101" pitchFamily="49" charset="-127"/>
               </a:rPr>
               <a:t>")</a:t>
             </a:r>
-            <a:endParaRPr lang="ko-KR" altLang="en-US" sz="1600" dirty="0">
+            <a:endParaRPr lang="ko-KR" altLang="en-US" sz="1400" dirty="0">
               <a:latin typeface="D2Coding" panose="020B0609020101020101" pitchFamily="49" charset="-127"/>
               <a:ea typeface="D2Coding" panose="020B0609020101020101" pitchFamily="49" charset="-127"/>
             </a:endParaRPr>
           </a:p>
           <a:p>
             <a:br>
-              <a:rPr lang="ko-KR" altLang="en-US" sz="1600" dirty="0">
+              <a:rPr lang="ko-KR" altLang="en-US" sz="1400" dirty="0">
                 <a:latin typeface="D2Coding" panose="020B0609020101020101" pitchFamily="49" charset="-127"/>
                 <a:ea typeface="D2Coding" panose="020B0609020101020101" pitchFamily="49" charset="-127"/>
               </a:rPr>
             </a:br>
             <a:r>
-              <a:rPr lang="en-US" altLang="ko-KR" sz="1600" dirty="0">
+              <a:rPr lang="en-US" altLang="ko-KR" sz="1400" dirty="0">
                 <a:latin typeface="D2Coding" panose="020B0609020101020101" pitchFamily="49" charset="-127"/>
                 <a:ea typeface="D2Coding" panose="020B0609020101020101" pitchFamily="49" charset="-127"/>
               </a:rPr>
               <a:t># </a:t>
             </a:r>
             <a:r>
-              <a:rPr lang="ko-KR" altLang="en-US" sz="1600" dirty="0">
+              <a:rPr lang="ko-KR" altLang="en-US" sz="1400" dirty="0">
                 <a:latin typeface="D2Coding" panose="020B0609020101020101" pitchFamily="49" charset="-127"/>
                 <a:ea typeface="D2Coding" panose="020B0609020101020101" pitchFamily="49" charset="-127"/>
               </a:rPr>
               <a:t>가중치</a:t>
             </a:r>
             <a:r>
-              <a:rPr lang="en-US" altLang="ko-KR" sz="1600" dirty="0">
+              <a:rPr lang="en-US" altLang="ko-KR" sz="1400" dirty="0">
                 <a:latin typeface="D2Coding" panose="020B0609020101020101" pitchFamily="49" charset="-127"/>
                 <a:ea typeface="D2Coding" panose="020B0609020101020101" pitchFamily="49" charset="-127"/>
               </a:rPr>
               <a:t>(Param) </a:t>
             </a:r>
             <a:r>
-              <a:rPr lang="ko-KR" altLang="en-US" sz="1600" dirty="0">
+              <a:rPr lang="ko-KR" altLang="en-US" sz="1400" dirty="0">
                 <a:latin typeface="D2Coding" panose="020B0609020101020101" pitchFamily="49" charset="-127"/>
                 <a:ea typeface="D2Coding" panose="020B0609020101020101" pitchFamily="49" charset="-127"/>
               </a:rPr>
@@ -30746,54 +33850,54 @@
           </a:p>
           <a:p>
             <a:r>
-              <a:rPr lang="en-US" altLang="ko-KR" sz="1600" dirty="0" err="1">
+              <a:rPr lang="en-US" altLang="ko-KR" sz="1400" dirty="0" err="1">
                 <a:latin typeface="D2Coding" panose="020B0609020101020101" pitchFamily="49" charset="-127"/>
                 <a:ea typeface="D2Coding" panose="020B0609020101020101" pitchFamily="49" charset="-127"/>
               </a:rPr>
               <a:t>model.summary</a:t>
             </a:r>
             <a:r>
-              <a:rPr lang="en-US" altLang="ko-KR" sz="1600" dirty="0">
+              <a:rPr lang="en-US" altLang="ko-KR" sz="1400" dirty="0">
                 <a:latin typeface="D2Coding" panose="020B0609020101020101" pitchFamily="49" charset="-127"/>
                 <a:ea typeface="D2Coding" panose="020B0609020101020101" pitchFamily="49" charset="-127"/>
               </a:rPr>
               <a:t>()</a:t>
             </a:r>
-            <a:endParaRPr lang="ko-KR" altLang="en-US" sz="1600" dirty="0">
+            <a:endParaRPr lang="ko-KR" altLang="en-US" sz="1400" dirty="0">
               <a:latin typeface="D2Coding" panose="020B0609020101020101" pitchFamily="49" charset="-127"/>
               <a:ea typeface="D2Coding" panose="020B0609020101020101" pitchFamily="49" charset="-127"/>
             </a:endParaRPr>
           </a:p>
           <a:p>
             <a:br>
-              <a:rPr lang="ko-KR" altLang="en-US" sz="1600" dirty="0">
+              <a:rPr lang="ko-KR" altLang="en-US" sz="1400" dirty="0">
                 <a:latin typeface="D2Coding" panose="020B0609020101020101" pitchFamily="49" charset="-127"/>
                 <a:ea typeface="D2Coding" panose="020B0609020101020101" pitchFamily="49" charset="-127"/>
               </a:rPr>
             </a:br>
             <a:r>
-              <a:rPr lang="en-US" altLang="ko-KR" sz="1600" dirty="0">
+              <a:rPr lang="en-US" altLang="ko-KR" sz="1400" dirty="0">
                 <a:latin typeface="D2Coding" panose="020B0609020101020101" pitchFamily="49" charset="-127"/>
                 <a:ea typeface="D2Coding" panose="020B0609020101020101" pitchFamily="49" charset="-127"/>
               </a:rPr>
               <a:t># </a:t>
             </a:r>
             <a:r>
-              <a:rPr lang="ko-KR" altLang="en-US" sz="1600" dirty="0">
+              <a:rPr lang="ko-KR" altLang="en-US" sz="1400" dirty="0">
                 <a:latin typeface="D2Coding" panose="020B0609020101020101" pitchFamily="49" charset="-127"/>
                 <a:ea typeface="D2Coding" panose="020B0609020101020101" pitchFamily="49" charset="-127"/>
               </a:rPr>
               <a:t>가상 데이터를 모델에 통과시켜 </a:t>
             </a:r>
             <a:r>
-              <a:rPr lang="ko-KR" altLang="en-US" sz="1600" dirty="0" err="1">
+              <a:rPr lang="ko-KR" altLang="en-US" sz="1400" dirty="0" err="1">
                 <a:latin typeface="D2Coding" panose="020B0609020101020101" pitchFamily="49" charset="-127"/>
                 <a:ea typeface="D2Coding" panose="020B0609020101020101" pitchFamily="49" charset="-127"/>
               </a:rPr>
               <a:t>출력값</a:t>
             </a:r>
             <a:r>
-              <a:rPr lang="ko-KR" altLang="en-US" sz="1600" dirty="0">
+              <a:rPr lang="ko-KR" altLang="en-US" sz="1400" dirty="0">
                 <a:latin typeface="D2Coding" panose="020B0609020101020101" pitchFamily="49" charset="-127"/>
                 <a:ea typeface="D2Coding" panose="020B0609020101020101" pitchFamily="49" charset="-127"/>
               </a:rPr>
@@ -30802,260 +33906,260 @@
           </a:p>
           <a:p>
             <a:r>
-              <a:rPr lang="en-US" altLang="ko-KR" sz="1600" dirty="0">
+              <a:rPr lang="en-US" altLang="ko-KR" sz="1400" dirty="0">
                 <a:latin typeface="D2Coding" panose="020B0609020101020101" pitchFamily="49" charset="-127"/>
                 <a:ea typeface="D2Coding" panose="020B0609020101020101" pitchFamily="49" charset="-127"/>
               </a:rPr>
               <a:t>output = </a:t>
             </a:r>
             <a:r>
-              <a:rPr lang="en-US" altLang="ko-KR" sz="1600" dirty="0" err="1">
+              <a:rPr lang="en-US" altLang="ko-KR" sz="1400" dirty="0" err="1">
                 <a:latin typeface="D2Coding" panose="020B0609020101020101" pitchFamily="49" charset="-127"/>
                 <a:ea typeface="D2Coding" panose="020B0609020101020101" pitchFamily="49" charset="-127"/>
               </a:rPr>
               <a:t>model.predict</a:t>
             </a:r>
             <a:r>
-              <a:rPr lang="en-US" altLang="ko-KR" sz="1600" dirty="0">
+              <a:rPr lang="en-US" altLang="ko-KR" sz="1400" dirty="0">
                 <a:latin typeface="D2Coding" panose="020B0609020101020101" pitchFamily="49" charset="-127"/>
                 <a:ea typeface="D2Coding" panose="020B0609020101020101" pitchFamily="49" charset="-127"/>
               </a:rPr>
               <a:t>(</a:t>
             </a:r>
             <a:r>
-              <a:rPr lang="en-US" altLang="ko-KR" sz="1600" dirty="0" err="1">
+              <a:rPr lang="en-US" altLang="ko-KR" sz="1400" dirty="0" err="1">
                 <a:latin typeface="D2Coding" panose="020B0609020101020101" pitchFamily="49" charset="-127"/>
                 <a:ea typeface="D2Coding" panose="020B0609020101020101" pitchFamily="49" charset="-127"/>
               </a:rPr>
               <a:t>X_dummy</a:t>
             </a:r>
             <a:r>
-              <a:rPr lang="en-US" altLang="ko-KR" sz="1600" dirty="0">
+              <a:rPr lang="en-US" altLang="ko-KR" sz="1400" dirty="0">
                 <a:latin typeface="D2Coding" panose="020B0609020101020101" pitchFamily="49" charset="-127"/>
                 <a:ea typeface="D2Coding" panose="020B0609020101020101" pitchFamily="49" charset="-127"/>
               </a:rPr>
               <a:t>)</a:t>
             </a:r>
-            <a:endParaRPr lang="ko-KR" altLang="en-US" sz="1600" dirty="0">
+            <a:endParaRPr lang="ko-KR" altLang="en-US" sz="1400" dirty="0">
               <a:latin typeface="D2Coding" panose="020B0609020101020101" pitchFamily="49" charset="-127"/>
               <a:ea typeface="D2Coding" panose="020B0609020101020101" pitchFamily="49" charset="-127"/>
             </a:endParaRPr>
           </a:p>
           <a:p>
-            <a:endParaRPr lang="ko-KR" altLang="en-US" sz="1600" dirty="0">
+            <a:endParaRPr lang="ko-KR" altLang="en-US" sz="1400" dirty="0">
               <a:latin typeface="D2Coding" panose="020B0609020101020101" pitchFamily="49" charset="-127"/>
               <a:ea typeface="D2Coding" panose="020B0609020101020101" pitchFamily="49" charset="-127"/>
             </a:endParaRPr>
           </a:p>
           <a:p>
             <a:r>
-              <a:rPr lang="en-US" altLang="ko-KR" sz="1600" dirty="0">
+              <a:rPr lang="en-US" altLang="ko-KR" sz="1400" dirty="0">
                 <a:latin typeface="D2Coding" panose="020B0609020101020101" pitchFamily="49" charset="-127"/>
                 <a:ea typeface="D2Coding" panose="020B0609020101020101" pitchFamily="49" charset="-127"/>
               </a:rPr>
               <a:t>print("\n=== </a:t>
             </a:r>
             <a:r>
-              <a:rPr lang="ko-KR" altLang="en-US" sz="1600" dirty="0">
+              <a:rPr lang="ko-KR" altLang="en-US" sz="1400" dirty="0">
                 <a:latin typeface="D2Coding" panose="020B0609020101020101" pitchFamily="49" charset="-127"/>
                 <a:ea typeface="D2Coding" panose="020B0609020101020101" pitchFamily="49" charset="-127"/>
               </a:rPr>
               <a:t>최종 출력 데이터 모양 </a:t>
             </a:r>
             <a:r>
-              <a:rPr lang="en-US" altLang="ko-KR" sz="1600" dirty="0">
+              <a:rPr lang="en-US" altLang="ko-KR" sz="1400" dirty="0">
                 <a:latin typeface="D2Coding" panose="020B0609020101020101" pitchFamily="49" charset="-127"/>
                 <a:ea typeface="D2Coding" panose="020B0609020101020101" pitchFamily="49" charset="-127"/>
               </a:rPr>
               <a:t>(Output Shape) ===")</a:t>
             </a:r>
-            <a:endParaRPr lang="ko-KR" altLang="en-US" sz="1600" dirty="0">
+            <a:endParaRPr lang="ko-KR" altLang="en-US" sz="1400" dirty="0">
               <a:latin typeface="D2Coding" panose="020B0609020101020101" pitchFamily="49" charset="-127"/>
               <a:ea typeface="D2Coding" panose="020B0609020101020101" pitchFamily="49" charset="-127"/>
             </a:endParaRPr>
           </a:p>
           <a:p>
             <a:r>
-              <a:rPr lang="en-US" altLang="ko-KR" sz="1600" dirty="0">
+              <a:rPr lang="en-US" altLang="ko-KR" sz="1400" dirty="0">
                 <a:latin typeface="D2Coding" panose="020B0609020101020101" pitchFamily="49" charset="-127"/>
                 <a:ea typeface="D2Coding" panose="020B0609020101020101" pitchFamily="49" charset="-127"/>
               </a:rPr>
               <a:t>print("</a:t>
             </a:r>
             <a:r>
-              <a:rPr lang="ko-KR" altLang="en-US" sz="1600" dirty="0">
+              <a:rPr lang="ko-KR" altLang="en-US" sz="1400" dirty="0">
                 <a:latin typeface="D2Coding" panose="020B0609020101020101" pitchFamily="49" charset="-127"/>
                 <a:ea typeface="D2Coding" panose="020B0609020101020101" pitchFamily="49" charset="-127"/>
               </a:rPr>
               <a:t>결과 배열 크기</a:t>
             </a:r>
             <a:r>
-              <a:rPr lang="en-US" altLang="ko-KR" sz="1600" dirty="0">
+              <a:rPr lang="en-US" altLang="ko-KR" sz="1400" dirty="0">
                 <a:latin typeface="D2Coding" panose="020B0609020101020101" pitchFamily="49" charset="-127"/>
                 <a:ea typeface="D2Coding" panose="020B0609020101020101" pitchFamily="49" charset="-127"/>
               </a:rPr>
               <a:t>:",</a:t>
             </a:r>
             <a:r>
-              <a:rPr lang="ko-KR" altLang="en-US" sz="1600" dirty="0">
+              <a:rPr lang="ko-KR" altLang="en-US" sz="1400" dirty="0">
                 <a:latin typeface="D2Coding" panose="020B0609020101020101" pitchFamily="49" charset="-127"/>
                 <a:ea typeface="D2Coding" panose="020B0609020101020101" pitchFamily="49" charset="-127"/>
               </a:rPr>
               <a:t> </a:t>
             </a:r>
             <a:r>
-              <a:rPr lang="en-US" altLang="ko-KR" sz="1600" dirty="0" err="1">
+              <a:rPr lang="en-US" altLang="ko-KR" sz="1400" dirty="0" err="1">
                 <a:latin typeface="D2Coding" panose="020B0609020101020101" pitchFamily="49" charset="-127"/>
                 <a:ea typeface="D2Coding" panose="020B0609020101020101" pitchFamily="49" charset="-127"/>
               </a:rPr>
               <a:t>output.shape</a:t>
             </a:r>
             <a:r>
-              <a:rPr lang="en-US" altLang="ko-KR" sz="1600" dirty="0">
+              <a:rPr lang="en-US" altLang="ko-KR" sz="1400" dirty="0">
                 <a:latin typeface="D2Coding" panose="020B0609020101020101" pitchFamily="49" charset="-127"/>
                 <a:ea typeface="D2Coding" panose="020B0609020101020101" pitchFamily="49" charset="-127"/>
               </a:rPr>
               <a:t>)</a:t>
             </a:r>
             <a:r>
-              <a:rPr lang="ko-KR" altLang="en-US" sz="1600" dirty="0">
+              <a:rPr lang="ko-KR" altLang="en-US" sz="1400" dirty="0">
                 <a:latin typeface="D2Coding" panose="020B0609020101020101" pitchFamily="49" charset="-127"/>
                 <a:ea typeface="D2Coding" panose="020B0609020101020101" pitchFamily="49" charset="-127"/>
               </a:rPr>
               <a:t> </a:t>
             </a:r>
             <a:r>
-              <a:rPr lang="en-US" altLang="ko-KR" sz="1600" dirty="0">
+              <a:rPr lang="en-US" altLang="ko-KR" sz="1400" dirty="0">
                 <a:latin typeface="D2Coding" panose="020B0609020101020101" pitchFamily="49" charset="-127"/>
                 <a:ea typeface="D2Coding" panose="020B0609020101020101" pitchFamily="49" charset="-127"/>
               </a:rPr>
               <a:t># </a:t>
             </a:r>
             <a:r>
-              <a:rPr lang="ko-KR" altLang="en-US" sz="1600" dirty="0">
+              <a:rPr lang="ko-KR" altLang="en-US" sz="1400" dirty="0">
                 <a:latin typeface="D2Coding" panose="020B0609020101020101" pitchFamily="49" charset="-127"/>
                 <a:ea typeface="D2Coding" panose="020B0609020101020101" pitchFamily="49" charset="-127"/>
               </a:rPr>
               <a:t>출력 크기</a:t>
             </a:r>
             <a:r>
-              <a:rPr lang="en-US" altLang="ko-KR" sz="1600" dirty="0">
+              <a:rPr lang="en-US" altLang="ko-KR" sz="1400" dirty="0">
                 <a:latin typeface="D2Coding" panose="020B0609020101020101" pitchFamily="49" charset="-127"/>
                 <a:ea typeface="D2Coding" panose="020B0609020101020101" pitchFamily="49" charset="-127"/>
               </a:rPr>
               <a:t>: (1, 4, 2) -&gt; [</a:t>
             </a:r>
             <a:r>
-              <a:rPr lang="ko-KR" altLang="en-US" sz="1600" dirty="0">
+              <a:rPr lang="ko-KR" altLang="en-US" sz="1400" dirty="0">
                 <a:latin typeface="D2Coding" panose="020B0609020101020101" pitchFamily="49" charset="-127"/>
                 <a:ea typeface="D2Coding" panose="020B0609020101020101" pitchFamily="49" charset="-127"/>
               </a:rPr>
               <a:t>배치</a:t>
             </a:r>
             <a:r>
-              <a:rPr lang="en-US" altLang="ko-KR" sz="1600" dirty="0">
+              <a:rPr lang="en-US" altLang="ko-KR" sz="1400" dirty="0">
                 <a:latin typeface="D2Coding" panose="020B0609020101020101" pitchFamily="49" charset="-127"/>
                 <a:ea typeface="D2Coding" panose="020B0609020101020101" pitchFamily="49" charset="-127"/>
               </a:rPr>
               <a:t>, </a:t>
             </a:r>
             <a:r>
-              <a:rPr lang="ko-KR" altLang="en-US" sz="1600" dirty="0">
+              <a:rPr lang="ko-KR" altLang="en-US" sz="1400" dirty="0">
                 <a:latin typeface="D2Coding" panose="020B0609020101020101" pitchFamily="49" charset="-127"/>
                 <a:ea typeface="D2Coding" panose="020B0609020101020101" pitchFamily="49" charset="-127"/>
               </a:rPr>
               <a:t>타임스텝</a:t>
             </a:r>
             <a:r>
-              <a:rPr lang="en-US" altLang="ko-KR" sz="1600" dirty="0">
+              <a:rPr lang="en-US" altLang="ko-KR" sz="1400" dirty="0">
                 <a:latin typeface="D2Coding" panose="020B0609020101020101" pitchFamily="49" charset="-127"/>
                 <a:ea typeface="D2Coding" panose="020B0609020101020101" pitchFamily="49" charset="-127"/>
               </a:rPr>
               <a:t>, </a:t>
             </a:r>
             <a:r>
-              <a:rPr lang="ko-KR" altLang="en-US" sz="1600" dirty="0">
+              <a:rPr lang="ko-KR" altLang="en-US" sz="1400" dirty="0">
                 <a:latin typeface="D2Coding" panose="020B0609020101020101" pitchFamily="49" charset="-127"/>
                 <a:ea typeface="D2Coding" panose="020B0609020101020101" pitchFamily="49" charset="-127"/>
               </a:rPr>
               <a:t>출력차원</a:t>
             </a:r>
             <a:r>
-              <a:rPr lang="en-US" altLang="ko-KR" sz="1600" dirty="0">
+              <a:rPr lang="en-US" altLang="ko-KR" sz="1400" dirty="0">
                 <a:latin typeface="D2Coding" panose="020B0609020101020101" pitchFamily="49" charset="-127"/>
                 <a:ea typeface="D2Coding" panose="020B0609020101020101" pitchFamily="49" charset="-127"/>
               </a:rPr>
               <a:t>]</a:t>
             </a:r>
-            <a:endParaRPr lang="ko-KR" altLang="en-US" sz="1600" dirty="0">
+            <a:endParaRPr lang="ko-KR" altLang="en-US" sz="1400" dirty="0">
               <a:latin typeface="D2Coding" panose="020B0609020101020101" pitchFamily="49" charset="-127"/>
               <a:ea typeface="D2Coding" panose="020B0609020101020101" pitchFamily="49" charset="-127"/>
             </a:endParaRPr>
           </a:p>
           <a:p>
             <a:r>
-              <a:rPr lang="en-US" altLang="ko-KR" sz="1600" dirty="0">
+              <a:rPr lang="en-US" altLang="ko-KR" sz="1400" dirty="0">
                 <a:latin typeface="D2Coding" panose="020B0609020101020101" pitchFamily="49" charset="-127"/>
                 <a:ea typeface="D2Coding" panose="020B0609020101020101" pitchFamily="49" charset="-127"/>
               </a:rPr>
               <a:t>print("\n=== </a:t>
             </a:r>
             <a:r>
-              <a:rPr lang="ko-KR" altLang="en-US" sz="1600" dirty="0">
+              <a:rPr lang="ko-KR" altLang="en-US" sz="1400" dirty="0">
                 <a:latin typeface="D2Coding" panose="020B0609020101020101" pitchFamily="49" charset="-127"/>
                 <a:ea typeface="D2Coding" panose="020B0609020101020101" pitchFamily="49" charset="-127"/>
               </a:rPr>
               <a:t>실제 출력된 값 </a:t>
             </a:r>
             <a:r>
-              <a:rPr lang="en-US" altLang="ko-KR" sz="1600" dirty="0">
+              <a:rPr lang="en-US" altLang="ko-KR" sz="1400" dirty="0">
                 <a:latin typeface="D2Coding" panose="020B0609020101020101" pitchFamily="49" charset="-127"/>
                 <a:ea typeface="D2Coding" panose="020B0609020101020101" pitchFamily="49" charset="-127"/>
               </a:rPr>
               <a:t>(</a:t>
             </a:r>
             <a:r>
-              <a:rPr lang="ko-KR" altLang="en-US" sz="1600" dirty="0">
+              <a:rPr lang="ko-KR" altLang="en-US" sz="1400" dirty="0">
                 <a:latin typeface="D2Coding" panose="020B0609020101020101" pitchFamily="49" charset="-127"/>
                 <a:ea typeface="D2Coding" panose="020B0609020101020101" pitchFamily="49" charset="-127"/>
               </a:rPr>
               <a:t>각 시점별 </a:t>
             </a:r>
             <a:r>
-              <a:rPr lang="en-US" altLang="ko-KR" sz="1600" dirty="0">
+              <a:rPr lang="en-US" altLang="ko-KR" sz="1400" dirty="0">
                 <a:latin typeface="D2Coding" panose="020B0609020101020101" pitchFamily="49" charset="-127"/>
                 <a:ea typeface="D2Coding" panose="020B0609020101020101" pitchFamily="49" charset="-127"/>
               </a:rPr>
               <a:t>2</a:t>
             </a:r>
             <a:r>
-              <a:rPr lang="ko-KR" altLang="en-US" sz="1600" dirty="0">
+              <a:rPr lang="ko-KR" altLang="en-US" sz="1400" dirty="0">
                 <a:latin typeface="D2Coding" panose="020B0609020101020101" pitchFamily="49" charset="-127"/>
                 <a:ea typeface="D2Coding" panose="020B0609020101020101" pitchFamily="49" charset="-127"/>
               </a:rPr>
               <a:t>차원 출력</a:t>
             </a:r>
             <a:r>
-              <a:rPr lang="en-US" altLang="ko-KR" sz="1600" dirty="0">
+              <a:rPr lang="en-US" altLang="ko-KR" sz="1400" dirty="0">
                 <a:latin typeface="D2Coding" panose="020B0609020101020101" pitchFamily="49" charset="-127"/>
                 <a:ea typeface="D2Coding" panose="020B0609020101020101" pitchFamily="49" charset="-127"/>
               </a:rPr>
               <a:t>) ===")</a:t>
             </a:r>
-            <a:endParaRPr lang="ko-KR" altLang="en-US" sz="1600" dirty="0">
+            <a:endParaRPr lang="ko-KR" altLang="en-US" sz="1400" dirty="0">
               <a:latin typeface="D2Coding" panose="020B0609020101020101" pitchFamily="49" charset="-127"/>
               <a:ea typeface="D2Coding" panose="020B0609020101020101" pitchFamily="49" charset="-127"/>
             </a:endParaRPr>
           </a:p>
           <a:p>
             <a:r>
-              <a:rPr lang="en-US" altLang="ko-KR" sz="1600" dirty="0">
+              <a:rPr lang="en-US" altLang="ko-KR" sz="1400" dirty="0">
                 <a:latin typeface="D2Coding" panose="020B0609020101020101" pitchFamily="49" charset="-127"/>
                 <a:ea typeface="D2Coding" panose="020B0609020101020101" pitchFamily="49" charset="-127"/>
               </a:rPr>
               <a:t>print(output[0])</a:t>
             </a:r>
-            <a:endParaRPr lang="ko-KR" altLang="en-US" sz="1600" dirty="0">
+            <a:endParaRPr lang="ko-KR" altLang="en-US" sz="1400" dirty="0">
               <a:latin typeface="D2Coding" panose="020B0609020101020101" pitchFamily="49" charset="-127"/>
               <a:ea typeface="D2Coding" panose="020B0609020101020101" pitchFamily="49" charset="-127"/>
             </a:endParaRPr>
@@ -31135,365 +34239,7 @@
 </p:sld>
 </file>
 
-<file path=ppt/slides/slide3.xml><?xml version="1.0" encoding="utf-8"?>
-<p:sld xmlns:a="http://schemas.openxmlformats.org/drawingml/2006/main" xmlns:r="http://schemas.openxmlformats.org/officeDocument/2006/relationships" xmlns:p="http://schemas.openxmlformats.org/presentationml/2006/main">
-  <p:cSld>
-    <p:spTree>
-      <p:nvGrpSpPr>
-        <p:cNvPr id="1" name="">
-          <a:extLst>
-            <a:ext uri="{FF2B5EF4-FFF2-40B4-BE49-F238E27FC236}">
-              <a16:creationId xmlns:a16="http://schemas.microsoft.com/office/drawing/2014/main" id="{07E81080-7482-4F78-0B32-9350845B42DF}"/>
-            </a:ext>
-          </a:extLst>
-        </p:cNvPr>
-        <p:cNvGrpSpPr/>
-        <p:nvPr/>
-      </p:nvGrpSpPr>
-      <p:grpSpPr>
-        <a:xfrm>
-          <a:off x="0" y="0"/>
-          <a:ext cx="0" cy="0"/>
-          <a:chOff x="0" y="0"/>
-          <a:chExt cx="0" cy="0"/>
-        </a:xfrm>
-      </p:grpSpPr>
-      <p:sp>
-        <p:nvSpPr>
-          <p:cNvPr id="4" name="슬라이드 번호 개체 틀 3">
-            <a:extLst>
-              <a:ext uri="{FF2B5EF4-FFF2-40B4-BE49-F238E27FC236}">
-                <a16:creationId xmlns:a16="http://schemas.microsoft.com/office/drawing/2014/main" id="{3BB4D45B-52A1-9BAE-B34E-30DEDF59CFAE}"/>
-              </a:ext>
-            </a:extLst>
-          </p:cNvPr>
-          <p:cNvSpPr>
-            <a:spLocks noGrp="1"/>
-          </p:cNvSpPr>
-          <p:nvPr>
-            <p:ph type="sldNum" sz="quarter" idx="12"/>
-          </p:nvPr>
-        </p:nvSpPr>
-        <p:spPr>
-          <a:xfrm>
-            <a:off x="10514011" y="6036261"/>
-            <a:ext cx="753545" cy="365125"/>
-          </a:xfrm>
-        </p:spPr>
-        <p:txBody>
-          <a:bodyPr/>
-          <a:lstStyle/>
-          <a:p>
-            <a:fld id="{D57F1E4F-1CFF-5643-939E-217C01CDF565}" type="slidenum">
-              <a:rPr lang="en-US" smtClean="0"/>
-              <a:pPr/>
-              <a:t>3</a:t>
-            </a:fld>
-            <a:endParaRPr lang="en-US" dirty="0"/>
-          </a:p>
-        </p:txBody>
-      </p:sp>
-      <p:sp>
-        <p:nvSpPr>
-          <p:cNvPr id="3" name="제목 1">
-            <a:extLst>
-              <a:ext uri="{FF2B5EF4-FFF2-40B4-BE49-F238E27FC236}">
-                <a16:creationId xmlns:a16="http://schemas.microsoft.com/office/drawing/2014/main" id="{DBF09144-883D-B590-22EC-22EF91228308}"/>
-              </a:ext>
-            </a:extLst>
-          </p:cNvPr>
-          <p:cNvSpPr txBox="1">
-            <a:spLocks/>
-          </p:cNvSpPr>
-          <p:nvPr/>
-        </p:nvSpPr>
-        <p:spPr>
-          <a:xfrm>
-            <a:off x="475645" y="481983"/>
-            <a:ext cx="10353762" cy="766439"/>
-          </a:xfrm>
-          <a:prstGeom prst="rect">
-            <a:avLst/>
-          </a:prstGeom>
-        </p:spPr>
-        <p:txBody>
-          <a:bodyPr vert="horz" lIns="91440" tIns="45720" rIns="91440" bIns="45720" rtlCol="0" anchor="ctr">
-            <a:normAutofit/>
-          </a:bodyPr>
-          <a:lstStyle>
-            <a:lvl1pPr algn="ctr" defTabSz="914400" rtl="0" eaLnBrk="1" latinLnBrk="1" hangingPunct="1">
-              <a:lnSpc>
-                <a:spcPct val="90000"/>
-              </a:lnSpc>
-              <a:spcBef>
-                <a:spcPct val="0"/>
-              </a:spcBef>
-              <a:buNone/>
-              <a:defRPr sz="3200" kern="1200" cap="all" baseline="0">
-                <a:solidFill>
-                  <a:schemeClr val="tx1"/>
-                </a:solidFill>
-                <a:effectLst/>
-                <a:latin typeface="Batang" panose="02030600000101010101" pitchFamily="18" charset="-127"/>
-                <a:ea typeface="Batang" panose="02030600000101010101" pitchFamily="18" charset="-127"/>
-                <a:cs typeface="+mj-cs"/>
-              </a:defRPr>
-            </a:lvl1pPr>
-          </a:lstStyle>
-          <a:p>
-            <a:pPr algn="l"/>
-            <a:r>
-              <a:rPr lang="ko-KR" altLang="en-US" sz="2800" cap="none" dirty="0">
-                <a:solidFill>
-                  <a:schemeClr val="bg2">
-                    <a:lumMod val="25000"/>
-                  </a:schemeClr>
-                </a:solidFill>
-                <a:latin typeface="D2Coding" panose="020B0609020101020101" pitchFamily="49" charset="-127"/>
-                <a:ea typeface="D2Coding" panose="020B0609020101020101" pitchFamily="49" charset="-127"/>
-                <a:cs typeface="Segoe UI Light" panose="020B0502040204020203" pitchFamily="34" charset="0"/>
-              </a:rPr>
-              <a:t>순서가 중요한 데이터</a:t>
-            </a:r>
-          </a:p>
-        </p:txBody>
-      </p:sp>
-      <p:sp>
-        <p:nvSpPr>
-          <p:cNvPr id="5" name="TextBox 4">
-            <a:extLst>
-              <a:ext uri="{FF2B5EF4-FFF2-40B4-BE49-F238E27FC236}">
-                <a16:creationId xmlns:a16="http://schemas.microsoft.com/office/drawing/2014/main" id="{6561AAD7-56D4-58BF-FEAE-D0D8305EA254}"/>
-              </a:ext>
-            </a:extLst>
-          </p:cNvPr>
-          <p:cNvSpPr txBox="1"/>
-          <p:nvPr/>
-        </p:nvSpPr>
-        <p:spPr>
-          <a:xfrm>
-            <a:off x="658811" y="1729061"/>
-            <a:ext cx="9855200" cy="968407"/>
-          </a:xfrm>
-          <a:prstGeom prst="rect">
-            <a:avLst/>
-          </a:prstGeom>
-          <a:noFill/>
-        </p:spPr>
-        <p:txBody>
-          <a:bodyPr wrap="square">
-            <a:spAutoFit/>
-          </a:bodyPr>
-          <a:lstStyle/>
-          <a:p>
-            <a:pPr>
-              <a:lnSpc>
-                <a:spcPct val="150000"/>
-              </a:lnSpc>
-            </a:pPr>
-            <a:r>
-              <a:rPr lang="en-US" altLang="ko-KR" sz="2000" b="0" i="0" dirty="0">
-                <a:solidFill>
-                  <a:srgbClr val="181818"/>
-                </a:solidFill>
-                <a:effectLst/>
-                <a:latin typeface="D2Coding" panose="020B0609020101020101" pitchFamily="49" charset="-127"/>
-                <a:ea typeface="D2Coding" panose="020B0609020101020101" pitchFamily="49" charset="-127"/>
-              </a:rPr>
-              <a:t>“Be who you are and say what you feel, because those who mind don't matter, and those who matter don't mind.”</a:t>
-            </a:r>
-            <a:endParaRPr lang="ko-KR" altLang="en-US" sz="2000" dirty="0">
-              <a:latin typeface="D2Coding" panose="020B0609020101020101" pitchFamily="49" charset="-127"/>
-              <a:ea typeface="D2Coding" panose="020B0609020101020101" pitchFamily="49" charset="-127"/>
-            </a:endParaRPr>
-          </a:p>
-        </p:txBody>
-      </p:sp>
-      <p:pic>
-        <p:nvPicPr>
-          <p:cNvPr id="7" name="그림 6">
-            <a:extLst>
-              <a:ext uri="{FF2B5EF4-FFF2-40B4-BE49-F238E27FC236}">
-                <a16:creationId xmlns:a16="http://schemas.microsoft.com/office/drawing/2014/main" id="{10911C56-8BA1-1A77-1C57-C79246EF5C86}"/>
-              </a:ext>
-            </a:extLst>
-          </p:cNvPr>
-          <p:cNvPicPr>
-            <a:picLocks noChangeAspect="1"/>
-          </p:cNvPicPr>
-          <p:nvPr/>
-        </p:nvPicPr>
-        <p:blipFill>
-          <a:blip r:embed="rId2"/>
-          <a:stretch>
-            <a:fillRect/>
-          </a:stretch>
-        </p:blipFill>
-        <p:spPr>
-          <a:xfrm>
-            <a:off x="843279" y="3178108"/>
-            <a:ext cx="9010821" cy="2858154"/>
-          </a:xfrm>
-          <a:prstGeom prst="rect">
-            <a:avLst/>
-          </a:prstGeom>
-        </p:spPr>
-      </p:pic>
-      <p:sp>
-        <p:nvSpPr>
-          <p:cNvPr id="2" name="슬라이드 번호 개체 틀 3">
-            <a:extLst>
-              <a:ext uri="{FF2B5EF4-FFF2-40B4-BE49-F238E27FC236}">
-                <a16:creationId xmlns:a16="http://schemas.microsoft.com/office/drawing/2014/main" id="{6AE85520-4C86-33A3-9B1D-8BA3330845C3}"/>
-              </a:ext>
-            </a:extLst>
-          </p:cNvPr>
-          <p:cNvSpPr txBox="1">
-            <a:spLocks/>
-          </p:cNvSpPr>
-          <p:nvPr/>
-        </p:nvSpPr>
-        <p:spPr>
-          <a:xfrm>
-            <a:off x="11162487" y="299420"/>
-            <a:ext cx="753545" cy="365125"/>
-          </a:xfrm>
-          <a:prstGeom prst="rect">
-            <a:avLst/>
-          </a:prstGeom>
-        </p:spPr>
-        <p:txBody>
-          <a:bodyPr vert="horz" lIns="91440" tIns="45720" rIns="91440" bIns="45720" rtlCol="0" anchor="ctr"/>
-          <a:lstStyle>
-            <a:defPPr rtl="0">
-              <a:defRPr lang="ko-KR"/>
-            </a:defPPr>
-            <a:lvl1pPr marL="0" algn="r" defTabSz="914400" rtl="0" eaLnBrk="1" latinLnBrk="0" hangingPunct="1">
-              <a:defRPr sz="1200" kern="1200" baseline="0">
-                <a:solidFill>
-                  <a:schemeClr val="tx1">
-                    <a:lumMod val="65000"/>
-                    <a:lumOff val="35000"/>
-                  </a:schemeClr>
-                </a:solidFill>
-                <a:latin typeface="맑은 고딕" panose="020B0503020000020004" pitchFamily="50" charset="-127"/>
-                <a:ea typeface="맑은 고딕" panose="020B0503020000020004" pitchFamily="50" charset="-127"/>
-                <a:cs typeface="+mn-cs"/>
-              </a:defRPr>
-            </a:lvl1pPr>
-            <a:lvl2pPr marL="457200" algn="l" defTabSz="914400" rtl="0" eaLnBrk="1" latinLnBrk="0" hangingPunct="1">
-              <a:defRPr sz="1800" kern="1200">
-                <a:solidFill>
-                  <a:schemeClr val="tx1"/>
-                </a:solidFill>
-                <a:latin typeface="+mn-lt"/>
-                <a:ea typeface="+mn-ea"/>
-                <a:cs typeface="+mn-cs"/>
-              </a:defRPr>
-            </a:lvl2pPr>
-            <a:lvl3pPr marL="914400" algn="l" defTabSz="914400" rtl="0" eaLnBrk="1" latinLnBrk="0" hangingPunct="1">
-              <a:defRPr sz="1800" kern="1200">
-                <a:solidFill>
-                  <a:schemeClr val="tx1"/>
-                </a:solidFill>
-                <a:latin typeface="+mn-lt"/>
-                <a:ea typeface="+mn-ea"/>
-                <a:cs typeface="+mn-cs"/>
-              </a:defRPr>
-            </a:lvl3pPr>
-            <a:lvl4pPr marL="1371600" algn="l" defTabSz="914400" rtl="0" eaLnBrk="1" latinLnBrk="0" hangingPunct="1">
-              <a:defRPr sz="1800" kern="1200">
-                <a:solidFill>
-                  <a:schemeClr val="tx1"/>
-                </a:solidFill>
-                <a:latin typeface="+mn-lt"/>
-                <a:ea typeface="+mn-ea"/>
-                <a:cs typeface="+mn-cs"/>
-              </a:defRPr>
-            </a:lvl4pPr>
-            <a:lvl5pPr marL="1828800" algn="l" defTabSz="914400" rtl="0" eaLnBrk="1" latinLnBrk="0" hangingPunct="1">
-              <a:defRPr sz="1800" kern="1200">
-                <a:solidFill>
-                  <a:schemeClr val="tx1"/>
-                </a:solidFill>
-                <a:latin typeface="+mn-lt"/>
-                <a:ea typeface="+mn-ea"/>
-                <a:cs typeface="+mn-cs"/>
-              </a:defRPr>
-            </a:lvl5pPr>
-            <a:lvl6pPr marL="2286000" algn="l" defTabSz="914400" rtl="0" eaLnBrk="1" latinLnBrk="0" hangingPunct="1">
-              <a:defRPr sz="1800" kern="1200">
-                <a:solidFill>
-                  <a:schemeClr val="tx1"/>
-                </a:solidFill>
-                <a:latin typeface="+mn-lt"/>
-                <a:ea typeface="+mn-ea"/>
-                <a:cs typeface="+mn-cs"/>
-              </a:defRPr>
-            </a:lvl6pPr>
-            <a:lvl7pPr marL="2743200" algn="l" defTabSz="914400" rtl="0" eaLnBrk="1" latinLnBrk="0" hangingPunct="1">
-              <a:defRPr sz="1800" kern="1200">
-                <a:solidFill>
-                  <a:schemeClr val="tx1"/>
-                </a:solidFill>
-                <a:latin typeface="+mn-lt"/>
-                <a:ea typeface="+mn-ea"/>
-                <a:cs typeface="+mn-cs"/>
-              </a:defRPr>
-            </a:lvl7pPr>
-            <a:lvl8pPr marL="3200400" algn="l" defTabSz="914400" rtl="0" eaLnBrk="1" latinLnBrk="0" hangingPunct="1">
-              <a:defRPr sz="1800" kern="1200">
-                <a:solidFill>
-                  <a:schemeClr val="tx1"/>
-                </a:solidFill>
-                <a:latin typeface="+mn-lt"/>
-                <a:ea typeface="+mn-ea"/>
-                <a:cs typeface="+mn-cs"/>
-              </a:defRPr>
-            </a:lvl8pPr>
-            <a:lvl9pPr marL="3657600" algn="l" defTabSz="914400" rtl="0" eaLnBrk="1" latinLnBrk="0" hangingPunct="1">
-              <a:defRPr sz="1800" kern="1200">
-                <a:solidFill>
-                  <a:schemeClr val="tx1"/>
-                </a:solidFill>
-                <a:latin typeface="+mn-lt"/>
-                <a:ea typeface="+mn-ea"/>
-                <a:cs typeface="+mn-cs"/>
-              </a:defRPr>
-            </a:lvl9pPr>
-          </a:lstStyle>
-          <a:p>
-            <a:fld id="{D57F1E4F-1CFF-5643-939E-217C01CDF565}" type="slidenum">
-              <a:rPr lang="en-US" sz="1400" b="1" smtClean="0">
-                <a:latin typeface="Times New Roman" panose="02020603050405020304" pitchFamily="18" charset="0"/>
-                <a:ea typeface="Verdana" panose="020B0604030504040204" pitchFamily="34" charset="0"/>
-                <a:cs typeface="Times New Roman" panose="02020603050405020304" pitchFamily="18" charset="0"/>
-              </a:rPr>
-              <a:pPr/>
-              <a:t>3</a:t>
-            </a:fld>
-            <a:endParaRPr lang="en-US" sz="1400" b="1" dirty="0">
-              <a:latin typeface="Times New Roman" panose="02020603050405020304" pitchFamily="18" charset="0"/>
-              <a:ea typeface="Verdana" panose="020B0604030504040204" pitchFamily="34" charset="0"/>
-              <a:cs typeface="Times New Roman" panose="02020603050405020304" pitchFamily="18" charset="0"/>
-            </a:endParaRPr>
-          </a:p>
-        </p:txBody>
-      </p:sp>
-    </p:spTree>
-    <p:extLst>
-      <p:ext uri="{BB962C8B-B14F-4D97-AF65-F5344CB8AC3E}">
-        <p14:creationId xmlns:p14="http://schemas.microsoft.com/office/powerpoint/2010/main" val="770903537"/>
-      </p:ext>
-    </p:extLst>
-  </p:cSld>
-  <p:clrMapOvr>
-    <a:masterClrMapping/>
-  </p:clrMapOvr>
-</p:sld>
-</file>
-
-<file path=ppt/slides/slide30.xml><?xml version="1.0" encoding="utf-8"?>
+<file path=ppt/slides/slide35.xml><?xml version="1.0" encoding="utf-8"?>
 <p:sld xmlns:a="http://schemas.openxmlformats.org/drawingml/2006/main" xmlns:r="http://schemas.openxmlformats.org/officeDocument/2006/relationships" xmlns:p="http://schemas.openxmlformats.org/presentationml/2006/main">
   <p:cSld>
     <p:spTree>
@@ -31516,41 +34262,6 @@
           <a:chExt cx="0" cy="0"/>
         </a:xfrm>
       </p:grpSpPr>
-      <p:sp>
-        <p:nvSpPr>
-          <p:cNvPr id="4" name="슬라이드 번호 개체 틀 3">
-            <a:extLst>
-              <a:ext uri="{FF2B5EF4-FFF2-40B4-BE49-F238E27FC236}">
-                <a16:creationId xmlns:a16="http://schemas.microsoft.com/office/drawing/2014/main" id="{2E9DA771-6870-123A-1128-9F853C7FC970}"/>
-              </a:ext>
-            </a:extLst>
-          </p:cNvPr>
-          <p:cNvSpPr>
-            <a:spLocks noGrp="1"/>
-          </p:cNvSpPr>
-          <p:nvPr>
-            <p:ph type="sldNum" sz="quarter" idx="12"/>
-          </p:nvPr>
-        </p:nvSpPr>
-        <p:spPr>
-          <a:xfrm>
-            <a:off x="10514011" y="6036261"/>
-            <a:ext cx="753545" cy="365125"/>
-          </a:xfrm>
-        </p:spPr>
-        <p:txBody>
-          <a:bodyPr/>
-          <a:lstStyle/>
-          <a:p>
-            <a:fld id="{D57F1E4F-1CFF-5643-939E-217C01CDF565}" type="slidenum">
-              <a:rPr lang="en-US" smtClean="0"/>
-              <a:pPr/>
-              <a:t>30</a:t>
-            </a:fld>
-            <a:endParaRPr lang="en-US" dirty="0"/>
-          </a:p>
-        </p:txBody>
-      </p:sp>
       <p:sp>
         <p:nvSpPr>
           <p:cNvPr id="3" name="제목 1">
@@ -31934,7 +34645,7 @@
 </p:sld>
 </file>
 
-<file path=ppt/slides/slide31.xml><?xml version="1.0" encoding="utf-8"?>
+<file path=ppt/slides/slide36.xml><?xml version="1.0" encoding="utf-8"?>
 <p:sld xmlns:a="http://schemas.openxmlformats.org/drawingml/2006/main" xmlns:r="http://schemas.openxmlformats.org/officeDocument/2006/relationships" xmlns:p="http://schemas.openxmlformats.org/presentationml/2006/main">
   <p:cSld>
     <p:spTree>
@@ -31957,41 +34668,6 @@
           <a:chExt cx="0" cy="0"/>
         </a:xfrm>
       </p:grpSpPr>
-      <p:sp>
-        <p:nvSpPr>
-          <p:cNvPr id="4" name="슬라이드 번호 개체 틀 3">
-            <a:extLst>
-              <a:ext uri="{FF2B5EF4-FFF2-40B4-BE49-F238E27FC236}">
-                <a16:creationId xmlns:a16="http://schemas.microsoft.com/office/drawing/2014/main" id="{ADB3AF37-E42F-565B-46B9-6B7245CE7DE5}"/>
-              </a:ext>
-            </a:extLst>
-          </p:cNvPr>
-          <p:cNvSpPr>
-            <a:spLocks noGrp="1"/>
-          </p:cNvSpPr>
-          <p:nvPr>
-            <p:ph type="sldNum" sz="quarter" idx="12"/>
-          </p:nvPr>
-        </p:nvSpPr>
-        <p:spPr>
-          <a:xfrm>
-            <a:off x="10514011" y="6036261"/>
-            <a:ext cx="753545" cy="365125"/>
-          </a:xfrm>
-        </p:spPr>
-        <p:txBody>
-          <a:bodyPr/>
-          <a:lstStyle/>
-          <a:p>
-            <a:fld id="{D57F1E4F-1CFF-5643-939E-217C01CDF565}" type="slidenum">
-              <a:rPr lang="en-US" smtClean="0"/>
-              <a:pPr/>
-              <a:t>31</a:t>
-            </a:fld>
-            <a:endParaRPr lang="en-US" dirty="0"/>
-          </a:p>
-        </p:txBody>
-      </p:sp>
       <p:sp>
         <p:nvSpPr>
           <p:cNvPr id="3" name="제목 1">
@@ -32136,7 +34812,7 @@
 </p:sld>
 </file>
 
-<file path=ppt/slides/slide32.xml><?xml version="1.0" encoding="utf-8"?>
+<file path=ppt/slides/slide37.xml><?xml version="1.0" encoding="utf-8"?>
 <p:sld xmlns:a="http://schemas.openxmlformats.org/drawingml/2006/main" xmlns:r="http://schemas.openxmlformats.org/officeDocument/2006/relationships" xmlns:p="http://schemas.openxmlformats.org/presentationml/2006/main">
   <p:cSld>
     <p:spTree>
@@ -32159,41 +34835,6 @@
           <a:chExt cx="0" cy="0"/>
         </a:xfrm>
       </p:grpSpPr>
-      <p:sp>
-        <p:nvSpPr>
-          <p:cNvPr id="4" name="슬라이드 번호 개체 틀 3">
-            <a:extLst>
-              <a:ext uri="{FF2B5EF4-FFF2-40B4-BE49-F238E27FC236}">
-                <a16:creationId xmlns:a16="http://schemas.microsoft.com/office/drawing/2014/main" id="{DBFB5B3E-2733-6F10-C433-7C314850C9FE}"/>
-              </a:ext>
-            </a:extLst>
-          </p:cNvPr>
-          <p:cNvSpPr>
-            <a:spLocks noGrp="1"/>
-          </p:cNvSpPr>
-          <p:nvPr>
-            <p:ph type="sldNum" sz="quarter" idx="12"/>
-          </p:nvPr>
-        </p:nvSpPr>
-        <p:spPr>
-          <a:xfrm>
-            <a:off x="10514011" y="6036261"/>
-            <a:ext cx="753545" cy="365125"/>
-          </a:xfrm>
-        </p:spPr>
-        <p:txBody>
-          <a:bodyPr/>
-          <a:lstStyle/>
-          <a:p>
-            <a:fld id="{D57F1E4F-1CFF-5643-939E-217C01CDF565}" type="slidenum">
-              <a:rPr lang="en-US" smtClean="0"/>
-              <a:pPr/>
-              <a:t>32</a:t>
-            </a:fld>
-            <a:endParaRPr lang="en-US" dirty="0"/>
-          </a:p>
-        </p:txBody>
-      </p:sp>
       <p:sp>
         <p:nvSpPr>
           <p:cNvPr id="3" name="제목 1">
@@ -32338,7 +34979,7 @@
 </p:sld>
 </file>
 
-<file path=ppt/slides/slide33.xml><?xml version="1.0" encoding="utf-8"?>
+<file path=ppt/slides/slide38.xml><?xml version="1.0" encoding="utf-8"?>
 <p:sld xmlns:a="http://schemas.openxmlformats.org/drawingml/2006/main" xmlns:r="http://schemas.openxmlformats.org/officeDocument/2006/relationships" xmlns:p="http://schemas.openxmlformats.org/presentationml/2006/main">
   <p:cSld>
     <p:spTree>
@@ -32361,41 +35002,6 @@
           <a:chExt cx="0" cy="0"/>
         </a:xfrm>
       </p:grpSpPr>
-      <p:sp>
-        <p:nvSpPr>
-          <p:cNvPr id="4" name="슬라이드 번호 개체 틀 3">
-            <a:extLst>
-              <a:ext uri="{FF2B5EF4-FFF2-40B4-BE49-F238E27FC236}">
-                <a16:creationId xmlns:a16="http://schemas.microsoft.com/office/drawing/2014/main" id="{42091B1E-C426-25FD-67B2-B1CF234C6B7A}"/>
-              </a:ext>
-            </a:extLst>
-          </p:cNvPr>
-          <p:cNvSpPr>
-            <a:spLocks noGrp="1"/>
-          </p:cNvSpPr>
-          <p:nvPr>
-            <p:ph type="sldNum" sz="quarter" idx="12"/>
-          </p:nvPr>
-        </p:nvSpPr>
-        <p:spPr>
-          <a:xfrm>
-            <a:off x="10514011" y="6036261"/>
-            <a:ext cx="753545" cy="365125"/>
-          </a:xfrm>
-        </p:spPr>
-        <p:txBody>
-          <a:bodyPr/>
-          <a:lstStyle/>
-          <a:p>
-            <a:fld id="{D57F1E4F-1CFF-5643-939E-217C01CDF565}" type="slidenum">
-              <a:rPr lang="en-US" smtClean="0"/>
-              <a:pPr/>
-              <a:t>33</a:t>
-            </a:fld>
-            <a:endParaRPr lang="en-US" dirty="0"/>
-          </a:p>
-        </p:txBody>
-      </p:sp>
       <p:sp>
         <p:nvSpPr>
           <p:cNvPr id="3" name="제목 1">
@@ -32654,6 +35260,364 @@
 </file>
 
 <file path=ppt/slides/slide4.xml><?xml version="1.0" encoding="utf-8"?>
+<p:sld xmlns:a="http://schemas.openxmlformats.org/drawingml/2006/main" xmlns:r="http://schemas.openxmlformats.org/officeDocument/2006/relationships" xmlns:p="http://schemas.openxmlformats.org/presentationml/2006/main">
+  <p:cSld>
+    <p:spTree>
+      <p:nvGrpSpPr>
+        <p:cNvPr id="1" name="">
+          <a:extLst>
+            <a:ext uri="{FF2B5EF4-FFF2-40B4-BE49-F238E27FC236}">
+              <a16:creationId xmlns:a16="http://schemas.microsoft.com/office/drawing/2014/main" id="{07E81080-7482-4F78-0B32-9350845B42DF}"/>
+            </a:ext>
+          </a:extLst>
+        </p:cNvPr>
+        <p:cNvGrpSpPr/>
+        <p:nvPr/>
+      </p:nvGrpSpPr>
+      <p:grpSpPr>
+        <a:xfrm>
+          <a:off x="0" y="0"/>
+          <a:ext cx="0" cy="0"/>
+          <a:chOff x="0" y="0"/>
+          <a:chExt cx="0" cy="0"/>
+        </a:xfrm>
+      </p:grpSpPr>
+      <p:sp>
+        <p:nvSpPr>
+          <p:cNvPr id="4" name="슬라이드 번호 개체 틀 3">
+            <a:extLst>
+              <a:ext uri="{FF2B5EF4-FFF2-40B4-BE49-F238E27FC236}">
+                <a16:creationId xmlns:a16="http://schemas.microsoft.com/office/drawing/2014/main" id="{3BB4D45B-52A1-9BAE-B34E-30DEDF59CFAE}"/>
+              </a:ext>
+            </a:extLst>
+          </p:cNvPr>
+          <p:cNvSpPr>
+            <a:spLocks noGrp="1"/>
+          </p:cNvSpPr>
+          <p:nvPr>
+            <p:ph type="sldNum" sz="quarter" idx="12"/>
+          </p:nvPr>
+        </p:nvSpPr>
+        <p:spPr>
+          <a:xfrm>
+            <a:off x="10514011" y="6036261"/>
+            <a:ext cx="753545" cy="365125"/>
+          </a:xfrm>
+        </p:spPr>
+        <p:txBody>
+          <a:bodyPr/>
+          <a:lstStyle/>
+          <a:p>
+            <a:fld id="{D57F1E4F-1CFF-5643-939E-217C01CDF565}" type="slidenum">
+              <a:rPr lang="en-US" smtClean="0"/>
+              <a:pPr/>
+              <a:t>4</a:t>
+            </a:fld>
+            <a:endParaRPr lang="en-US" dirty="0"/>
+          </a:p>
+        </p:txBody>
+      </p:sp>
+      <p:sp>
+        <p:nvSpPr>
+          <p:cNvPr id="3" name="제목 1">
+            <a:extLst>
+              <a:ext uri="{FF2B5EF4-FFF2-40B4-BE49-F238E27FC236}">
+                <a16:creationId xmlns:a16="http://schemas.microsoft.com/office/drawing/2014/main" id="{DBF09144-883D-B590-22EC-22EF91228308}"/>
+              </a:ext>
+            </a:extLst>
+          </p:cNvPr>
+          <p:cNvSpPr txBox="1">
+            <a:spLocks/>
+          </p:cNvSpPr>
+          <p:nvPr/>
+        </p:nvSpPr>
+        <p:spPr>
+          <a:xfrm>
+            <a:off x="475645" y="481983"/>
+            <a:ext cx="10353762" cy="766439"/>
+          </a:xfrm>
+          <a:prstGeom prst="rect">
+            <a:avLst/>
+          </a:prstGeom>
+        </p:spPr>
+        <p:txBody>
+          <a:bodyPr vert="horz" lIns="91440" tIns="45720" rIns="91440" bIns="45720" rtlCol="0" anchor="ctr">
+            <a:normAutofit/>
+          </a:bodyPr>
+          <a:lstStyle>
+            <a:lvl1pPr algn="ctr" defTabSz="914400" rtl="0" eaLnBrk="1" latinLnBrk="1" hangingPunct="1">
+              <a:lnSpc>
+                <a:spcPct val="90000"/>
+              </a:lnSpc>
+              <a:spcBef>
+                <a:spcPct val="0"/>
+              </a:spcBef>
+              <a:buNone/>
+              <a:defRPr sz="3200" kern="1200" cap="all" baseline="0">
+                <a:solidFill>
+                  <a:schemeClr val="tx1"/>
+                </a:solidFill>
+                <a:effectLst/>
+                <a:latin typeface="Batang" panose="02030600000101010101" pitchFamily="18" charset="-127"/>
+                <a:ea typeface="Batang" panose="02030600000101010101" pitchFamily="18" charset="-127"/>
+                <a:cs typeface="+mj-cs"/>
+              </a:defRPr>
+            </a:lvl1pPr>
+          </a:lstStyle>
+          <a:p>
+            <a:pPr algn="l"/>
+            <a:r>
+              <a:rPr lang="ko-KR" altLang="en-US" sz="2800" cap="none" dirty="0">
+                <a:solidFill>
+                  <a:schemeClr val="bg2">
+                    <a:lumMod val="25000"/>
+                  </a:schemeClr>
+                </a:solidFill>
+                <a:latin typeface="D2Coding" panose="020B0609020101020101" pitchFamily="49" charset="-127"/>
+                <a:ea typeface="D2Coding" panose="020B0609020101020101" pitchFamily="49" charset="-127"/>
+                <a:cs typeface="Segoe UI Light" panose="020B0502040204020203" pitchFamily="34" charset="0"/>
+              </a:rPr>
+              <a:t>순서가 중요한 데이터</a:t>
+            </a:r>
+          </a:p>
+        </p:txBody>
+      </p:sp>
+      <p:sp>
+        <p:nvSpPr>
+          <p:cNvPr id="5" name="TextBox 4">
+            <a:extLst>
+              <a:ext uri="{FF2B5EF4-FFF2-40B4-BE49-F238E27FC236}">
+                <a16:creationId xmlns:a16="http://schemas.microsoft.com/office/drawing/2014/main" id="{6561AAD7-56D4-58BF-FEAE-D0D8305EA254}"/>
+              </a:ext>
+            </a:extLst>
+          </p:cNvPr>
+          <p:cNvSpPr txBox="1"/>
+          <p:nvPr/>
+        </p:nvSpPr>
+        <p:spPr>
+          <a:xfrm>
+            <a:off x="658811" y="1729061"/>
+            <a:ext cx="9855200" cy="968407"/>
+          </a:xfrm>
+          <a:prstGeom prst="rect">
+            <a:avLst/>
+          </a:prstGeom>
+          <a:noFill/>
+        </p:spPr>
+        <p:txBody>
+          <a:bodyPr wrap="square">
+            <a:spAutoFit/>
+          </a:bodyPr>
+          <a:lstStyle/>
+          <a:p>
+            <a:pPr>
+              <a:lnSpc>
+                <a:spcPct val="150000"/>
+              </a:lnSpc>
+            </a:pPr>
+            <a:r>
+              <a:rPr lang="en-US" altLang="ko-KR" sz="2000" b="0" i="0" dirty="0">
+                <a:solidFill>
+                  <a:srgbClr val="181818"/>
+                </a:solidFill>
+                <a:effectLst/>
+                <a:latin typeface="D2Coding" panose="020B0609020101020101" pitchFamily="49" charset="-127"/>
+                <a:ea typeface="D2Coding" panose="020B0609020101020101" pitchFamily="49" charset="-127"/>
+              </a:rPr>
+              <a:t>“Be who you are and say what you feel, because those who mind don't matter, and those who matter don't mind.”</a:t>
+            </a:r>
+            <a:endParaRPr lang="ko-KR" altLang="en-US" sz="2000" dirty="0">
+              <a:latin typeface="D2Coding" panose="020B0609020101020101" pitchFamily="49" charset="-127"/>
+              <a:ea typeface="D2Coding" panose="020B0609020101020101" pitchFamily="49" charset="-127"/>
+            </a:endParaRPr>
+          </a:p>
+        </p:txBody>
+      </p:sp>
+      <p:pic>
+        <p:nvPicPr>
+          <p:cNvPr id="7" name="그림 6">
+            <a:extLst>
+              <a:ext uri="{FF2B5EF4-FFF2-40B4-BE49-F238E27FC236}">
+                <a16:creationId xmlns:a16="http://schemas.microsoft.com/office/drawing/2014/main" id="{10911C56-8BA1-1A77-1C57-C79246EF5C86}"/>
+              </a:ext>
+            </a:extLst>
+          </p:cNvPr>
+          <p:cNvPicPr>
+            <a:picLocks noChangeAspect="1"/>
+          </p:cNvPicPr>
+          <p:nvPr/>
+        </p:nvPicPr>
+        <p:blipFill>
+          <a:blip r:embed="rId2"/>
+          <a:stretch>
+            <a:fillRect/>
+          </a:stretch>
+        </p:blipFill>
+        <p:spPr>
+          <a:xfrm>
+            <a:off x="843279" y="3178108"/>
+            <a:ext cx="9010821" cy="2858154"/>
+          </a:xfrm>
+          <a:prstGeom prst="rect">
+            <a:avLst/>
+          </a:prstGeom>
+        </p:spPr>
+      </p:pic>
+      <p:sp>
+        <p:nvSpPr>
+          <p:cNvPr id="2" name="슬라이드 번호 개체 틀 3">
+            <a:extLst>
+              <a:ext uri="{FF2B5EF4-FFF2-40B4-BE49-F238E27FC236}">
+                <a16:creationId xmlns:a16="http://schemas.microsoft.com/office/drawing/2014/main" id="{6AE85520-4C86-33A3-9B1D-8BA3330845C3}"/>
+              </a:ext>
+            </a:extLst>
+          </p:cNvPr>
+          <p:cNvSpPr txBox="1">
+            <a:spLocks/>
+          </p:cNvSpPr>
+          <p:nvPr/>
+        </p:nvSpPr>
+        <p:spPr>
+          <a:xfrm>
+            <a:off x="11162487" y="299420"/>
+            <a:ext cx="753545" cy="365125"/>
+          </a:xfrm>
+          <a:prstGeom prst="rect">
+            <a:avLst/>
+          </a:prstGeom>
+        </p:spPr>
+        <p:txBody>
+          <a:bodyPr vert="horz" lIns="91440" tIns="45720" rIns="91440" bIns="45720" rtlCol="0" anchor="ctr"/>
+          <a:lstStyle>
+            <a:defPPr rtl="0">
+              <a:defRPr lang="ko-KR"/>
+            </a:defPPr>
+            <a:lvl1pPr marL="0" algn="r" defTabSz="914400" rtl="0" eaLnBrk="1" latinLnBrk="0" hangingPunct="1">
+              <a:defRPr sz="1200" kern="1200" baseline="0">
+                <a:solidFill>
+                  <a:schemeClr val="tx1">
+                    <a:lumMod val="65000"/>
+                    <a:lumOff val="35000"/>
+                  </a:schemeClr>
+                </a:solidFill>
+                <a:latin typeface="맑은 고딕" panose="020B0503020000020004" pitchFamily="50" charset="-127"/>
+                <a:ea typeface="맑은 고딕" panose="020B0503020000020004" pitchFamily="50" charset="-127"/>
+                <a:cs typeface="+mn-cs"/>
+              </a:defRPr>
+            </a:lvl1pPr>
+            <a:lvl2pPr marL="457200" algn="l" defTabSz="914400" rtl="0" eaLnBrk="1" latinLnBrk="0" hangingPunct="1">
+              <a:defRPr sz="1800" kern="1200">
+                <a:solidFill>
+                  <a:schemeClr val="tx1"/>
+                </a:solidFill>
+                <a:latin typeface="+mn-lt"/>
+                <a:ea typeface="+mn-ea"/>
+                <a:cs typeface="+mn-cs"/>
+              </a:defRPr>
+            </a:lvl2pPr>
+            <a:lvl3pPr marL="914400" algn="l" defTabSz="914400" rtl="0" eaLnBrk="1" latinLnBrk="0" hangingPunct="1">
+              <a:defRPr sz="1800" kern="1200">
+                <a:solidFill>
+                  <a:schemeClr val="tx1"/>
+                </a:solidFill>
+                <a:latin typeface="+mn-lt"/>
+                <a:ea typeface="+mn-ea"/>
+                <a:cs typeface="+mn-cs"/>
+              </a:defRPr>
+            </a:lvl3pPr>
+            <a:lvl4pPr marL="1371600" algn="l" defTabSz="914400" rtl="0" eaLnBrk="1" latinLnBrk="0" hangingPunct="1">
+              <a:defRPr sz="1800" kern="1200">
+                <a:solidFill>
+                  <a:schemeClr val="tx1"/>
+                </a:solidFill>
+                <a:latin typeface="+mn-lt"/>
+                <a:ea typeface="+mn-ea"/>
+                <a:cs typeface="+mn-cs"/>
+              </a:defRPr>
+            </a:lvl4pPr>
+            <a:lvl5pPr marL="1828800" algn="l" defTabSz="914400" rtl="0" eaLnBrk="1" latinLnBrk="0" hangingPunct="1">
+              <a:defRPr sz="1800" kern="1200">
+                <a:solidFill>
+                  <a:schemeClr val="tx1"/>
+                </a:solidFill>
+                <a:latin typeface="+mn-lt"/>
+                <a:ea typeface="+mn-ea"/>
+                <a:cs typeface="+mn-cs"/>
+              </a:defRPr>
+            </a:lvl5pPr>
+            <a:lvl6pPr marL="2286000" algn="l" defTabSz="914400" rtl="0" eaLnBrk="1" latinLnBrk="0" hangingPunct="1">
+              <a:defRPr sz="1800" kern="1200">
+                <a:solidFill>
+                  <a:schemeClr val="tx1"/>
+                </a:solidFill>
+                <a:latin typeface="+mn-lt"/>
+                <a:ea typeface="+mn-ea"/>
+                <a:cs typeface="+mn-cs"/>
+              </a:defRPr>
+            </a:lvl6pPr>
+            <a:lvl7pPr marL="2743200" algn="l" defTabSz="914400" rtl="0" eaLnBrk="1" latinLnBrk="0" hangingPunct="1">
+              <a:defRPr sz="1800" kern="1200">
+                <a:solidFill>
+                  <a:schemeClr val="tx1"/>
+                </a:solidFill>
+                <a:latin typeface="+mn-lt"/>
+                <a:ea typeface="+mn-ea"/>
+                <a:cs typeface="+mn-cs"/>
+              </a:defRPr>
+            </a:lvl7pPr>
+            <a:lvl8pPr marL="3200400" algn="l" defTabSz="914400" rtl="0" eaLnBrk="1" latinLnBrk="0" hangingPunct="1">
+              <a:defRPr sz="1800" kern="1200">
+                <a:solidFill>
+                  <a:schemeClr val="tx1"/>
+                </a:solidFill>
+                <a:latin typeface="+mn-lt"/>
+                <a:ea typeface="+mn-ea"/>
+                <a:cs typeface="+mn-cs"/>
+              </a:defRPr>
+            </a:lvl8pPr>
+            <a:lvl9pPr marL="3657600" algn="l" defTabSz="914400" rtl="0" eaLnBrk="1" latinLnBrk="0" hangingPunct="1">
+              <a:defRPr sz="1800" kern="1200">
+                <a:solidFill>
+                  <a:schemeClr val="tx1"/>
+                </a:solidFill>
+                <a:latin typeface="+mn-lt"/>
+                <a:ea typeface="+mn-ea"/>
+                <a:cs typeface="+mn-cs"/>
+              </a:defRPr>
+            </a:lvl9pPr>
+          </a:lstStyle>
+          <a:p>
+            <a:fld id="{D57F1E4F-1CFF-5643-939E-217C01CDF565}" type="slidenum">
+              <a:rPr lang="en-US" sz="1400" b="1" smtClean="0">
+                <a:latin typeface="Times New Roman" panose="02020603050405020304" pitchFamily="18" charset="0"/>
+                <a:ea typeface="Verdana" panose="020B0604030504040204" pitchFamily="34" charset="0"/>
+                <a:cs typeface="Times New Roman" panose="02020603050405020304" pitchFamily="18" charset="0"/>
+              </a:rPr>
+              <a:pPr/>
+              <a:t>4</a:t>
+            </a:fld>
+            <a:endParaRPr lang="en-US" sz="1400" b="1" dirty="0">
+              <a:latin typeface="Times New Roman" panose="02020603050405020304" pitchFamily="18" charset="0"/>
+              <a:ea typeface="Verdana" panose="020B0604030504040204" pitchFamily="34" charset="0"/>
+              <a:cs typeface="Times New Roman" panose="02020603050405020304" pitchFamily="18" charset="0"/>
+            </a:endParaRPr>
+          </a:p>
+        </p:txBody>
+      </p:sp>
+    </p:spTree>
+    <p:extLst>
+      <p:ext uri="{BB962C8B-B14F-4D97-AF65-F5344CB8AC3E}">
+        <p14:creationId xmlns:p14="http://schemas.microsoft.com/office/powerpoint/2010/main" val="770903537"/>
+      </p:ext>
+    </p:extLst>
+  </p:cSld>
+  <p:clrMapOvr>
+    <a:masterClrMapping/>
+  </p:clrMapOvr>
+</p:sld>
+</file>
+
+<file path=ppt/slides/slide5.xml><?xml version="1.0" encoding="utf-8"?>
 <p:sld xmlns:a="http://schemas.openxmlformats.org/drawingml/2006/main" xmlns:r="http://schemas.openxmlformats.org/officeDocument/2006/relationships" xmlns:p="http://schemas.openxmlformats.org/presentationml/2006/main">
   <p:cSld>
     <p:spTree>
@@ -32880,7 +35844,7 @@
                 <a:cs typeface="Times New Roman" panose="02020603050405020304" pitchFamily="18" charset="0"/>
               </a:rPr>
               <a:pPr/>
-              <a:t>4</a:t>
+              <a:t>5</a:t>
             </a:fld>
             <a:endParaRPr lang="en-US" sz="1400" b="1" dirty="0">
               <a:latin typeface="Times New Roman" panose="02020603050405020304" pitchFamily="18" charset="0"/>
@@ -32903,7 +35867,7 @@
 </p:sld>
 </file>
 
-<file path=ppt/slides/slide5.xml><?xml version="1.0" encoding="utf-8"?>
+<file path=ppt/slides/slide6.xml><?xml version="1.0" encoding="utf-8"?>
 <p:sld xmlns:a="http://schemas.openxmlformats.org/drawingml/2006/main" xmlns:r="http://schemas.openxmlformats.org/officeDocument/2006/relationships" xmlns:p="http://schemas.openxmlformats.org/presentationml/2006/main">
   <p:cSld>
     <p:spTree>
@@ -33304,7 +36268,7 @@
                 <a:cs typeface="Times New Roman" panose="02020603050405020304" pitchFamily="18" charset="0"/>
               </a:rPr>
               <a:pPr/>
-              <a:t>5</a:t>
+              <a:t>6</a:t>
             </a:fld>
             <a:endParaRPr lang="en-US" sz="1400" b="1" dirty="0">
               <a:latin typeface="Times New Roman" panose="02020603050405020304" pitchFamily="18" charset="0"/>
@@ -33327,7 +36291,7 @@
 </p:sld>
 </file>
 
-<file path=ppt/slides/slide6.xml><?xml version="1.0" encoding="utf-8"?>
+<file path=ppt/slides/slide7.xml><?xml version="1.0" encoding="utf-8"?>
 <p:sld xmlns:a="http://schemas.openxmlformats.org/drawingml/2006/main" xmlns:r="http://schemas.openxmlformats.org/officeDocument/2006/relationships" xmlns:p="http://schemas.openxmlformats.org/presentationml/2006/main">
   <p:cSld>
     <p:spTree>
@@ -33379,7 +36343,7 @@
             <a:fld id="{D57F1E4F-1CFF-5643-939E-217C01CDF565}" type="slidenum">
               <a:rPr lang="en-US" smtClean="0"/>
               <a:pPr/>
-              <a:t>6</a:t>
+              <a:t>7</a:t>
             </a:fld>
             <a:endParaRPr lang="en-US" dirty="0"/>
           </a:p>
@@ -33982,7 +36946,7 @@
                 <a:cs typeface="Times New Roman" panose="02020603050405020304" pitchFamily="18" charset="0"/>
               </a:rPr>
               <a:pPr/>
-              <a:t>6</a:t>
+              <a:t>7</a:t>
             </a:fld>
             <a:endParaRPr lang="en-US" sz="1400" b="1" dirty="0">
               <a:latin typeface="Times New Roman" panose="02020603050405020304" pitchFamily="18" charset="0"/>
@@ -34005,7 +36969,7 @@
 </p:sld>
 </file>
 
-<file path=ppt/slides/slide7.xml><?xml version="1.0" encoding="utf-8"?>
+<file path=ppt/slides/slide8.xml><?xml version="1.0" encoding="utf-8"?>
 <p:sld xmlns:a="http://schemas.openxmlformats.org/drawingml/2006/main" xmlns:r="http://schemas.openxmlformats.org/officeDocument/2006/relationships" xmlns:p="http://schemas.openxmlformats.org/presentationml/2006/main">
   <p:cSld>
     <p:spTree>
@@ -34057,7 +37021,7 @@
             <a:fld id="{D57F1E4F-1CFF-5643-939E-217C01CDF565}" type="slidenum">
               <a:rPr lang="en-US" smtClean="0"/>
               <a:pPr/>
-              <a:t>7</a:t>
+              <a:t>8</a:t>
             </a:fld>
             <a:endParaRPr lang="en-US" dirty="0"/>
           </a:p>
@@ -34431,7 +37395,7 @@
                 <a:cs typeface="Times New Roman" panose="02020603050405020304" pitchFamily="18" charset="0"/>
               </a:rPr>
               <a:pPr/>
-              <a:t>7</a:t>
+              <a:t>8</a:t>
             </a:fld>
             <a:endParaRPr lang="en-US" sz="1400" b="1" dirty="0">
               <a:latin typeface="Times New Roman" panose="02020603050405020304" pitchFamily="18" charset="0"/>
@@ -34454,7 +37418,7 @@
 </p:sld>
 </file>
 
-<file path=ppt/slides/slide8.xml><?xml version="1.0" encoding="utf-8"?>
+<file path=ppt/slides/slide9.xml><?xml version="1.0" encoding="utf-8"?>
 <p:sld xmlns:a="http://schemas.openxmlformats.org/drawingml/2006/main" xmlns:r="http://schemas.openxmlformats.org/officeDocument/2006/relationships" xmlns:p="http://schemas.openxmlformats.org/presentationml/2006/main">
   <p:cSld>
     <p:spTree>
@@ -34714,423 +37678,6 @@
     <p:extLst>
       <p:ext uri="{BB962C8B-B14F-4D97-AF65-F5344CB8AC3E}">
         <p14:creationId xmlns:p14="http://schemas.microsoft.com/office/powerpoint/2010/main" val="16294117"/>
-      </p:ext>
-    </p:extLst>
-  </p:cSld>
-  <p:clrMapOvr>
-    <a:masterClrMapping/>
-  </p:clrMapOvr>
-</p:sld>
-</file>
-
-<file path=ppt/slides/slide9.xml><?xml version="1.0" encoding="utf-8"?>
-<p:sld xmlns:a="http://schemas.openxmlformats.org/drawingml/2006/main" xmlns:r="http://schemas.openxmlformats.org/officeDocument/2006/relationships" xmlns:p="http://schemas.openxmlformats.org/presentationml/2006/main">
-  <p:cSld>
-    <p:spTree>
-      <p:nvGrpSpPr>
-        <p:cNvPr id="1" name="">
-          <a:extLst>
-            <a:ext uri="{FF2B5EF4-FFF2-40B4-BE49-F238E27FC236}">
-              <a16:creationId xmlns:a16="http://schemas.microsoft.com/office/drawing/2014/main" id="{B96F697D-6FA4-C9F7-B1CF-012E1896C92B}"/>
-            </a:ext>
-          </a:extLst>
-        </p:cNvPr>
-        <p:cNvGrpSpPr/>
-        <p:nvPr/>
-      </p:nvGrpSpPr>
-      <p:grpSpPr>
-        <a:xfrm>
-          <a:off x="0" y="0"/>
-          <a:ext cx="0" cy="0"/>
-          <a:chOff x="0" y="0"/>
-          <a:chExt cx="0" cy="0"/>
-        </a:xfrm>
-      </p:grpSpPr>
-      <p:sp>
-        <p:nvSpPr>
-          <p:cNvPr id="3" name="제목 1">
-            <a:extLst>
-              <a:ext uri="{FF2B5EF4-FFF2-40B4-BE49-F238E27FC236}">
-                <a16:creationId xmlns:a16="http://schemas.microsoft.com/office/drawing/2014/main" id="{AE117BD9-978E-2100-D439-E41B165E4F8D}"/>
-              </a:ext>
-            </a:extLst>
-          </p:cNvPr>
-          <p:cNvSpPr txBox="1">
-            <a:spLocks/>
-          </p:cNvSpPr>
-          <p:nvPr/>
-        </p:nvSpPr>
-        <p:spPr>
-          <a:xfrm>
-            <a:off x="475645" y="481983"/>
-            <a:ext cx="10353762" cy="766439"/>
-          </a:xfrm>
-          <a:prstGeom prst="rect">
-            <a:avLst/>
-          </a:prstGeom>
-        </p:spPr>
-        <p:txBody>
-          <a:bodyPr vert="horz" lIns="91440" tIns="45720" rIns="91440" bIns="45720" rtlCol="0" anchor="ctr">
-            <a:normAutofit/>
-          </a:bodyPr>
-          <a:lstStyle>
-            <a:lvl1pPr algn="ctr" defTabSz="914400" rtl="0" eaLnBrk="1" latinLnBrk="1" hangingPunct="1">
-              <a:lnSpc>
-                <a:spcPct val="90000"/>
-              </a:lnSpc>
-              <a:spcBef>
-                <a:spcPct val="0"/>
-              </a:spcBef>
-              <a:buNone/>
-              <a:defRPr sz="3200" kern="1200" cap="all" baseline="0">
-                <a:solidFill>
-                  <a:schemeClr val="tx1"/>
-                </a:solidFill>
-                <a:effectLst/>
-                <a:latin typeface="Batang" panose="02030600000101010101" pitchFamily="18" charset="-127"/>
-                <a:ea typeface="Batang" panose="02030600000101010101" pitchFamily="18" charset="-127"/>
-                <a:cs typeface="+mj-cs"/>
-              </a:defRPr>
-            </a:lvl1pPr>
-          </a:lstStyle>
-          <a:p>
-            <a:pPr algn="l"/>
-            <a:r>
-              <a:rPr lang="en-US" altLang="ko-KR" sz="2800" cap="none" dirty="0">
-                <a:solidFill>
-                  <a:schemeClr val="bg2">
-                    <a:lumMod val="25000"/>
-                  </a:schemeClr>
-                </a:solidFill>
-                <a:latin typeface="D2Coding" panose="020B0609020101020101" pitchFamily="49" charset="-127"/>
-                <a:ea typeface="D2Coding" panose="020B0609020101020101" pitchFamily="49" charset="-127"/>
-                <a:cs typeface="Segoe UI Light" panose="020B0502040204020203" pitchFamily="34" charset="0"/>
-              </a:rPr>
-              <a:t>Timeseries 3D tensor sequence data for RNN</a:t>
-            </a:r>
-            <a:endParaRPr lang="ko-KR" altLang="en-US" sz="2800" cap="none" dirty="0">
-              <a:solidFill>
-                <a:schemeClr val="bg2">
-                  <a:lumMod val="25000"/>
-                </a:schemeClr>
-              </a:solidFill>
-              <a:latin typeface="D2Coding" panose="020B0609020101020101" pitchFamily="49" charset="-127"/>
-              <a:ea typeface="D2Coding" panose="020B0609020101020101" pitchFamily="49" charset="-127"/>
-              <a:cs typeface="Segoe UI Light" panose="020B0502040204020203" pitchFamily="34" charset="0"/>
-            </a:endParaRPr>
-          </a:p>
-        </p:txBody>
-      </p:sp>
-      <p:pic>
-        <p:nvPicPr>
-          <p:cNvPr id="2054" name="Picture 6">
-            <a:extLst>
-              <a:ext uri="{FF2B5EF4-FFF2-40B4-BE49-F238E27FC236}">
-                <a16:creationId xmlns:a16="http://schemas.microsoft.com/office/drawing/2014/main" id="{D9A48F1E-7C27-0D20-E424-5AF452ABA294}"/>
-              </a:ext>
-            </a:extLst>
-          </p:cNvPr>
-          <p:cNvPicPr>
-            <a:picLocks noChangeAspect="1" noChangeArrowheads="1"/>
-          </p:cNvPicPr>
-          <p:nvPr/>
-        </p:nvPicPr>
-        <p:blipFill>
-          <a:blip r:embed="rId2">
-            <a:extLst>
-              <a:ext uri="{28A0092B-C50C-407E-A947-70E740481C1C}">
-                <a14:useLocalDpi xmlns:a14="http://schemas.microsoft.com/office/drawing/2010/main" val="0"/>
-              </a:ext>
-            </a:extLst>
-          </a:blip>
-          <a:srcRect/>
-          <a:stretch>
-            <a:fillRect/>
-          </a:stretch>
-        </p:blipFill>
-        <p:spPr bwMode="auto">
-          <a:xfrm>
-            <a:off x="2755973" y="2153920"/>
-            <a:ext cx="6524625" cy="2447925"/>
-          </a:xfrm>
-          <a:prstGeom prst="rect">
-            <a:avLst/>
-          </a:prstGeom>
-          <a:noFill/>
-          <a:extLst>
-            <a:ext uri="{909E8E84-426E-40DD-AFC4-6F175D3DCCD1}">
-              <a14:hiddenFill xmlns:a14="http://schemas.microsoft.com/office/drawing/2010/main">
-                <a:solidFill>
-                  <a:srgbClr val="FFFFFF"/>
-                </a:solidFill>
-              </a14:hiddenFill>
-            </a:ext>
-          </a:extLst>
-        </p:spPr>
-      </p:pic>
-      <p:sp>
-        <p:nvSpPr>
-          <p:cNvPr id="4" name="TextBox 3">
-            <a:extLst>
-              <a:ext uri="{FF2B5EF4-FFF2-40B4-BE49-F238E27FC236}">
-                <a16:creationId xmlns:a16="http://schemas.microsoft.com/office/drawing/2014/main" id="{505ABABD-C9CE-3915-ED95-7D93441E3520}"/>
-              </a:ext>
-            </a:extLst>
-          </p:cNvPr>
-          <p:cNvSpPr txBox="1"/>
-          <p:nvPr/>
-        </p:nvSpPr>
-        <p:spPr>
-          <a:xfrm>
-            <a:off x="9434874" y="3505496"/>
-            <a:ext cx="2233204" cy="830997"/>
-          </a:xfrm>
-          <a:prstGeom prst="rect">
-            <a:avLst/>
-          </a:prstGeom>
-          <a:noFill/>
-        </p:spPr>
-        <p:txBody>
-          <a:bodyPr wrap="square">
-            <a:spAutoFit/>
-          </a:bodyPr>
-          <a:lstStyle/>
-          <a:p>
-            <a:r>
-              <a:rPr lang="en-US" altLang="ko-KR" sz="1600" dirty="0">
-                <a:solidFill>
-                  <a:schemeClr val="accent5"/>
-                </a:solidFill>
-                <a:latin typeface="D2Coding" panose="020B0609020101020101" pitchFamily="49" charset="-127"/>
-                <a:ea typeface="D2Coding" panose="020B0609020101020101" pitchFamily="49" charset="-127"/>
-              </a:rPr>
-              <a:t>Samples/Batch size </a:t>
-            </a:r>
-            <a:r>
-              <a:rPr lang="ko-KR" altLang="en-US" sz="1600" dirty="0">
-                <a:solidFill>
-                  <a:schemeClr val="accent5"/>
-                </a:solidFill>
-                <a:latin typeface="D2Coding" panose="020B0609020101020101" pitchFamily="49" charset="-127"/>
-                <a:ea typeface="D2Coding" panose="020B0609020101020101" pitchFamily="49" charset="-127"/>
-              </a:rPr>
-              <a:t>만큼 딥러닝 모델로 입력데이터 투입</a:t>
-            </a:r>
-            <a:endParaRPr lang="en-US" altLang="ko-KR" sz="1600" dirty="0">
-              <a:solidFill>
-                <a:schemeClr val="accent5"/>
-              </a:solidFill>
-              <a:latin typeface="D2Coding" panose="020B0609020101020101" pitchFamily="49" charset="-127"/>
-              <a:ea typeface="D2Coding" panose="020B0609020101020101" pitchFamily="49" charset="-127"/>
-            </a:endParaRPr>
-          </a:p>
-        </p:txBody>
-      </p:sp>
-      <p:sp>
-        <p:nvSpPr>
-          <p:cNvPr id="5" name="TextBox 4">
-            <a:extLst>
-              <a:ext uri="{FF2B5EF4-FFF2-40B4-BE49-F238E27FC236}">
-                <a16:creationId xmlns:a16="http://schemas.microsoft.com/office/drawing/2014/main" id="{A3F439E8-6C21-7DE4-B0A6-4577DACBE42D}"/>
-              </a:ext>
-            </a:extLst>
-          </p:cNvPr>
-          <p:cNvSpPr txBox="1"/>
-          <p:nvPr/>
-        </p:nvSpPr>
-        <p:spPr>
-          <a:xfrm>
-            <a:off x="4670410" y="4688522"/>
-            <a:ext cx="3914790" cy="461665"/>
-          </a:xfrm>
-          <a:prstGeom prst="rect">
-            <a:avLst/>
-          </a:prstGeom>
-          <a:noFill/>
-        </p:spPr>
-        <p:txBody>
-          <a:bodyPr wrap="square">
-            <a:spAutoFit/>
-          </a:bodyPr>
-          <a:lstStyle/>
-          <a:p>
-            <a:r>
-              <a:rPr lang="en-US" altLang="ko-KR" sz="2400" dirty="0">
-                <a:solidFill>
-                  <a:schemeClr val="accent5"/>
-                </a:solidFill>
-                <a:latin typeface="D2Coding" panose="020B0609020101020101" pitchFamily="49" charset="-127"/>
-                <a:ea typeface="D2Coding" panose="020B0609020101020101" pitchFamily="49" charset="-127"/>
-              </a:rPr>
-              <a:t>Sliding window length</a:t>
-            </a:r>
-            <a:endParaRPr lang="ko-KR" altLang="en-US" sz="2400" dirty="0">
-              <a:solidFill>
-                <a:schemeClr val="accent5"/>
-              </a:solidFill>
-              <a:latin typeface="D2Coding" panose="020B0609020101020101" pitchFamily="49" charset="-127"/>
-              <a:ea typeface="D2Coding" panose="020B0609020101020101" pitchFamily="49" charset="-127"/>
-            </a:endParaRPr>
-          </a:p>
-        </p:txBody>
-      </p:sp>
-      <p:sp>
-        <p:nvSpPr>
-          <p:cNvPr id="6" name="TextBox 5">
-            <a:extLst>
-              <a:ext uri="{FF2B5EF4-FFF2-40B4-BE49-F238E27FC236}">
-                <a16:creationId xmlns:a16="http://schemas.microsoft.com/office/drawing/2014/main" id="{40C5270D-8C55-359A-1F8C-42140504639B}"/>
-              </a:ext>
-            </a:extLst>
-          </p:cNvPr>
-          <p:cNvSpPr txBox="1"/>
-          <p:nvPr/>
-        </p:nvSpPr>
-        <p:spPr>
-          <a:xfrm>
-            <a:off x="367340" y="2845097"/>
-            <a:ext cx="2533902" cy="461665"/>
-          </a:xfrm>
-          <a:prstGeom prst="rect">
-            <a:avLst/>
-          </a:prstGeom>
-          <a:noFill/>
-        </p:spPr>
-        <p:txBody>
-          <a:bodyPr wrap="square">
-            <a:spAutoFit/>
-          </a:bodyPr>
-          <a:lstStyle/>
-          <a:p>
-            <a:r>
-              <a:rPr lang="en-US" altLang="ko-KR" sz="2400" dirty="0">
-                <a:solidFill>
-                  <a:schemeClr val="accent5"/>
-                </a:solidFill>
-                <a:latin typeface="D2Coding" panose="020B0609020101020101" pitchFamily="49" charset="-127"/>
-                <a:ea typeface="D2Coding" panose="020B0609020101020101" pitchFamily="49" charset="-127"/>
-              </a:rPr>
-              <a:t>temps, winds,…</a:t>
-            </a:r>
-            <a:endParaRPr lang="ko-KR" altLang="en-US" sz="2400" dirty="0">
-              <a:solidFill>
-                <a:schemeClr val="accent5"/>
-              </a:solidFill>
-              <a:latin typeface="D2Coding" panose="020B0609020101020101" pitchFamily="49" charset="-127"/>
-              <a:ea typeface="D2Coding" panose="020B0609020101020101" pitchFamily="49" charset="-127"/>
-            </a:endParaRPr>
-          </a:p>
-        </p:txBody>
-      </p:sp>
-      <p:sp>
-        <p:nvSpPr>
-          <p:cNvPr id="9" name="TextBox 8">
-            <a:extLst>
-              <a:ext uri="{FF2B5EF4-FFF2-40B4-BE49-F238E27FC236}">
-                <a16:creationId xmlns:a16="http://schemas.microsoft.com/office/drawing/2014/main" id="{65059060-BC1A-DCA4-C465-6D4315B5193C}"/>
-              </a:ext>
-            </a:extLst>
-          </p:cNvPr>
-          <p:cNvSpPr txBox="1"/>
-          <p:nvPr/>
-        </p:nvSpPr>
-        <p:spPr>
-          <a:xfrm>
-            <a:off x="2739138" y="5293022"/>
-            <a:ext cx="6096000" cy="500137"/>
-          </a:xfrm>
-          <a:prstGeom prst="rect">
-            <a:avLst/>
-          </a:prstGeom>
-          <a:noFill/>
-        </p:spPr>
-        <p:txBody>
-          <a:bodyPr wrap="square">
-            <a:spAutoFit/>
-          </a:bodyPr>
-          <a:lstStyle/>
-          <a:p>
-            <a:pPr algn="l">
-              <a:spcAft>
-                <a:spcPts val="300"/>
-              </a:spcAft>
-              <a:buNone/>
-            </a:pPr>
-            <a:r>
-              <a:rPr lang="en-US" altLang="ko-KR" sz="1200" b="0" i="0" dirty="0">
-                <a:solidFill>
-                  <a:srgbClr val="C99323"/>
-                </a:solidFill>
-                <a:effectLst/>
-                <a:latin typeface="Lora" pitchFamily="2" charset="0"/>
-              </a:rPr>
-              <a:t>Chapter 2</a:t>
-            </a:r>
-          </a:p>
-          <a:p>
-            <a:pPr algn="l">
-              <a:buNone/>
-            </a:pPr>
-            <a:r>
-              <a:rPr lang="en-US" altLang="ko-KR" sz="1200" b="1" i="0" dirty="0">
-                <a:solidFill>
-                  <a:srgbClr val="000000"/>
-                </a:solidFill>
-                <a:effectLst/>
-                <a:latin typeface="Lora" pitchFamily="2" charset="0"/>
-              </a:rPr>
-              <a:t>The mathematical building blocks of neural networks</a:t>
-            </a:r>
-          </a:p>
-        </p:txBody>
-      </p:sp>
-      <p:sp>
-        <p:nvSpPr>
-          <p:cNvPr id="10" name="슬라이드 번호 개체 틀 3">
-            <a:extLst>
-              <a:ext uri="{FF2B5EF4-FFF2-40B4-BE49-F238E27FC236}">
-                <a16:creationId xmlns:a16="http://schemas.microsoft.com/office/drawing/2014/main" id="{873E10A1-07D2-6ED6-E0CE-F3ACA235E904}"/>
-              </a:ext>
-            </a:extLst>
-          </p:cNvPr>
-          <p:cNvSpPr>
-            <a:spLocks noGrp="1"/>
-          </p:cNvSpPr>
-          <p:nvPr>
-            <p:ph type="sldNum" sz="quarter" idx="12"/>
-          </p:nvPr>
-        </p:nvSpPr>
-        <p:spPr>
-          <a:xfrm>
-            <a:off x="11162487" y="299420"/>
-            <a:ext cx="753545" cy="365125"/>
-          </a:xfrm>
-        </p:spPr>
-        <p:txBody>
-          <a:bodyPr/>
-          <a:lstStyle/>
-          <a:p>
-            <a:fld id="{D57F1E4F-1CFF-5643-939E-217C01CDF565}" type="slidenum">
-              <a:rPr lang="en-US" sz="1400" b="1" smtClean="0">
-                <a:latin typeface="Times New Roman" panose="02020603050405020304" pitchFamily="18" charset="0"/>
-                <a:ea typeface="Verdana" panose="020B0604030504040204" pitchFamily="34" charset="0"/>
-                <a:cs typeface="Times New Roman" panose="02020603050405020304" pitchFamily="18" charset="0"/>
-              </a:rPr>
-              <a:pPr/>
-              <a:t>9</a:t>
-            </a:fld>
-            <a:endParaRPr lang="en-US" sz="1400" b="1" dirty="0">
-              <a:latin typeface="Times New Roman" panose="02020603050405020304" pitchFamily="18" charset="0"/>
-              <a:ea typeface="Verdana" panose="020B0604030504040204" pitchFamily="34" charset="0"/>
-              <a:cs typeface="Times New Roman" panose="02020603050405020304" pitchFamily="18" charset="0"/>
-            </a:endParaRPr>
-          </a:p>
-        </p:txBody>
-      </p:sp>
-    </p:spTree>
-    <p:extLst>
-      <p:ext uri="{BB962C8B-B14F-4D97-AF65-F5344CB8AC3E}">
-        <p14:creationId xmlns:p14="http://schemas.microsoft.com/office/powerpoint/2010/main" val="3134099583"/>
       </p:ext>
     </p:extLst>
   </p:cSld>

--- a/Chapter 13 Timeseries forecasting.pptx
+++ b/Chapter 13 Timeseries forecasting.pptx
@@ -5,10 +5,10 @@
     <p:sldMasterId id="2147483660" r:id="rId1"/>
   </p:sldMasterIdLst>
   <p:notesMasterIdLst>
-    <p:notesMasterId r:id="rId47"/>
+    <p:notesMasterId r:id="rId48"/>
   </p:notesMasterIdLst>
   <p:handoutMasterIdLst>
-    <p:handoutMasterId r:id="rId48"/>
+    <p:handoutMasterId r:id="rId49"/>
   </p:handoutMasterIdLst>
   <p:sldIdLst>
     <p:sldId id="256" r:id="rId2"/>
@@ -20,42 +20,43 @@
     <p:sldId id="1144" r:id="rId8"/>
     <p:sldId id="1142" r:id="rId9"/>
     <p:sldId id="1143" r:id="rId10"/>
-    <p:sldId id="1157" r:id="rId11"/>
-    <p:sldId id="1146" r:id="rId12"/>
-    <p:sldId id="1148" r:id="rId13"/>
-    <p:sldId id="1136" r:id="rId14"/>
-    <p:sldId id="1145" r:id="rId15"/>
-    <p:sldId id="1158" r:id="rId16"/>
-    <p:sldId id="1150" r:id="rId17"/>
-    <p:sldId id="1152" r:id="rId18"/>
-    <p:sldId id="1149" r:id="rId19"/>
-    <p:sldId id="1153" r:id="rId20"/>
-    <p:sldId id="1151" r:id="rId21"/>
-    <p:sldId id="1154" r:id="rId22"/>
-    <p:sldId id="1159" r:id="rId23"/>
-    <p:sldId id="1139" r:id="rId24"/>
-    <p:sldId id="1161" r:id="rId25"/>
-    <p:sldId id="1133" r:id="rId26"/>
-    <p:sldId id="1163" r:id="rId27"/>
-    <p:sldId id="1164" r:id="rId28"/>
-    <p:sldId id="1165" r:id="rId29"/>
-    <p:sldId id="1166" r:id="rId30"/>
-    <p:sldId id="1121" r:id="rId31"/>
-    <p:sldId id="1168" r:id="rId32"/>
-    <p:sldId id="1135" r:id="rId33"/>
-    <p:sldId id="1167" r:id="rId34"/>
-    <p:sldId id="1160" r:id="rId35"/>
-    <p:sldId id="1132" r:id="rId36"/>
-    <p:sldId id="1125" r:id="rId37"/>
-    <p:sldId id="1127" r:id="rId38"/>
-    <p:sldId id="1128" r:id="rId39"/>
-    <p:sldId id="1123" r:id="rId40"/>
-    <p:sldId id="1130" r:id="rId41"/>
-    <p:sldId id="1131" r:id="rId42"/>
-    <p:sldId id="1137" r:id="rId43"/>
-    <p:sldId id="1138" r:id="rId44"/>
-    <p:sldId id="1129" r:id="rId45"/>
-    <p:sldId id="1162" r:id="rId46"/>
+    <p:sldId id="1169" r:id="rId11"/>
+    <p:sldId id="1157" r:id="rId12"/>
+    <p:sldId id="1146" r:id="rId13"/>
+    <p:sldId id="1148" r:id="rId14"/>
+    <p:sldId id="1136" r:id="rId15"/>
+    <p:sldId id="1145" r:id="rId16"/>
+    <p:sldId id="1158" r:id="rId17"/>
+    <p:sldId id="1150" r:id="rId18"/>
+    <p:sldId id="1152" r:id="rId19"/>
+    <p:sldId id="1149" r:id="rId20"/>
+    <p:sldId id="1153" r:id="rId21"/>
+    <p:sldId id="1151" r:id="rId22"/>
+    <p:sldId id="1154" r:id="rId23"/>
+    <p:sldId id="1159" r:id="rId24"/>
+    <p:sldId id="1139" r:id="rId25"/>
+    <p:sldId id="1161" r:id="rId26"/>
+    <p:sldId id="1133" r:id="rId27"/>
+    <p:sldId id="1163" r:id="rId28"/>
+    <p:sldId id="1164" r:id="rId29"/>
+    <p:sldId id="1165" r:id="rId30"/>
+    <p:sldId id="1166" r:id="rId31"/>
+    <p:sldId id="1121" r:id="rId32"/>
+    <p:sldId id="1168" r:id="rId33"/>
+    <p:sldId id="1135" r:id="rId34"/>
+    <p:sldId id="1167" r:id="rId35"/>
+    <p:sldId id="1160" r:id="rId36"/>
+    <p:sldId id="1132" r:id="rId37"/>
+    <p:sldId id="1125" r:id="rId38"/>
+    <p:sldId id="1127" r:id="rId39"/>
+    <p:sldId id="1128" r:id="rId40"/>
+    <p:sldId id="1123" r:id="rId41"/>
+    <p:sldId id="1130" r:id="rId42"/>
+    <p:sldId id="1131" r:id="rId43"/>
+    <p:sldId id="1137" r:id="rId44"/>
+    <p:sldId id="1138" r:id="rId45"/>
+    <p:sldId id="1129" r:id="rId46"/>
+    <p:sldId id="1162" r:id="rId47"/>
   </p:sldIdLst>
   <p:sldSz cx="12192000" cy="6858000"/>
   <p:notesSz cx="6858000" cy="9144000"/>
@@ -172,6 +173,7 @@
             <p14:sldId id="1144"/>
             <p14:sldId id="1142"/>
             <p14:sldId id="1143"/>
+            <p14:sldId id="1169"/>
             <p14:sldId id="1157"/>
             <p14:sldId id="1146"/>
             <p14:sldId id="1148"/>
@@ -1884,7 +1886,7 @@
             <a:fld id="{DF61EA0F-A667-4B49-8422-0062BC55E249}" type="slidenum">
               <a:rPr lang="en-US" altLang="ko-KR" noProof="0" smtClean="0"/>
               <a:pPr/>
-              <a:t>37</a:t>
+              <a:t>38</a:t>
             </a:fld>
             <a:endParaRPr lang="ko-KR" altLang="en-US" noProof="0"/>
           </a:p>
@@ -4185,6 +4187,209 @@
         <p:cNvPr id="1" name="">
           <a:extLst>
             <a:ext uri="{FF2B5EF4-FFF2-40B4-BE49-F238E27FC236}">
+              <a16:creationId xmlns:a16="http://schemas.microsoft.com/office/drawing/2014/main" id="{E824F5CD-B717-CC78-6959-DE013BCE3D91}"/>
+            </a:ext>
+          </a:extLst>
+        </p:cNvPr>
+        <p:cNvGrpSpPr/>
+        <p:nvPr/>
+      </p:nvGrpSpPr>
+      <p:grpSpPr>
+        <a:xfrm>
+          <a:off x="0" y="0"/>
+          <a:ext cx="0" cy="0"/>
+          <a:chOff x="0" y="0"/>
+          <a:chExt cx="0" cy="0"/>
+        </a:xfrm>
+      </p:grpSpPr>
+      <p:sp>
+        <p:nvSpPr>
+          <p:cNvPr id="3" name="제목 1">
+            <a:extLst>
+              <a:ext uri="{FF2B5EF4-FFF2-40B4-BE49-F238E27FC236}">
+                <a16:creationId xmlns:a16="http://schemas.microsoft.com/office/drawing/2014/main" id="{A0F052C8-C5C5-10E0-D8C0-25B6FEB910D1}"/>
+              </a:ext>
+            </a:extLst>
+          </p:cNvPr>
+          <p:cNvSpPr txBox="1">
+            <a:spLocks/>
+          </p:cNvSpPr>
+          <p:nvPr/>
+        </p:nvSpPr>
+        <p:spPr>
+          <a:xfrm>
+            <a:off x="475645" y="481983"/>
+            <a:ext cx="10353762" cy="766439"/>
+          </a:xfrm>
+          <a:prstGeom prst="rect">
+            <a:avLst/>
+          </a:prstGeom>
+        </p:spPr>
+        <p:txBody>
+          <a:bodyPr vert="horz" lIns="91440" tIns="45720" rIns="91440" bIns="45720" rtlCol="0" anchor="ctr">
+            <a:normAutofit/>
+          </a:bodyPr>
+          <a:lstStyle>
+            <a:lvl1pPr algn="ctr" defTabSz="914400" rtl="0" eaLnBrk="1" latinLnBrk="1" hangingPunct="1">
+              <a:lnSpc>
+                <a:spcPct val="90000"/>
+              </a:lnSpc>
+              <a:spcBef>
+                <a:spcPct val="0"/>
+              </a:spcBef>
+              <a:buNone/>
+              <a:defRPr sz="3200" kern="1200" cap="all" baseline="0">
+                <a:solidFill>
+                  <a:schemeClr val="tx1"/>
+                </a:solidFill>
+                <a:effectLst/>
+                <a:latin typeface="Batang" panose="02030600000101010101" pitchFamily="18" charset="-127"/>
+                <a:ea typeface="Batang" panose="02030600000101010101" pitchFamily="18" charset="-127"/>
+                <a:cs typeface="+mj-cs"/>
+              </a:defRPr>
+            </a:lvl1pPr>
+          </a:lstStyle>
+          <a:p>
+            <a:pPr algn="l"/>
+            <a:r>
+              <a:rPr lang="en-US" altLang="ko-KR" sz="2800" cap="none" dirty="0">
+                <a:solidFill>
+                  <a:schemeClr val="bg2">
+                    <a:lumMod val="25000"/>
+                  </a:schemeClr>
+                </a:solidFill>
+                <a:latin typeface="D2Coding" panose="020B0609020101020101" pitchFamily="49" charset="-127"/>
+                <a:ea typeface="D2Coding" panose="020B0609020101020101" pitchFamily="49" charset="-127"/>
+                <a:cs typeface="Segoe UI Light" panose="020B0502040204020203" pitchFamily="34" charset="0"/>
+              </a:rPr>
+              <a:t>4.  sliding window with</a:t>
+            </a:r>
+            <a:r>
+              <a:rPr lang="ko-KR" altLang="en-US" sz="2800" cap="none" dirty="0">
+                <a:solidFill>
+                  <a:schemeClr val="bg2">
+                    <a:lumMod val="25000"/>
+                  </a:schemeClr>
+                </a:solidFill>
+                <a:latin typeface="D2Coding" panose="020B0609020101020101" pitchFamily="49" charset="-127"/>
+                <a:ea typeface="D2Coding" panose="020B0609020101020101" pitchFamily="49" charset="-127"/>
+                <a:cs typeface="Segoe UI Light" panose="020B0502040204020203" pitchFamily="34" charset="0"/>
+              </a:rPr>
+              <a:t> </a:t>
+            </a:r>
+            <a:r>
+              <a:rPr lang="en-US" altLang="ko-KR" sz="2800" cap="none" dirty="0">
+                <a:solidFill>
+                  <a:schemeClr val="bg2">
+                    <a:lumMod val="25000"/>
+                  </a:schemeClr>
+                </a:solidFill>
+                <a:latin typeface="D2Coding" panose="020B0609020101020101" pitchFamily="49" charset="-127"/>
+                <a:ea typeface="D2Coding" panose="020B0609020101020101" pitchFamily="49" charset="-127"/>
+                <a:cs typeface="Segoe UI Light" panose="020B0502040204020203" pitchFamily="34" charset="0"/>
+              </a:rPr>
+              <a:t>multiple-step</a:t>
+            </a:r>
+            <a:endParaRPr lang="ko-KR" altLang="en-US" sz="2800" cap="none" dirty="0">
+              <a:solidFill>
+                <a:schemeClr val="bg2">
+                  <a:lumMod val="25000"/>
+                </a:schemeClr>
+              </a:solidFill>
+              <a:latin typeface="D2Coding" panose="020B0609020101020101" pitchFamily="49" charset="-127"/>
+              <a:ea typeface="D2Coding" panose="020B0609020101020101" pitchFamily="49" charset="-127"/>
+              <a:cs typeface="Segoe UI Light" panose="020B0502040204020203" pitchFamily="34" charset="0"/>
+            </a:endParaRPr>
+          </a:p>
+        </p:txBody>
+      </p:sp>
+      <p:pic>
+        <p:nvPicPr>
+          <p:cNvPr id="9" name="그래픽 8" descr="수영">
+            <a:extLst>
+              <a:ext uri="{FF2B5EF4-FFF2-40B4-BE49-F238E27FC236}">
+                <a16:creationId xmlns:a16="http://schemas.microsoft.com/office/drawing/2014/main" id="{96BB7607-3869-8E9E-C221-DDC44FEF1BEA}"/>
+              </a:ext>
+            </a:extLst>
+          </p:cNvPr>
+          <p:cNvPicPr>
+            <a:picLocks noChangeAspect="1"/>
+          </p:cNvPicPr>
+          <p:nvPr/>
+        </p:nvPicPr>
+        <p:blipFill>
+          <a:blip r:embed="rId2">
+            <a:extLst>
+              <a:ext uri="{96DAC541-7B7A-43D3-8B79-37D633B846F1}">
+                <asvg:svgBlip xmlns:asvg="http://schemas.microsoft.com/office/drawing/2016/SVG/main" r:embed="rId3"/>
+              </a:ext>
+            </a:extLst>
+          </a:blip>
+          <a:stretch>
+            <a:fillRect/>
+          </a:stretch>
+        </p:blipFill>
+        <p:spPr>
+          <a:xfrm>
+            <a:off x="10637520" y="334022"/>
+            <a:ext cx="914400" cy="914400"/>
+          </a:xfrm>
+          <a:prstGeom prst="rect">
+            <a:avLst/>
+          </a:prstGeom>
+        </p:spPr>
+      </p:pic>
+      <p:pic>
+        <p:nvPicPr>
+          <p:cNvPr id="6" name="그림 5">
+            <a:extLst>
+              <a:ext uri="{FF2B5EF4-FFF2-40B4-BE49-F238E27FC236}">
+                <a16:creationId xmlns:a16="http://schemas.microsoft.com/office/drawing/2014/main" id="{DAD75DD9-E846-2CE2-D016-A32EEDC8FE61}"/>
+              </a:ext>
+            </a:extLst>
+          </p:cNvPr>
+          <p:cNvPicPr>
+            <a:picLocks noChangeAspect="1"/>
+          </p:cNvPicPr>
+          <p:nvPr/>
+        </p:nvPicPr>
+        <p:blipFill>
+          <a:blip r:embed="rId4"/>
+          <a:stretch>
+            <a:fillRect/>
+          </a:stretch>
+        </p:blipFill>
+        <p:spPr>
+          <a:xfrm>
+            <a:off x="1916184" y="1563806"/>
+            <a:ext cx="5932415" cy="4813092"/>
+          </a:xfrm>
+          <a:prstGeom prst="rect">
+            <a:avLst/>
+          </a:prstGeom>
+        </p:spPr>
+      </p:pic>
+    </p:spTree>
+    <p:extLst>
+      <p:ext uri="{BB962C8B-B14F-4D97-AF65-F5344CB8AC3E}">
+        <p14:creationId xmlns:p14="http://schemas.microsoft.com/office/powerpoint/2010/main" val="4272811311"/>
+      </p:ext>
+    </p:extLst>
+  </p:cSld>
+  <p:clrMapOvr>
+    <a:masterClrMapping/>
+  </p:clrMapOvr>
+</p:sld>
+</file>
+
+<file path=ppt/slides/slide11.xml><?xml version="1.0" encoding="utf-8"?>
+<p:sld xmlns:a="http://schemas.openxmlformats.org/drawingml/2006/main" xmlns:r="http://schemas.openxmlformats.org/officeDocument/2006/relationships" xmlns:p="http://schemas.openxmlformats.org/presentationml/2006/main">
+  <p:cSld>
+    <p:spTree>
+      <p:nvGrpSpPr>
+        <p:cNvPr id="1" name="">
+          <a:extLst>
+            <a:ext uri="{FF2B5EF4-FFF2-40B4-BE49-F238E27FC236}">
               <a16:creationId xmlns:a16="http://schemas.microsoft.com/office/drawing/2014/main" id="{0CEC885E-842A-7400-1415-2F309E775F28}"/>
             </a:ext>
           </a:extLst>
@@ -4283,7 +4488,7 @@
             <a:fld id="{D57F1E4F-1CFF-5643-939E-217C01CDF565}" type="slidenum">
               <a:rPr lang="en-US" smtClean="0"/>
               <a:pPr/>
-              <a:t>10</a:t>
+              <a:t>11</a:t>
             </a:fld>
             <a:endParaRPr lang="en-US" dirty="0"/>
           </a:p>
@@ -4520,7 +4725,7 @@
 </p:sld>
 </file>
 
-<file path=ppt/slides/slide11.xml><?xml version="1.0" encoding="utf-8"?>
+<file path=ppt/slides/slide12.xml><?xml version="1.0" encoding="utf-8"?>
 <p:sld xmlns:a="http://schemas.openxmlformats.org/drawingml/2006/main" xmlns:r="http://schemas.openxmlformats.org/officeDocument/2006/relationships" xmlns:p="http://schemas.openxmlformats.org/presentationml/2006/main">
   <p:cSld>
     <p:spTree>
@@ -4914,7 +5119,7 @@
                 <a:cs typeface="Times New Roman" panose="02020603050405020304" pitchFamily="18" charset="0"/>
               </a:rPr>
               <a:pPr/>
-              <a:t>11</a:t>
+              <a:t>12</a:t>
             </a:fld>
             <a:endParaRPr lang="en-US" sz="1400" b="1" dirty="0">
               <a:latin typeface="Times New Roman" panose="02020603050405020304" pitchFamily="18" charset="0"/>
@@ -4937,7 +5142,7 @@
 </p:sld>
 </file>
 
-<file path=ppt/slides/slide12.xml><?xml version="1.0" encoding="utf-8"?>
+<file path=ppt/slides/slide13.xml><?xml version="1.0" encoding="utf-8"?>
 <p:sld xmlns:a="http://schemas.openxmlformats.org/drawingml/2006/main" xmlns:r="http://schemas.openxmlformats.org/officeDocument/2006/relationships" xmlns:p="http://schemas.openxmlformats.org/presentationml/2006/main">
   <p:cSld>
     <p:spTree>
@@ -5650,7 +5855,7 @@
                 <a:cs typeface="Times New Roman" panose="02020603050405020304" pitchFamily="18" charset="0"/>
               </a:rPr>
               <a:pPr/>
-              <a:t>12</a:t>
+              <a:t>13</a:t>
             </a:fld>
             <a:endParaRPr lang="en-US" sz="1400" b="1" dirty="0">
               <a:latin typeface="Times New Roman" panose="02020603050405020304" pitchFamily="18" charset="0"/>
@@ -5673,7 +5878,7 @@
 </p:sld>
 </file>
 
-<file path=ppt/slides/slide13.xml><?xml version="1.0" encoding="utf-8"?>
+<file path=ppt/slides/slide14.xml><?xml version="1.0" encoding="utf-8"?>
 <p:sld xmlns:a="http://schemas.openxmlformats.org/drawingml/2006/main" xmlns:r="http://schemas.openxmlformats.org/officeDocument/2006/relationships" xmlns:p="http://schemas.openxmlformats.org/presentationml/2006/main">
   <p:cSld>
     <p:spTree>
@@ -5725,7 +5930,7 @@
             <a:fld id="{D57F1E4F-1CFF-5643-939E-217C01CDF565}" type="slidenum">
               <a:rPr lang="en-US" smtClean="0"/>
               <a:pPr/>
-              <a:t>13</a:t>
+              <a:t>14</a:t>
             </a:fld>
             <a:endParaRPr lang="en-US" dirty="0"/>
           </a:p>
@@ -6118,7 +6323,7 @@
                 <a:cs typeface="Times New Roman" panose="02020603050405020304" pitchFamily="18" charset="0"/>
               </a:rPr>
               <a:pPr/>
-              <a:t>13</a:t>
+              <a:t>14</a:t>
             </a:fld>
             <a:endParaRPr lang="en-US" sz="1400" b="1" dirty="0">
               <a:latin typeface="Times New Roman" panose="02020603050405020304" pitchFamily="18" charset="0"/>
@@ -6141,7 +6346,7 @@
 </p:sld>
 </file>
 
-<file path=ppt/slides/slide14.xml><?xml version="1.0" encoding="utf-8"?>
+<file path=ppt/slides/slide15.xml><?xml version="1.0" encoding="utf-8"?>
 <p:sld xmlns:a="http://schemas.openxmlformats.org/drawingml/2006/main" xmlns:r="http://schemas.openxmlformats.org/officeDocument/2006/relationships" xmlns:p="http://schemas.openxmlformats.org/presentationml/2006/main">
   <p:cSld>
     <p:spTree>
@@ -6394,7 +6599,7 @@
                 <a:cs typeface="Times New Roman" panose="02020603050405020304" pitchFamily="18" charset="0"/>
               </a:rPr>
               <a:pPr/>
-              <a:t>14</a:t>
+              <a:t>15</a:t>
             </a:fld>
             <a:endParaRPr lang="en-US" sz="1400" b="1" dirty="0">
               <a:latin typeface="Times New Roman" panose="02020603050405020304" pitchFamily="18" charset="0"/>
@@ -6417,7 +6622,7 @@
 </p:sld>
 </file>
 
-<file path=ppt/slides/slide15.xml><?xml version="1.0" encoding="utf-8"?>
+<file path=ppt/slides/slide16.xml><?xml version="1.0" encoding="utf-8"?>
 <p:sld xmlns:a="http://schemas.openxmlformats.org/drawingml/2006/main" xmlns:r="http://schemas.openxmlformats.org/officeDocument/2006/relationships" xmlns:p="http://schemas.openxmlformats.org/presentationml/2006/main">
   <p:cSld>
     <p:spTree>
@@ -6523,7 +6728,7 @@
             <a:fld id="{D57F1E4F-1CFF-5643-939E-217C01CDF565}" type="slidenum">
               <a:rPr lang="en-US" smtClean="0"/>
               <a:pPr/>
-              <a:t>15</a:t>
+              <a:t>16</a:t>
             </a:fld>
             <a:endParaRPr lang="en-US" dirty="0"/>
           </a:p>
@@ -6760,7 +6965,7 @@
 </p:sld>
 </file>
 
-<file path=ppt/slides/slide16.xml><?xml version="1.0" encoding="utf-8"?>
+<file path=ppt/slides/slide17.xml><?xml version="1.0" encoding="utf-8"?>
 <p:sld xmlns:a="http://schemas.openxmlformats.org/drawingml/2006/main" xmlns:r="http://schemas.openxmlformats.org/officeDocument/2006/relationships" xmlns:p="http://schemas.openxmlformats.org/presentationml/2006/main">
   <p:cSld>
     <p:spTree>
@@ -6917,7 +7122,7 @@
                 <a:cs typeface="Times New Roman" panose="02020603050405020304" pitchFamily="18" charset="0"/>
               </a:rPr>
               <a:pPr/>
-              <a:t>16</a:t>
+              <a:t>17</a:t>
             </a:fld>
             <a:endParaRPr lang="en-US" sz="1400" b="1" dirty="0">
               <a:latin typeface="Times New Roman" panose="02020603050405020304" pitchFamily="18" charset="0"/>
@@ -8069,7 +8274,7 @@
 </p:sld>
 </file>
 
-<file path=ppt/slides/slide17.xml><?xml version="1.0" encoding="utf-8"?>
+<file path=ppt/slides/slide18.xml><?xml version="1.0" encoding="utf-8"?>
 <p:sld xmlns:a="http://schemas.openxmlformats.org/drawingml/2006/main" xmlns:r="http://schemas.openxmlformats.org/officeDocument/2006/relationships" xmlns:p="http://schemas.openxmlformats.org/presentationml/2006/main">
   <p:cSld>
     <p:spTree>
@@ -8226,7 +8431,7 @@
                 <a:cs typeface="Times New Roman" panose="02020603050405020304" pitchFamily="18" charset="0"/>
               </a:rPr>
               <a:pPr/>
-              <a:t>17</a:t>
+              <a:t>18</a:t>
             </a:fld>
             <a:endParaRPr lang="en-US" sz="1400" b="1" dirty="0">
               <a:latin typeface="Times New Roman" panose="02020603050405020304" pitchFamily="18" charset="0"/>
@@ -9669,7 +9874,7 @@
 </p:sld>
 </file>
 
-<file path=ppt/slides/slide18.xml><?xml version="1.0" encoding="utf-8"?>
+<file path=ppt/slides/slide19.xml><?xml version="1.0" encoding="utf-8"?>
 <p:sld xmlns:a="http://schemas.openxmlformats.org/drawingml/2006/main" xmlns:r="http://schemas.openxmlformats.org/officeDocument/2006/relationships" xmlns:p="http://schemas.openxmlformats.org/presentationml/2006/main">
   <p:cSld>
     <p:spTree>
@@ -9803,7 +10008,7 @@
                 <a:cs typeface="Times New Roman" panose="02020603050405020304" pitchFamily="18" charset="0"/>
               </a:rPr>
               <a:pPr/>
-              <a:t>18</a:t>
+              <a:t>19</a:t>
             </a:fld>
             <a:endParaRPr lang="en-US" sz="1400" b="1" dirty="0">
               <a:latin typeface="Times New Roman" panose="02020603050405020304" pitchFamily="18" charset="0"/>
@@ -10739,1178 +10944,6 @@
     <p:extLst>
       <p:ext uri="{BB962C8B-B14F-4D97-AF65-F5344CB8AC3E}">
         <p14:creationId xmlns:p14="http://schemas.microsoft.com/office/powerpoint/2010/main" val="3276406949"/>
-      </p:ext>
-    </p:extLst>
-  </p:cSld>
-  <p:clrMapOvr>
-    <a:masterClrMapping/>
-  </p:clrMapOvr>
-</p:sld>
-</file>
-
-<file path=ppt/slides/slide19.xml><?xml version="1.0" encoding="utf-8"?>
-<p:sld xmlns:a="http://schemas.openxmlformats.org/drawingml/2006/main" xmlns:r="http://schemas.openxmlformats.org/officeDocument/2006/relationships" xmlns:p="http://schemas.openxmlformats.org/presentationml/2006/main">
-  <p:cSld>
-    <p:spTree>
-      <p:nvGrpSpPr>
-        <p:cNvPr id="1" name="">
-          <a:extLst>
-            <a:ext uri="{FF2B5EF4-FFF2-40B4-BE49-F238E27FC236}">
-              <a16:creationId xmlns:a16="http://schemas.microsoft.com/office/drawing/2014/main" id="{4736FB2C-EEEB-DB71-4DC2-C7D4D0A568B6}"/>
-            </a:ext>
-          </a:extLst>
-        </p:cNvPr>
-        <p:cNvGrpSpPr/>
-        <p:nvPr/>
-      </p:nvGrpSpPr>
-      <p:grpSpPr>
-        <a:xfrm>
-          <a:off x="0" y="0"/>
-          <a:ext cx="0" cy="0"/>
-          <a:chOff x="0" y="0"/>
-          <a:chExt cx="0" cy="0"/>
-        </a:xfrm>
-      </p:grpSpPr>
-      <p:sp>
-        <p:nvSpPr>
-          <p:cNvPr id="3" name="제목 1">
-            <a:extLst>
-              <a:ext uri="{FF2B5EF4-FFF2-40B4-BE49-F238E27FC236}">
-                <a16:creationId xmlns:a16="http://schemas.microsoft.com/office/drawing/2014/main" id="{18E24248-559C-3D0B-7953-7FA370536A9B}"/>
-              </a:ext>
-            </a:extLst>
-          </p:cNvPr>
-          <p:cNvSpPr txBox="1">
-            <a:spLocks/>
-          </p:cNvSpPr>
-          <p:nvPr/>
-        </p:nvSpPr>
-        <p:spPr>
-          <a:xfrm>
-            <a:off x="475645" y="481983"/>
-            <a:ext cx="10353762" cy="766439"/>
-          </a:xfrm>
-          <a:prstGeom prst="rect">
-            <a:avLst/>
-          </a:prstGeom>
-        </p:spPr>
-        <p:txBody>
-          <a:bodyPr vert="horz" lIns="91440" tIns="45720" rIns="91440" bIns="45720" rtlCol="0" anchor="ctr">
-            <a:normAutofit/>
-          </a:bodyPr>
-          <a:lstStyle>
-            <a:lvl1pPr algn="ctr" defTabSz="914400" rtl="0" eaLnBrk="1" latinLnBrk="1" hangingPunct="1">
-              <a:lnSpc>
-                <a:spcPct val="90000"/>
-              </a:lnSpc>
-              <a:spcBef>
-                <a:spcPct val="0"/>
-              </a:spcBef>
-              <a:buNone/>
-              <a:defRPr sz="3200" kern="1200" cap="all" baseline="0">
-                <a:solidFill>
-                  <a:schemeClr val="tx1"/>
-                </a:solidFill>
-                <a:effectLst/>
-                <a:latin typeface="Batang" panose="02030600000101010101" pitchFamily="18" charset="-127"/>
-                <a:ea typeface="Batang" panose="02030600000101010101" pitchFamily="18" charset="-127"/>
-                <a:cs typeface="+mj-cs"/>
-              </a:defRPr>
-            </a:lvl1pPr>
-          </a:lstStyle>
-          <a:p>
-            <a:pPr algn="l"/>
-            <a:r>
-              <a:rPr lang="en-US" altLang="ko-KR" sz="2800" cap="none" dirty="0">
-                <a:solidFill>
-                  <a:schemeClr val="bg2">
-                    <a:lumMod val="25000"/>
-                  </a:schemeClr>
-                </a:solidFill>
-                <a:latin typeface="D2Coding" panose="020B0609020101020101" pitchFamily="49" charset="-127"/>
-                <a:ea typeface="D2Coding" panose="020B0609020101020101" pitchFamily="49" charset="-127"/>
-                <a:cs typeface="Segoe UI Light" panose="020B0502040204020203" pitchFamily="34" charset="0"/>
-              </a:rPr>
-              <a:t>1D CNN(1D Convolutional Neural Networks)</a:t>
-            </a:r>
-            <a:endParaRPr lang="ko-KR" altLang="en-US" sz="2800" cap="none" dirty="0">
-              <a:solidFill>
-                <a:schemeClr val="bg2">
-                  <a:lumMod val="25000"/>
-                </a:schemeClr>
-              </a:solidFill>
-              <a:latin typeface="D2Coding" panose="020B0609020101020101" pitchFamily="49" charset="-127"/>
-              <a:ea typeface="D2Coding" panose="020B0609020101020101" pitchFamily="49" charset="-127"/>
-              <a:cs typeface="Segoe UI Light" panose="020B0502040204020203" pitchFamily="34" charset="0"/>
-            </a:endParaRPr>
-          </a:p>
-        </p:txBody>
-      </p:sp>
-      <p:sp>
-        <p:nvSpPr>
-          <p:cNvPr id="4" name="슬라이드 번호 개체 틀 3">
-            <a:extLst>
-              <a:ext uri="{FF2B5EF4-FFF2-40B4-BE49-F238E27FC236}">
-                <a16:creationId xmlns:a16="http://schemas.microsoft.com/office/drawing/2014/main" id="{8D80805A-22BE-081A-D40D-9248E575BFD1}"/>
-              </a:ext>
-            </a:extLst>
-          </p:cNvPr>
-          <p:cNvSpPr>
-            <a:spLocks noGrp="1"/>
-          </p:cNvSpPr>
-          <p:nvPr>
-            <p:ph type="sldNum" sz="quarter" idx="12"/>
-          </p:nvPr>
-        </p:nvSpPr>
-        <p:spPr>
-          <a:xfrm>
-            <a:off x="11162487" y="299420"/>
-            <a:ext cx="753545" cy="365125"/>
-          </a:xfrm>
-        </p:spPr>
-        <p:txBody>
-          <a:bodyPr/>
-          <a:lstStyle/>
-          <a:p>
-            <a:fld id="{D57F1E4F-1CFF-5643-939E-217C01CDF565}" type="slidenum">
-              <a:rPr lang="en-US" sz="1400" b="1" smtClean="0">
-                <a:latin typeface="Times New Roman" panose="02020603050405020304" pitchFamily="18" charset="0"/>
-                <a:ea typeface="Verdana" panose="020B0604030504040204" pitchFamily="34" charset="0"/>
-                <a:cs typeface="Times New Roman" panose="02020603050405020304" pitchFamily="18" charset="0"/>
-              </a:rPr>
-              <a:pPr/>
-              <a:t>19</a:t>
-            </a:fld>
-            <a:endParaRPr lang="en-US" sz="1400" b="1" dirty="0">
-              <a:latin typeface="Times New Roman" panose="02020603050405020304" pitchFamily="18" charset="0"/>
-              <a:ea typeface="Verdana" panose="020B0604030504040204" pitchFamily="34" charset="0"/>
-              <a:cs typeface="Times New Roman" panose="02020603050405020304" pitchFamily="18" charset="0"/>
-            </a:endParaRPr>
-          </a:p>
-        </p:txBody>
-      </p:sp>
-      <p:sp>
-        <p:nvSpPr>
-          <p:cNvPr id="8" name="TextBox 7">
-            <a:extLst>
-              <a:ext uri="{FF2B5EF4-FFF2-40B4-BE49-F238E27FC236}">
-                <a16:creationId xmlns:a16="http://schemas.microsoft.com/office/drawing/2014/main" id="{92FE83F8-36A8-6031-AC00-C082CBCB8445}"/>
-              </a:ext>
-            </a:extLst>
-          </p:cNvPr>
-          <p:cNvSpPr txBox="1"/>
-          <p:nvPr/>
-        </p:nvSpPr>
-        <p:spPr>
-          <a:xfrm>
-            <a:off x="559528" y="1196976"/>
-            <a:ext cx="11356504" cy="2090637"/>
-          </a:xfrm>
-          <a:prstGeom prst="rect">
-            <a:avLst/>
-          </a:prstGeom>
-          <a:noFill/>
-        </p:spPr>
-        <p:txBody>
-          <a:bodyPr wrap="square">
-            <a:spAutoFit/>
-          </a:bodyPr>
-          <a:lstStyle/>
-          <a:p>
-            <a:pPr marL="285750" indent="-285750">
-              <a:lnSpc>
-                <a:spcPct val="150000"/>
-              </a:lnSpc>
-              <a:buFont typeface="Wingdings" panose="05000000000000000000" pitchFamily="2" charset="2"/>
-              <a:buChar char="§"/>
-            </a:pPr>
-            <a:r>
-              <a:rPr lang="ko-KR" altLang="en-US" sz="1600" dirty="0">
-                <a:latin typeface="D2Coding" panose="020B0609020101020101" pitchFamily="49" charset="-127"/>
-                <a:ea typeface="D2Coding" panose="020B0609020101020101" pitchFamily="49" charset="-127"/>
-              </a:rPr>
-              <a:t>오디오 파형이나 텍스트처럼 </a:t>
-            </a:r>
-            <a:r>
-              <a:rPr lang="en-US" altLang="ko-KR" sz="1600" dirty="0">
-                <a:latin typeface="D2Coding" panose="020B0609020101020101" pitchFamily="49" charset="-127"/>
-                <a:ea typeface="D2Coding" panose="020B0609020101020101" pitchFamily="49" charset="-127"/>
-              </a:rPr>
-              <a:t>"</a:t>
-            </a:r>
-            <a:r>
-              <a:rPr lang="ko-KR" altLang="en-US" sz="1600" dirty="0">
-                <a:latin typeface="D2Coding" panose="020B0609020101020101" pitchFamily="49" charset="-127"/>
-                <a:ea typeface="D2Coding" panose="020B0609020101020101" pitchFamily="49" charset="-127"/>
-              </a:rPr>
-              <a:t>패턴이 어디서 나타나든 같은 의미를 가지는</a:t>
-            </a:r>
-            <a:r>
-              <a:rPr lang="en-US" altLang="ko-KR" sz="1600" dirty="0">
-                <a:latin typeface="D2Coding" panose="020B0609020101020101" pitchFamily="49" charset="-127"/>
-                <a:ea typeface="D2Coding" panose="020B0609020101020101" pitchFamily="49" charset="-127"/>
-              </a:rPr>
-              <a:t>" </a:t>
-            </a:r>
-            <a:r>
-              <a:rPr lang="ko-KR" altLang="en-US" sz="1600" dirty="0">
-                <a:latin typeface="D2Coding" panose="020B0609020101020101" pitchFamily="49" charset="-127"/>
-                <a:ea typeface="D2Coding" panose="020B0609020101020101" pitchFamily="49" charset="-127"/>
-              </a:rPr>
-              <a:t>데이터에 적합</a:t>
-            </a:r>
-            <a:endParaRPr lang="en-US" altLang="ko-KR" sz="1600" dirty="0">
-              <a:latin typeface="D2Coding" panose="020B0609020101020101" pitchFamily="49" charset="-127"/>
-              <a:ea typeface="D2Coding" panose="020B0609020101020101" pitchFamily="49" charset="-127"/>
-            </a:endParaRPr>
-          </a:p>
-          <a:p>
-            <a:pPr marL="285750" indent="-285750">
-              <a:lnSpc>
-                <a:spcPct val="150000"/>
-              </a:lnSpc>
-              <a:buFont typeface="Wingdings" panose="05000000000000000000" pitchFamily="2" charset="2"/>
-              <a:buChar char="§"/>
-            </a:pPr>
-            <a:r>
-              <a:rPr lang="ko-KR" altLang="en-US" sz="1600" dirty="0">
-                <a:latin typeface="D2Coding" panose="020B0609020101020101" pitchFamily="49" charset="-127"/>
-                <a:ea typeface="D2Coding" panose="020B0609020101020101" pitchFamily="49" charset="-127"/>
-              </a:rPr>
-              <a:t>날씨데이터는 평행이동 불변성</a:t>
-            </a:r>
-            <a:r>
-              <a:rPr lang="en-US" altLang="ko-KR" sz="1600" dirty="0">
-                <a:latin typeface="D2Coding" panose="020B0609020101020101" pitchFamily="49" charset="-127"/>
-                <a:ea typeface="D2Coding" panose="020B0609020101020101" pitchFamily="49" charset="-127"/>
-              </a:rPr>
-              <a:t>(Translation Invariance)</a:t>
-            </a:r>
-            <a:r>
-              <a:rPr lang="ko-KR" altLang="en-US" sz="1600" dirty="0">
-                <a:latin typeface="D2Coding" panose="020B0609020101020101" pitchFamily="49" charset="-127"/>
-                <a:ea typeface="D2Coding" panose="020B0609020101020101" pitchFamily="49" charset="-127"/>
-              </a:rPr>
-              <a:t>에 적합하지 않음</a:t>
-            </a:r>
-            <a:endParaRPr lang="en-US" altLang="ko-KR" sz="1600" dirty="0">
-              <a:latin typeface="D2Coding" panose="020B0609020101020101" pitchFamily="49" charset="-127"/>
-              <a:ea typeface="D2Coding" panose="020B0609020101020101" pitchFamily="49" charset="-127"/>
-            </a:endParaRPr>
-          </a:p>
-          <a:p>
-            <a:pPr marL="742950" lvl="1" indent="-285750">
-              <a:lnSpc>
-                <a:spcPct val="150000"/>
-              </a:lnSpc>
-              <a:buFont typeface="Wingdings" panose="05000000000000000000" pitchFamily="2" charset="2"/>
-              <a:buChar char="§"/>
-            </a:pPr>
-            <a:r>
-              <a:rPr lang="ko-KR" altLang="en-US" sz="1400" dirty="0">
-                <a:latin typeface="D2Coding" panose="020B0609020101020101" pitchFamily="49" charset="-127"/>
-                <a:ea typeface="D2Coding" panose="020B0609020101020101" pitchFamily="49" charset="-127"/>
-              </a:rPr>
-              <a:t>어느 위치</a:t>
-            </a:r>
-            <a:r>
-              <a:rPr lang="en-US" altLang="ko-KR" sz="1400" dirty="0">
-                <a:latin typeface="D2Coding" panose="020B0609020101020101" pitchFamily="49" charset="-127"/>
-                <a:ea typeface="D2Coding" panose="020B0609020101020101" pitchFamily="49" charset="-127"/>
-              </a:rPr>
-              <a:t>(</a:t>
-            </a:r>
-            <a:r>
-              <a:rPr lang="ko-KR" altLang="en-US" sz="1400" dirty="0">
-                <a:latin typeface="D2Coding" panose="020B0609020101020101" pitchFamily="49" charset="-127"/>
-                <a:ea typeface="D2Coding" panose="020B0609020101020101" pitchFamily="49" charset="-127"/>
-              </a:rPr>
-              <a:t>공간</a:t>
-            </a:r>
-            <a:r>
-              <a:rPr lang="en-US" altLang="ko-KR" sz="1400" dirty="0">
-                <a:latin typeface="D2Coding" panose="020B0609020101020101" pitchFamily="49" charset="-127"/>
-                <a:ea typeface="D2Coding" panose="020B0609020101020101" pitchFamily="49" charset="-127"/>
-              </a:rPr>
-              <a:t>)</a:t>
-            </a:r>
-            <a:r>
-              <a:rPr lang="ko-KR" altLang="en-US" sz="1400" dirty="0">
-                <a:latin typeface="D2Coding" panose="020B0609020101020101" pitchFamily="49" charset="-127"/>
-                <a:ea typeface="D2Coding" panose="020B0609020101020101" pitchFamily="49" charset="-127"/>
-              </a:rPr>
-              <a:t>나 어느 시점</a:t>
-            </a:r>
-            <a:r>
-              <a:rPr lang="en-US" altLang="ko-KR" sz="1400" dirty="0">
-                <a:latin typeface="D2Coding" panose="020B0609020101020101" pitchFamily="49" charset="-127"/>
-                <a:ea typeface="D2Coding" panose="020B0609020101020101" pitchFamily="49" charset="-127"/>
-              </a:rPr>
-              <a:t>(</a:t>
-            </a:r>
-            <a:r>
-              <a:rPr lang="ko-KR" altLang="en-US" sz="1400" dirty="0">
-                <a:latin typeface="D2Coding" panose="020B0609020101020101" pitchFamily="49" charset="-127"/>
-                <a:ea typeface="D2Coding" panose="020B0609020101020101" pitchFamily="49" charset="-127"/>
-              </a:rPr>
-              <a:t>시간</a:t>
-            </a:r>
-            <a:r>
-              <a:rPr lang="en-US" altLang="ko-KR" sz="1400" dirty="0">
-                <a:latin typeface="D2Coding" panose="020B0609020101020101" pitchFamily="49" charset="-127"/>
-                <a:ea typeface="D2Coding" panose="020B0609020101020101" pitchFamily="49" charset="-127"/>
-              </a:rPr>
-              <a:t>)</a:t>
-            </a:r>
-            <a:r>
-              <a:rPr lang="ko-KR" altLang="en-US" sz="1400" dirty="0">
-                <a:latin typeface="D2Coding" panose="020B0609020101020101" pitchFamily="49" charset="-127"/>
-                <a:ea typeface="D2Coding" panose="020B0609020101020101" pitchFamily="49" charset="-127"/>
-              </a:rPr>
-              <a:t>에서 발생하더라도 그 본질적인 의미나 성질이 변하지 않고 일정하게 유지되는 성질</a:t>
-            </a:r>
-            <a:r>
-              <a:rPr lang="en-US" altLang="ko-KR" sz="1400" dirty="0">
-                <a:latin typeface="D2Coding" panose="020B0609020101020101" pitchFamily="49" charset="-127"/>
-                <a:ea typeface="D2Coding" panose="020B0609020101020101" pitchFamily="49" charset="-127"/>
-              </a:rPr>
-              <a:t>(</a:t>
-            </a:r>
-            <a:r>
-              <a:rPr lang="ko-KR" altLang="en-US" sz="1400" dirty="0">
-                <a:latin typeface="D2Coding" panose="020B0609020101020101" pitchFamily="49" charset="-127"/>
-                <a:ea typeface="D2Coding" panose="020B0609020101020101" pitchFamily="49" charset="-127"/>
-              </a:rPr>
-              <a:t>이미지에는 위치에 따라 불변하지만 기후 데이터에는 적합하지 않음</a:t>
-            </a:r>
-            <a:r>
-              <a:rPr lang="en-US" altLang="ko-KR" sz="1400" dirty="0">
-                <a:latin typeface="D2Coding" panose="020B0609020101020101" pitchFamily="49" charset="-127"/>
-                <a:ea typeface="D2Coding" panose="020B0609020101020101" pitchFamily="49" charset="-127"/>
-              </a:rPr>
-              <a:t>)</a:t>
-            </a:r>
-            <a:endParaRPr lang="ko-KR" altLang="en-US" sz="1400" dirty="0">
-              <a:latin typeface="D2Coding" panose="020B0609020101020101" pitchFamily="49" charset="-127"/>
-              <a:ea typeface="D2Coding" panose="020B0609020101020101" pitchFamily="49" charset="-127"/>
-            </a:endParaRPr>
-          </a:p>
-          <a:p>
-            <a:pPr marL="742950" lvl="1" indent="-285750">
-              <a:lnSpc>
-                <a:spcPct val="150000"/>
-              </a:lnSpc>
-              <a:buFont typeface="Wingdings" panose="05000000000000000000" pitchFamily="2" charset="2"/>
-              <a:buChar char="§"/>
-            </a:pPr>
-            <a:r>
-              <a:rPr lang="ko-KR" altLang="en-US" sz="1400" dirty="0">
-                <a:latin typeface="D2Coding" panose="020B0609020101020101" pitchFamily="49" charset="-127"/>
-                <a:ea typeface="D2Coding" panose="020B0609020101020101" pitchFamily="49" charset="-127"/>
-              </a:rPr>
-              <a:t>강아지 이미지가 왼쪽</a:t>
-            </a:r>
-            <a:r>
-              <a:rPr lang="en-US" altLang="ko-KR" sz="1400" dirty="0">
-                <a:latin typeface="D2Coding" panose="020B0609020101020101" pitchFamily="49" charset="-127"/>
-                <a:ea typeface="D2Coding" panose="020B0609020101020101" pitchFamily="49" charset="-127"/>
-              </a:rPr>
-              <a:t>, </a:t>
-            </a:r>
-            <a:r>
-              <a:rPr lang="ko-KR" altLang="en-US" sz="1400" dirty="0">
-                <a:latin typeface="D2Coding" panose="020B0609020101020101" pitchFamily="49" charset="-127"/>
-                <a:ea typeface="D2Coding" panose="020B0609020101020101" pitchFamily="49" charset="-127"/>
-              </a:rPr>
-              <a:t>오른쪽</a:t>
-            </a:r>
-            <a:r>
-              <a:rPr lang="en-US" altLang="ko-KR" sz="1400" dirty="0">
-                <a:latin typeface="D2Coding" panose="020B0609020101020101" pitchFamily="49" charset="-127"/>
-                <a:ea typeface="D2Coding" panose="020B0609020101020101" pitchFamily="49" charset="-127"/>
-              </a:rPr>
-              <a:t>,</a:t>
-            </a:r>
-            <a:r>
-              <a:rPr lang="ko-KR" altLang="en-US" sz="1400" dirty="0">
-                <a:latin typeface="D2Coding" panose="020B0609020101020101" pitchFamily="49" charset="-127"/>
-                <a:ea typeface="D2Coding" panose="020B0609020101020101" pitchFamily="49" charset="-127"/>
-              </a:rPr>
-              <a:t> 아래에 있든 똑같이 </a:t>
-            </a:r>
-            <a:r>
-              <a:rPr lang="en-US" altLang="ko-KR" sz="1400" dirty="0">
-                <a:latin typeface="D2Coding" panose="020B0609020101020101" pitchFamily="49" charset="-127"/>
-                <a:ea typeface="D2Coding" panose="020B0609020101020101" pitchFamily="49" charset="-127"/>
-              </a:rPr>
-              <a:t>'</a:t>
-            </a:r>
-            <a:r>
-              <a:rPr lang="ko-KR" altLang="en-US" sz="1400" dirty="0">
-                <a:latin typeface="D2Coding" panose="020B0609020101020101" pitchFamily="49" charset="-127"/>
-                <a:ea typeface="D2Coding" panose="020B0609020101020101" pitchFamily="49" charset="-127"/>
-              </a:rPr>
-              <a:t>강아지</a:t>
-            </a:r>
-            <a:r>
-              <a:rPr lang="en-US" altLang="ko-KR" sz="1400" dirty="0">
-                <a:latin typeface="D2Coding" panose="020B0609020101020101" pitchFamily="49" charset="-127"/>
-                <a:ea typeface="D2Coding" panose="020B0609020101020101" pitchFamily="49" charset="-127"/>
-              </a:rPr>
-              <a:t>'</a:t>
-            </a:r>
-            <a:r>
-              <a:rPr lang="ko-KR" altLang="en-US" sz="1400" dirty="0">
-                <a:latin typeface="D2Coding" panose="020B0609020101020101" pitchFamily="49" charset="-127"/>
-                <a:ea typeface="D2Coding" panose="020B0609020101020101" pitchFamily="49" charset="-127"/>
-              </a:rPr>
-              <a:t>로 인식하여 데이터의 본질은 변하지 않음</a:t>
-            </a:r>
-            <a:endParaRPr lang="en-US" altLang="ko-KR" sz="1400" dirty="0">
-              <a:latin typeface="D2Coding" panose="020B0609020101020101" pitchFamily="49" charset="-127"/>
-              <a:ea typeface="D2Coding" panose="020B0609020101020101" pitchFamily="49" charset="-127"/>
-            </a:endParaRPr>
-          </a:p>
-          <a:p>
-            <a:pPr marL="742950" lvl="1" indent="-285750">
-              <a:lnSpc>
-                <a:spcPct val="150000"/>
-              </a:lnSpc>
-              <a:buFont typeface="Wingdings" panose="05000000000000000000" pitchFamily="2" charset="2"/>
-              <a:buChar char="§"/>
-            </a:pPr>
-            <a:r>
-              <a:rPr lang="en-US" altLang="ko-KR" sz="1400" dirty="0">
-                <a:latin typeface="D2Coding" panose="020B0609020101020101" pitchFamily="49" charset="-127"/>
-                <a:ea typeface="D2Coding" panose="020B0609020101020101" pitchFamily="49" charset="-127"/>
-              </a:rPr>
-              <a:t>"</a:t>
-            </a:r>
-            <a:r>
-              <a:rPr lang="ko-KR" altLang="en-US" sz="1400" dirty="0">
-                <a:latin typeface="D2Coding" panose="020B0609020101020101" pitchFamily="49" charset="-127"/>
-                <a:ea typeface="D2Coding" panose="020B0609020101020101" pitchFamily="49" charset="-127"/>
-              </a:rPr>
-              <a:t>사과가 맛있다</a:t>
-            </a:r>
-            <a:r>
-              <a:rPr lang="en-US" altLang="ko-KR" sz="1400" dirty="0">
-                <a:latin typeface="D2Coding" panose="020B0609020101020101" pitchFamily="49" charset="-127"/>
-                <a:ea typeface="D2Coding" panose="020B0609020101020101" pitchFamily="49" charset="-127"/>
-              </a:rPr>
-              <a:t>"</a:t>
-            </a:r>
-            <a:r>
-              <a:rPr lang="ko-KR" altLang="en-US" sz="1400" dirty="0">
-                <a:latin typeface="D2Coding" panose="020B0609020101020101" pitchFamily="49" charset="-127"/>
-                <a:ea typeface="D2Coding" panose="020B0609020101020101" pitchFamily="49" charset="-127"/>
-              </a:rPr>
-              <a:t>라는 표현이 글의 맨 앞에 나오든 맨 뒤에 나오든 </a:t>
-            </a:r>
-            <a:r>
-              <a:rPr lang="en-US" altLang="ko-KR" sz="1400" dirty="0">
-                <a:latin typeface="D2Coding" panose="020B0609020101020101" pitchFamily="49" charset="-127"/>
-                <a:ea typeface="D2Coding" panose="020B0609020101020101" pitchFamily="49" charset="-127"/>
-              </a:rPr>
-              <a:t>"</a:t>
-            </a:r>
-            <a:r>
-              <a:rPr lang="ko-KR" altLang="en-US" sz="1400" dirty="0">
-                <a:latin typeface="D2Coding" panose="020B0609020101020101" pitchFamily="49" charset="-127"/>
-                <a:ea typeface="D2Coding" panose="020B0609020101020101" pitchFamily="49" charset="-127"/>
-              </a:rPr>
-              <a:t>사과가 맛있다</a:t>
-            </a:r>
-            <a:r>
-              <a:rPr lang="en-US" altLang="ko-KR" sz="1400" dirty="0">
-                <a:latin typeface="D2Coding" panose="020B0609020101020101" pitchFamily="49" charset="-127"/>
-                <a:ea typeface="D2Coding" panose="020B0609020101020101" pitchFamily="49" charset="-127"/>
-              </a:rPr>
-              <a:t>"</a:t>
-            </a:r>
-            <a:r>
-              <a:rPr lang="ko-KR" altLang="en-US" sz="1400" dirty="0">
-                <a:latin typeface="D2Coding" panose="020B0609020101020101" pitchFamily="49" charset="-127"/>
-                <a:ea typeface="D2Coding" panose="020B0609020101020101" pitchFamily="49" charset="-127"/>
-              </a:rPr>
-              <a:t>라는 긍정적인 의미 자체는 변하지 않음</a:t>
-            </a:r>
-            <a:endParaRPr lang="en-US" altLang="ko-KR" sz="1400" dirty="0">
-              <a:latin typeface="D2Coding" panose="020B0609020101020101" pitchFamily="49" charset="-127"/>
-              <a:ea typeface="D2Coding" panose="020B0609020101020101" pitchFamily="49" charset="-127"/>
-            </a:endParaRPr>
-          </a:p>
-        </p:txBody>
-      </p:sp>
-      <p:sp>
-        <p:nvSpPr>
-          <p:cNvPr id="2" name="AutoShape 2" descr="1-D convolution">
-            <a:extLst>
-              <a:ext uri="{FF2B5EF4-FFF2-40B4-BE49-F238E27FC236}">
-                <a16:creationId xmlns:a16="http://schemas.microsoft.com/office/drawing/2014/main" id="{6C3B461C-7D12-B35F-31D3-B7CC10AAD4AF}"/>
-              </a:ext>
-            </a:extLst>
-          </p:cNvPr>
-          <p:cNvSpPr>
-            <a:spLocks noChangeAspect="1" noChangeArrowheads="1"/>
-          </p:cNvSpPr>
-          <p:nvPr/>
-        </p:nvSpPr>
-        <p:spPr bwMode="auto">
-          <a:xfrm>
-            <a:off x="6591300" y="4870037"/>
-            <a:ext cx="304800" cy="304800"/>
-          </a:xfrm>
-          <a:prstGeom prst="rect">
-            <a:avLst/>
-          </a:prstGeom>
-          <a:noFill/>
-          <a:extLst>
-            <a:ext uri="{909E8E84-426E-40DD-AFC4-6F175D3DCCD1}">
-              <a14:hiddenFill xmlns:a14="http://schemas.microsoft.com/office/drawing/2010/main">
-                <a:solidFill>
-                  <a:srgbClr val="FFFFFF"/>
-                </a:solidFill>
-              </a14:hiddenFill>
-            </a:ext>
-          </a:extLst>
-        </p:spPr>
-        <p:txBody>
-          <a:bodyPr vert="horz" wrap="square" lIns="91440" tIns="45720" rIns="91440" bIns="45720" numCol="1" anchor="t" anchorCtr="0" compatLnSpc="1">
-            <a:prstTxWarp prst="textNoShape">
-              <a:avLst/>
-            </a:prstTxWarp>
-          </a:bodyPr>
-          <a:lstStyle/>
-          <a:p>
-            <a:endParaRPr lang="ko-KR" altLang="en-US"/>
-          </a:p>
-        </p:txBody>
-      </p:sp>
-      <p:pic>
-        <p:nvPicPr>
-          <p:cNvPr id="7" name="그림 6">
-            <a:extLst>
-              <a:ext uri="{FF2B5EF4-FFF2-40B4-BE49-F238E27FC236}">
-                <a16:creationId xmlns:a16="http://schemas.microsoft.com/office/drawing/2014/main" id="{E412CF84-A41B-783A-9C4F-FA9BC386DFEF}"/>
-              </a:ext>
-            </a:extLst>
-          </p:cNvPr>
-          <p:cNvPicPr>
-            <a:picLocks noChangeAspect="1"/>
-          </p:cNvPicPr>
-          <p:nvPr/>
-        </p:nvPicPr>
-        <p:blipFill>
-          <a:blip r:embed="rId2"/>
-          <a:stretch>
-            <a:fillRect/>
-          </a:stretch>
-        </p:blipFill>
-        <p:spPr>
-          <a:xfrm>
-            <a:off x="668736" y="3935931"/>
-            <a:ext cx="5246289" cy="1470975"/>
-          </a:xfrm>
-          <a:prstGeom prst="rect">
-            <a:avLst/>
-          </a:prstGeom>
-        </p:spPr>
-      </p:pic>
-      <p:sp>
-        <p:nvSpPr>
-          <p:cNvPr id="9" name="TextBox 8">
-            <a:extLst>
-              <a:ext uri="{FF2B5EF4-FFF2-40B4-BE49-F238E27FC236}">
-                <a16:creationId xmlns:a16="http://schemas.microsoft.com/office/drawing/2014/main" id="{0310F769-F44C-F11A-90D4-104EA576D86E}"/>
-              </a:ext>
-            </a:extLst>
-          </p:cNvPr>
-          <p:cNvSpPr txBox="1"/>
-          <p:nvPr/>
-        </p:nvSpPr>
-        <p:spPr>
-          <a:xfrm>
-            <a:off x="588103" y="5686209"/>
-            <a:ext cx="5480988" cy="307777"/>
-          </a:xfrm>
-          <a:prstGeom prst="rect">
-            <a:avLst/>
-          </a:prstGeom>
-          <a:noFill/>
-        </p:spPr>
-        <p:txBody>
-          <a:bodyPr wrap="none" rtlCol="0">
-            <a:spAutoFit/>
-          </a:bodyPr>
-          <a:lstStyle/>
-          <a:p>
-            <a:r>
-              <a:rPr lang="ko-KR" altLang="en-US" sz="1400" dirty="0">
-                <a:latin typeface="D2Coding" panose="020B0609020101020101" pitchFamily="49" charset="-127"/>
-                <a:ea typeface="D2Coding" panose="020B0609020101020101" pitchFamily="49" charset="-127"/>
-                <a:hlinkClick r:id="rId3"/>
-              </a:rPr>
-              <a:t>자연어 처리를 위한 </a:t>
-            </a:r>
-            <a:r>
-              <a:rPr lang="en-US" altLang="ko-KR" sz="1400" dirty="0">
-                <a:latin typeface="D2Coding" panose="020B0609020101020101" pitchFamily="49" charset="-127"/>
-                <a:ea typeface="D2Coding" panose="020B0609020101020101" pitchFamily="49" charset="-127"/>
-                <a:hlinkClick r:id="rId3"/>
-              </a:rPr>
-              <a:t>1D CNN(1D Convolutional Neural Networks)</a:t>
-            </a:r>
-            <a:endParaRPr lang="ko-KR" altLang="en-US" sz="1400" dirty="0">
-              <a:latin typeface="D2Coding" panose="020B0609020101020101" pitchFamily="49" charset="-127"/>
-              <a:ea typeface="D2Coding" panose="020B0609020101020101" pitchFamily="49" charset="-127"/>
-            </a:endParaRPr>
-          </a:p>
-        </p:txBody>
-      </p:sp>
-      <p:sp>
-        <p:nvSpPr>
-          <p:cNvPr id="10" name="TextBox 9">
-            <a:extLst>
-              <a:ext uri="{FF2B5EF4-FFF2-40B4-BE49-F238E27FC236}">
-                <a16:creationId xmlns:a16="http://schemas.microsoft.com/office/drawing/2014/main" id="{7C9C16B3-9B9B-5ECD-140B-47C71021C5B6}"/>
-              </a:ext>
-            </a:extLst>
-          </p:cNvPr>
-          <p:cNvSpPr txBox="1"/>
-          <p:nvPr/>
-        </p:nvSpPr>
-        <p:spPr>
-          <a:xfrm>
-            <a:off x="6266355" y="3925476"/>
-            <a:ext cx="5480988" cy="2123658"/>
-          </a:xfrm>
-          <a:prstGeom prst="rect">
-            <a:avLst/>
-          </a:prstGeom>
-          <a:solidFill>
-            <a:schemeClr val="tx1"/>
-          </a:solidFill>
-        </p:spPr>
-        <p:txBody>
-          <a:bodyPr wrap="square">
-            <a:spAutoFit/>
-          </a:bodyPr>
-          <a:lstStyle/>
-          <a:p>
-            <a:pPr marL="171450" indent="-171450">
-              <a:buFont typeface="Wingdings" panose="05000000000000000000" pitchFamily="2" charset="2"/>
-              <a:buChar char="§"/>
-            </a:pPr>
-            <a:r>
-              <a:rPr lang="ko-KR" altLang="en-US" sz="1200" dirty="0">
-                <a:solidFill>
-                  <a:schemeClr val="bg1"/>
-                </a:solidFill>
-                <a:latin typeface="D2Coding" panose="020B0609020101020101" pitchFamily="49" charset="-127"/>
-                <a:ea typeface="D2Coding" panose="020B0609020101020101" pitchFamily="49" charset="-127"/>
-              </a:rPr>
-              <a:t>똑같은 </a:t>
-            </a:r>
-            <a:r>
-              <a:rPr lang="en-US" altLang="ko-KR" sz="1200" dirty="0">
-                <a:solidFill>
-                  <a:schemeClr val="bg1"/>
-                </a:solidFill>
-                <a:latin typeface="D2Coding" panose="020B0609020101020101" pitchFamily="49" charset="-127"/>
-                <a:ea typeface="D2Coding" panose="020B0609020101020101" pitchFamily="49" charset="-127"/>
-              </a:rPr>
-              <a:t>'1</a:t>
-            </a:r>
-            <a:r>
-              <a:rPr lang="ko-KR" altLang="en-US" sz="1200" dirty="0">
-                <a:solidFill>
-                  <a:schemeClr val="bg1"/>
-                </a:solidFill>
-                <a:latin typeface="D2Coding" panose="020B0609020101020101" pitchFamily="49" charset="-127"/>
-                <a:ea typeface="D2Coding" panose="020B0609020101020101" pitchFamily="49" charset="-127"/>
-              </a:rPr>
-              <a:t>시간 동안 </a:t>
-            </a:r>
-            <a:r>
-              <a:rPr lang="en-US" altLang="ko-KR" sz="1200" dirty="0">
-                <a:solidFill>
-                  <a:schemeClr val="bg1"/>
-                </a:solidFill>
-                <a:latin typeface="D2Coding" panose="020B0609020101020101" pitchFamily="49" charset="-127"/>
-                <a:ea typeface="D2Coding" panose="020B0609020101020101" pitchFamily="49" charset="-127"/>
-              </a:rPr>
-              <a:t>5</a:t>
-            </a:r>
-            <a:r>
-              <a:rPr lang="ko-KR" altLang="en-US" sz="1200" dirty="0">
-                <a:solidFill>
-                  <a:schemeClr val="bg1"/>
-                </a:solidFill>
-                <a:latin typeface="D2Coding" panose="020B0609020101020101" pitchFamily="49" charset="-127"/>
-                <a:ea typeface="D2Coding" panose="020B0609020101020101" pitchFamily="49" charset="-127"/>
-              </a:rPr>
-              <a:t>도 상승</a:t>
-            </a:r>
-            <a:r>
-              <a:rPr lang="en-US" altLang="ko-KR" sz="1200" dirty="0">
-                <a:solidFill>
-                  <a:schemeClr val="bg1"/>
-                </a:solidFill>
-                <a:latin typeface="D2Coding" panose="020B0609020101020101" pitchFamily="49" charset="-127"/>
-                <a:ea typeface="D2Coding" panose="020B0609020101020101" pitchFamily="49" charset="-127"/>
-              </a:rPr>
-              <a:t>'</a:t>
-            </a:r>
-            <a:r>
-              <a:rPr lang="ko-KR" altLang="en-US" sz="1200" dirty="0">
-                <a:solidFill>
-                  <a:schemeClr val="bg1"/>
-                </a:solidFill>
-                <a:latin typeface="D2Coding" panose="020B0609020101020101" pitchFamily="49" charset="-127"/>
-                <a:ea typeface="D2Coding" panose="020B0609020101020101" pitchFamily="49" charset="-127"/>
-              </a:rPr>
-              <a:t>이라는 데이터 패턴이지만</a:t>
-            </a:r>
-            <a:r>
-              <a:rPr lang="en-US" altLang="ko-KR" sz="1200" dirty="0">
-                <a:solidFill>
-                  <a:schemeClr val="bg1"/>
-                </a:solidFill>
-                <a:latin typeface="D2Coding" panose="020B0609020101020101" pitchFamily="49" charset="-127"/>
-                <a:ea typeface="D2Coding" panose="020B0609020101020101" pitchFamily="49" charset="-127"/>
-              </a:rPr>
-              <a:t>, </a:t>
-            </a:r>
-            <a:r>
-              <a:rPr lang="en-US" altLang="ko-KR" sz="1200" b="1" dirty="0">
-                <a:solidFill>
-                  <a:schemeClr val="bg1"/>
-                </a:solidFill>
-                <a:latin typeface="D2Coding" panose="020B0609020101020101" pitchFamily="49" charset="-127"/>
-                <a:ea typeface="D2Coding" panose="020B0609020101020101" pitchFamily="49" charset="-127"/>
-              </a:rPr>
-              <a:t>'</a:t>
-            </a:r>
-            <a:r>
-              <a:rPr lang="ko-KR" altLang="en-US" sz="1200" b="1" dirty="0">
-                <a:solidFill>
-                  <a:schemeClr val="bg1"/>
-                </a:solidFill>
-                <a:latin typeface="D2Coding" panose="020B0609020101020101" pitchFamily="49" charset="-127"/>
-                <a:ea typeface="D2Coding" panose="020B0609020101020101" pitchFamily="49" charset="-127"/>
-              </a:rPr>
-              <a:t>언제</a:t>
-            </a:r>
-            <a:r>
-              <a:rPr lang="en-US" altLang="ko-KR" sz="1200" b="1" dirty="0">
-                <a:solidFill>
-                  <a:schemeClr val="bg1"/>
-                </a:solidFill>
-                <a:latin typeface="D2Coding" panose="020B0609020101020101" pitchFamily="49" charset="-127"/>
-                <a:ea typeface="D2Coding" panose="020B0609020101020101" pitchFamily="49" charset="-127"/>
-              </a:rPr>
-              <a:t>(</a:t>
-            </a:r>
-            <a:r>
-              <a:rPr lang="ko-KR" altLang="en-US" sz="1200" b="1" dirty="0">
-                <a:solidFill>
-                  <a:schemeClr val="bg1"/>
-                </a:solidFill>
-                <a:latin typeface="D2Coding" panose="020B0609020101020101" pitchFamily="49" charset="-127"/>
-                <a:ea typeface="D2Coding" panose="020B0609020101020101" pitchFamily="49" charset="-127"/>
-              </a:rPr>
-              <a:t>어느 시간대</a:t>
-            </a:r>
-            <a:r>
-              <a:rPr lang="en-US" altLang="ko-KR" sz="1200" b="1" dirty="0">
-                <a:solidFill>
-                  <a:schemeClr val="bg1"/>
-                </a:solidFill>
-                <a:latin typeface="D2Coding" panose="020B0609020101020101" pitchFamily="49" charset="-127"/>
-                <a:ea typeface="D2Coding" panose="020B0609020101020101" pitchFamily="49" charset="-127"/>
-              </a:rPr>
-              <a:t>, </a:t>
-            </a:r>
-            <a:r>
-              <a:rPr lang="ko-KR" altLang="en-US" sz="1200" b="1" dirty="0">
-                <a:solidFill>
-                  <a:schemeClr val="bg1"/>
-                </a:solidFill>
-                <a:latin typeface="D2Coding" panose="020B0609020101020101" pitchFamily="49" charset="-127"/>
-                <a:ea typeface="D2Coding" panose="020B0609020101020101" pitchFamily="49" charset="-127"/>
-              </a:rPr>
-              <a:t>아침 </a:t>
-            </a:r>
-            <a:r>
-              <a:rPr lang="en-US" altLang="ko-KR" sz="1200" b="1" dirty="0">
-                <a:solidFill>
-                  <a:schemeClr val="bg1"/>
-                </a:solidFill>
-                <a:latin typeface="D2Coding" panose="020B0609020101020101" pitchFamily="49" charset="-127"/>
-                <a:ea typeface="D2Coding" panose="020B0609020101020101" pitchFamily="49" charset="-127"/>
-              </a:rPr>
-              <a:t>or</a:t>
-            </a:r>
-            <a:r>
-              <a:rPr lang="ko-KR" altLang="en-US" sz="1200" b="1" dirty="0">
-                <a:solidFill>
-                  <a:schemeClr val="bg1"/>
-                </a:solidFill>
-                <a:latin typeface="D2Coding" panose="020B0609020101020101" pitchFamily="49" charset="-127"/>
-                <a:ea typeface="D2Coding" panose="020B0609020101020101" pitchFamily="49" charset="-127"/>
-              </a:rPr>
-              <a:t> 새벽</a:t>
-            </a:r>
-            <a:r>
-              <a:rPr lang="en-US" altLang="ko-KR" sz="1200" b="1" dirty="0">
-                <a:solidFill>
-                  <a:schemeClr val="bg1"/>
-                </a:solidFill>
-                <a:latin typeface="D2Coding" panose="020B0609020101020101" pitchFamily="49" charset="-127"/>
-                <a:ea typeface="D2Coding" panose="020B0609020101020101" pitchFamily="49" charset="-127"/>
-              </a:rPr>
-              <a:t>, </a:t>
-            </a:r>
-            <a:r>
-              <a:rPr lang="ko-KR" altLang="en-US" sz="1200" b="1" dirty="0">
-                <a:solidFill>
-                  <a:schemeClr val="bg1"/>
-                </a:solidFill>
-                <a:latin typeface="D2Coding" panose="020B0609020101020101" pitchFamily="49" charset="-127"/>
-                <a:ea typeface="D2Coding" panose="020B0609020101020101" pitchFamily="49" charset="-127"/>
-              </a:rPr>
-              <a:t>여름 </a:t>
-            </a:r>
-            <a:r>
-              <a:rPr lang="en-US" altLang="ko-KR" sz="1200" b="1" dirty="0">
-                <a:solidFill>
-                  <a:schemeClr val="bg1"/>
-                </a:solidFill>
-                <a:latin typeface="D2Coding" panose="020B0609020101020101" pitchFamily="49" charset="-127"/>
-                <a:ea typeface="D2Coding" panose="020B0609020101020101" pitchFamily="49" charset="-127"/>
-              </a:rPr>
-              <a:t>or </a:t>
-            </a:r>
-            <a:r>
-              <a:rPr lang="ko-KR" altLang="en-US" sz="1200" b="1" dirty="0">
-                <a:solidFill>
-                  <a:schemeClr val="bg1"/>
-                </a:solidFill>
-                <a:latin typeface="D2Coding" panose="020B0609020101020101" pitchFamily="49" charset="-127"/>
-                <a:ea typeface="D2Coding" panose="020B0609020101020101" pitchFamily="49" charset="-127"/>
-              </a:rPr>
-              <a:t>겨울</a:t>
-            </a:r>
-            <a:r>
-              <a:rPr lang="en-US" altLang="ko-KR" sz="1200" b="1" dirty="0">
-                <a:solidFill>
-                  <a:schemeClr val="bg1"/>
-                </a:solidFill>
-                <a:latin typeface="D2Coding" panose="020B0609020101020101" pitchFamily="49" charset="-127"/>
-                <a:ea typeface="D2Coding" panose="020B0609020101020101" pitchFamily="49" charset="-127"/>
-              </a:rPr>
-              <a:t>)'</a:t>
-            </a:r>
-            <a:r>
-              <a:rPr lang="ko-KR" altLang="en-US" sz="1200" dirty="0">
-                <a:solidFill>
-                  <a:schemeClr val="bg1"/>
-                </a:solidFill>
-                <a:latin typeface="D2Coding" panose="020B0609020101020101" pitchFamily="49" charset="-127"/>
-                <a:ea typeface="D2Coding" panose="020B0609020101020101" pitchFamily="49" charset="-127"/>
-              </a:rPr>
-              <a:t> 에 따라 원인과 의미가 완전히 달라지게 되어 </a:t>
-            </a:r>
-            <a:r>
-              <a:rPr lang="ko-KR" altLang="en-US" sz="1200" dirty="0" err="1">
-                <a:solidFill>
-                  <a:schemeClr val="bg1"/>
-                </a:solidFill>
-                <a:latin typeface="D2Coding" panose="020B0609020101020101" pitchFamily="49" charset="-127"/>
-                <a:ea typeface="D2Coding" panose="020B0609020101020101" pitchFamily="49" charset="-127"/>
-              </a:rPr>
-              <a:t>시간축을</a:t>
-            </a:r>
-            <a:r>
-              <a:rPr lang="ko-KR" altLang="en-US" sz="1200" dirty="0">
-                <a:solidFill>
-                  <a:schemeClr val="bg1"/>
-                </a:solidFill>
-                <a:latin typeface="D2Coding" panose="020B0609020101020101" pitchFamily="49" charset="-127"/>
-                <a:ea typeface="D2Coding" panose="020B0609020101020101" pitchFamily="49" charset="-127"/>
-              </a:rPr>
-              <a:t> 따라 패턴을 그대로 이동시켜 재사용할 수 없음</a:t>
-            </a:r>
-            <a:endParaRPr lang="en-US" altLang="ko-KR" sz="1200" dirty="0">
-              <a:solidFill>
-                <a:schemeClr val="bg1"/>
-              </a:solidFill>
-              <a:latin typeface="D2Coding" panose="020B0609020101020101" pitchFamily="49" charset="-127"/>
-              <a:ea typeface="D2Coding" panose="020B0609020101020101" pitchFamily="49" charset="-127"/>
-            </a:endParaRPr>
-          </a:p>
-          <a:p>
-            <a:pPr marL="171450" indent="-171450">
-              <a:buFont typeface="Wingdings" panose="05000000000000000000" pitchFamily="2" charset="2"/>
-              <a:buChar char="§"/>
-            </a:pPr>
-            <a:endParaRPr lang="en-US" altLang="ko-KR" sz="1200" dirty="0">
-              <a:solidFill>
-                <a:schemeClr val="bg1"/>
-              </a:solidFill>
-              <a:latin typeface="D2Coding" panose="020B0609020101020101" pitchFamily="49" charset="-127"/>
-              <a:ea typeface="D2Coding" panose="020B0609020101020101" pitchFamily="49" charset="-127"/>
-            </a:endParaRPr>
-          </a:p>
-          <a:p>
-            <a:pPr marL="171450" indent="-171450">
-              <a:buFont typeface="Wingdings" panose="05000000000000000000" pitchFamily="2" charset="2"/>
-              <a:buChar char="§"/>
-            </a:pPr>
-            <a:r>
-              <a:rPr lang="en-US" altLang="ko-KR" sz="1200" dirty="0">
-                <a:solidFill>
-                  <a:schemeClr val="bg1"/>
-                </a:solidFill>
-                <a:latin typeface="D2Coding" panose="020B0609020101020101" pitchFamily="49" charset="-127"/>
-                <a:ea typeface="D2Coding" panose="020B0609020101020101" pitchFamily="49" charset="-127"/>
-              </a:rPr>
-              <a:t>Conv1D</a:t>
-            </a:r>
-            <a:r>
-              <a:rPr lang="ko-KR" altLang="en-US" sz="1200" dirty="0">
-                <a:solidFill>
-                  <a:schemeClr val="bg1"/>
-                </a:solidFill>
-                <a:latin typeface="D2Coding" panose="020B0609020101020101" pitchFamily="49" charset="-127"/>
-                <a:ea typeface="D2Coding" panose="020B0609020101020101" pitchFamily="49" charset="-127"/>
-              </a:rPr>
-              <a:t>는 슬라이딩 윈도우를 굴리며 </a:t>
-            </a:r>
-            <a:r>
-              <a:rPr lang="en-US" altLang="ko-KR" sz="1200" i="1" dirty="0">
-                <a:solidFill>
-                  <a:schemeClr val="bg1"/>
-                </a:solidFill>
-                <a:latin typeface="D2Coding" panose="020B0609020101020101" pitchFamily="49" charset="-127"/>
-                <a:ea typeface="D2Coding" panose="020B0609020101020101" pitchFamily="49" charset="-127"/>
-              </a:rPr>
-              <a:t>"</a:t>
-            </a:r>
-            <a:r>
-              <a:rPr lang="ko-KR" altLang="en-US" sz="1200" i="1" dirty="0">
-                <a:solidFill>
-                  <a:schemeClr val="bg1"/>
-                </a:solidFill>
-                <a:latin typeface="D2Coding" panose="020B0609020101020101" pitchFamily="49" charset="-127"/>
-                <a:ea typeface="D2Coding" panose="020B0609020101020101" pitchFamily="49" charset="-127"/>
-              </a:rPr>
-              <a:t>아침이든 밤이든 패턴 모양만 비슷하면 다 똑같은 특성이겠지</a:t>
-            </a:r>
-            <a:r>
-              <a:rPr lang="en-US" altLang="ko-KR" sz="1200" i="1" dirty="0">
-                <a:solidFill>
-                  <a:schemeClr val="bg1"/>
-                </a:solidFill>
-                <a:latin typeface="D2Coding" panose="020B0609020101020101" pitchFamily="49" charset="-127"/>
-                <a:ea typeface="D2Coding" panose="020B0609020101020101" pitchFamily="49" charset="-127"/>
-              </a:rPr>
-              <a:t>?"</a:t>
-            </a:r>
-            <a:r>
-              <a:rPr lang="ko-KR" altLang="en-US" sz="1200" dirty="0">
-                <a:solidFill>
-                  <a:schemeClr val="bg1"/>
-                </a:solidFill>
-                <a:latin typeface="D2Coding" panose="020B0609020101020101" pitchFamily="49" charset="-127"/>
-                <a:ea typeface="D2Coding" panose="020B0609020101020101" pitchFamily="49" charset="-127"/>
-              </a:rPr>
-              <a:t> 하고 연산하지만 날씨에서는 </a:t>
-            </a:r>
-            <a:r>
-              <a:rPr lang="ko-KR" altLang="en-US" sz="1200" b="1" dirty="0">
-                <a:solidFill>
-                  <a:schemeClr val="bg1"/>
-                </a:solidFill>
-                <a:latin typeface="D2Coding" panose="020B0609020101020101" pitchFamily="49" charset="-127"/>
-                <a:ea typeface="D2Coding" panose="020B0609020101020101" pitchFamily="49" charset="-127"/>
-              </a:rPr>
-              <a:t>발생 시점을 무시하는 순간 잘못된 예측</a:t>
-            </a:r>
-            <a:r>
-              <a:rPr lang="ko-KR" altLang="en-US" sz="1200" dirty="0">
-                <a:solidFill>
-                  <a:schemeClr val="bg1"/>
-                </a:solidFill>
-                <a:latin typeface="D2Coding" panose="020B0609020101020101" pitchFamily="49" charset="-127"/>
-                <a:ea typeface="D2Coding" panose="020B0609020101020101" pitchFamily="49" charset="-127"/>
-              </a:rPr>
-              <a:t>으로 이어지게 됨</a:t>
-            </a:r>
-            <a:endParaRPr lang="en-US" altLang="ko-KR" sz="1200" dirty="0">
-              <a:solidFill>
-                <a:schemeClr val="bg1"/>
-              </a:solidFill>
-              <a:latin typeface="D2Coding" panose="020B0609020101020101" pitchFamily="49" charset="-127"/>
-              <a:ea typeface="D2Coding" panose="020B0609020101020101" pitchFamily="49" charset="-127"/>
-            </a:endParaRPr>
-          </a:p>
-          <a:p>
-            <a:pPr marL="171450" indent="-171450">
-              <a:buFont typeface="Wingdings" panose="05000000000000000000" pitchFamily="2" charset="2"/>
-              <a:buChar char="§"/>
-            </a:pPr>
-            <a:endParaRPr lang="en-US" altLang="ko-KR" sz="1200" dirty="0">
-              <a:solidFill>
-                <a:schemeClr val="bg1"/>
-              </a:solidFill>
-              <a:latin typeface="D2Coding" panose="020B0609020101020101" pitchFamily="49" charset="-127"/>
-              <a:ea typeface="D2Coding" panose="020B0609020101020101" pitchFamily="49" charset="-127"/>
-            </a:endParaRPr>
-          </a:p>
-          <a:p>
-            <a:pPr marL="171450" indent="-171450">
-              <a:buFont typeface="Wingdings" panose="05000000000000000000" pitchFamily="2" charset="2"/>
-              <a:buChar char="§"/>
-            </a:pPr>
-            <a:r>
-              <a:rPr lang="ko-KR" altLang="en-US" sz="1200" dirty="0">
-                <a:solidFill>
-                  <a:schemeClr val="bg1"/>
-                </a:solidFill>
-                <a:latin typeface="D2Coding" panose="020B0609020101020101" pitchFamily="49" charset="-127"/>
-                <a:ea typeface="D2Coding" panose="020B0609020101020101" pitchFamily="49" charset="-127"/>
-              </a:rPr>
-              <a:t>극복하기 위해</a:t>
-            </a:r>
-            <a:r>
-              <a:rPr lang="en-US" altLang="ko-KR" sz="1200" dirty="0">
-                <a:solidFill>
-                  <a:schemeClr val="bg1"/>
-                </a:solidFill>
-                <a:latin typeface="D2Coding" panose="020B0609020101020101" pitchFamily="49" charset="-127"/>
-                <a:ea typeface="D2Coding" panose="020B0609020101020101" pitchFamily="49" charset="-127"/>
-              </a:rPr>
-              <a:t>, </a:t>
-            </a:r>
-            <a:r>
-              <a:rPr lang="en-US" altLang="ko-KR" sz="1200" b="1" dirty="0">
-                <a:solidFill>
-                  <a:schemeClr val="bg1"/>
-                </a:solidFill>
-                <a:latin typeface="D2Coding" panose="020B0609020101020101" pitchFamily="49" charset="-127"/>
-                <a:ea typeface="D2Coding" panose="020B0609020101020101" pitchFamily="49" charset="-127"/>
-              </a:rPr>
-              <a:t>'</a:t>
-            </a:r>
-            <a:r>
-              <a:rPr lang="ko-KR" altLang="en-US" sz="1200" b="1" dirty="0">
-                <a:solidFill>
-                  <a:schemeClr val="bg1"/>
-                </a:solidFill>
-                <a:latin typeface="D2Coding" panose="020B0609020101020101" pitchFamily="49" charset="-127"/>
-                <a:ea typeface="D2Coding" panose="020B0609020101020101" pitchFamily="49" charset="-127"/>
-              </a:rPr>
-              <a:t>절대적인 시점과 순서</a:t>
-            </a:r>
-            <a:r>
-              <a:rPr lang="en-US" altLang="ko-KR" sz="1200" b="1" dirty="0">
-                <a:solidFill>
-                  <a:schemeClr val="bg1"/>
-                </a:solidFill>
-                <a:latin typeface="D2Coding" panose="020B0609020101020101" pitchFamily="49" charset="-127"/>
-                <a:ea typeface="D2Coding" panose="020B0609020101020101" pitchFamily="49" charset="-127"/>
-              </a:rPr>
-              <a:t>'</a:t>
-            </a:r>
-            <a:r>
-              <a:rPr lang="ko-KR" altLang="en-US" sz="1200" b="1" dirty="0">
-                <a:solidFill>
-                  <a:schemeClr val="bg1"/>
-                </a:solidFill>
-                <a:latin typeface="D2Coding" panose="020B0609020101020101" pitchFamily="49" charset="-127"/>
-                <a:ea typeface="D2Coding" panose="020B0609020101020101" pitchFamily="49" charset="-127"/>
-              </a:rPr>
-              <a:t>를 기억하는 </a:t>
-            </a:r>
-            <a:r>
-              <a:rPr lang="en-US" altLang="ko-KR" sz="1200" b="1" dirty="0">
-                <a:solidFill>
-                  <a:schemeClr val="bg1"/>
-                </a:solidFill>
-                <a:latin typeface="D2Coding" panose="020B0609020101020101" pitchFamily="49" charset="-127"/>
-                <a:ea typeface="D2Coding" panose="020B0609020101020101" pitchFamily="49" charset="-127"/>
-              </a:rPr>
-              <a:t>RNN(LSTM/GRU)</a:t>
-            </a:r>
-            <a:r>
-              <a:rPr lang="ko-KR" altLang="en-US" sz="1200" b="1" dirty="0">
-                <a:solidFill>
-                  <a:schemeClr val="bg1"/>
-                </a:solidFill>
-                <a:latin typeface="D2Coding" panose="020B0609020101020101" pitchFamily="49" charset="-127"/>
-                <a:ea typeface="D2Coding" panose="020B0609020101020101" pitchFamily="49" charset="-127"/>
-              </a:rPr>
-              <a:t>이나 </a:t>
-            </a:r>
-            <a:r>
-              <a:rPr lang="en-US" altLang="ko-KR" sz="1200" b="1" dirty="0">
-                <a:solidFill>
-                  <a:schemeClr val="bg1"/>
-                </a:solidFill>
-                <a:latin typeface="D2Coding" panose="020B0609020101020101" pitchFamily="49" charset="-127"/>
-                <a:ea typeface="D2Coding" panose="020B0609020101020101" pitchFamily="49" charset="-127"/>
-              </a:rPr>
-              <a:t>Positional Encoding</a:t>
-            </a:r>
-            <a:r>
-              <a:rPr lang="ko-KR" altLang="en-US" sz="1200" b="1" dirty="0">
-                <a:solidFill>
-                  <a:schemeClr val="bg1"/>
-                </a:solidFill>
-                <a:latin typeface="D2Coding" panose="020B0609020101020101" pitchFamily="49" charset="-127"/>
-                <a:ea typeface="D2Coding" panose="020B0609020101020101" pitchFamily="49" charset="-127"/>
-              </a:rPr>
-              <a:t>을 사용하는 </a:t>
-            </a:r>
-            <a:r>
-              <a:rPr lang="en-US" altLang="ko-KR" sz="1200" b="1" dirty="0">
-                <a:solidFill>
-                  <a:schemeClr val="bg1"/>
-                </a:solidFill>
-                <a:latin typeface="D2Coding" panose="020B0609020101020101" pitchFamily="49" charset="-127"/>
-                <a:ea typeface="D2Coding" panose="020B0609020101020101" pitchFamily="49" charset="-127"/>
-              </a:rPr>
-              <a:t>Transformer </a:t>
-            </a:r>
-            <a:r>
-              <a:rPr lang="ko-KR" altLang="en-US" sz="1200" b="1" dirty="0">
-                <a:solidFill>
-                  <a:schemeClr val="bg1"/>
-                </a:solidFill>
-                <a:latin typeface="D2Coding" panose="020B0609020101020101" pitchFamily="49" charset="-127"/>
-                <a:ea typeface="D2Coding" panose="020B0609020101020101" pitchFamily="49" charset="-127"/>
-              </a:rPr>
-              <a:t>모델</a:t>
-            </a:r>
-            <a:r>
-              <a:rPr lang="ko-KR" altLang="en-US" sz="1200" dirty="0">
-                <a:solidFill>
-                  <a:schemeClr val="bg1"/>
-                </a:solidFill>
-                <a:latin typeface="D2Coding" panose="020B0609020101020101" pitchFamily="49" charset="-127"/>
-                <a:ea typeface="D2Coding" panose="020B0609020101020101" pitchFamily="49" charset="-127"/>
-              </a:rPr>
-              <a:t>이 시계열 예측에서 주로 활용</a:t>
-            </a:r>
-          </a:p>
-        </p:txBody>
-      </p:sp>
-    </p:spTree>
-    <p:extLst>
-      <p:ext uri="{BB962C8B-B14F-4D97-AF65-F5344CB8AC3E}">
-        <p14:creationId xmlns:p14="http://schemas.microsoft.com/office/powerpoint/2010/main" val="2512681007"/>
       </p:ext>
     </p:extLst>
   </p:cSld>
@@ -12271,6 +11304,1178 @@
         <p:cNvPr id="1" name="">
           <a:extLst>
             <a:ext uri="{FF2B5EF4-FFF2-40B4-BE49-F238E27FC236}">
+              <a16:creationId xmlns:a16="http://schemas.microsoft.com/office/drawing/2014/main" id="{4736FB2C-EEEB-DB71-4DC2-C7D4D0A568B6}"/>
+            </a:ext>
+          </a:extLst>
+        </p:cNvPr>
+        <p:cNvGrpSpPr/>
+        <p:nvPr/>
+      </p:nvGrpSpPr>
+      <p:grpSpPr>
+        <a:xfrm>
+          <a:off x="0" y="0"/>
+          <a:ext cx="0" cy="0"/>
+          <a:chOff x="0" y="0"/>
+          <a:chExt cx="0" cy="0"/>
+        </a:xfrm>
+      </p:grpSpPr>
+      <p:sp>
+        <p:nvSpPr>
+          <p:cNvPr id="3" name="제목 1">
+            <a:extLst>
+              <a:ext uri="{FF2B5EF4-FFF2-40B4-BE49-F238E27FC236}">
+                <a16:creationId xmlns:a16="http://schemas.microsoft.com/office/drawing/2014/main" id="{18E24248-559C-3D0B-7953-7FA370536A9B}"/>
+              </a:ext>
+            </a:extLst>
+          </p:cNvPr>
+          <p:cNvSpPr txBox="1">
+            <a:spLocks/>
+          </p:cNvSpPr>
+          <p:nvPr/>
+        </p:nvSpPr>
+        <p:spPr>
+          <a:xfrm>
+            <a:off x="475645" y="481983"/>
+            <a:ext cx="10353762" cy="766439"/>
+          </a:xfrm>
+          <a:prstGeom prst="rect">
+            <a:avLst/>
+          </a:prstGeom>
+        </p:spPr>
+        <p:txBody>
+          <a:bodyPr vert="horz" lIns="91440" tIns="45720" rIns="91440" bIns="45720" rtlCol="0" anchor="ctr">
+            <a:normAutofit/>
+          </a:bodyPr>
+          <a:lstStyle>
+            <a:lvl1pPr algn="ctr" defTabSz="914400" rtl="0" eaLnBrk="1" latinLnBrk="1" hangingPunct="1">
+              <a:lnSpc>
+                <a:spcPct val="90000"/>
+              </a:lnSpc>
+              <a:spcBef>
+                <a:spcPct val="0"/>
+              </a:spcBef>
+              <a:buNone/>
+              <a:defRPr sz="3200" kern="1200" cap="all" baseline="0">
+                <a:solidFill>
+                  <a:schemeClr val="tx1"/>
+                </a:solidFill>
+                <a:effectLst/>
+                <a:latin typeface="Batang" panose="02030600000101010101" pitchFamily="18" charset="-127"/>
+                <a:ea typeface="Batang" panose="02030600000101010101" pitchFamily="18" charset="-127"/>
+                <a:cs typeface="+mj-cs"/>
+              </a:defRPr>
+            </a:lvl1pPr>
+          </a:lstStyle>
+          <a:p>
+            <a:pPr algn="l"/>
+            <a:r>
+              <a:rPr lang="en-US" altLang="ko-KR" sz="2800" cap="none" dirty="0">
+                <a:solidFill>
+                  <a:schemeClr val="bg2">
+                    <a:lumMod val="25000"/>
+                  </a:schemeClr>
+                </a:solidFill>
+                <a:latin typeface="D2Coding" panose="020B0609020101020101" pitchFamily="49" charset="-127"/>
+                <a:ea typeface="D2Coding" panose="020B0609020101020101" pitchFamily="49" charset="-127"/>
+                <a:cs typeface="Segoe UI Light" panose="020B0502040204020203" pitchFamily="34" charset="0"/>
+              </a:rPr>
+              <a:t>1D CNN(1D Convolutional Neural Networks)</a:t>
+            </a:r>
+            <a:endParaRPr lang="ko-KR" altLang="en-US" sz="2800" cap="none" dirty="0">
+              <a:solidFill>
+                <a:schemeClr val="bg2">
+                  <a:lumMod val="25000"/>
+                </a:schemeClr>
+              </a:solidFill>
+              <a:latin typeface="D2Coding" panose="020B0609020101020101" pitchFamily="49" charset="-127"/>
+              <a:ea typeface="D2Coding" panose="020B0609020101020101" pitchFamily="49" charset="-127"/>
+              <a:cs typeface="Segoe UI Light" panose="020B0502040204020203" pitchFamily="34" charset="0"/>
+            </a:endParaRPr>
+          </a:p>
+        </p:txBody>
+      </p:sp>
+      <p:sp>
+        <p:nvSpPr>
+          <p:cNvPr id="4" name="슬라이드 번호 개체 틀 3">
+            <a:extLst>
+              <a:ext uri="{FF2B5EF4-FFF2-40B4-BE49-F238E27FC236}">
+                <a16:creationId xmlns:a16="http://schemas.microsoft.com/office/drawing/2014/main" id="{8D80805A-22BE-081A-D40D-9248E575BFD1}"/>
+              </a:ext>
+            </a:extLst>
+          </p:cNvPr>
+          <p:cNvSpPr>
+            <a:spLocks noGrp="1"/>
+          </p:cNvSpPr>
+          <p:nvPr>
+            <p:ph type="sldNum" sz="quarter" idx="12"/>
+          </p:nvPr>
+        </p:nvSpPr>
+        <p:spPr>
+          <a:xfrm>
+            <a:off x="11162487" y="299420"/>
+            <a:ext cx="753545" cy="365125"/>
+          </a:xfrm>
+        </p:spPr>
+        <p:txBody>
+          <a:bodyPr/>
+          <a:lstStyle/>
+          <a:p>
+            <a:fld id="{D57F1E4F-1CFF-5643-939E-217C01CDF565}" type="slidenum">
+              <a:rPr lang="en-US" sz="1400" b="1" smtClean="0">
+                <a:latin typeface="Times New Roman" panose="02020603050405020304" pitchFamily="18" charset="0"/>
+                <a:ea typeface="Verdana" panose="020B0604030504040204" pitchFamily="34" charset="0"/>
+                <a:cs typeface="Times New Roman" panose="02020603050405020304" pitchFamily="18" charset="0"/>
+              </a:rPr>
+              <a:pPr/>
+              <a:t>20</a:t>
+            </a:fld>
+            <a:endParaRPr lang="en-US" sz="1400" b="1" dirty="0">
+              <a:latin typeface="Times New Roman" panose="02020603050405020304" pitchFamily="18" charset="0"/>
+              <a:ea typeface="Verdana" panose="020B0604030504040204" pitchFamily="34" charset="0"/>
+              <a:cs typeface="Times New Roman" panose="02020603050405020304" pitchFamily="18" charset="0"/>
+            </a:endParaRPr>
+          </a:p>
+        </p:txBody>
+      </p:sp>
+      <p:sp>
+        <p:nvSpPr>
+          <p:cNvPr id="8" name="TextBox 7">
+            <a:extLst>
+              <a:ext uri="{FF2B5EF4-FFF2-40B4-BE49-F238E27FC236}">
+                <a16:creationId xmlns:a16="http://schemas.microsoft.com/office/drawing/2014/main" id="{92FE83F8-36A8-6031-AC00-C082CBCB8445}"/>
+              </a:ext>
+            </a:extLst>
+          </p:cNvPr>
+          <p:cNvSpPr txBox="1"/>
+          <p:nvPr/>
+        </p:nvSpPr>
+        <p:spPr>
+          <a:xfrm>
+            <a:off x="559528" y="1196976"/>
+            <a:ext cx="11356504" cy="2090637"/>
+          </a:xfrm>
+          <a:prstGeom prst="rect">
+            <a:avLst/>
+          </a:prstGeom>
+          <a:noFill/>
+        </p:spPr>
+        <p:txBody>
+          <a:bodyPr wrap="square">
+            <a:spAutoFit/>
+          </a:bodyPr>
+          <a:lstStyle/>
+          <a:p>
+            <a:pPr marL="285750" indent="-285750">
+              <a:lnSpc>
+                <a:spcPct val="150000"/>
+              </a:lnSpc>
+              <a:buFont typeface="Wingdings" panose="05000000000000000000" pitchFamily="2" charset="2"/>
+              <a:buChar char="§"/>
+            </a:pPr>
+            <a:r>
+              <a:rPr lang="ko-KR" altLang="en-US" sz="1600" dirty="0">
+                <a:latin typeface="D2Coding" panose="020B0609020101020101" pitchFamily="49" charset="-127"/>
+                <a:ea typeface="D2Coding" panose="020B0609020101020101" pitchFamily="49" charset="-127"/>
+              </a:rPr>
+              <a:t>오디오 파형이나 텍스트처럼 </a:t>
+            </a:r>
+            <a:r>
+              <a:rPr lang="en-US" altLang="ko-KR" sz="1600" dirty="0">
+                <a:latin typeface="D2Coding" panose="020B0609020101020101" pitchFamily="49" charset="-127"/>
+                <a:ea typeface="D2Coding" panose="020B0609020101020101" pitchFamily="49" charset="-127"/>
+              </a:rPr>
+              <a:t>"</a:t>
+            </a:r>
+            <a:r>
+              <a:rPr lang="ko-KR" altLang="en-US" sz="1600" dirty="0">
+                <a:latin typeface="D2Coding" panose="020B0609020101020101" pitchFamily="49" charset="-127"/>
+                <a:ea typeface="D2Coding" panose="020B0609020101020101" pitchFamily="49" charset="-127"/>
+              </a:rPr>
+              <a:t>패턴이 어디서 나타나든 같은 의미를 가지는</a:t>
+            </a:r>
+            <a:r>
+              <a:rPr lang="en-US" altLang="ko-KR" sz="1600" dirty="0">
+                <a:latin typeface="D2Coding" panose="020B0609020101020101" pitchFamily="49" charset="-127"/>
+                <a:ea typeface="D2Coding" panose="020B0609020101020101" pitchFamily="49" charset="-127"/>
+              </a:rPr>
+              <a:t>" </a:t>
+            </a:r>
+            <a:r>
+              <a:rPr lang="ko-KR" altLang="en-US" sz="1600" dirty="0">
+                <a:latin typeface="D2Coding" panose="020B0609020101020101" pitchFamily="49" charset="-127"/>
+                <a:ea typeface="D2Coding" panose="020B0609020101020101" pitchFamily="49" charset="-127"/>
+              </a:rPr>
+              <a:t>데이터에 적합</a:t>
+            </a:r>
+            <a:endParaRPr lang="en-US" altLang="ko-KR" sz="1600" dirty="0">
+              <a:latin typeface="D2Coding" panose="020B0609020101020101" pitchFamily="49" charset="-127"/>
+              <a:ea typeface="D2Coding" panose="020B0609020101020101" pitchFamily="49" charset="-127"/>
+            </a:endParaRPr>
+          </a:p>
+          <a:p>
+            <a:pPr marL="285750" indent="-285750">
+              <a:lnSpc>
+                <a:spcPct val="150000"/>
+              </a:lnSpc>
+              <a:buFont typeface="Wingdings" panose="05000000000000000000" pitchFamily="2" charset="2"/>
+              <a:buChar char="§"/>
+            </a:pPr>
+            <a:r>
+              <a:rPr lang="ko-KR" altLang="en-US" sz="1600" dirty="0">
+                <a:latin typeface="D2Coding" panose="020B0609020101020101" pitchFamily="49" charset="-127"/>
+                <a:ea typeface="D2Coding" panose="020B0609020101020101" pitchFamily="49" charset="-127"/>
+              </a:rPr>
+              <a:t>날씨데이터는 평행이동 불변성</a:t>
+            </a:r>
+            <a:r>
+              <a:rPr lang="en-US" altLang="ko-KR" sz="1600" dirty="0">
+                <a:latin typeface="D2Coding" panose="020B0609020101020101" pitchFamily="49" charset="-127"/>
+                <a:ea typeface="D2Coding" panose="020B0609020101020101" pitchFamily="49" charset="-127"/>
+              </a:rPr>
+              <a:t>(Translation Invariance)</a:t>
+            </a:r>
+            <a:r>
+              <a:rPr lang="ko-KR" altLang="en-US" sz="1600" dirty="0">
+                <a:latin typeface="D2Coding" panose="020B0609020101020101" pitchFamily="49" charset="-127"/>
+                <a:ea typeface="D2Coding" panose="020B0609020101020101" pitchFamily="49" charset="-127"/>
+              </a:rPr>
+              <a:t>에 적합하지 않음</a:t>
+            </a:r>
+            <a:endParaRPr lang="en-US" altLang="ko-KR" sz="1600" dirty="0">
+              <a:latin typeface="D2Coding" panose="020B0609020101020101" pitchFamily="49" charset="-127"/>
+              <a:ea typeface="D2Coding" panose="020B0609020101020101" pitchFamily="49" charset="-127"/>
+            </a:endParaRPr>
+          </a:p>
+          <a:p>
+            <a:pPr marL="742950" lvl="1" indent="-285750">
+              <a:lnSpc>
+                <a:spcPct val="150000"/>
+              </a:lnSpc>
+              <a:buFont typeface="Wingdings" panose="05000000000000000000" pitchFamily="2" charset="2"/>
+              <a:buChar char="§"/>
+            </a:pPr>
+            <a:r>
+              <a:rPr lang="ko-KR" altLang="en-US" sz="1400" dirty="0">
+                <a:latin typeface="D2Coding" panose="020B0609020101020101" pitchFamily="49" charset="-127"/>
+                <a:ea typeface="D2Coding" panose="020B0609020101020101" pitchFamily="49" charset="-127"/>
+              </a:rPr>
+              <a:t>어느 위치</a:t>
+            </a:r>
+            <a:r>
+              <a:rPr lang="en-US" altLang="ko-KR" sz="1400" dirty="0">
+                <a:latin typeface="D2Coding" panose="020B0609020101020101" pitchFamily="49" charset="-127"/>
+                <a:ea typeface="D2Coding" panose="020B0609020101020101" pitchFamily="49" charset="-127"/>
+              </a:rPr>
+              <a:t>(</a:t>
+            </a:r>
+            <a:r>
+              <a:rPr lang="ko-KR" altLang="en-US" sz="1400" dirty="0">
+                <a:latin typeface="D2Coding" panose="020B0609020101020101" pitchFamily="49" charset="-127"/>
+                <a:ea typeface="D2Coding" panose="020B0609020101020101" pitchFamily="49" charset="-127"/>
+              </a:rPr>
+              <a:t>공간</a:t>
+            </a:r>
+            <a:r>
+              <a:rPr lang="en-US" altLang="ko-KR" sz="1400" dirty="0">
+                <a:latin typeface="D2Coding" panose="020B0609020101020101" pitchFamily="49" charset="-127"/>
+                <a:ea typeface="D2Coding" panose="020B0609020101020101" pitchFamily="49" charset="-127"/>
+              </a:rPr>
+              <a:t>)</a:t>
+            </a:r>
+            <a:r>
+              <a:rPr lang="ko-KR" altLang="en-US" sz="1400" dirty="0">
+                <a:latin typeface="D2Coding" panose="020B0609020101020101" pitchFamily="49" charset="-127"/>
+                <a:ea typeface="D2Coding" panose="020B0609020101020101" pitchFamily="49" charset="-127"/>
+              </a:rPr>
+              <a:t>나 어느 시점</a:t>
+            </a:r>
+            <a:r>
+              <a:rPr lang="en-US" altLang="ko-KR" sz="1400" dirty="0">
+                <a:latin typeface="D2Coding" panose="020B0609020101020101" pitchFamily="49" charset="-127"/>
+                <a:ea typeface="D2Coding" panose="020B0609020101020101" pitchFamily="49" charset="-127"/>
+              </a:rPr>
+              <a:t>(</a:t>
+            </a:r>
+            <a:r>
+              <a:rPr lang="ko-KR" altLang="en-US" sz="1400" dirty="0">
+                <a:latin typeface="D2Coding" panose="020B0609020101020101" pitchFamily="49" charset="-127"/>
+                <a:ea typeface="D2Coding" panose="020B0609020101020101" pitchFamily="49" charset="-127"/>
+              </a:rPr>
+              <a:t>시간</a:t>
+            </a:r>
+            <a:r>
+              <a:rPr lang="en-US" altLang="ko-KR" sz="1400" dirty="0">
+                <a:latin typeface="D2Coding" panose="020B0609020101020101" pitchFamily="49" charset="-127"/>
+                <a:ea typeface="D2Coding" panose="020B0609020101020101" pitchFamily="49" charset="-127"/>
+              </a:rPr>
+              <a:t>)</a:t>
+            </a:r>
+            <a:r>
+              <a:rPr lang="ko-KR" altLang="en-US" sz="1400" dirty="0">
+                <a:latin typeface="D2Coding" panose="020B0609020101020101" pitchFamily="49" charset="-127"/>
+                <a:ea typeface="D2Coding" panose="020B0609020101020101" pitchFamily="49" charset="-127"/>
+              </a:rPr>
+              <a:t>에서 발생하더라도 그 본질적인 의미나 성질이 변하지 않고 일정하게 유지되는 성질</a:t>
+            </a:r>
+            <a:r>
+              <a:rPr lang="en-US" altLang="ko-KR" sz="1400" dirty="0">
+                <a:latin typeface="D2Coding" panose="020B0609020101020101" pitchFamily="49" charset="-127"/>
+                <a:ea typeface="D2Coding" panose="020B0609020101020101" pitchFamily="49" charset="-127"/>
+              </a:rPr>
+              <a:t>(</a:t>
+            </a:r>
+            <a:r>
+              <a:rPr lang="ko-KR" altLang="en-US" sz="1400" dirty="0">
+                <a:latin typeface="D2Coding" panose="020B0609020101020101" pitchFamily="49" charset="-127"/>
+                <a:ea typeface="D2Coding" panose="020B0609020101020101" pitchFamily="49" charset="-127"/>
+              </a:rPr>
+              <a:t>이미지에는 위치에 따라 불변하지만 기후 데이터에는 적합하지 않음</a:t>
+            </a:r>
+            <a:r>
+              <a:rPr lang="en-US" altLang="ko-KR" sz="1400" dirty="0">
+                <a:latin typeface="D2Coding" panose="020B0609020101020101" pitchFamily="49" charset="-127"/>
+                <a:ea typeface="D2Coding" panose="020B0609020101020101" pitchFamily="49" charset="-127"/>
+              </a:rPr>
+              <a:t>)</a:t>
+            </a:r>
+            <a:endParaRPr lang="ko-KR" altLang="en-US" sz="1400" dirty="0">
+              <a:latin typeface="D2Coding" panose="020B0609020101020101" pitchFamily="49" charset="-127"/>
+              <a:ea typeface="D2Coding" panose="020B0609020101020101" pitchFamily="49" charset="-127"/>
+            </a:endParaRPr>
+          </a:p>
+          <a:p>
+            <a:pPr marL="742950" lvl="1" indent="-285750">
+              <a:lnSpc>
+                <a:spcPct val="150000"/>
+              </a:lnSpc>
+              <a:buFont typeface="Wingdings" panose="05000000000000000000" pitchFamily="2" charset="2"/>
+              <a:buChar char="§"/>
+            </a:pPr>
+            <a:r>
+              <a:rPr lang="ko-KR" altLang="en-US" sz="1400" dirty="0">
+                <a:latin typeface="D2Coding" panose="020B0609020101020101" pitchFamily="49" charset="-127"/>
+                <a:ea typeface="D2Coding" panose="020B0609020101020101" pitchFamily="49" charset="-127"/>
+              </a:rPr>
+              <a:t>강아지 이미지가 왼쪽</a:t>
+            </a:r>
+            <a:r>
+              <a:rPr lang="en-US" altLang="ko-KR" sz="1400" dirty="0">
+                <a:latin typeface="D2Coding" panose="020B0609020101020101" pitchFamily="49" charset="-127"/>
+                <a:ea typeface="D2Coding" panose="020B0609020101020101" pitchFamily="49" charset="-127"/>
+              </a:rPr>
+              <a:t>, </a:t>
+            </a:r>
+            <a:r>
+              <a:rPr lang="ko-KR" altLang="en-US" sz="1400" dirty="0">
+                <a:latin typeface="D2Coding" panose="020B0609020101020101" pitchFamily="49" charset="-127"/>
+                <a:ea typeface="D2Coding" panose="020B0609020101020101" pitchFamily="49" charset="-127"/>
+              </a:rPr>
+              <a:t>오른쪽</a:t>
+            </a:r>
+            <a:r>
+              <a:rPr lang="en-US" altLang="ko-KR" sz="1400" dirty="0">
+                <a:latin typeface="D2Coding" panose="020B0609020101020101" pitchFamily="49" charset="-127"/>
+                <a:ea typeface="D2Coding" panose="020B0609020101020101" pitchFamily="49" charset="-127"/>
+              </a:rPr>
+              <a:t>,</a:t>
+            </a:r>
+            <a:r>
+              <a:rPr lang="ko-KR" altLang="en-US" sz="1400" dirty="0">
+                <a:latin typeface="D2Coding" panose="020B0609020101020101" pitchFamily="49" charset="-127"/>
+                <a:ea typeface="D2Coding" panose="020B0609020101020101" pitchFamily="49" charset="-127"/>
+              </a:rPr>
+              <a:t> 아래에 있든 똑같이 </a:t>
+            </a:r>
+            <a:r>
+              <a:rPr lang="en-US" altLang="ko-KR" sz="1400" dirty="0">
+                <a:latin typeface="D2Coding" panose="020B0609020101020101" pitchFamily="49" charset="-127"/>
+                <a:ea typeface="D2Coding" panose="020B0609020101020101" pitchFamily="49" charset="-127"/>
+              </a:rPr>
+              <a:t>'</a:t>
+            </a:r>
+            <a:r>
+              <a:rPr lang="ko-KR" altLang="en-US" sz="1400" dirty="0">
+                <a:latin typeface="D2Coding" panose="020B0609020101020101" pitchFamily="49" charset="-127"/>
+                <a:ea typeface="D2Coding" panose="020B0609020101020101" pitchFamily="49" charset="-127"/>
+              </a:rPr>
+              <a:t>강아지</a:t>
+            </a:r>
+            <a:r>
+              <a:rPr lang="en-US" altLang="ko-KR" sz="1400" dirty="0">
+                <a:latin typeface="D2Coding" panose="020B0609020101020101" pitchFamily="49" charset="-127"/>
+                <a:ea typeface="D2Coding" panose="020B0609020101020101" pitchFamily="49" charset="-127"/>
+              </a:rPr>
+              <a:t>'</a:t>
+            </a:r>
+            <a:r>
+              <a:rPr lang="ko-KR" altLang="en-US" sz="1400" dirty="0">
+                <a:latin typeface="D2Coding" panose="020B0609020101020101" pitchFamily="49" charset="-127"/>
+                <a:ea typeface="D2Coding" panose="020B0609020101020101" pitchFamily="49" charset="-127"/>
+              </a:rPr>
+              <a:t>로 인식하여 데이터의 본질은 변하지 않음</a:t>
+            </a:r>
+            <a:endParaRPr lang="en-US" altLang="ko-KR" sz="1400" dirty="0">
+              <a:latin typeface="D2Coding" panose="020B0609020101020101" pitchFamily="49" charset="-127"/>
+              <a:ea typeface="D2Coding" panose="020B0609020101020101" pitchFamily="49" charset="-127"/>
+            </a:endParaRPr>
+          </a:p>
+          <a:p>
+            <a:pPr marL="742950" lvl="1" indent="-285750">
+              <a:lnSpc>
+                <a:spcPct val="150000"/>
+              </a:lnSpc>
+              <a:buFont typeface="Wingdings" panose="05000000000000000000" pitchFamily="2" charset="2"/>
+              <a:buChar char="§"/>
+            </a:pPr>
+            <a:r>
+              <a:rPr lang="en-US" altLang="ko-KR" sz="1400" dirty="0">
+                <a:latin typeface="D2Coding" panose="020B0609020101020101" pitchFamily="49" charset="-127"/>
+                <a:ea typeface="D2Coding" panose="020B0609020101020101" pitchFamily="49" charset="-127"/>
+              </a:rPr>
+              <a:t>"</a:t>
+            </a:r>
+            <a:r>
+              <a:rPr lang="ko-KR" altLang="en-US" sz="1400" dirty="0">
+                <a:latin typeface="D2Coding" panose="020B0609020101020101" pitchFamily="49" charset="-127"/>
+                <a:ea typeface="D2Coding" panose="020B0609020101020101" pitchFamily="49" charset="-127"/>
+              </a:rPr>
+              <a:t>사과가 맛있다</a:t>
+            </a:r>
+            <a:r>
+              <a:rPr lang="en-US" altLang="ko-KR" sz="1400" dirty="0">
+                <a:latin typeface="D2Coding" panose="020B0609020101020101" pitchFamily="49" charset="-127"/>
+                <a:ea typeface="D2Coding" panose="020B0609020101020101" pitchFamily="49" charset="-127"/>
+              </a:rPr>
+              <a:t>"</a:t>
+            </a:r>
+            <a:r>
+              <a:rPr lang="ko-KR" altLang="en-US" sz="1400" dirty="0">
+                <a:latin typeface="D2Coding" panose="020B0609020101020101" pitchFamily="49" charset="-127"/>
+                <a:ea typeface="D2Coding" panose="020B0609020101020101" pitchFamily="49" charset="-127"/>
+              </a:rPr>
+              <a:t>라는 표현이 글의 맨 앞에 나오든 맨 뒤에 나오든 </a:t>
+            </a:r>
+            <a:r>
+              <a:rPr lang="en-US" altLang="ko-KR" sz="1400" dirty="0">
+                <a:latin typeface="D2Coding" panose="020B0609020101020101" pitchFamily="49" charset="-127"/>
+                <a:ea typeface="D2Coding" panose="020B0609020101020101" pitchFamily="49" charset="-127"/>
+              </a:rPr>
+              <a:t>"</a:t>
+            </a:r>
+            <a:r>
+              <a:rPr lang="ko-KR" altLang="en-US" sz="1400" dirty="0">
+                <a:latin typeface="D2Coding" panose="020B0609020101020101" pitchFamily="49" charset="-127"/>
+                <a:ea typeface="D2Coding" panose="020B0609020101020101" pitchFamily="49" charset="-127"/>
+              </a:rPr>
+              <a:t>사과가 맛있다</a:t>
+            </a:r>
+            <a:r>
+              <a:rPr lang="en-US" altLang="ko-KR" sz="1400" dirty="0">
+                <a:latin typeface="D2Coding" panose="020B0609020101020101" pitchFamily="49" charset="-127"/>
+                <a:ea typeface="D2Coding" panose="020B0609020101020101" pitchFamily="49" charset="-127"/>
+              </a:rPr>
+              <a:t>"</a:t>
+            </a:r>
+            <a:r>
+              <a:rPr lang="ko-KR" altLang="en-US" sz="1400" dirty="0">
+                <a:latin typeface="D2Coding" panose="020B0609020101020101" pitchFamily="49" charset="-127"/>
+                <a:ea typeface="D2Coding" panose="020B0609020101020101" pitchFamily="49" charset="-127"/>
+              </a:rPr>
+              <a:t>라는 긍정적인 의미 자체는 변하지 않음</a:t>
+            </a:r>
+            <a:endParaRPr lang="en-US" altLang="ko-KR" sz="1400" dirty="0">
+              <a:latin typeface="D2Coding" panose="020B0609020101020101" pitchFamily="49" charset="-127"/>
+              <a:ea typeface="D2Coding" panose="020B0609020101020101" pitchFamily="49" charset="-127"/>
+            </a:endParaRPr>
+          </a:p>
+        </p:txBody>
+      </p:sp>
+      <p:sp>
+        <p:nvSpPr>
+          <p:cNvPr id="2" name="AutoShape 2" descr="1-D convolution">
+            <a:extLst>
+              <a:ext uri="{FF2B5EF4-FFF2-40B4-BE49-F238E27FC236}">
+                <a16:creationId xmlns:a16="http://schemas.microsoft.com/office/drawing/2014/main" id="{6C3B461C-7D12-B35F-31D3-B7CC10AAD4AF}"/>
+              </a:ext>
+            </a:extLst>
+          </p:cNvPr>
+          <p:cNvSpPr>
+            <a:spLocks noChangeAspect="1" noChangeArrowheads="1"/>
+          </p:cNvSpPr>
+          <p:nvPr/>
+        </p:nvSpPr>
+        <p:spPr bwMode="auto">
+          <a:xfrm>
+            <a:off x="6591300" y="4870037"/>
+            <a:ext cx="304800" cy="304800"/>
+          </a:xfrm>
+          <a:prstGeom prst="rect">
+            <a:avLst/>
+          </a:prstGeom>
+          <a:noFill/>
+          <a:extLst>
+            <a:ext uri="{909E8E84-426E-40DD-AFC4-6F175D3DCCD1}">
+              <a14:hiddenFill xmlns:a14="http://schemas.microsoft.com/office/drawing/2010/main">
+                <a:solidFill>
+                  <a:srgbClr val="FFFFFF"/>
+                </a:solidFill>
+              </a14:hiddenFill>
+            </a:ext>
+          </a:extLst>
+        </p:spPr>
+        <p:txBody>
+          <a:bodyPr vert="horz" wrap="square" lIns="91440" tIns="45720" rIns="91440" bIns="45720" numCol="1" anchor="t" anchorCtr="0" compatLnSpc="1">
+            <a:prstTxWarp prst="textNoShape">
+              <a:avLst/>
+            </a:prstTxWarp>
+          </a:bodyPr>
+          <a:lstStyle/>
+          <a:p>
+            <a:endParaRPr lang="ko-KR" altLang="en-US"/>
+          </a:p>
+        </p:txBody>
+      </p:sp>
+      <p:pic>
+        <p:nvPicPr>
+          <p:cNvPr id="7" name="그림 6">
+            <a:extLst>
+              <a:ext uri="{FF2B5EF4-FFF2-40B4-BE49-F238E27FC236}">
+                <a16:creationId xmlns:a16="http://schemas.microsoft.com/office/drawing/2014/main" id="{E412CF84-A41B-783A-9C4F-FA9BC386DFEF}"/>
+              </a:ext>
+            </a:extLst>
+          </p:cNvPr>
+          <p:cNvPicPr>
+            <a:picLocks noChangeAspect="1"/>
+          </p:cNvPicPr>
+          <p:nvPr/>
+        </p:nvPicPr>
+        <p:blipFill>
+          <a:blip r:embed="rId2"/>
+          <a:stretch>
+            <a:fillRect/>
+          </a:stretch>
+        </p:blipFill>
+        <p:spPr>
+          <a:xfrm>
+            <a:off x="668736" y="3935931"/>
+            <a:ext cx="5246289" cy="1470975"/>
+          </a:xfrm>
+          <a:prstGeom prst="rect">
+            <a:avLst/>
+          </a:prstGeom>
+        </p:spPr>
+      </p:pic>
+      <p:sp>
+        <p:nvSpPr>
+          <p:cNvPr id="9" name="TextBox 8">
+            <a:extLst>
+              <a:ext uri="{FF2B5EF4-FFF2-40B4-BE49-F238E27FC236}">
+                <a16:creationId xmlns:a16="http://schemas.microsoft.com/office/drawing/2014/main" id="{0310F769-F44C-F11A-90D4-104EA576D86E}"/>
+              </a:ext>
+            </a:extLst>
+          </p:cNvPr>
+          <p:cNvSpPr txBox="1"/>
+          <p:nvPr/>
+        </p:nvSpPr>
+        <p:spPr>
+          <a:xfrm>
+            <a:off x="588103" y="5686209"/>
+            <a:ext cx="5480988" cy="307777"/>
+          </a:xfrm>
+          <a:prstGeom prst="rect">
+            <a:avLst/>
+          </a:prstGeom>
+          <a:noFill/>
+        </p:spPr>
+        <p:txBody>
+          <a:bodyPr wrap="none" rtlCol="0">
+            <a:spAutoFit/>
+          </a:bodyPr>
+          <a:lstStyle/>
+          <a:p>
+            <a:r>
+              <a:rPr lang="ko-KR" altLang="en-US" sz="1400" dirty="0">
+                <a:latin typeface="D2Coding" panose="020B0609020101020101" pitchFamily="49" charset="-127"/>
+                <a:ea typeface="D2Coding" panose="020B0609020101020101" pitchFamily="49" charset="-127"/>
+                <a:hlinkClick r:id="rId3"/>
+              </a:rPr>
+              <a:t>자연어 처리를 위한 </a:t>
+            </a:r>
+            <a:r>
+              <a:rPr lang="en-US" altLang="ko-KR" sz="1400" dirty="0">
+                <a:latin typeface="D2Coding" panose="020B0609020101020101" pitchFamily="49" charset="-127"/>
+                <a:ea typeface="D2Coding" panose="020B0609020101020101" pitchFamily="49" charset="-127"/>
+                <a:hlinkClick r:id="rId3"/>
+              </a:rPr>
+              <a:t>1D CNN(1D Convolutional Neural Networks)</a:t>
+            </a:r>
+            <a:endParaRPr lang="ko-KR" altLang="en-US" sz="1400" dirty="0">
+              <a:latin typeface="D2Coding" panose="020B0609020101020101" pitchFamily="49" charset="-127"/>
+              <a:ea typeface="D2Coding" panose="020B0609020101020101" pitchFamily="49" charset="-127"/>
+            </a:endParaRPr>
+          </a:p>
+        </p:txBody>
+      </p:sp>
+      <p:sp>
+        <p:nvSpPr>
+          <p:cNvPr id="10" name="TextBox 9">
+            <a:extLst>
+              <a:ext uri="{FF2B5EF4-FFF2-40B4-BE49-F238E27FC236}">
+                <a16:creationId xmlns:a16="http://schemas.microsoft.com/office/drawing/2014/main" id="{7C9C16B3-9B9B-5ECD-140B-47C71021C5B6}"/>
+              </a:ext>
+            </a:extLst>
+          </p:cNvPr>
+          <p:cNvSpPr txBox="1"/>
+          <p:nvPr/>
+        </p:nvSpPr>
+        <p:spPr>
+          <a:xfrm>
+            <a:off x="6266355" y="3925476"/>
+            <a:ext cx="5480988" cy="2123658"/>
+          </a:xfrm>
+          <a:prstGeom prst="rect">
+            <a:avLst/>
+          </a:prstGeom>
+          <a:solidFill>
+            <a:schemeClr val="tx1"/>
+          </a:solidFill>
+        </p:spPr>
+        <p:txBody>
+          <a:bodyPr wrap="square">
+            <a:spAutoFit/>
+          </a:bodyPr>
+          <a:lstStyle/>
+          <a:p>
+            <a:pPr marL="171450" indent="-171450">
+              <a:buFont typeface="Wingdings" panose="05000000000000000000" pitchFamily="2" charset="2"/>
+              <a:buChar char="§"/>
+            </a:pPr>
+            <a:r>
+              <a:rPr lang="ko-KR" altLang="en-US" sz="1200" dirty="0">
+                <a:solidFill>
+                  <a:schemeClr val="bg1"/>
+                </a:solidFill>
+                <a:latin typeface="D2Coding" panose="020B0609020101020101" pitchFamily="49" charset="-127"/>
+                <a:ea typeface="D2Coding" panose="020B0609020101020101" pitchFamily="49" charset="-127"/>
+              </a:rPr>
+              <a:t>똑같은 </a:t>
+            </a:r>
+            <a:r>
+              <a:rPr lang="en-US" altLang="ko-KR" sz="1200" dirty="0">
+                <a:solidFill>
+                  <a:schemeClr val="bg1"/>
+                </a:solidFill>
+                <a:latin typeface="D2Coding" panose="020B0609020101020101" pitchFamily="49" charset="-127"/>
+                <a:ea typeface="D2Coding" panose="020B0609020101020101" pitchFamily="49" charset="-127"/>
+              </a:rPr>
+              <a:t>'1</a:t>
+            </a:r>
+            <a:r>
+              <a:rPr lang="ko-KR" altLang="en-US" sz="1200" dirty="0">
+                <a:solidFill>
+                  <a:schemeClr val="bg1"/>
+                </a:solidFill>
+                <a:latin typeface="D2Coding" panose="020B0609020101020101" pitchFamily="49" charset="-127"/>
+                <a:ea typeface="D2Coding" panose="020B0609020101020101" pitchFamily="49" charset="-127"/>
+              </a:rPr>
+              <a:t>시간 동안 </a:t>
+            </a:r>
+            <a:r>
+              <a:rPr lang="en-US" altLang="ko-KR" sz="1200" dirty="0">
+                <a:solidFill>
+                  <a:schemeClr val="bg1"/>
+                </a:solidFill>
+                <a:latin typeface="D2Coding" panose="020B0609020101020101" pitchFamily="49" charset="-127"/>
+                <a:ea typeface="D2Coding" panose="020B0609020101020101" pitchFamily="49" charset="-127"/>
+              </a:rPr>
+              <a:t>5</a:t>
+            </a:r>
+            <a:r>
+              <a:rPr lang="ko-KR" altLang="en-US" sz="1200" dirty="0">
+                <a:solidFill>
+                  <a:schemeClr val="bg1"/>
+                </a:solidFill>
+                <a:latin typeface="D2Coding" panose="020B0609020101020101" pitchFamily="49" charset="-127"/>
+                <a:ea typeface="D2Coding" panose="020B0609020101020101" pitchFamily="49" charset="-127"/>
+              </a:rPr>
+              <a:t>도 상승</a:t>
+            </a:r>
+            <a:r>
+              <a:rPr lang="en-US" altLang="ko-KR" sz="1200" dirty="0">
+                <a:solidFill>
+                  <a:schemeClr val="bg1"/>
+                </a:solidFill>
+                <a:latin typeface="D2Coding" panose="020B0609020101020101" pitchFamily="49" charset="-127"/>
+                <a:ea typeface="D2Coding" panose="020B0609020101020101" pitchFamily="49" charset="-127"/>
+              </a:rPr>
+              <a:t>'</a:t>
+            </a:r>
+            <a:r>
+              <a:rPr lang="ko-KR" altLang="en-US" sz="1200" dirty="0">
+                <a:solidFill>
+                  <a:schemeClr val="bg1"/>
+                </a:solidFill>
+                <a:latin typeface="D2Coding" panose="020B0609020101020101" pitchFamily="49" charset="-127"/>
+                <a:ea typeface="D2Coding" panose="020B0609020101020101" pitchFamily="49" charset="-127"/>
+              </a:rPr>
+              <a:t>이라는 데이터 패턴이지만</a:t>
+            </a:r>
+            <a:r>
+              <a:rPr lang="en-US" altLang="ko-KR" sz="1200" dirty="0">
+                <a:solidFill>
+                  <a:schemeClr val="bg1"/>
+                </a:solidFill>
+                <a:latin typeface="D2Coding" panose="020B0609020101020101" pitchFamily="49" charset="-127"/>
+                <a:ea typeface="D2Coding" panose="020B0609020101020101" pitchFamily="49" charset="-127"/>
+              </a:rPr>
+              <a:t>, </a:t>
+            </a:r>
+            <a:r>
+              <a:rPr lang="en-US" altLang="ko-KR" sz="1200" b="1" dirty="0">
+                <a:solidFill>
+                  <a:schemeClr val="bg1"/>
+                </a:solidFill>
+                <a:latin typeface="D2Coding" panose="020B0609020101020101" pitchFamily="49" charset="-127"/>
+                <a:ea typeface="D2Coding" panose="020B0609020101020101" pitchFamily="49" charset="-127"/>
+              </a:rPr>
+              <a:t>'</a:t>
+            </a:r>
+            <a:r>
+              <a:rPr lang="ko-KR" altLang="en-US" sz="1200" b="1" dirty="0">
+                <a:solidFill>
+                  <a:schemeClr val="bg1"/>
+                </a:solidFill>
+                <a:latin typeface="D2Coding" panose="020B0609020101020101" pitchFamily="49" charset="-127"/>
+                <a:ea typeface="D2Coding" panose="020B0609020101020101" pitchFamily="49" charset="-127"/>
+              </a:rPr>
+              <a:t>언제</a:t>
+            </a:r>
+            <a:r>
+              <a:rPr lang="en-US" altLang="ko-KR" sz="1200" b="1" dirty="0">
+                <a:solidFill>
+                  <a:schemeClr val="bg1"/>
+                </a:solidFill>
+                <a:latin typeface="D2Coding" panose="020B0609020101020101" pitchFamily="49" charset="-127"/>
+                <a:ea typeface="D2Coding" panose="020B0609020101020101" pitchFamily="49" charset="-127"/>
+              </a:rPr>
+              <a:t>(</a:t>
+            </a:r>
+            <a:r>
+              <a:rPr lang="ko-KR" altLang="en-US" sz="1200" b="1" dirty="0">
+                <a:solidFill>
+                  <a:schemeClr val="bg1"/>
+                </a:solidFill>
+                <a:latin typeface="D2Coding" panose="020B0609020101020101" pitchFamily="49" charset="-127"/>
+                <a:ea typeface="D2Coding" panose="020B0609020101020101" pitchFamily="49" charset="-127"/>
+              </a:rPr>
+              <a:t>어느 시간대</a:t>
+            </a:r>
+            <a:r>
+              <a:rPr lang="en-US" altLang="ko-KR" sz="1200" b="1" dirty="0">
+                <a:solidFill>
+                  <a:schemeClr val="bg1"/>
+                </a:solidFill>
+                <a:latin typeface="D2Coding" panose="020B0609020101020101" pitchFamily="49" charset="-127"/>
+                <a:ea typeface="D2Coding" panose="020B0609020101020101" pitchFamily="49" charset="-127"/>
+              </a:rPr>
+              <a:t>, </a:t>
+            </a:r>
+            <a:r>
+              <a:rPr lang="ko-KR" altLang="en-US" sz="1200" b="1" dirty="0">
+                <a:solidFill>
+                  <a:schemeClr val="bg1"/>
+                </a:solidFill>
+                <a:latin typeface="D2Coding" panose="020B0609020101020101" pitchFamily="49" charset="-127"/>
+                <a:ea typeface="D2Coding" panose="020B0609020101020101" pitchFamily="49" charset="-127"/>
+              </a:rPr>
+              <a:t>아침 </a:t>
+            </a:r>
+            <a:r>
+              <a:rPr lang="en-US" altLang="ko-KR" sz="1200" b="1" dirty="0">
+                <a:solidFill>
+                  <a:schemeClr val="bg1"/>
+                </a:solidFill>
+                <a:latin typeface="D2Coding" panose="020B0609020101020101" pitchFamily="49" charset="-127"/>
+                <a:ea typeface="D2Coding" panose="020B0609020101020101" pitchFamily="49" charset="-127"/>
+              </a:rPr>
+              <a:t>or</a:t>
+            </a:r>
+            <a:r>
+              <a:rPr lang="ko-KR" altLang="en-US" sz="1200" b="1" dirty="0">
+                <a:solidFill>
+                  <a:schemeClr val="bg1"/>
+                </a:solidFill>
+                <a:latin typeface="D2Coding" panose="020B0609020101020101" pitchFamily="49" charset="-127"/>
+                <a:ea typeface="D2Coding" panose="020B0609020101020101" pitchFamily="49" charset="-127"/>
+              </a:rPr>
+              <a:t> 새벽</a:t>
+            </a:r>
+            <a:r>
+              <a:rPr lang="en-US" altLang="ko-KR" sz="1200" b="1" dirty="0">
+                <a:solidFill>
+                  <a:schemeClr val="bg1"/>
+                </a:solidFill>
+                <a:latin typeface="D2Coding" panose="020B0609020101020101" pitchFamily="49" charset="-127"/>
+                <a:ea typeface="D2Coding" panose="020B0609020101020101" pitchFamily="49" charset="-127"/>
+              </a:rPr>
+              <a:t>, </a:t>
+            </a:r>
+            <a:r>
+              <a:rPr lang="ko-KR" altLang="en-US" sz="1200" b="1" dirty="0">
+                <a:solidFill>
+                  <a:schemeClr val="bg1"/>
+                </a:solidFill>
+                <a:latin typeface="D2Coding" panose="020B0609020101020101" pitchFamily="49" charset="-127"/>
+                <a:ea typeface="D2Coding" panose="020B0609020101020101" pitchFamily="49" charset="-127"/>
+              </a:rPr>
+              <a:t>여름 </a:t>
+            </a:r>
+            <a:r>
+              <a:rPr lang="en-US" altLang="ko-KR" sz="1200" b="1" dirty="0">
+                <a:solidFill>
+                  <a:schemeClr val="bg1"/>
+                </a:solidFill>
+                <a:latin typeface="D2Coding" panose="020B0609020101020101" pitchFamily="49" charset="-127"/>
+                <a:ea typeface="D2Coding" panose="020B0609020101020101" pitchFamily="49" charset="-127"/>
+              </a:rPr>
+              <a:t>or </a:t>
+            </a:r>
+            <a:r>
+              <a:rPr lang="ko-KR" altLang="en-US" sz="1200" b="1" dirty="0">
+                <a:solidFill>
+                  <a:schemeClr val="bg1"/>
+                </a:solidFill>
+                <a:latin typeface="D2Coding" panose="020B0609020101020101" pitchFamily="49" charset="-127"/>
+                <a:ea typeface="D2Coding" panose="020B0609020101020101" pitchFamily="49" charset="-127"/>
+              </a:rPr>
+              <a:t>겨울</a:t>
+            </a:r>
+            <a:r>
+              <a:rPr lang="en-US" altLang="ko-KR" sz="1200" b="1" dirty="0">
+                <a:solidFill>
+                  <a:schemeClr val="bg1"/>
+                </a:solidFill>
+                <a:latin typeface="D2Coding" panose="020B0609020101020101" pitchFamily="49" charset="-127"/>
+                <a:ea typeface="D2Coding" panose="020B0609020101020101" pitchFamily="49" charset="-127"/>
+              </a:rPr>
+              <a:t>)'</a:t>
+            </a:r>
+            <a:r>
+              <a:rPr lang="ko-KR" altLang="en-US" sz="1200" dirty="0">
+                <a:solidFill>
+                  <a:schemeClr val="bg1"/>
+                </a:solidFill>
+                <a:latin typeface="D2Coding" panose="020B0609020101020101" pitchFamily="49" charset="-127"/>
+                <a:ea typeface="D2Coding" panose="020B0609020101020101" pitchFamily="49" charset="-127"/>
+              </a:rPr>
+              <a:t> 에 따라 원인과 의미가 완전히 달라지게 되어 </a:t>
+            </a:r>
+            <a:r>
+              <a:rPr lang="ko-KR" altLang="en-US" sz="1200" dirty="0" err="1">
+                <a:solidFill>
+                  <a:schemeClr val="bg1"/>
+                </a:solidFill>
+                <a:latin typeface="D2Coding" panose="020B0609020101020101" pitchFamily="49" charset="-127"/>
+                <a:ea typeface="D2Coding" panose="020B0609020101020101" pitchFamily="49" charset="-127"/>
+              </a:rPr>
+              <a:t>시간축을</a:t>
+            </a:r>
+            <a:r>
+              <a:rPr lang="ko-KR" altLang="en-US" sz="1200" dirty="0">
+                <a:solidFill>
+                  <a:schemeClr val="bg1"/>
+                </a:solidFill>
+                <a:latin typeface="D2Coding" panose="020B0609020101020101" pitchFamily="49" charset="-127"/>
+                <a:ea typeface="D2Coding" panose="020B0609020101020101" pitchFamily="49" charset="-127"/>
+              </a:rPr>
+              <a:t> 따라 패턴을 그대로 이동시켜 재사용할 수 없음</a:t>
+            </a:r>
+            <a:endParaRPr lang="en-US" altLang="ko-KR" sz="1200" dirty="0">
+              <a:solidFill>
+                <a:schemeClr val="bg1"/>
+              </a:solidFill>
+              <a:latin typeface="D2Coding" panose="020B0609020101020101" pitchFamily="49" charset="-127"/>
+              <a:ea typeface="D2Coding" panose="020B0609020101020101" pitchFamily="49" charset="-127"/>
+            </a:endParaRPr>
+          </a:p>
+          <a:p>
+            <a:pPr marL="171450" indent="-171450">
+              <a:buFont typeface="Wingdings" panose="05000000000000000000" pitchFamily="2" charset="2"/>
+              <a:buChar char="§"/>
+            </a:pPr>
+            <a:endParaRPr lang="en-US" altLang="ko-KR" sz="1200" dirty="0">
+              <a:solidFill>
+                <a:schemeClr val="bg1"/>
+              </a:solidFill>
+              <a:latin typeface="D2Coding" panose="020B0609020101020101" pitchFamily="49" charset="-127"/>
+              <a:ea typeface="D2Coding" panose="020B0609020101020101" pitchFamily="49" charset="-127"/>
+            </a:endParaRPr>
+          </a:p>
+          <a:p>
+            <a:pPr marL="171450" indent="-171450">
+              <a:buFont typeface="Wingdings" panose="05000000000000000000" pitchFamily="2" charset="2"/>
+              <a:buChar char="§"/>
+            </a:pPr>
+            <a:r>
+              <a:rPr lang="en-US" altLang="ko-KR" sz="1200" dirty="0">
+                <a:solidFill>
+                  <a:schemeClr val="bg1"/>
+                </a:solidFill>
+                <a:latin typeface="D2Coding" panose="020B0609020101020101" pitchFamily="49" charset="-127"/>
+                <a:ea typeface="D2Coding" panose="020B0609020101020101" pitchFamily="49" charset="-127"/>
+              </a:rPr>
+              <a:t>Conv1D</a:t>
+            </a:r>
+            <a:r>
+              <a:rPr lang="ko-KR" altLang="en-US" sz="1200" dirty="0">
+                <a:solidFill>
+                  <a:schemeClr val="bg1"/>
+                </a:solidFill>
+                <a:latin typeface="D2Coding" panose="020B0609020101020101" pitchFamily="49" charset="-127"/>
+                <a:ea typeface="D2Coding" panose="020B0609020101020101" pitchFamily="49" charset="-127"/>
+              </a:rPr>
+              <a:t>는 슬라이딩 윈도우를 굴리며 </a:t>
+            </a:r>
+            <a:r>
+              <a:rPr lang="en-US" altLang="ko-KR" sz="1200" i="1" dirty="0">
+                <a:solidFill>
+                  <a:schemeClr val="bg1"/>
+                </a:solidFill>
+                <a:latin typeface="D2Coding" panose="020B0609020101020101" pitchFamily="49" charset="-127"/>
+                <a:ea typeface="D2Coding" panose="020B0609020101020101" pitchFamily="49" charset="-127"/>
+              </a:rPr>
+              <a:t>"</a:t>
+            </a:r>
+            <a:r>
+              <a:rPr lang="ko-KR" altLang="en-US" sz="1200" i="1" dirty="0">
+                <a:solidFill>
+                  <a:schemeClr val="bg1"/>
+                </a:solidFill>
+                <a:latin typeface="D2Coding" panose="020B0609020101020101" pitchFamily="49" charset="-127"/>
+                <a:ea typeface="D2Coding" panose="020B0609020101020101" pitchFamily="49" charset="-127"/>
+              </a:rPr>
+              <a:t>아침이든 밤이든 패턴 모양만 비슷하면 다 똑같은 특성이겠지</a:t>
+            </a:r>
+            <a:r>
+              <a:rPr lang="en-US" altLang="ko-KR" sz="1200" i="1" dirty="0">
+                <a:solidFill>
+                  <a:schemeClr val="bg1"/>
+                </a:solidFill>
+                <a:latin typeface="D2Coding" panose="020B0609020101020101" pitchFamily="49" charset="-127"/>
+                <a:ea typeface="D2Coding" panose="020B0609020101020101" pitchFamily="49" charset="-127"/>
+              </a:rPr>
+              <a:t>?"</a:t>
+            </a:r>
+            <a:r>
+              <a:rPr lang="ko-KR" altLang="en-US" sz="1200" dirty="0">
+                <a:solidFill>
+                  <a:schemeClr val="bg1"/>
+                </a:solidFill>
+                <a:latin typeface="D2Coding" panose="020B0609020101020101" pitchFamily="49" charset="-127"/>
+                <a:ea typeface="D2Coding" panose="020B0609020101020101" pitchFamily="49" charset="-127"/>
+              </a:rPr>
+              <a:t> 하고 연산하지만 날씨에서는 </a:t>
+            </a:r>
+            <a:r>
+              <a:rPr lang="ko-KR" altLang="en-US" sz="1200" b="1" dirty="0">
+                <a:solidFill>
+                  <a:schemeClr val="bg1"/>
+                </a:solidFill>
+                <a:latin typeface="D2Coding" panose="020B0609020101020101" pitchFamily="49" charset="-127"/>
+                <a:ea typeface="D2Coding" panose="020B0609020101020101" pitchFamily="49" charset="-127"/>
+              </a:rPr>
+              <a:t>발생 시점을 무시하는 순간 잘못된 예측</a:t>
+            </a:r>
+            <a:r>
+              <a:rPr lang="ko-KR" altLang="en-US" sz="1200" dirty="0">
+                <a:solidFill>
+                  <a:schemeClr val="bg1"/>
+                </a:solidFill>
+                <a:latin typeface="D2Coding" panose="020B0609020101020101" pitchFamily="49" charset="-127"/>
+                <a:ea typeface="D2Coding" panose="020B0609020101020101" pitchFamily="49" charset="-127"/>
+              </a:rPr>
+              <a:t>으로 이어지게 됨</a:t>
+            </a:r>
+            <a:endParaRPr lang="en-US" altLang="ko-KR" sz="1200" dirty="0">
+              <a:solidFill>
+                <a:schemeClr val="bg1"/>
+              </a:solidFill>
+              <a:latin typeface="D2Coding" panose="020B0609020101020101" pitchFamily="49" charset="-127"/>
+              <a:ea typeface="D2Coding" panose="020B0609020101020101" pitchFamily="49" charset="-127"/>
+            </a:endParaRPr>
+          </a:p>
+          <a:p>
+            <a:pPr marL="171450" indent="-171450">
+              <a:buFont typeface="Wingdings" panose="05000000000000000000" pitchFamily="2" charset="2"/>
+              <a:buChar char="§"/>
+            </a:pPr>
+            <a:endParaRPr lang="en-US" altLang="ko-KR" sz="1200" dirty="0">
+              <a:solidFill>
+                <a:schemeClr val="bg1"/>
+              </a:solidFill>
+              <a:latin typeface="D2Coding" panose="020B0609020101020101" pitchFamily="49" charset="-127"/>
+              <a:ea typeface="D2Coding" panose="020B0609020101020101" pitchFamily="49" charset="-127"/>
+            </a:endParaRPr>
+          </a:p>
+          <a:p>
+            <a:pPr marL="171450" indent="-171450">
+              <a:buFont typeface="Wingdings" panose="05000000000000000000" pitchFamily="2" charset="2"/>
+              <a:buChar char="§"/>
+            </a:pPr>
+            <a:r>
+              <a:rPr lang="ko-KR" altLang="en-US" sz="1200" dirty="0">
+                <a:solidFill>
+                  <a:schemeClr val="bg1"/>
+                </a:solidFill>
+                <a:latin typeface="D2Coding" panose="020B0609020101020101" pitchFamily="49" charset="-127"/>
+                <a:ea typeface="D2Coding" panose="020B0609020101020101" pitchFamily="49" charset="-127"/>
+              </a:rPr>
+              <a:t>극복하기 위해</a:t>
+            </a:r>
+            <a:r>
+              <a:rPr lang="en-US" altLang="ko-KR" sz="1200" dirty="0">
+                <a:solidFill>
+                  <a:schemeClr val="bg1"/>
+                </a:solidFill>
+                <a:latin typeface="D2Coding" panose="020B0609020101020101" pitchFamily="49" charset="-127"/>
+                <a:ea typeface="D2Coding" panose="020B0609020101020101" pitchFamily="49" charset="-127"/>
+              </a:rPr>
+              <a:t>, </a:t>
+            </a:r>
+            <a:r>
+              <a:rPr lang="en-US" altLang="ko-KR" sz="1200" b="1" dirty="0">
+                <a:solidFill>
+                  <a:schemeClr val="bg1"/>
+                </a:solidFill>
+                <a:latin typeface="D2Coding" panose="020B0609020101020101" pitchFamily="49" charset="-127"/>
+                <a:ea typeface="D2Coding" panose="020B0609020101020101" pitchFamily="49" charset="-127"/>
+              </a:rPr>
+              <a:t>'</a:t>
+            </a:r>
+            <a:r>
+              <a:rPr lang="ko-KR" altLang="en-US" sz="1200" b="1" dirty="0">
+                <a:solidFill>
+                  <a:schemeClr val="bg1"/>
+                </a:solidFill>
+                <a:latin typeface="D2Coding" panose="020B0609020101020101" pitchFamily="49" charset="-127"/>
+                <a:ea typeface="D2Coding" panose="020B0609020101020101" pitchFamily="49" charset="-127"/>
+              </a:rPr>
+              <a:t>절대적인 시점과 순서</a:t>
+            </a:r>
+            <a:r>
+              <a:rPr lang="en-US" altLang="ko-KR" sz="1200" b="1" dirty="0">
+                <a:solidFill>
+                  <a:schemeClr val="bg1"/>
+                </a:solidFill>
+                <a:latin typeface="D2Coding" panose="020B0609020101020101" pitchFamily="49" charset="-127"/>
+                <a:ea typeface="D2Coding" panose="020B0609020101020101" pitchFamily="49" charset="-127"/>
+              </a:rPr>
+              <a:t>'</a:t>
+            </a:r>
+            <a:r>
+              <a:rPr lang="ko-KR" altLang="en-US" sz="1200" b="1" dirty="0">
+                <a:solidFill>
+                  <a:schemeClr val="bg1"/>
+                </a:solidFill>
+                <a:latin typeface="D2Coding" panose="020B0609020101020101" pitchFamily="49" charset="-127"/>
+                <a:ea typeface="D2Coding" panose="020B0609020101020101" pitchFamily="49" charset="-127"/>
+              </a:rPr>
+              <a:t>를 기억하는 </a:t>
+            </a:r>
+            <a:r>
+              <a:rPr lang="en-US" altLang="ko-KR" sz="1200" b="1" dirty="0">
+                <a:solidFill>
+                  <a:schemeClr val="bg1"/>
+                </a:solidFill>
+                <a:latin typeface="D2Coding" panose="020B0609020101020101" pitchFamily="49" charset="-127"/>
+                <a:ea typeface="D2Coding" panose="020B0609020101020101" pitchFamily="49" charset="-127"/>
+              </a:rPr>
+              <a:t>RNN(LSTM/GRU)</a:t>
+            </a:r>
+            <a:r>
+              <a:rPr lang="ko-KR" altLang="en-US" sz="1200" b="1" dirty="0">
+                <a:solidFill>
+                  <a:schemeClr val="bg1"/>
+                </a:solidFill>
+                <a:latin typeface="D2Coding" panose="020B0609020101020101" pitchFamily="49" charset="-127"/>
+                <a:ea typeface="D2Coding" panose="020B0609020101020101" pitchFamily="49" charset="-127"/>
+              </a:rPr>
+              <a:t>이나 </a:t>
+            </a:r>
+            <a:r>
+              <a:rPr lang="en-US" altLang="ko-KR" sz="1200" b="1" dirty="0">
+                <a:solidFill>
+                  <a:schemeClr val="bg1"/>
+                </a:solidFill>
+                <a:latin typeface="D2Coding" panose="020B0609020101020101" pitchFamily="49" charset="-127"/>
+                <a:ea typeface="D2Coding" panose="020B0609020101020101" pitchFamily="49" charset="-127"/>
+              </a:rPr>
+              <a:t>Positional Encoding</a:t>
+            </a:r>
+            <a:r>
+              <a:rPr lang="ko-KR" altLang="en-US" sz="1200" b="1" dirty="0">
+                <a:solidFill>
+                  <a:schemeClr val="bg1"/>
+                </a:solidFill>
+                <a:latin typeface="D2Coding" panose="020B0609020101020101" pitchFamily="49" charset="-127"/>
+                <a:ea typeface="D2Coding" panose="020B0609020101020101" pitchFamily="49" charset="-127"/>
+              </a:rPr>
+              <a:t>을 사용하는 </a:t>
+            </a:r>
+            <a:r>
+              <a:rPr lang="en-US" altLang="ko-KR" sz="1200" b="1" dirty="0">
+                <a:solidFill>
+                  <a:schemeClr val="bg1"/>
+                </a:solidFill>
+                <a:latin typeface="D2Coding" panose="020B0609020101020101" pitchFamily="49" charset="-127"/>
+                <a:ea typeface="D2Coding" panose="020B0609020101020101" pitchFamily="49" charset="-127"/>
+              </a:rPr>
+              <a:t>Transformer </a:t>
+            </a:r>
+            <a:r>
+              <a:rPr lang="ko-KR" altLang="en-US" sz="1200" b="1" dirty="0">
+                <a:solidFill>
+                  <a:schemeClr val="bg1"/>
+                </a:solidFill>
+                <a:latin typeface="D2Coding" panose="020B0609020101020101" pitchFamily="49" charset="-127"/>
+                <a:ea typeface="D2Coding" panose="020B0609020101020101" pitchFamily="49" charset="-127"/>
+              </a:rPr>
+              <a:t>모델</a:t>
+            </a:r>
+            <a:r>
+              <a:rPr lang="ko-KR" altLang="en-US" sz="1200" dirty="0">
+                <a:solidFill>
+                  <a:schemeClr val="bg1"/>
+                </a:solidFill>
+                <a:latin typeface="D2Coding" panose="020B0609020101020101" pitchFamily="49" charset="-127"/>
+                <a:ea typeface="D2Coding" panose="020B0609020101020101" pitchFamily="49" charset="-127"/>
+              </a:rPr>
+              <a:t>이 시계열 예측에서 주로 활용</a:t>
+            </a:r>
+          </a:p>
+        </p:txBody>
+      </p:sp>
+    </p:spTree>
+    <p:extLst>
+      <p:ext uri="{BB962C8B-B14F-4D97-AF65-F5344CB8AC3E}">
+        <p14:creationId xmlns:p14="http://schemas.microsoft.com/office/powerpoint/2010/main" val="2512681007"/>
+      </p:ext>
+    </p:extLst>
+  </p:cSld>
+  <p:clrMapOvr>
+    <a:masterClrMapping/>
+  </p:clrMapOvr>
+</p:sld>
+</file>
+
+<file path=ppt/slides/slide21.xml><?xml version="1.0" encoding="utf-8"?>
+<p:sld xmlns:a="http://schemas.openxmlformats.org/drawingml/2006/main" xmlns:r="http://schemas.openxmlformats.org/officeDocument/2006/relationships" xmlns:p="http://schemas.openxmlformats.org/presentationml/2006/main">
+  <p:cSld>
+    <p:spTree>
+      <p:nvGrpSpPr>
+        <p:cNvPr id="1" name="">
+          <a:extLst>
+            <a:ext uri="{FF2B5EF4-FFF2-40B4-BE49-F238E27FC236}">
               <a16:creationId xmlns:a16="http://schemas.microsoft.com/office/drawing/2014/main" id="{1F35A830-CA08-5196-3643-23FBA5638E2A}"/>
             </a:ext>
           </a:extLst>
@@ -12394,7 +12599,7 @@
                 <a:cs typeface="Times New Roman" panose="02020603050405020304" pitchFamily="18" charset="0"/>
               </a:rPr>
               <a:pPr/>
-              <a:t>20</a:t>
+              <a:t>21</a:t>
             </a:fld>
             <a:endParaRPr lang="en-US" sz="1400" b="1" dirty="0">
               <a:latin typeface="Times New Roman" panose="02020603050405020304" pitchFamily="18" charset="0"/>
@@ -14681,7 +14886,7 @@
 </p:sld>
 </file>
 
-<file path=ppt/slides/slide21.xml><?xml version="1.0" encoding="utf-8"?>
+<file path=ppt/slides/slide22.xml><?xml version="1.0" encoding="utf-8"?>
 <p:sld xmlns:a="http://schemas.openxmlformats.org/drawingml/2006/main" xmlns:r="http://schemas.openxmlformats.org/officeDocument/2006/relationships" xmlns:p="http://schemas.openxmlformats.org/presentationml/2006/main">
   <p:cSld>
     <p:spTree>
@@ -14872,7 +15077,7 @@
                 <a:cs typeface="Times New Roman" panose="02020603050405020304" pitchFamily="18" charset="0"/>
               </a:rPr>
               <a:pPr/>
-              <a:t>21</a:t>
+              <a:t>22</a:t>
             </a:fld>
             <a:endParaRPr lang="en-US" sz="1400" b="1" dirty="0">
               <a:latin typeface="Times New Roman" panose="02020603050405020304" pitchFamily="18" charset="0"/>
@@ -15359,7 +15564,7 @@
 </p:sld>
 </file>
 
-<file path=ppt/slides/slide22.xml><?xml version="1.0" encoding="utf-8"?>
+<file path=ppt/slides/slide23.xml><?xml version="1.0" encoding="utf-8"?>
 <p:sld xmlns:a="http://schemas.openxmlformats.org/drawingml/2006/main" xmlns:r="http://schemas.openxmlformats.org/officeDocument/2006/relationships" xmlns:p="http://schemas.openxmlformats.org/presentationml/2006/main">
   <p:cSld>
     <p:spTree>
@@ -15465,7 +15670,7 @@
             <a:fld id="{D57F1E4F-1CFF-5643-939E-217C01CDF565}" type="slidenum">
               <a:rPr lang="en-US" smtClean="0"/>
               <a:pPr/>
-              <a:t>22</a:t>
+              <a:t>23</a:t>
             </a:fld>
             <a:endParaRPr lang="en-US" dirty="0"/>
           </a:p>
@@ -15702,7 +15907,7 @@
 </p:sld>
 </file>
 
-<file path=ppt/slides/slide23.xml><?xml version="1.0" encoding="utf-8"?>
+<file path=ppt/slides/slide24.xml><?xml version="1.0" encoding="utf-8"?>
 <p:sld xmlns:a="http://schemas.openxmlformats.org/drawingml/2006/main" xmlns:r="http://schemas.openxmlformats.org/officeDocument/2006/relationships" xmlns:p="http://schemas.openxmlformats.org/presentationml/2006/main">
   <p:cSld>
     <p:spTree>
@@ -17051,7 +17256,7 @@
                 <a:cs typeface="Times New Roman" panose="02020603050405020304" pitchFamily="18" charset="0"/>
               </a:rPr>
               <a:pPr/>
-              <a:t>23</a:t>
+              <a:t>24</a:t>
             </a:fld>
             <a:endParaRPr lang="en-US" sz="1400" b="1" dirty="0">
               <a:latin typeface="Times New Roman" panose="02020603050405020304" pitchFamily="18" charset="0"/>
@@ -17074,7 +17279,7 @@
 </p:sld>
 </file>
 
-<file path=ppt/slides/slide24.xml><?xml version="1.0" encoding="utf-8"?>
+<file path=ppt/slides/slide25.xml><?xml version="1.0" encoding="utf-8"?>
 <p:sld xmlns:a="http://schemas.openxmlformats.org/drawingml/2006/main" xmlns:r="http://schemas.openxmlformats.org/officeDocument/2006/relationships" xmlns:p="http://schemas.openxmlformats.org/presentationml/2006/main">
   <p:cSld>
     <p:spTree>
@@ -17586,7 +17791,7 @@
                 <a:cs typeface="Times New Roman" panose="02020603050405020304" pitchFamily="18" charset="0"/>
               </a:rPr>
               <a:pPr/>
-              <a:t>24</a:t>
+              <a:t>25</a:t>
             </a:fld>
             <a:endParaRPr lang="en-US" sz="1400" b="1" dirty="0">
               <a:latin typeface="Times New Roman" panose="02020603050405020304" pitchFamily="18" charset="0"/>
@@ -17609,7 +17814,7 @@
 </p:sld>
 </file>
 
-<file path=ppt/slides/slide25.xml><?xml version="1.0" encoding="utf-8"?>
+<file path=ppt/slides/slide26.xml><?xml version="1.0" encoding="utf-8"?>
 <p:sld xmlns:a="http://schemas.openxmlformats.org/drawingml/2006/main" xmlns:r="http://schemas.openxmlformats.org/officeDocument/2006/relationships" xmlns:p="http://schemas.openxmlformats.org/presentationml/2006/main">
   <p:cSld>
     <p:spTree>
@@ -18089,7 +18294,7 @@
                 <a:cs typeface="Times New Roman" panose="02020603050405020304" pitchFamily="18" charset="0"/>
               </a:rPr>
               <a:pPr/>
-              <a:t>25</a:t>
+              <a:t>26</a:t>
             </a:fld>
             <a:endParaRPr lang="en-US" sz="1400" b="1" dirty="0">
               <a:latin typeface="Times New Roman" panose="02020603050405020304" pitchFamily="18" charset="0"/>
@@ -18112,7 +18317,7 @@
 </p:sld>
 </file>
 
-<file path=ppt/slides/slide26.xml><?xml version="1.0" encoding="utf-8"?>
+<file path=ppt/slides/slide27.xml><?xml version="1.0" encoding="utf-8"?>
 <p:sld xmlns:a="http://schemas.openxmlformats.org/drawingml/2006/main" xmlns:r="http://schemas.openxmlformats.org/officeDocument/2006/relationships" xmlns:p="http://schemas.openxmlformats.org/presentationml/2006/main">
   <p:cSld>
     <p:spTree>
@@ -19114,7 +19319,7 @@
                 <a:cs typeface="Times New Roman" panose="02020603050405020304" pitchFamily="18" charset="0"/>
               </a:rPr>
               <a:pPr/>
-              <a:t>26</a:t>
+              <a:t>27</a:t>
             </a:fld>
             <a:endParaRPr lang="en-US" sz="1400" b="1" dirty="0">
               <a:latin typeface="Times New Roman" panose="02020603050405020304" pitchFamily="18" charset="0"/>
@@ -19173,7 +19378,7 @@
 </p:sld>
 </file>
 
-<file path=ppt/slides/slide27.xml><?xml version="1.0" encoding="utf-8"?>
+<file path=ppt/slides/slide28.xml><?xml version="1.0" encoding="utf-8"?>
 <p:sld xmlns:a="http://schemas.openxmlformats.org/drawingml/2006/main" xmlns:r="http://schemas.openxmlformats.org/officeDocument/2006/relationships" xmlns:p="http://schemas.openxmlformats.org/presentationml/2006/main">
   <p:cSld>
     <p:spTree>
@@ -20712,7 +20917,7 @@
                 <a:cs typeface="Times New Roman" panose="02020603050405020304" pitchFamily="18" charset="0"/>
               </a:rPr>
               <a:pPr/>
-              <a:t>27</a:t>
+              <a:t>28</a:t>
             </a:fld>
             <a:endParaRPr lang="en-US" sz="1400" b="1" dirty="0">
               <a:latin typeface="Times New Roman" panose="02020603050405020304" pitchFamily="18" charset="0"/>
@@ -20735,7 +20940,7 @@
 </p:sld>
 </file>
 
-<file path=ppt/slides/slide28.xml><?xml version="1.0" encoding="utf-8"?>
+<file path=ppt/slides/slide29.xml><?xml version="1.0" encoding="utf-8"?>
 <p:sld xmlns:a="http://schemas.openxmlformats.org/drawingml/2006/main" xmlns:r="http://schemas.openxmlformats.org/officeDocument/2006/relationships" xmlns:p="http://schemas.openxmlformats.org/presentationml/2006/main">
   <p:cSld>
     <p:spTree>
@@ -20866,7 +21071,7 @@
                 <a:cs typeface="Times New Roman" panose="02020603050405020304" pitchFamily="18" charset="0"/>
               </a:rPr>
               <a:pPr/>
-              <a:t>28</a:t>
+              <a:t>29</a:t>
             </a:fld>
             <a:endParaRPr lang="en-US" sz="1400" b="1" dirty="0">
               <a:latin typeface="Times New Roman" panose="02020603050405020304" pitchFamily="18" charset="0"/>
@@ -21848,229 +22053,6 @@
     <p:extLst>
       <p:ext uri="{BB962C8B-B14F-4D97-AF65-F5344CB8AC3E}">
         <p14:creationId xmlns:p14="http://schemas.microsoft.com/office/powerpoint/2010/main" val="295418030"/>
-      </p:ext>
-    </p:extLst>
-  </p:cSld>
-  <p:clrMapOvr>
-    <a:masterClrMapping/>
-  </p:clrMapOvr>
-</p:sld>
-</file>
-
-<file path=ppt/slides/slide29.xml><?xml version="1.0" encoding="utf-8"?>
-<p:sld xmlns:a="http://schemas.openxmlformats.org/drawingml/2006/main" xmlns:r="http://schemas.openxmlformats.org/officeDocument/2006/relationships" xmlns:p="http://schemas.openxmlformats.org/presentationml/2006/main">
-  <p:cSld>
-    <p:spTree>
-      <p:nvGrpSpPr>
-        <p:cNvPr id="1" name="">
-          <a:extLst>
-            <a:ext uri="{FF2B5EF4-FFF2-40B4-BE49-F238E27FC236}">
-              <a16:creationId xmlns:a16="http://schemas.microsoft.com/office/drawing/2014/main" id="{136BED66-CDE2-43A5-941D-FD48240393F4}"/>
-            </a:ext>
-          </a:extLst>
-        </p:cNvPr>
-        <p:cNvGrpSpPr/>
-        <p:nvPr/>
-      </p:nvGrpSpPr>
-      <p:grpSpPr>
-        <a:xfrm>
-          <a:off x="0" y="0"/>
-          <a:ext cx="0" cy="0"/>
-          <a:chOff x="0" y="0"/>
-          <a:chExt cx="0" cy="0"/>
-        </a:xfrm>
-      </p:grpSpPr>
-      <p:sp>
-        <p:nvSpPr>
-          <p:cNvPr id="3" name="제목 1">
-            <a:extLst>
-              <a:ext uri="{FF2B5EF4-FFF2-40B4-BE49-F238E27FC236}">
-                <a16:creationId xmlns:a16="http://schemas.microsoft.com/office/drawing/2014/main" id="{C42B5EED-CD79-4250-436C-05D7A10EB257}"/>
-              </a:ext>
-            </a:extLst>
-          </p:cNvPr>
-          <p:cNvSpPr txBox="1">
-            <a:spLocks/>
-          </p:cNvSpPr>
-          <p:nvPr/>
-        </p:nvSpPr>
-        <p:spPr>
-          <a:xfrm>
-            <a:off x="475645" y="481983"/>
-            <a:ext cx="10353762" cy="766439"/>
-          </a:xfrm>
-          <a:prstGeom prst="rect">
-            <a:avLst/>
-          </a:prstGeom>
-        </p:spPr>
-        <p:txBody>
-          <a:bodyPr vert="horz" lIns="91440" tIns="45720" rIns="91440" bIns="45720" rtlCol="0" anchor="ctr">
-            <a:normAutofit/>
-          </a:bodyPr>
-          <a:lstStyle>
-            <a:lvl1pPr algn="ctr" defTabSz="914400" rtl="0" eaLnBrk="1" latinLnBrk="1" hangingPunct="1">
-              <a:lnSpc>
-                <a:spcPct val="90000"/>
-              </a:lnSpc>
-              <a:spcBef>
-                <a:spcPct val="0"/>
-              </a:spcBef>
-              <a:buNone/>
-              <a:defRPr sz="3200" kern="1200" cap="all" baseline="0">
-                <a:solidFill>
-                  <a:schemeClr val="tx1"/>
-                </a:solidFill>
-                <a:effectLst/>
-                <a:latin typeface="Batang" panose="02030600000101010101" pitchFamily="18" charset="-127"/>
-                <a:ea typeface="Batang" panose="02030600000101010101" pitchFamily="18" charset="-127"/>
-                <a:cs typeface="+mj-cs"/>
-              </a:defRPr>
-            </a:lvl1pPr>
-          </a:lstStyle>
-          <a:p>
-            <a:pPr algn="l"/>
-            <a:r>
-              <a:rPr lang="en-US" altLang="ko-KR" sz="2800" cap="none" dirty="0">
-                <a:solidFill>
-                  <a:schemeClr val="bg2">
-                    <a:lumMod val="25000"/>
-                  </a:schemeClr>
-                </a:solidFill>
-                <a:latin typeface="D2Coding" panose="020B0609020101020101" pitchFamily="49" charset="-127"/>
-                <a:ea typeface="D2Coding" panose="020B0609020101020101" pitchFamily="49" charset="-127"/>
-                <a:cs typeface="Segoe UI Light" panose="020B0502040204020203" pitchFamily="34" charset="0"/>
-              </a:rPr>
-              <a:t>Recurrent Neural Network (RNN)</a:t>
-            </a:r>
-            <a:endParaRPr lang="ko-KR" altLang="en-US" sz="2800" cap="none" dirty="0">
-              <a:solidFill>
-                <a:schemeClr val="bg2">
-                  <a:lumMod val="25000"/>
-                </a:schemeClr>
-              </a:solidFill>
-              <a:latin typeface="D2Coding" panose="020B0609020101020101" pitchFamily="49" charset="-127"/>
-              <a:ea typeface="D2Coding" panose="020B0609020101020101" pitchFamily="49" charset="-127"/>
-              <a:cs typeface="Segoe UI Light" panose="020B0502040204020203" pitchFamily="34" charset="0"/>
-            </a:endParaRPr>
-          </a:p>
-        </p:txBody>
-      </p:sp>
-      <p:sp>
-        <p:nvSpPr>
-          <p:cNvPr id="2" name="슬라이드 번호 개체 틀 3">
-            <a:extLst>
-              <a:ext uri="{FF2B5EF4-FFF2-40B4-BE49-F238E27FC236}">
-                <a16:creationId xmlns:a16="http://schemas.microsoft.com/office/drawing/2014/main" id="{07670714-F4FD-78D4-1483-F5C0283E492C}"/>
-              </a:ext>
-            </a:extLst>
-          </p:cNvPr>
-          <p:cNvSpPr>
-            <a:spLocks noGrp="1"/>
-          </p:cNvSpPr>
-          <p:nvPr>
-            <p:ph type="sldNum" sz="quarter" idx="12"/>
-          </p:nvPr>
-        </p:nvSpPr>
-        <p:spPr>
-          <a:xfrm>
-            <a:off x="11162487" y="299420"/>
-            <a:ext cx="753545" cy="365125"/>
-          </a:xfrm>
-        </p:spPr>
-        <p:txBody>
-          <a:bodyPr/>
-          <a:lstStyle/>
-          <a:p>
-            <a:fld id="{D57F1E4F-1CFF-5643-939E-217C01CDF565}" type="slidenum">
-              <a:rPr lang="en-US" sz="1400" b="1" smtClean="0">
-                <a:latin typeface="Times New Roman" panose="02020603050405020304" pitchFamily="18" charset="0"/>
-                <a:ea typeface="Verdana" panose="020B0604030504040204" pitchFamily="34" charset="0"/>
-                <a:cs typeface="Times New Roman" panose="02020603050405020304" pitchFamily="18" charset="0"/>
-              </a:rPr>
-              <a:pPr/>
-              <a:t>29</a:t>
-            </a:fld>
-            <a:endParaRPr lang="en-US" sz="1400" b="1" dirty="0">
-              <a:latin typeface="Times New Roman" panose="02020603050405020304" pitchFamily="18" charset="0"/>
-              <a:ea typeface="Verdana" panose="020B0604030504040204" pitchFamily="34" charset="0"/>
-              <a:cs typeface="Times New Roman" panose="02020603050405020304" pitchFamily="18" charset="0"/>
-            </a:endParaRPr>
-          </a:p>
-        </p:txBody>
-      </p:sp>
-      <p:pic>
-        <p:nvPicPr>
-          <p:cNvPr id="7" name="그림 6">
-            <a:extLst>
-              <a:ext uri="{FF2B5EF4-FFF2-40B4-BE49-F238E27FC236}">
-                <a16:creationId xmlns:a16="http://schemas.microsoft.com/office/drawing/2014/main" id="{03AFAC94-5936-F2E8-BA63-E5A0BA713285}"/>
-              </a:ext>
-            </a:extLst>
-          </p:cNvPr>
-          <p:cNvPicPr>
-            <a:picLocks noChangeAspect="1"/>
-          </p:cNvPicPr>
-          <p:nvPr/>
-        </p:nvPicPr>
-        <p:blipFill>
-          <a:blip r:embed="rId2"/>
-          <a:stretch>
-            <a:fillRect/>
-          </a:stretch>
-        </p:blipFill>
-        <p:spPr>
-          <a:xfrm>
-            <a:off x="2053325" y="1499864"/>
-            <a:ext cx="7675230" cy="4053211"/>
-          </a:xfrm>
-          <a:prstGeom prst="rect">
-            <a:avLst/>
-          </a:prstGeom>
-        </p:spPr>
-      </p:pic>
-      <p:sp>
-        <p:nvSpPr>
-          <p:cNvPr id="6" name="TextBox 5">
-            <a:extLst>
-              <a:ext uri="{FF2B5EF4-FFF2-40B4-BE49-F238E27FC236}">
-                <a16:creationId xmlns:a16="http://schemas.microsoft.com/office/drawing/2014/main" id="{DF2DCB4E-8036-5F8F-788D-405F90D49285}"/>
-              </a:ext>
-            </a:extLst>
-          </p:cNvPr>
-          <p:cNvSpPr txBox="1"/>
-          <p:nvPr/>
-        </p:nvSpPr>
-        <p:spPr>
-          <a:xfrm>
-            <a:off x="2053325" y="5619851"/>
-            <a:ext cx="6096000" cy="369332"/>
-          </a:xfrm>
-          <a:prstGeom prst="rect">
-            <a:avLst/>
-          </a:prstGeom>
-          <a:noFill/>
-        </p:spPr>
-        <p:txBody>
-          <a:bodyPr wrap="square">
-            <a:spAutoFit/>
-          </a:bodyPr>
-          <a:lstStyle/>
-          <a:p>
-            <a:r>
-              <a:rPr lang="en-US" altLang="ko-KR" b="0" i="0" dirty="0">
-                <a:effectLst/>
-                <a:latin typeface="Lora" pitchFamily="2" charset="0"/>
-              </a:rPr>
-              <a:t> A simple RNN, unrolled over time</a:t>
-            </a:r>
-            <a:endParaRPr lang="ko-KR" altLang="en-US" dirty="0"/>
-          </a:p>
-        </p:txBody>
-      </p:sp>
-    </p:spTree>
-    <p:extLst>
-      <p:ext uri="{BB962C8B-B14F-4D97-AF65-F5344CB8AC3E}">
-        <p14:creationId xmlns:p14="http://schemas.microsoft.com/office/powerpoint/2010/main" val="2574970165"/>
       </p:ext>
     </p:extLst>
   </p:cSld>
@@ -22449,6 +22431,229 @@
 </file>
 
 <file path=ppt/slides/slide30.xml><?xml version="1.0" encoding="utf-8"?>
+<p:sld xmlns:a="http://schemas.openxmlformats.org/drawingml/2006/main" xmlns:r="http://schemas.openxmlformats.org/officeDocument/2006/relationships" xmlns:p="http://schemas.openxmlformats.org/presentationml/2006/main">
+  <p:cSld>
+    <p:spTree>
+      <p:nvGrpSpPr>
+        <p:cNvPr id="1" name="">
+          <a:extLst>
+            <a:ext uri="{FF2B5EF4-FFF2-40B4-BE49-F238E27FC236}">
+              <a16:creationId xmlns:a16="http://schemas.microsoft.com/office/drawing/2014/main" id="{136BED66-CDE2-43A5-941D-FD48240393F4}"/>
+            </a:ext>
+          </a:extLst>
+        </p:cNvPr>
+        <p:cNvGrpSpPr/>
+        <p:nvPr/>
+      </p:nvGrpSpPr>
+      <p:grpSpPr>
+        <a:xfrm>
+          <a:off x="0" y="0"/>
+          <a:ext cx="0" cy="0"/>
+          <a:chOff x="0" y="0"/>
+          <a:chExt cx="0" cy="0"/>
+        </a:xfrm>
+      </p:grpSpPr>
+      <p:sp>
+        <p:nvSpPr>
+          <p:cNvPr id="3" name="제목 1">
+            <a:extLst>
+              <a:ext uri="{FF2B5EF4-FFF2-40B4-BE49-F238E27FC236}">
+                <a16:creationId xmlns:a16="http://schemas.microsoft.com/office/drawing/2014/main" id="{C42B5EED-CD79-4250-436C-05D7A10EB257}"/>
+              </a:ext>
+            </a:extLst>
+          </p:cNvPr>
+          <p:cNvSpPr txBox="1">
+            <a:spLocks/>
+          </p:cNvSpPr>
+          <p:nvPr/>
+        </p:nvSpPr>
+        <p:spPr>
+          <a:xfrm>
+            <a:off x="475645" y="481983"/>
+            <a:ext cx="10353762" cy="766439"/>
+          </a:xfrm>
+          <a:prstGeom prst="rect">
+            <a:avLst/>
+          </a:prstGeom>
+        </p:spPr>
+        <p:txBody>
+          <a:bodyPr vert="horz" lIns="91440" tIns="45720" rIns="91440" bIns="45720" rtlCol="0" anchor="ctr">
+            <a:normAutofit/>
+          </a:bodyPr>
+          <a:lstStyle>
+            <a:lvl1pPr algn="ctr" defTabSz="914400" rtl="0" eaLnBrk="1" latinLnBrk="1" hangingPunct="1">
+              <a:lnSpc>
+                <a:spcPct val="90000"/>
+              </a:lnSpc>
+              <a:spcBef>
+                <a:spcPct val="0"/>
+              </a:spcBef>
+              <a:buNone/>
+              <a:defRPr sz="3200" kern="1200" cap="all" baseline="0">
+                <a:solidFill>
+                  <a:schemeClr val="tx1"/>
+                </a:solidFill>
+                <a:effectLst/>
+                <a:latin typeface="Batang" panose="02030600000101010101" pitchFamily="18" charset="-127"/>
+                <a:ea typeface="Batang" panose="02030600000101010101" pitchFamily="18" charset="-127"/>
+                <a:cs typeface="+mj-cs"/>
+              </a:defRPr>
+            </a:lvl1pPr>
+          </a:lstStyle>
+          <a:p>
+            <a:pPr algn="l"/>
+            <a:r>
+              <a:rPr lang="en-US" altLang="ko-KR" sz="2800" cap="none" dirty="0">
+                <a:solidFill>
+                  <a:schemeClr val="bg2">
+                    <a:lumMod val="25000"/>
+                  </a:schemeClr>
+                </a:solidFill>
+                <a:latin typeface="D2Coding" panose="020B0609020101020101" pitchFamily="49" charset="-127"/>
+                <a:ea typeface="D2Coding" panose="020B0609020101020101" pitchFamily="49" charset="-127"/>
+                <a:cs typeface="Segoe UI Light" panose="020B0502040204020203" pitchFamily="34" charset="0"/>
+              </a:rPr>
+              <a:t>Recurrent Neural Network (RNN)</a:t>
+            </a:r>
+            <a:endParaRPr lang="ko-KR" altLang="en-US" sz="2800" cap="none" dirty="0">
+              <a:solidFill>
+                <a:schemeClr val="bg2">
+                  <a:lumMod val="25000"/>
+                </a:schemeClr>
+              </a:solidFill>
+              <a:latin typeface="D2Coding" panose="020B0609020101020101" pitchFamily="49" charset="-127"/>
+              <a:ea typeface="D2Coding" panose="020B0609020101020101" pitchFamily="49" charset="-127"/>
+              <a:cs typeface="Segoe UI Light" panose="020B0502040204020203" pitchFamily="34" charset="0"/>
+            </a:endParaRPr>
+          </a:p>
+        </p:txBody>
+      </p:sp>
+      <p:sp>
+        <p:nvSpPr>
+          <p:cNvPr id="2" name="슬라이드 번호 개체 틀 3">
+            <a:extLst>
+              <a:ext uri="{FF2B5EF4-FFF2-40B4-BE49-F238E27FC236}">
+                <a16:creationId xmlns:a16="http://schemas.microsoft.com/office/drawing/2014/main" id="{07670714-F4FD-78D4-1483-F5C0283E492C}"/>
+              </a:ext>
+            </a:extLst>
+          </p:cNvPr>
+          <p:cNvSpPr>
+            <a:spLocks noGrp="1"/>
+          </p:cNvSpPr>
+          <p:nvPr>
+            <p:ph type="sldNum" sz="quarter" idx="12"/>
+          </p:nvPr>
+        </p:nvSpPr>
+        <p:spPr>
+          <a:xfrm>
+            <a:off x="11162487" y="299420"/>
+            <a:ext cx="753545" cy="365125"/>
+          </a:xfrm>
+        </p:spPr>
+        <p:txBody>
+          <a:bodyPr/>
+          <a:lstStyle/>
+          <a:p>
+            <a:fld id="{D57F1E4F-1CFF-5643-939E-217C01CDF565}" type="slidenum">
+              <a:rPr lang="en-US" sz="1400" b="1" smtClean="0">
+                <a:latin typeface="Times New Roman" panose="02020603050405020304" pitchFamily="18" charset="0"/>
+                <a:ea typeface="Verdana" panose="020B0604030504040204" pitchFamily="34" charset="0"/>
+                <a:cs typeface="Times New Roman" panose="02020603050405020304" pitchFamily="18" charset="0"/>
+              </a:rPr>
+              <a:pPr/>
+              <a:t>30</a:t>
+            </a:fld>
+            <a:endParaRPr lang="en-US" sz="1400" b="1" dirty="0">
+              <a:latin typeface="Times New Roman" panose="02020603050405020304" pitchFamily="18" charset="0"/>
+              <a:ea typeface="Verdana" panose="020B0604030504040204" pitchFamily="34" charset="0"/>
+              <a:cs typeface="Times New Roman" panose="02020603050405020304" pitchFamily="18" charset="0"/>
+            </a:endParaRPr>
+          </a:p>
+        </p:txBody>
+      </p:sp>
+      <p:pic>
+        <p:nvPicPr>
+          <p:cNvPr id="7" name="그림 6">
+            <a:extLst>
+              <a:ext uri="{FF2B5EF4-FFF2-40B4-BE49-F238E27FC236}">
+                <a16:creationId xmlns:a16="http://schemas.microsoft.com/office/drawing/2014/main" id="{03AFAC94-5936-F2E8-BA63-E5A0BA713285}"/>
+              </a:ext>
+            </a:extLst>
+          </p:cNvPr>
+          <p:cNvPicPr>
+            <a:picLocks noChangeAspect="1"/>
+          </p:cNvPicPr>
+          <p:nvPr/>
+        </p:nvPicPr>
+        <p:blipFill>
+          <a:blip r:embed="rId2"/>
+          <a:stretch>
+            <a:fillRect/>
+          </a:stretch>
+        </p:blipFill>
+        <p:spPr>
+          <a:xfrm>
+            <a:off x="2053325" y="1499864"/>
+            <a:ext cx="7675230" cy="4053211"/>
+          </a:xfrm>
+          <a:prstGeom prst="rect">
+            <a:avLst/>
+          </a:prstGeom>
+        </p:spPr>
+      </p:pic>
+      <p:sp>
+        <p:nvSpPr>
+          <p:cNvPr id="6" name="TextBox 5">
+            <a:extLst>
+              <a:ext uri="{FF2B5EF4-FFF2-40B4-BE49-F238E27FC236}">
+                <a16:creationId xmlns:a16="http://schemas.microsoft.com/office/drawing/2014/main" id="{DF2DCB4E-8036-5F8F-788D-405F90D49285}"/>
+              </a:ext>
+            </a:extLst>
+          </p:cNvPr>
+          <p:cNvSpPr txBox="1"/>
+          <p:nvPr/>
+        </p:nvSpPr>
+        <p:spPr>
+          <a:xfrm>
+            <a:off x="2053325" y="5619851"/>
+            <a:ext cx="6096000" cy="369332"/>
+          </a:xfrm>
+          <a:prstGeom prst="rect">
+            <a:avLst/>
+          </a:prstGeom>
+          <a:noFill/>
+        </p:spPr>
+        <p:txBody>
+          <a:bodyPr wrap="square">
+            <a:spAutoFit/>
+          </a:bodyPr>
+          <a:lstStyle/>
+          <a:p>
+            <a:r>
+              <a:rPr lang="en-US" altLang="ko-KR" b="0" i="0" dirty="0">
+                <a:effectLst/>
+                <a:latin typeface="Lora" pitchFamily="2" charset="0"/>
+              </a:rPr>
+              <a:t> A simple RNN, unrolled over time</a:t>
+            </a:r>
+            <a:endParaRPr lang="ko-KR" altLang="en-US" dirty="0"/>
+          </a:p>
+        </p:txBody>
+      </p:sp>
+    </p:spTree>
+    <p:extLst>
+      <p:ext uri="{BB962C8B-B14F-4D97-AF65-F5344CB8AC3E}">
+        <p14:creationId xmlns:p14="http://schemas.microsoft.com/office/powerpoint/2010/main" val="2574970165"/>
+      </p:ext>
+    </p:extLst>
+  </p:cSld>
+  <p:clrMapOvr>
+    <a:masterClrMapping/>
+  </p:clrMapOvr>
+</p:sld>
+</file>
+
+<file path=ppt/slides/slide31.xml><?xml version="1.0" encoding="utf-8"?>
 <p:sld xmlns:a="http://schemas.openxmlformats.org/drawingml/2006/main" xmlns:r="http://schemas.openxmlformats.org/officeDocument/2006/relationships" xmlns:p="http://schemas.openxmlformats.org/presentationml/2006/main">
   <p:cSld>
     <p:spTree>
@@ -22734,7 +22939,7 @@
 </p:sld>
 </file>
 
-<file path=ppt/slides/slide31.xml><?xml version="1.0" encoding="utf-8"?>
+<file path=ppt/slides/slide32.xml><?xml version="1.0" encoding="utf-8"?>
 <p:sld xmlns:a="http://schemas.openxmlformats.org/drawingml/2006/main" xmlns:r="http://schemas.openxmlformats.org/officeDocument/2006/relationships" xmlns:p="http://schemas.openxmlformats.org/presentationml/2006/main">
   <p:cSld>
     <p:spTree>
@@ -22932,7 +23137,7 @@
 </p:sld>
 </file>
 
-<file path=ppt/slides/slide32.xml><?xml version="1.0" encoding="utf-8"?>
+<file path=ppt/slides/slide33.xml><?xml version="1.0" encoding="utf-8"?>
 <p:sld xmlns:a="http://schemas.openxmlformats.org/drawingml/2006/main" xmlns:r="http://schemas.openxmlformats.org/officeDocument/2006/relationships" xmlns:p="http://schemas.openxmlformats.org/presentationml/2006/main">
   <p:cSld>
     <p:spTree>
@@ -23931,7 +24136,7 @@
                 <a:cs typeface="Times New Roman" panose="02020603050405020304" pitchFamily="18" charset="0"/>
               </a:rPr>
               <a:pPr/>
-              <a:t>32</a:t>
+              <a:t>33</a:t>
             </a:fld>
             <a:endParaRPr lang="en-US" sz="1400" b="1" dirty="0">
               <a:latin typeface="Times New Roman" panose="02020603050405020304" pitchFamily="18" charset="0"/>
@@ -23954,7 +24159,7 @@
 </p:sld>
 </file>
 
-<file path=ppt/slides/slide33.xml><?xml version="1.0" encoding="utf-8"?>
+<file path=ppt/slides/slide34.xml><?xml version="1.0" encoding="utf-8"?>
 <p:sld xmlns:a="http://schemas.openxmlformats.org/drawingml/2006/main" xmlns:r="http://schemas.openxmlformats.org/officeDocument/2006/relationships" xmlns:p="http://schemas.openxmlformats.org/presentationml/2006/main">
   <p:cSld>
     <p:spTree>
@@ -24060,7 +24265,7 @@
             <a:fld id="{D57F1E4F-1CFF-5643-939E-217C01CDF565}" type="slidenum">
               <a:rPr lang="en-US" smtClean="0"/>
               <a:pPr/>
-              <a:t>33</a:t>
+              <a:t>34</a:t>
             </a:fld>
             <a:endParaRPr lang="en-US" dirty="0"/>
           </a:p>
@@ -24297,7 +24502,7 @@
 </p:sld>
 </file>
 
-<file path=ppt/slides/slide34.xml><?xml version="1.0" encoding="utf-8"?>
+<file path=ppt/slides/slide35.xml><?xml version="1.0" encoding="utf-8"?>
 <p:sld xmlns:a="http://schemas.openxmlformats.org/drawingml/2006/main" xmlns:r="http://schemas.openxmlformats.org/officeDocument/2006/relationships" xmlns:p="http://schemas.openxmlformats.org/presentationml/2006/main">
   <p:cSld>
     <p:spTree>
@@ -26460,7 +26665,7 @@
                 <a:cs typeface="Times New Roman" panose="02020603050405020304" pitchFamily="18" charset="0"/>
               </a:rPr>
               <a:pPr/>
-              <a:t>34</a:t>
+              <a:t>35</a:t>
             </a:fld>
             <a:endParaRPr lang="en-US" sz="1400" b="1" dirty="0">
               <a:latin typeface="Times New Roman" panose="02020603050405020304" pitchFamily="18" charset="0"/>
@@ -26483,7 +26688,7 @@
 </p:sld>
 </file>
 
-<file path=ppt/slides/slide35.xml><?xml version="1.0" encoding="utf-8"?>
+<file path=ppt/slides/slide36.xml><?xml version="1.0" encoding="utf-8"?>
 <p:sld xmlns:a="http://schemas.openxmlformats.org/drawingml/2006/main" xmlns:r="http://schemas.openxmlformats.org/officeDocument/2006/relationships" xmlns:p="http://schemas.openxmlformats.org/presentationml/2006/main">
   <p:cSld>
     <p:spTree>
@@ -26924,7 +27129,7 @@
                 <a:cs typeface="Times New Roman" panose="02020603050405020304" pitchFamily="18" charset="0"/>
               </a:rPr>
               <a:pPr/>
-              <a:t>35</a:t>
+              <a:t>36</a:t>
             </a:fld>
             <a:endParaRPr lang="en-US" sz="1400" b="1" dirty="0">
               <a:latin typeface="Times New Roman" panose="02020603050405020304" pitchFamily="18" charset="0"/>
@@ -26947,7 +27152,7 @@
 </p:sld>
 </file>
 
-<file path=ppt/slides/slide36.xml><?xml version="1.0" encoding="utf-8"?>
+<file path=ppt/slides/slide37.xml><?xml version="1.0" encoding="utf-8"?>
 <p:sld xmlns:a="http://schemas.openxmlformats.org/drawingml/2006/main" xmlns:r="http://schemas.openxmlformats.org/officeDocument/2006/relationships" xmlns:p="http://schemas.openxmlformats.org/presentationml/2006/main">
   <p:cSld>
     <p:spTree>
@@ -27711,7 +27916,7 @@
                 <a:cs typeface="Times New Roman" panose="02020603050405020304" pitchFamily="18" charset="0"/>
               </a:rPr>
               <a:pPr/>
-              <a:t>36</a:t>
+              <a:t>37</a:t>
             </a:fld>
             <a:endParaRPr lang="en-US" sz="1400" b="1" dirty="0">
               <a:latin typeface="Times New Roman" panose="02020603050405020304" pitchFamily="18" charset="0"/>
@@ -27809,7 +28014,7 @@
 </p:sld>
 </file>
 
-<file path=ppt/slides/slide37.xml><?xml version="1.0" encoding="utf-8"?>
+<file path=ppt/slides/slide38.xml><?xml version="1.0" encoding="utf-8"?>
 <p:sld xmlns:a="http://schemas.openxmlformats.org/drawingml/2006/main" xmlns:r="http://schemas.openxmlformats.org/officeDocument/2006/relationships" xmlns:p="http://schemas.openxmlformats.org/presentationml/2006/main">
   <p:cSld>
     <p:spTree>
@@ -30272,7 +30477,7 @@
                 <a:cs typeface="Times New Roman" panose="02020603050405020304" pitchFamily="18" charset="0"/>
               </a:rPr>
               <a:pPr/>
-              <a:t>37</a:t>
+              <a:t>38</a:t>
             </a:fld>
             <a:endParaRPr lang="en-US" sz="1400" b="1" dirty="0">
               <a:latin typeface="Times New Roman" panose="02020603050405020304" pitchFamily="18" charset="0"/>
@@ -30623,7 +30828,7 @@
 </p:sld>
 </file>
 
-<file path=ppt/slides/slide38.xml><?xml version="1.0" encoding="utf-8"?>
+<file path=ppt/slides/slide39.xml><?xml version="1.0" encoding="utf-8"?>
 <p:sld xmlns:a="http://schemas.openxmlformats.org/drawingml/2006/main" xmlns:r="http://schemas.openxmlformats.org/officeDocument/2006/relationships" xmlns:p="http://schemas.openxmlformats.org/presentationml/2006/main">
   <p:cSld>
     <p:spTree>
@@ -35090,7 +35295,7 @@
                 <a:cs typeface="Times New Roman" panose="02020603050405020304" pitchFamily="18" charset="0"/>
               </a:rPr>
               <a:pPr/>
-              <a:t>38</a:t>
+              <a:t>39</a:t>
             </a:fld>
             <a:endParaRPr lang="en-US" sz="1400" b="1" dirty="0">
               <a:latin typeface="Times New Roman" panose="02020603050405020304" pitchFamily="18" charset="0"/>
@@ -36278,7 +36483,279 @@
 </p:sld>
 </file>
 
-<file path=ppt/slides/slide39.xml><?xml version="1.0" encoding="utf-8"?>
+<file path=ppt/slides/slide4.xml><?xml version="1.0" encoding="utf-8"?>
+<p:sld xmlns:a="http://schemas.openxmlformats.org/drawingml/2006/main" xmlns:r="http://schemas.openxmlformats.org/officeDocument/2006/relationships" xmlns:p="http://schemas.openxmlformats.org/presentationml/2006/main">
+  <p:cSld>
+    <p:spTree>
+      <p:nvGrpSpPr>
+        <p:cNvPr id="1" name="">
+          <a:extLst>
+            <a:ext uri="{FF2B5EF4-FFF2-40B4-BE49-F238E27FC236}">
+              <a16:creationId xmlns:a16="http://schemas.microsoft.com/office/drawing/2014/main" id="{07E81080-7482-4F78-0B32-9350845B42DF}"/>
+            </a:ext>
+          </a:extLst>
+        </p:cNvPr>
+        <p:cNvGrpSpPr/>
+        <p:nvPr/>
+      </p:nvGrpSpPr>
+      <p:grpSpPr>
+        <a:xfrm>
+          <a:off x="0" y="0"/>
+          <a:ext cx="0" cy="0"/>
+          <a:chOff x="0" y="0"/>
+          <a:chExt cx="0" cy="0"/>
+        </a:xfrm>
+      </p:grpSpPr>
+      <p:sp>
+        <p:nvSpPr>
+          <p:cNvPr id="3" name="제목 1">
+            <a:extLst>
+              <a:ext uri="{FF2B5EF4-FFF2-40B4-BE49-F238E27FC236}">
+                <a16:creationId xmlns:a16="http://schemas.microsoft.com/office/drawing/2014/main" id="{DBF09144-883D-B590-22EC-22EF91228308}"/>
+              </a:ext>
+            </a:extLst>
+          </p:cNvPr>
+          <p:cNvSpPr txBox="1">
+            <a:spLocks/>
+          </p:cNvSpPr>
+          <p:nvPr/>
+        </p:nvSpPr>
+        <p:spPr>
+          <a:xfrm>
+            <a:off x="475645" y="481983"/>
+            <a:ext cx="10353762" cy="766439"/>
+          </a:xfrm>
+          <a:prstGeom prst="rect">
+            <a:avLst/>
+          </a:prstGeom>
+        </p:spPr>
+        <p:txBody>
+          <a:bodyPr vert="horz" lIns="91440" tIns="45720" rIns="91440" bIns="45720" rtlCol="0" anchor="ctr">
+            <a:normAutofit/>
+          </a:bodyPr>
+          <a:lstStyle>
+            <a:lvl1pPr algn="ctr" defTabSz="914400" rtl="0" eaLnBrk="1" latinLnBrk="1" hangingPunct="1">
+              <a:lnSpc>
+                <a:spcPct val="90000"/>
+              </a:lnSpc>
+              <a:spcBef>
+                <a:spcPct val="0"/>
+              </a:spcBef>
+              <a:buNone/>
+              <a:defRPr sz="3200" kern="1200" cap="all" baseline="0">
+                <a:solidFill>
+                  <a:schemeClr val="tx1"/>
+                </a:solidFill>
+                <a:effectLst/>
+                <a:latin typeface="Batang" panose="02030600000101010101" pitchFamily="18" charset="-127"/>
+                <a:ea typeface="Batang" panose="02030600000101010101" pitchFamily="18" charset="-127"/>
+                <a:cs typeface="+mj-cs"/>
+              </a:defRPr>
+            </a:lvl1pPr>
+          </a:lstStyle>
+          <a:p>
+            <a:pPr algn="l"/>
+            <a:r>
+              <a:rPr lang="ko-KR" altLang="en-US" sz="2800" cap="none" dirty="0">
+                <a:solidFill>
+                  <a:schemeClr val="bg2">
+                    <a:lumMod val="25000"/>
+                  </a:schemeClr>
+                </a:solidFill>
+                <a:latin typeface="D2Coding" panose="020B0609020101020101" pitchFamily="49" charset="-127"/>
+                <a:ea typeface="D2Coding" panose="020B0609020101020101" pitchFamily="49" charset="-127"/>
+                <a:cs typeface="Segoe UI Light" panose="020B0502040204020203" pitchFamily="34" charset="0"/>
+              </a:rPr>
+              <a:t>순서가 중요한 데이터</a:t>
+            </a:r>
+          </a:p>
+        </p:txBody>
+      </p:sp>
+      <p:pic>
+        <p:nvPicPr>
+          <p:cNvPr id="7" name="그림 6">
+            <a:extLst>
+              <a:ext uri="{FF2B5EF4-FFF2-40B4-BE49-F238E27FC236}">
+                <a16:creationId xmlns:a16="http://schemas.microsoft.com/office/drawing/2014/main" id="{10911C56-8BA1-1A77-1C57-C79246EF5C86}"/>
+              </a:ext>
+            </a:extLst>
+          </p:cNvPr>
+          <p:cNvPicPr>
+            <a:picLocks noChangeAspect="1"/>
+          </p:cNvPicPr>
+          <p:nvPr/>
+        </p:nvPicPr>
+        <p:blipFill>
+          <a:blip r:embed="rId2"/>
+          <a:stretch>
+            <a:fillRect/>
+          </a:stretch>
+        </p:blipFill>
+        <p:spPr>
+          <a:xfrm>
+            <a:off x="1147115" y="2213264"/>
+            <a:ext cx="9898714" cy="3139786"/>
+          </a:xfrm>
+          <a:prstGeom prst="rect">
+            <a:avLst/>
+          </a:prstGeom>
+        </p:spPr>
+      </p:pic>
+      <p:sp>
+        <p:nvSpPr>
+          <p:cNvPr id="2" name="슬라이드 번호 개체 틀 3">
+            <a:extLst>
+              <a:ext uri="{FF2B5EF4-FFF2-40B4-BE49-F238E27FC236}">
+                <a16:creationId xmlns:a16="http://schemas.microsoft.com/office/drawing/2014/main" id="{6AE85520-4C86-33A3-9B1D-8BA3330845C3}"/>
+              </a:ext>
+            </a:extLst>
+          </p:cNvPr>
+          <p:cNvSpPr txBox="1">
+            <a:spLocks/>
+          </p:cNvSpPr>
+          <p:nvPr/>
+        </p:nvSpPr>
+        <p:spPr>
+          <a:xfrm>
+            <a:off x="11162487" y="299420"/>
+            <a:ext cx="753545" cy="365125"/>
+          </a:xfrm>
+          <a:prstGeom prst="rect">
+            <a:avLst/>
+          </a:prstGeom>
+        </p:spPr>
+        <p:txBody>
+          <a:bodyPr vert="horz" lIns="91440" tIns="45720" rIns="91440" bIns="45720" rtlCol="0" anchor="ctr"/>
+          <a:lstStyle>
+            <a:defPPr rtl="0">
+              <a:defRPr lang="ko-KR"/>
+            </a:defPPr>
+            <a:lvl1pPr marL="0" algn="r" defTabSz="914400" rtl="0" eaLnBrk="1" latinLnBrk="0" hangingPunct="1">
+              <a:defRPr sz="1200" kern="1200" baseline="0">
+                <a:solidFill>
+                  <a:schemeClr val="tx1">
+                    <a:lumMod val="65000"/>
+                    <a:lumOff val="35000"/>
+                  </a:schemeClr>
+                </a:solidFill>
+                <a:latin typeface="맑은 고딕" panose="020B0503020000020004" pitchFamily="50" charset="-127"/>
+                <a:ea typeface="맑은 고딕" panose="020B0503020000020004" pitchFamily="50" charset="-127"/>
+                <a:cs typeface="+mn-cs"/>
+              </a:defRPr>
+            </a:lvl1pPr>
+            <a:lvl2pPr marL="457200" algn="l" defTabSz="914400" rtl="0" eaLnBrk="1" latinLnBrk="0" hangingPunct="1">
+              <a:defRPr sz="1800" kern="1200">
+                <a:solidFill>
+                  <a:schemeClr val="tx1"/>
+                </a:solidFill>
+                <a:latin typeface="+mn-lt"/>
+                <a:ea typeface="+mn-ea"/>
+                <a:cs typeface="+mn-cs"/>
+              </a:defRPr>
+            </a:lvl2pPr>
+            <a:lvl3pPr marL="914400" algn="l" defTabSz="914400" rtl="0" eaLnBrk="1" latinLnBrk="0" hangingPunct="1">
+              <a:defRPr sz="1800" kern="1200">
+                <a:solidFill>
+                  <a:schemeClr val="tx1"/>
+                </a:solidFill>
+                <a:latin typeface="+mn-lt"/>
+                <a:ea typeface="+mn-ea"/>
+                <a:cs typeface="+mn-cs"/>
+              </a:defRPr>
+            </a:lvl3pPr>
+            <a:lvl4pPr marL="1371600" algn="l" defTabSz="914400" rtl="0" eaLnBrk="1" latinLnBrk="0" hangingPunct="1">
+              <a:defRPr sz="1800" kern="1200">
+                <a:solidFill>
+                  <a:schemeClr val="tx1"/>
+                </a:solidFill>
+                <a:latin typeface="+mn-lt"/>
+                <a:ea typeface="+mn-ea"/>
+                <a:cs typeface="+mn-cs"/>
+              </a:defRPr>
+            </a:lvl4pPr>
+            <a:lvl5pPr marL="1828800" algn="l" defTabSz="914400" rtl="0" eaLnBrk="1" latinLnBrk="0" hangingPunct="1">
+              <a:defRPr sz="1800" kern="1200">
+                <a:solidFill>
+                  <a:schemeClr val="tx1"/>
+                </a:solidFill>
+                <a:latin typeface="+mn-lt"/>
+                <a:ea typeface="+mn-ea"/>
+                <a:cs typeface="+mn-cs"/>
+              </a:defRPr>
+            </a:lvl5pPr>
+            <a:lvl6pPr marL="2286000" algn="l" defTabSz="914400" rtl="0" eaLnBrk="1" latinLnBrk="0" hangingPunct="1">
+              <a:defRPr sz="1800" kern="1200">
+                <a:solidFill>
+                  <a:schemeClr val="tx1"/>
+                </a:solidFill>
+                <a:latin typeface="+mn-lt"/>
+                <a:ea typeface="+mn-ea"/>
+                <a:cs typeface="+mn-cs"/>
+              </a:defRPr>
+            </a:lvl6pPr>
+            <a:lvl7pPr marL="2743200" algn="l" defTabSz="914400" rtl="0" eaLnBrk="1" latinLnBrk="0" hangingPunct="1">
+              <a:defRPr sz="1800" kern="1200">
+                <a:solidFill>
+                  <a:schemeClr val="tx1"/>
+                </a:solidFill>
+                <a:latin typeface="+mn-lt"/>
+                <a:ea typeface="+mn-ea"/>
+                <a:cs typeface="+mn-cs"/>
+              </a:defRPr>
+            </a:lvl7pPr>
+            <a:lvl8pPr marL="3200400" algn="l" defTabSz="914400" rtl="0" eaLnBrk="1" latinLnBrk="0" hangingPunct="1">
+              <a:defRPr sz="1800" kern="1200">
+                <a:solidFill>
+                  <a:schemeClr val="tx1"/>
+                </a:solidFill>
+                <a:latin typeface="+mn-lt"/>
+                <a:ea typeface="+mn-ea"/>
+                <a:cs typeface="+mn-cs"/>
+              </a:defRPr>
+            </a:lvl8pPr>
+            <a:lvl9pPr marL="3657600" algn="l" defTabSz="914400" rtl="0" eaLnBrk="1" latinLnBrk="0" hangingPunct="1">
+              <a:defRPr sz="1800" kern="1200">
+                <a:solidFill>
+                  <a:schemeClr val="tx1"/>
+                </a:solidFill>
+                <a:latin typeface="+mn-lt"/>
+                <a:ea typeface="+mn-ea"/>
+                <a:cs typeface="+mn-cs"/>
+              </a:defRPr>
+            </a:lvl9pPr>
+          </a:lstStyle>
+          <a:p>
+            <a:fld id="{D57F1E4F-1CFF-5643-939E-217C01CDF565}" type="slidenum">
+              <a:rPr lang="en-US" sz="1400" b="1" smtClean="0">
+                <a:latin typeface="Times New Roman" panose="02020603050405020304" pitchFamily="18" charset="0"/>
+                <a:ea typeface="Verdana" panose="020B0604030504040204" pitchFamily="34" charset="0"/>
+                <a:cs typeface="Times New Roman" panose="02020603050405020304" pitchFamily="18" charset="0"/>
+              </a:rPr>
+              <a:pPr/>
+              <a:t>4</a:t>
+            </a:fld>
+            <a:endParaRPr lang="en-US" sz="1400" b="1" dirty="0">
+              <a:latin typeface="Times New Roman" panose="02020603050405020304" pitchFamily="18" charset="0"/>
+              <a:ea typeface="Verdana" panose="020B0604030504040204" pitchFamily="34" charset="0"/>
+              <a:cs typeface="Times New Roman" panose="02020603050405020304" pitchFamily="18" charset="0"/>
+            </a:endParaRPr>
+          </a:p>
+        </p:txBody>
+      </p:sp>
+    </p:spTree>
+    <p:extLst>
+      <p:ext uri="{BB962C8B-B14F-4D97-AF65-F5344CB8AC3E}">
+        <p14:creationId xmlns:p14="http://schemas.microsoft.com/office/powerpoint/2010/main" val="770903537"/>
+      </p:ext>
+    </p:extLst>
+  </p:cSld>
+  <p:clrMapOvr>
+    <a:masterClrMapping/>
+  </p:clrMapOvr>
+</p:sld>
+</file>
+
+<file path=ppt/slides/slide40.xml><?xml version="1.0" encoding="utf-8"?>
 <p:sld xmlns:a="http://schemas.openxmlformats.org/drawingml/2006/main" xmlns:r="http://schemas.openxmlformats.org/officeDocument/2006/relationships" xmlns:p="http://schemas.openxmlformats.org/presentationml/2006/main">
   <p:cSld>
     <p:spTree>
@@ -36705,7 +37182,7 @@
                 <a:cs typeface="Times New Roman" panose="02020603050405020304" pitchFamily="18" charset="0"/>
               </a:rPr>
               <a:pPr/>
-              <a:t>39</a:t>
+              <a:t>40</a:t>
             </a:fld>
             <a:endParaRPr lang="en-US" sz="1400" b="1" dirty="0">
               <a:latin typeface="Times New Roman" panose="02020603050405020304" pitchFamily="18" charset="0"/>
@@ -36728,279 +37205,7 @@
 </p:sld>
 </file>
 
-<file path=ppt/slides/slide4.xml><?xml version="1.0" encoding="utf-8"?>
-<p:sld xmlns:a="http://schemas.openxmlformats.org/drawingml/2006/main" xmlns:r="http://schemas.openxmlformats.org/officeDocument/2006/relationships" xmlns:p="http://schemas.openxmlformats.org/presentationml/2006/main">
-  <p:cSld>
-    <p:spTree>
-      <p:nvGrpSpPr>
-        <p:cNvPr id="1" name="">
-          <a:extLst>
-            <a:ext uri="{FF2B5EF4-FFF2-40B4-BE49-F238E27FC236}">
-              <a16:creationId xmlns:a16="http://schemas.microsoft.com/office/drawing/2014/main" id="{07E81080-7482-4F78-0B32-9350845B42DF}"/>
-            </a:ext>
-          </a:extLst>
-        </p:cNvPr>
-        <p:cNvGrpSpPr/>
-        <p:nvPr/>
-      </p:nvGrpSpPr>
-      <p:grpSpPr>
-        <a:xfrm>
-          <a:off x="0" y="0"/>
-          <a:ext cx="0" cy="0"/>
-          <a:chOff x="0" y="0"/>
-          <a:chExt cx="0" cy="0"/>
-        </a:xfrm>
-      </p:grpSpPr>
-      <p:sp>
-        <p:nvSpPr>
-          <p:cNvPr id="3" name="제목 1">
-            <a:extLst>
-              <a:ext uri="{FF2B5EF4-FFF2-40B4-BE49-F238E27FC236}">
-                <a16:creationId xmlns:a16="http://schemas.microsoft.com/office/drawing/2014/main" id="{DBF09144-883D-B590-22EC-22EF91228308}"/>
-              </a:ext>
-            </a:extLst>
-          </p:cNvPr>
-          <p:cNvSpPr txBox="1">
-            <a:spLocks/>
-          </p:cNvSpPr>
-          <p:nvPr/>
-        </p:nvSpPr>
-        <p:spPr>
-          <a:xfrm>
-            <a:off x="475645" y="481983"/>
-            <a:ext cx="10353762" cy="766439"/>
-          </a:xfrm>
-          <a:prstGeom prst="rect">
-            <a:avLst/>
-          </a:prstGeom>
-        </p:spPr>
-        <p:txBody>
-          <a:bodyPr vert="horz" lIns="91440" tIns="45720" rIns="91440" bIns="45720" rtlCol="0" anchor="ctr">
-            <a:normAutofit/>
-          </a:bodyPr>
-          <a:lstStyle>
-            <a:lvl1pPr algn="ctr" defTabSz="914400" rtl="0" eaLnBrk="1" latinLnBrk="1" hangingPunct="1">
-              <a:lnSpc>
-                <a:spcPct val="90000"/>
-              </a:lnSpc>
-              <a:spcBef>
-                <a:spcPct val="0"/>
-              </a:spcBef>
-              <a:buNone/>
-              <a:defRPr sz="3200" kern="1200" cap="all" baseline="0">
-                <a:solidFill>
-                  <a:schemeClr val="tx1"/>
-                </a:solidFill>
-                <a:effectLst/>
-                <a:latin typeface="Batang" panose="02030600000101010101" pitchFamily="18" charset="-127"/>
-                <a:ea typeface="Batang" panose="02030600000101010101" pitchFamily="18" charset="-127"/>
-                <a:cs typeface="+mj-cs"/>
-              </a:defRPr>
-            </a:lvl1pPr>
-          </a:lstStyle>
-          <a:p>
-            <a:pPr algn="l"/>
-            <a:r>
-              <a:rPr lang="ko-KR" altLang="en-US" sz="2800" cap="none" dirty="0">
-                <a:solidFill>
-                  <a:schemeClr val="bg2">
-                    <a:lumMod val="25000"/>
-                  </a:schemeClr>
-                </a:solidFill>
-                <a:latin typeface="D2Coding" panose="020B0609020101020101" pitchFamily="49" charset="-127"/>
-                <a:ea typeface="D2Coding" panose="020B0609020101020101" pitchFamily="49" charset="-127"/>
-                <a:cs typeface="Segoe UI Light" panose="020B0502040204020203" pitchFamily="34" charset="0"/>
-              </a:rPr>
-              <a:t>순서가 중요한 데이터</a:t>
-            </a:r>
-          </a:p>
-        </p:txBody>
-      </p:sp>
-      <p:pic>
-        <p:nvPicPr>
-          <p:cNvPr id="7" name="그림 6">
-            <a:extLst>
-              <a:ext uri="{FF2B5EF4-FFF2-40B4-BE49-F238E27FC236}">
-                <a16:creationId xmlns:a16="http://schemas.microsoft.com/office/drawing/2014/main" id="{10911C56-8BA1-1A77-1C57-C79246EF5C86}"/>
-              </a:ext>
-            </a:extLst>
-          </p:cNvPr>
-          <p:cNvPicPr>
-            <a:picLocks noChangeAspect="1"/>
-          </p:cNvPicPr>
-          <p:nvPr/>
-        </p:nvPicPr>
-        <p:blipFill>
-          <a:blip r:embed="rId2"/>
-          <a:stretch>
-            <a:fillRect/>
-          </a:stretch>
-        </p:blipFill>
-        <p:spPr>
-          <a:xfrm>
-            <a:off x="1147115" y="2213264"/>
-            <a:ext cx="9898714" cy="3139786"/>
-          </a:xfrm>
-          <a:prstGeom prst="rect">
-            <a:avLst/>
-          </a:prstGeom>
-        </p:spPr>
-      </p:pic>
-      <p:sp>
-        <p:nvSpPr>
-          <p:cNvPr id="2" name="슬라이드 번호 개체 틀 3">
-            <a:extLst>
-              <a:ext uri="{FF2B5EF4-FFF2-40B4-BE49-F238E27FC236}">
-                <a16:creationId xmlns:a16="http://schemas.microsoft.com/office/drawing/2014/main" id="{6AE85520-4C86-33A3-9B1D-8BA3330845C3}"/>
-              </a:ext>
-            </a:extLst>
-          </p:cNvPr>
-          <p:cNvSpPr txBox="1">
-            <a:spLocks/>
-          </p:cNvSpPr>
-          <p:nvPr/>
-        </p:nvSpPr>
-        <p:spPr>
-          <a:xfrm>
-            <a:off x="11162487" y="299420"/>
-            <a:ext cx="753545" cy="365125"/>
-          </a:xfrm>
-          <a:prstGeom prst="rect">
-            <a:avLst/>
-          </a:prstGeom>
-        </p:spPr>
-        <p:txBody>
-          <a:bodyPr vert="horz" lIns="91440" tIns="45720" rIns="91440" bIns="45720" rtlCol="0" anchor="ctr"/>
-          <a:lstStyle>
-            <a:defPPr rtl="0">
-              <a:defRPr lang="ko-KR"/>
-            </a:defPPr>
-            <a:lvl1pPr marL="0" algn="r" defTabSz="914400" rtl="0" eaLnBrk="1" latinLnBrk="0" hangingPunct="1">
-              <a:defRPr sz="1200" kern="1200" baseline="0">
-                <a:solidFill>
-                  <a:schemeClr val="tx1">
-                    <a:lumMod val="65000"/>
-                    <a:lumOff val="35000"/>
-                  </a:schemeClr>
-                </a:solidFill>
-                <a:latin typeface="맑은 고딕" panose="020B0503020000020004" pitchFamily="50" charset="-127"/>
-                <a:ea typeface="맑은 고딕" panose="020B0503020000020004" pitchFamily="50" charset="-127"/>
-                <a:cs typeface="+mn-cs"/>
-              </a:defRPr>
-            </a:lvl1pPr>
-            <a:lvl2pPr marL="457200" algn="l" defTabSz="914400" rtl="0" eaLnBrk="1" latinLnBrk="0" hangingPunct="1">
-              <a:defRPr sz="1800" kern="1200">
-                <a:solidFill>
-                  <a:schemeClr val="tx1"/>
-                </a:solidFill>
-                <a:latin typeface="+mn-lt"/>
-                <a:ea typeface="+mn-ea"/>
-                <a:cs typeface="+mn-cs"/>
-              </a:defRPr>
-            </a:lvl2pPr>
-            <a:lvl3pPr marL="914400" algn="l" defTabSz="914400" rtl="0" eaLnBrk="1" latinLnBrk="0" hangingPunct="1">
-              <a:defRPr sz="1800" kern="1200">
-                <a:solidFill>
-                  <a:schemeClr val="tx1"/>
-                </a:solidFill>
-                <a:latin typeface="+mn-lt"/>
-                <a:ea typeface="+mn-ea"/>
-                <a:cs typeface="+mn-cs"/>
-              </a:defRPr>
-            </a:lvl3pPr>
-            <a:lvl4pPr marL="1371600" algn="l" defTabSz="914400" rtl="0" eaLnBrk="1" latinLnBrk="0" hangingPunct="1">
-              <a:defRPr sz="1800" kern="1200">
-                <a:solidFill>
-                  <a:schemeClr val="tx1"/>
-                </a:solidFill>
-                <a:latin typeface="+mn-lt"/>
-                <a:ea typeface="+mn-ea"/>
-                <a:cs typeface="+mn-cs"/>
-              </a:defRPr>
-            </a:lvl4pPr>
-            <a:lvl5pPr marL="1828800" algn="l" defTabSz="914400" rtl="0" eaLnBrk="1" latinLnBrk="0" hangingPunct="1">
-              <a:defRPr sz="1800" kern="1200">
-                <a:solidFill>
-                  <a:schemeClr val="tx1"/>
-                </a:solidFill>
-                <a:latin typeface="+mn-lt"/>
-                <a:ea typeface="+mn-ea"/>
-                <a:cs typeface="+mn-cs"/>
-              </a:defRPr>
-            </a:lvl5pPr>
-            <a:lvl6pPr marL="2286000" algn="l" defTabSz="914400" rtl="0" eaLnBrk="1" latinLnBrk="0" hangingPunct="1">
-              <a:defRPr sz="1800" kern="1200">
-                <a:solidFill>
-                  <a:schemeClr val="tx1"/>
-                </a:solidFill>
-                <a:latin typeface="+mn-lt"/>
-                <a:ea typeface="+mn-ea"/>
-                <a:cs typeface="+mn-cs"/>
-              </a:defRPr>
-            </a:lvl6pPr>
-            <a:lvl7pPr marL="2743200" algn="l" defTabSz="914400" rtl="0" eaLnBrk="1" latinLnBrk="0" hangingPunct="1">
-              <a:defRPr sz="1800" kern="1200">
-                <a:solidFill>
-                  <a:schemeClr val="tx1"/>
-                </a:solidFill>
-                <a:latin typeface="+mn-lt"/>
-                <a:ea typeface="+mn-ea"/>
-                <a:cs typeface="+mn-cs"/>
-              </a:defRPr>
-            </a:lvl7pPr>
-            <a:lvl8pPr marL="3200400" algn="l" defTabSz="914400" rtl="0" eaLnBrk="1" latinLnBrk="0" hangingPunct="1">
-              <a:defRPr sz="1800" kern="1200">
-                <a:solidFill>
-                  <a:schemeClr val="tx1"/>
-                </a:solidFill>
-                <a:latin typeface="+mn-lt"/>
-                <a:ea typeface="+mn-ea"/>
-                <a:cs typeface="+mn-cs"/>
-              </a:defRPr>
-            </a:lvl8pPr>
-            <a:lvl9pPr marL="3657600" algn="l" defTabSz="914400" rtl="0" eaLnBrk="1" latinLnBrk="0" hangingPunct="1">
-              <a:defRPr sz="1800" kern="1200">
-                <a:solidFill>
-                  <a:schemeClr val="tx1"/>
-                </a:solidFill>
-                <a:latin typeface="+mn-lt"/>
-                <a:ea typeface="+mn-ea"/>
-                <a:cs typeface="+mn-cs"/>
-              </a:defRPr>
-            </a:lvl9pPr>
-          </a:lstStyle>
-          <a:p>
-            <a:fld id="{D57F1E4F-1CFF-5643-939E-217C01CDF565}" type="slidenum">
-              <a:rPr lang="en-US" sz="1400" b="1" smtClean="0">
-                <a:latin typeface="Times New Roman" panose="02020603050405020304" pitchFamily="18" charset="0"/>
-                <a:ea typeface="Verdana" panose="020B0604030504040204" pitchFamily="34" charset="0"/>
-                <a:cs typeface="Times New Roman" panose="02020603050405020304" pitchFamily="18" charset="0"/>
-              </a:rPr>
-              <a:pPr/>
-              <a:t>4</a:t>
-            </a:fld>
-            <a:endParaRPr lang="en-US" sz="1400" b="1" dirty="0">
-              <a:latin typeface="Times New Roman" panose="02020603050405020304" pitchFamily="18" charset="0"/>
-              <a:ea typeface="Verdana" panose="020B0604030504040204" pitchFamily="34" charset="0"/>
-              <a:cs typeface="Times New Roman" panose="02020603050405020304" pitchFamily="18" charset="0"/>
-            </a:endParaRPr>
-          </a:p>
-        </p:txBody>
-      </p:sp>
-    </p:spTree>
-    <p:extLst>
-      <p:ext uri="{BB962C8B-B14F-4D97-AF65-F5344CB8AC3E}">
-        <p14:creationId xmlns:p14="http://schemas.microsoft.com/office/powerpoint/2010/main" val="770903537"/>
-      </p:ext>
-    </p:extLst>
-  </p:cSld>
-  <p:clrMapOvr>
-    <a:masterClrMapping/>
-  </p:clrMapOvr>
-</p:sld>
-</file>
-
-<file path=ppt/slides/slide40.xml><?xml version="1.0" encoding="utf-8"?>
+<file path=ppt/slides/slide41.xml><?xml version="1.0" encoding="utf-8"?>
 <p:sld xmlns:a="http://schemas.openxmlformats.org/drawingml/2006/main" xmlns:r="http://schemas.openxmlformats.org/officeDocument/2006/relationships" xmlns:p="http://schemas.openxmlformats.org/presentationml/2006/main">
   <p:cSld>
     <p:spTree>
@@ -38272,7 +38477,7 @@
                 <a:cs typeface="Times New Roman" panose="02020603050405020304" pitchFamily="18" charset="0"/>
               </a:rPr>
               <a:pPr/>
-              <a:t>40</a:t>
+              <a:t>41</a:t>
             </a:fld>
             <a:endParaRPr lang="en-US" sz="1400" b="1" dirty="0">
               <a:latin typeface="Times New Roman" panose="02020603050405020304" pitchFamily="18" charset="0"/>
@@ -38331,7 +38536,7 @@
 </p:sld>
 </file>
 
-<file path=ppt/slides/slide41.xml><?xml version="1.0" encoding="utf-8"?>
+<file path=ppt/slides/slide42.xml><?xml version="1.0" encoding="utf-8"?>
 <p:sld xmlns:a="http://schemas.openxmlformats.org/drawingml/2006/main" xmlns:r="http://schemas.openxmlformats.org/officeDocument/2006/relationships" xmlns:p="http://schemas.openxmlformats.org/presentationml/2006/main">
   <p:cSld>
     <p:spTree>
@@ -39755,7 +39960,7 @@
                 <a:cs typeface="Times New Roman" panose="02020603050405020304" pitchFamily="18" charset="0"/>
               </a:rPr>
               <a:pPr/>
-              <a:t>41</a:t>
+              <a:t>42</a:t>
             </a:fld>
             <a:endParaRPr lang="en-US" sz="1400" b="1" dirty="0">
               <a:latin typeface="Times New Roman" panose="02020603050405020304" pitchFamily="18" charset="0"/>
@@ -39919,7 +40124,7 @@
 </p:sld>
 </file>
 
-<file path=ppt/slides/slide42.xml><?xml version="1.0" encoding="utf-8"?>
+<file path=ppt/slides/slide43.xml><?xml version="1.0" encoding="utf-8"?>
 <p:sld xmlns:a="http://schemas.openxmlformats.org/drawingml/2006/main" xmlns:r="http://schemas.openxmlformats.org/officeDocument/2006/relationships" xmlns:p="http://schemas.openxmlformats.org/presentationml/2006/main">
   <p:cSld>
     <p:spTree>
@@ -41123,7 +41328,7 @@
                 <a:cs typeface="Times New Roman" panose="02020603050405020304" pitchFamily="18" charset="0"/>
               </a:rPr>
               <a:pPr/>
-              <a:t>42</a:t>
+              <a:t>43</a:t>
             </a:fld>
             <a:endParaRPr lang="en-US" sz="1400" b="1" dirty="0">
               <a:latin typeface="Times New Roman" panose="02020603050405020304" pitchFamily="18" charset="0"/>
@@ -41182,7 +41387,7 @@
 </p:sld>
 </file>
 
-<file path=ppt/slides/slide43.xml><?xml version="1.0" encoding="utf-8"?>
+<file path=ppt/slides/slide44.xml><?xml version="1.0" encoding="utf-8"?>
 <p:sld xmlns:a="http://schemas.openxmlformats.org/drawingml/2006/main" xmlns:r="http://schemas.openxmlformats.org/officeDocument/2006/relationships" xmlns:p="http://schemas.openxmlformats.org/presentationml/2006/main">
   <p:cSld>
     <p:spTree>
@@ -41894,7 +42099,7 @@
                 <a:cs typeface="Times New Roman" panose="02020603050405020304" pitchFamily="18" charset="0"/>
               </a:rPr>
               <a:pPr/>
-              <a:t>43</a:t>
+              <a:t>44</a:t>
             </a:fld>
             <a:endParaRPr lang="en-US" sz="1400" b="1" dirty="0">
               <a:latin typeface="Times New Roman" panose="02020603050405020304" pitchFamily="18" charset="0"/>
@@ -41953,7 +42158,7 @@
 </p:sld>
 </file>
 
-<file path=ppt/slides/slide44.xml><?xml version="1.0" encoding="utf-8"?>
+<file path=ppt/slides/slide45.xml><?xml version="1.0" encoding="utf-8"?>
 <p:sld xmlns:a="http://schemas.openxmlformats.org/drawingml/2006/main" xmlns:r="http://schemas.openxmlformats.org/officeDocument/2006/relationships" xmlns:p="http://schemas.openxmlformats.org/presentationml/2006/main">
   <p:cSld>
     <p:spTree>
@@ -42417,7 +42622,7 @@
                 <a:cs typeface="Times New Roman" panose="02020603050405020304" pitchFamily="18" charset="0"/>
               </a:rPr>
               <a:pPr/>
-              <a:t>44</a:t>
+              <a:t>45</a:t>
             </a:fld>
             <a:endParaRPr lang="en-US" sz="1400" b="1" dirty="0">
               <a:latin typeface="Times New Roman" panose="02020603050405020304" pitchFamily="18" charset="0"/>
@@ -42440,7 +42645,7 @@
 </p:sld>
 </file>
 
-<file path=ppt/slides/slide45.xml><?xml version="1.0" encoding="utf-8"?>
+<file path=ppt/slides/slide46.xml><?xml version="1.0" encoding="utf-8"?>
 <p:sld xmlns:a="http://schemas.openxmlformats.org/drawingml/2006/main" xmlns:r="http://schemas.openxmlformats.org/officeDocument/2006/relationships" xmlns:p="http://schemas.openxmlformats.org/presentationml/2006/main">
   <p:cSld>
     <p:spTree>
@@ -42706,7 +42911,7 @@
                 <a:cs typeface="Times New Roman" panose="02020603050405020304" pitchFamily="18" charset="0"/>
               </a:rPr>
               <a:pPr/>
-              <a:t>45</a:t>
+              <a:t>46</a:t>
             </a:fld>
             <a:endParaRPr lang="en-US" sz="1400" b="1" dirty="0">
               <a:latin typeface="Times New Roman" panose="02020603050405020304" pitchFamily="18" charset="0"/>
